--- a/ppt/presentation.pptx
+++ b/ppt/presentation.pptx
@@ -23,6 +23,9 @@
     <p:sldId id="271" r:id="rId22"/>
     <p:sldId id="272" r:id="rId23"/>
     <p:sldId id="273" r:id="rId24"/>
+    <p:sldId id="274" r:id="rId25"/>
+    <p:sldId id="275" r:id="rId26"/>
+    <p:sldId id="276" r:id="rId27"/>
   </p:sldIdLst>
   <p:sldSz cx="12191695" cy="6858000" type="screen4x3"/>
   <p:notesSz cx="6858000" cy="9144000"/>
@@ -3207,14 +3210,14 @@
           <a:p>
             <a:pPr algn="l"/>
             <a:r>
-              <a:rPr sz="4000" b="1">
+              <a:rPr sz="3600" b="1">
                 <a:solidFill>
                   <a:srgbClr val="FFFFFF"/>
                 </a:solidFill>
                 <a:latin typeface="맑은 고딕"/>
               </a:rPr>
-              <a:t>점수가 포화된 X-ray 이물 검출,
-점수 뒤의 진짜 성능을 검증하다</a:t>
+              <a:t>X-ray 이물 검출 모델 6종을 비교하고
+일반화·강건성까지 검증해 베스트 모델을 선정하다</a:t>
             </a:r>
           </a:p>
         </p:txBody>
@@ -3415,7 +3418,7 @@
                 </a:solidFill>
                 <a:latin typeface="맑은 고딕"/>
               </a:rPr>
-              <a:t>합성 점 결과: 옅은 점이 미탐지 조건이다</a:t>
+              <a:t>가짜 정상: 노이즈 보간에는 R50과 YOLO26n만 속지 않는다</a:t>
             </a:r>
           </a:p>
         </p:txBody>
@@ -3450,7 +3453,7 @@
                 </a:solidFill>
                 <a:latin typeface="맑은 고딕"/>
               </a:rPr>
-              <a:t>val 임계값에서는 D-FINE-N이 앞서지만 대부분 느슨한 임계값 효과, 맞추면 차이가 줄어든다</a:t>
+              <a:t>정상 이미지가 없어 결함의 점을 지운 이미지로 오경보를 쟀다</a:t>
             </a:r>
           </a:p>
         </p:txBody>
@@ -3520,14 +3523,14 @@
                 </a:solidFill>
                 <a:latin typeface="맑은 고딕"/>
               </a:rPr>
-              <a:t>합성 점 시험은 test 이미지가 바탕이며 참고용이다. 합성 점 AP와 오경보 예산 비교는 합성 이미지 자체로 계산한 분석용 수치다.</a:t>
+              <a:t>가짜 정상은 진짜 정상 제품이 아니다. 오경보율은 범위로 해석한다.</a:t>
             </a:r>
           </a:p>
         </p:txBody>
       </p:sp>
       <p:pic>
         <p:nvPicPr>
-          <p:cNvPr id="7" name="Picture 6" descr="fig3k_compare6.png"/>
+          <p:cNvPr id="7" name="Picture 6" descr="fig3l_robust6.png"/>
           <p:cNvPicPr>
             <a:picLocks noChangeAspect="1"/>
           </p:cNvPicPr>
@@ -3541,8 +3544,8 @@
         </p:blipFill>
         <p:spPr>
           <a:xfrm>
-            <a:off x="547460" y="1645919"/>
-            <a:ext cx="11066599" cy="3383280"/>
+            <a:off x="457200" y="1849795"/>
+            <a:ext cx="11247120" cy="3158409"/>
           </a:xfrm>
           <a:prstGeom prst="rect">
             <a:avLst/>
@@ -3557,8 +3560,8 @@
         </p:nvSpPr>
         <p:spPr>
           <a:xfrm>
-            <a:off x="640080" y="4983480"/>
-            <a:ext cx="10972800" cy="1645920"/>
+            <a:off x="640080" y="5120640"/>
+            <a:ext cx="10972800" cy="1554480"/>
           </a:xfrm>
           <a:prstGeom prst="rect">
             <a:avLst/>
@@ -3573,7 +3576,7 @@
           <a:p>
             <a:pPr>
               <a:spcAft>
-                <a:spcPts val="300"/>
+                <a:spcPts val="400"/>
               </a:spcAft>
             </a:pPr>
             <a:r>
@@ -3592,13 +3595,31 @@
                 </a:solidFill>
                 <a:latin typeface="맑은 고딕"/>
               </a:rPr>
-              <a:t>대비(둘레-점 밝기) 6 미만은 모든 모델이 거의 0%, 20 이상에서 약 77~89%</a:t>
+              <a:t>NS+노이즈 6px 오경보율: </a:t>
+            </a:r>
+            <a:r>
+              <a:rPr sz="1500" b="1">
+                <a:solidFill>
+                  <a:srgbClr val="222222"/>
+                </a:solidFill>
+                <a:latin typeface="맑은 고딕"/>
+              </a:rPr>
+              <a:t>R50 0.5%, YOLO26n 4.1%</a:t>
+            </a:r>
+            <a:r>
+              <a:rPr sz="1500" b="0">
+                <a:solidFill>
+                  <a:srgbClr val="222222"/>
+                </a:solidFill>
+                <a:latin typeface="맑은 고딕"/>
+              </a:rPr>
+              <a:t>, RT-DETR-l 37%, YOLOv3-tiny 39%, D-FINE-N 49%, MobileNetV3 64%</a:t>
             </a:r>
           </a:p>
           <a:p>
             <a:pPr>
               <a:spcAft>
-                <a:spcPts val="300"/>
+                <a:spcPts val="400"/>
               </a:spcAft>
             </a:pPr>
             <a:r>
@@ -3617,7 +3638,7 @@
                 </a:solidFill>
                 <a:latin typeface="맑은 고딕"/>
               </a:rPr>
-              <a:t>임계값과 무관한 합성 점 AP: </a:t>
+              <a:t>오경보는 대부분 </a:t>
             </a:r>
             <a:r>
               <a:rPr sz="1500" b="1">
@@ -3626,7 +3647,7 @@
                 </a:solidFill>
                 <a:latin typeface="맑은 고딕"/>
               </a:rPr>
-              <a:t>D-FINE-N 0.574 ≈ R50 0.567</a:t>
+              <a:t>지운 자리</a:t>
             </a:r>
             <a:r>
               <a:rPr sz="1500" b="0">
@@ -3635,41 +3656,7 @@
                 </a:solidFill>
                 <a:latin typeface="맑은 고딕"/>
               </a:rPr>
-              <a:t> &gt; YOLOv3-tiny 0.515 ≈ YOLO26n 0.501 &gt; RT-DETR-l 0.451 &gt;&gt; </a:t>
-            </a:r>
-            <a:r>
-              <a:rPr sz="1500" b="1">
-                <a:solidFill>
-                  <a:srgbClr val="222222"/>
-                </a:solidFill>
-                <a:latin typeface="맑은 고딕"/>
-              </a:rPr>
-              <a:t>MobileNetV3 0.262</a:t>
-            </a:r>
-          </a:p>
-          <a:p>
-            <a:pPr>
-              <a:spcAft>
-                <a:spcPts val="300"/>
-              </a:spcAft>
-            </a:pPr>
-            <a:r>
-              <a:rPr sz="1500" b="1">
-                <a:solidFill>
-                  <a:srgbClr val="2AA7B8"/>
-                </a:solidFill>
-                <a:latin typeface="맑은 고딕"/>
-              </a:rPr>
-              <a:t>• </a:t>
-            </a:r>
-            <a:r>
-              <a:rPr sz="1500" b="0">
-                <a:solidFill>
-                  <a:srgbClr val="222222"/>
-                </a:solidFill>
-                <a:latin typeface="맑은 고딕"/>
-              </a:rPr>
-              <a:t>3호기(대비 14 이상): MobileNetV3 4%, YOLO26n·RT-DETR-l 약 61%, R50·YOLOv3-tiny·D-FINE-N은 호기 차이가 작음</a:t>
+              <a:t>에서 발생, 분리도(AUC)는 MobileNet 0.842·D-FINE 0.900이 가장 나쁨</a:t>
             </a:r>
           </a:p>
         </p:txBody>
@@ -3765,7 +3752,7 @@
                 </a:solidFill>
                 <a:latin typeface="맑은 고딕"/>
               </a:rPr>
-              <a:t>호기·해상도: 뚜렷한 효과는 확인되지 않았다</a:t>
+              <a:t>합성 점: 작대기 안에만, 시드 42로 모두가 같게</a:t>
             </a:r>
           </a:p>
         </p:txBody>
@@ -3800,7 +3787,7 @@
                 </a:solidFill>
                 <a:latin typeface="맑은 고딕"/>
               </a:rPr>
-              <a:t>가장 낮은 그룹은 공식 라벨 박스가 76%여서 IoU 점수가 낮을 뿐이다</a:t>
+              <a:t>실제로는 놓침이 사실상 없어서, 미탐지 조건을 직접 만들어 시험했다</a:t>
             </a:r>
           </a:p>
         </p:txBody>
@@ -3842,7 +3829,7 @@
       </p:sp>
       <p:pic>
         <p:nvPicPr>
-          <p:cNvPr id="6" name="Picture 5" descr="fig3f_groups_chart.png"/>
+          <p:cNvPr id="6" name="Picture 5" descr="fig3m_synth_bars.png"/>
           <p:cNvPicPr>
             <a:picLocks noChangeAspect="1"/>
           </p:cNvPicPr>
@@ -3856,8 +3843,8 @@
         </p:blipFill>
         <p:spPr>
           <a:xfrm>
-            <a:off x="550398" y="1554480"/>
-            <a:ext cx="11060723" cy="3383279"/>
+            <a:off x="1181898" y="1645920"/>
+            <a:ext cx="4677083" cy="4846320"/>
           </a:xfrm>
           <a:prstGeom prst="rect">
             <a:avLst/>
@@ -3872,8 +3859,8 @@
         </p:nvSpPr>
         <p:spPr>
           <a:xfrm>
-            <a:off x="731520" y="5029200"/>
-            <a:ext cx="10789920" cy="1645920"/>
+            <a:off x="6766560" y="1783080"/>
+            <a:ext cx="5029200" cy="4572000"/>
           </a:xfrm>
           <a:prstGeom prst="rect">
             <a:avLst/>
@@ -3888,11 +3875,11 @@
           <a:p>
             <a:pPr>
               <a:spcAft>
-                <a:spcPts val="800"/>
+                <a:spcPts val="600"/>
               </a:spcAft>
             </a:pPr>
             <a:r>
-              <a:rPr sz="1600" b="1">
+              <a:rPr sz="1500" b="1">
                 <a:solidFill>
                   <a:srgbClr val="2AA7B8"/>
                 </a:solidFill>
@@ -3901,23 +3888,41 @@
               <a:t>• </a:t>
             </a:r>
             <a:r>
-              <a:rPr sz="1600" b="0">
-                <a:solidFill>
-                  <a:srgbClr val="222222"/>
-                </a:solidFill>
-                <a:latin typeface="맑은 고딕"/>
-              </a:rPr>
-              <a:t>해상도별 공식 라벨 박스 비율이 10~76%로 달라 라벨 구성이 섞인다. 공식 라벨 이미지끼리만 비교하면 F1이 0.956~0.977로 좁아지고 구간이 겹친다</a:t>
+              <a:rPr sz="1500" b="0">
+                <a:solidFill>
+                  <a:srgbClr val="222222"/>
+                </a:solidFill>
+                <a:latin typeface="맑은 고딕"/>
+              </a:rPr>
+              <a:t>실제 점을 지우고 영상에서 찾은 </a:t>
+            </a:r>
+            <a:r>
+              <a:rPr sz="1500" b="1">
+                <a:solidFill>
+                  <a:srgbClr val="222222"/>
+                </a:solidFill>
+                <a:latin typeface="맑은 고딕"/>
+              </a:rPr>
+              <a:t>작대기(막대) 안쪽</a:t>
+            </a:r>
+            <a:r>
+              <a:rPr sz="1500" b="0">
+                <a:solidFill>
+                  <a:srgbClr val="222222"/>
+                </a:solidFill>
+                <a:latin typeface="맑은 고딕"/>
+              </a:rPr>
+              <a:t>에만 val의 실제 점(투과율 조각)을 합성</a:t>
             </a:r>
           </a:p>
           <a:p>
             <a:pPr>
               <a:spcAft>
-                <a:spcPts val="800"/>
+                <a:spcPts val="600"/>
               </a:spcAft>
             </a:pPr>
             <a:r>
-              <a:rPr sz="1600" b="1">
+              <a:rPr sz="1500" b="1">
                 <a:solidFill>
                   <a:srgbClr val="2AA7B8"/>
                 </a:solidFill>
@@ -3926,31 +3931,133 @@
               <a:t>• </a:t>
             </a:r>
             <a:r>
-              <a:rPr sz="1600" b="0">
-                <a:solidFill>
-                  <a:srgbClr val="222222"/>
-                </a:solidFill>
-                <a:latin typeface="맑은 고딕"/>
-              </a:rPr>
-              <a:t>그룹별 표본이 작다(공식 라벨 이미지 호기별 20~36장). 합성 점에서 보인 3호기 약점은 </a:t>
-            </a:r>
-            <a:r>
-              <a:rPr sz="1600" b="1">
-                <a:solidFill>
-                  <a:srgbClr val="222222"/>
-                </a:solidFill>
-                <a:latin typeface="맑은 고딕"/>
-              </a:rPr>
-              <a:t>모델에 따라</a:t>
-            </a:r>
-            <a:r>
-              <a:rPr sz="1600" b="0">
-                <a:solidFill>
-                  <a:srgbClr val="222222"/>
-                </a:solidFill>
-                <a:latin typeface="맑은 고딕"/>
-              </a:rPr>
-              <a:t> 다르다(10번)</a:t>
+              <a:rPr sz="1500" b="0">
+                <a:solidFill>
+                  <a:srgbClr val="222222"/>
+                </a:solidFill>
+                <a:latin typeface="맑은 고딕"/>
+              </a:rPr>
+              <a:t>점의 </a:t>
+            </a:r>
+            <a:r>
+              <a:rPr sz="1500" b="1">
+                <a:solidFill>
+                  <a:srgbClr val="222222"/>
+                </a:solidFill>
+                <a:latin typeface="맑은 고딕"/>
+              </a:rPr>
+              <a:t>진하기(4단계) x 크기(3단계)</a:t>
+            </a:r>
+            <a:r>
+              <a:rPr sz="1500" b="0">
+                <a:solidFill>
+                  <a:srgbClr val="222222"/>
+                </a:solidFill>
+                <a:latin typeface="맑은 고딕"/>
+              </a:rPr>
+              <a:t>를 바꿔 옅은 점까지 시험</a:t>
+            </a:r>
+          </a:p>
+          <a:p>
+            <a:pPr>
+              <a:spcAft>
+                <a:spcPts val="600"/>
+              </a:spcAft>
+            </a:pPr>
+            <a:r>
+              <a:rPr sz="1500" b="1">
+                <a:solidFill>
+                  <a:srgbClr val="2AA7B8"/>
+                </a:solidFill>
+                <a:latin typeface="맑은 고딕"/>
+              </a:rPr>
+              <a:t>• </a:t>
+            </a:r>
+            <a:r>
+              <a:rPr sz="1500" b="0">
+                <a:solidFill>
+                  <a:srgbClr val="222222"/>
+                </a:solidFill>
+                <a:latin typeface="맑은 고딕"/>
+              </a:rPr>
+              <a:t>test 바탕 386장, 점 1,436개. 실제 점 663개가 </a:t>
+            </a:r>
+            <a:r>
+              <a:rPr sz="1500" b="1">
+                <a:solidFill>
+                  <a:srgbClr val="222222"/>
+                </a:solidFill>
+                <a:latin typeface="맑은 고딕"/>
+              </a:rPr>
+              <a:t>전부 검출된 막대에 닿음</a:t>
+            </a:r>
+          </a:p>
+          <a:p>
+            <a:pPr>
+              <a:spcAft>
+                <a:spcPts val="600"/>
+              </a:spcAft>
+            </a:pPr>
+            <a:r>
+              <a:rPr sz="1500" b="1">
+                <a:solidFill>
+                  <a:srgbClr val="2AA7B8"/>
+                </a:solidFill>
+                <a:latin typeface="맑은 고딕"/>
+              </a:rPr>
+              <a:t>• </a:t>
+            </a:r>
+            <a:r>
+              <a:rPr sz="1500" b="1">
+                <a:solidFill>
+                  <a:srgbClr val="222222"/>
+                </a:solidFill>
+                <a:latin typeface="맑은 고딕"/>
+              </a:rPr>
+              <a:t>시드 42 + 이미지 이름별 시드</a:t>
+            </a:r>
+            <a:r>
+              <a:rPr sz="1500" b="0">
+                <a:solidFill>
+                  <a:srgbClr val="222222"/>
+                </a:solidFill>
+                <a:latin typeface="맑은 고딕"/>
+              </a:rPr>
+              <a:t>로 고정, 기준본과 --verify로 팀원 PC에서 같은 데이터인지 확인</a:t>
+            </a:r>
+          </a:p>
+          <a:p>
+            <a:pPr>
+              <a:spcAft>
+                <a:spcPts val="600"/>
+              </a:spcAft>
+            </a:pPr>
+            <a:r>
+              <a:rPr sz="1500" b="1">
+                <a:solidFill>
+                  <a:srgbClr val="2AA7B8"/>
+                </a:solidFill>
+                <a:latin typeface="맑은 고딕"/>
+              </a:rPr>
+              <a:t>• </a:t>
+            </a:r>
+            <a:r>
+              <a:rPr sz="1500" b="0">
+                <a:solidFill>
+                  <a:srgbClr val="222222"/>
+                </a:solidFill>
+                <a:latin typeface="맑은 고딕"/>
+              </a:rPr>
+              <a:t>합성은 실제보다 약 10%p 덜 현실적 → 절대 수치가 아닌 </a:t>
+            </a:r>
+            <a:r>
+              <a:rPr sz="1500" b="1">
+                <a:solidFill>
+                  <a:srgbClr val="222222"/>
+                </a:solidFill>
+                <a:latin typeface="맑은 고딕"/>
+              </a:rPr>
+              <a:t>상대 비교</a:t>
             </a:r>
           </a:p>
         </p:txBody>
@@ -4046,7 +4153,7 @@
                 </a:solidFill>
                 <a:latin typeface="맑은 고딕"/>
               </a:rPr>
-              <a:t>최종 모델: D-FINE-N</a:t>
+              <a:t>합성 점 결과: 옅은 점이 미탐지 조건이다</a:t>
             </a:r>
           </a:p>
         </p:txBody>
@@ -4081,7 +4188,7 @@
                 </a:solidFill>
                 <a:latin typeface="맑은 고딕"/>
               </a:rPr>
-              <a:t>val 동률 선두 + 미탐지 강건성 최상 + 작다(3.7M)</a:t>
+              <a:t>val 임계값에서는 D-FINE-N이 앞서지만 대부분 느슨한 임계값 효과, 맞추면 차이가 줄어든다</a:t>
             </a:r>
           </a:p>
         </p:txBody>
@@ -4151,627 +4258,35 @@
                 </a:solidFill>
                 <a:latin typeface="맑은 고딕"/>
               </a:rPr>
-              <a:t>선정 기준 ①②③은 팀원 모델 추가 전에 정했다. '미탐지 우선'은 결과를 본 뒤 정한 우선순위다. 상세는 docs/analysis.md 5절.</a:t>
-            </a:r>
-          </a:p>
-        </p:txBody>
-      </p:sp>
-      <p:graphicFrame>
-        <p:nvGraphicFramePr>
-          <p:cNvPr id="7" name="Table 6"/>
-          <p:cNvGraphicFramePr>
-            <a:graphicFrameLocks noGrp="1"/>
-          </p:cNvGraphicFramePr>
+              <a:t>합성 점 시험은 test 이미지가 바탕이며 참고용이다. 합성 점 AP와 오경보 예산 비교는 합성 이미지 자체로 계산한 분석용 수치다.</a:t>
+            </a:r>
+          </a:p>
+        </p:txBody>
+      </p:sp>
+      <p:pic>
+        <p:nvPicPr>
+          <p:cNvPr id="7" name="Picture 6" descr="fig3k_compare6.png"/>
+          <p:cNvPicPr>
+            <a:picLocks noChangeAspect="1"/>
+          </p:cNvPicPr>
           <p:nvPr/>
-        </p:nvGraphicFramePr>
-        <p:xfrm>
-          <a:off x="548640" y="1737360"/>
-          <a:ext cx="7498075" cy="3291840"/>
-        </p:xfrm>
-        <a:graphic>
-          <a:graphicData uri="http://schemas.openxmlformats.org/drawingml/2006/table">
-            <a:tbl>
-              <a:tblPr firstRow="1" bandRow="1">
-                <a:tableStyleId>{5C22544A-7EE6-4342-B048-85BDC9FD1C3A}</a:tableStyleId>
-              </a:tblPr>
-              <a:tblGrid>
-                <a:gridCol w="1916175"/>
-                <a:gridCol w="1749551"/>
-                <a:gridCol w="1083055"/>
-                <a:gridCol w="1666239"/>
-                <a:gridCol w="1083055"/>
-              </a:tblGrid>
-              <a:tr h="658368">
-                <a:tc>
-                  <a:txBody>
-                    <a:bodyPr/>
-                    <a:lstStyle/>
-                    <a:p>
-                      <a:pPr algn="l"/>
-                      <a:r>
-                        <a:rPr sz="1500" b="1">
-                          <a:solidFill>
-                            <a:srgbClr val="FFFFFF"/>
-                          </a:solidFill>
-                          <a:latin typeface="맑은 고딕"/>
-                        </a:rPr>
-                        <a:t>모델</a:t>
-                      </a:r>
-                    </a:p>
-                  </a:txBody>
-                  <a:tcPr anchor="ctr" marL="54864" marR="54864">
-                    <a:solidFill>
-                      <a:srgbClr val="1F3A5F"/>
-                    </a:solidFill>
-                  </a:tcPr>
-                </a:tc>
-                <a:tc>
-                  <a:txBody>
-                    <a:bodyPr/>
-                    <a:lstStyle/>
-                    <a:p>
-                      <a:pPr algn="ctr"/>
-                      <a:r>
-                        <a:rPr sz="1500" b="1">
-                          <a:solidFill>
-                            <a:srgbClr val="FFFFFF"/>
-                          </a:solidFill>
-                          <a:latin typeface="맑은 고딕"/>
-                        </a:rPr>
-                        <a:t>val mAP50-95
-(전체 / 공식만)</a:t>
-                      </a:r>
-                    </a:p>
-                  </a:txBody>
-                  <a:tcPr anchor="ctr" marL="54864" marR="54864">
-                    <a:solidFill>
-                      <a:srgbClr val="1F3A5F"/>
-                    </a:solidFill>
-                  </a:tcPr>
-                </a:tc>
-                <a:tc>
-                  <a:txBody>
-                    <a:bodyPr/>
-                    <a:lstStyle/>
-                    <a:p>
-                      <a:pPr algn="ctr"/>
-                      <a:r>
-                        <a:rPr sz="1500" b="1">
-                          <a:solidFill>
-                            <a:srgbClr val="FFFFFF"/>
-                          </a:solidFill>
-                          <a:latin typeface="맑은 고딕"/>
-                        </a:rPr>
-                        <a:t>합성 점 AP</a:t>
-                      </a:r>
-                    </a:p>
-                  </a:txBody>
-                  <a:tcPr anchor="ctr" marL="54864" marR="54864">
-                    <a:solidFill>
-                      <a:srgbClr val="1F3A5F"/>
-                    </a:solidFill>
-                  </a:tcPr>
-                </a:tc>
-                <a:tc>
-                  <a:txBody>
-                    <a:bodyPr/>
-                    <a:lstStyle/>
-                    <a:p>
-                      <a:pPr algn="ctr"/>
-                      <a:r>
-                        <a:rPr sz="1500" b="1">
-                          <a:solidFill>
-                            <a:srgbClr val="FFFFFF"/>
-                          </a:solidFill>
-                          <a:latin typeface="맑은 고딕"/>
-                        </a:rPr>
-                        <a:t>가짜 정상 오경보
-(NS+노이즈 6)</a:t>
-                      </a:r>
-                    </a:p>
-                  </a:txBody>
-                  <a:tcPr anchor="ctr" marL="54864" marR="54864">
-                    <a:solidFill>
-                      <a:srgbClr val="1F3A5F"/>
-                    </a:solidFill>
-                  </a:tcPr>
-                </a:tc>
-                <a:tc>
-                  <a:txBody>
-                    <a:bodyPr/>
-                    <a:lstStyle/>
-                    <a:p>
-                      <a:pPr algn="ctr"/>
-                      <a:r>
-                        <a:rPr sz="1500" b="1">
-                          <a:solidFill>
-                            <a:srgbClr val="FFFFFF"/>
-                          </a:solidFill>
-                          <a:latin typeface="맑은 고딕"/>
-                        </a:rPr>
-                        <a:t>파라미터</a:t>
-                      </a:r>
-                    </a:p>
-                  </a:txBody>
-                  <a:tcPr anchor="ctr" marL="54864" marR="54864">
-                    <a:solidFill>
-                      <a:srgbClr val="1F3A5F"/>
-                    </a:solidFill>
-                  </a:tcPr>
-                </a:tc>
-              </a:tr>
-              <a:tr h="658368">
-                <a:tc>
-                  <a:txBody>
-                    <a:bodyPr/>
-                    <a:lstStyle/>
-                    <a:p>
-                      <a:pPr algn="l"/>
-                      <a:r>
-                        <a:rPr sz="1500" b="1">
-                          <a:solidFill>
-                            <a:srgbClr val="222222"/>
-                          </a:solidFill>
-                          <a:latin typeface="맑은 고딕"/>
-                        </a:rPr>
-                        <a:t>D-FINE-N (선정)</a:t>
-                      </a:r>
-                    </a:p>
-                  </a:txBody>
-                  <a:tcPr anchor="ctr" marL="54864" marR="54864">
-                    <a:solidFill>
-                      <a:srgbClr val="DDF1F4"/>
-                    </a:solidFill>
-                  </a:tcPr>
-                </a:tc>
-                <a:tc>
-                  <a:txBody>
-                    <a:bodyPr/>
-                    <a:lstStyle/>
-                    <a:p>
-                      <a:pPr algn="ctr"/>
-                      <a:r>
-                        <a:rPr sz="1500" b="1">
-                          <a:solidFill>
-                            <a:srgbClr val="222222"/>
-                          </a:solidFill>
-                          <a:latin typeface="맑은 고딕"/>
-                        </a:rPr>
-                        <a:t>0.655 / 0.343</a:t>
-                      </a:r>
-                    </a:p>
-                  </a:txBody>
-                  <a:tcPr anchor="ctr" marL="54864" marR="54864">
-                    <a:solidFill>
-                      <a:srgbClr val="DDF1F4"/>
-                    </a:solidFill>
-                  </a:tcPr>
-                </a:tc>
-                <a:tc>
-                  <a:txBody>
-                    <a:bodyPr/>
-                    <a:lstStyle/>
-                    <a:p>
-                      <a:pPr algn="ctr"/>
-                      <a:r>
-                        <a:rPr sz="1500" b="1">
-                          <a:solidFill>
-                            <a:srgbClr val="222222"/>
-                          </a:solidFill>
-                          <a:latin typeface="맑은 고딕"/>
-                        </a:rPr>
-                        <a:t>0.574</a:t>
-                      </a:r>
-                    </a:p>
-                  </a:txBody>
-                  <a:tcPr anchor="ctr" marL="54864" marR="54864">
-                    <a:solidFill>
-                      <a:srgbClr val="DDF1F4"/>
-                    </a:solidFill>
-                  </a:tcPr>
-                </a:tc>
-                <a:tc>
-                  <a:txBody>
-                    <a:bodyPr/>
-                    <a:lstStyle/>
-                    <a:p>
-                      <a:pPr algn="ctr"/>
-                      <a:r>
-                        <a:rPr sz="1500" b="1">
-                          <a:solidFill>
-                            <a:srgbClr val="222222"/>
-                          </a:solidFill>
-                          <a:latin typeface="맑은 고딕"/>
-                        </a:rPr>
-                        <a:t>49.3%</a:t>
-                      </a:r>
-                    </a:p>
-                  </a:txBody>
-                  <a:tcPr anchor="ctr" marL="54864" marR="54864">
-                    <a:solidFill>
-                      <a:srgbClr val="DDF1F4"/>
-                    </a:solidFill>
-                  </a:tcPr>
-                </a:tc>
-                <a:tc>
-                  <a:txBody>
-                    <a:bodyPr/>
-                    <a:lstStyle/>
-                    <a:p>
-                      <a:pPr algn="ctr"/>
-                      <a:r>
-                        <a:rPr sz="1500" b="1">
-                          <a:solidFill>
-                            <a:srgbClr val="222222"/>
-                          </a:solidFill>
-                          <a:latin typeface="맑은 고딕"/>
-                        </a:rPr>
-                        <a:t>3.7M</a:t>
-                      </a:r>
-                    </a:p>
-                  </a:txBody>
-                  <a:tcPr anchor="ctr" marL="54864" marR="54864">
-                    <a:solidFill>
-                      <a:srgbClr val="DDF1F4"/>
-                    </a:solidFill>
-                  </a:tcPr>
-                </a:tc>
-              </a:tr>
-              <a:tr h="658368">
-                <a:tc>
-                  <a:txBody>
-                    <a:bodyPr/>
-                    <a:lstStyle/>
-                    <a:p>
-                      <a:pPr algn="l"/>
-                      <a:r>
-                        <a:rPr sz="1500" b="0">
-                          <a:solidFill>
-                            <a:srgbClr val="222222"/>
-                          </a:solidFill>
-                          <a:latin typeface="맑은 고딕"/>
-                        </a:rPr>
-                        <a:t>RT-DETR-l</a:t>
-                      </a:r>
-                    </a:p>
-                  </a:txBody>
-                  <a:tcPr anchor="ctr" marL="54864" marR="54864">
-                    <a:solidFill>
-                      <a:srgbClr val="F2F5FA"/>
-                    </a:solidFill>
-                  </a:tcPr>
-                </a:tc>
-                <a:tc>
-                  <a:txBody>
-                    <a:bodyPr/>
-                    <a:lstStyle/>
-                    <a:p>
-                      <a:pPr algn="ctr"/>
-                      <a:r>
-                        <a:rPr sz="1500" b="0">
-                          <a:solidFill>
-                            <a:srgbClr val="222222"/>
-                          </a:solidFill>
-                          <a:latin typeface="맑은 고딕"/>
-                        </a:rPr>
-                        <a:t>0.662 / 0.357</a:t>
-                      </a:r>
-                    </a:p>
-                  </a:txBody>
-                  <a:tcPr anchor="ctr" marL="54864" marR="54864">
-                    <a:solidFill>
-                      <a:srgbClr val="F2F5FA"/>
-                    </a:solidFill>
-                  </a:tcPr>
-                </a:tc>
-                <a:tc>
-                  <a:txBody>
-                    <a:bodyPr/>
-                    <a:lstStyle/>
-                    <a:p>
-                      <a:pPr algn="ctr"/>
-                      <a:r>
-                        <a:rPr sz="1500" b="0">
-                          <a:solidFill>
-                            <a:srgbClr val="222222"/>
-                          </a:solidFill>
-                          <a:latin typeface="맑은 고딕"/>
-                        </a:rPr>
-                        <a:t>0.451</a:t>
-                      </a:r>
-                    </a:p>
-                  </a:txBody>
-                  <a:tcPr anchor="ctr" marL="54864" marR="54864">
-                    <a:solidFill>
-                      <a:srgbClr val="F2F5FA"/>
-                    </a:solidFill>
-                  </a:tcPr>
-                </a:tc>
-                <a:tc>
-                  <a:txBody>
-                    <a:bodyPr/>
-                    <a:lstStyle/>
-                    <a:p>
-                      <a:pPr algn="ctr"/>
-                      <a:r>
-                        <a:rPr sz="1500" b="0">
-                          <a:solidFill>
-                            <a:srgbClr val="222222"/>
-                          </a:solidFill>
-                          <a:latin typeface="맑은 고딕"/>
-                        </a:rPr>
-                        <a:t>36.6%</a:t>
-                      </a:r>
-                    </a:p>
-                  </a:txBody>
-                  <a:tcPr anchor="ctr" marL="54864" marR="54864">
-                    <a:solidFill>
-                      <a:srgbClr val="F2F5FA"/>
-                    </a:solidFill>
-                  </a:tcPr>
-                </a:tc>
-                <a:tc>
-                  <a:txBody>
-                    <a:bodyPr/>
-                    <a:lstStyle/>
-                    <a:p>
-                      <a:pPr algn="ctr"/>
-                      <a:r>
-                        <a:rPr sz="1500" b="0">
-                          <a:solidFill>
-                            <a:srgbClr val="222222"/>
-                          </a:solidFill>
-                          <a:latin typeface="맑은 고딕"/>
-                        </a:rPr>
-                        <a:t>32.8M</a:t>
-                      </a:r>
-                    </a:p>
-                  </a:txBody>
-                  <a:tcPr anchor="ctr" marL="54864" marR="54864">
-                    <a:solidFill>
-                      <a:srgbClr val="F2F5FA"/>
-                    </a:solidFill>
-                  </a:tcPr>
-                </a:tc>
-              </a:tr>
-              <a:tr h="658368">
-                <a:tc>
-                  <a:txBody>
-                    <a:bodyPr/>
-                    <a:lstStyle/>
-                    <a:p>
-                      <a:pPr algn="l"/>
-                      <a:r>
-                        <a:rPr sz="1500" b="0">
-                          <a:solidFill>
-                            <a:srgbClr val="222222"/>
-                          </a:solidFill>
-                          <a:latin typeface="맑은 고딕"/>
-                        </a:rPr>
-                        <a:t>R50</a:t>
-                      </a:r>
-                    </a:p>
-                  </a:txBody>
-                  <a:tcPr anchor="ctr" marL="54864" marR="54864">
-                    <a:solidFill>
-                      <a:srgbClr val="FFFFFF"/>
-                    </a:solidFill>
-                  </a:tcPr>
-                </a:tc>
-                <a:tc>
-                  <a:txBody>
-                    <a:bodyPr/>
-                    <a:lstStyle/>
-                    <a:p>
-                      <a:pPr algn="ctr"/>
-                      <a:r>
-                        <a:rPr sz="1500" b="0">
-                          <a:solidFill>
-                            <a:srgbClr val="222222"/>
-                          </a:solidFill>
-                          <a:latin typeface="맑은 고딕"/>
-                        </a:rPr>
-                        <a:t>0.615 / 0.337</a:t>
-                      </a:r>
-                    </a:p>
-                  </a:txBody>
-                  <a:tcPr anchor="ctr" marL="54864" marR="54864">
-                    <a:solidFill>
-                      <a:srgbClr val="FFFFFF"/>
-                    </a:solidFill>
-                  </a:tcPr>
-                </a:tc>
-                <a:tc>
-                  <a:txBody>
-                    <a:bodyPr/>
-                    <a:lstStyle/>
-                    <a:p>
-                      <a:pPr algn="ctr"/>
-                      <a:r>
-                        <a:rPr sz="1500" b="0">
-                          <a:solidFill>
-                            <a:srgbClr val="222222"/>
-                          </a:solidFill>
-                          <a:latin typeface="맑은 고딕"/>
-                        </a:rPr>
-                        <a:t>0.567</a:t>
-                      </a:r>
-                    </a:p>
-                  </a:txBody>
-                  <a:tcPr anchor="ctr" marL="54864" marR="54864">
-                    <a:solidFill>
-                      <a:srgbClr val="FFFFFF"/>
-                    </a:solidFill>
-                  </a:tcPr>
-                </a:tc>
-                <a:tc>
-                  <a:txBody>
-                    <a:bodyPr/>
-                    <a:lstStyle/>
-                    <a:p>
-                      <a:pPr algn="ctr"/>
-                      <a:r>
-                        <a:rPr sz="1500" b="0">
-                          <a:solidFill>
-                            <a:srgbClr val="222222"/>
-                          </a:solidFill>
-                          <a:latin typeface="맑은 고딕"/>
-                        </a:rPr>
-                        <a:t>0.5%</a:t>
-                      </a:r>
-                    </a:p>
-                  </a:txBody>
-                  <a:tcPr anchor="ctr" marL="54864" marR="54864">
-                    <a:solidFill>
-                      <a:srgbClr val="FFFFFF"/>
-                    </a:solidFill>
-                  </a:tcPr>
-                </a:tc>
-                <a:tc>
-                  <a:txBody>
-                    <a:bodyPr/>
-                    <a:lstStyle/>
-                    <a:p>
-                      <a:pPr algn="ctr"/>
-                      <a:r>
-                        <a:rPr sz="1500" b="0">
-                          <a:solidFill>
-                            <a:srgbClr val="222222"/>
-                          </a:solidFill>
-                          <a:latin typeface="맑은 고딕"/>
-                        </a:rPr>
-                        <a:t>41.4M</a:t>
-                      </a:r>
-                    </a:p>
-                  </a:txBody>
-                  <a:tcPr anchor="ctr" marL="54864" marR="54864">
-                    <a:solidFill>
-                      <a:srgbClr val="FFFFFF"/>
-                    </a:solidFill>
-                  </a:tcPr>
-                </a:tc>
-              </a:tr>
-              <a:tr h="658368">
-                <a:tc>
-                  <a:txBody>
-                    <a:bodyPr/>
-                    <a:lstStyle/>
-                    <a:p>
-                      <a:pPr algn="l"/>
-                      <a:r>
-                        <a:rPr sz="1500" b="0">
-                          <a:solidFill>
-                            <a:srgbClr val="222222"/>
-                          </a:solidFill>
-                          <a:latin typeface="맑은 고딕"/>
-                        </a:rPr>
-                        <a:t>YOLO26n</a:t>
-                      </a:r>
-                    </a:p>
-                  </a:txBody>
-                  <a:tcPr anchor="ctr" marL="54864" marR="54864">
-                    <a:solidFill>
-                      <a:srgbClr val="F2F5FA"/>
-                    </a:solidFill>
-                  </a:tcPr>
-                </a:tc>
-                <a:tc>
-                  <a:txBody>
-                    <a:bodyPr/>
-                    <a:lstStyle/>
-                    <a:p>
-                      <a:pPr algn="ctr"/>
-                      <a:r>
-                        <a:rPr sz="1500" b="0">
-                          <a:solidFill>
-                            <a:srgbClr val="222222"/>
-                          </a:solidFill>
-                          <a:latin typeface="맑은 고딕"/>
-                        </a:rPr>
-                        <a:t>0.642 / 0.314</a:t>
-                      </a:r>
-                    </a:p>
-                  </a:txBody>
-                  <a:tcPr anchor="ctr" marL="54864" marR="54864">
-                    <a:solidFill>
-                      <a:srgbClr val="F2F5FA"/>
-                    </a:solidFill>
-                  </a:tcPr>
-                </a:tc>
-                <a:tc>
-                  <a:txBody>
-                    <a:bodyPr/>
-                    <a:lstStyle/>
-                    <a:p>
-                      <a:pPr algn="ctr"/>
-                      <a:r>
-                        <a:rPr sz="1500" b="0">
-                          <a:solidFill>
-                            <a:srgbClr val="222222"/>
-                          </a:solidFill>
-                          <a:latin typeface="맑은 고딕"/>
-                        </a:rPr>
-                        <a:t>0.501</a:t>
-                      </a:r>
-                    </a:p>
-                  </a:txBody>
-                  <a:tcPr anchor="ctr" marL="54864" marR="54864">
-                    <a:solidFill>
-                      <a:srgbClr val="F2F5FA"/>
-                    </a:solidFill>
-                  </a:tcPr>
-                </a:tc>
-                <a:tc>
-                  <a:txBody>
-                    <a:bodyPr/>
-                    <a:lstStyle/>
-                    <a:p>
-                      <a:pPr algn="ctr"/>
-                      <a:r>
-                        <a:rPr sz="1500" b="0">
-                          <a:solidFill>
-                            <a:srgbClr val="222222"/>
-                          </a:solidFill>
-                          <a:latin typeface="맑은 고딕"/>
-                        </a:rPr>
-                        <a:t>4.1%</a:t>
-                      </a:r>
-                    </a:p>
-                  </a:txBody>
-                  <a:tcPr anchor="ctr" marL="54864" marR="54864">
-                    <a:solidFill>
-                      <a:srgbClr val="F2F5FA"/>
-                    </a:solidFill>
-                  </a:tcPr>
-                </a:tc>
-                <a:tc>
-                  <a:txBody>
-                    <a:bodyPr/>
-                    <a:lstStyle/>
-                    <a:p>
-                      <a:pPr algn="ctr"/>
-                      <a:r>
-                        <a:rPr sz="1500" b="0">
-                          <a:solidFill>
-                            <a:srgbClr val="222222"/>
-                          </a:solidFill>
-                          <a:latin typeface="맑은 고딕"/>
-                        </a:rPr>
-                        <a:t>2.5M</a:t>
-                      </a:r>
-                    </a:p>
-                  </a:txBody>
-                  <a:tcPr anchor="ctr" marL="54864" marR="54864">
-                    <a:solidFill>
-                      <a:srgbClr val="F2F5FA"/>
-                    </a:solidFill>
-                  </a:tcPr>
-                </a:tc>
-              </a:tr>
-            </a:tbl>
-          </a:graphicData>
-        </a:graphic>
-      </p:graphicFrame>
+        </p:nvPicPr>
+        <p:blipFill>
+          <a:blip r:embed="rId2"/>
+          <a:stretch>
+            <a:fillRect/>
+          </a:stretch>
+        </p:blipFill>
+        <p:spPr>
+          <a:xfrm>
+            <a:off x="547460" y="1645919"/>
+            <a:ext cx="11066599" cy="3383280"/>
+          </a:xfrm>
+          <a:prstGeom prst="rect">
+            <a:avLst/>
+          </a:prstGeom>
+        </p:spPr>
+      </p:pic>
       <p:sp>
         <p:nvSpPr>
           <p:cNvPr id="8" name="TextBox 7"/>
@@ -4780,8 +4295,8 @@
         </p:nvSpPr>
         <p:spPr>
           <a:xfrm>
-            <a:off x="548640" y="4983480"/>
-            <a:ext cx="7406640" cy="1737360"/>
+            <a:off x="640080" y="4983480"/>
+            <a:ext cx="10972800" cy="1645920"/>
           </a:xfrm>
           <a:prstGeom prst="rect">
             <a:avLst/>
@@ -4796,7 +4311,7 @@
           <a:p>
             <a:pPr>
               <a:spcAft>
-                <a:spcPts val="400"/>
+                <a:spcPts val="300"/>
               </a:spcAft>
             </a:pPr>
             <a:r>
@@ -4809,28 +4324,19 @@
               <a:t>• </a:t>
             </a:r>
             <a:r>
-              <a:rPr sz="1500" b="1">
-                <a:solidFill>
-                  <a:srgbClr val="222222"/>
-                </a:solidFill>
-                <a:latin typeface="맑은 고딕"/>
-              </a:rPr>
-              <a:t>① 동률 선두</a:t>
-            </a:r>
-            <a:r>
               <a:rPr sz="1500" b="0">
                 <a:solidFill>
                   <a:srgbClr val="222222"/>
                 </a:solidFill>
                 <a:latin typeface="맑은 고딕"/>
               </a:rPr>
-              <a:t>: 전체 val에서 RT-DETR-l과 차이 −0.008 (95% 구간 −0.016~0.000)</a:t>
+              <a:t>대비(둘레-점 밝기) 6 미만은 모든 모델이 거의 0%, 20 이상에서 약 77~89%</a:t>
             </a:r>
           </a:p>
           <a:p>
             <a:pPr>
               <a:spcAft>
-                <a:spcPts val="400"/>
+                <a:spcPts val="300"/>
               </a:spcAft>
             </a:pPr>
             <a:r>
@@ -4843,13 +4349,22 @@
               <a:t>• </a:t>
             </a:r>
             <a:r>
+              <a:rPr sz="1500" b="0">
+                <a:solidFill>
+                  <a:srgbClr val="222222"/>
+                </a:solidFill>
+                <a:latin typeface="맑은 고딕"/>
+              </a:rPr>
+              <a:t>임계값과 무관한 합성 점 AP: </a:t>
+            </a:r>
+            <a:r>
               <a:rPr sz="1500" b="1">
                 <a:solidFill>
                   <a:srgbClr val="222222"/>
                 </a:solidFill>
                 <a:latin typeface="맑은 고딕"/>
               </a:rPr>
-              <a:t>② 강건성</a:t>
+              <a:t>D-FINE-N 0.574 ≈ R50 0.567</a:t>
             </a:r>
             <a:r>
               <a:rPr sz="1500" b="0">
@@ -4858,7 +4373,7 @@
                 </a:solidFill>
                 <a:latin typeface="맑은 고딕"/>
               </a:rPr>
-              <a:t>: 미탐지 쪽은 D-FINE-N, 오경보 쪽은 RT-DETR-l이 낫다 → 놓침이 더 비싸다고 보아 </a:t>
+              <a:t> &gt; YOLOv3-tiny 0.515 ≈ YOLO26n 0.501 &gt; RT-DETR-l 0.451 &gt;&gt; </a:t>
             </a:r>
             <a:r>
               <a:rPr sz="1500" b="1">
@@ -4867,13 +4382,13 @@
                 </a:solidFill>
                 <a:latin typeface="맑은 고딕"/>
               </a:rPr>
-              <a:t>미탐지 우선</a:t>
+              <a:t>MobileNetV3 0.262</a:t>
             </a:r>
           </a:p>
           <a:p>
             <a:pPr>
               <a:spcAft>
-                <a:spcPts val="400"/>
+                <a:spcPts val="300"/>
               </a:spcAft>
             </a:pPr>
             <a:r>
@@ -4886,163 +4401,13 @@
               <a:t>• </a:t>
             </a:r>
             <a:r>
-              <a:rPr sz="1500" b="1">
-                <a:solidFill>
-                  <a:srgbClr val="222222"/>
-                </a:solidFill>
-                <a:latin typeface="맑은 고딕"/>
-              </a:rPr>
-              <a:t>③ 크기</a:t>
-            </a:r>
-            <a:r>
               <a:rPr sz="1500" b="0">
                 <a:solidFill>
                   <a:srgbClr val="222222"/>
                 </a:solidFill>
                 <a:latin typeface="맑은 고딕"/>
               </a:rPr>
-              <a:t>: RT-DETR-l의 약 1/9</a:t>
-            </a:r>
-          </a:p>
-        </p:txBody>
-      </p:sp>
-      <p:sp>
-        <p:nvSpPr>
-          <p:cNvPr id="9" name="TextBox 8"/>
-          <p:cNvSpPr txBox="1"/>
-          <p:nvPr/>
-        </p:nvSpPr>
-        <p:spPr>
-          <a:xfrm>
-            <a:off x="8275320" y="1783080"/>
-            <a:ext cx="3566160" cy="4572000"/>
-          </a:xfrm>
-          <a:prstGeom prst="rect">
-            <a:avLst/>
-          </a:prstGeom>
-          <a:noFill/>
-        </p:spPr>
-        <p:txBody>
-          <a:bodyPr wrap="square" lIns="45720" rIns="45720">
-            <a:spAutoFit/>
-          </a:bodyPr>
-          <a:lstStyle/>
-          <a:p>
-            <a:pPr>
-              <a:spcAft>
-                <a:spcPts val="600"/>
-              </a:spcAft>
-            </a:pPr>
-            <a:r>
-              <a:rPr sz="1500" b="1">
-                <a:solidFill>
-                  <a:srgbClr val="2AA7B8"/>
-                </a:solidFill>
-                <a:latin typeface="맑은 고딕"/>
-              </a:rPr>
-              <a:t>• </a:t>
-            </a:r>
-            <a:r>
-              <a:rPr sz="1500" b="0">
-                <a:solidFill>
-                  <a:srgbClr val="222222"/>
-                </a:solidFill>
-                <a:latin typeface="맑은 고딕"/>
-              </a:rPr>
-              <a:t>R50·YOLO26n은 val에서 유의하게 낮음(공식 라벨만이면 R50은 동률)</a:t>
-            </a:r>
-          </a:p>
-          <a:p>
-            <a:pPr>
-              <a:spcAft>
-                <a:spcPts val="600"/>
-              </a:spcAft>
-            </a:pPr>
-            <a:r>
-              <a:rPr sz="1500" b="1">
-                <a:solidFill>
-                  <a:srgbClr val="2AA7B8"/>
-                </a:solidFill>
-                <a:latin typeface="맑은 고딕"/>
-              </a:rPr>
-              <a:t>• </a:t>
-            </a:r>
-            <a:r>
-              <a:rPr sz="1500" b="1">
-                <a:solidFill>
-                  <a:srgbClr val="222222"/>
-                </a:solidFill>
-                <a:latin typeface="맑은 고딕"/>
-              </a:rPr>
-              <a:t>약점</a:t>
-            </a:r>
-            <a:r>
-              <a:rPr sz="1500" b="0">
-                <a:solidFill>
-                  <a:srgbClr val="222222"/>
-                </a:solidFill>
-                <a:latin typeface="맑은 고딕"/>
-              </a:rPr>
-              <a:t>: 노이즈 보간 오경보 49%, 신뢰도가 0.9 근처에서 포화</a:t>
-            </a:r>
-          </a:p>
-          <a:p>
-            <a:pPr>
-              <a:spcAft>
-                <a:spcPts val="600"/>
-              </a:spcAft>
-            </a:pPr>
-            <a:r>
-              <a:rPr sz="1500" b="1">
-                <a:solidFill>
-                  <a:srgbClr val="2AA7B8"/>
-                </a:solidFill>
-                <a:latin typeface="맑은 고딕"/>
-              </a:rPr>
-              <a:t>• </a:t>
-            </a:r>
-            <a:r>
-              <a:rPr sz="1500" b="1">
-                <a:solidFill>
-                  <a:srgbClr val="222222"/>
-                </a:solidFill>
-                <a:latin typeface="맑은 고딕"/>
-              </a:rPr>
-              <a:t>대안</a:t>
-            </a:r>
-            <a:r>
-              <a:rPr sz="1500" b="0">
-                <a:solidFill>
-                  <a:srgbClr val="222222"/>
-                </a:solidFill>
-                <a:latin typeface="맑은 고딕"/>
-              </a:rPr>
-              <a:t>: 오경보 우선 → R50 / YOLO26n, CPU 전용 → YOLOv3-tiny</a:t>
-            </a:r>
-          </a:p>
-          <a:p>
-            <a:pPr>
-              <a:spcAft>
-                <a:spcPts val="600"/>
-              </a:spcAft>
-            </a:pPr>
-            <a:r>
-              <a:rPr sz="1500" b="1">
-                <a:solidFill>
-                  <a:srgbClr val="2AA7B8"/>
-                </a:solidFill>
-                <a:latin typeface="맑은 고딕"/>
-              </a:rPr>
-              <a:t>• </a:t>
-            </a:r>
-            <a:r>
-              <a:rPr sz="1500" b="0">
-                <a:solidFill>
-                  <a:srgbClr val="222222"/>
-                </a:solidFill>
-                <a:latin typeface="맑은 고딕"/>
-              </a:rPr>
-              <a:t>MobileNetV3는 위치 의존·노이즈 오경보로 비권장</a:t>
+              <a:t>3호기(대비 14 이상): MobileNetV3 4%, YOLO26n·RT-DETR-l 약 61%, R50·YOLOv3-tiny·D-FINE-N은 호기 차이가 작음</a:t>
             </a:r>
           </a:p>
         </p:txBody>
@@ -5138,7 +4503,7 @@
                 </a:solidFill>
                 <a:latin typeface="맑은 고딕"/>
               </a:rPr>
-              <a:t>현장 활용: 3단 판정과 재검사 구간</a:t>
+              <a:t>호기·해상도: 뚜렷한 효과는 확인되지 않았다</a:t>
             </a:r>
           </a:p>
         </p:txBody>
@@ -5173,7 +4538,7 @@
                 </a:solidFill>
                 <a:latin typeface="맑은 고딕"/>
               </a:rPr>
-              <a:t>실제 test에서는 결함 369장(≥0.748)과 빈 라벨 27장(≤0.04)이 완전히 갈린다</a:t>
+              <a:t>가장 낮은 그룹은 공식 라벨 박스가 76%여서 IoU 점수가 낮을 뿐이다</a:t>
             </a:r>
           </a:p>
         </p:txBody>
@@ -5213,44 +4578,9 @@
           </a:p>
         </p:txBody>
       </p:sp>
-      <p:sp>
-        <p:nvSpPr>
-          <p:cNvPr id="6" name="TextBox 5"/>
-          <p:cNvSpPr txBox="1"/>
-          <p:nvPr/>
-        </p:nvSpPr>
-        <p:spPr>
-          <a:xfrm>
-            <a:off x="502920" y="6355080"/>
-            <a:ext cx="10180015" cy="365760"/>
-          </a:xfrm>
-          <a:prstGeom prst="rect">
-            <a:avLst/>
-          </a:prstGeom>
-          <a:noFill/>
-        </p:spPr>
-        <p:txBody>
-          <a:bodyPr wrap="square" anchor="t" lIns="45720" rIns="45720">
-            <a:spAutoFit/>
-          </a:bodyPr>
-          <a:lstStyle/>
-          <a:p>
-            <a:pPr algn="l"/>
-            <a:r>
-              <a:rPr sz="1100" b="0">
-                <a:solidFill>
-                  <a:srgbClr val="555B66"/>
-                </a:solidFill>
-                <a:latin typeface="맑은 고딕"/>
-              </a:rPr>
-              <a:t>재검사 구간의 효과는 합성·가짜 정상에 기반한 참고 수치다. 재검사·놓침 비용은 현장 값을 몰라 가정하지 않았다.</a:t>
-            </a:r>
-          </a:p>
-        </p:txBody>
-      </p:sp>
       <p:pic>
         <p:nvPicPr>
-          <p:cNvPr id="7" name="Picture 6" descr="fig4b_final_dfine.png"/>
+          <p:cNvPr id="6" name="Picture 5" descr="fig3f_groups_chart.png"/>
           <p:cNvPicPr>
             <a:picLocks noChangeAspect="1"/>
           </p:cNvPicPr>
@@ -5264,8 +4594,8 @@
         </p:blipFill>
         <p:spPr>
           <a:xfrm>
-            <a:off x="1254684" y="1554479"/>
-            <a:ext cx="9652150" cy="3566160"/>
+            <a:off x="550398" y="1554480"/>
+            <a:ext cx="11060723" cy="3383279"/>
           </a:xfrm>
           <a:prstGeom prst="rect">
             <a:avLst/>
@@ -5274,14 +4604,14 @@
       </p:pic>
       <p:sp>
         <p:nvSpPr>
-          <p:cNvPr id="8" name="TextBox 7"/>
+          <p:cNvPr id="7" name="TextBox 6"/>
           <p:cNvSpPr txBox="1"/>
           <p:nvPr/>
         </p:nvSpPr>
         <p:spPr>
           <a:xfrm>
-            <a:off x="731520" y="5166360"/>
-            <a:ext cx="10789920" cy="1554480"/>
+            <a:off x="731520" y="5029200"/>
+            <a:ext cx="10789920" cy="1645920"/>
           </a:xfrm>
           <a:prstGeom prst="rect">
             <a:avLst/>
@@ -5296,7 +4626,7 @@
           <a:p>
             <a:pPr>
               <a:spcAft>
-                <a:spcPts val="600"/>
+                <a:spcPts val="800"/>
               </a:spcAft>
             </a:pPr>
             <a:r>
@@ -5309,64 +4639,19 @@
               <a:t>• </a:t>
             </a:r>
             <a:r>
-              <a:rPr sz="1600" b="1">
-                <a:solidFill>
-                  <a:srgbClr val="222222"/>
-                </a:solidFill>
-                <a:latin typeface="맑은 고딕"/>
-              </a:rPr>
-              <a:t>불합격</a:t>
-            </a:r>
-            <a:r>
               <a:rPr sz="1600" b="0">
                 <a:solidFill>
                   <a:srgbClr val="222222"/>
                 </a:solidFill>
                 <a:latin typeface="맑은 고딕"/>
               </a:rPr>
-              <a:t> 최고 신뢰도 ≥ 0.66(val 임계값)  |  </a:t>
-            </a:r>
-            <a:r>
-              <a:rPr sz="1600" b="1">
-                <a:solidFill>
-                  <a:srgbClr val="222222"/>
-                </a:solidFill>
-                <a:latin typeface="맑은 고딕"/>
-              </a:rPr>
-              <a:t>재검사</a:t>
-            </a:r>
-            <a:r>
-              <a:rPr sz="1600" b="0">
-                <a:solidFill>
-                  <a:srgbClr val="222222"/>
-                </a:solidFill>
-                <a:latin typeface="맑은 고딕"/>
-              </a:rPr>
-              <a:t> 0.3 ~ 0.66  |  </a:t>
-            </a:r>
-            <a:r>
-              <a:rPr sz="1600" b="1">
-                <a:solidFill>
-                  <a:srgbClr val="222222"/>
-                </a:solidFill>
-                <a:latin typeface="맑은 고딕"/>
-              </a:rPr>
-              <a:t>합격</a:t>
-            </a:r>
-            <a:r>
-              <a:rPr sz="1600" b="0">
-                <a:solidFill>
-                  <a:srgbClr val="222222"/>
-                </a:solidFill>
-                <a:latin typeface="맑은 고딕"/>
-              </a:rPr>
-              <a:t> &lt; 0.3</a:t>
+              <a:t>해상도별 공식 라벨 박스 비율이 10~76%로 달라 라벨 구성이 섞인다. 공식 라벨 이미지끼리만 비교하면 F1이 0.956~0.977로 좁아지고 구간이 겹친다</a:t>
             </a:r>
           </a:p>
           <a:p>
             <a:pPr>
               <a:spcAft>
-                <a:spcPts val="600"/>
+                <a:spcPts val="800"/>
               </a:spcAft>
             </a:pPr>
             <a:r>
@@ -5385,23 +4670,16 @@
                 </a:solidFill>
                 <a:latin typeface="맑은 고딕"/>
               </a:rPr>
-              <a:t>하한을 0.3으로 낮추면 옅은 점 검출 61.9% → 67.1%, 대신 가짜 정상 오경보 4.1% → 5.7%(평균 보간), 49% → 59%(노이즈 보간)</a:t>
-            </a:r>
-          </a:p>
-          <a:p>
-            <a:pPr>
-              <a:spcAft>
-                <a:spcPts val="600"/>
-              </a:spcAft>
-            </a:pPr>
+              <a:t>그룹별 표본이 작다(공식 라벨 이미지 호기별 20~36장). 합성 점에서 보인 3호기 약점은 </a:t>
+            </a:r>
             <a:r>
               <a:rPr sz="1600" b="1">
                 <a:solidFill>
-                  <a:srgbClr val="2AA7B8"/>
-                </a:solidFill>
-                <a:latin typeface="맑은 고딕"/>
-              </a:rPr>
-              <a:t>• </a:t>
+                  <a:srgbClr val="222222"/>
+                </a:solidFill>
+                <a:latin typeface="맑은 고딕"/>
+              </a:rPr>
+              <a:t>모델에 따라</a:t>
             </a:r>
             <a:r>
               <a:rPr sz="1600" b="0">
@@ -5410,7 +4688,7 @@
                 </a:solidFill>
                 <a:latin typeface="맑은 고딕"/>
               </a:rPr>
-              <a:t>오경보가 비싼 현장은 재검사 구간의 이득이 작다</a:t>
+              <a:t> 다르다(앞 슬라이드)</a:t>
             </a:r>
           </a:p>
         </p:txBody>
@@ -5506,7 +4784,7 @@
                 </a:solidFill>
                 <a:latin typeface="맑은 고딕"/>
               </a:rPr>
-              <a:t>모델 선택 가이드와 처리 속도</a:t>
+              <a:t>③ 종합: 모델별 성적표</a:t>
             </a:r>
           </a:p>
         </p:txBody>
@@ -5541,7 +4819,7 @@
                 </a:solidFill>
                 <a:latin typeface="맑은 고딕"/>
               </a:rPr>
-              <a:t>촬영 간격(중앙값 4초)보다 모든 모델이 빠르다</a:t>
+              <a:t>한 모델이 모든 항목에서 1등은 아니다</a:t>
             </a:r>
           </a:p>
         </p:txBody>
@@ -5577,6 +4855,2345 @@
                 <a:latin typeface="맑은 고딕"/>
               </a:rPr>
               <a:t>14</a:t>
+            </a:r>
+          </a:p>
+        </p:txBody>
+      </p:sp>
+      <p:sp>
+        <p:nvSpPr>
+          <p:cNvPr id="6" name="TextBox 5"/>
+          <p:cNvSpPr txBox="1"/>
+          <p:nvPr/>
+        </p:nvSpPr>
+        <p:spPr>
+          <a:xfrm>
+            <a:off x="502920" y="6355080"/>
+            <a:ext cx="10180015" cy="365760"/>
+          </a:xfrm>
+          <a:prstGeom prst="rect">
+            <a:avLst/>
+          </a:prstGeom>
+          <a:noFill/>
+        </p:spPr>
+        <p:txBody>
+          <a:bodyPr wrap="square" anchor="t" lIns="45720" rIns="45720">
+            <a:spAutoFit/>
+          </a:bodyPr>
+          <a:lstStyle/>
+          <a:p>
+            <a:pPr algn="l"/>
+            <a:r>
+              <a:rPr sz="1100" b="0">
+                <a:solidFill>
+                  <a:srgbClr val="555B66"/>
+                </a:solidFill>
+                <a:latin typeface="맑은 고딕"/>
+              </a:rPr>
+              <a:t>val mAP50-95는 val, 나머지는 test 이미지 기준(가짜 정상·합성 점은 인위 이미지). 상세 수치는 docs/experiments.md.</a:t>
+            </a:r>
+          </a:p>
+        </p:txBody>
+      </p:sp>
+      <p:graphicFrame>
+        <p:nvGraphicFramePr>
+          <p:cNvPr id="7" name="Table 6"/>
+          <p:cNvGraphicFramePr>
+            <a:graphicFrameLocks noGrp="1"/>
+          </p:cNvGraphicFramePr>
+          <p:nvPr/>
+        </p:nvGraphicFramePr>
+        <p:xfrm>
+          <a:off x="457200" y="1783080"/>
+          <a:ext cx="11247119" cy="3968496"/>
+        </p:xfrm>
+        <a:graphic>
+          <a:graphicData uri="http://schemas.openxmlformats.org/drawingml/2006/table">
+            <a:tbl>
+              <a:tblPr firstRow="1" bandRow="1">
+                <a:tableStyleId>{5C22544A-7EE6-4342-B048-85BDC9FD1C3A}</a:tableStyleId>
+              </a:tblPr>
+              <a:tblGrid>
+                <a:gridCol w="2377440"/>
+                <a:gridCol w="1188720"/>
+                <a:gridCol w="1828800"/>
+                <a:gridCol w="1828800"/>
+                <a:gridCol w="1280159"/>
+                <a:gridCol w="1645920"/>
+                <a:gridCol w="1097280"/>
+              </a:tblGrid>
+              <a:tr h="566928">
+                <a:tc>
+                  <a:txBody>
+                    <a:bodyPr/>
+                    <a:lstStyle/>
+                    <a:p>
+                      <a:pPr algn="l"/>
+                      <a:r>
+                        <a:rPr sz="1400" b="1">
+                          <a:solidFill>
+                            <a:srgbClr val="FFFFFF"/>
+                          </a:solidFill>
+                          <a:latin typeface="맑은 고딕"/>
+                        </a:rPr>
+                        <a:t>모델</a:t>
+                      </a:r>
+                    </a:p>
+                  </a:txBody>
+                  <a:tcPr anchor="ctr" marL="54864" marR="54864">
+                    <a:solidFill>
+                      <a:srgbClr val="1F3A5F"/>
+                    </a:solidFill>
+                  </a:tcPr>
+                </a:tc>
+                <a:tc>
+                  <a:txBody>
+                    <a:bodyPr/>
+                    <a:lstStyle/>
+                    <a:p>
+                      <a:pPr algn="ctr"/>
+                      <a:r>
+                        <a:rPr sz="1400" b="1">
+                          <a:solidFill>
+                            <a:srgbClr val="FFFFFF"/>
+                          </a:solidFill>
+                          <a:latin typeface="맑은 고딕"/>
+                        </a:rPr>
+                        <a:t>test F1
+(IoU 0.5)</a:t>
+                      </a:r>
+                    </a:p>
+                  </a:txBody>
+                  <a:tcPr anchor="ctr" marL="54864" marR="54864">
+                    <a:solidFill>
+                      <a:srgbClr val="1F3A5F"/>
+                    </a:solidFill>
+                  </a:tcPr>
+                </a:tc>
+                <a:tc>
+                  <a:txBody>
+                    <a:bodyPr/>
+                    <a:lstStyle/>
+                    <a:p>
+                      <a:pPr algn="ctr"/>
+                      <a:r>
+                        <a:rPr sz="1400" b="1">
+                          <a:solidFill>
+                            <a:srgbClr val="FFFFFF"/>
+                          </a:solidFill>
+                          <a:latin typeface="맑은 고딕"/>
+                        </a:rPr>
+                        <a:t>val mAP50-95
+(전체 / 공식만)</a:t>
+                      </a:r>
+                    </a:p>
+                  </a:txBody>
+                  <a:tcPr anchor="ctr" marL="54864" marR="54864">
+                    <a:solidFill>
+                      <a:srgbClr val="1F3A5F"/>
+                    </a:solidFill>
+                  </a:tcPr>
+                </a:tc>
+                <a:tc>
+                  <a:txBody>
+                    <a:bodyPr/>
+                    <a:lstStyle/>
+                    <a:p>
+                      <a:pPr algn="ctr"/>
+                      <a:r>
+                        <a:rPr sz="1400" b="1">
+                          <a:solidFill>
+                            <a:srgbClr val="FFFFFF"/>
+                          </a:solidFill>
+                          <a:latin typeface="맑은 고딕"/>
+                        </a:rPr>
+                        <a:t>가짜 정상 오경보
+(NS+노이즈 6)</a:t>
+                      </a:r>
+                    </a:p>
+                  </a:txBody>
+                  <a:tcPr anchor="ctr" marL="54864" marR="54864">
+                    <a:solidFill>
+                      <a:srgbClr val="1F3A5F"/>
+                    </a:solidFill>
+                  </a:tcPr>
+                </a:tc>
+                <a:tc>
+                  <a:txBody>
+                    <a:bodyPr/>
+                    <a:lstStyle/>
+                    <a:p>
+                      <a:pPr algn="ctr"/>
+                      <a:r>
+                        <a:rPr sz="1400" b="1">
+                          <a:solidFill>
+                            <a:srgbClr val="FFFFFF"/>
+                          </a:solidFill>
+                          <a:latin typeface="맑은 고딕"/>
+                        </a:rPr>
+                        <a:t>합성 점 AP</a:t>
+                      </a:r>
+                    </a:p>
+                  </a:txBody>
+                  <a:tcPr anchor="ctr" marL="54864" marR="54864">
+                    <a:solidFill>
+                      <a:srgbClr val="1F3A5F"/>
+                    </a:solidFill>
+                  </a:tcPr>
+                </a:tc>
+                <a:tc>
+                  <a:txBody>
+                    <a:bodyPr/>
+                    <a:lstStyle/>
+                    <a:p>
+                      <a:pPr algn="ctr"/>
+                      <a:r>
+                        <a:rPr sz="1400" b="1">
+                          <a:solidFill>
+                            <a:srgbClr val="FFFFFF"/>
+                          </a:solidFill>
+                          <a:latin typeface="맑은 고딕"/>
+                        </a:rPr>
+                        <a:t>3호기 합성 점
+(대비 14 이상)</a:t>
+                      </a:r>
+                    </a:p>
+                  </a:txBody>
+                  <a:tcPr anchor="ctr" marL="54864" marR="54864">
+                    <a:solidFill>
+                      <a:srgbClr val="1F3A5F"/>
+                    </a:solidFill>
+                  </a:tcPr>
+                </a:tc>
+                <a:tc>
+                  <a:txBody>
+                    <a:bodyPr/>
+                    <a:lstStyle/>
+                    <a:p>
+                      <a:pPr algn="ctr"/>
+                      <a:r>
+                        <a:rPr sz="1400" b="1">
+                          <a:solidFill>
+                            <a:srgbClr val="FFFFFF"/>
+                          </a:solidFill>
+                          <a:latin typeface="맑은 고딕"/>
+                        </a:rPr>
+                        <a:t>파라미터</a:t>
+                      </a:r>
+                    </a:p>
+                  </a:txBody>
+                  <a:tcPr anchor="ctr" marL="54864" marR="54864">
+                    <a:solidFill>
+                      <a:srgbClr val="1F3A5F"/>
+                    </a:solidFill>
+                  </a:tcPr>
+                </a:tc>
+              </a:tr>
+              <a:tr h="566928">
+                <a:tc>
+                  <a:txBody>
+                    <a:bodyPr/>
+                    <a:lstStyle/>
+                    <a:p>
+                      <a:pPr algn="l"/>
+                      <a:r>
+                        <a:rPr sz="1400" b="1">
+                          <a:solidFill>
+                            <a:srgbClr val="222222"/>
+                          </a:solidFill>
+                          <a:latin typeface="맑은 고딕"/>
+                        </a:rPr>
+                        <a:t>D-FINE-N</a:t>
+                      </a:r>
+                    </a:p>
+                  </a:txBody>
+                  <a:tcPr anchor="ctr" marL="54864" marR="54864">
+                    <a:solidFill>
+                      <a:srgbClr val="DDF1F4"/>
+                    </a:solidFill>
+                  </a:tcPr>
+                </a:tc>
+                <a:tc>
+                  <a:txBody>
+                    <a:bodyPr/>
+                    <a:lstStyle/>
+                    <a:p>
+                      <a:pPr algn="ctr"/>
+                      <a:r>
+                        <a:rPr sz="1400" b="1">
+                          <a:solidFill>
+                            <a:srgbClr val="222222"/>
+                          </a:solidFill>
+                          <a:latin typeface="맑은 고딕"/>
+                        </a:rPr>
+                        <a:t>0.989</a:t>
+                      </a:r>
+                    </a:p>
+                  </a:txBody>
+                  <a:tcPr anchor="ctr" marL="54864" marR="54864">
+                    <a:solidFill>
+                      <a:srgbClr val="DDF1F4"/>
+                    </a:solidFill>
+                  </a:tcPr>
+                </a:tc>
+                <a:tc>
+                  <a:txBody>
+                    <a:bodyPr/>
+                    <a:lstStyle/>
+                    <a:p>
+                      <a:pPr algn="ctr"/>
+                      <a:r>
+                        <a:rPr sz="1400" b="1">
+                          <a:solidFill>
+                            <a:srgbClr val="222222"/>
+                          </a:solidFill>
+                          <a:latin typeface="맑은 고딕"/>
+                        </a:rPr>
+                        <a:t>0.655 / 0.343</a:t>
+                      </a:r>
+                    </a:p>
+                  </a:txBody>
+                  <a:tcPr anchor="ctr" marL="54864" marR="54864">
+                    <a:solidFill>
+                      <a:srgbClr val="DDF1F4"/>
+                    </a:solidFill>
+                  </a:tcPr>
+                </a:tc>
+                <a:tc>
+                  <a:txBody>
+                    <a:bodyPr/>
+                    <a:lstStyle/>
+                    <a:p>
+                      <a:pPr algn="ctr"/>
+                      <a:r>
+                        <a:rPr sz="1400" b="1">
+                          <a:solidFill>
+                            <a:srgbClr val="222222"/>
+                          </a:solidFill>
+                          <a:latin typeface="맑은 고딕"/>
+                        </a:rPr>
+                        <a:t>49.3%</a:t>
+                      </a:r>
+                    </a:p>
+                  </a:txBody>
+                  <a:tcPr anchor="ctr" marL="54864" marR="54864">
+                    <a:solidFill>
+                      <a:srgbClr val="DDF1F4"/>
+                    </a:solidFill>
+                  </a:tcPr>
+                </a:tc>
+                <a:tc>
+                  <a:txBody>
+                    <a:bodyPr/>
+                    <a:lstStyle/>
+                    <a:p>
+                      <a:pPr algn="ctr"/>
+                      <a:r>
+                        <a:rPr sz="1400" b="1">
+                          <a:solidFill>
+                            <a:srgbClr val="222222"/>
+                          </a:solidFill>
+                          <a:latin typeface="맑은 고딕"/>
+                        </a:rPr>
+                        <a:t>0.574</a:t>
+                      </a:r>
+                    </a:p>
+                  </a:txBody>
+                  <a:tcPr anchor="ctr" marL="54864" marR="54864">
+                    <a:solidFill>
+                      <a:srgbClr val="DDF1F4"/>
+                    </a:solidFill>
+                  </a:tcPr>
+                </a:tc>
+                <a:tc>
+                  <a:txBody>
+                    <a:bodyPr/>
+                    <a:lstStyle/>
+                    <a:p>
+                      <a:pPr algn="ctr"/>
+                      <a:r>
+                        <a:rPr sz="1400" b="1">
+                          <a:solidFill>
+                            <a:srgbClr val="222222"/>
+                          </a:solidFill>
+                          <a:latin typeface="맑은 고딕"/>
+                        </a:rPr>
+                        <a:t>89%</a:t>
+                      </a:r>
+                    </a:p>
+                  </a:txBody>
+                  <a:tcPr anchor="ctr" marL="54864" marR="54864">
+                    <a:solidFill>
+                      <a:srgbClr val="DDF1F4"/>
+                    </a:solidFill>
+                  </a:tcPr>
+                </a:tc>
+                <a:tc>
+                  <a:txBody>
+                    <a:bodyPr/>
+                    <a:lstStyle/>
+                    <a:p>
+                      <a:pPr algn="ctr"/>
+                      <a:r>
+                        <a:rPr sz="1400" b="1">
+                          <a:solidFill>
+                            <a:srgbClr val="222222"/>
+                          </a:solidFill>
+                          <a:latin typeface="맑은 고딕"/>
+                        </a:rPr>
+                        <a:t>3.7M</a:t>
+                      </a:r>
+                    </a:p>
+                  </a:txBody>
+                  <a:tcPr anchor="ctr" marL="54864" marR="54864">
+                    <a:solidFill>
+                      <a:srgbClr val="DDF1F4"/>
+                    </a:solidFill>
+                  </a:tcPr>
+                </a:tc>
+              </a:tr>
+              <a:tr h="566928">
+                <a:tc>
+                  <a:txBody>
+                    <a:bodyPr/>
+                    <a:lstStyle/>
+                    <a:p>
+                      <a:pPr algn="l"/>
+                      <a:r>
+                        <a:rPr sz="1400" b="0">
+                          <a:solidFill>
+                            <a:srgbClr val="222222"/>
+                          </a:solidFill>
+                          <a:latin typeface="맑은 고딕"/>
+                        </a:rPr>
+                        <a:t>RT-DETR-l</a:t>
+                      </a:r>
+                    </a:p>
+                  </a:txBody>
+                  <a:tcPr anchor="ctr" marL="54864" marR="54864">
+                    <a:solidFill>
+                      <a:srgbClr val="F2F5FA"/>
+                    </a:solidFill>
+                  </a:tcPr>
+                </a:tc>
+                <a:tc>
+                  <a:txBody>
+                    <a:bodyPr/>
+                    <a:lstStyle/>
+                    <a:p>
+                      <a:pPr algn="ctr"/>
+                      <a:r>
+                        <a:rPr sz="1400" b="0">
+                          <a:solidFill>
+                            <a:srgbClr val="222222"/>
+                          </a:solidFill>
+                          <a:latin typeface="맑은 고딕"/>
+                        </a:rPr>
+                        <a:t>0.988</a:t>
+                      </a:r>
+                    </a:p>
+                  </a:txBody>
+                  <a:tcPr anchor="ctr" marL="54864" marR="54864">
+                    <a:solidFill>
+                      <a:srgbClr val="F2F5FA"/>
+                    </a:solidFill>
+                  </a:tcPr>
+                </a:tc>
+                <a:tc>
+                  <a:txBody>
+                    <a:bodyPr/>
+                    <a:lstStyle/>
+                    <a:p>
+                      <a:pPr algn="ctr"/>
+                      <a:r>
+                        <a:rPr sz="1400" b="0">
+                          <a:solidFill>
+                            <a:srgbClr val="222222"/>
+                          </a:solidFill>
+                          <a:latin typeface="맑은 고딕"/>
+                        </a:rPr>
+                        <a:t>0.662 / 0.357</a:t>
+                      </a:r>
+                    </a:p>
+                  </a:txBody>
+                  <a:tcPr anchor="ctr" marL="54864" marR="54864">
+                    <a:solidFill>
+                      <a:srgbClr val="F2F5FA"/>
+                    </a:solidFill>
+                  </a:tcPr>
+                </a:tc>
+                <a:tc>
+                  <a:txBody>
+                    <a:bodyPr/>
+                    <a:lstStyle/>
+                    <a:p>
+                      <a:pPr algn="ctr"/>
+                      <a:r>
+                        <a:rPr sz="1400" b="0">
+                          <a:solidFill>
+                            <a:srgbClr val="222222"/>
+                          </a:solidFill>
+                          <a:latin typeface="맑은 고딕"/>
+                        </a:rPr>
+                        <a:t>36.6%</a:t>
+                      </a:r>
+                    </a:p>
+                  </a:txBody>
+                  <a:tcPr anchor="ctr" marL="54864" marR="54864">
+                    <a:solidFill>
+                      <a:srgbClr val="F2F5FA"/>
+                    </a:solidFill>
+                  </a:tcPr>
+                </a:tc>
+                <a:tc>
+                  <a:txBody>
+                    <a:bodyPr/>
+                    <a:lstStyle/>
+                    <a:p>
+                      <a:pPr algn="ctr"/>
+                      <a:r>
+                        <a:rPr sz="1400" b="0">
+                          <a:solidFill>
+                            <a:srgbClr val="222222"/>
+                          </a:solidFill>
+                          <a:latin typeface="맑은 고딕"/>
+                        </a:rPr>
+                        <a:t>0.451</a:t>
+                      </a:r>
+                    </a:p>
+                  </a:txBody>
+                  <a:tcPr anchor="ctr" marL="54864" marR="54864">
+                    <a:solidFill>
+                      <a:srgbClr val="F2F5FA"/>
+                    </a:solidFill>
+                  </a:tcPr>
+                </a:tc>
+                <a:tc>
+                  <a:txBody>
+                    <a:bodyPr/>
+                    <a:lstStyle/>
+                    <a:p>
+                      <a:pPr algn="ctr"/>
+                      <a:r>
+                        <a:rPr sz="1400" b="0">
+                          <a:solidFill>
+                            <a:srgbClr val="222222"/>
+                          </a:solidFill>
+                          <a:latin typeface="맑은 고딕"/>
+                        </a:rPr>
+                        <a:t>61%</a:t>
+                      </a:r>
+                    </a:p>
+                  </a:txBody>
+                  <a:tcPr anchor="ctr" marL="54864" marR="54864">
+                    <a:solidFill>
+                      <a:srgbClr val="F2F5FA"/>
+                    </a:solidFill>
+                  </a:tcPr>
+                </a:tc>
+                <a:tc>
+                  <a:txBody>
+                    <a:bodyPr/>
+                    <a:lstStyle/>
+                    <a:p>
+                      <a:pPr algn="ctr"/>
+                      <a:r>
+                        <a:rPr sz="1400" b="0">
+                          <a:solidFill>
+                            <a:srgbClr val="222222"/>
+                          </a:solidFill>
+                          <a:latin typeface="맑은 고딕"/>
+                        </a:rPr>
+                        <a:t>32.8M</a:t>
+                      </a:r>
+                    </a:p>
+                  </a:txBody>
+                  <a:tcPr anchor="ctr" marL="54864" marR="54864">
+                    <a:solidFill>
+                      <a:srgbClr val="F2F5FA"/>
+                    </a:solidFill>
+                  </a:tcPr>
+                </a:tc>
+              </a:tr>
+              <a:tr h="566928">
+                <a:tc>
+                  <a:txBody>
+                    <a:bodyPr/>
+                    <a:lstStyle/>
+                    <a:p>
+                      <a:pPr algn="l"/>
+                      <a:r>
+                        <a:rPr sz="1400" b="0">
+                          <a:solidFill>
+                            <a:srgbClr val="222222"/>
+                          </a:solidFill>
+                          <a:latin typeface="맑은 고딕"/>
+                        </a:rPr>
+                        <a:t>Faster R-CNN R50</a:t>
+                      </a:r>
+                    </a:p>
+                  </a:txBody>
+                  <a:tcPr anchor="ctr" marL="54864" marR="54864">
+                    <a:solidFill>
+                      <a:srgbClr val="FFFFFF"/>
+                    </a:solidFill>
+                  </a:tcPr>
+                </a:tc>
+                <a:tc>
+                  <a:txBody>
+                    <a:bodyPr/>
+                    <a:lstStyle/>
+                    <a:p>
+                      <a:pPr algn="ctr"/>
+                      <a:r>
+                        <a:rPr sz="1400" b="0">
+                          <a:solidFill>
+                            <a:srgbClr val="222222"/>
+                          </a:solidFill>
+                          <a:latin typeface="맑은 고딕"/>
+                        </a:rPr>
+                        <a:t>0.989</a:t>
+                      </a:r>
+                    </a:p>
+                  </a:txBody>
+                  <a:tcPr anchor="ctr" marL="54864" marR="54864">
+                    <a:solidFill>
+                      <a:srgbClr val="FFFFFF"/>
+                    </a:solidFill>
+                  </a:tcPr>
+                </a:tc>
+                <a:tc>
+                  <a:txBody>
+                    <a:bodyPr/>
+                    <a:lstStyle/>
+                    <a:p>
+                      <a:pPr algn="ctr"/>
+                      <a:r>
+                        <a:rPr sz="1400" b="0">
+                          <a:solidFill>
+                            <a:srgbClr val="222222"/>
+                          </a:solidFill>
+                          <a:latin typeface="맑은 고딕"/>
+                        </a:rPr>
+                        <a:t>0.615 / 0.337</a:t>
+                      </a:r>
+                    </a:p>
+                  </a:txBody>
+                  <a:tcPr anchor="ctr" marL="54864" marR="54864">
+                    <a:solidFill>
+                      <a:srgbClr val="FFFFFF"/>
+                    </a:solidFill>
+                  </a:tcPr>
+                </a:tc>
+                <a:tc>
+                  <a:txBody>
+                    <a:bodyPr/>
+                    <a:lstStyle/>
+                    <a:p>
+                      <a:pPr algn="ctr"/>
+                      <a:r>
+                        <a:rPr sz="1400" b="0">
+                          <a:solidFill>
+                            <a:srgbClr val="222222"/>
+                          </a:solidFill>
+                          <a:latin typeface="맑은 고딕"/>
+                        </a:rPr>
+                        <a:t>0.5%</a:t>
+                      </a:r>
+                    </a:p>
+                  </a:txBody>
+                  <a:tcPr anchor="ctr" marL="54864" marR="54864">
+                    <a:solidFill>
+                      <a:srgbClr val="FFFFFF"/>
+                    </a:solidFill>
+                  </a:tcPr>
+                </a:tc>
+                <a:tc>
+                  <a:txBody>
+                    <a:bodyPr/>
+                    <a:lstStyle/>
+                    <a:p>
+                      <a:pPr algn="ctr"/>
+                      <a:r>
+                        <a:rPr sz="1400" b="0">
+                          <a:solidFill>
+                            <a:srgbClr val="222222"/>
+                          </a:solidFill>
+                          <a:latin typeface="맑은 고딕"/>
+                        </a:rPr>
+                        <a:t>0.567</a:t>
+                      </a:r>
+                    </a:p>
+                  </a:txBody>
+                  <a:tcPr anchor="ctr" marL="54864" marR="54864">
+                    <a:solidFill>
+                      <a:srgbClr val="FFFFFF"/>
+                    </a:solidFill>
+                  </a:tcPr>
+                </a:tc>
+                <a:tc>
+                  <a:txBody>
+                    <a:bodyPr/>
+                    <a:lstStyle/>
+                    <a:p>
+                      <a:pPr algn="ctr"/>
+                      <a:r>
+                        <a:rPr sz="1400" b="0">
+                          <a:solidFill>
+                            <a:srgbClr val="222222"/>
+                          </a:solidFill>
+                          <a:latin typeface="맑은 고딕"/>
+                        </a:rPr>
+                        <a:t>75%</a:t>
+                      </a:r>
+                    </a:p>
+                  </a:txBody>
+                  <a:tcPr anchor="ctr" marL="54864" marR="54864">
+                    <a:solidFill>
+                      <a:srgbClr val="FFFFFF"/>
+                    </a:solidFill>
+                  </a:tcPr>
+                </a:tc>
+                <a:tc>
+                  <a:txBody>
+                    <a:bodyPr/>
+                    <a:lstStyle/>
+                    <a:p>
+                      <a:pPr algn="ctr"/>
+                      <a:r>
+                        <a:rPr sz="1400" b="0">
+                          <a:solidFill>
+                            <a:srgbClr val="222222"/>
+                          </a:solidFill>
+                          <a:latin typeface="맑은 고딕"/>
+                        </a:rPr>
+                        <a:t>41.4M</a:t>
+                      </a:r>
+                    </a:p>
+                  </a:txBody>
+                  <a:tcPr anchor="ctr" marL="54864" marR="54864">
+                    <a:solidFill>
+                      <a:srgbClr val="FFFFFF"/>
+                    </a:solidFill>
+                  </a:tcPr>
+                </a:tc>
+              </a:tr>
+              <a:tr h="566928">
+                <a:tc>
+                  <a:txBody>
+                    <a:bodyPr/>
+                    <a:lstStyle/>
+                    <a:p>
+                      <a:pPr algn="l"/>
+                      <a:r>
+                        <a:rPr sz="1400" b="0">
+                          <a:solidFill>
+                            <a:srgbClr val="222222"/>
+                          </a:solidFill>
+                          <a:latin typeface="맑은 고딕"/>
+                        </a:rPr>
+                        <a:t>YOLO26n</a:t>
+                      </a:r>
+                    </a:p>
+                  </a:txBody>
+                  <a:tcPr anchor="ctr" marL="54864" marR="54864">
+                    <a:solidFill>
+                      <a:srgbClr val="F2F5FA"/>
+                    </a:solidFill>
+                  </a:tcPr>
+                </a:tc>
+                <a:tc>
+                  <a:txBody>
+                    <a:bodyPr/>
+                    <a:lstStyle/>
+                    <a:p>
+                      <a:pPr algn="ctr"/>
+                      <a:r>
+                        <a:rPr sz="1400" b="0">
+                          <a:solidFill>
+                            <a:srgbClr val="222222"/>
+                          </a:solidFill>
+                          <a:latin typeface="맑은 고딕"/>
+                        </a:rPr>
+                        <a:t>0.991</a:t>
+                      </a:r>
+                    </a:p>
+                  </a:txBody>
+                  <a:tcPr anchor="ctr" marL="54864" marR="54864">
+                    <a:solidFill>
+                      <a:srgbClr val="F2F5FA"/>
+                    </a:solidFill>
+                  </a:tcPr>
+                </a:tc>
+                <a:tc>
+                  <a:txBody>
+                    <a:bodyPr/>
+                    <a:lstStyle/>
+                    <a:p>
+                      <a:pPr algn="ctr"/>
+                      <a:r>
+                        <a:rPr sz="1400" b="0">
+                          <a:solidFill>
+                            <a:srgbClr val="222222"/>
+                          </a:solidFill>
+                          <a:latin typeface="맑은 고딕"/>
+                        </a:rPr>
+                        <a:t>0.642 / 0.314</a:t>
+                      </a:r>
+                    </a:p>
+                  </a:txBody>
+                  <a:tcPr anchor="ctr" marL="54864" marR="54864">
+                    <a:solidFill>
+                      <a:srgbClr val="F2F5FA"/>
+                    </a:solidFill>
+                  </a:tcPr>
+                </a:tc>
+                <a:tc>
+                  <a:txBody>
+                    <a:bodyPr/>
+                    <a:lstStyle/>
+                    <a:p>
+                      <a:pPr algn="ctr"/>
+                      <a:r>
+                        <a:rPr sz="1400" b="0">
+                          <a:solidFill>
+                            <a:srgbClr val="222222"/>
+                          </a:solidFill>
+                          <a:latin typeface="맑은 고딕"/>
+                        </a:rPr>
+                        <a:t>4.1%</a:t>
+                      </a:r>
+                    </a:p>
+                  </a:txBody>
+                  <a:tcPr anchor="ctr" marL="54864" marR="54864">
+                    <a:solidFill>
+                      <a:srgbClr val="F2F5FA"/>
+                    </a:solidFill>
+                  </a:tcPr>
+                </a:tc>
+                <a:tc>
+                  <a:txBody>
+                    <a:bodyPr/>
+                    <a:lstStyle/>
+                    <a:p>
+                      <a:pPr algn="ctr"/>
+                      <a:r>
+                        <a:rPr sz="1400" b="0">
+                          <a:solidFill>
+                            <a:srgbClr val="222222"/>
+                          </a:solidFill>
+                          <a:latin typeface="맑은 고딕"/>
+                        </a:rPr>
+                        <a:t>0.501</a:t>
+                      </a:r>
+                    </a:p>
+                  </a:txBody>
+                  <a:tcPr anchor="ctr" marL="54864" marR="54864">
+                    <a:solidFill>
+                      <a:srgbClr val="F2F5FA"/>
+                    </a:solidFill>
+                  </a:tcPr>
+                </a:tc>
+                <a:tc>
+                  <a:txBody>
+                    <a:bodyPr/>
+                    <a:lstStyle/>
+                    <a:p>
+                      <a:pPr algn="ctr"/>
+                      <a:r>
+                        <a:rPr sz="1400" b="0">
+                          <a:solidFill>
+                            <a:srgbClr val="222222"/>
+                          </a:solidFill>
+                          <a:latin typeface="맑은 고딕"/>
+                        </a:rPr>
+                        <a:t>62%</a:t>
+                      </a:r>
+                    </a:p>
+                  </a:txBody>
+                  <a:tcPr anchor="ctr" marL="54864" marR="54864">
+                    <a:solidFill>
+                      <a:srgbClr val="F2F5FA"/>
+                    </a:solidFill>
+                  </a:tcPr>
+                </a:tc>
+                <a:tc>
+                  <a:txBody>
+                    <a:bodyPr/>
+                    <a:lstStyle/>
+                    <a:p>
+                      <a:pPr algn="ctr"/>
+                      <a:r>
+                        <a:rPr sz="1400" b="0">
+                          <a:solidFill>
+                            <a:srgbClr val="222222"/>
+                          </a:solidFill>
+                          <a:latin typeface="맑은 고딕"/>
+                        </a:rPr>
+                        <a:t>2.5M</a:t>
+                      </a:r>
+                    </a:p>
+                  </a:txBody>
+                  <a:tcPr anchor="ctr" marL="54864" marR="54864">
+                    <a:solidFill>
+                      <a:srgbClr val="F2F5FA"/>
+                    </a:solidFill>
+                  </a:tcPr>
+                </a:tc>
+              </a:tr>
+              <a:tr h="566928">
+                <a:tc>
+                  <a:txBody>
+                    <a:bodyPr/>
+                    <a:lstStyle/>
+                    <a:p>
+                      <a:pPr algn="l"/>
+                      <a:r>
+                        <a:rPr sz="1400" b="0">
+                          <a:solidFill>
+                            <a:srgbClr val="222222"/>
+                          </a:solidFill>
+                          <a:latin typeface="맑은 고딕"/>
+                        </a:rPr>
+                        <a:t>YOLOv3-tiny</a:t>
+                      </a:r>
+                    </a:p>
+                  </a:txBody>
+                  <a:tcPr anchor="ctr" marL="54864" marR="54864">
+                    <a:solidFill>
+                      <a:srgbClr val="FFFFFF"/>
+                    </a:solidFill>
+                  </a:tcPr>
+                </a:tc>
+                <a:tc>
+                  <a:txBody>
+                    <a:bodyPr/>
+                    <a:lstStyle/>
+                    <a:p>
+                      <a:pPr algn="ctr"/>
+                      <a:r>
+                        <a:rPr sz="1400" b="0">
+                          <a:solidFill>
+                            <a:srgbClr val="222222"/>
+                          </a:solidFill>
+                          <a:latin typeface="맑은 고딕"/>
+                        </a:rPr>
+                        <a:t>0.989</a:t>
+                      </a:r>
+                    </a:p>
+                  </a:txBody>
+                  <a:tcPr anchor="ctr" marL="54864" marR="54864">
+                    <a:solidFill>
+                      <a:srgbClr val="FFFFFF"/>
+                    </a:solidFill>
+                  </a:tcPr>
+                </a:tc>
+                <a:tc>
+                  <a:txBody>
+                    <a:bodyPr/>
+                    <a:lstStyle/>
+                    <a:p>
+                      <a:pPr algn="ctr"/>
+                      <a:r>
+                        <a:rPr sz="1400" b="0">
+                          <a:solidFill>
+                            <a:srgbClr val="222222"/>
+                          </a:solidFill>
+                          <a:latin typeface="맑은 고딕"/>
+                        </a:rPr>
+                        <a:t>0.579 / 0.311</a:t>
+                      </a:r>
+                    </a:p>
+                  </a:txBody>
+                  <a:tcPr anchor="ctr" marL="54864" marR="54864">
+                    <a:solidFill>
+                      <a:srgbClr val="FFFFFF"/>
+                    </a:solidFill>
+                  </a:tcPr>
+                </a:tc>
+                <a:tc>
+                  <a:txBody>
+                    <a:bodyPr/>
+                    <a:lstStyle/>
+                    <a:p>
+                      <a:pPr algn="ctr"/>
+                      <a:r>
+                        <a:rPr sz="1400" b="0">
+                          <a:solidFill>
+                            <a:srgbClr val="222222"/>
+                          </a:solidFill>
+                          <a:latin typeface="맑은 고딕"/>
+                        </a:rPr>
+                        <a:t>38.5%</a:t>
+                      </a:r>
+                    </a:p>
+                  </a:txBody>
+                  <a:tcPr anchor="ctr" marL="54864" marR="54864">
+                    <a:solidFill>
+                      <a:srgbClr val="FFFFFF"/>
+                    </a:solidFill>
+                  </a:tcPr>
+                </a:tc>
+                <a:tc>
+                  <a:txBody>
+                    <a:bodyPr/>
+                    <a:lstStyle/>
+                    <a:p>
+                      <a:pPr algn="ctr"/>
+                      <a:r>
+                        <a:rPr sz="1400" b="0">
+                          <a:solidFill>
+                            <a:srgbClr val="222222"/>
+                          </a:solidFill>
+                          <a:latin typeface="맑은 고딕"/>
+                        </a:rPr>
+                        <a:t>0.515</a:t>
+                      </a:r>
+                    </a:p>
+                  </a:txBody>
+                  <a:tcPr anchor="ctr" marL="54864" marR="54864">
+                    <a:solidFill>
+                      <a:srgbClr val="FFFFFF"/>
+                    </a:solidFill>
+                  </a:tcPr>
+                </a:tc>
+                <a:tc>
+                  <a:txBody>
+                    <a:bodyPr/>
+                    <a:lstStyle/>
+                    <a:p>
+                      <a:pPr algn="ctr"/>
+                      <a:r>
+                        <a:rPr sz="1400" b="0">
+                          <a:solidFill>
+                            <a:srgbClr val="222222"/>
+                          </a:solidFill>
+                          <a:latin typeface="맑은 고딕"/>
+                        </a:rPr>
+                        <a:t>70%</a:t>
+                      </a:r>
+                    </a:p>
+                  </a:txBody>
+                  <a:tcPr anchor="ctr" marL="54864" marR="54864">
+                    <a:solidFill>
+                      <a:srgbClr val="FFFFFF"/>
+                    </a:solidFill>
+                  </a:tcPr>
+                </a:tc>
+                <a:tc>
+                  <a:txBody>
+                    <a:bodyPr/>
+                    <a:lstStyle/>
+                    <a:p>
+                      <a:pPr algn="ctr"/>
+                      <a:r>
+                        <a:rPr sz="1400" b="0">
+                          <a:solidFill>
+                            <a:srgbClr val="222222"/>
+                          </a:solidFill>
+                          <a:latin typeface="맑은 고딕"/>
+                        </a:rPr>
+                        <a:t>8.7M</a:t>
+                      </a:r>
+                    </a:p>
+                  </a:txBody>
+                  <a:tcPr anchor="ctr" marL="54864" marR="54864">
+                    <a:solidFill>
+                      <a:srgbClr val="FFFFFF"/>
+                    </a:solidFill>
+                  </a:tcPr>
+                </a:tc>
+              </a:tr>
+              <a:tr h="566928">
+                <a:tc>
+                  <a:txBody>
+                    <a:bodyPr/>
+                    <a:lstStyle/>
+                    <a:p>
+                      <a:pPr algn="l"/>
+                      <a:r>
+                        <a:rPr sz="1400" b="0">
+                          <a:solidFill>
+                            <a:srgbClr val="222222"/>
+                          </a:solidFill>
+                          <a:latin typeface="맑은 고딕"/>
+                        </a:rPr>
+                        <a:t>Faster R-CNN MobileNetV3</a:t>
+                      </a:r>
+                    </a:p>
+                  </a:txBody>
+                  <a:tcPr anchor="ctr" marL="54864" marR="54864">
+                    <a:solidFill>
+                      <a:srgbClr val="F2F5FA"/>
+                    </a:solidFill>
+                  </a:tcPr>
+                </a:tc>
+                <a:tc>
+                  <a:txBody>
+                    <a:bodyPr/>
+                    <a:lstStyle/>
+                    <a:p>
+                      <a:pPr algn="ctr"/>
+                      <a:r>
+                        <a:rPr sz="1400" b="0">
+                          <a:solidFill>
+                            <a:srgbClr val="222222"/>
+                          </a:solidFill>
+                          <a:latin typeface="맑은 고딕"/>
+                        </a:rPr>
+                        <a:t>0.986</a:t>
+                      </a:r>
+                    </a:p>
+                  </a:txBody>
+                  <a:tcPr anchor="ctr" marL="54864" marR="54864">
+                    <a:solidFill>
+                      <a:srgbClr val="F2F5FA"/>
+                    </a:solidFill>
+                  </a:tcPr>
+                </a:tc>
+                <a:tc>
+                  <a:txBody>
+                    <a:bodyPr/>
+                    <a:lstStyle/>
+                    <a:p>
+                      <a:pPr algn="ctr"/>
+                      <a:r>
+                        <a:rPr sz="1400" b="0">
+                          <a:solidFill>
+                            <a:srgbClr val="222222"/>
+                          </a:solidFill>
+                          <a:latin typeface="맑은 고딕"/>
+                        </a:rPr>
+                        <a:t>0.583 / 0.322</a:t>
+                      </a:r>
+                    </a:p>
+                  </a:txBody>
+                  <a:tcPr anchor="ctr" marL="54864" marR="54864">
+                    <a:solidFill>
+                      <a:srgbClr val="F2F5FA"/>
+                    </a:solidFill>
+                  </a:tcPr>
+                </a:tc>
+                <a:tc>
+                  <a:txBody>
+                    <a:bodyPr/>
+                    <a:lstStyle/>
+                    <a:p>
+                      <a:pPr algn="ctr"/>
+                      <a:r>
+                        <a:rPr sz="1400" b="0">
+                          <a:solidFill>
+                            <a:srgbClr val="222222"/>
+                          </a:solidFill>
+                          <a:latin typeface="맑은 고딕"/>
+                        </a:rPr>
+                        <a:t>64.0%</a:t>
+                      </a:r>
+                    </a:p>
+                  </a:txBody>
+                  <a:tcPr anchor="ctr" marL="54864" marR="54864">
+                    <a:solidFill>
+                      <a:srgbClr val="F2F5FA"/>
+                    </a:solidFill>
+                  </a:tcPr>
+                </a:tc>
+                <a:tc>
+                  <a:txBody>
+                    <a:bodyPr/>
+                    <a:lstStyle/>
+                    <a:p>
+                      <a:pPr algn="ctr"/>
+                      <a:r>
+                        <a:rPr sz="1400" b="0">
+                          <a:solidFill>
+                            <a:srgbClr val="222222"/>
+                          </a:solidFill>
+                          <a:latin typeface="맑은 고딕"/>
+                        </a:rPr>
+                        <a:t>0.262</a:t>
+                      </a:r>
+                    </a:p>
+                  </a:txBody>
+                  <a:tcPr anchor="ctr" marL="54864" marR="54864">
+                    <a:solidFill>
+                      <a:srgbClr val="F2F5FA"/>
+                    </a:solidFill>
+                  </a:tcPr>
+                </a:tc>
+                <a:tc>
+                  <a:txBody>
+                    <a:bodyPr/>
+                    <a:lstStyle/>
+                    <a:p>
+                      <a:pPr algn="ctr"/>
+                      <a:r>
+                        <a:rPr sz="1400" b="0">
+                          <a:solidFill>
+                            <a:srgbClr val="222222"/>
+                          </a:solidFill>
+                          <a:latin typeface="맑은 고딕"/>
+                        </a:rPr>
+                        <a:t>4%</a:t>
+                      </a:r>
+                    </a:p>
+                  </a:txBody>
+                  <a:tcPr anchor="ctr" marL="54864" marR="54864">
+                    <a:solidFill>
+                      <a:srgbClr val="F2F5FA"/>
+                    </a:solidFill>
+                  </a:tcPr>
+                </a:tc>
+                <a:tc>
+                  <a:txBody>
+                    <a:bodyPr/>
+                    <a:lstStyle/>
+                    <a:p>
+                      <a:pPr algn="ctr"/>
+                      <a:r>
+                        <a:rPr sz="1400" b="0">
+                          <a:solidFill>
+                            <a:srgbClr val="222222"/>
+                          </a:solidFill>
+                          <a:latin typeface="맑은 고딕"/>
+                        </a:rPr>
+                        <a:t>19.0M</a:t>
+                      </a:r>
+                    </a:p>
+                  </a:txBody>
+                  <a:tcPr anchor="ctr" marL="54864" marR="54864">
+                    <a:solidFill>
+                      <a:srgbClr val="F2F5FA"/>
+                    </a:solidFill>
+                  </a:tcPr>
+                </a:tc>
+              </a:tr>
+            </a:tbl>
+          </a:graphicData>
+        </a:graphic>
+      </p:graphicFrame>
+      <p:sp>
+        <p:nvSpPr>
+          <p:cNvPr id="8" name="TextBox 7"/>
+          <p:cNvSpPr txBox="1"/>
+          <p:nvPr/>
+        </p:nvSpPr>
+        <p:spPr>
+          <a:xfrm>
+            <a:off x="548640" y="5806440"/>
+            <a:ext cx="10972800" cy="822960"/>
+          </a:xfrm>
+          <a:prstGeom prst="rect">
+            <a:avLst/>
+          </a:prstGeom>
+          <a:noFill/>
+        </p:spPr>
+        <p:txBody>
+          <a:bodyPr wrap="square" lIns="45720" rIns="45720">
+            <a:spAutoFit/>
+          </a:bodyPr>
+          <a:lstStyle/>
+          <a:p>
+            <a:pPr>
+              <a:spcAft>
+                <a:spcPts val="600"/>
+              </a:spcAft>
+            </a:pPr>
+            <a:r>
+              <a:rPr sz="1400" b="1">
+                <a:solidFill>
+                  <a:srgbClr val="2AA7B8"/>
+                </a:solidFill>
+                <a:latin typeface="맑은 고딕"/>
+              </a:rPr>
+              <a:t>• </a:t>
+            </a:r>
+            <a:r>
+              <a:rPr sz="1400" b="0">
+                <a:solidFill>
+                  <a:srgbClr val="222222"/>
+                </a:solidFill>
+                <a:latin typeface="맑은 고딕"/>
+              </a:rPr>
+              <a:t>점 제거는 6개 모델 모두 0~3개만 남아 차이가 없다. test F1은 모두 포화다.</a:t>
+            </a:r>
+          </a:p>
+        </p:txBody>
+      </p:sp>
+    </p:spTree>
+  </p:cSld>
+  <p:clrMapOvr>
+    <a:masterClrMapping/>
+  </p:clrMapOvr>
+</p:sld>
+</file>
+
+<file path=ppt/slides/slide15.xml><?xml version="1.0" encoding="utf-8"?>
+<p:sld xmlns:a="http://schemas.openxmlformats.org/drawingml/2006/main" xmlns:p="http://schemas.openxmlformats.org/presentationml/2006/main" xmlns:r="http://schemas.openxmlformats.org/officeDocument/2006/relationships">
+  <p:cSld>
+    <p:spTree>
+      <p:nvGrpSpPr>
+        <p:cNvPr id="1" name=""/>
+        <p:cNvGrpSpPr/>
+        <p:nvPr/>
+      </p:nvGrpSpPr>
+      <p:grpSpPr/>
+      <p:sp>
+        <p:nvSpPr>
+          <p:cNvPr id="2" name="Rectangle 1"/>
+          <p:cNvSpPr/>
+          <p:nvPr/>
+        </p:nvSpPr>
+        <p:spPr>
+          <a:xfrm>
+            <a:off x="0" y="0"/>
+            <a:ext cx="164592" cy="6858000"/>
+          </a:xfrm>
+          <a:prstGeom prst="rect">
+            <a:avLst/>
+          </a:prstGeom>
+          <a:solidFill>
+            <a:srgbClr val="1F3A5F"/>
+          </a:solidFill>
+          <a:ln>
+            <a:noFill/>
+          </a:ln>
+        </p:spPr>
+        <p:style>
+          <a:lnRef idx="1">
+            <a:schemeClr val="accent1"/>
+          </a:lnRef>
+          <a:fillRef idx="3">
+            <a:schemeClr val="accent1"/>
+          </a:fillRef>
+          <a:effectRef idx="2">
+            <a:schemeClr val="accent1"/>
+          </a:effectRef>
+          <a:fontRef idx="minor">
+            <a:schemeClr val="lt1"/>
+          </a:fontRef>
+        </p:style>
+        <p:txBody>
+          <a:bodyPr rtlCol="0" anchor="ctr"/>
+          <a:lstStyle/>
+          <a:p>
+            <a:pPr algn="ctr"/>
+          </a:p>
+        </p:txBody>
+      </p:sp>
+      <p:sp>
+        <p:nvSpPr>
+          <p:cNvPr id="3" name="TextBox 2"/>
+          <p:cNvSpPr txBox="1"/>
+          <p:nvPr/>
+        </p:nvSpPr>
+        <p:spPr>
+          <a:xfrm>
+            <a:off x="502920" y="274320"/>
+            <a:ext cx="11185855" cy="731520"/>
+          </a:xfrm>
+          <a:prstGeom prst="rect">
+            <a:avLst/>
+          </a:prstGeom>
+          <a:noFill/>
+        </p:spPr>
+        <p:txBody>
+          <a:bodyPr wrap="square" anchor="ctr" lIns="45720" rIns="45720">
+            <a:spAutoFit/>
+          </a:bodyPr>
+          <a:lstStyle/>
+          <a:p>
+            <a:pPr algn="l"/>
+            <a:r>
+              <a:rPr sz="2800" b="1">
+                <a:solidFill>
+                  <a:srgbClr val="1F3A5F"/>
+                </a:solidFill>
+                <a:latin typeface="맑은 고딕"/>
+              </a:rPr>
+              <a:t>베스트 모델: D-FINE-N</a:t>
+            </a:r>
+          </a:p>
+        </p:txBody>
+      </p:sp>
+      <p:sp>
+        <p:nvSpPr>
+          <p:cNvPr id="4" name="TextBox 3"/>
+          <p:cNvSpPr txBox="1"/>
+          <p:nvPr/>
+        </p:nvSpPr>
+        <p:spPr>
+          <a:xfrm>
+            <a:off x="502920" y="1005840"/>
+            <a:ext cx="11185855" cy="640080"/>
+          </a:xfrm>
+          <a:prstGeom prst="rect">
+            <a:avLst/>
+          </a:prstGeom>
+          <a:noFill/>
+        </p:spPr>
+        <p:txBody>
+          <a:bodyPr wrap="square" anchor="t" lIns="45720" rIns="45720">
+            <a:spAutoFit/>
+          </a:bodyPr>
+          <a:lstStyle/>
+          <a:p>
+            <a:pPr algn="l"/>
+            <a:r>
+              <a:rPr sz="1800" b="1">
+                <a:solidFill>
+                  <a:srgbClr val="2AA7B8"/>
+                </a:solidFill>
+                <a:latin typeface="맑은 고딕"/>
+              </a:rPr>
+              <a:t>val 동률 선두 + 미탐지 강건성 최상 + 작다(3.7M)</a:t>
+            </a:r>
+          </a:p>
+        </p:txBody>
+      </p:sp>
+      <p:sp>
+        <p:nvSpPr>
+          <p:cNvPr id="5" name="TextBox 4"/>
+          <p:cNvSpPr txBox="1"/>
+          <p:nvPr/>
+        </p:nvSpPr>
+        <p:spPr>
+          <a:xfrm>
+            <a:off x="11094415" y="6400800"/>
+            <a:ext cx="822960" cy="320040"/>
+          </a:xfrm>
+          <a:prstGeom prst="rect">
+            <a:avLst/>
+          </a:prstGeom>
+          <a:noFill/>
+        </p:spPr>
+        <p:txBody>
+          <a:bodyPr wrap="square" anchor="t" lIns="45720" rIns="45720">
+            <a:spAutoFit/>
+          </a:bodyPr>
+          <a:lstStyle/>
+          <a:p>
+            <a:pPr algn="r"/>
+            <a:r>
+              <a:rPr sz="1200" b="0">
+                <a:solidFill>
+                  <a:srgbClr val="555B66"/>
+                </a:solidFill>
+                <a:latin typeface="맑은 고딕"/>
+              </a:rPr>
+              <a:t>15</a:t>
+            </a:r>
+          </a:p>
+        </p:txBody>
+      </p:sp>
+      <p:sp>
+        <p:nvSpPr>
+          <p:cNvPr id="6" name="TextBox 5"/>
+          <p:cNvSpPr txBox="1"/>
+          <p:nvPr/>
+        </p:nvSpPr>
+        <p:spPr>
+          <a:xfrm>
+            <a:off x="502920" y="6355080"/>
+            <a:ext cx="10180015" cy="365760"/>
+          </a:xfrm>
+          <a:prstGeom prst="rect">
+            <a:avLst/>
+          </a:prstGeom>
+          <a:noFill/>
+        </p:spPr>
+        <p:txBody>
+          <a:bodyPr wrap="square" anchor="t" lIns="45720" rIns="45720">
+            <a:spAutoFit/>
+          </a:bodyPr>
+          <a:lstStyle/>
+          <a:p>
+            <a:pPr algn="l"/>
+            <a:r>
+              <a:rPr sz="1100" b="0">
+                <a:solidFill>
+                  <a:srgbClr val="555B66"/>
+                </a:solidFill>
+                <a:latin typeface="맑은 고딕"/>
+              </a:rPr>
+              <a:t>선정 기준 ①②③은 팀원 모델 추가 전에 정했다. '미탐지 우선'은 결과를 본 뒤 정한 우선순위다. 상세는 docs/analysis.md 5절.</a:t>
+            </a:r>
+          </a:p>
+        </p:txBody>
+      </p:sp>
+      <p:sp>
+        <p:nvSpPr>
+          <p:cNvPr id="7" name="TextBox 6"/>
+          <p:cNvSpPr txBox="1"/>
+          <p:nvPr/>
+        </p:nvSpPr>
+        <p:spPr>
+          <a:xfrm>
+            <a:off x="548640" y="1783080"/>
+            <a:ext cx="6949440" cy="4572000"/>
+          </a:xfrm>
+          <a:prstGeom prst="rect">
+            <a:avLst/>
+          </a:prstGeom>
+          <a:noFill/>
+        </p:spPr>
+        <p:txBody>
+          <a:bodyPr wrap="square" lIns="45720" rIns="45720">
+            <a:spAutoFit/>
+          </a:bodyPr>
+          <a:lstStyle/>
+          <a:p>
+            <a:pPr>
+              <a:spcAft>
+                <a:spcPts val="1000"/>
+              </a:spcAft>
+            </a:pPr>
+            <a:r>
+              <a:rPr sz="1500" b="1">
+                <a:solidFill>
+                  <a:srgbClr val="2AA7B8"/>
+                </a:solidFill>
+                <a:latin typeface="맑은 고딕"/>
+              </a:rPr>
+              <a:t>• </a:t>
+            </a:r>
+            <a:r>
+              <a:rPr sz="1500" b="1">
+                <a:solidFill>
+                  <a:srgbClr val="222222"/>
+                </a:solidFill>
+                <a:latin typeface="맑은 고딕"/>
+              </a:rPr>
+              <a:t>① val mAP50-95</a:t>
+            </a:r>
+            <a:r>
+              <a:rPr sz="1500" b="0">
+                <a:solidFill>
+                  <a:srgbClr val="222222"/>
+                </a:solidFill>
+                <a:latin typeface="맑은 고딕"/>
+              </a:rPr>
+              <a:t>: val 이미지 복원추출 1,000회로 비교하니 </a:t>
+            </a:r>
+            <a:r>
+              <a:rPr sz="1500" b="1">
+                <a:solidFill>
+                  <a:srgbClr val="222222"/>
+                </a:solidFill>
+                <a:latin typeface="맑은 고딕"/>
+              </a:rPr>
+              <a:t>RT-DETR-l 0.662와 D-FINE-N 0.655가 동률 선두</a:t>
+            </a:r>
+            <a:r>
+              <a:rPr sz="1500" b="0">
+                <a:solidFill>
+                  <a:srgbClr val="222222"/>
+                </a:solidFill>
+                <a:latin typeface="맑은 고딕"/>
+              </a:rPr>
+              <a:t>(차이 −0.008, 95% 구간 −0.016~0.000). R50(0.615)·YOLO26n(0.642)은 유의하게 낮음. 공식 라벨만 보면 R50도 동률</a:t>
+            </a:r>
+          </a:p>
+          <a:p>
+            <a:pPr>
+              <a:spcAft>
+                <a:spcPts val="1000"/>
+              </a:spcAft>
+            </a:pPr>
+            <a:r>
+              <a:rPr sz="1500" b="1">
+                <a:solidFill>
+                  <a:srgbClr val="2AA7B8"/>
+                </a:solidFill>
+                <a:latin typeface="맑은 고딕"/>
+              </a:rPr>
+              <a:t>• </a:t>
+            </a:r>
+            <a:r>
+              <a:rPr sz="1500" b="1">
+                <a:solidFill>
+                  <a:srgbClr val="222222"/>
+                </a:solidFill>
+                <a:latin typeface="맑은 고딕"/>
+              </a:rPr>
+              <a:t>② 동률이면 강건성</a:t>
+            </a:r>
+            <a:r>
+              <a:rPr sz="1500" b="0">
+                <a:solidFill>
+                  <a:srgbClr val="222222"/>
+                </a:solidFill>
+                <a:latin typeface="맑은 고딕"/>
+              </a:rPr>
+              <a:t>: 합성 점 AP와 3호기 검출은 D-FINE-N이 우세(0.574 대 0.451, 89% 대 61%), 가짜 정상 오경보는 RT-DETR-l이 우세(37% 대 49%)</a:t>
+            </a:r>
+          </a:p>
+          <a:p>
+            <a:pPr>
+              <a:spcAft>
+                <a:spcPts val="1000"/>
+              </a:spcAft>
+            </a:pPr>
+            <a:r>
+              <a:rPr sz="1500" b="1">
+                <a:solidFill>
+                  <a:srgbClr val="2AA7B8"/>
+                </a:solidFill>
+                <a:latin typeface="맑은 고딕"/>
+              </a:rPr>
+              <a:t>• </a:t>
+            </a:r>
+            <a:r>
+              <a:rPr sz="1500" b="0">
+                <a:solidFill>
+                  <a:srgbClr val="222222"/>
+                </a:solidFill>
+                <a:latin typeface="맑은 고딕"/>
+              </a:rPr>
+              <a:t>→ 과제가 "AI 미탐지 조건 분석"이고 놓침이 재검사보다 비싸다고 보아 </a:t>
+            </a:r>
+            <a:r>
+              <a:rPr sz="1500" b="1">
+                <a:solidFill>
+                  <a:srgbClr val="222222"/>
+                </a:solidFill>
+                <a:latin typeface="맑은 고딕"/>
+              </a:rPr>
+              <a:t>미탐지를 우선</a:t>
+            </a:r>
+            <a:r>
+              <a:rPr sz="1500" b="0">
+                <a:solidFill>
+                  <a:srgbClr val="222222"/>
+                </a:solidFill>
+                <a:latin typeface="맑은 고딕"/>
+              </a:rPr>
+              <a:t>했다</a:t>
+            </a:r>
+          </a:p>
+          <a:p>
+            <a:pPr>
+              <a:spcAft>
+                <a:spcPts val="1000"/>
+              </a:spcAft>
+            </a:pPr>
+            <a:r>
+              <a:rPr sz="1500" b="1">
+                <a:solidFill>
+                  <a:srgbClr val="2AA7B8"/>
+                </a:solidFill>
+                <a:latin typeface="맑은 고딕"/>
+              </a:rPr>
+              <a:t>• </a:t>
+            </a:r>
+            <a:r>
+              <a:rPr sz="1500" b="1">
+                <a:solidFill>
+                  <a:srgbClr val="222222"/>
+                </a:solidFill>
+                <a:latin typeface="맑은 고딕"/>
+              </a:rPr>
+              <a:t>③ 크기</a:t>
+            </a:r>
+            <a:r>
+              <a:rPr sz="1500" b="0">
+                <a:solidFill>
+                  <a:srgbClr val="222222"/>
+                </a:solidFill>
+                <a:latin typeface="맑은 고딕"/>
+              </a:rPr>
+              <a:t>: 3.7M(15MB)로 RT-DETR-l(32.8M)의 약 1/9</a:t>
+            </a:r>
+          </a:p>
+        </p:txBody>
+      </p:sp>
+      <p:sp>
+        <p:nvSpPr>
+          <p:cNvPr id="8" name="TextBox 7"/>
+          <p:cNvSpPr txBox="1"/>
+          <p:nvPr/>
+        </p:nvSpPr>
+        <p:spPr>
+          <a:xfrm>
+            <a:off x="7772400" y="1783080"/>
+            <a:ext cx="4114800" cy="4572000"/>
+          </a:xfrm>
+          <a:prstGeom prst="rect">
+            <a:avLst/>
+          </a:prstGeom>
+          <a:noFill/>
+        </p:spPr>
+        <p:txBody>
+          <a:bodyPr wrap="square" lIns="45720" rIns="45720">
+            <a:spAutoFit/>
+          </a:bodyPr>
+          <a:lstStyle/>
+          <a:p>
+            <a:pPr>
+              <a:spcAft>
+                <a:spcPts val="1000"/>
+              </a:spcAft>
+            </a:pPr>
+            <a:r>
+              <a:rPr sz="1500" b="1">
+                <a:solidFill>
+                  <a:srgbClr val="2AA7B8"/>
+                </a:solidFill>
+                <a:latin typeface="맑은 고딕"/>
+              </a:rPr>
+              <a:t>• </a:t>
+            </a:r>
+            <a:r>
+              <a:rPr sz="1500" b="1">
+                <a:solidFill>
+                  <a:srgbClr val="222222"/>
+                </a:solidFill>
+                <a:latin typeface="맑은 고딕"/>
+              </a:rPr>
+              <a:t>약점</a:t>
+            </a:r>
+            <a:r>
+              <a:rPr sz="1500" b="0">
+                <a:solidFill>
+                  <a:srgbClr val="222222"/>
+                </a:solidFill>
+                <a:latin typeface="맑은 고딕"/>
+              </a:rPr>
+              <a:t>: 노이즈 보간 오경보 49%, 신뢰도가 0.9 근처에서 포화</a:t>
+            </a:r>
+          </a:p>
+          <a:p>
+            <a:pPr>
+              <a:spcAft>
+                <a:spcPts val="1000"/>
+              </a:spcAft>
+            </a:pPr>
+            <a:r>
+              <a:rPr sz="1500" b="1">
+                <a:solidFill>
+                  <a:srgbClr val="2AA7B8"/>
+                </a:solidFill>
+                <a:latin typeface="맑은 고딕"/>
+              </a:rPr>
+              <a:t>• </a:t>
+            </a:r>
+            <a:r>
+              <a:rPr sz="1500" b="1">
+                <a:solidFill>
+                  <a:srgbClr val="222222"/>
+                </a:solidFill>
+                <a:latin typeface="맑은 고딕"/>
+              </a:rPr>
+              <a:t>대안</a:t>
+            </a:r>
+            <a:r>
+              <a:rPr sz="1500" b="0">
+                <a:solidFill>
+                  <a:srgbClr val="222222"/>
+                </a:solidFill>
+                <a:latin typeface="맑은 고딕"/>
+              </a:rPr>
+              <a:t>: 오경보 우선이면 R50 / YOLO26n, CPU 전용이면 YOLOv3-tiny</a:t>
+            </a:r>
+          </a:p>
+          <a:p>
+            <a:pPr>
+              <a:spcAft>
+                <a:spcPts val="1000"/>
+              </a:spcAft>
+            </a:pPr>
+            <a:r>
+              <a:rPr sz="1500" b="1">
+                <a:solidFill>
+                  <a:srgbClr val="2AA7B8"/>
+                </a:solidFill>
+                <a:latin typeface="맑은 고딕"/>
+              </a:rPr>
+              <a:t>• </a:t>
+            </a:r>
+            <a:r>
+              <a:rPr sz="1500" b="0">
+                <a:solidFill>
+                  <a:srgbClr val="222222"/>
+                </a:solidFill>
+                <a:latin typeface="맑은 고딕"/>
+              </a:rPr>
+              <a:t>MobileNetV3는 위치 의존·노이즈 오경보로 비권장</a:t>
+            </a:r>
+          </a:p>
+          <a:p>
+            <a:pPr>
+              <a:spcAft>
+                <a:spcPts val="1000"/>
+              </a:spcAft>
+            </a:pPr>
+            <a:r>
+              <a:rPr sz="1500" b="1">
+                <a:solidFill>
+                  <a:srgbClr val="2AA7B8"/>
+                </a:solidFill>
+                <a:latin typeface="맑은 고딕"/>
+              </a:rPr>
+              <a:t>• </a:t>
+            </a:r>
+            <a:r>
+              <a:rPr sz="1500" b="0">
+                <a:solidFill>
+                  <a:srgbClr val="222222"/>
+                </a:solidFill>
+                <a:latin typeface="맑은 고딕"/>
+              </a:rPr>
+              <a:t>이 우선순위는 </a:t>
+            </a:r>
+            <a:r>
+              <a:rPr sz="1500" b="1">
+                <a:solidFill>
+                  <a:srgbClr val="222222"/>
+                </a:solidFill>
+                <a:latin typeface="맑은 고딕"/>
+              </a:rPr>
+              <a:t>결과를 본 뒤 정한 것</a:t>
+            </a:r>
+            <a:r>
+              <a:rPr sz="1500" b="0">
+                <a:solidFill>
+                  <a:srgbClr val="222222"/>
+                </a:solidFill>
+                <a:latin typeface="맑은 고딕"/>
+              </a:rPr>
+              <a:t>이라 보고서에 그대로 밝힌다</a:t>
+            </a:r>
+          </a:p>
+        </p:txBody>
+      </p:sp>
+    </p:spTree>
+  </p:cSld>
+  <p:clrMapOvr>
+    <a:masterClrMapping/>
+  </p:clrMapOvr>
+</p:sld>
+</file>
+
+<file path=ppt/slides/slide16.xml><?xml version="1.0" encoding="utf-8"?>
+<p:sld xmlns:a="http://schemas.openxmlformats.org/drawingml/2006/main" xmlns:p="http://schemas.openxmlformats.org/presentationml/2006/main" xmlns:r="http://schemas.openxmlformats.org/officeDocument/2006/relationships">
+  <p:cSld>
+    <p:spTree>
+      <p:nvGrpSpPr>
+        <p:cNvPr id="1" name=""/>
+        <p:cNvGrpSpPr/>
+        <p:nvPr/>
+      </p:nvGrpSpPr>
+      <p:grpSpPr/>
+      <p:sp>
+        <p:nvSpPr>
+          <p:cNvPr id="2" name="Rectangle 1"/>
+          <p:cNvSpPr/>
+          <p:nvPr/>
+        </p:nvSpPr>
+        <p:spPr>
+          <a:xfrm>
+            <a:off x="0" y="0"/>
+            <a:ext cx="164592" cy="6858000"/>
+          </a:xfrm>
+          <a:prstGeom prst="rect">
+            <a:avLst/>
+          </a:prstGeom>
+          <a:solidFill>
+            <a:srgbClr val="1F3A5F"/>
+          </a:solidFill>
+          <a:ln>
+            <a:noFill/>
+          </a:ln>
+        </p:spPr>
+        <p:style>
+          <a:lnRef idx="1">
+            <a:schemeClr val="accent1"/>
+          </a:lnRef>
+          <a:fillRef idx="3">
+            <a:schemeClr val="accent1"/>
+          </a:fillRef>
+          <a:effectRef idx="2">
+            <a:schemeClr val="accent1"/>
+          </a:effectRef>
+          <a:fontRef idx="minor">
+            <a:schemeClr val="lt1"/>
+          </a:fontRef>
+        </p:style>
+        <p:txBody>
+          <a:bodyPr rtlCol="0" anchor="ctr"/>
+          <a:lstStyle/>
+          <a:p>
+            <a:pPr algn="ctr"/>
+          </a:p>
+        </p:txBody>
+      </p:sp>
+      <p:sp>
+        <p:nvSpPr>
+          <p:cNvPr id="3" name="TextBox 2"/>
+          <p:cNvSpPr txBox="1"/>
+          <p:nvPr/>
+        </p:nvSpPr>
+        <p:spPr>
+          <a:xfrm>
+            <a:off x="502920" y="274320"/>
+            <a:ext cx="11185855" cy="731520"/>
+          </a:xfrm>
+          <a:prstGeom prst="rect">
+            <a:avLst/>
+          </a:prstGeom>
+          <a:noFill/>
+        </p:spPr>
+        <p:txBody>
+          <a:bodyPr wrap="square" anchor="ctr" lIns="45720" rIns="45720">
+            <a:spAutoFit/>
+          </a:bodyPr>
+          <a:lstStyle/>
+          <a:p>
+            <a:pPr algn="l"/>
+            <a:r>
+              <a:rPr sz="2800" b="1">
+                <a:solidFill>
+                  <a:srgbClr val="1F3A5F"/>
+                </a:solidFill>
+                <a:latin typeface="맑은 고딕"/>
+              </a:rPr>
+              <a:t>현장 활용: 3단 판정과 재검사 구간</a:t>
+            </a:r>
+          </a:p>
+        </p:txBody>
+      </p:sp>
+      <p:sp>
+        <p:nvSpPr>
+          <p:cNvPr id="4" name="TextBox 3"/>
+          <p:cNvSpPr txBox="1"/>
+          <p:nvPr/>
+        </p:nvSpPr>
+        <p:spPr>
+          <a:xfrm>
+            <a:off x="502920" y="1005840"/>
+            <a:ext cx="11185855" cy="640080"/>
+          </a:xfrm>
+          <a:prstGeom prst="rect">
+            <a:avLst/>
+          </a:prstGeom>
+          <a:noFill/>
+        </p:spPr>
+        <p:txBody>
+          <a:bodyPr wrap="square" anchor="t" lIns="45720" rIns="45720">
+            <a:spAutoFit/>
+          </a:bodyPr>
+          <a:lstStyle/>
+          <a:p>
+            <a:pPr algn="l"/>
+            <a:r>
+              <a:rPr sz="1800" b="1">
+                <a:solidFill>
+                  <a:srgbClr val="2AA7B8"/>
+                </a:solidFill>
+                <a:latin typeface="맑은 고딕"/>
+              </a:rPr>
+              <a:t>실제 test에서는 결함 369장(≥0.748)과 빈 라벨 27장(≤0.04)이 완전히 갈린다</a:t>
+            </a:r>
+          </a:p>
+        </p:txBody>
+      </p:sp>
+      <p:sp>
+        <p:nvSpPr>
+          <p:cNvPr id="5" name="TextBox 4"/>
+          <p:cNvSpPr txBox="1"/>
+          <p:nvPr/>
+        </p:nvSpPr>
+        <p:spPr>
+          <a:xfrm>
+            <a:off x="11094415" y="6400800"/>
+            <a:ext cx="822960" cy="320040"/>
+          </a:xfrm>
+          <a:prstGeom prst="rect">
+            <a:avLst/>
+          </a:prstGeom>
+          <a:noFill/>
+        </p:spPr>
+        <p:txBody>
+          <a:bodyPr wrap="square" anchor="t" lIns="45720" rIns="45720">
+            <a:spAutoFit/>
+          </a:bodyPr>
+          <a:lstStyle/>
+          <a:p>
+            <a:pPr algn="r"/>
+            <a:r>
+              <a:rPr sz="1200" b="0">
+                <a:solidFill>
+                  <a:srgbClr val="555B66"/>
+                </a:solidFill>
+                <a:latin typeface="맑은 고딕"/>
+              </a:rPr>
+              <a:t>16</a:t>
+            </a:r>
+          </a:p>
+        </p:txBody>
+      </p:sp>
+      <p:sp>
+        <p:nvSpPr>
+          <p:cNvPr id="6" name="TextBox 5"/>
+          <p:cNvSpPr txBox="1"/>
+          <p:nvPr/>
+        </p:nvSpPr>
+        <p:spPr>
+          <a:xfrm>
+            <a:off x="502920" y="6355080"/>
+            <a:ext cx="10180015" cy="365760"/>
+          </a:xfrm>
+          <a:prstGeom prst="rect">
+            <a:avLst/>
+          </a:prstGeom>
+          <a:noFill/>
+        </p:spPr>
+        <p:txBody>
+          <a:bodyPr wrap="square" anchor="t" lIns="45720" rIns="45720">
+            <a:spAutoFit/>
+          </a:bodyPr>
+          <a:lstStyle/>
+          <a:p>
+            <a:pPr algn="l"/>
+            <a:r>
+              <a:rPr sz="1100" b="0">
+                <a:solidFill>
+                  <a:srgbClr val="555B66"/>
+                </a:solidFill>
+                <a:latin typeface="맑은 고딕"/>
+              </a:rPr>
+              <a:t>재검사 구간의 효과는 합성·가짜 정상에 기반한 참고 수치다. 재검사·놓침 비용은 현장 값을 몰라 가정하지 않았다.</a:t>
+            </a:r>
+          </a:p>
+        </p:txBody>
+      </p:sp>
+      <p:pic>
+        <p:nvPicPr>
+          <p:cNvPr id="7" name="Picture 6" descr="fig4b_final_dfine.png"/>
+          <p:cNvPicPr>
+            <a:picLocks noChangeAspect="1"/>
+          </p:cNvPicPr>
+          <p:nvPr/>
+        </p:nvPicPr>
+        <p:blipFill>
+          <a:blip r:embed="rId2"/>
+          <a:stretch>
+            <a:fillRect/>
+          </a:stretch>
+        </p:blipFill>
+        <p:spPr>
+          <a:xfrm>
+            <a:off x="1687794" y="1508760"/>
+            <a:ext cx="8785931" cy="3246120"/>
+          </a:xfrm>
+          <a:prstGeom prst="rect">
+            <a:avLst/>
+          </a:prstGeom>
+        </p:spPr>
+      </p:pic>
+      <p:sp>
+        <p:nvSpPr>
+          <p:cNvPr id="8" name="TextBox 7"/>
+          <p:cNvSpPr txBox="1"/>
+          <p:nvPr/>
+        </p:nvSpPr>
+        <p:spPr>
+          <a:xfrm>
+            <a:off x="731520" y="4846320"/>
+            <a:ext cx="10789920" cy="1463040"/>
+          </a:xfrm>
+          <a:prstGeom prst="rect">
+            <a:avLst/>
+          </a:prstGeom>
+          <a:noFill/>
+        </p:spPr>
+        <p:txBody>
+          <a:bodyPr wrap="square" lIns="45720" rIns="45720">
+            <a:spAutoFit/>
+          </a:bodyPr>
+          <a:lstStyle/>
+          <a:p>
+            <a:pPr>
+              <a:spcAft>
+                <a:spcPts val="600"/>
+              </a:spcAft>
+            </a:pPr>
+            <a:r>
+              <a:rPr sz="1600" b="1">
+                <a:solidFill>
+                  <a:srgbClr val="2AA7B8"/>
+                </a:solidFill>
+                <a:latin typeface="맑은 고딕"/>
+              </a:rPr>
+              <a:t>• </a:t>
+            </a:r>
+            <a:r>
+              <a:rPr sz="1600" b="1">
+                <a:solidFill>
+                  <a:srgbClr val="222222"/>
+                </a:solidFill>
+                <a:latin typeface="맑은 고딕"/>
+              </a:rPr>
+              <a:t>불합격</a:t>
+            </a:r>
+            <a:r>
+              <a:rPr sz="1600" b="0">
+                <a:solidFill>
+                  <a:srgbClr val="222222"/>
+                </a:solidFill>
+                <a:latin typeface="맑은 고딕"/>
+              </a:rPr>
+              <a:t> 최고 신뢰도 ≥ 0.66(val 임계값)  |  </a:t>
+            </a:r>
+            <a:r>
+              <a:rPr sz="1600" b="1">
+                <a:solidFill>
+                  <a:srgbClr val="222222"/>
+                </a:solidFill>
+                <a:latin typeface="맑은 고딕"/>
+              </a:rPr>
+              <a:t>재검사</a:t>
+            </a:r>
+            <a:r>
+              <a:rPr sz="1600" b="0">
+                <a:solidFill>
+                  <a:srgbClr val="222222"/>
+                </a:solidFill>
+                <a:latin typeface="맑은 고딕"/>
+              </a:rPr>
+              <a:t> 0.3 ~ 0.66  |  </a:t>
+            </a:r>
+            <a:r>
+              <a:rPr sz="1600" b="1">
+                <a:solidFill>
+                  <a:srgbClr val="222222"/>
+                </a:solidFill>
+                <a:latin typeface="맑은 고딕"/>
+              </a:rPr>
+              <a:t>합격</a:t>
+            </a:r>
+            <a:r>
+              <a:rPr sz="1600" b="0">
+                <a:solidFill>
+                  <a:srgbClr val="222222"/>
+                </a:solidFill>
+                <a:latin typeface="맑은 고딕"/>
+              </a:rPr>
+              <a:t> &lt; 0.3</a:t>
+            </a:r>
+          </a:p>
+          <a:p>
+            <a:pPr>
+              <a:spcAft>
+                <a:spcPts val="600"/>
+              </a:spcAft>
+            </a:pPr>
+            <a:r>
+              <a:rPr sz="1600" b="1">
+                <a:solidFill>
+                  <a:srgbClr val="2AA7B8"/>
+                </a:solidFill>
+                <a:latin typeface="맑은 고딕"/>
+              </a:rPr>
+              <a:t>• </a:t>
+            </a:r>
+            <a:r>
+              <a:rPr sz="1600" b="0">
+                <a:solidFill>
+                  <a:srgbClr val="222222"/>
+                </a:solidFill>
+                <a:latin typeface="맑은 고딕"/>
+              </a:rPr>
+              <a:t>하한을 0.3으로 낮추면 옅은 점 검출 61.9% → 67.1%, 대신 가짜 정상 오경보 4.1% → 5.7%(평균 보간), 49% → 59%(노이즈 보간)</a:t>
+            </a:r>
+          </a:p>
+          <a:p>
+            <a:pPr>
+              <a:spcAft>
+                <a:spcPts val="600"/>
+              </a:spcAft>
+            </a:pPr>
+            <a:r>
+              <a:rPr sz="1600" b="1">
+                <a:solidFill>
+                  <a:srgbClr val="2AA7B8"/>
+                </a:solidFill>
+                <a:latin typeface="맑은 고딕"/>
+              </a:rPr>
+              <a:t>• </a:t>
+            </a:r>
+            <a:r>
+              <a:rPr sz="1600" b="0">
+                <a:solidFill>
+                  <a:srgbClr val="222222"/>
+                </a:solidFill>
+                <a:latin typeface="맑은 고딕"/>
+              </a:rPr>
+              <a:t>오경보가 비싼 현장은 재검사 구간의 이득이 작다</a:t>
+            </a:r>
+          </a:p>
+        </p:txBody>
+      </p:sp>
+    </p:spTree>
+  </p:cSld>
+  <p:clrMapOvr>
+    <a:masterClrMapping/>
+  </p:clrMapOvr>
+</p:sld>
+</file>
+
+<file path=ppt/slides/slide17.xml><?xml version="1.0" encoding="utf-8"?>
+<p:sld xmlns:a="http://schemas.openxmlformats.org/drawingml/2006/main" xmlns:p="http://schemas.openxmlformats.org/presentationml/2006/main" xmlns:r="http://schemas.openxmlformats.org/officeDocument/2006/relationships">
+  <p:cSld>
+    <p:spTree>
+      <p:nvGrpSpPr>
+        <p:cNvPr id="1" name=""/>
+        <p:cNvGrpSpPr/>
+        <p:nvPr/>
+      </p:nvGrpSpPr>
+      <p:grpSpPr/>
+      <p:sp>
+        <p:nvSpPr>
+          <p:cNvPr id="2" name="Rectangle 1"/>
+          <p:cNvSpPr/>
+          <p:nvPr/>
+        </p:nvSpPr>
+        <p:spPr>
+          <a:xfrm>
+            <a:off x="0" y="0"/>
+            <a:ext cx="164592" cy="6858000"/>
+          </a:xfrm>
+          <a:prstGeom prst="rect">
+            <a:avLst/>
+          </a:prstGeom>
+          <a:solidFill>
+            <a:srgbClr val="1F3A5F"/>
+          </a:solidFill>
+          <a:ln>
+            <a:noFill/>
+          </a:ln>
+        </p:spPr>
+        <p:style>
+          <a:lnRef idx="1">
+            <a:schemeClr val="accent1"/>
+          </a:lnRef>
+          <a:fillRef idx="3">
+            <a:schemeClr val="accent1"/>
+          </a:fillRef>
+          <a:effectRef idx="2">
+            <a:schemeClr val="accent1"/>
+          </a:effectRef>
+          <a:fontRef idx="minor">
+            <a:schemeClr val="lt1"/>
+          </a:fontRef>
+        </p:style>
+        <p:txBody>
+          <a:bodyPr rtlCol="0" anchor="ctr"/>
+          <a:lstStyle/>
+          <a:p>
+            <a:pPr algn="ctr"/>
+          </a:p>
+        </p:txBody>
+      </p:sp>
+      <p:sp>
+        <p:nvSpPr>
+          <p:cNvPr id="3" name="TextBox 2"/>
+          <p:cNvSpPr txBox="1"/>
+          <p:nvPr/>
+        </p:nvSpPr>
+        <p:spPr>
+          <a:xfrm>
+            <a:off x="502920" y="274320"/>
+            <a:ext cx="11185855" cy="731520"/>
+          </a:xfrm>
+          <a:prstGeom prst="rect">
+            <a:avLst/>
+          </a:prstGeom>
+          <a:noFill/>
+        </p:spPr>
+        <p:txBody>
+          <a:bodyPr wrap="square" anchor="ctr" lIns="45720" rIns="45720">
+            <a:spAutoFit/>
+          </a:bodyPr>
+          <a:lstStyle/>
+          <a:p>
+            <a:pPr algn="l"/>
+            <a:r>
+              <a:rPr sz="2800" b="1">
+                <a:solidFill>
+                  <a:srgbClr val="1F3A5F"/>
+                </a:solidFill>
+                <a:latin typeface="맑은 고딕"/>
+              </a:rPr>
+              <a:t>모델 선택 가이드와 처리 속도</a:t>
+            </a:r>
+          </a:p>
+        </p:txBody>
+      </p:sp>
+      <p:sp>
+        <p:nvSpPr>
+          <p:cNvPr id="4" name="TextBox 3"/>
+          <p:cNvSpPr txBox="1"/>
+          <p:nvPr/>
+        </p:nvSpPr>
+        <p:spPr>
+          <a:xfrm>
+            <a:off x="502920" y="1005840"/>
+            <a:ext cx="11185855" cy="640080"/>
+          </a:xfrm>
+          <a:prstGeom prst="rect">
+            <a:avLst/>
+          </a:prstGeom>
+          <a:noFill/>
+        </p:spPr>
+        <p:txBody>
+          <a:bodyPr wrap="square" anchor="t" lIns="45720" rIns="45720">
+            <a:spAutoFit/>
+          </a:bodyPr>
+          <a:lstStyle/>
+          <a:p>
+            <a:pPr algn="l"/>
+            <a:r>
+              <a:rPr sz="1800" b="1">
+                <a:solidFill>
+                  <a:srgbClr val="2AA7B8"/>
+                </a:solidFill>
+                <a:latin typeface="맑은 고딕"/>
+              </a:rPr>
+              <a:t>촬영 간격(중앙값 4초)보다 모든 모델이 빠르다</a:t>
+            </a:r>
+          </a:p>
+        </p:txBody>
+      </p:sp>
+      <p:sp>
+        <p:nvSpPr>
+          <p:cNvPr id="5" name="TextBox 4"/>
+          <p:cNvSpPr txBox="1"/>
+          <p:nvPr/>
+        </p:nvSpPr>
+        <p:spPr>
+          <a:xfrm>
+            <a:off x="11094415" y="6400800"/>
+            <a:ext cx="822960" cy="320040"/>
+          </a:xfrm>
+          <a:prstGeom prst="rect">
+            <a:avLst/>
+          </a:prstGeom>
+          <a:noFill/>
+        </p:spPr>
+        <p:txBody>
+          <a:bodyPr wrap="square" anchor="t" lIns="45720" rIns="45720">
+            <a:spAutoFit/>
+          </a:bodyPr>
+          <a:lstStyle/>
+          <a:p>
+            <a:pPr algn="r"/>
+            <a:r>
+              <a:rPr sz="1200" b="0">
+                <a:solidFill>
+                  <a:srgbClr val="555B66"/>
+                </a:solidFill>
+                <a:latin typeface="맑은 고딕"/>
+              </a:rPr>
+              <a:t>17</a:t>
             </a:r>
           </a:p>
         </p:txBody>
@@ -6526,7 +8143,7 @@
 </p:sld>
 </file>
 
-<file path=ppt/slides/slide15.xml><?xml version="1.0" encoding="utf-8"?>
+<file path=ppt/slides/slide18.xml><?xml version="1.0" encoding="utf-8"?>
 <p:sld xmlns:a="http://schemas.openxmlformats.org/drawingml/2006/main" xmlns:p="http://schemas.openxmlformats.org/presentationml/2006/main" xmlns:r="http://schemas.openxmlformats.org/officeDocument/2006/relationships">
   <p:cSld>
     <p:spTree>
@@ -6609,7 +8226,7 @@
                 </a:solidFill>
                 <a:latin typeface="맑은 고딕"/>
               </a:rPr>
-              <a:t>차별점: 새 알고리즘이 아니라 "점수를 믿게 만드는 검증"</a:t>
+              <a:t>차별점: 점수를 믿게 만드는 검증</a:t>
             </a:r>
           </a:p>
         </p:txBody>
@@ -6644,7 +8261,7 @@
                 </a:solidFill>
                 <a:latin typeface="맑은 고딕"/>
               </a:rPr>
-              <a:t>이 검증이 없었다면 "6개 모델 모두 F1 0.99"에서 끝났을 것이다</a:t>
+              <a:t>못 찾은 것의 원인을 확인하고, 일반화까지 시험해 모델을 골랐다</a:t>
             </a:r>
           </a:p>
         </p:txBody>
@@ -6679,7 +8296,7 @@
                 </a:solidFill>
                 <a:latin typeface="맑은 고딕"/>
               </a:rPr>
-              <a:t>15</a:t>
+              <a:t>18</a:t>
             </a:r>
           </a:p>
         </p:txBody>
@@ -6727,7 +8344,7 @@
                 </a:solidFill>
                 <a:latin typeface="맑은 고딕"/>
               </a:rPr>
-              <a:t>평가 재설계</a:t>
+              <a:t>오류의 원인 규명</a:t>
             </a:r>
             <a:r>
               <a:rPr sz="2000" b="0">
@@ -6736,7 +8353,25 @@
                 </a:solidFill>
                 <a:latin typeface="맑은 고딕"/>
               </a:rPr>
-              <a:t>: 공식·팀 라벨 분리, 중심 거리 평가, mAP50-95 → 포화된 점수 뒤의 차이를 드러냄</a:t>
+              <a:t>: 놓친 것이 아니라 라벨 박스 크기 차이임을 확대 확인하고, </a:t>
+            </a:r>
+            <a:r>
+              <a:rPr sz="2000" b="1">
+                <a:solidFill>
+                  <a:srgbClr val="222222"/>
+                </a:solidFill>
+                <a:latin typeface="맑은 고딕"/>
+              </a:rPr>
+              <a:t>중심 거리 평가</a:t>
+            </a:r>
+            <a:r>
+              <a:rPr sz="2000" b="0">
+                <a:solidFill>
+                  <a:srgbClr val="222222"/>
+                </a:solidFill>
+                <a:latin typeface="맑은 고딕"/>
+              </a:rPr>
+              <a:t>로 재채점</a:t>
             </a:r>
           </a:p>
           <a:p>
@@ -6919,7 +8554,7 @@
 </p:sld>
 </file>
 
-<file path=ppt/slides/slide16.xml><?xml version="1.0" encoding="utf-8"?>
+<file path=ppt/slides/slide19.xml><?xml version="1.0" encoding="utf-8"?>
 <p:sld xmlns:a="http://schemas.openxmlformats.org/drawingml/2006/main" xmlns:p="http://schemas.openxmlformats.org/presentationml/2006/main" xmlns:r="http://schemas.openxmlformats.org/officeDocument/2006/relationships">
   <p:cSld>
     <p:spTree>
@@ -7072,7 +8707,7 @@
                 </a:solidFill>
                 <a:latin typeface="맑은 고딕"/>
               </a:rPr>
-              <a:t>16</a:t>
+              <a:t>19</a:t>
             </a:r>
           </a:p>
         </p:txBody>
@@ -7422,768 +9057,6 @@
                 <a:latin typeface="맑은 고딕"/>
               </a:rPr>
               <a:t>모든 수치의 출처 파일을 docs/와 runs/에 보존(예측 JSON은 제외)</a:t>
-            </a:r>
-          </a:p>
-        </p:txBody>
-      </p:sp>
-    </p:spTree>
-  </p:cSld>
-  <p:clrMapOvr>
-    <a:masterClrMapping/>
-  </p:clrMapOvr>
-</p:sld>
-</file>
-
-<file path=ppt/slides/slide17.xml><?xml version="1.0" encoding="utf-8"?>
-<p:sld xmlns:a="http://schemas.openxmlformats.org/drawingml/2006/main" xmlns:p="http://schemas.openxmlformats.org/presentationml/2006/main" xmlns:r="http://schemas.openxmlformats.org/officeDocument/2006/relationships">
-  <p:cSld>
-    <p:spTree>
-      <p:nvGrpSpPr>
-        <p:cNvPr id="1" name=""/>
-        <p:cNvGrpSpPr/>
-        <p:nvPr/>
-      </p:nvGrpSpPr>
-      <p:grpSpPr/>
-      <p:sp>
-        <p:nvSpPr>
-          <p:cNvPr id="2" name="Rectangle 1"/>
-          <p:cNvSpPr/>
-          <p:nvPr/>
-        </p:nvSpPr>
-        <p:spPr>
-          <a:xfrm>
-            <a:off x="0" y="0"/>
-            <a:ext cx="164592" cy="6858000"/>
-          </a:xfrm>
-          <a:prstGeom prst="rect">
-            <a:avLst/>
-          </a:prstGeom>
-          <a:solidFill>
-            <a:srgbClr val="1F3A5F"/>
-          </a:solidFill>
-          <a:ln>
-            <a:noFill/>
-          </a:ln>
-        </p:spPr>
-        <p:style>
-          <a:lnRef idx="1">
-            <a:schemeClr val="accent1"/>
-          </a:lnRef>
-          <a:fillRef idx="3">
-            <a:schemeClr val="accent1"/>
-          </a:fillRef>
-          <a:effectRef idx="2">
-            <a:schemeClr val="accent1"/>
-          </a:effectRef>
-          <a:fontRef idx="minor">
-            <a:schemeClr val="lt1"/>
-          </a:fontRef>
-        </p:style>
-        <p:txBody>
-          <a:bodyPr rtlCol="0" anchor="ctr"/>
-          <a:lstStyle/>
-          <a:p>
-            <a:pPr algn="ctr"/>
-          </a:p>
-        </p:txBody>
-      </p:sp>
-      <p:sp>
-        <p:nvSpPr>
-          <p:cNvPr id="3" name="TextBox 2"/>
-          <p:cNvSpPr txBox="1"/>
-          <p:nvPr/>
-        </p:nvSpPr>
-        <p:spPr>
-          <a:xfrm>
-            <a:off x="502920" y="274320"/>
-            <a:ext cx="11185855" cy="731520"/>
-          </a:xfrm>
-          <a:prstGeom prst="rect">
-            <a:avLst/>
-          </a:prstGeom>
-          <a:noFill/>
-        </p:spPr>
-        <p:txBody>
-          <a:bodyPr wrap="square" anchor="ctr" lIns="45720" rIns="45720">
-            <a:spAutoFit/>
-          </a:bodyPr>
-          <a:lstStyle/>
-          <a:p>
-            <a:pPr algn="l"/>
-            <a:r>
-              <a:rPr sz="2800" b="1">
-                <a:solidFill>
-                  <a:srgbClr val="1F3A5F"/>
-                </a:solidFill>
-                <a:latin typeface="맑은 고딕"/>
-              </a:rPr>
-              <a:t>한계와 향후 과제</a:t>
-            </a:r>
-          </a:p>
-        </p:txBody>
-      </p:sp>
-      <p:sp>
-        <p:nvSpPr>
-          <p:cNvPr id="4" name="TextBox 3"/>
-          <p:cNvSpPr txBox="1"/>
-          <p:nvPr/>
-        </p:nvSpPr>
-        <p:spPr>
-          <a:xfrm>
-            <a:off x="502920" y="1005840"/>
-            <a:ext cx="11185855" cy="640080"/>
-          </a:xfrm>
-          <a:prstGeom prst="rect">
-            <a:avLst/>
-          </a:prstGeom>
-          <a:noFill/>
-        </p:spPr>
-        <p:txBody>
-          <a:bodyPr wrap="square" anchor="t" lIns="45720" rIns="45720">
-            <a:spAutoFit/>
-          </a:bodyPr>
-          <a:lstStyle/>
-          <a:p>
-            <a:pPr algn="l"/>
-            <a:r>
-              <a:rPr sz="1800" b="1">
-                <a:solidFill>
-                  <a:srgbClr val="2AA7B8"/>
-                </a:solidFill>
-                <a:latin typeface="맑은 고딕"/>
-              </a:rPr>
-              <a:t>숨기지 않고 적는다</a:t>
-            </a:r>
-          </a:p>
-        </p:txBody>
-      </p:sp>
-      <p:sp>
-        <p:nvSpPr>
-          <p:cNvPr id="5" name="TextBox 4"/>
-          <p:cNvSpPr txBox="1"/>
-          <p:nvPr/>
-        </p:nvSpPr>
-        <p:spPr>
-          <a:xfrm>
-            <a:off x="11094415" y="6400800"/>
-            <a:ext cx="822960" cy="320040"/>
-          </a:xfrm>
-          <a:prstGeom prst="rect">
-            <a:avLst/>
-          </a:prstGeom>
-          <a:noFill/>
-        </p:spPr>
-        <p:txBody>
-          <a:bodyPr wrap="square" anchor="t" lIns="45720" rIns="45720">
-            <a:spAutoFit/>
-          </a:bodyPr>
-          <a:lstStyle/>
-          <a:p>
-            <a:pPr algn="r"/>
-            <a:r>
-              <a:rPr sz="1200" b="0">
-                <a:solidFill>
-                  <a:srgbClr val="555B66"/>
-                </a:solidFill>
-                <a:latin typeface="맑은 고딕"/>
-              </a:rPr>
-              <a:t>17</a:t>
-            </a:r>
-          </a:p>
-        </p:txBody>
-      </p:sp>
-      <p:sp>
-        <p:nvSpPr>
-          <p:cNvPr id="6" name="TextBox 5"/>
-          <p:cNvSpPr txBox="1"/>
-          <p:nvPr/>
-        </p:nvSpPr>
-        <p:spPr>
-          <a:xfrm>
-            <a:off x="640080" y="1783080"/>
-            <a:ext cx="10972800" cy="4572000"/>
-          </a:xfrm>
-          <a:prstGeom prst="rect">
-            <a:avLst/>
-          </a:prstGeom>
-          <a:noFill/>
-        </p:spPr>
-        <p:txBody>
-          <a:bodyPr wrap="square" lIns="45720" rIns="45720">
-            <a:spAutoFit/>
-          </a:bodyPr>
-          <a:lstStyle/>
-          <a:p>
-            <a:pPr>
-              <a:spcAft>
-                <a:spcPts val="1100"/>
-              </a:spcAft>
-            </a:pPr>
-            <a:r>
-              <a:rPr sz="1800" b="1">
-                <a:solidFill>
-                  <a:srgbClr val="2AA7B8"/>
-                </a:solidFill>
-                <a:latin typeface="맑은 고딕"/>
-              </a:rPr>
-              <a:t>• </a:t>
-            </a:r>
-            <a:r>
-              <a:rPr sz="1800" b="0">
-                <a:solidFill>
-                  <a:srgbClr val="222222"/>
-                </a:solidFill>
-                <a:latin typeface="맑은 고딕"/>
-              </a:rPr>
-              <a:t>합성 점과 가짜 정상은 </a:t>
-            </a:r>
-            <a:r>
-              <a:rPr sz="1800" b="1">
-                <a:solidFill>
-                  <a:srgbClr val="222222"/>
-                </a:solidFill>
-                <a:latin typeface="맑은 고딕"/>
-              </a:rPr>
-              <a:t>인위적인 이미지</a:t>
-            </a:r>
-            <a:r>
-              <a:rPr sz="1800" b="0">
-                <a:solidFill>
-                  <a:srgbClr val="222222"/>
-                </a:solidFill>
-                <a:latin typeface="맑은 고딕"/>
-              </a:rPr>
-              <a:t>다. 실제 현장 성능이 아니라 상대 비교와 취약점 탐색으로만 해석한다</a:t>
-            </a:r>
-          </a:p>
-          <a:p>
-            <a:pPr>
-              <a:spcAft>
-                <a:spcPts val="1100"/>
-              </a:spcAft>
-            </a:pPr>
-            <a:r>
-              <a:rPr sz="1800" b="1">
-                <a:solidFill>
-                  <a:srgbClr val="2AA7B8"/>
-                </a:solidFill>
-                <a:latin typeface="맑은 고딕"/>
-              </a:rPr>
-              <a:t>• </a:t>
-            </a:r>
-            <a:r>
-              <a:rPr sz="1800" b="0">
-                <a:solidFill>
-                  <a:srgbClr val="222222"/>
-                </a:solidFill>
-                <a:latin typeface="맑은 고딕"/>
-              </a:rPr>
-              <a:t>강건성 시험은 </a:t>
-            </a:r>
-            <a:r>
-              <a:rPr sz="1800" b="1">
-                <a:solidFill>
-                  <a:srgbClr val="222222"/>
-                </a:solidFill>
-                <a:latin typeface="맑은 고딕"/>
-              </a:rPr>
-              <a:t>test 이미지</a:t>
-            </a:r>
-            <a:r>
-              <a:rPr sz="1800" b="0">
-                <a:solidFill>
-                  <a:srgbClr val="222222"/>
-                </a:solidFill>
-                <a:latin typeface="맑은 고딕"/>
-              </a:rPr>
-              <a:t>로 먼저 수행했다. 모델 선정에는 val 지표만 썼지만, 선정 근거로 쓰려면 val로 반복해야 한다</a:t>
-            </a:r>
-          </a:p>
-          <a:p>
-            <a:pPr>
-              <a:spcAft>
-                <a:spcPts val="1100"/>
-              </a:spcAft>
-            </a:pPr>
-            <a:r>
-              <a:rPr sz="1800" b="1">
-                <a:solidFill>
-                  <a:srgbClr val="2AA7B8"/>
-                </a:solidFill>
-                <a:latin typeface="맑은 고딕"/>
-              </a:rPr>
-              <a:t>• </a:t>
-            </a:r>
-            <a:r>
-              <a:rPr sz="1800" b="0">
-                <a:solidFill>
-                  <a:srgbClr val="222222"/>
-                </a:solidFill>
-                <a:latin typeface="맑은 고딕"/>
-              </a:rPr>
-              <a:t>'미탐지 우선'이라는 우선순위는 결과를 본 뒤 정했다. 오경보 우선이면 선정이 바뀐다</a:t>
-            </a:r>
-          </a:p>
-          <a:p>
-            <a:pPr>
-              <a:spcAft>
-                <a:spcPts val="1100"/>
-              </a:spcAft>
-            </a:pPr>
-            <a:r>
-              <a:rPr sz="1800" b="1">
-                <a:solidFill>
-                  <a:srgbClr val="2AA7B8"/>
-                </a:solidFill>
-                <a:latin typeface="맑은 고딕"/>
-              </a:rPr>
-              <a:t>• </a:t>
-            </a:r>
-            <a:r>
-              <a:rPr sz="1800" b="0">
-                <a:solidFill>
-                  <a:srgbClr val="222222"/>
-                </a:solidFill>
-                <a:latin typeface="맑은 고딕"/>
-              </a:rPr>
-              <a:t>표시(색 사각형) 제거의 </a:t>
-            </a:r>
-            <a:r>
-              <a:rPr sz="1800" b="1">
-                <a:solidFill>
-                  <a:srgbClr val="222222"/>
-                </a:solidFill>
-                <a:latin typeface="맑은 고딕"/>
-              </a:rPr>
-              <a:t>흔적</a:t>
-            </a:r>
-            <a:r>
-              <a:rPr sz="1800" b="0">
-                <a:solidFill>
-                  <a:srgbClr val="222222"/>
-                </a:solidFill>
-                <a:latin typeface="맑은 고딕"/>
-              </a:rPr>
-              <a:t>이 단서가 되는지는 검증하지 못했다</a:t>
-            </a:r>
-          </a:p>
-          <a:p>
-            <a:pPr>
-              <a:spcAft>
-                <a:spcPts val="1100"/>
-              </a:spcAft>
-            </a:pPr>
-            <a:r>
-              <a:rPr sz="1800" b="1">
-                <a:solidFill>
-                  <a:srgbClr val="2AA7B8"/>
-                </a:solidFill>
-                <a:latin typeface="맑은 고딕"/>
-              </a:rPr>
-              <a:t>• </a:t>
-            </a:r>
-            <a:r>
-              <a:rPr sz="1800" b="0">
-                <a:solidFill>
-                  <a:srgbClr val="222222"/>
-                </a:solidFill>
-                <a:latin typeface="맑은 고딕"/>
-              </a:rPr>
-              <a:t>학습 시드가 하나이고, 팀원 모델은 학습 조건이 우리와 다르다(임계값은 우리 규칙으로 재선정)</a:t>
-            </a:r>
-          </a:p>
-          <a:p>
-            <a:pPr>
-              <a:spcAft>
-                <a:spcPts val="1100"/>
-              </a:spcAft>
-            </a:pPr>
-            <a:r>
-              <a:rPr sz="1800" b="1">
-                <a:solidFill>
-                  <a:srgbClr val="2AA7B8"/>
-                </a:solidFill>
-                <a:latin typeface="맑은 고딕"/>
-              </a:rPr>
-              <a:t>• </a:t>
-            </a:r>
-            <a:r>
-              <a:rPr sz="1800" b="0">
-                <a:solidFill>
-                  <a:srgbClr val="222222"/>
-                </a:solidFill>
-                <a:latin typeface="맑은 고딕"/>
-              </a:rPr>
-              <a:t>속도는 노트북에서 측정했고 실행마다 변동이 크다. 현장 장비 사양과 재검사 비용은 알지 못한다</a:t>
-            </a:r>
-          </a:p>
-          <a:p>
-            <a:pPr>
-              <a:spcAft>
-                <a:spcPts val="1100"/>
-              </a:spcAft>
-            </a:pPr>
-            <a:r>
-              <a:rPr sz="1800" b="1">
-                <a:solidFill>
-                  <a:srgbClr val="2AA7B8"/>
-                </a:solidFill>
-                <a:latin typeface="맑은 고딕"/>
-              </a:rPr>
-              <a:t>• </a:t>
-            </a:r>
-            <a:r>
-              <a:rPr sz="1800" b="0">
-                <a:solidFill>
-                  <a:srgbClr val="222222"/>
-                </a:solidFill>
-                <a:latin typeface="맑은 고딕"/>
-              </a:rPr>
-              <a:t>향후: 흔적 검증(원본 BMP 2x2 실험), 실제 정상 제품 이미지 확보, val 반복, 합성 점 대조군(s=0)</a:t>
-            </a:r>
-          </a:p>
-        </p:txBody>
-      </p:sp>
-    </p:spTree>
-  </p:cSld>
-  <p:clrMapOvr>
-    <a:masterClrMapping/>
-  </p:clrMapOvr>
-</p:sld>
-</file>
-
-<file path=ppt/slides/slide18.xml><?xml version="1.0" encoding="utf-8"?>
-<p:sld xmlns:a="http://schemas.openxmlformats.org/drawingml/2006/main" xmlns:p="http://schemas.openxmlformats.org/presentationml/2006/main" xmlns:r="http://schemas.openxmlformats.org/officeDocument/2006/relationships">
-  <p:cSld>
-    <p:spTree>
-      <p:nvGrpSpPr>
-        <p:cNvPr id="1" name=""/>
-        <p:cNvGrpSpPr/>
-        <p:nvPr/>
-      </p:nvGrpSpPr>
-      <p:grpSpPr/>
-      <p:sp>
-        <p:nvSpPr>
-          <p:cNvPr id="2" name="Rectangle 1"/>
-          <p:cNvSpPr/>
-          <p:nvPr/>
-        </p:nvSpPr>
-        <p:spPr>
-          <a:xfrm>
-            <a:off x="0" y="0"/>
-            <a:ext cx="164592" cy="6858000"/>
-          </a:xfrm>
-          <a:prstGeom prst="rect">
-            <a:avLst/>
-          </a:prstGeom>
-          <a:solidFill>
-            <a:srgbClr val="1F3A5F"/>
-          </a:solidFill>
-          <a:ln>
-            <a:noFill/>
-          </a:ln>
-        </p:spPr>
-        <p:style>
-          <a:lnRef idx="1">
-            <a:schemeClr val="accent1"/>
-          </a:lnRef>
-          <a:fillRef idx="3">
-            <a:schemeClr val="accent1"/>
-          </a:fillRef>
-          <a:effectRef idx="2">
-            <a:schemeClr val="accent1"/>
-          </a:effectRef>
-          <a:fontRef idx="minor">
-            <a:schemeClr val="lt1"/>
-          </a:fontRef>
-        </p:style>
-        <p:txBody>
-          <a:bodyPr rtlCol="0" anchor="ctr"/>
-          <a:lstStyle/>
-          <a:p>
-            <a:pPr algn="ctr"/>
-          </a:p>
-        </p:txBody>
-      </p:sp>
-      <p:sp>
-        <p:nvSpPr>
-          <p:cNvPr id="3" name="TextBox 2"/>
-          <p:cNvSpPr txBox="1"/>
-          <p:nvPr/>
-        </p:nvSpPr>
-        <p:spPr>
-          <a:xfrm>
-            <a:off x="502920" y="274320"/>
-            <a:ext cx="11185855" cy="731520"/>
-          </a:xfrm>
-          <a:prstGeom prst="rect">
-            <a:avLst/>
-          </a:prstGeom>
-          <a:noFill/>
-        </p:spPr>
-        <p:txBody>
-          <a:bodyPr wrap="square" anchor="ctr" lIns="45720" rIns="45720">
-            <a:spAutoFit/>
-          </a:bodyPr>
-          <a:lstStyle/>
-          <a:p>
-            <a:pPr algn="l"/>
-            <a:r>
-              <a:rPr sz="2800" b="1">
-                <a:solidFill>
-                  <a:srgbClr val="1F3A5F"/>
-                </a:solidFill>
-                <a:latin typeface="맑은 고딕"/>
-              </a:rPr>
-              <a:t>결론</a:t>
-            </a:r>
-          </a:p>
-        </p:txBody>
-      </p:sp>
-      <p:sp>
-        <p:nvSpPr>
-          <p:cNvPr id="4" name="TextBox 3"/>
-          <p:cNvSpPr txBox="1"/>
-          <p:nvPr/>
-        </p:nvSpPr>
-        <p:spPr>
-          <a:xfrm>
-            <a:off x="11094415" y="6400800"/>
-            <a:ext cx="822960" cy="320040"/>
-          </a:xfrm>
-          <a:prstGeom prst="rect">
-            <a:avLst/>
-          </a:prstGeom>
-          <a:noFill/>
-        </p:spPr>
-        <p:txBody>
-          <a:bodyPr wrap="square" anchor="t" lIns="45720" rIns="45720">
-            <a:spAutoFit/>
-          </a:bodyPr>
-          <a:lstStyle/>
-          <a:p>
-            <a:pPr algn="r"/>
-            <a:r>
-              <a:rPr sz="1200" b="0">
-                <a:solidFill>
-                  <a:srgbClr val="555B66"/>
-                </a:solidFill>
-                <a:latin typeface="맑은 고딕"/>
-              </a:rPr>
-              <a:t>18</a:t>
-            </a:r>
-          </a:p>
-        </p:txBody>
-      </p:sp>
-      <p:sp>
-        <p:nvSpPr>
-          <p:cNvPr id="5" name="TextBox 4"/>
-          <p:cNvSpPr txBox="1"/>
-          <p:nvPr/>
-        </p:nvSpPr>
-        <p:spPr>
-          <a:xfrm>
-            <a:off x="640080" y="1371600"/>
-            <a:ext cx="10972800" cy="5029200"/>
-          </a:xfrm>
-          <a:prstGeom prst="rect">
-            <a:avLst/>
-          </a:prstGeom>
-          <a:noFill/>
-        </p:spPr>
-        <p:txBody>
-          <a:bodyPr wrap="square" lIns="45720" rIns="45720">
-            <a:spAutoFit/>
-          </a:bodyPr>
-          <a:lstStyle/>
-          <a:p>
-            <a:pPr>
-              <a:spcAft>
-                <a:spcPts val="2200"/>
-              </a:spcAft>
-            </a:pPr>
-            <a:r>
-              <a:rPr sz="2400" b="1">
-                <a:solidFill>
-                  <a:srgbClr val="2AA7B8"/>
-                </a:solidFill>
-                <a:latin typeface="맑은 고딕"/>
-              </a:rPr>
-              <a:t>• </a:t>
-            </a:r>
-            <a:r>
-              <a:rPr sz="2400" b="0">
-                <a:solidFill>
-                  <a:srgbClr val="222222"/>
-                </a:solidFill>
-                <a:latin typeface="맑은 고딕"/>
-              </a:rPr>
-              <a:t>6개 모델의 기본 점수(F1 0.99)는 구분되지 않았다 → </a:t>
-            </a:r>
-            <a:r>
-              <a:rPr sz="2400" b="1">
-                <a:solidFill>
-                  <a:srgbClr val="222222"/>
-                </a:solidFill>
-                <a:latin typeface="맑은 고딕"/>
-              </a:rPr>
-              <a:t>평가를 다시 설계</a:t>
-            </a:r>
-            <a:r>
-              <a:rPr sz="2400" b="0">
-                <a:solidFill>
-                  <a:srgbClr val="222222"/>
-                </a:solidFill>
-                <a:latin typeface="맑은 고딕"/>
-              </a:rPr>
-              <a:t>했다</a:t>
-            </a:r>
-          </a:p>
-          <a:p>
-            <a:pPr>
-              <a:spcAft>
-                <a:spcPts val="2200"/>
-              </a:spcAft>
-            </a:pPr>
-            <a:r>
-              <a:rPr sz="2400" b="1">
-                <a:solidFill>
-                  <a:srgbClr val="2AA7B8"/>
-                </a:solidFill>
-                <a:latin typeface="맑은 고딕"/>
-              </a:rPr>
-              <a:t>• </a:t>
-            </a:r>
-            <a:r>
-              <a:rPr sz="2400" b="0">
-                <a:solidFill>
-                  <a:srgbClr val="222222"/>
-                </a:solidFill>
-                <a:latin typeface="맑은 고딕"/>
-              </a:rPr>
-              <a:t>"놓침"으로 보이던 오류는 </a:t>
-            </a:r>
-            <a:r>
-              <a:rPr sz="2400" b="1">
-                <a:solidFill>
-                  <a:srgbClr val="222222"/>
-                </a:solidFill>
-                <a:latin typeface="맑은 고딕"/>
-              </a:rPr>
-              <a:t>박스 크기 차이</a:t>
-            </a:r>
-            <a:r>
-              <a:rPr sz="2400" b="0">
-                <a:solidFill>
-                  <a:srgbClr val="222222"/>
-                </a:solidFill>
-                <a:latin typeface="맑은 고딕"/>
-              </a:rPr>
-              <a:t>였고, 진짜 약점은 </a:t>
-            </a:r>
-            <a:r>
-              <a:rPr sz="2400" b="1">
-                <a:solidFill>
-                  <a:srgbClr val="222222"/>
-                </a:solidFill>
-                <a:latin typeface="맑은 고딕"/>
-              </a:rPr>
-              <a:t>옅은 결함, 노이즈 무늬 오경보, MobileNet의 위치 의존</a:t>
-            </a:r>
-            <a:r>
-              <a:rPr sz="2400" b="0">
-                <a:solidFill>
-                  <a:srgbClr val="222222"/>
-                </a:solidFill>
-                <a:latin typeface="맑은 고딕"/>
-              </a:rPr>
-              <a:t>이었다</a:t>
-            </a:r>
-          </a:p>
-          <a:p>
-            <a:pPr>
-              <a:spcAft>
-                <a:spcPts val="2200"/>
-              </a:spcAft>
-            </a:pPr>
-            <a:r>
-              <a:rPr sz="2400" b="1">
-                <a:solidFill>
-                  <a:srgbClr val="2AA7B8"/>
-                </a:solidFill>
-                <a:latin typeface="맑은 고딕"/>
-              </a:rPr>
-              <a:t>• </a:t>
-            </a:r>
-            <a:r>
-              <a:rPr sz="2400" b="0">
-                <a:solidFill>
-                  <a:srgbClr val="222222"/>
-                </a:solidFill>
-                <a:latin typeface="맑은 고딕"/>
-              </a:rPr>
-              <a:t>최종 모델은 </a:t>
-            </a:r>
-            <a:r>
-              <a:rPr sz="2400" b="1">
-                <a:solidFill>
-                  <a:srgbClr val="222222"/>
-                </a:solidFill>
-                <a:latin typeface="맑은 고딕"/>
-              </a:rPr>
-              <a:t>D-FINE-N</a:t>
-            </a:r>
-            <a:r>
-              <a:rPr sz="2400" b="0">
-                <a:solidFill>
-                  <a:srgbClr val="222222"/>
-                </a:solidFill>
-                <a:latin typeface="맑은 고딕"/>
-              </a:rPr>
-              <a:t>: val 동률 선두, 미탐지 강건성 최상, 작다. 약점(노이즈 오경보)은 임계값·재검사 구간과 대안 모델로 관리한다</a:t>
-            </a:r>
-          </a:p>
-          <a:p>
-            <a:pPr>
-              <a:spcAft>
-                <a:spcPts val="2200"/>
-              </a:spcAft>
-            </a:pPr>
-            <a:r>
-              <a:rPr sz="2400" b="1">
-                <a:solidFill>
-                  <a:srgbClr val="2AA7B8"/>
-                </a:solidFill>
-                <a:latin typeface="맑은 고딕"/>
-              </a:rPr>
-              <a:t>• </a:t>
-            </a:r>
-            <a:r>
-              <a:rPr sz="2400" b="0">
-                <a:solidFill>
-                  <a:srgbClr val="222222"/>
-                </a:solidFill>
-                <a:latin typeface="맑은 고딕"/>
-              </a:rPr>
-              <a:t>공유 가능한 합성 평가 데이터와 검증 코드로 </a:t>
-            </a:r>
-            <a:r>
-              <a:rPr sz="2400" b="1">
-                <a:solidFill>
-                  <a:srgbClr val="222222"/>
-                </a:solidFill>
-                <a:latin typeface="맑은 고딕"/>
-              </a:rPr>
-              <a:t>팀 모두가 같은 시험을 재현</a:t>
-            </a:r>
-            <a:r>
-              <a:rPr sz="2400" b="0">
-                <a:solidFill>
-                  <a:srgbClr val="222222"/>
-                </a:solidFill>
-                <a:latin typeface="맑은 고딕"/>
-              </a:rPr>
-              <a:t>한다</a:t>
             </a:r>
           </a:p>
         </p:txBody>
@@ -8499,7 +9372,7 @@
                 </a:solidFill>
                 <a:latin typeface="맑은 고딕"/>
               </a:rPr>
-              <a:t>: 공식 500장은 크기가 제각각(5~21px), 팀 라벨 2,032장은 </a:t>
+              <a:t>: 공식 500장은 사람이 그려 크기가 제각각(5~21px), 팀 라벨 2,032장은 클릭 중심에 </a:t>
             </a:r>
             <a:r>
               <a:rPr sz="1600" b="1">
@@ -8517,7 +9390,7 @@
                 </a:solidFill>
                 <a:latin typeface="맑은 고딕"/>
               </a:rPr>
-              <a:t> → 점수를 부풀림</a:t>
+              <a:t> 를 자동 생성</a:t>
             </a:r>
           </a:p>
           <a:p>
@@ -8596,6 +9469,759 @@
           </a:prstGeom>
         </p:spPr>
       </p:pic>
+    </p:spTree>
+  </p:cSld>
+  <p:clrMapOvr>
+    <a:masterClrMapping/>
+  </p:clrMapOvr>
+</p:sld>
+</file>
+
+<file path=ppt/slides/slide20.xml><?xml version="1.0" encoding="utf-8"?>
+<p:sld xmlns:a="http://schemas.openxmlformats.org/drawingml/2006/main" xmlns:p="http://schemas.openxmlformats.org/presentationml/2006/main" xmlns:r="http://schemas.openxmlformats.org/officeDocument/2006/relationships">
+  <p:cSld>
+    <p:spTree>
+      <p:nvGrpSpPr>
+        <p:cNvPr id="1" name=""/>
+        <p:cNvGrpSpPr/>
+        <p:nvPr/>
+      </p:nvGrpSpPr>
+      <p:grpSpPr/>
+      <p:sp>
+        <p:nvSpPr>
+          <p:cNvPr id="2" name="Rectangle 1"/>
+          <p:cNvSpPr/>
+          <p:nvPr/>
+        </p:nvSpPr>
+        <p:spPr>
+          <a:xfrm>
+            <a:off x="0" y="0"/>
+            <a:ext cx="164592" cy="6858000"/>
+          </a:xfrm>
+          <a:prstGeom prst="rect">
+            <a:avLst/>
+          </a:prstGeom>
+          <a:solidFill>
+            <a:srgbClr val="1F3A5F"/>
+          </a:solidFill>
+          <a:ln>
+            <a:noFill/>
+          </a:ln>
+        </p:spPr>
+        <p:style>
+          <a:lnRef idx="1">
+            <a:schemeClr val="accent1"/>
+          </a:lnRef>
+          <a:fillRef idx="3">
+            <a:schemeClr val="accent1"/>
+          </a:fillRef>
+          <a:effectRef idx="2">
+            <a:schemeClr val="accent1"/>
+          </a:effectRef>
+          <a:fontRef idx="minor">
+            <a:schemeClr val="lt1"/>
+          </a:fontRef>
+        </p:style>
+        <p:txBody>
+          <a:bodyPr rtlCol="0" anchor="ctr"/>
+          <a:lstStyle/>
+          <a:p>
+            <a:pPr algn="ctr"/>
+          </a:p>
+        </p:txBody>
+      </p:sp>
+      <p:sp>
+        <p:nvSpPr>
+          <p:cNvPr id="3" name="TextBox 2"/>
+          <p:cNvSpPr txBox="1"/>
+          <p:nvPr/>
+        </p:nvSpPr>
+        <p:spPr>
+          <a:xfrm>
+            <a:off x="502920" y="274320"/>
+            <a:ext cx="11185855" cy="731520"/>
+          </a:xfrm>
+          <a:prstGeom prst="rect">
+            <a:avLst/>
+          </a:prstGeom>
+          <a:noFill/>
+        </p:spPr>
+        <p:txBody>
+          <a:bodyPr wrap="square" anchor="ctr" lIns="45720" rIns="45720">
+            <a:spAutoFit/>
+          </a:bodyPr>
+          <a:lstStyle/>
+          <a:p>
+            <a:pPr algn="l"/>
+            <a:r>
+              <a:rPr sz="2800" b="1">
+                <a:solidFill>
+                  <a:srgbClr val="1F3A5F"/>
+                </a:solidFill>
+                <a:latin typeface="맑은 고딕"/>
+              </a:rPr>
+              <a:t>한계와 향후 과제</a:t>
+            </a:r>
+          </a:p>
+        </p:txBody>
+      </p:sp>
+      <p:sp>
+        <p:nvSpPr>
+          <p:cNvPr id="4" name="TextBox 3"/>
+          <p:cNvSpPr txBox="1"/>
+          <p:nvPr/>
+        </p:nvSpPr>
+        <p:spPr>
+          <a:xfrm>
+            <a:off x="502920" y="1005840"/>
+            <a:ext cx="11185855" cy="640080"/>
+          </a:xfrm>
+          <a:prstGeom prst="rect">
+            <a:avLst/>
+          </a:prstGeom>
+          <a:noFill/>
+        </p:spPr>
+        <p:txBody>
+          <a:bodyPr wrap="square" anchor="t" lIns="45720" rIns="45720">
+            <a:spAutoFit/>
+          </a:bodyPr>
+          <a:lstStyle/>
+          <a:p>
+            <a:pPr algn="l"/>
+            <a:r>
+              <a:rPr sz="1800" b="1">
+                <a:solidFill>
+                  <a:srgbClr val="2AA7B8"/>
+                </a:solidFill>
+                <a:latin typeface="맑은 고딕"/>
+              </a:rPr>
+              <a:t>숨기지 않고 적는다</a:t>
+            </a:r>
+          </a:p>
+        </p:txBody>
+      </p:sp>
+      <p:sp>
+        <p:nvSpPr>
+          <p:cNvPr id="5" name="TextBox 4"/>
+          <p:cNvSpPr txBox="1"/>
+          <p:nvPr/>
+        </p:nvSpPr>
+        <p:spPr>
+          <a:xfrm>
+            <a:off x="11094415" y="6400800"/>
+            <a:ext cx="822960" cy="320040"/>
+          </a:xfrm>
+          <a:prstGeom prst="rect">
+            <a:avLst/>
+          </a:prstGeom>
+          <a:noFill/>
+        </p:spPr>
+        <p:txBody>
+          <a:bodyPr wrap="square" anchor="t" lIns="45720" rIns="45720">
+            <a:spAutoFit/>
+          </a:bodyPr>
+          <a:lstStyle/>
+          <a:p>
+            <a:pPr algn="r"/>
+            <a:r>
+              <a:rPr sz="1200" b="0">
+                <a:solidFill>
+                  <a:srgbClr val="555B66"/>
+                </a:solidFill>
+                <a:latin typeface="맑은 고딕"/>
+              </a:rPr>
+              <a:t>20</a:t>
+            </a:r>
+          </a:p>
+        </p:txBody>
+      </p:sp>
+      <p:sp>
+        <p:nvSpPr>
+          <p:cNvPr id="6" name="TextBox 5"/>
+          <p:cNvSpPr txBox="1"/>
+          <p:nvPr/>
+        </p:nvSpPr>
+        <p:spPr>
+          <a:xfrm>
+            <a:off x="640080" y="1783080"/>
+            <a:ext cx="10972800" cy="4572000"/>
+          </a:xfrm>
+          <a:prstGeom prst="rect">
+            <a:avLst/>
+          </a:prstGeom>
+          <a:noFill/>
+        </p:spPr>
+        <p:txBody>
+          <a:bodyPr wrap="square" lIns="45720" rIns="45720">
+            <a:spAutoFit/>
+          </a:bodyPr>
+          <a:lstStyle/>
+          <a:p>
+            <a:pPr>
+              <a:spcAft>
+                <a:spcPts val="1100"/>
+              </a:spcAft>
+            </a:pPr>
+            <a:r>
+              <a:rPr sz="1800" b="1">
+                <a:solidFill>
+                  <a:srgbClr val="2AA7B8"/>
+                </a:solidFill>
+                <a:latin typeface="맑은 고딕"/>
+              </a:rPr>
+              <a:t>• </a:t>
+            </a:r>
+            <a:r>
+              <a:rPr sz="1800" b="0">
+                <a:solidFill>
+                  <a:srgbClr val="222222"/>
+                </a:solidFill>
+                <a:latin typeface="맑은 고딕"/>
+              </a:rPr>
+              <a:t>합성 점과 가짜 정상은 </a:t>
+            </a:r>
+            <a:r>
+              <a:rPr sz="1800" b="1">
+                <a:solidFill>
+                  <a:srgbClr val="222222"/>
+                </a:solidFill>
+                <a:latin typeface="맑은 고딕"/>
+              </a:rPr>
+              <a:t>인위적인 이미지</a:t>
+            </a:r>
+            <a:r>
+              <a:rPr sz="1800" b="0">
+                <a:solidFill>
+                  <a:srgbClr val="222222"/>
+                </a:solidFill>
+                <a:latin typeface="맑은 고딕"/>
+              </a:rPr>
+              <a:t>다. 실제 현장 성능이 아니라 상대 비교와 취약점 탐색으로만 해석한다</a:t>
+            </a:r>
+          </a:p>
+          <a:p>
+            <a:pPr>
+              <a:spcAft>
+                <a:spcPts val="1100"/>
+              </a:spcAft>
+            </a:pPr>
+            <a:r>
+              <a:rPr sz="1800" b="1">
+                <a:solidFill>
+                  <a:srgbClr val="2AA7B8"/>
+                </a:solidFill>
+                <a:latin typeface="맑은 고딕"/>
+              </a:rPr>
+              <a:t>• </a:t>
+            </a:r>
+            <a:r>
+              <a:rPr sz="1800" b="0">
+                <a:solidFill>
+                  <a:srgbClr val="222222"/>
+                </a:solidFill>
+                <a:latin typeface="맑은 고딕"/>
+              </a:rPr>
+              <a:t>강건성 시험은 </a:t>
+            </a:r>
+            <a:r>
+              <a:rPr sz="1800" b="1">
+                <a:solidFill>
+                  <a:srgbClr val="222222"/>
+                </a:solidFill>
+                <a:latin typeface="맑은 고딕"/>
+              </a:rPr>
+              <a:t>test 이미지</a:t>
+            </a:r>
+            <a:r>
+              <a:rPr sz="1800" b="0">
+                <a:solidFill>
+                  <a:srgbClr val="222222"/>
+                </a:solidFill>
+                <a:latin typeface="맑은 고딕"/>
+              </a:rPr>
+              <a:t>로 먼저 수행했다. 모델 선정에는 val 지표만 썼지만, 선정 근거로 쓰려면 val로 반복해야 한다</a:t>
+            </a:r>
+          </a:p>
+          <a:p>
+            <a:pPr>
+              <a:spcAft>
+                <a:spcPts val="1100"/>
+              </a:spcAft>
+            </a:pPr>
+            <a:r>
+              <a:rPr sz="1800" b="1">
+                <a:solidFill>
+                  <a:srgbClr val="2AA7B8"/>
+                </a:solidFill>
+                <a:latin typeface="맑은 고딕"/>
+              </a:rPr>
+              <a:t>• </a:t>
+            </a:r>
+            <a:r>
+              <a:rPr sz="1800" b="0">
+                <a:solidFill>
+                  <a:srgbClr val="222222"/>
+                </a:solidFill>
+                <a:latin typeface="맑은 고딕"/>
+              </a:rPr>
+              <a:t>'미탐지 우선'이라는 우선순위는 결과를 본 뒤 정했다. 오경보 우선이면 선정이 바뀐다</a:t>
+            </a:r>
+          </a:p>
+          <a:p>
+            <a:pPr>
+              <a:spcAft>
+                <a:spcPts val="1100"/>
+              </a:spcAft>
+            </a:pPr>
+            <a:r>
+              <a:rPr sz="1800" b="1">
+                <a:solidFill>
+                  <a:srgbClr val="2AA7B8"/>
+                </a:solidFill>
+                <a:latin typeface="맑은 고딕"/>
+              </a:rPr>
+              <a:t>• </a:t>
+            </a:r>
+            <a:r>
+              <a:rPr sz="1800" b="0">
+                <a:solidFill>
+                  <a:srgbClr val="222222"/>
+                </a:solidFill>
+                <a:latin typeface="맑은 고딕"/>
+              </a:rPr>
+              <a:t>표시(색 사각형) 제거의 </a:t>
+            </a:r>
+            <a:r>
+              <a:rPr sz="1800" b="1">
+                <a:solidFill>
+                  <a:srgbClr val="222222"/>
+                </a:solidFill>
+                <a:latin typeface="맑은 고딕"/>
+              </a:rPr>
+              <a:t>흔적</a:t>
+            </a:r>
+            <a:r>
+              <a:rPr sz="1800" b="0">
+                <a:solidFill>
+                  <a:srgbClr val="222222"/>
+                </a:solidFill>
+                <a:latin typeface="맑은 고딕"/>
+              </a:rPr>
+              <a:t>이 단서가 되는지는 검증하지 못했다</a:t>
+            </a:r>
+          </a:p>
+          <a:p>
+            <a:pPr>
+              <a:spcAft>
+                <a:spcPts val="1100"/>
+              </a:spcAft>
+            </a:pPr>
+            <a:r>
+              <a:rPr sz="1800" b="1">
+                <a:solidFill>
+                  <a:srgbClr val="2AA7B8"/>
+                </a:solidFill>
+                <a:latin typeface="맑은 고딕"/>
+              </a:rPr>
+              <a:t>• </a:t>
+            </a:r>
+            <a:r>
+              <a:rPr sz="1800" b="0">
+                <a:solidFill>
+                  <a:srgbClr val="222222"/>
+                </a:solidFill>
+                <a:latin typeface="맑은 고딕"/>
+              </a:rPr>
+              <a:t>학습 시드가 하나이고, 팀원 모델은 학습 조건이 우리와 다르다(임계값은 우리 규칙으로 재선정)</a:t>
+            </a:r>
+          </a:p>
+          <a:p>
+            <a:pPr>
+              <a:spcAft>
+                <a:spcPts val="1100"/>
+              </a:spcAft>
+            </a:pPr>
+            <a:r>
+              <a:rPr sz="1800" b="1">
+                <a:solidFill>
+                  <a:srgbClr val="2AA7B8"/>
+                </a:solidFill>
+                <a:latin typeface="맑은 고딕"/>
+              </a:rPr>
+              <a:t>• </a:t>
+            </a:r>
+            <a:r>
+              <a:rPr sz="1800" b="0">
+                <a:solidFill>
+                  <a:srgbClr val="222222"/>
+                </a:solidFill>
+                <a:latin typeface="맑은 고딕"/>
+              </a:rPr>
+              <a:t>속도는 노트북에서 측정했고 실행마다 변동이 크다. 현장 장비 사양과 재검사 비용은 알지 못한다</a:t>
+            </a:r>
+          </a:p>
+          <a:p>
+            <a:pPr>
+              <a:spcAft>
+                <a:spcPts val="1100"/>
+              </a:spcAft>
+            </a:pPr>
+            <a:r>
+              <a:rPr sz="1800" b="1">
+                <a:solidFill>
+                  <a:srgbClr val="2AA7B8"/>
+                </a:solidFill>
+                <a:latin typeface="맑은 고딕"/>
+              </a:rPr>
+              <a:t>• </a:t>
+            </a:r>
+            <a:r>
+              <a:rPr sz="1800" b="0">
+                <a:solidFill>
+                  <a:srgbClr val="222222"/>
+                </a:solidFill>
+                <a:latin typeface="맑은 고딕"/>
+              </a:rPr>
+              <a:t>향후: 흔적 검증(원본 BMP 2x2 실험), 실제 정상 제품 이미지 확보, val 반복, 합성 점 대조군(s=0)</a:t>
+            </a:r>
+          </a:p>
+        </p:txBody>
+      </p:sp>
+    </p:spTree>
+  </p:cSld>
+  <p:clrMapOvr>
+    <a:masterClrMapping/>
+  </p:clrMapOvr>
+</p:sld>
+</file>
+
+<file path=ppt/slides/slide21.xml><?xml version="1.0" encoding="utf-8"?>
+<p:sld xmlns:a="http://schemas.openxmlformats.org/drawingml/2006/main" xmlns:p="http://schemas.openxmlformats.org/presentationml/2006/main" xmlns:r="http://schemas.openxmlformats.org/officeDocument/2006/relationships">
+  <p:cSld>
+    <p:spTree>
+      <p:nvGrpSpPr>
+        <p:cNvPr id="1" name=""/>
+        <p:cNvGrpSpPr/>
+        <p:nvPr/>
+      </p:nvGrpSpPr>
+      <p:grpSpPr/>
+      <p:sp>
+        <p:nvSpPr>
+          <p:cNvPr id="2" name="Rectangle 1"/>
+          <p:cNvSpPr/>
+          <p:nvPr/>
+        </p:nvSpPr>
+        <p:spPr>
+          <a:xfrm>
+            <a:off x="0" y="0"/>
+            <a:ext cx="164592" cy="6858000"/>
+          </a:xfrm>
+          <a:prstGeom prst="rect">
+            <a:avLst/>
+          </a:prstGeom>
+          <a:solidFill>
+            <a:srgbClr val="1F3A5F"/>
+          </a:solidFill>
+          <a:ln>
+            <a:noFill/>
+          </a:ln>
+        </p:spPr>
+        <p:style>
+          <a:lnRef idx="1">
+            <a:schemeClr val="accent1"/>
+          </a:lnRef>
+          <a:fillRef idx="3">
+            <a:schemeClr val="accent1"/>
+          </a:fillRef>
+          <a:effectRef idx="2">
+            <a:schemeClr val="accent1"/>
+          </a:effectRef>
+          <a:fontRef idx="minor">
+            <a:schemeClr val="lt1"/>
+          </a:fontRef>
+        </p:style>
+        <p:txBody>
+          <a:bodyPr rtlCol="0" anchor="ctr"/>
+          <a:lstStyle/>
+          <a:p>
+            <a:pPr algn="ctr"/>
+          </a:p>
+        </p:txBody>
+      </p:sp>
+      <p:sp>
+        <p:nvSpPr>
+          <p:cNvPr id="3" name="TextBox 2"/>
+          <p:cNvSpPr txBox="1"/>
+          <p:nvPr/>
+        </p:nvSpPr>
+        <p:spPr>
+          <a:xfrm>
+            <a:off x="502920" y="274320"/>
+            <a:ext cx="11185855" cy="731520"/>
+          </a:xfrm>
+          <a:prstGeom prst="rect">
+            <a:avLst/>
+          </a:prstGeom>
+          <a:noFill/>
+        </p:spPr>
+        <p:txBody>
+          <a:bodyPr wrap="square" anchor="ctr" lIns="45720" rIns="45720">
+            <a:spAutoFit/>
+          </a:bodyPr>
+          <a:lstStyle/>
+          <a:p>
+            <a:pPr algn="l"/>
+            <a:r>
+              <a:rPr sz="2800" b="1">
+                <a:solidFill>
+                  <a:srgbClr val="1F3A5F"/>
+                </a:solidFill>
+                <a:latin typeface="맑은 고딕"/>
+              </a:rPr>
+              <a:t>결론</a:t>
+            </a:r>
+          </a:p>
+        </p:txBody>
+      </p:sp>
+      <p:sp>
+        <p:nvSpPr>
+          <p:cNvPr id="4" name="TextBox 3"/>
+          <p:cNvSpPr txBox="1"/>
+          <p:nvPr/>
+        </p:nvSpPr>
+        <p:spPr>
+          <a:xfrm>
+            <a:off x="11094415" y="6400800"/>
+            <a:ext cx="822960" cy="320040"/>
+          </a:xfrm>
+          <a:prstGeom prst="rect">
+            <a:avLst/>
+          </a:prstGeom>
+          <a:noFill/>
+        </p:spPr>
+        <p:txBody>
+          <a:bodyPr wrap="square" anchor="t" lIns="45720" rIns="45720">
+            <a:spAutoFit/>
+          </a:bodyPr>
+          <a:lstStyle/>
+          <a:p>
+            <a:pPr algn="r"/>
+            <a:r>
+              <a:rPr sz="1200" b="0">
+                <a:solidFill>
+                  <a:srgbClr val="555B66"/>
+                </a:solidFill>
+                <a:latin typeface="맑은 고딕"/>
+              </a:rPr>
+              <a:t>21</a:t>
+            </a:r>
+          </a:p>
+        </p:txBody>
+      </p:sp>
+      <p:sp>
+        <p:nvSpPr>
+          <p:cNvPr id="5" name="TextBox 4"/>
+          <p:cNvSpPr txBox="1"/>
+          <p:nvPr/>
+        </p:nvSpPr>
+        <p:spPr>
+          <a:xfrm>
+            <a:off x="640080" y="1371600"/>
+            <a:ext cx="10972800" cy="5029200"/>
+          </a:xfrm>
+          <a:prstGeom prst="rect">
+            <a:avLst/>
+          </a:prstGeom>
+          <a:noFill/>
+        </p:spPr>
+        <p:txBody>
+          <a:bodyPr wrap="square" lIns="45720" rIns="45720">
+            <a:spAutoFit/>
+          </a:bodyPr>
+          <a:lstStyle/>
+          <a:p>
+            <a:pPr>
+              <a:spcAft>
+                <a:spcPts val="2000"/>
+              </a:spcAft>
+            </a:pPr>
+            <a:r>
+              <a:rPr sz="2200" b="1">
+                <a:solidFill>
+                  <a:srgbClr val="2AA7B8"/>
+                </a:solidFill>
+                <a:latin typeface="맑은 고딕"/>
+              </a:rPr>
+              <a:t>• </a:t>
+            </a:r>
+            <a:r>
+              <a:rPr sz="2200" b="0">
+                <a:solidFill>
+                  <a:srgbClr val="222222"/>
+                </a:solidFill>
+                <a:latin typeface="맑은 고딕"/>
+              </a:rPr>
+              <a:t>6개 모델을 같은 조건으로 학습·평가했고 F1은 0.99 안팎이었다. 몇 개 못 찾은 것은 </a:t>
+            </a:r>
+            <a:r>
+              <a:rPr sz="2200" b="1">
+                <a:solidFill>
+                  <a:srgbClr val="222222"/>
+                </a:solidFill>
+                <a:latin typeface="맑은 고딕"/>
+              </a:rPr>
+              <a:t>공식 라벨의 박스 크기</a:t>
+            </a:r>
+            <a:r>
+              <a:rPr sz="2200" b="0">
+                <a:solidFill>
+                  <a:srgbClr val="222222"/>
+                </a:solidFill>
+                <a:latin typeface="맑은 고딕"/>
+              </a:rPr>
+              <a:t> 때문이었고 </a:t>
+            </a:r>
+            <a:r>
+              <a:rPr sz="2200" b="1">
+                <a:solidFill>
+                  <a:srgbClr val="222222"/>
+                </a:solidFill>
+                <a:latin typeface="맑은 고딕"/>
+              </a:rPr>
+              <a:t>중심 거리</a:t>
+            </a:r>
+            <a:r>
+              <a:rPr sz="2200" b="0">
+                <a:solidFill>
+                  <a:srgbClr val="222222"/>
+                </a:solidFill>
+                <a:latin typeface="맑은 고딕"/>
+              </a:rPr>
+              <a:t>로 재채점하면 거의 다 찾았다</a:t>
+            </a:r>
+          </a:p>
+          <a:p>
+            <a:pPr>
+              <a:spcAft>
+                <a:spcPts val="2000"/>
+              </a:spcAft>
+            </a:pPr>
+            <a:r>
+              <a:rPr sz="2200" b="1">
+                <a:solidFill>
+                  <a:srgbClr val="2AA7B8"/>
+                </a:solidFill>
+                <a:latin typeface="맑은 고딕"/>
+              </a:rPr>
+              <a:t>• </a:t>
+            </a:r>
+            <a:r>
+              <a:rPr sz="2200" b="0">
+                <a:solidFill>
+                  <a:srgbClr val="222222"/>
+                </a:solidFill>
+                <a:latin typeface="맑은 고딕"/>
+              </a:rPr>
+              <a:t>일반화·robust 평가로 진짜 차이가 드러났다: </a:t>
+            </a:r>
+            <a:r>
+              <a:rPr sz="2200" b="1">
+                <a:solidFill>
+                  <a:srgbClr val="222222"/>
+                </a:solidFill>
+                <a:latin typeface="맑은 고딕"/>
+              </a:rPr>
+              <a:t>옅은 결함, 노이즈 무늬 오경보, MobileNetV3의 위치 의존</a:t>
+            </a:r>
+          </a:p>
+          <a:p>
+            <a:pPr>
+              <a:spcAft>
+                <a:spcPts val="2000"/>
+              </a:spcAft>
+            </a:pPr>
+            <a:r>
+              <a:rPr sz="2200" b="1">
+                <a:solidFill>
+                  <a:srgbClr val="2AA7B8"/>
+                </a:solidFill>
+                <a:latin typeface="맑은 고딕"/>
+              </a:rPr>
+              <a:t>• </a:t>
+            </a:r>
+            <a:r>
+              <a:rPr sz="2200" b="0">
+                <a:solidFill>
+                  <a:srgbClr val="222222"/>
+                </a:solidFill>
+                <a:latin typeface="맑은 고딕"/>
+              </a:rPr>
+              <a:t>종합해서 </a:t>
+            </a:r>
+            <a:r>
+              <a:rPr sz="2200" b="1">
+                <a:solidFill>
+                  <a:srgbClr val="222222"/>
+                </a:solidFill>
+                <a:latin typeface="맑은 고딕"/>
+              </a:rPr>
+              <a:t>D-FINE-N</a:t>
+            </a:r>
+            <a:r>
+              <a:rPr sz="2200" b="0">
+                <a:solidFill>
+                  <a:srgbClr val="222222"/>
+                </a:solidFill>
+                <a:latin typeface="맑은 고딕"/>
+              </a:rPr>
+              <a:t>을 베스트 모델로 선정: val 동률 선두, 미탐지 강건성 최상, 작다. 약점(노이즈 오경보)은 임계값·재검사 구간과 대안 모델로 관리한다</a:t>
+            </a:r>
+          </a:p>
+          <a:p>
+            <a:pPr>
+              <a:spcAft>
+                <a:spcPts val="2000"/>
+              </a:spcAft>
+            </a:pPr>
+            <a:r>
+              <a:rPr sz="2200" b="1">
+                <a:solidFill>
+                  <a:srgbClr val="2AA7B8"/>
+                </a:solidFill>
+                <a:latin typeface="맑은 고딕"/>
+              </a:rPr>
+              <a:t>• </a:t>
+            </a:r>
+            <a:r>
+              <a:rPr sz="2200" b="0">
+                <a:solidFill>
+                  <a:srgbClr val="222222"/>
+                </a:solidFill>
+                <a:latin typeface="맑은 고딕"/>
+              </a:rPr>
+              <a:t>공유 가능한 합성 평가 데이터와 검증 코드로 </a:t>
+            </a:r>
+            <a:r>
+              <a:rPr sz="2200" b="1">
+                <a:solidFill>
+                  <a:srgbClr val="222222"/>
+                </a:solidFill>
+                <a:latin typeface="맑은 고딕"/>
+              </a:rPr>
+              <a:t>팀 모두가 같은 시험을 재현</a:t>
+            </a:r>
+            <a:r>
+              <a:rPr sz="2200" b="0">
+                <a:solidFill>
+                  <a:srgbClr val="222222"/>
+                </a:solidFill>
+                <a:latin typeface="맑은 고딕"/>
+              </a:rPr>
+              <a:t>한다</a:t>
+            </a:r>
+          </a:p>
+        </p:txBody>
+      </p:sp>
     </p:spTree>
   </p:cSld>
   <p:clrMapOvr>
@@ -8687,7 +10313,7 @@
                 </a:solidFill>
                 <a:latin typeface="맑은 고딕"/>
               </a:rPr>
-              <a:t>접근: 점수를 믿기 전에 검증한다</a:t>
+              <a:t>실험 흐름</a:t>
             </a:r>
           </a:p>
         </p:txBody>
@@ -8722,7 +10348,7 @@
                 </a:solidFill>
                 <a:latin typeface="맑은 고딕"/>
               </a:rPr>
-              <a:t>문제 → 의심 → 검증 → 발견 → 조치의 순서로 분석을 설계했다</a:t>
+              <a:t>학습·평가 → 못 찾은 것의 원인 → 일반화·robust 평가 → 베스트 모델</a:t>
             </a:r>
           </a:p>
         </p:txBody>
@@ -8762,40 +10388,971 @@
           </a:p>
         </p:txBody>
       </p:sp>
-      <p:pic>
-        <p:nvPicPr>
-          <p:cNvPr id="6" name="Picture 5" descr="fig0_story_flow.png"/>
-          <p:cNvPicPr>
-            <a:picLocks noChangeAspect="1"/>
-          </p:cNvPicPr>
+      <p:sp>
+        <p:nvSpPr>
+          <p:cNvPr id="6" name="Rounded Rectangle 5"/>
+          <p:cNvSpPr/>
           <p:nvPr/>
-        </p:nvPicPr>
-        <p:blipFill>
-          <a:blip r:embed="rId2"/>
-          <a:stretch>
-            <a:fillRect/>
-          </a:stretch>
-        </p:blipFill>
-        <p:spPr>
-          <a:xfrm>
-            <a:off x="548640" y="1965781"/>
-            <a:ext cx="11064240" cy="3475076"/>
+        </p:nvSpPr>
+        <p:spPr>
+          <a:xfrm>
+            <a:off x="457200" y="1828800"/>
+            <a:ext cx="1764792" cy="3017520"/>
+          </a:xfrm>
+          <a:prstGeom prst="roundRect">
+            <a:avLst/>
+          </a:prstGeom>
+          <a:solidFill>
+            <a:srgbClr val="DDE6F7"/>
+          </a:solidFill>
+          <a:ln>
+            <a:solidFill>
+              <a:srgbClr val="555B66"/>
+            </a:solidFill>
+          </a:ln>
+        </p:spPr>
+        <p:style>
+          <a:lnRef idx="1">
+            <a:schemeClr val="accent1"/>
+          </a:lnRef>
+          <a:fillRef idx="3">
+            <a:schemeClr val="accent1"/>
+          </a:fillRef>
+          <a:effectRef idx="2">
+            <a:schemeClr val="accent1"/>
+          </a:effectRef>
+          <a:fontRef idx="minor">
+            <a:schemeClr val="lt1"/>
+          </a:fontRef>
+        </p:style>
+        <p:txBody>
+          <a:bodyPr rtlCol="0" anchor="ctr" wrap="square" lIns="73152" rIns="73152"/>
+          <a:lstStyle/>
+          <a:p>
+            <a:pPr algn="ctr">
+              <a:spcAft>
+                <a:spcPts val="0"/>
+              </a:spcAft>
+            </a:pPr>
+            <a:r>
+              <a:rPr sz="1600" b="1">
+                <a:solidFill>
+                  <a:srgbClr val="1F3A5F"/>
+                </a:solidFill>
+                <a:latin typeface="맑은 고딕"/>
+              </a:rPr>
+              <a:t>① 학습·검증</a:t>
+            </a:r>
+          </a:p>
+          <a:p>
+            <a:pPr algn="ctr">
+              <a:spcAft>
+                <a:spcPts val="1000"/>
+              </a:spcAft>
+            </a:pPr>
+            <a:r>
+              <a:rPr sz="1600" b="1">
+                <a:solidFill>
+                  <a:srgbClr val="1F3A5F"/>
+                </a:solidFill>
+                <a:latin typeface="맑은 고딕"/>
+              </a:rPr>
+              <a:t>·평가</a:t>
+            </a:r>
+          </a:p>
+          <a:p>
+            <a:pPr algn="ctr">
+              <a:spcAft>
+                <a:spcPts val="300"/>
+              </a:spcAft>
+            </a:pPr>
+            <a:r>
+              <a:rPr sz="1300">
+                <a:solidFill>
+                  <a:srgbClr val="222222"/>
+                </a:solidFill>
+                <a:latin typeface="맑은 고딕"/>
+              </a:rPr>
+              <a:t>6개 모델</a:t>
+            </a:r>
+          </a:p>
+          <a:p>
+            <a:pPr algn="ctr">
+              <a:spcAft>
+                <a:spcPts val="300"/>
+              </a:spcAft>
+            </a:pPr>
+            <a:r>
+              <a:rPr sz="1300">
+                <a:solidFill>
+                  <a:srgbClr val="222222"/>
+                </a:solidFill>
+                <a:latin typeface="맑은 고딕"/>
+              </a:rPr>
+              <a:t>임계값 val 고정</a:t>
+            </a:r>
+          </a:p>
+          <a:p>
+            <a:pPr algn="ctr">
+              <a:spcAft>
+                <a:spcPts val="300"/>
+              </a:spcAft>
+            </a:pPr>
+            <a:r>
+              <a:rPr sz="1300">
+                <a:solidFill>
+                  <a:srgbClr val="222222"/>
+                </a:solidFill>
+                <a:latin typeface="맑은 고딕"/>
+              </a:rPr>
+              <a:t>test는 한 번</a:t>
+            </a:r>
+          </a:p>
+        </p:txBody>
+      </p:sp>
+      <p:sp>
+        <p:nvSpPr>
+          <p:cNvPr id="7" name="TextBox 6"/>
+          <p:cNvSpPr txBox="1"/>
+          <p:nvPr/>
+        </p:nvSpPr>
+        <p:spPr>
+          <a:xfrm>
+            <a:off x="2185415" y="3154680"/>
+            <a:ext cx="219456" cy="365760"/>
           </a:xfrm>
           <a:prstGeom prst="rect">
             <a:avLst/>
           </a:prstGeom>
-        </p:spPr>
-      </p:pic>
-      <p:sp>
-        <p:nvSpPr>
-          <p:cNvPr id="7" name="TextBox 6"/>
+          <a:noFill/>
+        </p:spPr>
+        <p:txBody>
+          <a:bodyPr wrap="square" anchor="t" lIns="45720" rIns="45720">
+            <a:spAutoFit/>
+          </a:bodyPr>
+          <a:lstStyle/>
+          <a:p>
+            <a:pPr algn="ctr"/>
+            <a:r>
+              <a:rPr sz="1000" b="0">
+                <a:solidFill>
+                  <a:srgbClr val="555B66"/>
+                </a:solidFill>
+                <a:latin typeface="맑은 고딕"/>
+              </a:rPr>
+              <a:t>▶</a:t>
+            </a:r>
+          </a:p>
+        </p:txBody>
+      </p:sp>
+      <p:sp>
+        <p:nvSpPr>
+          <p:cNvPr id="8" name="Rounded Rectangle 7"/>
+          <p:cNvSpPr/>
+          <p:nvPr/>
+        </p:nvSpPr>
+        <p:spPr>
+          <a:xfrm>
+            <a:off x="2368296" y="1828800"/>
+            <a:ext cx="1764792" cy="3017520"/>
+          </a:xfrm>
+          <a:prstGeom prst="roundRect">
+            <a:avLst/>
+          </a:prstGeom>
+          <a:solidFill>
+            <a:srgbClr val="FBE7CC"/>
+          </a:solidFill>
+          <a:ln>
+            <a:solidFill>
+              <a:srgbClr val="555B66"/>
+            </a:solidFill>
+          </a:ln>
+        </p:spPr>
+        <p:style>
+          <a:lnRef idx="1">
+            <a:schemeClr val="accent1"/>
+          </a:lnRef>
+          <a:fillRef idx="3">
+            <a:schemeClr val="accent1"/>
+          </a:fillRef>
+          <a:effectRef idx="2">
+            <a:schemeClr val="accent1"/>
+          </a:effectRef>
+          <a:fontRef idx="minor">
+            <a:schemeClr val="lt1"/>
+          </a:fontRef>
+        </p:style>
+        <p:txBody>
+          <a:bodyPr rtlCol="0" anchor="ctr" wrap="square" lIns="73152" rIns="73152"/>
+          <a:lstStyle/>
+          <a:p>
+            <a:pPr algn="ctr">
+              <a:spcAft>
+                <a:spcPts val="0"/>
+              </a:spcAft>
+            </a:pPr>
+            <a:r>
+              <a:rPr sz="1600" b="1">
+                <a:solidFill>
+                  <a:srgbClr val="1F3A5F"/>
+                </a:solidFill>
+                <a:latin typeface="맑은 고딕"/>
+              </a:rPr>
+              <a:t>② 못 찾은</a:t>
+            </a:r>
+          </a:p>
+          <a:p>
+            <a:pPr algn="ctr">
+              <a:spcAft>
+                <a:spcPts val="1000"/>
+              </a:spcAft>
+            </a:pPr>
+            <a:r>
+              <a:rPr sz="1600" b="1">
+                <a:solidFill>
+                  <a:srgbClr val="1F3A5F"/>
+                </a:solidFill>
+                <a:latin typeface="맑은 고딕"/>
+              </a:rPr>
+              <a:t>것이 있다</a:t>
+            </a:r>
+          </a:p>
+          <a:p>
+            <a:pPr algn="ctr">
+              <a:spcAft>
+                <a:spcPts val="300"/>
+              </a:spcAft>
+            </a:pPr>
+            <a:r>
+              <a:rPr sz="1300">
+                <a:solidFill>
+                  <a:srgbClr val="222222"/>
+                </a:solidFill>
+                <a:latin typeface="맑은 고딕"/>
+              </a:rPr>
+              <a:t>정답 663개 중</a:t>
+            </a:r>
+          </a:p>
+          <a:p>
+            <a:pPr algn="ctr">
+              <a:spcAft>
+                <a:spcPts val="300"/>
+              </a:spcAft>
+            </a:pPr>
+            <a:r>
+              <a:rPr sz="1300">
+                <a:solidFill>
+                  <a:srgbClr val="222222"/>
+                </a:solidFill>
+                <a:latin typeface="맑은 고딕"/>
+              </a:rPr>
+              <a:t>6~9개 놓침</a:t>
+            </a:r>
+          </a:p>
+          <a:p>
+            <a:pPr algn="ctr">
+              <a:spcAft>
+                <a:spcPts val="300"/>
+              </a:spcAft>
+            </a:pPr>
+            <a:r>
+              <a:rPr sz="1300">
+                <a:solidFill>
+                  <a:srgbClr val="222222"/>
+                </a:solidFill>
+                <a:latin typeface="맑은 고딕"/>
+              </a:rPr>
+              <a:t>F1 0.99 안팎</a:t>
+            </a:r>
+          </a:p>
+        </p:txBody>
+      </p:sp>
+      <p:sp>
+        <p:nvSpPr>
+          <p:cNvPr id="9" name="TextBox 8"/>
           <p:cNvSpPr txBox="1"/>
           <p:nvPr/>
         </p:nvSpPr>
         <p:spPr>
           <a:xfrm>
-            <a:off x="731520" y="5897880"/>
-            <a:ext cx="10789920" cy="822960"/>
+            <a:off x="4096511" y="3154680"/>
+            <a:ext cx="219456" cy="365760"/>
+          </a:xfrm>
+          <a:prstGeom prst="rect">
+            <a:avLst/>
+          </a:prstGeom>
+          <a:noFill/>
+        </p:spPr>
+        <p:txBody>
+          <a:bodyPr wrap="square" anchor="t" lIns="45720" rIns="45720">
+            <a:spAutoFit/>
+          </a:bodyPr>
+          <a:lstStyle/>
+          <a:p>
+            <a:pPr algn="ctr"/>
+            <a:r>
+              <a:rPr sz="1000" b="0">
+                <a:solidFill>
+                  <a:srgbClr val="555B66"/>
+                </a:solidFill>
+                <a:latin typeface="맑은 고딕"/>
+              </a:rPr>
+              <a:t>▶</a:t>
+            </a:r>
+          </a:p>
+        </p:txBody>
+      </p:sp>
+      <p:sp>
+        <p:nvSpPr>
+          <p:cNvPr id="10" name="Rounded Rectangle 9"/>
+          <p:cNvSpPr/>
+          <p:nvPr/>
+        </p:nvSpPr>
+        <p:spPr>
+          <a:xfrm>
+            <a:off x="4279392" y="1828800"/>
+            <a:ext cx="1764792" cy="3017520"/>
+          </a:xfrm>
+          <a:prstGeom prst="roundRect">
+            <a:avLst/>
+          </a:prstGeom>
+          <a:solidFill>
+            <a:srgbClr val="D6ECDC"/>
+          </a:solidFill>
+          <a:ln>
+            <a:solidFill>
+              <a:srgbClr val="555B66"/>
+            </a:solidFill>
+          </a:ln>
+        </p:spPr>
+        <p:style>
+          <a:lnRef idx="1">
+            <a:schemeClr val="accent1"/>
+          </a:lnRef>
+          <a:fillRef idx="3">
+            <a:schemeClr val="accent1"/>
+          </a:fillRef>
+          <a:effectRef idx="2">
+            <a:schemeClr val="accent1"/>
+          </a:effectRef>
+          <a:fontRef idx="minor">
+            <a:schemeClr val="lt1"/>
+          </a:fontRef>
+        </p:style>
+        <p:txBody>
+          <a:bodyPr rtlCol="0" anchor="ctr" wrap="square" lIns="73152" rIns="73152"/>
+          <a:lstStyle/>
+          <a:p>
+            <a:pPr algn="ctr">
+              <a:spcAft>
+                <a:spcPts val="0"/>
+              </a:spcAft>
+            </a:pPr>
+            <a:r>
+              <a:rPr sz="1600" b="1">
+                <a:solidFill>
+                  <a:srgbClr val="1F3A5F"/>
+                </a:solidFill>
+                <a:latin typeface="맑은 고딕"/>
+              </a:rPr>
+              <a:t>③ 원인은</a:t>
+            </a:r>
+          </a:p>
+          <a:p>
+            <a:pPr algn="ctr">
+              <a:spcAft>
+                <a:spcPts val="1000"/>
+              </a:spcAft>
+            </a:pPr>
+            <a:r>
+              <a:rPr sz="1600" b="1">
+                <a:solidFill>
+                  <a:srgbClr val="1F3A5F"/>
+                </a:solidFill>
+                <a:latin typeface="맑은 고딕"/>
+              </a:rPr>
+              <a:t>라벨 문제</a:t>
+            </a:r>
+          </a:p>
+          <a:p>
+            <a:pPr algn="ctr">
+              <a:spcAft>
+                <a:spcPts val="300"/>
+              </a:spcAft>
+            </a:pPr>
+            <a:r>
+              <a:rPr sz="1300">
+                <a:solidFill>
+                  <a:srgbClr val="222222"/>
+                </a:solidFill>
+                <a:latin typeface="맑은 고딕"/>
+              </a:rPr>
+              <a:t>공식 라벨</a:t>
+            </a:r>
+          </a:p>
+          <a:p>
+            <a:pPr algn="ctr">
+              <a:spcAft>
+                <a:spcPts val="300"/>
+              </a:spcAft>
+            </a:pPr>
+            <a:r>
+              <a:rPr sz="1300">
+                <a:solidFill>
+                  <a:srgbClr val="222222"/>
+                </a:solidFill>
+                <a:latin typeface="맑은 고딕"/>
+              </a:rPr>
+              <a:t>박스 크기 문제</a:t>
+            </a:r>
+          </a:p>
+          <a:p>
+            <a:pPr algn="ctr">
+              <a:spcAft>
+                <a:spcPts val="300"/>
+              </a:spcAft>
+            </a:pPr>
+            <a:r>
+              <a:rPr sz="1300">
+                <a:solidFill>
+                  <a:srgbClr val="222222"/>
+                </a:solidFill>
+                <a:latin typeface="맑은 고딕"/>
+              </a:rPr>
+              <a:t>중심 거리로</a:t>
+            </a:r>
+          </a:p>
+          <a:p>
+            <a:pPr algn="ctr">
+              <a:spcAft>
+                <a:spcPts val="300"/>
+              </a:spcAft>
+            </a:pPr>
+            <a:r>
+              <a:rPr sz="1300">
+                <a:solidFill>
+                  <a:srgbClr val="222222"/>
+                </a:solidFill>
+                <a:latin typeface="맑은 고딕"/>
+              </a:rPr>
+              <a:t>재채점</a:t>
+            </a:r>
+          </a:p>
+          <a:p>
+            <a:pPr algn="ctr">
+              <a:spcAft>
+                <a:spcPts val="300"/>
+              </a:spcAft>
+            </a:pPr>
+            <a:r>
+              <a:rPr sz="1300">
+                <a:solidFill>
+                  <a:srgbClr val="222222"/>
+                </a:solidFill>
+                <a:latin typeface="맑은 고딕"/>
+              </a:rPr>
+              <a:t>→ 거의 다 찾음</a:t>
+            </a:r>
+          </a:p>
+        </p:txBody>
+      </p:sp>
+      <p:sp>
+        <p:nvSpPr>
+          <p:cNvPr id="11" name="TextBox 10"/>
+          <p:cNvSpPr txBox="1"/>
+          <p:nvPr/>
+        </p:nvSpPr>
+        <p:spPr>
+          <a:xfrm>
+            <a:off x="6007607" y="3154680"/>
+            <a:ext cx="219456" cy="365760"/>
+          </a:xfrm>
+          <a:prstGeom prst="rect">
+            <a:avLst/>
+          </a:prstGeom>
+          <a:noFill/>
+        </p:spPr>
+        <p:txBody>
+          <a:bodyPr wrap="square" anchor="t" lIns="45720" rIns="45720">
+            <a:spAutoFit/>
+          </a:bodyPr>
+          <a:lstStyle/>
+          <a:p>
+            <a:pPr algn="ctr"/>
+            <a:r>
+              <a:rPr sz="1000" b="0">
+                <a:solidFill>
+                  <a:srgbClr val="555B66"/>
+                </a:solidFill>
+                <a:latin typeface="맑은 고딕"/>
+              </a:rPr>
+              <a:t>▶</a:t>
+            </a:r>
+          </a:p>
+        </p:txBody>
+      </p:sp>
+      <p:sp>
+        <p:nvSpPr>
+          <p:cNvPr id="12" name="Rounded Rectangle 11"/>
+          <p:cNvSpPr/>
+          <p:nvPr/>
+        </p:nvSpPr>
+        <p:spPr>
+          <a:xfrm>
+            <a:off x="6190488" y="1828800"/>
+            <a:ext cx="1764792" cy="3017520"/>
+          </a:xfrm>
+          <a:prstGeom prst="roundRect">
+            <a:avLst/>
+          </a:prstGeom>
+          <a:solidFill>
+            <a:srgbClr val="F5D9D9"/>
+          </a:solidFill>
+          <a:ln>
+            <a:solidFill>
+              <a:srgbClr val="555B66"/>
+            </a:solidFill>
+          </a:ln>
+        </p:spPr>
+        <p:style>
+          <a:lnRef idx="1">
+            <a:schemeClr val="accent1"/>
+          </a:lnRef>
+          <a:fillRef idx="3">
+            <a:schemeClr val="accent1"/>
+          </a:fillRef>
+          <a:effectRef idx="2">
+            <a:schemeClr val="accent1"/>
+          </a:effectRef>
+          <a:fontRef idx="minor">
+            <a:schemeClr val="lt1"/>
+          </a:fontRef>
+        </p:style>
+        <p:txBody>
+          <a:bodyPr rtlCol="0" anchor="ctr" wrap="square" lIns="73152" rIns="73152"/>
+          <a:lstStyle/>
+          <a:p>
+            <a:pPr algn="ctr">
+              <a:spcAft>
+                <a:spcPts val="0"/>
+              </a:spcAft>
+            </a:pPr>
+            <a:r>
+              <a:rPr sz="1600" b="1">
+                <a:solidFill>
+                  <a:srgbClr val="1F3A5F"/>
+                </a:solidFill>
+                <a:latin typeface="맑은 고딕"/>
+              </a:rPr>
+              <a:t>④ 일반화</a:t>
+            </a:r>
+          </a:p>
+          <a:p>
+            <a:pPr algn="ctr">
+              <a:spcAft>
+                <a:spcPts val="1000"/>
+              </a:spcAft>
+            </a:pPr>
+            <a:r>
+              <a:rPr sz="1600" b="1">
+                <a:solidFill>
+                  <a:srgbClr val="1F3A5F"/>
+                </a:solidFill>
+                <a:latin typeface="맑은 고딕"/>
+              </a:rPr>
+              <a:t>·robust 평가</a:t>
+            </a:r>
+          </a:p>
+          <a:p>
+            <a:pPr algn="ctr">
+              <a:spcAft>
+                <a:spcPts val="300"/>
+              </a:spcAft>
+            </a:pPr>
+            <a:r>
+              <a:rPr sz="1300">
+                <a:solidFill>
+                  <a:srgbClr val="222222"/>
+                </a:solidFill>
+                <a:latin typeface="맑은 고딕"/>
+              </a:rPr>
+              <a:t>점 제거</a:t>
+            </a:r>
+          </a:p>
+          <a:p>
+            <a:pPr algn="ctr">
+              <a:spcAft>
+                <a:spcPts val="300"/>
+              </a:spcAft>
+            </a:pPr>
+            <a:r>
+              <a:rPr sz="1300">
+                <a:solidFill>
+                  <a:srgbClr val="222222"/>
+                </a:solidFill>
+                <a:latin typeface="맑은 고딕"/>
+              </a:rPr>
+              <a:t>가짜 정상</a:t>
+            </a:r>
+          </a:p>
+          <a:p>
+            <a:pPr algn="ctr">
+              <a:spcAft>
+                <a:spcPts val="300"/>
+              </a:spcAft>
+            </a:pPr>
+            <a:r>
+              <a:rPr sz="1300">
+                <a:solidFill>
+                  <a:srgbClr val="222222"/>
+                </a:solidFill>
+                <a:latin typeface="맑은 고딕"/>
+              </a:rPr>
+              <a:t>합성 점</a:t>
+            </a:r>
+          </a:p>
+          <a:p>
+            <a:pPr algn="ctr">
+              <a:spcAft>
+                <a:spcPts val="300"/>
+              </a:spcAft>
+            </a:pPr>
+            <a:r>
+              <a:rPr sz="1300">
+                <a:solidFill>
+                  <a:srgbClr val="222222"/>
+                </a:solidFill>
+                <a:latin typeface="맑은 고딕"/>
+              </a:rPr>
+              <a:t>호기별</a:t>
+            </a:r>
+          </a:p>
+        </p:txBody>
+      </p:sp>
+      <p:sp>
+        <p:nvSpPr>
+          <p:cNvPr id="13" name="TextBox 12"/>
+          <p:cNvSpPr txBox="1"/>
+          <p:nvPr/>
+        </p:nvSpPr>
+        <p:spPr>
+          <a:xfrm>
+            <a:off x="7918704" y="3154680"/>
+            <a:ext cx="219456" cy="365760"/>
+          </a:xfrm>
+          <a:prstGeom prst="rect">
+            <a:avLst/>
+          </a:prstGeom>
+          <a:noFill/>
+        </p:spPr>
+        <p:txBody>
+          <a:bodyPr wrap="square" anchor="t" lIns="45720" rIns="45720">
+            <a:spAutoFit/>
+          </a:bodyPr>
+          <a:lstStyle/>
+          <a:p>
+            <a:pPr algn="ctr"/>
+            <a:r>
+              <a:rPr sz="1000" b="0">
+                <a:solidFill>
+                  <a:srgbClr val="555B66"/>
+                </a:solidFill>
+                <a:latin typeface="맑은 고딕"/>
+              </a:rPr>
+              <a:t>▶</a:t>
+            </a:r>
+          </a:p>
+        </p:txBody>
+      </p:sp>
+      <p:sp>
+        <p:nvSpPr>
+          <p:cNvPr id="14" name="Rounded Rectangle 13"/>
+          <p:cNvSpPr/>
+          <p:nvPr/>
+        </p:nvSpPr>
+        <p:spPr>
+          <a:xfrm>
+            <a:off x="8101583" y="1828800"/>
+            <a:ext cx="1764792" cy="3017520"/>
+          </a:xfrm>
+          <a:prstGeom prst="roundRect">
+            <a:avLst/>
+          </a:prstGeom>
+          <a:solidFill>
+            <a:srgbClr val="E6DCF0"/>
+          </a:solidFill>
+          <a:ln>
+            <a:solidFill>
+              <a:srgbClr val="555B66"/>
+            </a:solidFill>
+          </a:ln>
+        </p:spPr>
+        <p:style>
+          <a:lnRef idx="1">
+            <a:schemeClr val="accent1"/>
+          </a:lnRef>
+          <a:fillRef idx="3">
+            <a:schemeClr val="accent1"/>
+          </a:fillRef>
+          <a:effectRef idx="2">
+            <a:schemeClr val="accent1"/>
+          </a:effectRef>
+          <a:fontRef idx="minor">
+            <a:schemeClr val="lt1"/>
+          </a:fontRef>
+        </p:style>
+        <p:txBody>
+          <a:bodyPr rtlCol="0" anchor="ctr" wrap="square" lIns="73152" rIns="73152"/>
+          <a:lstStyle/>
+          <a:p>
+            <a:pPr algn="ctr">
+              <a:spcAft>
+                <a:spcPts val="0"/>
+              </a:spcAft>
+            </a:pPr>
+            <a:r>
+              <a:rPr sz="1600" b="1">
+                <a:solidFill>
+                  <a:srgbClr val="1F3A5F"/>
+                </a:solidFill>
+                <a:latin typeface="맑은 고딕"/>
+              </a:rPr>
+              <a:t>⑤ 종합 →</a:t>
+            </a:r>
+          </a:p>
+          <a:p>
+            <a:pPr algn="ctr">
+              <a:spcAft>
+                <a:spcPts val="1000"/>
+              </a:spcAft>
+            </a:pPr>
+            <a:r>
+              <a:rPr sz="1600" b="1">
+                <a:solidFill>
+                  <a:srgbClr val="1F3A5F"/>
+                </a:solidFill>
+                <a:latin typeface="맑은 고딕"/>
+              </a:rPr>
+              <a:t>베스트 모델</a:t>
+            </a:r>
+          </a:p>
+          <a:p>
+            <a:pPr algn="ctr">
+              <a:spcAft>
+                <a:spcPts val="300"/>
+              </a:spcAft>
+            </a:pPr>
+            <a:r>
+              <a:rPr sz="1300">
+                <a:solidFill>
+                  <a:srgbClr val="222222"/>
+                </a:solidFill>
+                <a:latin typeface="맑은 고딕"/>
+              </a:rPr>
+              <a:t>val 동률 선두</a:t>
+            </a:r>
+          </a:p>
+          <a:p>
+            <a:pPr algn="ctr">
+              <a:spcAft>
+                <a:spcPts val="300"/>
+              </a:spcAft>
+            </a:pPr>
+            <a:r>
+              <a:rPr sz="1300">
+                <a:solidFill>
+                  <a:srgbClr val="222222"/>
+                </a:solidFill>
+                <a:latin typeface="맑은 고딕"/>
+              </a:rPr>
+              <a:t>미탐지 강건성</a:t>
+            </a:r>
+          </a:p>
+          <a:p>
+            <a:pPr algn="ctr">
+              <a:spcAft>
+                <a:spcPts val="300"/>
+              </a:spcAft>
+            </a:pPr>
+            <a:r>
+              <a:rPr sz="1300">
+                <a:solidFill>
+                  <a:srgbClr val="222222"/>
+                </a:solidFill>
+                <a:latin typeface="맑은 고딕"/>
+              </a:rPr>
+              <a:t>최상</a:t>
+            </a:r>
+          </a:p>
+          <a:p>
+            <a:pPr algn="ctr">
+              <a:spcAft>
+                <a:spcPts val="300"/>
+              </a:spcAft>
+            </a:pPr>
+            <a:r>
+              <a:rPr sz="1300">
+                <a:solidFill>
+                  <a:srgbClr val="222222"/>
+                </a:solidFill>
+                <a:latin typeface="맑은 고딕"/>
+              </a:rPr>
+              <a:t>→ D-FINE-N</a:t>
+            </a:r>
+          </a:p>
+        </p:txBody>
+      </p:sp>
+      <p:sp>
+        <p:nvSpPr>
+          <p:cNvPr id="15" name="TextBox 14"/>
+          <p:cNvSpPr txBox="1"/>
+          <p:nvPr/>
+        </p:nvSpPr>
+        <p:spPr>
+          <a:xfrm>
+            <a:off x="9829800" y="3154680"/>
+            <a:ext cx="219456" cy="365760"/>
+          </a:xfrm>
+          <a:prstGeom prst="rect">
+            <a:avLst/>
+          </a:prstGeom>
+          <a:noFill/>
+        </p:spPr>
+        <p:txBody>
+          <a:bodyPr wrap="square" anchor="t" lIns="45720" rIns="45720">
+            <a:spAutoFit/>
+          </a:bodyPr>
+          <a:lstStyle/>
+          <a:p>
+            <a:pPr algn="ctr"/>
+            <a:r>
+              <a:rPr sz="1000" b="0">
+                <a:solidFill>
+                  <a:srgbClr val="555B66"/>
+                </a:solidFill>
+                <a:latin typeface="맑은 고딕"/>
+              </a:rPr>
+              <a:t>▶</a:t>
+            </a:r>
+          </a:p>
+        </p:txBody>
+      </p:sp>
+      <p:sp>
+        <p:nvSpPr>
+          <p:cNvPr id="16" name="Rounded Rectangle 15"/>
+          <p:cNvSpPr/>
+          <p:nvPr/>
+        </p:nvSpPr>
+        <p:spPr>
+          <a:xfrm>
+            <a:off x="10012680" y="1828800"/>
+            <a:ext cx="1764792" cy="3017520"/>
+          </a:xfrm>
+          <a:prstGeom prst="roundRect">
+            <a:avLst/>
+          </a:prstGeom>
+          <a:solidFill>
+            <a:srgbClr val="F1ECD2"/>
+          </a:solidFill>
+          <a:ln>
+            <a:solidFill>
+              <a:srgbClr val="555B66"/>
+            </a:solidFill>
+          </a:ln>
+        </p:spPr>
+        <p:style>
+          <a:lnRef idx="1">
+            <a:schemeClr val="accent1"/>
+          </a:lnRef>
+          <a:fillRef idx="3">
+            <a:schemeClr val="accent1"/>
+          </a:fillRef>
+          <a:effectRef idx="2">
+            <a:schemeClr val="accent1"/>
+          </a:effectRef>
+          <a:fontRef idx="minor">
+            <a:schemeClr val="lt1"/>
+          </a:fontRef>
+        </p:style>
+        <p:txBody>
+          <a:bodyPr rtlCol="0" anchor="ctr" wrap="square" lIns="73152" rIns="73152"/>
+          <a:lstStyle/>
+          <a:p>
+            <a:pPr algn="ctr">
+              <a:spcAft>
+                <a:spcPts val="1000"/>
+              </a:spcAft>
+            </a:pPr>
+            <a:r>
+              <a:rPr sz="1600" b="1">
+                <a:solidFill>
+                  <a:srgbClr val="1F3A5F"/>
+                </a:solidFill>
+                <a:latin typeface="맑은 고딕"/>
+              </a:rPr>
+              <a:t>⑥ 현장 활용</a:t>
+            </a:r>
+          </a:p>
+          <a:p>
+            <a:pPr algn="ctr">
+              <a:spcAft>
+                <a:spcPts val="300"/>
+              </a:spcAft>
+            </a:pPr>
+            <a:r>
+              <a:rPr sz="1300">
+                <a:solidFill>
+                  <a:srgbClr val="222222"/>
+                </a:solidFill>
+                <a:latin typeface="맑은 고딕"/>
+              </a:rPr>
+              <a:t>3단 판정</a:t>
+            </a:r>
+          </a:p>
+          <a:p>
+            <a:pPr algn="ctr">
+              <a:spcAft>
+                <a:spcPts val="300"/>
+              </a:spcAft>
+            </a:pPr>
+            <a:r>
+              <a:rPr sz="1300">
+                <a:solidFill>
+                  <a:srgbClr val="222222"/>
+                </a:solidFill>
+                <a:latin typeface="맑은 고딕"/>
+              </a:rPr>
+              <a:t>재검사 구간</a:t>
+            </a:r>
+          </a:p>
+          <a:p>
+            <a:pPr algn="ctr">
+              <a:spcAft>
+                <a:spcPts val="300"/>
+              </a:spcAft>
+            </a:pPr>
+            <a:r>
+              <a:rPr sz="1300">
+                <a:solidFill>
+                  <a:srgbClr val="222222"/>
+                </a:solidFill>
+                <a:latin typeface="맑은 고딕"/>
+              </a:rPr>
+              <a:t>모델 선택 가이드</a:t>
+            </a:r>
+          </a:p>
+        </p:txBody>
+      </p:sp>
+      <p:sp>
+        <p:nvSpPr>
+          <p:cNvPr id="17" name="TextBox 16"/>
+          <p:cNvSpPr txBox="1"/>
+          <p:nvPr/>
+        </p:nvSpPr>
+        <p:spPr>
+          <a:xfrm>
+            <a:off x="731520" y="5120640"/>
+            <a:ext cx="10789920" cy="1554480"/>
           </a:xfrm>
           <a:prstGeom prst="rect">
             <a:avLst/>
@@ -8829,11 +11386,36 @@
                 </a:solidFill>
                 <a:latin typeface="맑은 고딕"/>
               </a:rPr>
-              <a:t>6개 모델(베이스라인 YOLOv3-tiny, Faster R-CNN 2종, 팀원 모델 3종)을 </a:t>
-            </a:r>
+              <a:t>모델 6개: 베이스라인 YOLOv3-tiny, Faster R-CNN(ResNet-50, MobileNetV3), 팀원 모델 YOLO26n · RT-DETR-l · D-FINE-N</a:t>
+            </a:r>
+          </a:p>
+          <a:p>
+            <a:pPr>
+              <a:spcAft>
+                <a:spcPts val="600"/>
+              </a:spcAft>
+            </a:pPr>
             <a:r>
               <a:rPr sz="1600" b="1">
                 <a:solidFill>
+                  <a:srgbClr val="2AA7B8"/>
+                </a:solidFill>
+                <a:latin typeface="맑은 고딕"/>
+              </a:rPr>
+              <a:t>• </a:t>
+            </a:r>
+            <a:r>
+              <a:rPr sz="1600" b="0">
+                <a:solidFill>
+                  <a:srgbClr val="222222"/>
+                </a:solidFill>
+                <a:latin typeface="맑은 고딕"/>
+              </a:rPr>
+              <a:t>모든 모델을 </a:t>
+            </a:r>
+            <a:r>
+              <a:rPr sz="1600" b="1">
+                <a:solidFill>
                   <a:srgbClr val="222222"/>
                 </a:solidFill>
                 <a:latin typeface="맑은 고딕"/>
@@ -8847,7 +11429,7 @@
                 </a:solidFill>
                 <a:latin typeface="맑은 고딕"/>
               </a:rPr>
-              <a:t>로 비교</a:t>
+              <a:t>로 채점하고, 임계값은 val에서 정해 고정, test는 한 번만 본다</a:t>
             </a:r>
           </a:p>
         </p:txBody>
@@ -8943,7 +11525,7 @@
                 </a:solidFill>
                 <a:latin typeface="맑은 고딕"/>
               </a:rPr>
-              <a:t>기본 지표는 6개 모델이 구분되지 않는다</a:t>
+              <a:t>① 학습 · 검증 · 평가</a:t>
             </a:r>
           </a:p>
         </p:txBody>
@@ -8978,7 +11560,7 @@
                 </a:solidFill>
                 <a:latin typeface="맑은 고딕"/>
               </a:rPr>
-              <a:t>F1(IoU 0.5)은 0.986~0.991, 차이는 박스 정밀도(mAP50-95)에서만 난다</a:t>
+              <a:t>지금 있는 데이터로 6개 모델을 같은 조건에서 학습하고 평가했다</a:t>
             </a:r>
           </a:p>
         </p:txBody>
@@ -9028,7 +11610,7 @@
         </p:nvGraphicFramePr>
         <p:xfrm>
           <a:off x="548640" y="1783080"/>
-          <a:ext cx="7315200" cy="4224528"/>
+          <a:ext cx="7589519" cy="3968496"/>
         </p:xfrm>
         <a:graphic>
           <a:graphicData uri="http://schemas.openxmlformats.org/drawingml/2006/table">
@@ -9037,12 +11619,12 @@
                 <a:tableStyleId>{5C22544A-7EE6-4342-B048-85BDC9FD1C3A}</a:tableStyleId>
               </a:tblPr>
               <a:tblGrid>
-                <a:gridCol w="3316224"/>
-                <a:gridCol w="975360"/>
-                <a:gridCol w="1658112"/>
-                <a:gridCol w="1365504"/>
+                <a:gridCol w="2558265"/>
+                <a:gridCol w="767479"/>
+                <a:gridCol w="3069918"/>
+                <a:gridCol w="1193857"/>
               </a:tblGrid>
-              <a:tr h="603504">
+              <a:tr h="566928">
                 <a:tc>
                   <a:txBody>
                     <a:bodyPr/>
@@ -9050,13 +11632,13 @@
                     <a:p>
                       <a:pPr algn="l"/>
                       <a:r>
-                        <a:rPr sz="1600" b="1">
+                        <a:rPr sz="1400" b="1">
                           <a:solidFill>
                             <a:srgbClr val="FFFFFF"/>
                           </a:solidFill>
                           <a:latin typeface="맑은 고딕"/>
                         </a:rPr>
-                        <a:t>모델 (test)</a:t>
+                        <a:t>모델</a:t>
                       </a:r>
                     </a:p>
                   </a:txBody>
@@ -9073,13 +11655,13 @@
                     <a:p>
                       <a:pPr algn="ctr"/>
                       <a:r>
-                        <a:rPr sz="1600" b="1">
+                        <a:rPr sz="1400" b="1">
                           <a:solidFill>
                             <a:srgbClr val="FFFFFF"/>
                           </a:solidFill>
                           <a:latin typeface="맑은 고딕"/>
                         </a:rPr>
-                        <a:t>F1</a:t>
+                        <a:t>입력</a:t>
                       </a:r>
                     </a:p>
                   </a:txBody>
@@ -9096,13 +11678,13 @@
                     <a:p>
                       <a:pPr algn="ctr"/>
                       <a:r>
-                        <a:rPr sz="1600" b="1">
+                        <a:rPr sz="1400" b="1">
                           <a:solidFill>
                             <a:srgbClr val="FFFFFF"/>
                           </a:solidFill>
                           <a:latin typeface="맑은 고딕"/>
                         </a:rPr>
-                        <a:t>공식 라벨만 F1</a:t>
+                        <a:t>학습 설정</a:t>
                       </a:r>
                     </a:p>
                   </a:txBody>
@@ -9119,13 +11701,13 @@
                     <a:p>
                       <a:pPr algn="ctr"/>
                       <a:r>
-                        <a:rPr sz="1600" b="1">
+                        <a:rPr sz="1400" b="1">
                           <a:solidFill>
                             <a:srgbClr val="FFFFFF"/>
                           </a:solidFill>
                           <a:latin typeface="맑은 고딕"/>
                         </a:rPr>
-                        <a:t>mAP50-95</a:t>
+                        <a:t>val 임계값</a:t>
                       </a:r>
                     </a:p>
                   </a:txBody>
@@ -9136,7 +11718,7 @@
                   </a:tcPr>
                 </a:tc>
               </a:tr>
-              <a:tr h="603504">
+              <a:tr h="566928">
                 <a:tc>
                   <a:txBody>
                     <a:bodyPr/>
@@ -9144,7 +11726,7 @@
                     <a:p>
                       <a:pPr algn="l"/>
                       <a:r>
-                        <a:rPr sz="1600" b="0">
+                        <a:rPr sz="1400" b="0">
                           <a:solidFill>
                             <a:srgbClr val="222222"/>
                           </a:solidFill>
@@ -9167,13 +11749,13 @@
                     <a:p>
                       <a:pPr algn="ctr"/>
                       <a:r>
-                        <a:rPr sz="1600" b="0">
+                        <a:rPr sz="1400" b="0">
                           <a:solidFill>
                             <a:srgbClr val="222222"/>
                           </a:solidFill>
                           <a:latin typeface="맑은 고딕"/>
                         </a:rPr>
-                        <a:t>0.989</a:t>
+                        <a:t>640</a:t>
                       </a:r>
                     </a:p>
                   </a:txBody>
@@ -9190,13 +11772,13 @@
                     <a:p>
                       <a:pPr algn="ctr"/>
                       <a:r>
-                        <a:rPr sz="1600" b="0">
+                        <a:rPr sz="1400" b="0">
                           <a:solidFill>
                             <a:srgbClr val="222222"/>
                           </a:solidFill>
                           <a:latin typeface="맑은 고딕"/>
                         </a:rPr>
-                        <a:t>0.964</a:t>
+                        <a:t>COCO 사전학습, 100 epoch</a:t>
                       </a:r>
                     </a:p>
                   </a:txBody>
@@ -9213,13 +11795,13 @@
                     <a:p>
                       <a:pPr algn="ctr"/>
                       <a:r>
-                        <a:rPr sz="1600" b="0">
+                        <a:rPr sz="1400" b="0">
                           <a:solidFill>
                             <a:srgbClr val="222222"/>
                           </a:solidFill>
                           <a:latin typeface="맑은 고딕"/>
                         </a:rPr>
-                        <a:t>0.558</a:t>
+                        <a:t>0.06</a:t>
                       </a:r>
                     </a:p>
                   </a:txBody>
@@ -9230,7 +11812,7 @@
                   </a:tcPr>
                 </a:tc>
               </a:tr>
-              <a:tr h="603504">
+              <a:tr h="566928">
                 <a:tc>
                   <a:txBody>
                     <a:bodyPr/>
@@ -9238,13 +11820,13 @@
                     <a:p>
                       <a:pPr algn="l"/>
                       <a:r>
-                        <a:rPr sz="1600" b="0">
+                        <a:rPr sz="1400" b="0">
                           <a:solidFill>
                             <a:srgbClr val="222222"/>
                           </a:solidFill>
                           <a:latin typeface="맑은 고딕"/>
                         </a:rPr>
-                        <a:t>Faster R-CNN R50</a:t>
+                        <a:t>Faster R-CNN ResNet-50</a:t>
                       </a:r>
                     </a:p>
                   </a:txBody>
@@ -9261,13 +11843,13 @@
                     <a:p>
                       <a:pPr algn="ctr"/>
                       <a:r>
-                        <a:rPr sz="1600" b="0">
+                        <a:rPr sz="1400" b="0">
                           <a:solidFill>
                             <a:srgbClr val="222222"/>
                           </a:solidFill>
                           <a:latin typeface="맑은 고딕"/>
                         </a:rPr>
-                        <a:t>0.989</a:t>
+                        <a:t>640</a:t>
                       </a:r>
                     </a:p>
                   </a:txBody>
@@ -9284,13 +11866,13 @@
                     <a:p>
                       <a:pPr algn="ctr"/>
                       <a:r>
-                        <a:rPr sz="1600" b="0">
+                        <a:rPr sz="1400" b="0">
                           <a:solidFill>
                             <a:srgbClr val="222222"/>
                           </a:solidFill>
                           <a:latin typeface="맑은 고딕"/>
                         </a:rPr>
-                        <a:t>0.964</a:t>
+                        <a:t>COCO 사전학습, 20 epoch(선택 7)</a:t>
                       </a:r>
                     </a:p>
                   </a:txBody>
@@ -9307,13 +11889,13 @@
                     <a:p>
                       <a:pPr algn="ctr"/>
                       <a:r>
-                        <a:rPr sz="1600" b="0">
+                        <a:rPr sz="1400" b="0">
                           <a:solidFill>
                             <a:srgbClr val="222222"/>
                           </a:solidFill>
                           <a:latin typeface="맑은 고딕"/>
                         </a:rPr>
-                        <a:t>0.611</a:t>
+                        <a:t>0.95</a:t>
                       </a:r>
                     </a:p>
                   </a:txBody>
@@ -9324,7 +11906,7 @@
                   </a:tcPr>
                 </a:tc>
               </a:tr>
-              <a:tr h="603504">
+              <a:tr h="566928">
                 <a:tc>
                   <a:txBody>
                     <a:bodyPr/>
@@ -9332,7 +11914,7 @@
                     <a:p>
                       <a:pPr algn="l"/>
                       <a:r>
-                        <a:rPr sz="1600" b="0">
+                        <a:rPr sz="1400" b="0">
                           <a:solidFill>
                             <a:srgbClr val="222222"/>
                           </a:solidFill>
@@ -9355,13 +11937,13 @@
                     <a:p>
                       <a:pPr algn="ctr"/>
                       <a:r>
-                        <a:rPr sz="1600" b="0">
+                        <a:rPr sz="1400" b="0">
                           <a:solidFill>
                             <a:srgbClr val="222222"/>
                           </a:solidFill>
                           <a:latin typeface="맑은 고딕"/>
                         </a:rPr>
-                        <a:t>0.986</a:t>
+                        <a:t>640</a:t>
                       </a:r>
                     </a:p>
                   </a:txBody>
@@ -9378,13 +11960,13 @@
                     <a:p>
                       <a:pPr algn="ctr"/>
                       <a:r>
-                        <a:rPr sz="1600" b="0">
+                        <a:rPr sz="1400" b="0">
                           <a:solidFill>
                             <a:srgbClr val="222222"/>
                           </a:solidFill>
                           <a:latin typeface="맑은 고딕"/>
                         </a:rPr>
-                        <a:t>0.959</a:t>
+                        <a:t>COCO 사전학습, 20 epoch(선택 18)</a:t>
                       </a:r>
                     </a:p>
                   </a:txBody>
@@ -9401,13 +11983,13 @@
                     <a:p>
                       <a:pPr algn="ctr"/>
                       <a:r>
-                        <a:rPr sz="1600" b="0">
+                        <a:rPr sz="1400" b="0">
                           <a:solidFill>
                             <a:srgbClr val="222222"/>
                           </a:solidFill>
                           <a:latin typeface="맑은 고딕"/>
                         </a:rPr>
-                        <a:t>0.559</a:t>
+                        <a:t>0.93</a:t>
                       </a:r>
                     </a:p>
                   </a:txBody>
@@ -9418,7 +12000,7 @@
                   </a:tcPr>
                 </a:tc>
               </a:tr>
-              <a:tr h="603504">
+              <a:tr h="566928">
                 <a:tc>
                   <a:txBody>
                     <a:bodyPr/>
@@ -9426,13 +12008,13 @@
                     <a:p>
                       <a:pPr algn="l"/>
                       <a:r>
-                        <a:rPr sz="1600" b="0">
+                        <a:rPr sz="1400" b="0">
                           <a:solidFill>
                             <a:srgbClr val="222222"/>
                           </a:solidFill>
                           <a:latin typeface="맑은 고딕"/>
                         </a:rPr>
-                        <a:t>YOLO26n</a:t>
+                        <a:t>YOLO26n (팀원)</a:t>
                       </a:r>
                     </a:p>
                   </a:txBody>
@@ -9449,13 +12031,13 @@
                     <a:p>
                       <a:pPr algn="ctr"/>
                       <a:r>
-                        <a:rPr sz="1600" b="0">
+                        <a:rPr sz="1400" b="0">
                           <a:solidFill>
                             <a:srgbClr val="222222"/>
                           </a:solidFill>
                           <a:latin typeface="맑은 고딕"/>
                         </a:rPr>
-                        <a:t>0.991</a:t>
+                        <a:t>1024</a:t>
                       </a:r>
                     </a:p>
                   </a:txBody>
@@ -9472,13 +12054,13 @@
                     <a:p>
                       <a:pPr algn="ctr"/>
                       <a:r>
-                        <a:rPr sz="1600" b="0">
+                        <a:rPr sz="1400" b="0">
                           <a:solidFill>
                             <a:srgbClr val="222222"/>
                           </a:solidFill>
                           <a:latin typeface="맑은 고딕"/>
                         </a:rPr>
-                        <a:t>0.969</a:t>
+                        <a:t>COCO 사전학습, 40 epoch</a:t>
                       </a:r>
                     </a:p>
                   </a:txBody>
@@ -9495,13 +12077,13 @@
                     <a:p>
                       <a:pPr algn="ctr"/>
                       <a:r>
-                        <a:rPr sz="1600" b="0">
+                        <a:rPr sz="1400" b="0">
                           <a:solidFill>
                             <a:srgbClr val="222222"/>
                           </a:solidFill>
                           <a:latin typeface="맑은 고딕"/>
                         </a:rPr>
-                        <a:t>0.633</a:t>
+                        <a:t>0.42</a:t>
                       </a:r>
                     </a:p>
                   </a:txBody>
@@ -9512,7 +12094,7 @@
                   </a:tcPr>
                 </a:tc>
               </a:tr>
-              <a:tr h="603504">
+              <a:tr h="566928">
                 <a:tc>
                   <a:txBody>
                     <a:bodyPr/>
@@ -9520,13 +12102,13 @@
                     <a:p>
                       <a:pPr algn="l"/>
                       <a:r>
-                        <a:rPr sz="1600" b="0">
+                        <a:rPr sz="1400" b="0">
                           <a:solidFill>
                             <a:srgbClr val="222222"/>
                           </a:solidFill>
                           <a:latin typeface="맑은 고딕"/>
                         </a:rPr>
-                        <a:t>RT-DETR-l</a:t>
+                        <a:t>RT-DETR-l (팀원)</a:t>
                       </a:r>
                     </a:p>
                   </a:txBody>
@@ -9543,13 +12125,13 @@
                     <a:p>
                       <a:pPr algn="ctr"/>
                       <a:r>
-                        <a:rPr sz="1600" b="0">
+                        <a:rPr sz="1400" b="0">
                           <a:solidFill>
                             <a:srgbClr val="222222"/>
                           </a:solidFill>
                           <a:latin typeface="맑은 고딕"/>
                         </a:rPr>
-                        <a:t>0.988</a:t>
+                        <a:t>640</a:t>
                       </a:r>
                     </a:p>
                   </a:txBody>
@@ -9566,13 +12148,13 @@
                     <a:p>
                       <a:pPr algn="ctr"/>
                       <a:r>
-                        <a:rPr sz="1600" b="0">
+                        <a:rPr sz="1400" b="0">
                           <a:solidFill>
                             <a:srgbClr val="222222"/>
                           </a:solidFill>
                           <a:latin typeface="맑은 고딕"/>
                         </a:rPr>
-                        <a:t>0.961</a:t>
+                        <a:t>COCO 사전학습, 최대 30 epoch(계획)</a:t>
                       </a:r>
                     </a:p>
                   </a:txBody>
@@ -9589,13 +12171,13 @@
                     <a:p>
                       <a:pPr algn="ctr"/>
                       <a:r>
-                        <a:rPr sz="1600" b="0">
+                        <a:rPr sz="1400" b="0">
                           <a:solidFill>
                             <a:srgbClr val="222222"/>
                           </a:solidFill>
                           <a:latin typeface="맑은 고딕"/>
                         </a:rPr>
-                        <a:t>0.639</a:t>
+                        <a:t>0.74</a:t>
                       </a:r>
                     </a:p>
                   </a:txBody>
@@ -9606,7 +12188,7 @@
                   </a:tcPr>
                 </a:tc>
               </a:tr>
-              <a:tr h="603504">
+              <a:tr h="566928">
                 <a:tc>
                   <a:txBody>
                     <a:bodyPr/>
@@ -9614,19 +12196,19 @@
                     <a:p>
                       <a:pPr algn="l"/>
                       <a:r>
-                        <a:rPr sz="1600" b="1">
+                        <a:rPr sz="1400" b="0">
                           <a:solidFill>
                             <a:srgbClr val="222222"/>
                           </a:solidFill>
                           <a:latin typeface="맑은 고딕"/>
                         </a:rPr>
-                        <a:t>D-FINE-N</a:t>
-                      </a:r>
-                    </a:p>
-                  </a:txBody>
-                  <a:tcPr anchor="ctr" marL="54864" marR="54864">
-                    <a:solidFill>
-                      <a:srgbClr val="DDF1F4"/>
+                        <a:t>D-FINE-N (팀원)</a:t>
+                      </a:r>
+                    </a:p>
+                  </a:txBody>
+                  <a:tcPr anchor="ctr" marL="54864" marR="54864">
+                    <a:solidFill>
+                      <a:srgbClr val="F2F5FA"/>
                     </a:solidFill>
                   </a:tcPr>
                 </a:tc>
@@ -9637,19 +12219,19 @@
                     <a:p>
                       <a:pPr algn="ctr"/>
                       <a:r>
-                        <a:rPr sz="1600" b="1">
+                        <a:rPr sz="1400" b="0">
                           <a:solidFill>
                             <a:srgbClr val="222222"/>
                           </a:solidFill>
                           <a:latin typeface="맑은 고딕"/>
                         </a:rPr>
-                        <a:t>0.989</a:t>
-                      </a:r>
-                    </a:p>
-                  </a:txBody>
-                  <a:tcPr anchor="ctr" marL="54864" marR="54864">
-                    <a:solidFill>
-                      <a:srgbClr val="DDF1F4"/>
+                        <a:t>640</a:t>
+                      </a:r>
+                    </a:p>
+                  </a:txBody>
+                  <a:tcPr anchor="ctr" marL="54864" marR="54864">
+                    <a:solidFill>
+                      <a:srgbClr val="F2F5FA"/>
                     </a:solidFill>
                   </a:tcPr>
                 </a:tc>
@@ -9660,19 +12242,19 @@
                     <a:p>
                       <a:pPr algn="ctr"/>
                       <a:r>
-                        <a:rPr sz="1600" b="1">
+                        <a:rPr sz="1400" b="0">
                           <a:solidFill>
                             <a:srgbClr val="222222"/>
                           </a:solidFill>
                           <a:latin typeface="맑은 고딕"/>
                         </a:rPr>
-                        <a:t>0.964</a:t>
-                      </a:r>
-                    </a:p>
-                  </a:txBody>
-                  <a:tcPr anchor="ctr" marL="54864" marR="54864">
-                    <a:solidFill>
-                      <a:srgbClr val="DDF1F4"/>
+                        <a:t>학습 설정 기록 [확인 필요]</a:t>
+                      </a:r>
+                    </a:p>
+                  </a:txBody>
+                  <a:tcPr anchor="ctr" marL="54864" marR="54864">
+                    <a:solidFill>
+                      <a:srgbClr val="F2F5FA"/>
                     </a:solidFill>
                   </a:tcPr>
                 </a:tc>
@@ -9683,19 +12265,19 @@
                     <a:p>
                       <a:pPr algn="ctr"/>
                       <a:r>
-                        <a:rPr sz="1600" b="1">
+                        <a:rPr sz="1400" b="0">
                           <a:solidFill>
                             <a:srgbClr val="222222"/>
                           </a:solidFill>
                           <a:latin typeface="맑은 고딕"/>
                         </a:rPr>
-                        <a:t>0.659</a:t>
-                      </a:r>
-                    </a:p>
-                  </a:txBody>
-                  <a:tcPr anchor="ctr" marL="54864" marR="54864">
-                    <a:solidFill>
-                      <a:srgbClr val="DDF1F4"/>
+                        <a:t>0.66</a:t>
+                      </a:r>
+                    </a:p>
+                  </a:txBody>
+                  <a:tcPr anchor="ctr" marL="54864" marR="54864">
+                    <a:solidFill>
+                      <a:srgbClr val="F2F5FA"/>
                     </a:solidFill>
                   </a:tcPr>
                 </a:tc>
@@ -9712,8 +12294,8 @@
         </p:nvSpPr>
         <p:spPr>
           <a:xfrm>
-            <a:off x="8138160" y="1783080"/>
-            <a:ext cx="3749039" cy="4572000"/>
+            <a:off x="8412480" y="1783080"/>
+            <a:ext cx="3474720" cy="4572000"/>
           </a:xfrm>
           <a:prstGeom prst="rect">
             <a:avLst/>
@@ -9732,7 +12314,7 @@
               </a:spcAft>
             </a:pPr>
             <a:r>
-              <a:rPr sz="1700" b="1">
+              <a:rPr sz="1600" b="1">
                 <a:solidFill>
                   <a:srgbClr val="2AA7B8"/>
                 </a:solidFill>
@@ -9741,31 +12323,13 @@
               <a:t>• </a:t>
             </a:r>
             <a:r>
-              <a:rPr sz="1700" b="0">
-                <a:solidFill>
-                  <a:srgbClr val="222222"/>
-                </a:solidFill>
-                <a:latin typeface="맑은 고딕"/>
-              </a:rPr>
-              <a:t>모델 임계값은 </a:t>
-            </a:r>
-            <a:r>
-              <a:rPr sz="1700" b="1">
-                <a:solidFill>
-                  <a:srgbClr val="222222"/>
-                </a:solidFill>
-                <a:latin typeface="맑은 고딕"/>
-              </a:rPr>
-              <a:t>val에서 F1 최대</a:t>
-            </a:r>
-            <a:r>
-              <a:rPr sz="1700" b="0">
-                <a:solidFill>
-                  <a:srgbClr val="222222"/>
-                </a:solidFill>
-                <a:latin typeface="맑은 고딕"/>
-              </a:rPr>
-              <a:t>로 정해 고정, test는 한 번만</a:t>
+              <a:rPr sz="1600" b="0">
+                <a:solidFill>
+                  <a:srgbClr val="222222"/>
+                </a:solidFill>
+                <a:latin typeface="맑은 고딕"/>
+              </a:rPr>
+              <a:t>같은 데이터·분할, 같은 평가 코드</a:t>
             </a:r>
           </a:p>
           <a:p>
@@ -9775,7 +12339,7 @@
               </a:spcAft>
             </a:pPr>
             <a:r>
-              <a:rPr sz="1700" b="1">
+              <a:rPr sz="1600" b="1">
                 <a:solidFill>
                   <a:srgbClr val="2AA7B8"/>
                 </a:solidFill>
@@ -9784,13 +12348,31 @@
               <a:t>• </a:t>
             </a:r>
             <a:r>
-              <a:rPr sz="1700" b="0">
-                <a:solidFill>
-                  <a:srgbClr val="222222"/>
-                </a:solidFill>
-                <a:latin typeface="맑은 고딕"/>
-              </a:rPr>
-              <a:t>공식 라벨만 보면 F1은 0.96대로 내려간다</a:t>
+              <a:rPr sz="1600" b="0">
+                <a:solidFill>
+                  <a:srgbClr val="222222"/>
+                </a:solidFill>
+                <a:latin typeface="맑은 고딕"/>
+              </a:rPr>
+              <a:t>임계값은 모델마다 </a:t>
+            </a:r>
+            <a:r>
+              <a:rPr sz="1600" b="1">
+                <a:solidFill>
+                  <a:srgbClr val="222222"/>
+                </a:solidFill>
+                <a:latin typeface="맑은 고딕"/>
+              </a:rPr>
+              <a:t>val에서 F1 최대</a:t>
+            </a:r>
+            <a:r>
+              <a:rPr sz="1600" b="0">
+                <a:solidFill>
+                  <a:srgbClr val="222222"/>
+                </a:solidFill>
+                <a:latin typeface="맑은 고딕"/>
+              </a:rPr>
+              <a:t>로 정해 고정</a:t>
             </a:r>
           </a:p>
           <a:p>
@@ -9800,7 +12382,7 @@
               </a:spcAft>
             </a:pPr>
             <a:r>
-              <a:rPr sz="1700" b="1">
+              <a:rPr sz="1600" b="1">
                 <a:solidFill>
                   <a:srgbClr val="2AA7B8"/>
                 </a:solidFill>
@@ -9809,22 +12391,22 @@
               <a:t>• </a:t>
             </a:r>
             <a:r>
-              <a:rPr sz="1700" b="0">
-                <a:solidFill>
-                  <a:srgbClr val="222222"/>
-                </a:solidFill>
-                <a:latin typeface="맑은 고딕"/>
-              </a:rPr>
-              <a:t>mAP50-95 차이도 공식 라벨만 보면 0.335~0.365로 </a:t>
-            </a:r>
-            <a:r>
-              <a:rPr sz="1700" b="1">
-                <a:solidFill>
-                  <a:srgbClr val="222222"/>
-                </a:solidFill>
-                <a:latin typeface="맑은 고딕"/>
-              </a:rPr>
-              <a:t>좁아진다</a:t>
+              <a:rPr sz="1600" b="1">
+                <a:solidFill>
+                  <a:srgbClr val="222222"/>
+                </a:solidFill>
+                <a:latin typeface="맑은 고딕"/>
+              </a:rPr>
+              <a:t>test는 한 번만</a:t>
+            </a:r>
+            <a:r>
+              <a:rPr sz="1600" b="0">
+                <a:solidFill>
+                  <a:srgbClr val="222222"/>
+                </a:solidFill>
+                <a:latin typeface="맑은 고딕"/>
+              </a:rPr>
+              <a:t> 평가</a:t>
             </a:r>
           </a:p>
           <a:p>
@@ -9834,7 +12416,7 @@
               </a:spcAft>
             </a:pPr>
             <a:r>
-              <a:rPr sz="1700" b="1">
+              <a:rPr sz="1600" b="1">
                 <a:solidFill>
                   <a:srgbClr val="2AA7B8"/>
                 </a:solidFill>
@@ -9843,13 +12425,13 @@
               <a:t>• </a:t>
             </a:r>
             <a:r>
-              <a:rPr sz="1700" b="0">
-                <a:solidFill>
-                  <a:srgbClr val="222222"/>
-                </a:solidFill>
-                <a:latin typeface="맑은 고딕"/>
-              </a:rPr>
-              <a:t>→ 점수 차이는 "찾는 능력"이 아니라 박스 맞춤 정밀도</a:t>
+              <a:rPr sz="1600" b="0">
+                <a:solidFill>
+                  <a:srgbClr val="222222"/>
+                </a:solidFill>
+                <a:latin typeface="맑은 고딕"/>
+              </a:rPr>
+              <a:t>팀원 모델은 가중치를 받아 같은 코드로 다시 평가(임계값도 다시 선정)</a:t>
             </a:r>
           </a:p>
         </p:txBody>
@@ -9945,7 +12527,7 @@
                 </a:solidFill>
                 <a:latin typeface="맑은 고딕"/>
               </a:rPr>
-              <a:t>지표 재설계: 중심 거리 평가</a:t>
+              <a:t>결과: 몇 개를 못 찾았다</a:t>
             </a:r>
           </a:p>
         </p:txBody>
@@ -9980,7 +12562,7 @@
                 </a:solidFill>
                 <a:latin typeface="맑은 고딕"/>
               </a:rPr>
-              <a:t>IoU 0.5는 사실상 "중심이 2px 이내인가"를 재고 있었다</a:t>
+              <a:t>F1은 0.986~0.991, 정답 663개 중 6~9개를 놓쳤고 거의 전부 공식 라벨 이미지다</a:t>
             </a:r>
           </a:p>
         </p:txBody>
@@ -10020,30 +12602,692 @@
           </a:p>
         </p:txBody>
       </p:sp>
-      <p:pic>
-        <p:nvPicPr>
-          <p:cNvPr id="6" name="Picture 5" descr="fig2b_center_distance.png"/>
-          <p:cNvPicPr>
-            <a:picLocks noChangeAspect="1"/>
-          </p:cNvPicPr>
+      <p:graphicFrame>
+        <p:nvGraphicFramePr>
+          <p:cNvPr id="6" name="Table 5"/>
+          <p:cNvGraphicFramePr>
+            <a:graphicFrameLocks noGrp="1"/>
+          </p:cNvGraphicFramePr>
           <p:nvPr/>
-        </p:nvPicPr>
-        <p:blipFill>
-          <a:blip r:embed="rId2"/>
-          <a:stretch>
-            <a:fillRect/>
-          </a:stretch>
-        </p:blipFill>
-        <p:spPr>
-          <a:xfrm>
-            <a:off x="548640" y="2376958"/>
-            <a:ext cx="7132320" cy="3201363"/>
-          </a:xfrm>
-          <a:prstGeom prst="rect">
-            <a:avLst/>
-          </a:prstGeom>
-        </p:spPr>
-      </p:pic>
+        </p:nvGraphicFramePr>
+        <p:xfrm>
+          <a:off x="548640" y="1783080"/>
+          <a:ext cx="7315200" cy="4096512"/>
+        </p:xfrm>
+        <a:graphic>
+          <a:graphicData uri="http://schemas.openxmlformats.org/drawingml/2006/table">
+            <a:tbl>
+              <a:tblPr firstRow="1" bandRow="1">
+                <a:tableStyleId>{5C22544A-7EE6-4342-B048-85BDC9FD1C3A}</a:tableStyleId>
+              </a:tblPr>
+              <a:tblGrid>
+                <a:gridCol w="2926080"/>
+                <a:gridCol w="914400"/>
+                <a:gridCol w="1371600"/>
+                <a:gridCol w="2103120"/>
+              </a:tblGrid>
+              <a:tr h="585216">
+                <a:tc>
+                  <a:txBody>
+                    <a:bodyPr/>
+                    <a:lstStyle/>
+                    <a:p>
+                      <a:pPr algn="l"/>
+                      <a:r>
+                        <a:rPr sz="1500" b="1">
+                          <a:solidFill>
+                            <a:srgbClr val="FFFFFF"/>
+                          </a:solidFill>
+                          <a:latin typeface="맑은 고딕"/>
+                        </a:rPr>
+                        <a:t>모델 (test, IoU 0.5)</a:t>
+                      </a:r>
+                    </a:p>
+                  </a:txBody>
+                  <a:tcPr anchor="ctr" marL="54864" marR="54864">
+                    <a:solidFill>
+                      <a:srgbClr val="1F3A5F"/>
+                    </a:solidFill>
+                  </a:tcPr>
+                </a:tc>
+                <a:tc>
+                  <a:txBody>
+                    <a:bodyPr/>
+                    <a:lstStyle/>
+                    <a:p>
+                      <a:pPr algn="ctr"/>
+                      <a:r>
+                        <a:rPr sz="1500" b="1">
+                          <a:solidFill>
+                            <a:srgbClr val="FFFFFF"/>
+                          </a:solidFill>
+                          <a:latin typeface="맑은 고딕"/>
+                        </a:rPr>
+                        <a:t>F1</a:t>
+                      </a:r>
+                    </a:p>
+                  </a:txBody>
+                  <a:tcPr anchor="ctr" marL="54864" marR="54864">
+                    <a:solidFill>
+                      <a:srgbClr val="1F3A5F"/>
+                    </a:solidFill>
+                  </a:tcPr>
+                </a:tc>
+                <a:tc>
+                  <a:txBody>
+                    <a:bodyPr/>
+                    <a:lstStyle/>
+                    <a:p>
+                      <a:pPr algn="ctr"/>
+                      <a:r>
+                        <a:rPr sz="1500" b="1">
+                          <a:solidFill>
+                            <a:srgbClr val="FFFFFF"/>
+                          </a:solidFill>
+                          <a:latin typeface="맑은 고딕"/>
+                        </a:rPr>
+                        <a:t>못 찾음(FN)</a:t>
+                      </a:r>
+                    </a:p>
+                  </a:txBody>
+                  <a:tcPr anchor="ctr" marL="54864" marR="54864">
+                    <a:solidFill>
+                      <a:srgbClr val="1F3A5F"/>
+                    </a:solidFill>
+                  </a:tcPr>
+                </a:tc>
+                <a:tc>
+                  <a:txBody>
+                    <a:bodyPr/>
+                    <a:lstStyle/>
+                    <a:p>
+                      <a:pPr algn="ctr"/>
+                      <a:r>
+                        <a:rPr sz="1500" b="1">
+                          <a:solidFill>
+                            <a:srgbClr val="FFFFFF"/>
+                          </a:solidFill>
+                          <a:latin typeface="맑은 고딕"/>
+                        </a:rPr>
+                        <a:t>그중 공식 라벨 이미지</a:t>
+                      </a:r>
+                    </a:p>
+                  </a:txBody>
+                  <a:tcPr anchor="ctr" marL="54864" marR="54864">
+                    <a:solidFill>
+                      <a:srgbClr val="1F3A5F"/>
+                    </a:solidFill>
+                  </a:tcPr>
+                </a:tc>
+              </a:tr>
+              <a:tr h="585216">
+                <a:tc>
+                  <a:txBody>
+                    <a:bodyPr/>
+                    <a:lstStyle/>
+                    <a:p>
+                      <a:pPr algn="l"/>
+                      <a:r>
+                        <a:rPr sz="1500" b="0">
+                          <a:solidFill>
+                            <a:srgbClr val="222222"/>
+                          </a:solidFill>
+                          <a:latin typeface="맑은 고딕"/>
+                        </a:rPr>
+                        <a:t>YOLOv3-tiny (베이스라인)</a:t>
+                      </a:r>
+                    </a:p>
+                  </a:txBody>
+                  <a:tcPr anchor="ctr" marL="54864" marR="54864">
+                    <a:solidFill>
+                      <a:srgbClr val="FFFFFF"/>
+                    </a:solidFill>
+                  </a:tcPr>
+                </a:tc>
+                <a:tc>
+                  <a:txBody>
+                    <a:bodyPr/>
+                    <a:lstStyle/>
+                    <a:p>
+                      <a:pPr algn="ctr"/>
+                      <a:r>
+                        <a:rPr sz="1500" b="0">
+                          <a:solidFill>
+                            <a:srgbClr val="222222"/>
+                          </a:solidFill>
+                          <a:latin typeface="맑은 고딕"/>
+                        </a:rPr>
+                        <a:t>0.989</a:t>
+                      </a:r>
+                    </a:p>
+                  </a:txBody>
+                  <a:tcPr anchor="ctr" marL="54864" marR="54864">
+                    <a:solidFill>
+                      <a:srgbClr val="FFFFFF"/>
+                    </a:solidFill>
+                  </a:tcPr>
+                </a:tc>
+                <a:tc>
+                  <a:txBody>
+                    <a:bodyPr/>
+                    <a:lstStyle/>
+                    <a:p>
+                      <a:pPr algn="ctr"/>
+                      <a:r>
+                        <a:rPr sz="1500" b="0">
+                          <a:solidFill>
+                            <a:srgbClr val="222222"/>
+                          </a:solidFill>
+                          <a:latin typeface="맑은 고딕"/>
+                        </a:rPr>
+                        <a:t>7</a:t>
+                      </a:r>
+                    </a:p>
+                  </a:txBody>
+                  <a:tcPr anchor="ctr" marL="54864" marR="54864">
+                    <a:solidFill>
+                      <a:srgbClr val="FFFFFF"/>
+                    </a:solidFill>
+                  </a:tcPr>
+                </a:tc>
+                <a:tc>
+                  <a:txBody>
+                    <a:bodyPr/>
+                    <a:lstStyle/>
+                    <a:p>
+                      <a:pPr algn="ctr"/>
+                      <a:r>
+                        <a:rPr sz="1500" b="0">
+                          <a:solidFill>
+                            <a:srgbClr val="222222"/>
+                          </a:solidFill>
+                          <a:latin typeface="맑은 고딕"/>
+                        </a:rPr>
+                        <a:t>7</a:t>
+                      </a:r>
+                    </a:p>
+                  </a:txBody>
+                  <a:tcPr anchor="ctr" marL="54864" marR="54864">
+                    <a:solidFill>
+                      <a:srgbClr val="FFFFFF"/>
+                    </a:solidFill>
+                  </a:tcPr>
+                </a:tc>
+              </a:tr>
+              <a:tr h="585216">
+                <a:tc>
+                  <a:txBody>
+                    <a:bodyPr/>
+                    <a:lstStyle/>
+                    <a:p>
+                      <a:pPr algn="l"/>
+                      <a:r>
+                        <a:rPr sz="1500" b="0">
+                          <a:solidFill>
+                            <a:srgbClr val="222222"/>
+                          </a:solidFill>
+                          <a:latin typeface="맑은 고딕"/>
+                        </a:rPr>
+                        <a:t>Faster R-CNN R50</a:t>
+                      </a:r>
+                    </a:p>
+                  </a:txBody>
+                  <a:tcPr anchor="ctr" marL="54864" marR="54864">
+                    <a:solidFill>
+                      <a:srgbClr val="F2F5FA"/>
+                    </a:solidFill>
+                  </a:tcPr>
+                </a:tc>
+                <a:tc>
+                  <a:txBody>
+                    <a:bodyPr/>
+                    <a:lstStyle/>
+                    <a:p>
+                      <a:pPr algn="ctr"/>
+                      <a:r>
+                        <a:rPr sz="1500" b="0">
+                          <a:solidFill>
+                            <a:srgbClr val="222222"/>
+                          </a:solidFill>
+                          <a:latin typeface="맑은 고딕"/>
+                        </a:rPr>
+                        <a:t>0.989</a:t>
+                      </a:r>
+                    </a:p>
+                  </a:txBody>
+                  <a:tcPr anchor="ctr" marL="54864" marR="54864">
+                    <a:solidFill>
+                      <a:srgbClr val="F2F5FA"/>
+                    </a:solidFill>
+                  </a:tcPr>
+                </a:tc>
+                <a:tc>
+                  <a:txBody>
+                    <a:bodyPr/>
+                    <a:lstStyle/>
+                    <a:p>
+                      <a:pPr algn="ctr"/>
+                      <a:r>
+                        <a:rPr sz="1500" b="0">
+                          <a:solidFill>
+                            <a:srgbClr val="222222"/>
+                          </a:solidFill>
+                          <a:latin typeface="맑은 고딕"/>
+                        </a:rPr>
+                        <a:t>7</a:t>
+                      </a:r>
+                    </a:p>
+                  </a:txBody>
+                  <a:tcPr anchor="ctr" marL="54864" marR="54864">
+                    <a:solidFill>
+                      <a:srgbClr val="F2F5FA"/>
+                    </a:solidFill>
+                  </a:tcPr>
+                </a:tc>
+                <a:tc>
+                  <a:txBody>
+                    <a:bodyPr/>
+                    <a:lstStyle/>
+                    <a:p>
+                      <a:pPr algn="ctr"/>
+                      <a:r>
+                        <a:rPr sz="1500" b="0">
+                          <a:solidFill>
+                            <a:srgbClr val="222222"/>
+                          </a:solidFill>
+                          <a:latin typeface="맑은 고딕"/>
+                        </a:rPr>
+                        <a:t>7</a:t>
+                      </a:r>
+                    </a:p>
+                  </a:txBody>
+                  <a:tcPr anchor="ctr" marL="54864" marR="54864">
+                    <a:solidFill>
+                      <a:srgbClr val="F2F5FA"/>
+                    </a:solidFill>
+                  </a:tcPr>
+                </a:tc>
+              </a:tr>
+              <a:tr h="585216">
+                <a:tc>
+                  <a:txBody>
+                    <a:bodyPr/>
+                    <a:lstStyle/>
+                    <a:p>
+                      <a:pPr algn="l"/>
+                      <a:r>
+                        <a:rPr sz="1500" b="0">
+                          <a:solidFill>
+                            <a:srgbClr val="222222"/>
+                          </a:solidFill>
+                          <a:latin typeface="맑은 고딕"/>
+                        </a:rPr>
+                        <a:t>Faster R-CNN MobileNetV3</a:t>
+                      </a:r>
+                    </a:p>
+                  </a:txBody>
+                  <a:tcPr anchor="ctr" marL="54864" marR="54864">
+                    <a:solidFill>
+                      <a:srgbClr val="FFFFFF"/>
+                    </a:solidFill>
+                  </a:tcPr>
+                </a:tc>
+                <a:tc>
+                  <a:txBody>
+                    <a:bodyPr/>
+                    <a:lstStyle/>
+                    <a:p>
+                      <a:pPr algn="ctr"/>
+                      <a:r>
+                        <a:rPr sz="1500" b="0">
+                          <a:solidFill>
+                            <a:srgbClr val="222222"/>
+                          </a:solidFill>
+                          <a:latin typeface="맑은 고딕"/>
+                        </a:rPr>
+                        <a:t>0.986</a:t>
+                      </a:r>
+                    </a:p>
+                  </a:txBody>
+                  <a:tcPr anchor="ctr" marL="54864" marR="54864">
+                    <a:solidFill>
+                      <a:srgbClr val="FFFFFF"/>
+                    </a:solidFill>
+                  </a:tcPr>
+                </a:tc>
+                <a:tc>
+                  <a:txBody>
+                    <a:bodyPr/>
+                    <a:lstStyle/>
+                    <a:p>
+                      <a:pPr algn="ctr"/>
+                      <a:r>
+                        <a:rPr sz="1500" b="0">
+                          <a:solidFill>
+                            <a:srgbClr val="222222"/>
+                          </a:solidFill>
+                          <a:latin typeface="맑은 고딕"/>
+                        </a:rPr>
+                        <a:t>9</a:t>
+                      </a:r>
+                    </a:p>
+                  </a:txBody>
+                  <a:tcPr anchor="ctr" marL="54864" marR="54864">
+                    <a:solidFill>
+                      <a:srgbClr val="FFFFFF"/>
+                    </a:solidFill>
+                  </a:tcPr>
+                </a:tc>
+                <a:tc>
+                  <a:txBody>
+                    <a:bodyPr/>
+                    <a:lstStyle/>
+                    <a:p>
+                      <a:pPr algn="ctr"/>
+                      <a:r>
+                        <a:rPr sz="1500" b="0">
+                          <a:solidFill>
+                            <a:srgbClr val="222222"/>
+                          </a:solidFill>
+                          <a:latin typeface="맑은 고딕"/>
+                        </a:rPr>
+                        <a:t>8</a:t>
+                      </a:r>
+                    </a:p>
+                  </a:txBody>
+                  <a:tcPr anchor="ctr" marL="54864" marR="54864">
+                    <a:solidFill>
+                      <a:srgbClr val="FFFFFF"/>
+                    </a:solidFill>
+                  </a:tcPr>
+                </a:tc>
+              </a:tr>
+              <a:tr h="585216">
+                <a:tc>
+                  <a:txBody>
+                    <a:bodyPr/>
+                    <a:lstStyle/>
+                    <a:p>
+                      <a:pPr algn="l"/>
+                      <a:r>
+                        <a:rPr sz="1500" b="0">
+                          <a:solidFill>
+                            <a:srgbClr val="222222"/>
+                          </a:solidFill>
+                          <a:latin typeface="맑은 고딕"/>
+                        </a:rPr>
+                        <a:t>YOLO26n</a:t>
+                      </a:r>
+                    </a:p>
+                  </a:txBody>
+                  <a:tcPr anchor="ctr" marL="54864" marR="54864">
+                    <a:solidFill>
+                      <a:srgbClr val="F2F5FA"/>
+                    </a:solidFill>
+                  </a:tcPr>
+                </a:tc>
+                <a:tc>
+                  <a:txBody>
+                    <a:bodyPr/>
+                    <a:lstStyle/>
+                    <a:p>
+                      <a:pPr algn="ctr"/>
+                      <a:r>
+                        <a:rPr sz="1500" b="0">
+                          <a:solidFill>
+                            <a:srgbClr val="222222"/>
+                          </a:solidFill>
+                          <a:latin typeface="맑은 고딕"/>
+                        </a:rPr>
+                        <a:t>0.991</a:t>
+                      </a:r>
+                    </a:p>
+                  </a:txBody>
+                  <a:tcPr anchor="ctr" marL="54864" marR="54864">
+                    <a:solidFill>
+                      <a:srgbClr val="F2F5FA"/>
+                    </a:solidFill>
+                  </a:tcPr>
+                </a:tc>
+                <a:tc>
+                  <a:txBody>
+                    <a:bodyPr/>
+                    <a:lstStyle/>
+                    <a:p>
+                      <a:pPr algn="ctr"/>
+                      <a:r>
+                        <a:rPr sz="1500" b="0">
+                          <a:solidFill>
+                            <a:srgbClr val="222222"/>
+                          </a:solidFill>
+                          <a:latin typeface="맑은 고딕"/>
+                        </a:rPr>
+                        <a:t>6</a:t>
+                      </a:r>
+                    </a:p>
+                  </a:txBody>
+                  <a:tcPr anchor="ctr" marL="54864" marR="54864">
+                    <a:solidFill>
+                      <a:srgbClr val="F2F5FA"/>
+                    </a:solidFill>
+                  </a:tcPr>
+                </a:tc>
+                <a:tc>
+                  <a:txBody>
+                    <a:bodyPr/>
+                    <a:lstStyle/>
+                    <a:p>
+                      <a:pPr algn="ctr"/>
+                      <a:r>
+                        <a:rPr sz="1500" b="0">
+                          <a:solidFill>
+                            <a:srgbClr val="222222"/>
+                          </a:solidFill>
+                          <a:latin typeface="맑은 고딕"/>
+                        </a:rPr>
+                        <a:t>6</a:t>
+                      </a:r>
+                    </a:p>
+                  </a:txBody>
+                  <a:tcPr anchor="ctr" marL="54864" marR="54864">
+                    <a:solidFill>
+                      <a:srgbClr val="F2F5FA"/>
+                    </a:solidFill>
+                  </a:tcPr>
+                </a:tc>
+              </a:tr>
+              <a:tr h="585216">
+                <a:tc>
+                  <a:txBody>
+                    <a:bodyPr/>
+                    <a:lstStyle/>
+                    <a:p>
+                      <a:pPr algn="l"/>
+                      <a:r>
+                        <a:rPr sz="1500" b="0">
+                          <a:solidFill>
+                            <a:srgbClr val="222222"/>
+                          </a:solidFill>
+                          <a:latin typeface="맑은 고딕"/>
+                        </a:rPr>
+                        <a:t>RT-DETR-l</a:t>
+                      </a:r>
+                    </a:p>
+                  </a:txBody>
+                  <a:tcPr anchor="ctr" marL="54864" marR="54864">
+                    <a:solidFill>
+                      <a:srgbClr val="FFFFFF"/>
+                    </a:solidFill>
+                  </a:tcPr>
+                </a:tc>
+                <a:tc>
+                  <a:txBody>
+                    <a:bodyPr/>
+                    <a:lstStyle/>
+                    <a:p>
+                      <a:pPr algn="ctr"/>
+                      <a:r>
+                        <a:rPr sz="1500" b="0">
+                          <a:solidFill>
+                            <a:srgbClr val="222222"/>
+                          </a:solidFill>
+                          <a:latin typeface="맑은 고딕"/>
+                        </a:rPr>
+                        <a:t>0.988</a:t>
+                      </a:r>
+                    </a:p>
+                  </a:txBody>
+                  <a:tcPr anchor="ctr" marL="54864" marR="54864">
+                    <a:solidFill>
+                      <a:srgbClr val="FFFFFF"/>
+                    </a:solidFill>
+                  </a:tcPr>
+                </a:tc>
+                <a:tc>
+                  <a:txBody>
+                    <a:bodyPr/>
+                    <a:lstStyle/>
+                    <a:p>
+                      <a:pPr algn="ctr"/>
+                      <a:r>
+                        <a:rPr sz="1500" b="0">
+                          <a:solidFill>
+                            <a:srgbClr val="222222"/>
+                          </a:solidFill>
+                          <a:latin typeface="맑은 고딕"/>
+                        </a:rPr>
+                        <a:t>8</a:t>
+                      </a:r>
+                    </a:p>
+                  </a:txBody>
+                  <a:tcPr anchor="ctr" marL="54864" marR="54864">
+                    <a:solidFill>
+                      <a:srgbClr val="FFFFFF"/>
+                    </a:solidFill>
+                  </a:tcPr>
+                </a:tc>
+                <a:tc>
+                  <a:txBody>
+                    <a:bodyPr/>
+                    <a:lstStyle/>
+                    <a:p>
+                      <a:pPr algn="ctr"/>
+                      <a:r>
+                        <a:rPr sz="1500" b="0">
+                          <a:solidFill>
+                            <a:srgbClr val="222222"/>
+                          </a:solidFill>
+                          <a:latin typeface="맑은 고딕"/>
+                        </a:rPr>
+                        <a:t>7</a:t>
+                      </a:r>
+                    </a:p>
+                  </a:txBody>
+                  <a:tcPr anchor="ctr" marL="54864" marR="54864">
+                    <a:solidFill>
+                      <a:srgbClr val="FFFFFF"/>
+                    </a:solidFill>
+                  </a:tcPr>
+                </a:tc>
+              </a:tr>
+              <a:tr h="585216">
+                <a:tc>
+                  <a:txBody>
+                    <a:bodyPr/>
+                    <a:lstStyle/>
+                    <a:p>
+                      <a:pPr algn="l"/>
+                      <a:r>
+                        <a:rPr sz="1500" b="0">
+                          <a:solidFill>
+                            <a:srgbClr val="222222"/>
+                          </a:solidFill>
+                          <a:latin typeface="맑은 고딕"/>
+                        </a:rPr>
+                        <a:t>D-FINE-N</a:t>
+                      </a:r>
+                    </a:p>
+                  </a:txBody>
+                  <a:tcPr anchor="ctr" marL="54864" marR="54864">
+                    <a:solidFill>
+                      <a:srgbClr val="F2F5FA"/>
+                    </a:solidFill>
+                  </a:tcPr>
+                </a:tc>
+                <a:tc>
+                  <a:txBody>
+                    <a:bodyPr/>
+                    <a:lstStyle/>
+                    <a:p>
+                      <a:pPr algn="ctr"/>
+                      <a:r>
+                        <a:rPr sz="1500" b="0">
+                          <a:solidFill>
+                            <a:srgbClr val="222222"/>
+                          </a:solidFill>
+                          <a:latin typeface="맑은 고딕"/>
+                        </a:rPr>
+                        <a:t>0.989</a:t>
+                      </a:r>
+                    </a:p>
+                  </a:txBody>
+                  <a:tcPr anchor="ctr" marL="54864" marR="54864">
+                    <a:solidFill>
+                      <a:srgbClr val="F2F5FA"/>
+                    </a:solidFill>
+                  </a:tcPr>
+                </a:tc>
+                <a:tc>
+                  <a:txBody>
+                    <a:bodyPr/>
+                    <a:lstStyle/>
+                    <a:p>
+                      <a:pPr algn="ctr"/>
+                      <a:r>
+                        <a:rPr sz="1500" b="0">
+                          <a:solidFill>
+                            <a:srgbClr val="222222"/>
+                          </a:solidFill>
+                          <a:latin typeface="맑은 고딕"/>
+                        </a:rPr>
+                        <a:t>7</a:t>
+                      </a:r>
+                    </a:p>
+                  </a:txBody>
+                  <a:tcPr anchor="ctr" marL="54864" marR="54864">
+                    <a:solidFill>
+                      <a:srgbClr val="F2F5FA"/>
+                    </a:solidFill>
+                  </a:tcPr>
+                </a:tc>
+                <a:tc>
+                  <a:txBody>
+                    <a:bodyPr/>
+                    <a:lstStyle/>
+                    <a:p>
+                      <a:pPr algn="ctr"/>
+                      <a:r>
+                        <a:rPr sz="1500" b="0">
+                          <a:solidFill>
+                            <a:srgbClr val="222222"/>
+                          </a:solidFill>
+                          <a:latin typeface="맑은 고딕"/>
+                        </a:rPr>
+                        <a:t>7</a:t>
+                      </a:r>
+                    </a:p>
+                  </a:txBody>
+                  <a:tcPr anchor="ctr" marL="54864" marR="54864">
+                    <a:solidFill>
+                      <a:srgbClr val="F2F5FA"/>
+                    </a:solidFill>
+                  </a:tcPr>
+                </a:tc>
+              </a:tr>
+            </a:tbl>
+          </a:graphicData>
+        </a:graphic>
+      </p:graphicFrame>
       <p:sp>
         <p:nvSpPr>
           <p:cNvPr id="7" name="TextBox 6"/>
@@ -10052,8 +13296,8 @@
         </p:nvSpPr>
         <p:spPr>
           <a:xfrm>
-            <a:off x="7863840" y="1783080"/>
-            <a:ext cx="3931920" cy="4389120"/>
+            <a:off x="8138160" y="1783080"/>
+            <a:ext cx="3749039" cy="4572000"/>
           </a:xfrm>
           <a:prstGeom prst="rect">
             <a:avLst/>
@@ -10068,11 +13312,11 @@
           <a:p>
             <a:pPr>
               <a:spcAft>
-                <a:spcPts val="600"/>
+                <a:spcPts val="1200"/>
               </a:spcAft>
             </a:pPr>
             <a:r>
-              <a:rPr sz="1600" b="1">
+              <a:rPr sz="1700" b="1">
                 <a:solidFill>
                   <a:srgbClr val="2AA7B8"/>
                 </a:solidFill>
@@ -10081,23 +13325,23 @@
               <a:t>• </a:t>
             </a:r>
             <a:r>
-              <a:rPr sz="1600" b="0">
-                <a:solidFill>
-                  <a:srgbClr val="222222"/>
-                </a:solidFill>
-                <a:latin typeface="맑은 고딕"/>
-              </a:rPr>
-              <a:t>약 10px 결함은 박스가 몇 px만 어긋나도 IoU가 급락</a:t>
+              <a:rPr sz="1700" b="0">
+                <a:solidFill>
+                  <a:srgbClr val="222222"/>
+                </a:solidFill>
+                <a:latin typeface="맑은 고딕"/>
+              </a:rPr>
+              <a:t>공식 라벨만 보면 F1은 0.96대로 내려간다</a:t>
             </a:r>
           </a:p>
           <a:p>
             <a:pPr>
               <a:spcAft>
-                <a:spcPts val="600"/>
+                <a:spcPts val="1200"/>
               </a:spcAft>
             </a:pPr>
             <a:r>
-              <a:rPr sz="1600" b="1">
+              <a:rPr sz="1700" b="1">
                 <a:solidFill>
                   <a:srgbClr val="2AA7B8"/>
                 </a:solidFill>
@@ -10106,23 +13350,41 @@
               <a:t>• </a:t>
             </a:r>
             <a:r>
-              <a:rPr sz="1600" b="0">
-                <a:solidFill>
-                  <a:srgbClr val="222222"/>
-                </a:solidFill>
-                <a:latin typeface="맑은 고딕"/>
-              </a:rPr>
-              <a:t>"검출 중심이 정답 중심에서 R(px) 이내"로 매칭하는 평가 v2 추가</a:t>
+              <a:rPr sz="1700" b="0">
+                <a:solidFill>
+                  <a:srgbClr val="222222"/>
+                </a:solidFill>
+                <a:latin typeface="맑은 고딕"/>
+              </a:rPr>
+              <a:t>FP도 같은 수 → 같은 점을 </a:t>
+            </a:r>
+            <a:r>
+              <a:rPr sz="1700" b="1">
+                <a:solidFill>
+                  <a:srgbClr val="222222"/>
+                </a:solidFill>
+                <a:latin typeface="맑은 고딕"/>
+              </a:rPr>
+              <a:t>어긋난 박스</a:t>
+            </a:r>
+            <a:r>
+              <a:rPr sz="1700" b="0">
+                <a:solidFill>
+                  <a:srgbClr val="222222"/>
+                </a:solidFill>
+                <a:latin typeface="맑은 고딕"/>
+              </a:rPr>
+              <a:t>로 낸 것</a:t>
             </a:r>
           </a:p>
           <a:p>
             <a:pPr>
               <a:spcAft>
-                <a:spcPts val="600"/>
+                <a:spcPts val="1200"/>
               </a:spcAft>
             </a:pPr>
             <a:r>
-              <a:rPr sz="1600" b="1">
+              <a:rPr sz="1700" b="1">
                 <a:solidFill>
                   <a:srgbClr val="2AA7B8"/>
                 </a:solidFill>
@@ -10131,47 +13393,13 @@
               <a:t>• </a:t>
             </a:r>
             <a:r>
-              <a:rPr sz="1600" b="1">
-                <a:solidFill>
-                  <a:srgbClr val="222222"/>
-                </a:solidFill>
-                <a:latin typeface="맑은 고딕"/>
-              </a:rPr>
-              <a:t>R ≥ 3px에서 6개 모델 모두 포화</a:t>
-            </a:r>
-            <a:r>
-              <a:rPr sz="1600" b="0">
-                <a:solidFill>
-                  <a:srgbClr val="222222"/>
-                </a:solidFill>
-                <a:latin typeface="맑은 고딕"/>
-              </a:rPr>
-              <a:t>(F1 0.998~1.000)</a:t>
-            </a:r>
-          </a:p>
-          <a:p>
-            <a:pPr>
-              <a:spcAft>
-                <a:spcPts val="600"/>
-              </a:spcAft>
-            </a:pPr>
-            <a:r>
-              <a:rPr sz="1600" b="1">
-                <a:solidFill>
-                  <a:srgbClr val="2AA7B8"/>
-                </a:solidFill>
-                <a:latin typeface="맑은 고딕"/>
-              </a:rPr>
-              <a:t>• </a:t>
-            </a:r>
-            <a:r>
-              <a:rPr sz="1600" b="0">
-                <a:solidFill>
-                  <a:srgbClr val="222222"/>
-                </a:solidFill>
-                <a:latin typeface="맑은 고딕"/>
-              </a:rPr>
-              <a:t>구분은 R 1~2px의 위치 정밀도에서만 보인다</a:t>
+              <a:rPr sz="1700" b="0">
+                <a:solidFill>
+                  <a:srgbClr val="222222"/>
+                </a:solidFill>
+                <a:latin typeface="맑은 고딕"/>
+              </a:rPr>
+              <a:t>→ 정말 놓친 것일까? 놓친 자리를 직접 확인했다</a:t>
             </a:r>
           </a:p>
         </p:txBody>
@@ -10267,7 +13495,7 @@
                 </a:solidFill>
                 <a:latin typeface="맑은 고딕"/>
               </a:rPr>
-              <a:t>오류의 정체: 놓친 것이 아니라 박스 크기가 다른 것</a:t>
+              <a:t>원인: 공식 라벨의 박스 크기</a:t>
             </a:r>
           </a:p>
         </p:txBody>
@@ -10302,7 +13530,7 @@
                 </a:solidFill>
                 <a:latin typeface="맑은 고딕"/>
               </a:rPr>
-              <a:t>test 오류 7건은 전부 공식 라벨 이미지, 점은 모두 예측 박스 안에 있다</a:t>
+              <a:t>놓친 것이 아니라 정답 박스의 크기가 달라서 IoU가 0.5에 못 미친 것이다</a:t>
             </a:r>
           </a:p>
         </p:txBody>
@@ -10358,8 +13586,8 @@
         </p:blipFill>
         <p:spPr>
           <a:xfrm>
-            <a:off x="548640" y="1818178"/>
-            <a:ext cx="7223759" cy="4318922"/>
+            <a:off x="548640" y="1900183"/>
+            <a:ext cx="6949440" cy="4154912"/>
           </a:xfrm>
           <a:prstGeom prst="rect">
             <a:avLst/>
@@ -10374,8 +13602,8 @@
         </p:nvSpPr>
         <p:spPr>
           <a:xfrm>
-            <a:off x="7955279" y="1783080"/>
-            <a:ext cx="3840480" cy="4389120"/>
+            <a:off x="7680960" y="1783080"/>
+            <a:ext cx="4114800" cy="4572000"/>
           </a:xfrm>
           <a:prstGeom prst="rect">
             <a:avLst/>
@@ -10390,7 +13618,7 @@
           <a:p>
             <a:pPr>
               <a:spcAft>
-                <a:spcPts val="600"/>
+                <a:spcPts val="900"/>
               </a:spcAft>
             </a:pPr>
             <a:r>
@@ -10409,13 +13637,31 @@
                 </a:solidFill>
                 <a:latin typeface="맑은 고딕"/>
               </a:rPr>
-              <a:t>모델 박스는 점을 정확히 감쌈(중심 거리 0.5~1.2px)</a:t>
+              <a:t>오류가 난 이미지는 거의 전부 </a:t>
+            </a:r>
+            <a:r>
+              <a:rPr sz="1600" b="1">
+                <a:solidFill>
+                  <a:srgbClr val="222222"/>
+                </a:solidFill>
+                <a:latin typeface="맑은 고딕"/>
+              </a:rPr>
+              <a:t>공식 라벨</a:t>
+            </a:r>
+            <a:r>
+              <a:rPr sz="1600" b="0">
+                <a:solidFill>
+                  <a:srgbClr val="222222"/>
+                </a:solidFill>
+                <a:latin typeface="맑은 고딕"/>
+              </a:rPr>
+              <a:t>(사람이 그려 크기가 제각각)</a:t>
             </a:r>
           </a:p>
           <a:p>
             <a:pPr>
               <a:spcAft>
-                <a:spcPts val="600"/>
+                <a:spcPts val="900"/>
               </a:spcAft>
             </a:pPr>
             <a:r>
@@ -10434,13 +13680,13 @@
                 </a:solidFill>
                 <a:latin typeface="맑은 고딕"/>
               </a:rPr>
-              <a:t>정답 박스가 더 작거나(6x7, 9x5) 더 클 뿐(14x15)</a:t>
+              <a:t>확대하면 모델 박스는 점을 정확히 감쌈(중심 거리 0.5~1.2px)</a:t>
             </a:r>
           </a:p>
           <a:p>
             <a:pPr>
               <a:spcAft>
-                <a:spcPts val="600"/>
+                <a:spcPts val="900"/>
               </a:spcAft>
             </a:pPr>
             <a:r>
@@ -10459,22 +13705,13 @@
                 </a:solidFill>
                 <a:latin typeface="맑은 고딕"/>
               </a:rPr>
-              <a:t>중심 5px 기준으로는 오류 </a:t>
-            </a:r>
-            <a:r>
-              <a:rPr sz="1600" b="1">
-                <a:solidFill>
-                  <a:srgbClr val="222222"/>
-                </a:solidFill>
-                <a:latin typeface="맑은 고딕"/>
-              </a:rPr>
-              <a:t>0건</a:t>
+              <a:t>정답 박스가 더 작거나(6x7, 9x5) 더 큼(14x15)</a:t>
             </a:r>
           </a:p>
           <a:p>
             <a:pPr>
               <a:spcAft>
-                <a:spcPts val="600"/>
+                <a:spcPts val="900"/>
               </a:spcAft>
             </a:pPr>
             <a:r>
@@ -10493,25 +13730,7 @@
                 </a:solidFill>
                 <a:latin typeface="맑은 고딕"/>
               </a:rPr>
-              <a:t>→ 모델의 약점이 아니라 </a:t>
-            </a:r>
-            <a:r>
-              <a:rPr sz="1600" b="1">
-                <a:solidFill>
-                  <a:srgbClr val="222222"/>
-                </a:solidFill>
-                <a:latin typeface="맑은 고딕"/>
-              </a:rPr>
-              <a:t>라벨 크기와 채점 기준</a:t>
-            </a:r>
-            <a:r>
-              <a:rPr sz="1600" b="0">
-                <a:solidFill>
-                  <a:srgbClr val="222222"/>
-                </a:solidFill>
-                <a:latin typeface="맑은 고딕"/>
-              </a:rPr>
-              <a:t>의 문제</a:t>
+              <a:t>팀 라벨은 고정 크기라 IoU가 잘 맞아 점수가 부풀려진다</a:t>
             </a:r>
           </a:p>
         </p:txBody>
@@ -10607,7 +13826,7 @@
                 </a:solidFill>
                 <a:latin typeface="맑은 고딕"/>
               </a:rPr>
-              <a:t>점 제거 시험: 모델은 점 자체를 본다</a:t>
+              <a:t>해결: 중심 거리로 재채점</a:t>
             </a:r>
           </a:p>
         </p:txBody>
@@ -10642,7 +13861,7 @@
                 </a:solidFill>
                 <a:latin typeface="맑은 고딕"/>
               </a:rPr>
-              <a:t>결함의 점을 지우면 검출이 사라진다 → 위치만 보는 지름길이 아니다</a:t>
+              <a:t>중심이 정답에서 R(px) 이내면 찾은 것으로 보면 거의 다 찾는다</a:t>
             </a:r>
           </a:p>
         </p:txBody>
@@ -10684,7 +13903,7 @@
       </p:sp>
       <p:pic>
         <p:nvPicPr>
-          <p:cNvPr id="6" name="Picture 5" descr="fig3b_dot_removal.png"/>
+          <p:cNvPr id="6" name="Picture 5" descr="fig2b_center_distance.png"/>
           <p:cNvPicPr>
             <a:picLocks noChangeAspect="1"/>
           </p:cNvPicPr>
@@ -10698,8 +13917,8 @@
         </p:blipFill>
         <p:spPr>
           <a:xfrm>
-            <a:off x="2397900" y="1554479"/>
-            <a:ext cx="7365719" cy="3291840"/>
+            <a:off x="457200" y="2479565"/>
+            <a:ext cx="6675120" cy="2996148"/>
           </a:xfrm>
           <a:prstGeom prst="rect">
             <a:avLst/>
@@ -10714,8 +13933,8 @@
         </p:nvSpPr>
         <p:spPr>
           <a:xfrm>
-            <a:off x="731520" y="4937760"/>
-            <a:ext cx="10789920" cy="1737360"/>
+            <a:off x="7315200" y="1783080"/>
+            <a:ext cx="4572000" cy="4572000"/>
           </a:xfrm>
           <a:prstGeom prst="rect">
             <a:avLst/>
@@ -10734,7 +13953,7 @@
               </a:spcAft>
             </a:pPr>
             <a:r>
-              <a:rPr sz="1600" b="1">
+              <a:rPr sz="1500" b="1">
                 <a:solidFill>
                   <a:srgbClr val="2AA7B8"/>
                 </a:solidFill>
@@ -10743,31 +13962,40 @@
               <a:t>• </a:t>
             </a:r>
             <a:r>
-              <a:rPr sz="1600" b="0">
-                <a:solidFill>
-                  <a:srgbClr val="222222"/>
-                </a:solidFill>
-                <a:latin typeface="맑은 고딕"/>
-              </a:rPr>
-              <a:t>test 정답 663개의 점을 보간으로 지우고 같은 모델을 다시 적용: 노이즈 없는 평균 보간으로 13x13 이상 지우면 </a:t>
-            </a:r>
-            <a:r>
-              <a:rPr sz="1600" b="1">
-                <a:solidFill>
-                  <a:srgbClr val="222222"/>
-                </a:solidFill>
-                <a:latin typeface="맑은 고딕"/>
-              </a:rPr>
-              <a:t>6개 모델 모두 0~3개</a:t>
-            </a:r>
-            <a:r>
-              <a:rPr sz="1600" b="0">
-                <a:solidFill>
-                  <a:srgbClr val="222222"/>
-                </a:solidFill>
-                <a:latin typeface="맑은 고딕"/>
-              </a:rPr>
-              <a:t>만 검출</a:t>
+              <a:rPr sz="1500" b="0">
+                <a:solidFill>
+                  <a:srgbClr val="222222"/>
+                </a:solidFill>
+                <a:latin typeface="맑은 고딕"/>
+              </a:rPr>
+              <a:t>R = 5px로 재채점하면 못 찾은 것이 4개 모델은 </a:t>
+            </a:r>
+            <a:r>
+              <a:rPr sz="1500" b="1">
+                <a:solidFill>
+                  <a:srgbClr val="222222"/>
+                </a:solidFill>
+                <a:latin typeface="맑은 고딕"/>
+              </a:rPr>
+              <a:t>0개</a:t>
+            </a:r>
+            <a:r>
+              <a:rPr sz="1500" b="0">
+                <a:solidFill>
+                  <a:srgbClr val="222222"/>
+                </a:solidFill>
+                <a:latin typeface="맑은 고딕"/>
+              </a:rPr>
+              <a:t>, MobileNetV3·RT-DETR-l은 </a:t>
+            </a:r>
+            <a:r>
+              <a:rPr sz="1500" b="1">
+                <a:solidFill>
+                  <a:srgbClr val="222222"/>
+                </a:solidFill>
+                <a:latin typeface="맑은 고딕"/>
+              </a:rPr>
+              <a:t>1개</a:t>
             </a:r>
           </a:p>
           <a:p>
@@ -10777,7 +14005,7 @@
               </a:spcAft>
             </a:pPr>
             <a:r>
-              <a:rPr sz="1600" b="1">
+              <a:rPr sz="1500" b="1">
                 <a:solidFill>
                   <a:srgbClr val="2AA7B8"/>
                 </a:solidFill>
@@ -10786,31 +14014,81 @@
               <a:t>• </a:t>
             </a:r>
             <a:r>
-              <a:rPr sz="1600" b="0">
-                <a:solidFill>
-                  <a:srgbClr val="222222"/>
-                </a:solidFill>
-                <a:latin typeface="맑은 고딕"/>
-              </a:rPr>
-              <a:t>YOLOv3-tiny 등에 남는 반응은 보간에 더한 </a:t>
-            </a:r>
-            <a:r>
-              <a:rPr sz="1600" b="1">
-                <a:solidFill>
-                  <a:srgbClr val="222222"/>
-                </a:solidFill>
-                <a:latin typeface="맑은 고딕"/>
-              </a:rPr>
-              <a:t>노이즈 무늬</a:t>
-            </a:r>
-            <a:r>
-              <a:rPr sz="1600" b="0">
-                <a:solidFill>
-                  <a:srgbClr val="222222"/>
-                </a:solidFill>
-                <a:latin typeface="맑은 고딕"/>
-              </a:rPr>
-              <a:t> 때문 → 다음 질문: 노이즈 무늬에 속아 오경보를 내는가?</a:t>
+              <a:rPr sz="1500" b="0">
+                <a:solidFill>
+                  <a:srgbClr val="222222"/>
+                </a:solidFill>
+                <a:latin typeface="맑은 고딕"/>
+              </a:rPr>
+              <a:t>R ≥ 3px에서 6개 모델의 F1은 </a:t>
+            </a:r>
+            <a:r>
+              <a:rPr sz="1500" b="1">
+                <a:solidFill>
+                  <a:srgbClr val="222222"/>
+                </a:solidFill>
+                <a:latin typeface="맑은 고딕"/>
+              </a:rPr>
+              <a:t>0.998~1.000</a:t>
+            </a:r>
+            <a:r>
+              <a:rPr sz="1500" b="0">
+                <a:solidFill>
+                  <a:srgbClr val="222222"/>
+                </a:solidFill>
+                <a:latin typeface="맑은 고딕"/>
+              </a:rPr>
+              <a:t>(포화)</a:t>
+            </a:r>
+          </a:p>
+          <a:p>
+            <a:pPr>
+              <a:spcAft>
+                <a:spcPts val="800"/>
+              </a:spcAft>
+            </a:pPr>
+            <a:r>
+              <a:rPr sz="1500" b="1">
+                <a:solidFill>
+                  <a:srgbClr val="2AA7B8"/>
+                </a:solidFill>
+                <a:latin typeface="맑은 고딕"/>
+              </a:rPr>
+              <a:t>• </a:t>
+            </a:r>
+            <a:r>
+              <a:rPr sz="1500" b="0">
+                <a:solidFill>
+                  <a:srgbClr val="222222"/>
+                </a:solidFill>
+                <a:latin typeface="맑은 고딕"/>
+              </a:rPr>
+              <a:t>IoU 0.5는 사실상 "중심이 2px 이내인가"를 재고 있었다</a:t>
+            </a:r>
+          </a:p>
+          <a:p>
+            <a:pPr>
+              <a:spcAft>
+                <a:spcPts val="800"/>
+              </a:spcAft>
+            </a:pPr>
+            <a:r>
+              <a:rPr sz="1500" b="1">
+                <a:solidFill>
+                  <a:srgbClr val="2AA7B8"/>
+                </a:solidFill>
+                <a:latin typeface="맑은 고딕"/>
+              </a:rPr>
+              <a:t>• </a:t>
+            </a:r>
+            <a:r>
+              <a:rPr sz="1500" b="0">
+                <a:solidFill>
+                  <a:srgbClr val="222222"/>
+                </a:solidFill>
+                <a:latin typeface="맑은 고딕"/>
+              </a:rPr>
+              <a:t>남는 차이는 위치 정밀도: mAP50-95는 D-FINE-N 0.659 &gt; RT-DETR-l 0.639 &gt; YOLO26n 0.633 &gt; R50 0.611 &gt; MobileNetV3 0.559 ≈ YOLOv3-tiny 0.558 (공식 라벨만 보면 0.335~0.365로 좁아짐)</a:t>
             </a:r>
           </a:p>
         </p:txBody>
@@ -10906,7 +14184,7 @@
                 </a:solidFill>
                 <a:latin typeface="맑은 고딕"/>
               </a:rPr>
-              <a:t>가짜 정상 이미지: 노이즈 보간에는 R50과 YOLO26n만 속지 않는다</a:t>
+              <a:t>② 일반화와 robust 평가</a:t>
             </a:r>
           </a:p>
         </p:txBody>
@@ -10941,7 +14219,7 @@
                 </a:solidFill>
                 <a:latin typeface="맑은 고딕"/>
               </a:rPr>
-              <a:t>정상 이미지가 없어 결함의 점을 지운 이미지로 오경보를 쟀다</a:t>
+              <a:t>실제 데이터에서는 다 찾으니, 조건을 인위적으로 바꿔 모델을 시험한다</a:t>
             </a:r>
           </a:p>
         </p:txBody>
@@ -10981,16 +14259,398 @@
           </a:p>
         </p:txBody>
       </p:sp>
-      <p:sp>
-        <p:nvSpPr>
-          <p:cNvPr id="6" name="TextBox 5"/>
+      <p:graphicFrame>
+        <p:nvGraphicFramePr>
+          <p:cNvPr id="6" name="Table 5"/>
+          <p:cNvGraphicFramePr>
+            <a:graphicFrameLocks noGrp="1"/>
+          </p:cNvGraphicFramePr>
+          <p:nvPr/>
+        </p:nvGraphicFramePr>
+        <p:xfrm>
+          <a:off x="548640" y="1783080"/>
+          <a:ext cx="11064239" cy="3657600"/>
+        </p:xfrm>
+        <a:graphic>
+          <a:graphicData uri="http://schemas.openxmlformats.org/drawingml/2006/table">
+            <a:tbl>
+              <a:tblPr firstRow="1" bandRow="1">
+                <a:tableStyleId>{5C22544A-7EE6-4342-B048-85BDC9FD1C3A}</a:tableStyleId>
+              </a:tblPr>
+              <a:tblGrid>
+                <a:gridCol w="1645920"/>
+                <a:gridCol w="4754880"/>
+                <a:gridCol w="4663439"/>
+              </a:tblGrid>
+              <a:tr h="731520">
+                <a:tc>
+                  <a:txBody>
+                    <a:bodyPr/>
+                    <a:lstStyle/>
+                    <a:p>
+                      <a:pPr algn="l"/>
+                      <a:r>
+                        <a:rPr sz="1500" b="1">
+                          <a:solidFill>
+                            <a:srgbClr val="FFFFFF"/>
+                          </a:solidFill>
+                          <a:latin typeface="맑은 고딕"/>
+                        </a:rPr>
+                        <a:t>시험</a:t>
+                      </a:r>
+                    </a:p>
+                  </a:txBody>
+                  <a:tcPr anchor="ctr" marL="54864" marR="54864">
+                    <a:solidFill>
+                      <a:srgbClr val="1F3A5F"/>
+                    </a:solidFill>
+                  </a:tcPr>
+                </a:tc>
+                <a:tc>
+                  <a:txBody>
+                    <a:bodyPr/>
+                    <a:lstStyle/>
+                    <a:p>
+                      <a:pPr algn="ctr"/>
+                      <a:r>
+                        <a:rPr sz="1500" b="1">
+                          <a:solidFill>
+                            <a:srgbClr val="FFFFFF"/>
+                          </a:solidFill>
+                          <a:latin typeface="맑은 고딕"/>
+                        </a:rPr>
+                        <a:t>묻는 것</a:t>
+                      </a:r>
+                    </a:p>
+                  </a:txBody>
+                  <a:tcPr anchor="ctr" marL="54864" marR="54864">
+                    <a:solidFill>
+                      <a:srgbClr val="1F3A5F"/>
+                    </a:solidFill>
+                  </a:tcPr>
+                </a:tc>
+                <a:tc>
+                  <a:txBody>
+                    <a:bodyPr/>
+                    <a:lstStyle/>
+                    <a:p>
+                      <a:pPr algn="ctr"/>
+                      <a:r>
+                        <a:rPr sz="1500" b="1">
+                          <a:solidFill>
+                            <a:srgbClr val="FFFFFF"/>
+                          </a:solidFill>
+                          <a:latin typeface="맑은 고딕"/>
+                        </a:rPr>
+                        <a:t>방법</a:t>
+                      </a:r>
+                    </a:p>
+                  </a:txBody>
+                  <a:tcPr anchor="ctr" marL="54864" marR="54864">
+                    <a:solidFill>
+                      <a:srgbClr val="1F3A5F"/>
+                    </a:solidFill>
+                  </a:tcPr>
+                </a:tc>
+              </a:tr>
+              <a:tr h="731520">
+                <a:tc>
+                  <a:txBody>
+                    <a:bodyPr/>
+                    <a:lstStyle/>
+                    <a:p>
+                      <a:pPr algn="l"/>
+                      <a:r>
+                        <a:rPr sz="1500" b="0">
+                          <a:solidFill>
+                            <a:srgbClr val="222222"/>
+                          </a:solidFill>
+                          <a:latin typeface="맑은 고딕"/>
+                        </a:rPr>
+                        <a:t>점 제거</a:t>
+                      </a:r>
+                    </a:p>
+                  </a:txBody>
+                  <a:tcPr anchor="ctr" marL="54864" marR="54864">
+                    <a:solidFill>
+                      <a:srgbClr val="FFFFFF"/>
+                    </a:solidFill>
+                  </a:tcPr>
+                </a:tc>
+                <a:tc>
+                  <a:txBody>
+                    <a:bodyPr/>
+                    <a:lstStyle/>
+                    <a:p>
+                      <a:pPr algn="ctr"/>
+                      <a:r>
+                        <a:rPr sz="1500" b="0">
+                          <a:solidFill>
+                            <a:srgbClr val="222222"/>
+                          </a:solidFill>
+                          <a:latin typeface="맑은 고딕"/>
+                        </a:rPr>
+                        <a:t>모델이 결함의 점 자체를 보는가, 위치나 주변만 보는가</a:t>
+                      </a:r>
+                    </a:p>
+                  </a:txBody>
+                  <a:tcPr anchor="ctr" marL="54864" marR="54864">
+                    <a:solidFill>
+                      <a:srgbClr val="FFFFFF"/>
+                    </a:solidFill>
+                  </a:tcPr>
+                </a:tc>
+                <a:tc>
+                  <a:txBody>
+                    <a:bodyPr/>
+                    <a:lstStyle/>
+                    <a:p>
+                      <a:pPr algn="ctr"/>
+                      <a:r>
+                        <a:rPr sz="1500" b="0">
+                          <a:solidFill>
+                            <a:srgbClr val="222222"/>
+                          </a:solidFill>
+                          <a:latin typeface="맑은 고딕"/>
+                        </a:rPr>
+                        <a:t>정답의 점을 보간으로 지운 이미지에 다시 적용</a:t>
+                      </a:r>
+                    </a:p>
+                  </a:txBody>
+                  <a:tcPr anchor="ctr" marL="54864" marR="54864">
+                    <a:solidFill>
+                      <a:srgbClr val="FFFFFF"/>
+                    </a:solidFill>
+                  </a:tcPr>
+                </a:tc>
+              </a:tr>
+              <a:tr h="731520">
+                <a:tc>
+                  <a:txBody>
+                    <a:bodyPr/>
+                    <a:lstStyle/>
+                    <a:p>
+                      <a:pPr algn="l"/>
+                      <a:r>
+                        <a:rPr sz="1500" b="0">
+                          <a:solidFill>
+                            <a:srgbClr val="222222"/>
+                          </a:solidFill>
+                          <a:latin typeface="맑은 고딕"/>
+                        </a:rPr>
+                        <a:t>가짜 정상</a:t>
+                      </a:r>
+                    </a:p>
+                  </a:txBody>
+                  <a:tcPr anchor="ctr" marL="54864" marR="54864">
+                    <a:solidFill>
+                      <a:srgbClr val="F2F5FA"/>
+                    </a:solidFill>
+                  </a:tcPr>
+                </a:tc>
+                <a:tc>
+                  <a:txBody>
+                    <a:bodyPr/>
+                    <a:lstStyle/>
+                    <a:p>
+                      <a:pPr algn="ctr"/>
+                      <a:r>
+                        <a:rPr sz="1500" b="0">
+                          <a:solidFill>
+                            <a:srgbClr val="222222"/>
+                          </a:solidFill>
+                          <a:latin typeface="맑은 고딕"/>
+                        </a:rPr>
+                        <a:t>결함이 없는 이미지에서 오경보를 내는가</a:t>
+                      </a:r>
+                    </a:p>
+                  </a:txBody>
+                  <a:tcPr anchor="ctr" marL="54864" marR="54864">
+                    <a:solidFill>
+                      <a:srgbClr val="F2F5FA"/>
+                    </a:solidFill>
+                  </a:tcPr>
+                </a:tc>
+                <a:tc>
+                  <a:txBody>
+                    <a:bodyPr/>
+                    <a:lstStyle/>
+                    <a:p>
+                      <a:pPr algn="ctr"/>
+                      <a:r>
+                        <a:rPr sz="1500" b="0">
+                          <a:solidFill>
+                            <a:srgbClr val="222222"/>
+                          </a:solidFill>
+                          <a:latin typeface="맑은 고딕"/>
+                        </a:rPr>
+                        <a:t>점을 지운 이미지(결함 369장)를 가짜 정상으로 사용</a:t>
+                      </a:r>
+                    </a:p>
+                  </a:txBody>
+                  <a:tcPr anchor="ctr" marL="54864" marR="54864">
+                    <a:solidFill>
+                      <a:srgbClr val="F2F5FA"/>
+                    </a:solidFill>
+                  </a:tcPr>
+                </a:tc>
+              </a:tr>
+              <a:tr h="731520">
+                <a:tc>
+                  <a:txBody>
+                    <a:bodyPr/>
+                    <a:lstStyle/>
+                    <a:p>
+                      <a:pPr algn="l"/>
+                      <a:r>
+                        <a:rPr sz="1500" b="0">
+                          <a:solidFill>
+                            <a:srgbClr val="222222"/>
+                          </a:solidFill>
+                          <a:latin typeface="맑은 고딕"/>
+                        </a:rPr>
+                        <a:t>합성 점</a:t>
+                      </a:r>
+                    </a:p>
+                  </a:txBody>
+                  <a:tcPr anchor="ctr" marL="54864" marR="54864">
+                    <a:solidFill>
+                      <a:srgbClr val="FFFFFF"/>
+                    </a:solidFill>
+                  </a:tcPr>
+                </a:tc>
+                <a:tc>
+                  <a:txBody>
+                    <a:bodyPr/>
+                    <a:lstStyle/>
+                    <a:p>
+                      <a:pPr algn="ctr"/>
+                      <a:r>
+                        <a:rPr sz="1500" b="0">
+                          <a:solidFill>
+                            <a:srgbClr val="222222"/>
+                          </a:solidFill>
+                          <a:latin typeface="맑은 고딕"/>
+                        </a:rPr>
+                        <a:t>옅은 점·다른 호기에서도 찾는가</a:t>
+                      </a:r>
+                    </a:p>
+                  </a:txBody>
+                  <a:tcPr anchor="ctr" marL="54864" marR="54864">
+                    <a:solidFill>
+                      <a:srgbClr val="FFFFFF"/>
+                    </a:solidFill>
+                  </a:tcPr>
+                </a:tc>
+                <a:tc>
+                  <a:txBody>
+                    <a:bodyPr/>
+                    <a:lstStyle/>
+                    <a:p>
+                      <a:pPr algn="ctr"/>
+                      <a:r>
+                        <a:rPr sz="1500" b="0">
+                          <a:solidFill>
+                            <a:srgbClr val="222222"/>
+                          </a:solidFill>
+                          <a:latin typeface="맑은 고딕"/>
+                        </a:rPr>
+                        <a:t>작대기 안에만 점을 합성(진하기 4 x 크기 3), 시드 42</a:t>
+                      </a:r>
+                    </a:p>
+                  </a:txBody>
+                  <a:tcPr anchor="ctr" marL="54864" marR="54864">
+                    <a:solidFill>
+                      <a:srgbClr val="FFFFFF"/>
+                    </a:solidFill>
+                  </a:tcPr>
+                </a:tc>
+              </a:tr>
+              <a:tr h="731520">
+                <a:tc>
+                  <a:txBody>
+                    <a:bodyPr/>
+                    <a:lstStyle/>
+                    <a:p>
+                      <a:pPr algn="l"/>
+                      <a:r>
+                        <a:rPr sz="1500" b="0">
+                          <a:solidFill>
+                            <a:srgbClr val="222222"/>
+                          </a:solidFill>
+                          <a:latin typeface="맑은 고딕"/>
+                        </a:rPr>
+                        <a:t>호기·해상도</a:t>
+                      </a:r>
+                    </a:p>
+                  </a:txBody>
+                  <a:tcPr anchor="ctr" marL="54864" marR="54864">
+                    <a:solidFill>
+                      <a:srgbClr val="F2F5FA"/>
+                    </a:solidFill>
+                  </a:tcPr>
+                </a:tc>
+                <a:tc>
+                  <a:txBody>
+                    <a:bodyPr/>
+                    <a:lstStyle/>
+                    <a:p>
+                      <a:pPr algn="ctr"/>
+                      <a:r>
+                        <a:rPr sz="1500" b="0">
+                          <a:solidFill>
+                            <a:srgbClr val="222222"/>
+                          </a:solidFill>
+                          <a:latin typeface="맑은 고딕"/>
+                        </a:rPr>
+                        <a:t>특정 호기나 해상도에서 약한가</a:t>
+                      </a:r>
+                    </a:p>
+                  </a:txBody>
+                  <a:tcPr anchor="ctr" marL="54864" marR="54864">
+                    <a:solidFill>
+                      <a:srgbClr val="F2F5FA"/>
+                    </a:solidFill>
+                  </a:tcPr>
+                </a:tc>
+                <a:tc>
+                  <a:txBody>
+                    <a:bodyPr/>
+                    <a:lstStyle/>
+                    <a:p>
+                      <a:pPr algn="ctr"/>
+                      <a:r>
+                        <a:rPr sz="1500" b="0">
+                          <a:solidFill>
+                            <a:srgbClr val="222222"/>
+                          </a:solidFill>
+                          <a:latin typeface="맑은 고딕"/>
+                        </a:rPr>
+                        <a:t>호기·해상도별로 나눠 평가</a:t>
+                      </a:r>
+                    </a:p>
+                  </a:txBody>
+                  <a:tcPr anchor="ctr" marL="54864" marR="54864">
+                    <a:solidFill>
+                      <a:srgbClr val="F2F5FA"/>
+                    </a:solidFill>
+                  </a:tcPr>
+                </a:tc>
+              </a:tr>
+            </a:tbl>
+          </a:graphicData>
+        </a:graphic>
+      </p:graphicFrame>
+      <p:sp>
+        <p:nvSpPr>
+          <p:cNvPr id="7" name="TextBox 6"/>
           <p:cNvSpPr txBox="1"/>
           <p:nvPr/>
         </p:nvSpPr>
         <p:spPr>
           <a:xfrm>
-            <a:off x="502920" y="6355080"/>
-            <a:ext cx="10180015" cy="365760"/>
+            <a:off x="548640" y="5486400"/>
+            <a:ext cx="10972800" cy="1097280"/>
           </a:xfrm>
           <a:prstGeom prst="rect">
             <a:avLst/>
@@ -10998,65 +14658,6 @@
           <a:noFill/>
         </p:spPr>
         <p:txBody>
-          <a:bodyPr wrap="square" anchor="t" lIns="45720" rIns="45720">
-            <a:spAutoFit/>
-          </a:bodyPr>
-          <a:lstStyle/>
-          <a:p>
-            <a:pPr algn="l"/>
-            <a:r>
-              <a:rPr sz="1100" b="0">
-                <a:solidFill>
-                  <a:srgbClr val="555B66"/>
-                </a:solidFill>
-                <a:latin typeface="맑은 고딕"/>
-              </a:rPr>
-              <a:t>가짜 정상은 진짜 정상 제품이 아니다. 오경보율은 범위로 해석한다.</a:t>
-            </a:r>
-          </a:p>
-        </p:txBody>
-      </p:sp>
-      <p:pic>
-        <p:nvPicPr>
-          <p:cNvPr id="7" name="Picture 6" descr="fig3l_robust6.png"/>
-          <p:cNvPicPr>
-            <a:picLocks noChangeAspect="1"/>
-          </p:cNvPicPr>
-          <p:nvPr/>
-        </p:nvPicPr>
-        <p:blipFill>
-          <a:blip r:embed="rId2"/>
-          <a:stretch>
-            <a:fillRect/>
-          </a:stretch>
-        </p:blipFill>
-        <p:spPr>
-          <a:xfrm>
-            <a:off x="457200" y="1849795"/>
-            <a:ext cx="11247120" cy="3158409"/>
-          </a:xfrm>
-          <a:prstGeom prst="rect">
-            <a:avLst/>
-          </a:prstGeom>
-        </p:spPr>
-      </p:pic>
-      <p:sp>
-        <p:nvSpPr>
-          <p:cNvPr id="8" name="TextBox 7"/>
-          <p:cNvSpPr txBox="1"/>
-          <p:nvPr/>
-        </p:nvSpPr>
-        <p:spPr>
-          <a:xfrm>
-            <a:off x="640080" y="5120640"/>
-            <a:ext cx="10972800" cy="1554480"/>
-          </a:xfrm>
-          <a:prstGeom prst="rect">
-            <a:avLst/>
-          </a:prstGeom>
-          <a:noFill/>
-        </p:spPr>
-        <p:txBody>
           <a:bodyPr wrap="square" lIns="45720" rIns="45720">
             <a:spAutoFit/>
           </a:bodyPr>
@@ -11064,11 +14665,11 @@
           <a:p>
             <a:pPr>
               <a:spcAft>
-                <a:spcPts val="400"/>
+                <a:spcPts val="600"/>
               </a:spcAft>
             </a:pPr>
             <a:r>
-              <a:rPr sz="1500" b="1">
+              <a:rPr sz="1600" b="1">
                 <a:solidFill>
                   <a:srgbClr val="2AA7B8"/>
                 </a:solidFill>
@@ -11077,74 +14678,49 @@
               <a:t>• </a:t>
             </a:r>
             <a:r>
-              <a:rPr sz="1500" b="0">
-                <a:solidFill>
-                  <a:srgbClr val="222222"/>
-                </a:solidFill>
-                <a:latin typeface="맑은 고딕"/>
-              </a:rPr>
-              <a:t>NS+노이즈 6px 오경보율: </a:t>
-            </a:r>
-            <a:r>
-              <a:rPr sz="1500" b="1">
-                <a:solidFill>
-                  <a:srgbClr val="222222"/>
-                </a:solidFill>
-                <a:latin typeface="맑은 고딕"/>
-              </a:rPr>
-              <a:t>R50 0.5%, YOLO26n 4.1%</a:t>
-            </a:r>
-            <a:r>
-              <a:rPr sz="1500" b="0">
-                <a:solidFill>
-                  <a:srgbClr val="222222"/>
-                </a:solidFill>
-                <a:latin typeface="맑은 고딕"/>
-              </a:rPr>
-              <a:t>, RT-DETR-l 37%, YOLOv3-tiny 39%, D-FINE-N 49%, MobileNetV3 64%</a:t>
-            </a:r>
-          </a:p>
-          <a:p>
-            <a:pPr>
-              <a:spcAft>
-                <a:spcPts val="400"/>
-              </a:spcAft>
-            </a:pPr>
-            <a:r>
-              <a:rPr sz="1500" b="1">
-                <a:solidFill>
-                  <a:srgbClr val="2AA7B8"/>
-                </a:solidFill>
-                <a:latin typeface="맑은 고딕"/>
-              </a:rPr>
-              <a:t>• </a:t>
-            </a:r>
-            <a:r>
-              <a:rPr sz="1500" b="0">
-                <a:solidFill>
-                  <a:srgbClr val="222222"/>
-                </a:solidFill>
-                <a:latin typeface="맑은 고딕"/>
-              </a:rPr>
-              <a:t>오경보는 대부분 </a:t>
-            </a:r>
-            <a:r>
-              <a:rPr sz="1500" b="1">
-                <a:solidFill>
-                  <a:srgbClr val="222222"/>
-                </a:solidFill>
-                <a:latin typeface="맑은 고딕"/>
-              </a:rPr>
-              <a:t>지운 자리</a:t>
-            </a:r>
-            <a:r>
-              <a:rPr sz="1500" b="0">
-                <a:solidFill>
-                  <a:srgbClr val="222222"/>
-                </a:solidFill>
-                <a:latin typeface="맑은 고딕"/>
-              </a:rPr>
-              <a:t>에서 발생, 분리도(AUC)는 MobileNet 0.842·D-FINE 0.900이 가장 나쁨</a:t>
+              <a:rPr sz="1600" b="0">
+                <a:solidFill>
+                  <a:srgbClr val="222222"/>
+                </a:solidFill>
+                <a:latin typeface="맑은 고딕"/>
+              </a:rPr>
+              <a:t>합성·가짜 정상은 </a:t>
+            </a:r>
+            <a:r>
+              <a:rPr sz="1600" b="1">
+                <a:solidFill>
+                  <a:srgbClr val="222222"/>
+                </a:solidFill>
+                <a:latin typeface="맑은 고딕"/>
+              </a:rPr>
+              <a:t>인위적인 이미지</a:t>
+            </a:r>
+            <a:r>
+              <a:rPr sz="1600" b="0">
+                <a:solidFill>
+                  <a:srgbClr val="222222"/>
+                </a:solidFill>
+                <a:latin typeface="맑은 고딕"/>
+              </a:rPr>
+              <a:t>라 실제 현장 성능이 아니라 </a:t>
+            </a:r>
+            <a:r>
+              <a:rPr sz="1600" b="1">
+                <a:solidFill>
+                  <a:srgbClr val="222222"/>
+                </a:solidFill>
+                <a:latin typeface="맑은 고딕"/>
+              </a:rPr>
+              <a:t>모델 간 상대 비교와 취약점 탐색</a:t>
+            </a:r>
+            <a:r>
+              <a:rPr sz="1600" b="0">
+                <a:solidFill>
+                  <a:srgbClr val="222222"/>
+                </a:solidFill>
+                <a:latin typeface="맑은 고딕"/>
+              </a:rPr>
+              <a:t>으로 해석한다</a:t>
             </a:r>
           </a:p>
         </p:txBody>
@@ -11240,7 +14816,7 @@
                 </a:solidFill>
                 <a:latin typeface="맑은 고딕"/>
               </a:rPr>
-              <a:t>합성 점 평가 데이터: 작대기 안에만, 시드 42로 모두가 같게</a:t>
+              <a:t>점 제거: 모델은 점 자체를 본다</a:t>
             </a:r>
           </a:p>
         </p:txBody>
@@ -11275,7 +14851,7 @@
                 </a:solidFill>
                 <a:latin typeface="맑은 고딕"/>
               </a:rPr>
-              <a:t>실제로는 놓침이 사실상 없어서, 미탐지 조건을 직접 만들어 시험했다</a:t>
+              <a:t>결함의 점을 지우면 검출이 사라진다 → 위치만 보는 지름길이 아니다</a:t>
             </a:r>
           </a:p>
         </p:txBody>
@@ -11317,7 +14893,7 @@
       </p:sp>
       <p:pic>
         <p:nvPicPr>
-          <p:cNvPr id="6" name="Picture 5" descr="fig3m_synth_bars.png"/>
+          <p:cNvPr id="6" name="Picture 5" descr="fig3b_dot_removal.png"/>
           <p:cNvPicPr>
             <a:picLocks noChangeAspect="1"/>
           </p:cNvPicPr>
@@ -11331,8 +14907,8 @@
         </p:blipFill>
         <p:spPr>
           <a:xfrm>
-            <a:off x="1181898" y="1645920"/>
-            <a:ext cx="4677083" cy="4846320"/>
+            <a:off x="2397900" y="1554479"/>
+            <a:ext cx="7365719" cy="3291840"/>
           </a:xfrm>
           <a:prstGeom prst="rect">
             <a:avLst/>
@@ -11347,8 +14923,8 @@
         </p:nvSpPr>
         <p:spPr>
           <a:xfrm>
-            <a:off x="6766560" y="1783080"/>
-            <a:ext cx="5029200" cy="4572000"/>
+            <a:off x="731520" y="4937760"/>
+            <a:ext cx="10789920" cy="1737360"/>
           </a:xfrm>
           <a:prstGeom prst="rect">
             <a:avLst/>
@@ -11363,11 +14939,11 @@
           <a:p>
             <a:pPr>
               <a:spcAft>
-                <a:spcPts val="600"/>
+                <a:spcPts val="800"/>
               </a:spcAft>
             </a:pPr>
             <a:r>
-              <a:rPr sz="1500" b="1">
+              <a:rPr sz="1600" b="1">
                 <a:solidFill>
                   <a:srgbClr val="2AA7B8"/>
                 </a:solidFill>
@@ -11376,41 +14952,41 @@
               <a:t>• </a:t>
             </a:r>
             <a:r>
-              <a:rPr sz="1500" b="0">
-                <a:solidFill>
-                  <a:srgbClr val="222222"/>
-                </a:solidFill>
-                <a:latin typeface="맑은 고딕"/>
-              </a:rPr>
-              <a:t>실제 점을 지우고 영상에서 찾은 </a:t>
-            </a:r>
-            <a:r>
-              <a:rPr sz="1500" b="1">
-                <a:solidFill>
-                  <a:srgbClr val="222222"/>
-                </a:solidFill>
-                <a:latin typeface="맑은 고딕"/>
-              </a:rPr>
-              <a:t>작대기(막대) 안쪽</a:t>
-            </a:r>
-            <a:r>
-              <a:rPr sz="1500" b="0">
-                <a:solidFill>
-                  <a:srgbClr val="222222"/>
-                </a:solidFill>
-                <a:latin typeface="맑은 고딕"/>
-              </a:rPr>
-              <a:t>에만 val의 실제 점(투과율 조각)을 합성</a:t>
+              <a:rPr sz="1600" b="0">
+                <a:solidFill>
+                  <a:srgbClr val="222222"/>
+                </a:solidFill>
+                <a:latin typeface="맑은 고딕"/>
+              </a:rPr>
+              <a:t>test 정답 663개의 점을 보간으로 지우고 같은 모델을 다시 적용: 노이즈 없는 평균 보간으로 13x13 이상 지우면 </a:t>
+            </a:r>
+            <a:r>
+              <a:rPr sz="1600" b="1">
+                <a:solidFill>
+                  <a:srgbClr val="222222"/>
+                </a:solidFill>
+                <a:latin typeface="맑은 고딕"/>
+              </a:rPr>
+              <a:t>6개 모델 모두 0~3개</a:t>
+            </a:r>
+            <a:r>
+              <a:rPr sz="1600" b="0">
+                <a:solidFill>
+                  <a:srgbClr val="222222"/>
+                </a:solidFill>
+                <a:latin typeface="맑은 고딕"/>
+              </a:rPr>
+              <a:t>만 검출</a:t>
             </a:r>
           </a:p>
           <a:p>
             <a:pPr>
               <a:spcAft>
-                <a:spcPts val="600"/>
+                <a:spcPts val="800"/>
               </a:spcAft>
             </a:pPr>
             <a:r>
-              <a:rPr sz="1500" b="1">
+              <a:rPr sz="1600" b="1">
                 <a:solidFill>
                   <a:srgbClr val="2AA7B8"/>
                 </a:solidFill>
@@ -11419,133 +14995,31 @@
               <a:t>• </a:t>
             </a:r>
             <a:r>
-              <a:rPr sz="1500" b="0">
-                <a:solidFill>
-                  <a:srgbClr val="222222"/>
-                </a:solidFill>
-                <a:latin typeface="맑은 고딕"/>
-              </a:rPr>
-              <a:t>점의 </a:t>
-            </a:r>
-            <a:r>
-              <a:rPr sz="1500" b="1">
-                <a:solidFill>
-                  <a:srgbClr val="222222"/>
-                </a:solidFill>
-                <a:latin typeface="맑은 고딕"/>
-              </a:rPr>
-              <a:t>진하기(4단계) x 크기(3단계)</a:t>
-            </a:r>
-            <a:r>
-              <a:rPr sz="1500" b="0">
-                <a:solidFill>
-                  <a:srgbClr val="222222"/>
-                </a:solidFill>
-                <a:latin typeface="맑은 고딕"/>
-              </a:rPr>
-              <a:t>를 바꿔 옅은 점까지 시험</a:t>
-            </a:r>
-          </a:p>
-          <a:p>
-            <a:pPr>
-              <a:spcAft>
-                <a:spcPts val="600"/>
-              </a:spcAft>
-            </a:pPr>
-            <a:r>
-              <a:rPr sz="1500" b="1">
-                <a:solidFill>
-                  <a:srgbClr val="2AA7B8"/>
-                </a:solidFill>
-                <a:latin typeface="맑은 고딕"/>
-              </a:rPr>
-              <a:t>• </a:t>
-            </a:r>
-            <a:r>
-              <a:rPr sz="1500" b="0">
-                <a:solidFill>
-                  <a:srgbClr val="222222"/>
-                </a:solidFill>
-                <a:latin typeface="맑은 고딕"/>
-              </a:rPr>
-              <a:t>test 바탕 386장, 점 1,436개. 실제 점 663개가 </a:t>
-            </a:r>
-            <a:r>
-              <a:rPr sz="1500" b="1">
-                <a:solidFill>
-                  <a:srgbClr val="222222"/>
-                </a:solidFill>
-                <a:latin typeface="맑은 고딕"/>
-              </a:rPr>
-              <a:t>전부 검출된 막대에 닿음</a:t>
-            </a:r>
-          </a:p>
-          <a:p>
-            <a:pPr>
-              <a:spcAft>
-                <a:spcPts val="600"/>
-              </a:spcAft>
-            </a:pPr>
-            <a:r>
-              <a:rPr sz="1500" b="1">
-                <a:solidFill>
-                  <a:srgbClr val="2AA7B8"/>
-                </a:solidFill>
-                <a:latin typeface="맑은 고딕"/>
-              </a:rPr>
-              <a:t>• </a:t>
-            </a:r>
-            <a:r>
-              <a:rPr sz="1500" b="1">
-                <a:solidFill>
-                  <a:srgbClr val="222222"/>
-                </a:solidFill>
-                <a:latin typeface="맑은 고딕"/>
-              </a:rPr>
-              <a:t>시드 42 + 이미지 이름별 시드</a:t>
-            </a:r>
-            <a:r>
-              <a:rPr sz="1500" b="0">
-                <a:solidFill>
-                  <a:srgbClr val="222222"/>
-                </a:solidFill>
-                <a:latin typeface="맑은 고딕"/>
-              </a:rPr>
-              <a:t>로 고정, 기준본과 --verify로 팀원 PC에서 같은 데이터인지 확인</a:t>
-            </a:r>
-          </a:p>
-          <a:p>
-            <a:pPr>
-              <a:spcAft>
-                <a:spcPts val="600"/>
-              </a:spcAft>
-            </a:pPr>
-            <a:r>
-              <a:rPr sz="1500" b="1">
-                <a:solidFill>
-                  <a:srgbClr val="2AA7B8"/>
-                </a:solidFill>
-                <a:latin typeface="맑은 고딕"/>
-              </a:rPr>
-              <a:t>• </a:t>
-            </a:r>
-            <a:r>
-              <a:rPr sz="1500" b="0">
-                <a:solidFill>
-                  <a:srgbClr val="222222"/>
-                </a:solidFill>
-                <a:latin typeface="맑은 고딕"/>
-              </a:rPr>
-              <a:t>합성은 실제보다 약 10%p 덜 현실적 → 절대 수치가 아닌 </a:t>
-            </a:r>
-            <a:r>
-              <a:rPr sz="1500" b="1">
-                <a:solidFill>
-                  <a:srgbClr val="222222"/>
-                </a:solidFill>
-                <a:latin typeface="맑은 고딕"/>
-              </a:rPr>
-              <a:t>상대 비교</a:t>
+              <a:rPr sz="1600" b="0">
+                <a:solidFill>
+                  <a:srgbClr val="222222"/>
+                </a:solidFill>
+                <a:latin typeface="맑은 고딕"/>
+              </a:rPr>
+              <a:t>YOLOv3-tiny 등에 남는 반응은 보간에 더한 </a:t>
+            </a:r>
+            <a:r>
+              <a:rPr sz="1600" b="1">
+                <a:solidFill>
+                  <a:srgbClr val="222222"/>
+                </a:solidFill>
+                <a:latin typeface="맑은 고딕"/>
+              </a:rPr>
+              <a:t>노이즈 무늬</a:t>
+            </a:r>
+            <a:r>
+              <a:rPr sz="1600" b="0">
+                <a:solidFill>
+                  <a:srgbClr val="222222"/>
+                </a:solidFill>
+                <a:latin typeface="맑은 고딕"/>
+              </a:rPr>
+              <a:t> 때문 → 다음 질문: 노이즈 무늬에 속아 오경보를 내는가?</a:t>
             </a:r>
           </a:p>
         </p:txBody>

--- a/ppt/presentation.pptx
+++ b/ppt/presentation.pptx
@@ -8742,7 +8742,7 @@
                 </a:solidFill>
                 <a:latin typeface="맑은 고딕"/>
               </a:rPr>
-              <a:t>전처리 코드, 한 번에 실행하는 스크립트, 테스트 예측 결과 CSV는 제출 전에 정리할 항목이다 [작성 필요].</a:t>
+              <a:t>전처리 코드는 이총의 브랜치에 있어 main 병합이 필요하다. 한 번에 실행하는 스크립트와 테스트 예측 결과 CSV는 제출 전에 정리할 항목이다 [작성 필요].</a:t>
             </a:r>
           </a:p>
         </p:txBody>
@@ -9255,7 +9255,7 @@
               </a:spcAft>
             </a:pPr>
             <a:r>
-              <a:rPr sz="1600" b="1">
+              <a:rPr sz="1500" b="1">
                 <a:solidFill>
                   <a:srgbClr val="2AA7B8"/>
                 </a:solidFill>
@@ -9264,7 +9264,7 @@
               <a:t>• </a:t>
             </a:r>
             <a:r>
-              <a:rPr sz="1600" b="0">
+              <a:rPr sz="1500" b="0">
                 <a:solidFill>
                   <a:srgbClr val="222222"/>
                 </a:solidFill>
@@ -9273,7 +9273,7 @@
               <a:t>X-ray 이물 검출기 영상 </a:t>
             </a:r>
             <a:r>
-              <a:rPr sz="1600" b="1">
+              <a:rPr sz="1500" b="1">
                 <a:solidFill>
                   <a:srgbClr val="222222"/>
                 </a:solidFill>
@@ -9282,7 +9282,7 @@
               <a:t>2,532장</a:t>
             </a:r>
             <a:r>
-              <a:rPr sz="1600" b="0">
+              <a:rPr sz="1500" b="0">
                 <a:solidFill>
                   <a:srgbClr val="222222"/>
                 </a:solidFill>
@@ -9298,7 +9298,7 @@
               </a:spcAft>
             </a:pPr>
             <a:r>
-              <a:rPr sz="1600" b="1">
+              <a:rPr sz="1500" b="1">
                 <a:solidFill>
                   <a:srgbClr val="2AA7B8"/>
                 </a:solidFill>
@@ -9307,7 +9307,7 @@
               <a:t>• </a:t>
             </a:r>
             <a:r>
-              <a:rPr sz="1600" b="0">
+              <a:rPr sz="1500" b="0">
                 <a:solidFill>
                   <a:srgbClr val="222222"/>
                 </a:solidFill>
@@ -9323,7 +9323,7 @@
               </a:spcAft>
             </a:pPr>
             <a:r>
-              <a:rPr sz="1600" b="1">
+              <a:rPr sz="1500" b="1">
                 <a:solidFill>
                   <a:srgbClr val="2AA7B8"/>
                 </a:solidFill>
@@ -9332,7 +9332,7 @@
               <a:t>• </a:t>
             </a:r>
             <a:r>
-              <a:rPr sz="1600" b="0">
+              <a:rPr sz="1500" b="0">
                 <a:solidFill>
                   <a:srgbClr val="222222"/>
                 </a:solidFill>
@@ -9348,7 +9348,7 @@
               </a:spcAft>
             </a:pPr>
             <a:r>
-              <a:rPr sz="1600" b="1">
+              <a:rPr sz="1500" b="1">
                 <a:solidFill>
                   <a:srgbClr val="2AA7B8"/>
                 </a:solidFill>
@@ -9357,7 +9357,7 @@
               <a:t>• </a:t>
             </a:r>
             <a:r>
-              <a:rPr sz="1600" b="1">
+              <a:rPr sz="1500" b="1">
                 <a:solidFill>
                   <a:srgbClr val="222222"/>
                 </a:solidFill>
@@ -9366,7 +9366,7 @@
               <a:t>라벨이 두 종류</a:t>
             </a:r>
             <a:r>
-              <a:rPr sz="1600" b="0">
+              <a:rPr sz="1500" b="0">
                 <a:solidFill>
                   <a:srgbClr val="222222"/>
                 </a:solidFill>
@@ -9375,7 +9375,7 @@
               <a:t>: 공식 500장은 사람이 그려 크기가 제각각(5~21px), 팀 라벨 2,032장은 클릭 중심에 </a:t>
             </a:r>
             <a:r>
-              <a:rPr sz="1600" b="1">
+              <a:rPr sz="1500" b="1">
                 <a:solidFill>
                   <a:srgbClr val="222222"/>
                 </a:solidFill>
@@ -9384,7 +9384,7 @@
               <a:t>고정 크기 네모(10·13px)</a:t>
             </a:r>
             <a:r>
-              <a:rPr sz="1600" b="0">
+              <a:rPr sz="1500" b="0">
                 <a:solidFill>
                   <a:srgbClr val="222222"/>
                 </a:solidFill>
@@ -9400,7 +9400,7 @@
               </a:spcAft>
             </a:pPr>
             <a:r>
-              <a:rPr sz="1600" b="1">
+              <a:rPr sz="1500" b="1">
                 <a:solidFill>
                   <a:srgbClr val="2AA7B8"/>
                 </a:solidFill>
@@ -9409,7 +9409,7 @@
               <a:t>• </a:t>
             </a:r>
             <a:r>
-              <a:rPr sz="1600" b="0">
+              <a:rPr sz="1500" b="0">
                 <a:solidFill>
                   <a:srgbClr val="222222"/>
                 </a:solidFill>
@@ -9425,7 +9425,7 @@
               </a:spcAft>
             </a:pPr>
             <a:r>
-              <a:rPr sz="1600" b="1">
+              <a:rPr sz="1500" b="1">
                 <a:solidFill>
                   <a:srgbClr val="2AA7B8"/>
                 </a:solidFill>
@@ -9434,13 +9434,31 @@
               <a:t>• </a:t>
             </a:r>
             <a:r>
-              <a:rPr sz="1600" b="0">
-                <a:solidFill>
-                  <a:srgbClr val="222222"/>
-                </a:solidFill>
-                <a:latin typeface="맑은 고딕"/>
-              </a:rPr>
-              <a:t>장비의 색 표시는 지운 이미지를 사용</a:t>
+              <a:rPr sz="1500" b="1">
+                <a:solidFill>
+                  <a:srgbClr val="222222"/>
+                </a:solidFill>
+                <a:latin typeface="맑은 고딕"/>
+              </a:rPr>
+              <a:t>전처리</a:t>
+            </a:r>
+            <a:r>
+              <a:rPr sz="1500" b="0">
+                <a:solidFill>
+                  <a:srgbClr val="222222"/>
+                </a:solidFill>
+                <a:latin typeface="맑은 고딕"/>
+              </a:rPr>
+              <a:t>: 원본 BMP → 중복 제거(277쌍) → 장비의 색 표시 제거(주변 회색 5x5 평균으로 메움) → 회색조 PNG. 원본에 다시 적용하면 2,532장이 </a:t>
+            </a:r>
+            <a:r>
+              <a:rPr sz="1500" b="1">
+                <a:solidFill>
+                  <a:srgbClr val="222222"/>
+                </a:solidFill>
+                <a:latin typeface="맑은 고딕"/>
+              </a:rPr>
+              <a:t>픽셀 단위로 모두 일치</a:t>
             </a:r>
           </a:p>
         </p:txBody>

--- a/ppt/presentation.pptx
+++ b/ppt/presentation.pptx
@@ -26,6 +26,10 @@
     <p:sldId id="274" r:id="rId25"/>
     <p:sldId id="275" r:id="rId26"/>
     <p:sldId id="276" r:id="rId27"/>
+    <p:sldId id="277" r:id="rId28"/>
+    <p:sldId id="278" r:id="rId29"/>
+    <p:sldId id="279" r:id="rId30"/>
+    <p:sldId id="280" r:id="rId31"/>
   </p:sldIdLst>
   <p:sldSz cx="12191695" cy="6858000" type="screen4x3"/>
   <p:notesSz cx="6858000" cy="9144000"/>
@@ -3418,7 +3422,7 @@
                 </a:solidFill>
                 <a:latin typeface="맑은 고딕"/>
               </a:rPr>
-              <a:t>가짜 정상: 노이즈 보간에는 R50과 YOLO26n만 속지 않는다</a:t>
+              <a:t>② 일반화와 robust 평가</a:t>
             </a:r>
           </a:p>
         </p:txBody>
@@ -3453,7 +3457,7 @@
                 </a:solidFill>
                 <a:latin typeface="맑은 고딕"/>
               </a:rPr>
-              <a:t>정상 이미지가 없어 결함의 점을 지운 이미지로 오경보를 쟀다</a:t>
+              <a:t>실제 데이터에서는 다 찾으니, 조건을 인위적으로 바꿔 모델을 시험한다</a:t>
             </a:r>
           </a:p>
         </p:txBody>
@@ -3493,16 +3497,398 @@
           </a:p>
         </p:txBody>
       </p:sp>
-      <p:sp>
-        <p:nvSpPr>
-          <p:cNvPr id="6" name="TextBox 5"/>
+      <p:graphicFrame>
+        <p:nvGraphicFramePr>
+          <p:cNvPr id="6" name="Table 5"/>
+          <p:cNvGraphicFramePr>
+            <a:graphicFrameLocks noGrp="1"/>
+          </p:cNvGraphicFramePr>
+          <p:nvPr/>
+        </p:nvGraphicFramePr>
+        <p:xfrm>
+          <a:off x="548640" y="1783080"/>
+          <a:ext cx="11064239" cy="3657600"/>
+        </p:xfrm>
+        <a:graphic>
+          <a:graphicData uri="http://schemas.openxmlformats.org/drawingml/2006/table">
+            <a:tbl>
+              <a:tblPr firstRow="1" bandRow="1">
+                <a:tableStyleId>{5C22544A-7EE6-4342-B048-85BDC9FD1C3A}</a:tableStyleId>
+              </a:tblPr>
+              <a:tblGrid>
+                <a:gridCol w="1645920"/>
+                <a:gridCol w="4754880"/>
+                <a:gridCol w="4663439"/>
+              </a:tblGrid>
+              <a:tr h="731520">
+                <a:tc>
+                  <a:txBody>
+                    <a:bodyPr/>
+                    <a:lstStyle/>
+                    <a:p>
+                      <a:pPr algn="l"/>
+                      <a:r>
+                        <a:rPr sz="1500" b="1">
+                          <a:solidFill>
+                            <a:srgbClr val="FFFFFF"/>
+                          </a:solidFill>
+                          <a:latin typeface="맑은 고딕"/>
+                        </a:rPr>
+                        <a:t>시험</a:t>
+                      </a:r>
+                    </a:p>
+                  </a:txBody>
+                  <a:tcPr anchor="ctr" marL="54864" marR="54864">
+                    <a:solidFill>
+                      <a:srgbClr val="1F3A5F"/>
+                    </a:solidFill>
+                  </a:tcPr>
+                </a:tc>
+                <a:tc>
+                  <a:txBody>
+                    <a:bodyPr/>
+                    <a:lstStyle/>
+                    <a:p>
+                      <a:pPr algn="ctr"/>
+                      <a:r>
+                        <a:rPr sz="1500" b="1">
+                          <a:solidFill>
+                            <a:srgbClr val="FFFFFF"/>
+                          </a:solidFill>
+                          <a:latin typeface="맑은 고딕"/>
+                        </a:rPr>
+                        <a:t>묻는 것</a:t>
+                      </a:r>
+                    </a:p>
+                  </a:txBody>
+                  <a:tcPr anchor="ctr" marL="54864" marR="54864">
+                    <a:solidFill>
+                      <a:srgbClr val="1F3A5F"/>
+                    </a:solidFill>
+                  </a:tcPr>
+                </a:tc>
+                <a:tc>
+                  <a:txBody>
+                    <a:bodyPr/>
+                    <a:lstStyle/>
+                    <a:p>
+                      <a:pPr algn="ctr"/>
+                      <a:r>
+                        <a:rPr sz="1500" b="1">
+                          <a:solidFill>
+                            <a:srgbClr val="FFFFFF"/>
+                          </a:solidFill>
+                          <a:latin typeface="맑은 고딕"/>
+                        </a:rPr>
+                        <a:t>방법</a:t>
+                      </a:r>
+                    </a:p>
+                  </a:txBody>
+                  <a:tcPr anchor="ctr" marL="54864" marR="54864">
+                    <a:solidFill>
+                      <a:srgbClr val="1F3A5F"/>
+                    </a:solidFill>
+                  </a:tcPr>
+                </a:tc>
+              </a:tr>
+              <a:tr h="731520">
+                <a:tc>
+                  <a:txBody>
+                    <a:bodyPr/>
+                    <a:lstStyle/>
+                    <a:p>
+                      <a:pPr algn="l"/>
+                      <a:r>
+                        <a:rPr sz="1500" b="0">
+                          <a:solidFill>
+                            <a:srgbClr val="222222"/>
+                          </a:solidFill>
+                          <a:latin typeface="맑은 고딕"/>
+                        </a:rPr>
+                        <a:t>점 제거</a:t>
+                      </a:r>
+                    </a:p>
+                  </a:txBody>
+                  <a:tcPr anchor="ctr" marL="54864" marR="54864">
+                    <a:solidFill>
+                      <a:srgbClr val="FFFFFF"/>
+                    </a:solidFill>
+                  </a:tcPr>
+                </a:tc>
+                <a:tc>
+                  <a:txBody>
+                    <a:bodyPr/>
+                    <a:lstStyle/>
+                    <a:p>
+                      <a:pPr algn="ctr"/>
+                      <a:r>
+                        <a:rPr sz="1500" b="0">
+                          <a:solidFill>
+                            <a:srgbClr val="222222"/>
+                          </a:solidFill>
+                          <a:latin typeface="맑은 고딕"/>
+                        </a:rPr>
+                        <a:t>모델이 결함의 점 자체를 보는가, 위치나 주변만 보는가</a:t>
+                      </a:r>
+                    </a:p>
+                  </a:txBody>
+                  <a:tcPr anchor="ctr" marL="54864" marR="54864">
+                    <a:solidFill>
+                      <a:srgbClr val="FFFFFF"/>
+                    </a:solidFill>
+                  </a:tcPr>
+                </a:tc>
+                <a:tc>
+                  <a:txBody>
+                    <a:bodyPr/>
+                    <a:lstStyle/>
+                    <a:p>
+                      <a:pPr algn="ctr"/>
+                      <a:r>
+                        <a:rPr sz="1500" b="0">
+                          <a:solidFill>
+                            <a:srgbClr val="222222"/>
+                          </a:solidFill>
+                          <a:latin typeface="맑은 고딕"/>
+                        </a:rPr>
+                        <a:t>정답의 점을 보간으로 지운 이미지에 다시 적용</a:t>
+                      </a:r>
+                    </a:p>
+                  </a:txBody>
+                  <a:tcPr anchor="ctr" marL="54864" marR="54864">
+                    <a:solidFill>
+                      <a:srgbClr val="FFFFFF"/>
+                    </a:solidFill>
+                  </a:tcPr>
+                </a:tc>
+              </a:tr>
+              <a:tr h="731520">
+                <a:tc>
+                  <a:txBody>
+                    <a:bodyPr/>
+                    <a:lstStyle/>
+                    <a:p>
+                      <a:pPr algn="l"/>
+                      <a:r>
+                        <a:rPr sz="1500" b="0">
+                          <a:solidFill>
+                            <a:srgbClr val="222222"/>
+                          </a:solidFill>
+                          <a:latin typeface="맑은 고딕"/>
+                        </a:rPr>
+                        <a:t>가짜 정상</a:t>
+                      </a:r>
+                    </a:p>
+                  </a:txBody>
+                  <a:tcPr anchor="ctr" marL="54864" marR="54864">
+                    <a:solidFill>
+                      <a:srgbClr val="F2F5FA"/>
+                    </a:solidFill>
+                  </a:tcPr>
+                </a:tc>
+                <a:tc>
+                  <a:txBody>
+                    <a:bodyPr/>
+                    <a:lstStyle/>
+                    <a:p>
+                      <a:pPr algn="ctr"/>
+                      <a:r>
+                        <a:rPr sz="1500" b="0">
+                          <a:solidFill>
+                            <a:srgbClr val="222222"/>
+                          </a:solidFill>
+                          <a:latin typeface="맑은 고딕"/>
+                        </a:rPr>
+                        <a:t>결함이 없는 이미지에서 오경보를 내는가</a:t>
+                      </a:r>
+                    </a:p>
+                  </a:txBody>
+                  <a:tcPr anchor="ctr" marL="54864" marR="54864">
+                    <a:solidFill>
+                      <a:srgbClr val="F2F5FA"/>
+                    </a:solidFill>
+                  </a:tcPr>
+                </a:tc>
+                <a:tc>
+                  <a:txBody>
+                    <a:bodyPr/>
+                    <a:lstStyle/>
+                    <a:p>
+                      <a:pPr algn="ctr"/>
+                      <a:r>
+                        <a:rPr sz="1500" b="0">
+                          <a:solidFill>
+                            <a:srgbClr val="222222"/>
+                          </a:solidFill>
+                          <a:latin typeface="맑은 고딕"/>
+                        </a:rPr>
+                        <a:t>점을 지운 이미지(결함 369장)를 가짜 정상으로 사용</a:t>
+                      </a:r>
+                    </a:p>
+                  </a:txBody>
+                  <a:tcPr anchor="ctr" marL="54864" marR="54864">
+                    <a:solidFill>
+                      <a:srgbClr val="F2F5FA"/>
+                    </a:solidFill>
+                  </a:tcPr>
+                </a:tc>
+              </a:tr>
+              <a:tr h="731520">
+                <a:tc>
+                  <a:txBody>
+                    <a:bodyPr/>
+                    <a:lstStyle/>
+                    <a:p>
+                      <a:pPr algn="l"/>
+                      <a:r>
+                        <a:rPr sz="1500" b="0">
+                          <a:solidFill>
+                            <a:srgbClr val="222222"/>
+                          </a:solidFill>
+                          <a:latin typeface="맑은 고딕"/>
+                        </a:rPr>
+                        <a:t>합성 점</a:t>
+                      </a:r>
+                    </a:p>
+                  </a:txBody>
+                  <a:tcPr anchor="ctr" marL="54864" marR="54864">
+                    <a:solidFill>
+                      <a:srgbClr val="FFFFFF"/>
+                    </a:solidFill>
+                  </a:tcPr>
+                </a:tc>
+                <a:tc>
+                  <a:txBody>
+                    <a:bodyPr/>
+                    <a:lstStyle/>
+                    <a:p>
+                      <a:pPr algn="ctr"/>
+                      <a:r>
+                        <a:rPr sz="1500" b="0">
+                          <a:solidFill>
+                            <a:srgbClr val="222222"/>
+                          </a:solidFill>
+                          <a:latin typeface="맑은 고딕"/>
+                        </a:rPr>
+                        <a:t>옅은 점·다른 호기에서도 찾는가</a:t>
+                      </a:r>
+                    </a:p>
+                  </a:txBody>
+                  <a:tcPr anchor="ctr" marL="54864" marR="54864">
+                    <a:solidFill>
+                      <a:srgbClr val="FFFFFF"/>
+                    </a:solidFill>
+                  </a:tcPr>
+                </a:tc>
+                <a:tc>
+                  <a:txBody>
+                    <a:bodyPr/>
+                    <a:lstStyle/>
+                    <a:p>
+                      <a:pPr algn="ctr"/>
+                      <a:r>
+                        <a:rPr sz="1500" b="0">
+                          <a:solidFill>
+                            <a:srgbClr val="222222"/>
+                          </a:solidFill>
+                          <a:latin typeface="맑은 고딕"/>
+                        </a:rPr>
+                        <a:t>작대기 안에만 점을 합성(진하기 4 x 크기 3), 시드 42</a:t>
+                      </a:r>
+                    </a:p>
+                  </a:txBody>
+                  <a:tcPr anchor="ctr" marL="54864" marR="54864">
+                    <a:solidFill>
+                      <a:srgbClr val="FFFFFF"/>
+                    </a:solidFill>
+                  </a:tcPr>
+                </a:tc>
+              </a:tr>
+              <a:tr h="731520">
+                <a:tc>
+                  <a:txBody>
+                    <a:bodyPr/>
+                    <a:lstStyle/>
+                    <a:p>
+                      <a:pPr algn="l"/>
+                      <a:r>
+                        <a:rPr sz="1500" b="0">
+                          <a:solidFill>
+                            <a:srgbClr val="222222"/>
+                          </a:solidFill>
+                          <a:latin typeface="맑은 고딕"/>
+                        </a:rPr>
+                        <a:t>호기·해상도</a:t>
+                      </a:r>
+                    </a:p>
+                  </a:txBody>
+                  <a:tcPr anchor="ctr" marL="54864" marR="54864">
+                    <a:solidFill>
+                      <a:srgbClr val="F2F5FA"/>
+                    </a:solidFill>
+                  </a:tcPr>
+                </a:tc>
+                <a:tc>
+                  <a:txBody>
+                    <a:bodyPr/>
+                    <a:lstStyle/>
+                    <a:p>
+                      <a:pPr algn="ctr"/>
+                      <a:r>
+                        <a:rPr sz="1500" b="0">
+                          <a:solidFill>
+                            <a:srgbClr val="222222"/>
+                          </a:solidFill>
+                          <a:latin typeface="맑은 고딕"/>
+                        </a:rPr>
+                        <a:t>특정 호기나 해상도에서 약한가</a:t>
+                      </a:r>
+                    </a:p>
+                  </a:txBody>
+                  <a:tcPr anchor="ctr" marL="54864" marR="54864">
+                    <a:solidFill>
+                      <a:srgbClr val="F2F5FA"/>
+                    </a:solidFill>
+                  </a:tcPr>
+                </a:tc>
+                <a:tc>
+                  <a:txBody>
+                    <a:bodyPr/>
+                    <a:lstStyle/>
+                    <a:p>
+                      <a:pPr algn="ctr"/>
+                      <a:r>
+                        <a:rPr sz="1500" b="0">
+                          <a:solidFill>
+                            <a:srgbClr val="222222"/>
+                          </a:solidFill>
+                          <a:latin typeface="맑은 고딕"/>
+                        </a:rPr>
+                        <a:t>호기·해상도별로 나눠 평가</a:t>
+                      </a:r>
+                    </a:p>
+                  </a:txBody>
+                  <a:tcPr anchor="ctr" marL="54864" marR="54864">
+                    <a:solidFill>
+                      <a:srgbClr val="F2F5FA"/>
+                    </a:solidFill>
+                  </a:tcPr>
+                </a:tc>
+              </a:tr>
+            </a:tbl>
+          </a:graphicData>
+        </a:graphic>
+      </p:graphicFrame>
+      <p:sp>
+        <p:nvSpPr>
+          <p:cNvPr id="7" name="TextBox 6"/>
           <p:cNvSpPr txBox="1"/>
           <p:nvPr/>
         </p:nvSpPr>
         <p:spPr>
           <a:xfrm>
-            <a:off x="502920" y="6355080"/>
-            <a:ext cx="10180015" cy="365760"/>
+            <a:off x="548640" y="5486400"/>
+            <a:ext cx="10972800" cy="1097280"/>
           </a:xfrm>
           <a:prstGeom prst="rect">
             <a:avLst/>
@@ -3510,65 +3896,6 @@
           <a:noFill/>
         </p:spPr>
         <p:txBody>
-          <a:bodyPr wrap="square" anchor="t" lIns="45720" rIns="45720">
-            <a:spAutoFit/>
-          </a:bodyPr>
-          <a:lstStyle/>
-          <a:p>
-            <a:pPr algn="l"/>
-            <a:r>
-              <a:rPr sz="1100" b="0">
-                <a:solidFill>
-                  <a:srgbClr val="555B66"/>
-                </a:solidFill>
-                <a:latin typeface="맑은 고딕"/>
-              </a:rPr>
-              <a:t>가짜 정상은 진짜 정상 제품이 아니다. 오경보율은 범위로 해석한다.</a:t>
-            </a:r>
-          </a:p>
-        </p:txBody>
-      </p:sp>
-      <p:pic>
-        <p:nvPicPr>
-          <p:cNvPr id="7" name="Picture 6" descr="fig3l_robust6.png"/>
-          <p:cNvPicPr>
-            <a:picLocks noChangeAspect="1"/>
-          </p:cNvPicPr>
-          <p:nvPr/>
-        </p:nvPicPr>
-        <p:blipFill>
-          <a:blip r:embed="rId2"/>
-          <a:stretch>
-            <a:fillRect/>
-          </a:stretch>
-        </p:blipFill>
-        <p:spPr>
-          <a:xfrm>
-            <a:off x="457200" y="1849795"/>
-            <a:ext cx="11247120" cy="3158409"/>
-          </a:xfrm>
-          <a:prstGeom prst="rect">
-            <a:avLst/>
-          </a:prstGeom>
-        </p:spPr>
-      </p:pic>
-      <p:sp>
-        <p:nvSpPr>
-          <p:cNvPr id="8" name="TextBox 7"/>
-          <p:cNvSpPr txBox="1"/>
-          <p:nvPr/>
-        </p:nvSpPr>
-        <p:spPr>
-          <a:xfrm>
-            <a:off x="640080" y="5120640"/>
-            <a:ext cx="10972800" cy="1554480"/>
-          </a:xfrm>
-          <a:prstGeom prst="rect">
-            <a:avLst/>
-          </a:prstGeom>
-          <a:noFill/>
-        </p:spPr>
-        <p:txBody>
           <a:bodyPr wrap="square" lIns="45720" rIns="45720">
             <a:spAutoFit/>
           </a:bodyPr>
@@ -3576,11 +3903,11 @@
           <a:p>
             <a:pPr>
               <a:spcAft>
-                <a:spcPts val="400"/>
+                <a:spcPts val="600"/>
               </a:spcAft>
             </a:pPr>
             <a:r>
-              <a:rPr sz="1500" b="1">
+              <a:rPr sz="1600" b="1">
                 <a:solidFill>
                   <a:srgbClr val="2AA7B8"/>
                 </a:solidFill>
@@ -3589,74 +3916,49 @@
               <a:t>• </a:t>
             </a:r>
             <a:r>
-              <a:rPr sz="1500" b="0">
-                <a:solidFill>
-                  <a:srgbClr val="222222"/>
-                </a:solidFill>
-                <a:latin typeface="맑은 고딕"/>
-              </a:rPr>
-              <a:t>NS+노이즈 6px 오경보율: </a:t>
-            </a:r>
-            <a:r>
-              <a:rPr sz="1500" b="1">
-                <a:solidFill>
-                  <a:srgbClr val="222222"/>
-                </a:solidFill>
-                <a:latin typeface="맑은 고딕"/>
-              </a:rPr>
-              <a:t>R50 0.5%, YOLO26n 4.1%</a:t>
-            </a:r>
-            <a:r>
-              <a:rPr sz="1500" b="0">
-                <a:solidFill>
-                  <a:srgbClr val="222222"/>
-                </a:solidFill>
-                <a:latin typeface="맑은 고딕"/>
-              </a:rPr>
-              <a:t>, RT-DETR-l 37%, YOLOv3-tiny 39%, D-FINE-N 49%, MobileNetV3 64%</a:t>
-            </a:r>
-          </a:p>
-          <a:p>
-            <a:pPr>
-              <a:spcAft>
-                <a:spcPts val="400"/>
-              </a:spcAft>
-            </a:pPr>
-            <a:r>
-              <a:rPr sz="1500" b="1">
-                <a:solidFill>
-                  <a:srgbClr val="2AA7B8"/>
-                </a:solidFill>
-                <a:latin typeface="맑은 고딕"/>
-              </a:rPr>
-              <a:t>• </a:t>
-            </a:r>
-            <a:r>
-              <a:rPr sz="1500" b="0">
-                <a:solidFill>
-                  <a:srgbClr val="222222"/>
-                </a:solidFill>
-                <a:latin typeface="맑은 고딕"/>
-              </a:rPr>
-              <a:t>오경보는 대부분 </a:t>
-            </a:r>
-            <a:r>
-              <a:rPr sz="1500" b="1">
-                <a:solidFill>
-                  <a:srgbClr val="222222"/>
-                </a:solidFill>
-                <a:latin typeface="맑은 고딕"/>
-              </a:rPr>
-              <a:t>지운 자리</a:t>
-            </a:r>
-            <a:r>
-              <a:rPr sz="1500" b="0">
-                <a:solidFill>
-                  <a:srgbClr val="222222"/>
-                </a:solidFill>
-                <a:latin typeface="맑은 고딕"/>
-              </a:rPr>
-              <a:t>에서 발생, 분리도(AUC)는 MobileNet 0.842·D-FINE 0.900이 가장 나쁨</a:t>
+              <a:rPr sz="1600" b="0">
+                <a:solidFill>
+                  <a:srgbClr val="222222"/>
+                </a:solidFill>
+                <a:latin typeface="맑은 고딕"/>
+              </a:rPr>
+              <a:t>합성·가짜 정상은 </a:t>
+            </a:r>
+            <a:r>
+              <a:rPr sz="1600" b="1">
+                <a:solidFill>
+                  <a:srgbClr val="222222"/>
+                </a:solidFill>
+                <a:latin typeface="맑은 고딕"/>
+              </a:rPr>
+              <a:t>인위적인 이미지</a:t>
+            </a:r>
+            <a:r>
+              <a:rPr sz="1600" b="0">
+                <a:solidFill>
+                  <a:srgbClr val="222222"/>
+                </a:solidFill>
+                <a:latin typeface="맑은 고딕"/>
+              </a:rPr>
+              <a:t>라 실제 현장 성능이 아니라 </a:t>
+            </a:r>
+            <a:r>
+              <a:rPr sz="1600" b="1">
+                <a:solidFill>
+                  <a:srgbClr val="222222"/>
+                </a:solidFill>
+                <a:latin typeface="맑은 고딕"/>
+              </a:rPr>
+              <a:t>모델 간 상대 비교와 취약점 탐색</a:t>
+            </a:r>
+            <a:r>
+              <a:rPr sz="1600" b="0">
+                <a:solidFill>
+                  <a:srgbClr val="222222"/>
+                </a:solidFill>
+                <a:latin typeface="맑은 고딕"/>
+              </a:rPr>
+              <a:t>으로 해석한다</a:t>
             </a:r>
           </a:p>
         </p:txBody>
@@ -3752,7 +4054,7 @@
                 </a:solidFill>
                 <a:latin typeface="맑은 고딕"/>
               </a:rPr>
-              <a:t>합성 점: 작대기 안에만, 시드 42로 모두가 같게</a:t>
+              <a:t>점 제거: 모델은 점 자체를 본다</a:t>
             </a:r>
           </a:p>
         </p:txBody>
@@ -3787,7 +4089,7 @@
                 </a:solidFill>
                 <a:latin typeface="맑은 고딕"/>
               </a:rPr>
-              <a:t>실제로는 놓침이 사실상 없어서, 미탐지 조건을 직접 만들어 시험했다</a:t>
+              <a:t>결함의 점을 지우면 검출이 사라진다 → 위치만 보는 지름길이 아니다</a:t>
             </a:r>
           </a:p>
         </p:txBody>
@@ -3829,7 +4131,7 @@
       </p:sp>
       <p:pic>
         <p:nvPicPr>
-          <p:cNvPr id="6" name="Picture 5" descr="fig3m_synth_bars.png"/>
+          <p:cNvPr id="6" name="Picture 5" descr="fig3b_dot_removal.png"/>
           <p:cNvPicPr>
             <a:picLocks noChangeAspect="1"/>
           </p:cNvPicPr>
@@ -3843,8 +4145,8 @@
         </p:blipFill>
         <p:spPr>
           <a:xfrm>
-            <a:off x="1181898" y="1645920"/>
-            <a:ext cx="4677083" cy="4846320"/>
+            <a:off x="2397900" y="1554479"/>
+            <a:ext cx="7365719" cy="3291840"/>
           </a:xfrm>
           <a:prstGeom prst="rect">
             <a:avLst/>
@@ -3859,8 +4161,8 @@
         </p:nvSpPr>
         <p:spPr>
           <a:xfrm>
-            <a:off x="6766560" y="1783080"/>
-            <a:ext cx="5029200" cy="4572000"/>
+            <a:off x="731520" y="4937760"/>
+            <a:ext cx="10789920" cy="1737360"/>
           </a:xfrm>
           <a:prstGeom prst="rect">
             <a:avLst/>
@@ -3875,11 +4177,11 @@
           <a:p>
             <a:pPr>
               <a:spcAft>
-                <a:spcPts val="600"/>
+                <a:spcPts val="800"/>
               </a:spcAft>
             </a:pPr>
             <a:r>
-              <a:rPr sz="1500" b="1">
+              <a:rPr sz="1600" b="1">
                 <a:solidFill>
                   <a:srgbClr val="2AA7B8"/>
                 </a:solidFill>
@@ -3888,41 +4190,41 @@
               <a:t>• </a:t>
             </a:r>
             <a:r>
-              <a:rPr sz="1500" b="0">
-                <a:solidFill>
-                  <a:srgbClr val="222222"/>
-                </a:solidFill>
-                <a:latin typeface="맑은 고딕"/>
-              </a:rPr>
-              <a:t>실제 점을 지우고 영상에서 찾은 </a:t>
-            </a:r>
-            <a:r>
-              <a:rPr sz="1500" b="1">
-                <a:solidFill>
-                  <a:srgbClr val="222222"/>
-                </a:solidFill>
-                <a:latin typeface="맑은 고딕"/>
-              </a:rPr>
-              <a:t>작대기(막대) 안쪽</a:t>
-            </a:r>
-            <a:r>
-              <a:rPr sz="1500" b="0">
-                <a:solidFill>
-                  <a:srgbClr val="222222"/>
-                </a:solidFill>
-                <a:latin typeface="맑은 고딕"/>
-              </a:rPr>
-              <a:t>에만 val의 실제 점(투과율 조각)을 합성</a:t>
+              <a:rPr sz="1600" b="0">
+                <a:solidFill>
+                  <a:srgbClr val="222222"/>
+                </a:solidFill>
+                <a:latin typeface="맑은 고딕"/>
+              </a:rPr>
+              <a:t>test 정답 663개의 점을 보간으로 지우고 같은 모델을 다시 적용: 노이즈 없는 평균 보간으로 13x13 이상 지우면 </a:t>
+            </a:r>
+            <a:r>
+              <a:rPr sz="1600" b="1">
+                <a:solidFill>
+                  <a:srgbClr val="222222"/>
+                </a:solidFill>
+                <a:latin typeface="맑은 고딕"/>
+              </a:rPr>
+              <a:t>6개 모델 모두 0~3개</a:t>
+            </a:r>
+            <a:r>
+              <a:rPr sz="1600" b="0">
+                <a:solidFill>
+                  <a:srgbClr val="222222"/>
+                </a:solidFill>
+                <a:latin typeface="맑은 고딕"/>
+              </a:rPr>
+              <a:t>만 검출</a:t>
             </a:r>
           </a:p>
           <a:p>
             <a:pPr>
               <a:spcAft>
-                <a:spcPts val="600"/>
+                <a:spcPts val="800"/>
               </a:spcAft>
             </a:pPr>
             <a:r>
-              <a:rPr sz="1500" b="1">
+              <a:rPr sz="1600" b="1">
                 <a:solidFill>
                   <a:srgbClr val="2AA7B8"/>
                 </a:solidFill>
@@ -3931,133 +4233,31 @@
               <a:t>• </a:t>
             </a:r>
             <a:r>
-              <a:rPr sz="1500" b="0">
-                <a:solidFill>
-                  <a:srgbClr val="222222"/>
-                </a:solidFill>
-                <a:latin typeface="맑은 고딕"/>
-              </a:rPr>
-              <a:t>점의 </a:t>
-            </a:r>
-            <a:r>
-              <a:rPr sz="1500" b="1">
-                <a:solidFill>
-                  <a:srgbClr val="222222"/>
-                </a:solidFill>
-                <a:latin typeface="맑은 고딕"/>
-              </a:rPr>
-              <a:t>진하기(4단계) x 크기(3단계)</a:t>
-            </a:r>
-            <a:r>
-              <a:rPr sz="1500" b="0">
-                <a:solidFill>
-                  <a:srgbClr val="222222"/>
-                </a:solidFill>
-                <a:latin typeface="맑은 고딕"/>
-              </a:rPr>
-              <a:t>를 바꿔 옅은 점까지 시험</a:t>
-            </a:r>
-          </a:p>
-          <a:p>
-            <a:pPr>
-              <a:spcAft>
-                <a:spcPts val="600"/>
-              </a:spcAft>
-            </a:pPr>
-            <a:r>
-              <a:rPr sz="1500" b="1">
-                <a:solidFill>
-                  <a:srgbClr val="2AA7B8"/>
-                </a:solidFill>
-                <a:latin typeface="맑은 고딕"/>
-              </a:rPr>
-              <a:t>• </a:t>
-            </a:r>
-            <a:r>
-              <a:rPr sz="1500" b="0">
-                <a:solidFill>
-                  <a:srgbClr val="222222"/>
-                </a:solidFill>
-                <a:latin typeface="맑은 고딕"/>
-              </a:rPr>
-              <a:t>test 바탕 386장, 점 1,436개. 실제 점 663개가 </a:t>
-            </a:r>
-            <a:r>
-              <a:rPr sz="1500" b="1">
-                <a:solidFill>
-                  <a:srgbClr val="222222"/>
-                </a:solidFill>
-                <a:latin typeface="맑은 고딕"/>
-              </a:rPr>
-              <a:t>전부 검출된 막대에 닿음</a:t>
-            </a:r>
-          </a:p>
-          <a:p>
-            <a:pPr>
-              <a:spcAft>
-                <a:spcPts val="600"/>
-              </a:spcAft>
-            </a:pPr>
-            <a:r>
-              <a:rPr sz="1500" b="1">
-                <a:solidFill>
-                  <a:srgbClr val="2AA7B8"/>
-                </a:solidFill>
-                <a:latin typeface="맑은 고딕"/>
-              </a:rPr>
-              <a:t>• </a:t>
-            </a:r>
-            <a:r>
-              <a:rPr sz="1500" b="1">
-                <a:solidFill>
-                  <a:srgbClr val="222222"/>
-                </a:solidFill>
-                <a:latin typeface="맑은 고딕"/>
-              </a:rPr>
-              <a:t>시드 42 + 이미지 이름별 시드</a:t>
-            </a:r>
-            <a:r>
-              <a:rPr sz="1500" b="0">
-                <a:solidFill>
-                  <a:srgbClr val="222222"/>
-                </a:solidFill>
-                <a:latin typeface="맑은 고딕"/>
-              </a:rPr>
-              <a:t>로 고정, 기준본과 --verify로 팀원 PC에서 같은 데이터인지 확인</a:t>
-            </a:r>
-          </a:p>
-          <a:p>
-            <a:pPr>
-              <a:spcAft>
-                <a:spcPts val="600"/>
-              </a:spcAft>
-            </a:pPr>
-            <a:r>
-              <a:rPr sz="1500" b="1">
-                <a:solidFill>
-                  <a:srgbClr val="2AA7B8"/>
-                </a:solidFill>
-                <a:latin typeface="맑은 고딕"/>
-              </a:rPr>
-              <a:t>• </a:t>
-            </a:r>
-            <a:r>
-              <a:rPr sz="1500" b="0">
-                <a:solidFill>
-                  <a:srgbClr val="222222"/>
-                </a:solidFill>
-                <a:latin typeface="맑은 고딕"/>
-              </a:rPr>
-              <a:t>합성은 실제보다 약 10%p 덜 현실적 → 절대 수치가 아닌 </a:t>
-            </a:r>
-            <a:r>
-              <a:rPr sz="1500" b="1">
-                <a:solidFill>
-                  <a:srgbClr val="222222"/>
-                </a:solidFill>
-                <a:latin typeface="맑은 고딕"/>
-              </a:rPr>
-              <a:t>상대 비교</a:t>
+              <a:rPr sz="1600" b="0">
+                <a:solidFill>
+                  <a:srgbClr val="222222"/>
+                </a:solidFill>
+                <a:latin typeface="맑은 고딕"/>
+              </a:rPr>
+              <a:t>YOLOv3-tiny 등에 남는 반응은 보간에 더한 </a:t>
+            </a:r>
+            <a:r>
+              <a:rPr sz="1600" b="1">
+                <a:solidFill>
+                  <a:srgbClr val="222222"/>
+                </a:solidFill>
+                <a:latin typeface="맑은 고딕"/>
+              </a:rPr>
+              <a:t>노이즈 무늬</a:t>
+            </a:r>
+            <a:r>
+              <a:rPr sz="1600" b="0">
+                <a:solidFill>
+                  <a:srgbClr val="222222"/>
+                </a:solidFill>
+                <a:latin typeface="맑은 고딕"/>
+              </a:rPr>
+              <a:t> 때문 → 다음 질문: 노이즈 무늬에 속아 오경보를 내는가?</a:t>
             </a:r>
           </a:p>
         </p:txBody>
@@ -4153,7 +4353,7 @@
                 </a:solidFill>
                 <a:latin typeface="맑은 고딕"/>
               </a:rPr>
-              <a:t>합성 점 결과: 옅은 점이 미탐지 조건이다</a:t>
+              <a:t>가짜 정상: 노이즈 보간에는 R50과 YOLO26n만 속지 않는다</a:t>
             </a:r>
           </a:p>
         </p:txBody>
@@ -4188,7 +4388,7 @@
                 </a:solidFill>
                 <a:latin typeface="맑은 고딕"/>
               </a:rPr>
-              <a:t>val 임계값에서는 D-FINE-N이 앞서지만 대부분 느슨한 임계값 효과, 맞추면 차이가 줄어든다</a:t>
+              <a:t>정상 이미지가 없어 결함의 점을 지운 이미지로 오경보를 쟀다</a:t>
             </a:r>
           </a:p>
         </p:txBody>
@@ -4258,14 +4458,14 @@
                 </a:solidFill>
                 <a:latin typeface="맑은 고딕"/>
               </a:rPr>
-              <a:t>합성 점 시험은 test 이미지가 바탕이며 참고용이다. 합성 점 AP와 오경보 예산 비교는 합성 이미지 자체로 계산한 분석용 수치다.</a:t>
+              <a:t>가짜 정상은 진짜 정상 제품이 아니다. 오경보율은 범위로 해석한다.</a:t>
             </a:r>
           </a:p>
         </p:txBody>
       </p:sp>
       <p:pic>
         <p:nvPicPr>
-          <p:cNvPr id="7" name="Picture 6" descr="fig3k_compare6.png"/>
+          <p:cNvPr id="7" name="Picture 6" descr="fig3l_robust6.png"/>
           <p:cNvPicPr>
             <a:picLocks noChangeAspect="1"/>
           </p:cNvPicPr>
@@ -4279,8 +4479,8 @@
         </p:blipFill>
         <p:spPr>
           <a:xfrm>
-            <a:off x="547460" y="1645919"/>
-            <a:ext cx="11066599" cy="3383280"/>
+            <a:off x="457200" y="1849795"/>
+            <a:ext cx="11247120" cy="3158409"/>
           </a:xfrm>
           <a:prstGeom prst="rect">
             <a:avLst/>
@@ -4295,8 +4495,8 @@
         </p:nvSpPr>
         <p:spPr>
           <a:xfrm>
-            <a:off x="640080" y="4983480"/>
-            <a:ext cx="10972800" cy="1645920"/>
+            <a:off x="640080" y="5120640"/>
+            <a:ext cx="10972800" cy="1554480"/>
           </a:xfrm>
           <a:prstGeom prst="rect">
             <a:avLst/>
@@ -4311,7 +4511,7 @@
           <a:p>
             <a:pPr>
               <a:spcAft>
-                <a:spcPts val="300"/>
+                <a:spcPts val="400"/>
               </a:spcAft>
             </a:pPr>
             <a:r>
@@ -4330,13 +4530,31 @@
                 </a:solidFill>
                 <a:latin typeface="맑은 고딕"/>
               </a:rPr>
-              <a:t>대비(둘레-점 밝기) 6 미만은 모든 모델이 거의 0%, 20 이상에서 약 77~89%</a:t>
+              <a:t>NS+노이즈 6px 오경보율: </a:t>
+            </a:r>
+            <a:r>
+              <a:rPr sz="1500" b="1">
+                <a:solidFill>
+                  <a:srgbClr val="222222"/>
+                </a:solidFill>
+                <a:latin typeface="맑은 고딕"/>
+              </a:rPr>
+              <a:t>R50 0.5%, YOLO26n 4.1%</a:t>
+            </a:r>
+            <a:r>
+              <a:rPr sz="1500" b="0">
+                <a:solidFill>
+                  <a:srgbClr val="222222"/>
+                </a:solidFill>
+                <a:latin typeface="맑은 고딕"/>
+              </a:rPr>
+              <a:t>, RT-DETR-l 37%, YOLOv3-tiny 39%, D-FINE-N 49%, MobileNetV3 64%</a:t>
             </a:r>
           </a:p>
           <a:p>
             <a:pPr>
               <a:spcAft>
-                <a:spcPts val="300"/>
+                <a:spcPts val="400"/>
               </a:spcAft>
             </a:pPr>
             <a:r>
@@ -4355,7 +4573,7 @@
                 </a:solidFill>
                 <a:latin typeface="맑은 고딕"/>
               </a:rPr>
-              <a:t>임계값과 무관한 합성 점 AP: </a:t>
+              <a:t>오경보는 대부분 </a:t>
             </a:r>
             <a:r>
               <a:rPr sz="1500" b="1">
@@ -4364,7 +4582,7 @@
                 </a:solidFill>
                 <a:latin typeface="맑은 고딕"/>
               </a:rPr>
-              <a:t>D-FINE-N 0.574 ≈ R50 0.567</a:t>
+              <a:t>지운 자리</a:t>
             </a:r>
             <a:r>
               <a:rPr sz="1500" b="0">
@@ -4373,41 +4591,7 @@
                 </a:solidFill>
                 <a:latin typeface="맑은 고딕"/>
               </a:rPr>
-              <a:t> &gt; YOLOv3-tiny 0.515 ≈ YOLO26n 0.501 &gt; RT-DETR-l 0.451 &gt;&gt; </a:t>
-            </a:r>
-            <a:r>
-              <a:rPr sz="1500" b="1">
-                <a:solidFill>
-                  <a:srgbClr val="222222"/>
-                </a:solidFill>
-                <a:latin typeface="맑은 고딕"/>
-              </a:rPr>
-              <a:t>MobileNetV3 0.262</a:t>
-            </a:r>
-          </a:p>
-          <a:p>
-            <a:pPr>
-              <a:spcAft>
-                <a:spcPts val="300"/>
-              </a:spcAft>
-            </a:pPr>
-            <a:r>
-              <a:rPr sz="1500" b="1">
-                <a:solidFill>
-                  <a:srgbClr val="2AA7B8"/>
-                </a:solidFill>
-                <a:latin typeface="맑은 고딕"/>
-              </a:rPr>
-              <a:t>• </a:t>
-            </a:r>
-            <a:r>
-              <a:rPr sz="1500" b="0">
-                <a:solidFill>
-                  <a:srgbClr val="222222"/>
-                </a:solidFill>
-                <a:latin typeface="맑은 고딕"/>
-              </a:rPr>
-              <a:t>3호기(대비 14 이상): MobileNetV3 4%, YOLO26n·RT-DETR-l 약 61%, R50·YOLOv3-tiny·D-FINE-N은 호기 차이가 작음</a:t>
+              <a:t>에서 발생, 분리도(AUC)는 MobileNet 0.842·D-FINE 0.900이 가장 나쁨</a:t>
             </a:r>
           </a:p>
         </p:txBody>
@@ -4503,7 +4687,7 @@
                 </a:solidFill>
                 <a:latin typeface="맑은 고딕"/>
               </a:rPr>
-              <a:t>호기·해상도: 뚜렷한 효과는 확인되지 않았다</a:t>
+              <a:t>가짜 정상 예시: 노이즈 무늬를 점으로 착각한다</a:t>
             </a:r>
           </a:p>
         </p:txBody>
@@ -4538,7 +4722,7 @@
                 </a:solidFill>
                 <a:latin typeface="맑은 고딕"/>
               </a:rPr>
-              <a:t>가장 낮은 그룹은 공식 라벨 박스가 76%여서 IoU 점수가 낮을 뿐이다</a:t>
+              <a:t>평균 보간으로 지우면 반응이 없지만, 노이즈를 더하면 일부 모델이 반응한다</a:t>
             </a:r>
           </a:p>
         </p:txBody>
@@ -4578,9 +4762,44 @@
           </a:p>
         </p:txBody>
       </p:sp>
+      <p:sp>
+        <p:nvSpPr>
+          <p:cNvPr id="6" name="TextBox 5"/>
+          <p:cNvSpPr txBox="1"/>
+          <p:nvPr/>
+        </p:nvSpPr>
+        <p:spPr>
+          <a:xfrm>
+            <a:off x="502920" y="6355080"/>
+            <a:ext cx="10180015" cy="365760"/>
+          </a:xfrm>
+          <a:prstGeom prst="rect">
+            <a:avLst/>
+          </a:prstGeom>
+          <a:noFill/>
+        </p:spPr>
+        <p:txBody>
+          <a:bodyPr wrap="square" anchor="t" lIns="45720" rIns="45720">
+            <a:spAutoFit/>
+          </a:bodyPr>
+          <a:lstStyle/>
+          <a:p>
+            <a:pPr algn="l"/>
+            <a:r>
+              <a:rPr sz="1100" b="0">
+                <a:solidFill>
+                  <a:srgbClr val="555B66"/>
+                </a:solidFill>
+                <a:latin typeface="맑은 고딕"/>
+              </a:rPr>
+              <a:t>예시 두 장(집계는 앞 슬라이드의 369장). 이 예시의 노이즈는 이미지마다 새 난수(시드 0)로 만들어 집계용 이미지와 값이 다르다.</a:t>
+            </a:r>
+          </a:p>
+        </p:txBody>
+      </p:sp>
       <p:pic>
         <p:nvPicPr>
-          <p:cNvPr id="6" name="Picture 5" descr="fig3f_groups_chart.png"/>
+          <p:cNvPr id="7" name="Picture 6" descr="fig5c_fake_examples.png"/>
           <p:cNvPicPr>
             <a:picLocks noChangeAspect="1"/>
           </p:cNvPicPr>
@@ -4594,8 +4813,8 @@
         </p:blipFill>
         <p:spPr>
           <a:xfrm>
-            <a:off x="550398" y="1554480"/>
-            <a:ext cx="11060723" cy="3383279"/>
+            <a:off x="1009515" y="1463040"/>
+            <a:ext cx="5296168" cy="4663440"/>
           </a:xfrm>
           <a:prstGeom prst="rect">
             <a:avLst/>
@@ -4604,14 +4823,14 @@
       </p:pic>
       <p:sp>
         <p:nvSpPr>
-          <p:cNvPr id="7" name="TextBox 6"/>
+          <p:cNvPr id="8" name="TextBox 7"/>
           <p:cNvSpPr txBox="1"/>
           <p:nvPr/>
         </p:nvSpPr>
         <p:spPr>
           <a:xfrm>
-            <a:off x="731520" y="5029200"/>
-            <a:ext cx="10789920" cy="1645920"/>
+            <a:off x="7223760" y="1783080"/>
+            <a:ext cx="4663440" cy="4572000"/>
           </a:xfrm>
           <a:prstGeom prst="rect">
             <a:avLst/>
@@ -4626,11 +4845,11 @@
           <a:p>
             <a:pPr>
               <a:spcAft>
-                <a:spcPts val="800"/>
+                <a:spcPts val="1000"/>
               </a:spcAft>
             </a:pPr>
             <a:r>
-              <a:rPr sz="1600" b="1">
+              <a:rPr sz="1500" b="1">
                 <a:solidFill>
                   <a:srgbClr val="2AA7B8"/>
                 </a:solidFill>
@@ -4639,23 +4858,23 @@
               <a:t>• </a:t>
             </a:r>
             <a:r>
-              <a:rPr sz="1600" b="0">
-                <a:solidFill>
-                  <a:srgbClr val="222222"/>
-                </a:solidFill>
-                <a:latin typeface="맑은 고딕"/>
-              </a:rPr>
-              <a:t>해상도별 공식 라벨 박스 비율이 10~76%로 달라 라벨 구성이 섞인다. 공식 라벨 이미지끼리만 비교하면 F1이 0.956~0.977로 좁아지고 구간이 겹친다</a:t>
+              <a:rPr sz="1500" b="0">
+                <a:solidFill>
+                  <a:srgbClr val="222222"/>
+                </a:solidFill>
+                <a:latin typeface="맑은 고딕"/>
+              </a:rPr>
+              <a:t>왼쪽 열: 원본 → 6개 모델이 모두 검출</a:t>
             </a:r>
           </a:p>
           <a:p>
             <a:pPr>
               <a:spcAft>
-                <a:spcPts val="800"/>
+                <a:spcPts val="1000"/>
               </a:spcAft>
             </a:pPr>
             <a:r>
-              <a:rPr sz="1600" b="1">
+              <a:rPr sz="1500" b="1">
                 <a:solidFill>
                   <a:srgbClr val="2AA7B8"/>
                 </a:solidFill>
@@ -4664,31 +4883,99 @@
               <a:t>• </a:t>
             </a:r>
             <a:r>
-              <a:rPr sz="1600" b="0">
-                <a:solidFill>
-                  <a:srgbClr val="222222"/>
-                </a:solidFill>
-                <a:latin typeface="맑은 고딕"/>
-              </a:rPr>
-              <a:t>그룹별 표본이 작다(공식 라벨 이미지 호기별 20~36장). 합성 점에서 보인 3호기 약점은 </a:t>
-            </a:r>
-            <a:r>
-              <a:rPr sz="1600" b="1">
-                <a:solidFill>
-                  <a:srgbClr val="222222"/>
-                </a:solidFill>
-                <a:latin typeface="맑은 고딕"/>
-              </a:rPr>
-              <a:t>모델에 따라</a:t>
-            </a:r>
-            <a:r>
-              <a:rPr sz="1600" b="0">
-                <a:solidFill>
-                  <a:srgbClr val="222222"/>
-                </a:solidFill>
-                <a:latin typeface="맑은 고딕"/>
-              </a:rPr>
-              <a:t> 다르다(앞 슬라이드)</a:t>
+              <a:rPr sz="1500" b="0">
+                <a:solidFill>
+                  <a:srgbClr val="222222"/>
+                </a:solidFill>
+                <a:latin typeface="맑은 고딕"/>
+              </a:rPr>
+              <a:t>가운데: 평균 보간으로 점을 지움 → 반응 없음(점이 단서)</a:t>
+            </a:r>
+          </a:p>
+          <a:p>
+            <a:pPr>
+              <a:spcAft>
+                <a:spcPts val="1000"/>
+              </a:spcAft>
+            </a:pPr>
+            <a:r>
+              <a:rPr sz="1500" b="1">
+                <a:solidFill>
+                  <a:srgbClr val="2AA7B8"/>
+                </a:solidFill>
+                <a:latin typeface="맑은 고딕"/>
+              </a:rPr>
+              <a:t>• </a:t>
+            </a:r>
+            <a:r>
+              <a:rPr sz="1500" b="0">
+                <a:solidFill>
+                  <a:srgbClr val="222222"/>
+                </a:solidFill>
+                <a:latin typeface="맑은 고딕"/>
+              </a:rPr>
+              <a:t>오른쪽 아래(1호기): NS 보간 + 노이즈로 지운 자리의 </a:t>
+            </a:r>
+            <a:r>
+              <a:rPr sz="1500" b="1">
+                <a:solidFill>
+                  <a:srgbClr val="222222"/>
+                </a:solidFill>
+                <a:latin typeface="맑은 고딕"/>
+              </a:rPr>
+              <a:t>노이즈 무늬를 점으로 착각</a:t>
+            </a:r>
+            <a:r>
+              <a:rPr sz="1500" b="0">
+                <a:solidFill>
+                  <a:srgbClr val="222222"/>
+                </a:solidFill>
+                <a:latin typeface="맑은 고딕"/>
+              </a:rPr>
+              <a:t>해 YOLOv3-tiny, MobileNetV3, RT-DETR-l, D-FINE-N이 반응, R50과 YOLO26n은 반응 없음</a:t>
+            </a:r>
+          </a:p>
+          <a:p>
+            <a:pPr>
+              <a:spcAft>
+                <a:spcPts val="1000"/>
+              </a:spcAft>
+            </a:pPr>
+            <a:r>
+              <a:rPr sz="1500" b="1">
+                <a:solidFill>
+                  <a:srgbClr val="2AA7B8"/>
+                </a:solidFill>
+                <a:latin typeface="맑은 고딕"/>
+              </a:rPr>
+              <a:t>• </a:t>
+            </a:r>
+            <a:r>
+              <a:rPr sz="1500" b="0">
+                <a:solidFill>
+                  <a:srgbClr val="222222"/>
+                </a:solidFill>
+                <a:latin typeface="맑은 고딕"/>
+              </a:rPr>
+              <a:t>→ 점의 모양보다 </a:t>
+            </a:r>
+            <a:r>
+              <a:rPr sz="1500" b="1">
+                <a:solidFill>
+                  <a:srgbClr val="222222"/>
+                </a:solidFill>
+                <a:latin typeface="맑은 고딕"/>
+              </a:rPr>
+              <a:t>질감</a:t>
+            </a:r>
+            <a:r>
+              <a:rPr sz="1500" b="0">
+                <a:solidFill>
+                  <a:srgbClr val="222222"/>
+                </a:solidFill>
+                <a:latin typeface="맑은 고딕"/>
+              </a:rPr>
+              <a:t>에 반응하는 모델이 있다</a:t>
             </a:r>
           </a:p>
         </p:txBody>
@@ -4784,7 +5071,7 @@
                 </a:solidFill>
                 <a:latin typeface="맑은 고딕"/>
               </a:rPr>
-              <a:t>③ 종합: 모델별 성적표</a:t>
+              <a:t>합성 점: 작대기 안에만, 시드 42로 모두가 같게</a:t>
             </a:r>
           </a:p>
         </p:txBody>
@@ -4819,7 +5106,7 @@
                 </a:solidFill>
                 <a:latin typeface="맑은 고딕"/>
               </a:rPr>
-              <a:t>한 모델이 모든 항목에서 1등은 아니다</a:t>
+              <a:t>실제로는 놓침이 사실상 없어서, 미탐지 조건을 직접 만들어 시험했다</a:t>
             </a:r>
           </a:p>
         </p:txBody>
@@ -4855,6 +5142,1301 @@
                 <a:latin typeface="맑은 고딕"/>
               </a:rPr>
               <a:t>14</a:t>
+            </a:r>
+          </a:p>
+        </p:txBody>
+      </p:sp>
+      <p:pic>
+        <p:nvPicPr>
+          <p:cNvPr id="6" name="Picture 5" descr="fig3m_synth_bars.png"/>
+          <p:cNvPicPr>
+            <a:picLocks noChangeAspect="1"/>
+          </p:cNvPicPr>
+          <p:nvPr/>
+        </p:nvPicPr>
+        <p:blipFill>
+          <a:blip r:embed="rId2"/>
+          <a:stretch>
+            <a:fillRect/>
+          </a:stretch>
+        </p:blipFill>
+        <p:spPr>
+          <a:xfrm>
+            <a:off x="1181898" y="1645920"/>
+            <a:ext cx="4677083" cy="4846320"/>
+          </a:xfrm>
+          <a:prstGeom prst="rect">
+            <a:avLst/>
+          </a:prstGeom>
+        </p:spPr>
+      </p:pic>
+      <p:sp>
+        <p:nvSpPr>
+          <p:cNvPr id="7" name="TextBox 6"/>
+          <p:cNvSpPr txBox="1"/>
+          <p:nvPr/>
+        </p:nvSpPr>
+        <p:spPr>
+          <a:xfrm>
+            <a:off x="6766560" y="1783080"/>
+            <a:ext cx="5029200" cy="4572000"/>
+          </a:xfrm>
+          <a:prstGeom prst="rect">
+            <a:avLst/>
+          </a:prstGeom>
+          <a:noFill/>
+        </p:spPr>
+        <p:txBody>
+          <a:bodyPr wrap="square" lIns="45720" rIns="45720">
+            <a:spAutoFit/>
+          </a:bodyPr>
+          <a:lstStyle/>
+          <a:p>
+            <a:pPr>
+              <a:spcAft>
+                <a:spcPts val="600"/>
+              </a:spcAft>
+            </a:pPr>
+            <a:r>
+              <a:rPr sz="1500" b="1">
+                <a:solidFill>
+                  <a:srgbClr val="2AA7B8"/>
+                </a:solidFill>
+                <a:latin typeface="맑은 고딕"/>
+              </a:rPr>
+              <a:t>• </a:t>
+            </a:r>
+            <a:r>
+              <a:rPr sz="1500" b="0">
+                <a:solidFill>
+                  <a:srgbClr val="222222"/>
+                </a:solidFill>
+                <a:latin typeface="맑은 고딕"/>
+              </a:rPr>
+              <a:t>실제 점을 지우고 영상에서 찾은 </a:t>
+            </a:r>
+            <a:r>
+              <a:rPr sz="1500" b="1">
+                <a:solidFill>
+                  <a:srgbClr val="222222"/>
+                </a:solidFill>
+                <a:latin typeface="맑은 고딕"/>
+              </a:rPr>
+              <a:t>작대기(막대) 안쪽</a:t>
+            </a:r>
+            <a:r>
+              <a:rPr sz="1500" b="0">
+                <a:solidFill>
+                  <a:srgbClr val="222222"/>
+                </a:solidFill>
+                <a:latin typeface="맑은 고딕"/>
+              </a:rPr>
+              <a:t>에만 val의 실제 점(투과율 조각)을 합성</a:t>
+            </a:r>
+          </a:p>
+          <a:p>
+            <a:pPr>
+              <a:spcAft>
+                <a:spcPts val="600"/>
+              </a:spcAft>
+            </a:pPr>
+            <a:r>
+              <a:rPr sz="1500" b="1">
+                <a:solidFill>
+                  <a:srgbClr val="2AA7B8"/>
+                </a:solidFill>
+                <a:latin typeface="맑은 고딕"/>
+              </a:rPr>
+              <a:t>• </a:t>
+            </a:r>
+            <a:r>
+              <a:rPr sz="1500" b="0">
+                <a:solidFill>
+                  <a:srgbClr val="222222"/>
+                </a:solidFill>
+                <a:latin typeface="맑은 고딕"/>
+              </a:rPr>
+              <a:t>점의 </a:t>
+            </a:r>
+            <a:r>
+              <a:rPr sz="1500" b="1">
+                <a:solidFill>
+                  <a:srgbClr val="222222"/>
+                </a:solidFill>
+                <a:latin typeface="맑은 고딕"/>
+              </a:rPr>
+              <a:t>진하기(4단계) x 크기(3단계)</a:t>
+            </a:r>
+            <a:r>
+              <a:rPr sz="1500" b="0">
+                <a:solidFill>
+                  <a:srgbClr val="222222"/>
+                </a:solidFill>
+                <a:latin typeface="맑은 고딕"/>
+              </a:rPr>
+              <a:t>를 바꿔 옅은 점까지 시험</a:t>
+            </a:r>
+          </a:p>
+          <a:p>
+            <a:pPr>
+              <a:spcAft>
+                <a:spcPts val="600"/>
+              </a:spcAft>
+            </a:pPr>
+            <a:r>
+              <a:rPr sz="1500" b="1">
+                <a:solidFill>
+                  <a:srgbClr val="2AA7B8"/>
+                </a:solidFill>
+                <a:latin typeface="맑은 고딕"/>
+              </a:rPr>
+              <a:t>• </a:t>
+            </a:r>
+            <a:r>
+              <a:rPr sz="1500" b="0">
+                <a:solidFill>
+                  <a:srgbClr val="222222"/>
+                </a:solidFill>
+                <a:latin typeface="맑은 고딕"/>
+              </a:rPr>
+              <a:t>test 바탕 386장, 점 1,436개. 실제 점 663개가 </a:t>
+            </a:r>
+            <a:r>
+              <a:rPr sz="1500" b="1">
+                <a:solidFill>
+                  <a:srgbClr val="222222"/>
+                </a:solidFill>
+                <a:latin typeface="맑은 고딕"/>
+              </a:rPr>
+              <a:t>전부 검출된 막대에 닿음</a:t>
+            </a:r>
+          </a:p>
+          <a:p>
+            <a:pPr>
+              <a:spcAft>
+                <a:spcPts val="600"/>
+              </a:spcAft>
+            </a:pPr>
+            <a:r>
+              <a:rPr sz="1500" b="1">
+                <a:solidFill>
+                  <a:srgbClr val="2AA7B8"/>
+                </a:solidFill>
+                <a:latin typeface="맑은 고딕"/>
+              </a:rPr>
+              <a:t>• </a:t>
+            </a:r>
+            <a:r>
+              <a:rPr sz="1500" b="1">
+                <a:solidFill>
+                  <a:srgbClr val="222222"/>
+                </a:solidFill>
+                <a:latin typeface="맑은 고딕"/>
+              </a:rPr>
+              <a:t>시드 42 + 이미지 이름별 시드</a:t>
+            </a:r>
+            <a:r>
+              <a:rPr sz="1500" b="0">
+                <a:solidFill>
+                  <a:srgbClr val="222222"/>
+                </a:solidFill>
+                <a:latin typeface="맑은 고딕"/>
+              </a:rPr>
+              <a:t>로 고정, 기준본과 --verify로 팀원 PC에서 같은 데이터인지 확인</a:t>
+            </a:r>
+          </a:p>
+          <a:p>
+            <a:pPr>
+              <a:spcAft>
+                <a:spcPts val="600"/>
+              </a:spcAft>
+            </a:pPr>
+            <a:r>
+              <a:rPr sz="1500" b="1">
+                <a:solidFill>
+                  <a:srgbClr val="2AA7B8"/>
+                </a:solidFill>
+                <a:latin typeface="맑은 고딕"/>
+              </a:rPr>
+              <a:t>• </a:t>
+            </a:r>
+            <a:r>
+              <a:rPr sz="1500" b="0">
+                <a:solidFill>
+                  <a:srgbClr val="222222"/>
+                </a:solidFill>
+                <a:latin typeface="맑은 고딕"/>
+              </a:rPr>
+              <a:t>합성은 실제보다 약 10%p 덜 현실적 → 절대 수치가 아닌 </a:t>
+            </a:r>
+            <a:r>
+              <a:rPr sz="1500" b="1">
+                <a:solidFill>
+                  <a:srgbClr val="222222"/>
+                </a:solidFill>
+                <a:latin typeface="맑은 고딕"/>
+              </a:rPr>
+              <a:t>상대 비교</a:t>
+            </a:r>
+          </a:p>
+        </p:txBody>
+      </p:sp>
+    </p:spTree>
+  </p:cSld>
+  <p:clrMapOvr>
+    <a:masterClrMapping/>
+  </p:clrMapOvr>
+</p:sld>
+</file>
+
+<file path=ppt/slides/slide15.xml><?xml version="1.0" encoding="utf-8"?>
+<p:sld xmlns:a="http://schemas.openxmlformats.org/drawingml/2006/main" xmlns:p="http://schemas.openxmlformats.org/presentationml/2006/main" xmlns:r="http://schemas.openxmlformats.org/officeDocument/2006/relationships">
+  <p:cSld>
+    <p:spTree>
+      <p:nvGrpSpPr>
+        <p:cNvPr id="1" name=""/>
+        <p:cNvGrpSpPr/>
+        <p:nvPr/>
+      </p:nvGrpSpPr>
+      <p:grpSpPr/>
+      <p:sp>
+        <p:nvSpPr>
+          <p:cNvPr id="2" name="Rectangle 1"/>
+          <p:cNvSpPr/>
+          <p:nvPr/>
+        </p:nvSpPr>
+        <p:spPr>
+          <a:xfrm>
+            <a:off x="0" y="0"/>
+            <a:ext cx="164592" cy="6858000"/>
+          </a:xfrm>
+          <a:prstGeom prst="rect">
+            <a:avLst/>
+          </a:prstGeom>
+          <a:solidFill>
+            <a:srgbClr val="1F3A5F"/>
+          </a:solidFill>
+          <a:ln>
+            <a:noFill/>
+          </a:ln>
+        </p:spPr>
+        <p:style>
+          <a:lnRef idx="1">
+            <a:schemeClr val="accent1"/>
+          </a:lnRef>
+          <a:fillRef idx="3">
+            <a:schemeClr val="accent1"/>
+          </a:fillRef>
+          <a:effectRef idx="2">
+            <a:schemeClr val="accent1"/>
+          </a:effectRef>
+          <a:fontRef idx="minor">
+            <a:schemeClr val="lt1"/>
+          </a:fontRef>
+        </p:style>
+        <p:txBody>
+          <a:bodyPr rtlCol="0" anchor="ctr"/>
+          <a:lstStyle/>
+          <a:p>
+            <a:pPr algn="ctr"/>
+          </a:p>
+        </p:txBody>
+      </p:sp>
+      <p:sp>
+        <p:nvSpPr>
+          <p:cNvPr id="3" name="TextBox 2"/>
+          <p:cNvSpPr txBox="1"/>
+          <p:nvPr/>
+        </p:nvSpPr>
+        <p:spPr>
+          <a:xfrm>
+            <a:off x="502920" y="274320"/>
+            <a:ext cx="11185855" cy="731520"/>
+          </a:xfrm>
+          <a:prstGeom prst="rect">
+            <a:avLst/>
+          </a:prstGeom>
+          <a:noFill/>
+        </p:spPr>
+        <p:txBody>
+          <a:bodyPr wrap="square" anchor="ctr" lIns="45720" rIns="45720">
+            <a:spAutoFit/>
+          </a:bodyPr>
+          <a:lstStyle/>
+          <a:p>
+            <a:pPr algn="l"/>
+            <a:r>
+              <a:rPr sz="2800" b="1">
+                <a:solidFill>
+                  <a:srgbClr val="1F3A5F"/>
+                </a:solidFill>
+                <a:latin typeface="맑은 고딕"/>
+              </a:rPr>
+              <a:t>합성 점 조건별 확대</a:t>
+            </a:r>
+          </a:p>
+        </p:txBody>
+      </p:sp>
+      <p:sp>
+        <p:nvSpPr>
+          <p:cNvPr id="4" name="TextBox 3"/>
+          <p:cNvSpPr txBox="1"/>
+          <p:nvPr/>
+        </p:nvSpPr>
+        <p:spPr>
+          <a:xfrm>
+            <a:off x="502920" y="1005840"/>
+            <a:ext cx="11185855" cy="640080"/>
+          </a:xfrm>
+          <a:prstGeom prst="rect">
+            <a:avLst/>
+          </a:prstGeom>
+          <a:noFill/>
+        </p:spPr>
+        <p:txBody>
+          <a:bodyPr wrap="square" anchor="t" lIns="45720" rIns="45720">
+            <a:spAutoFit/>
+          </a:bodyPr>
+          <a:lstStyle/>
+          <a:p>
+            <a:pPr algn="l"/>
+            <a:r>
+              <a:rPr sz="1800" b="1">
+                <a:solidFill>
+                  <a:srgbClr val="2AA7B8"/>
+                </a:solidFill>
+                <a:latin typeface="맑은 고딕"/>
+              </a:rPr>
+              <a:t>진하기(s)와 크기(f)를 바꾸면 대비가 달라지고, 대비가 낮을수록 눈에도 안 보인다</a:t>
+            </a:r>
+          </a:p>
+        </p:txBody>
+      </p:sp>
+      <p:sp>
+        <p:nvSpPr>
+          <p:cNvPr id="5" name="TextBox 4"/>
+          <p:cNvSpPr txBox="1"/>
+          <p:nvPr/>
+        </p:nvSpPr>
+        <p:spPr>
+          <a:xfrm>
+            <a:off x="11094415" y="6400800"/>
+            <a:ext cx="822960" cy="320040"/>
+          </a:xfrm>
+          <a:prstGeom prst="rect">
+            <a:avLst/>
+          </a:prstGeom>
+          <a:noFill/>
+        </p:spPr>
+        <p:txBody>
+          <a:bodyPr wrap="square" anchor="t" lIns="45720" rIns="45720">
+            <a:spAutoFit/>
+          </a:bodyPr>
+          <a:lstStyle/>
+          <a:p>
+            <a:pPr algn="r"/>
+            <a:r>
+              <a:rPr sz="1200" b="0">
+                <a:solidFill>
+                  <a:srgbClr val="555B66"/>
+                </a:solidFill>
+                <a:latin typeface="맑은 고딕"/>
+              </a:rPr>
+              <a:t>15</a:t>
+            </a:r>
+          </a:p>
+        </p:txBody>
+      </p:sp>
+      <p:pic>
+        <p:nvPicPr>
+          <p:cNvPr id="6" name="Picture 5" descr="fig3n_synth_dots.png"/>
+          <p:cNvPicPr>
+            <a:picLocks noChangeAspect="1"/>
+          </p:cNvPicPr>
+          <p:nvPr/>
+        </p:nvPicPr>
+        <p:blipFill>
+          <a:blip r:embed="rId2"/>
+          <a:stretch>
+            <a:fillRect/>
+          </a:stretch>
+        </p:blipFill>
+        <p:spPr>
+          <a:xfrm>
+            <a:off x="1309254" y="1600200"/>
+            <a:ext cx="9543010" cy="3749039"/>
+          </a:xfrm>
+          <a:prstGeom prst="rect">
+            <a:avLst/>
+          </a:prstGeom>
+        </p:spPr>
+      </p:pic>
+      <p:sp>
+        <p:nvSpPr>
+          <p:cNvPr id="7" name="TextBox 6"/>
+          <p:cNvSpPr txBox="1"/>
+          <p:nvPr/>
+        </p:nvSpPr>
+        <p:spPr>
+          <a:xfrm>
+            <a:off x="731520" y="5440680"/>
+            <a:ext cx="10789920" cy="1280160"/>
+          </a:xfrm>
+          <a:prstGeom prst="rect">
+            <a:avLst/>
+          </a:prstGeom>
+          <a:noFill/>
+        </p:spPr>
+        <p:txBody>
+          <a:bodyPr wrap="square" lIns="45720" rIns="45720">
+            <a:spAutoFit/>
+          </a:bodyPr>
+          <a:lstStyle/>
+          <a:p>
+            <a:pPr>
+              <a:spcAft>
+                <a:spcPts val="600"/>
+              </a:spcAft>
+            </a:pPr>
+            <a:r>
+              <a:rPr sz="1500" b="1">
+                <a:solidFill>
+                  <a:srgbClr val="2AA7B8"/>
+                </a:solidFill>
+                <a:latin typeface="맑은 고딕"/>
+              </a:rPr>
+              <a:t>• </a:t>
+            </a:r>
+            <a:r>
+              <a:rPr sz="1500" b="0">
+                <a:solidFill>
+                  <a:srgbClr val="222222"/>
+                </a:solidFill>
+                <a:latin typeface="맑은 고딕"/>
+              </a:rPr>
+              <a:t>s = 깊이 배율(1.0이 실제 점 세기), f = 크기 배율, 대비 = 둘레 밝기 − 점 밝기. 40x40px를 7배 확대</a:t>
+            </a:r>
+          </a:p>
+          <a:p>
+            <a:pPr>
+              <a:spcAft>
+                <a:spcPts val="600"/>
+              </a:spcAft>
+            </a:pPr>
+            <a:r>
+              <a:rPr sz="1500" b="1">
+                <a:solidFill>
+                  <a:srgbClr val="2AA7B8"/>
+                </a:solidFill>
+                <a:latin typeface="맑은 고딕"/>
+              </a:rPr>
+              <a:t>• </a:t>
+            </a:r>
+            <a:r>
+              <a:rPr sz="1500" b="0">
+                <a:solidFill>
+                  <a:srgbClr val="222222"/>
+                </a:solidFill>
+                <a:latin typeface="맑은 고딕"/>
+              </a:rPr>
+              <a:t>대비 6 미만은 거의 보이지 않고 모든 모델이 못 찾는다. 실제 test 점의 대비 중앙값은 22.8이라 s=1.0 근처가 실제 수준이다</a:t>
+            </a:r>
+          </a:p>
+        </p:txBody>
+      </p:sp>
+    </p:spTree>
+  </p:cSld>
+  <p:clrMapOvr>
+    <a:masterClrMapping/>
+  </p:clrMapOvr>
+</p:sld>
+</file>
+
+<file path=ppt/slides/slide16.xml><?xml version="1.0" encoding="utf-8"?>
+<p:sld xmlns:a="http://schemas.openxmlformats.org/drawingml/2006/main" xmlns:p="http://schemas.openxmlformats.org/presentationml/2006/main" xmlns:r="http://schemas.openxmlformats.org/officeDocument/2006/relationships">
+  <p:cSld>
+    <p:spTree>
+      <p:nvGrpSpPr>
+        <p:cNvPr id="1" name=""/>
+        <p:cNvGrpSpPr/>
+        <p:nvPr/>
+      </p:nvGrpSpPr>
+      <p:grpSpPr/>
+      <p:sp>
+        <p:nvSpPr>
+          <p:cNvPr id="2" name="Rectangle 1"/>
+          <p:cNvSpPr/>
+          <p:nvPr/>
+        </p:nvSpPr>
+        <p:spPr>
+          <a:xfrm>
+            <a:off x="0" y="0"/>
+            <a:ext cx="164592" cy="6858000"/>
+          </a:xfrm>
+          <a:prstGeom prst="rect">
+            <a:avLst/>
+          </a:prstGeom>
+          <a:solidFill>
+            <a:srgbClr val="1F3A5F"/>
+          </a:solidFill>
+          <a:ln>
+            <a:noFill/>
+          </a:ln>
+        </p:spPr>
+        <p:style>
+          <a:lnRef idx="1">
+            <a:schemeClr val="accent1"/>
+          </a:lnRef>
+          <a:fillRef idx="3">
+            <a:schemeClr val="accent1"/>
+          </a:fillRef>
+          <a:effectRef idx="2">
+            <a:schemeClr val="accent1"/>
+          </a:effectRef>
+          <a:fontRef idx="minor">
+            <a:schemeClr val="lt1"/>
+          </a:fontRef>
+        </p:style>
+        <p:txBody>
+          <a:bodyPr rtlCol="0" anchor="ctr"/>
+          <a:lstStyle/>
+          <a:p>
+            <a:pPr algn="ctr"/>
+          </a:p>
+        </p:txBody>
+      </p:sp>
+      <p:sp>
+        <p:nvSpPr>
+          <p:cNvPr id="3" name="TextBox 2"/>
+          <p:cNvSpPr txBox="1"/>
+          <p:nvPr/>
+        </p:nvSpPr>
+        <p:spPr>
+          <a:xfrm>
+            <a:off x="502920" y="274320"/>
+            <a:ext cx="11185855" cy="731520"/>
+          </a:xfrm>
+          <a:prstGeom prst="rect">
+            <a:avLst/>
+          </a:prstGeom>
+          <a:noFill/>
+        </p:spPr>
+        <p:txBody>
+          <a:bodyPr wrap="square" anchor="ctr" lIns="45720" rIns="45720">
+            <a:spAutoFit/>
+          </a:bodyPr>
+          <a:lstStyle/>
+          <a:p>
+            <a:pPr algn="l"/>
+            <a:r>
+              <a:rPr sz="2800" b="1">
+                <a:solidFill>
+                  <a:srgbClr val="1F3A5F"/>
+                </a:solidFill>
+                <a:latin typeface="맑은 고딕"/>
+              </a:rPr>
+              <a:t>합성 점 결과: 옅은 점이 미탐지 조건이다</a:t>
+            </a:r>
+          </a:p>
+        </p:txBody>
+      </p:sp>
+      <p:sp>
+        <p:nvSpPr>
+          <p:cNvPr id="4" name="TextBox 3"/>
+          <p:cNvSpPr txBox="1"/>
+          <p:nvPr/>
+        </p:nvSpPr>
+        <p:spPr>
+          <a:xfrm>
+            <a:off x="502920" y="1005840"/>
+            <a:ext cx="11185855" cy="640080"/>
+          </a:xfrm>
+          <a:prstGeom prst="rect">
+            <a:avLst/>
+          </a:prstGeom>
+          <a:noFill/>
+        </p:spPr>
+        <p:txBody>
+          <a:bodyPr wrap="square" anchor="t" lIns="45720" rIns="45720">
+            <a:spAutoFit/>
+          </a:bodyPr>
+          <a:lstStyle/>
+          <a:p>
+            <a:pPr algn="l"/>
+            <a:r>
+              <a:rPr sz="1800" b="1">
+                <a:solidFill>
+                  <a:srgbClr val="2AA7B8"/>
+                </a:solidFill>
+                <a:latin typeface="맑은 고딕"/>
+              </a:rPr>
+              <a:t>val 임계값에서는 D-FINE-N이 앞서지만 대부분 느슨한 임계값 효과, 맞추면 차이가 줄어든다</a:t>
+            </a:r>
+          </a:p>
+        </p:txBody>
+      </p:sp>
+      <p:sp>
+        <p:nvSpPr>
+          <p:cNvPr id="5" name="TextBox 4"/>
+          <p:cNvSpPr txBox="1"/>
+          <p:nvPr/>
+        </p:nvSpPr>
+        <p:spPr>
+          <a:xfrm>
+            <a:off x="11094415" y="6400800"/>
+            <a:ext cx="822960" cy="320040"/>
+          </a:xfrm>
+          <a:prstGeom prst="rect">
+            <a:avLst/>
+          </a:prstGeom>
+          <a:noFill/>
+        </p:spPr>
+        <p:txBody>
+          <a:bodyPr wrap="square" anchor="t" lIns="45720" rIns="45720">
+            <a:spAutoFit/>
+          </a:bodyPr>
+          <a:lstStyle/>
+          <a:p>
+            <a:pPr algn="r"/>
+            <a:r>
+              <a:rPr sz="1200" b="0">
+                <a:solidFill>
+                  <a:srgbClr val="555B66"/>
+                </a:solidFill>
+                <a:latin typeface="맑은 고딕"/>
+              </a:rPr>
+              <a:t>16</a:t>
+            </a:r>
+          </a:p>
+        </p:txBody>
+      </p:sp>
+      <p:sp>
+        <p:nvSpPr>
+          <p:cNvPr id="6" name="TextBox 5"/>
+          <p:cNvSpPr txBox="1"/>
+          <p:nvPr/>
+        </p:nvSpPr>
+        <p:spPr>
+          <a:xfrm>
+            <a:off x="502920" y="6355080"/>
+            <a:ext cx="10180015" cy="365760"/>
+          </a:xfrm>
+          <a:prstGeom prst="rect">
+            <a:avLst/>
+          </a:prstGeom>
+          <a:noFill/>
+        </p:spPr>
+        <p:txBody>
+          <a:bodyPr wrap="square" anchor="t" lIns="45720" rIns="45720">
+            <a:spAutoFit/>
+          </a:bodyPr>
+          <a:lstStyle/>
+          <a:p>
+            <a:pPr algn="l"/>
+            <a:r>
+              <a:rPr sz="1100" b="0">
+                <a:solidFill>
+                  <a:srgbClr val="555B66"/>
+                </a:solidFill>
+                <a:latin typeface="맑은 고딕"/>
+              </a:rPr>
+              <a:t>합성 점 시험은 test 이미지가 바탕이며 참고용이다. 합성 점 AP와 오경보 예산 비교는 합성 이미지 자체로 계산한 분석용 수치다.</a:t>
+            </a:r>
+          </a:p>
+        </p:txBody>
+      </p:sp>
+      <p:pic>
+        <p:nvPicPr>
+          <p:cNvPr id="7" name="Picture 6" descr="fig3k_compare6.png"/>
+          <p:cNvPicPr>
+            <a:picLocks noChangeAspect="1"/>
+          </p:cNvPicPr>
+          <p:nvPr/>
+        </p:nvPicPr>
+        <p:blipFill>
+          <a:blip r:embed="rId2"/>
+          <a:stretch>
+            <a:fillRect/>
+          </a:stretch>
+        </p:blipFill>
+        <p:spPr>
+          <a:xfrm>
+            <a:off x="547460" y="1645919"/>
+            <a:ext cx="11066599" cy="3383280"/>
+          </a:xfrm>
+          <a:prstGeom prst="rect">
+            <a:avLst/>
+          </a:prstGeom>
+        </p:spPr>
+      </p:pic>
+      <p:sp>
+        <p:nvSpPr>
+          <p:cNvPr id="8" name="TextBox 7"/>
+          <p:cNvSpPr txBox="1"/>
+          <p:nvPr/>
+        </p:nvSpPr>
+        <p:spPr>
+          <a:xfrm>
+            <a:off x="640080" y="4983480"/>
+            <a:ext cx="10972800" cy="1645920"/>
+          </a:xfrm>
+          <a:prstGeom prst="rect">
+            <a:avLst/>
+          </a:prstGeom>
+          <a:noFill/>
+        </p:spPr>
+        <p:txBody>
+          <a:bodyPr wrap="square" lIns="45720" rIns="45720">
+            <a:spAutoFit/>
+          </a:bodyPr>
+          <a:lstStyle/>
+          <a:p>
+            <a:pPr>
+              <a:spcAft>
+                <a:spcPts val="300"/>
+              </a:spcAft>
+            </a:pPr>
+            <a:r>
+              <a:rPr sz="1500" b="1">
+                <a:solidFill>
+                  <a:srgbClr val="2AA7B8"/>
+                </a:solidFill>
+                <a:latin typeface="맑은 고딕"/>
+              </a:rPr>
+              <a:t>• </a:t>
+            </a:r>
+            <a:r>
+              <a:rPr sz="1500" b="0">
+                <a:solidFill>
+                  <a:srgbClr val="222222"/>
+                </a:solidFill>
+                <a:latin typeface="맑은 고딕"/>
+              </a:rPr>
+              <a:t>대비(둘레-점 밝기) 6 미만은 모든 모델이 거의 0%, 20 이상에서 약 77~89%</a:t>
+            </a:r>
+          </a:p>
+          <a:p>
+            <a:pPr>
+              <a:spcAft>
+                <a:spcPts val="300"/>
+              </a:spcAft>
+            </a:pPr>
+            <a:r>
+              <a:rPr sz="1500" b="1">
+                <a:solidFill>
+                  <a:srgbClr val="2AA7B8"/>
+                </a:solidFill>
+                <a:latin typeface="맑은 고딕"/>
+              </a:rPr>
+              <a:t>• </a:t>
+            </a:r>
+            <a:r>
+              <a:rPr sz="1500" b="0">
+                <a:solidFill>
+                  <a:srgbClr val="222222"/>
+                </a:solidFill>
+                <a:latin typeface="맑은 고딕"/>
+              </a:rPr>
+              <a:t>임계값과 무관한 합성 점 AP: </a:t>
+            </a:r>
+            <a:r>
+              <a:rPr sz="1500" b="1">
+                <a:solidFill>
+                  <a:srgbClr val="222222"/>
+                </a:solidFill>
+                <a:latin typeface="맑은 고딕"/>
+              </a:rPr>
+              <a:t>D-FINE-N 0.574 ≈ R50 0.567</a:t>
+            </a:r>
+            <a:r>
+              <a:rPr sz="1500" b="0">
+                <a:solidFill>
+                  <a:srgbClr val="222222"/>
+                </a:solidFill>
+                <a:latin typeface="맑은 고딕"/>
+              </a:rPr>
+              <a:t> &gt; YOLOv3-tiny 0.515 ≈ YOLO26n 0.501 &gt; RT-DETR-l 0.451 &gt;&gt; </a:t>
+            </a:r>
+            <a:r>
+              <a:rPr sz="1500" b="1">
+                <a:solidFill>
+                  <a:srgbClr val="222222"/>
+                </a:solidFill>
+                <a:latin typeface="맑은 고딕"/>
+              </a:rPr>
+              <a:t>MobileNetV3 0.262</a:t>
+            </a:r>
+          </a:p>
+          <a:p>
+            <a:pPr>
+              <a:spcAft>
+                <a:spcPts val="300"/>
+              </a:spcAft>
+            </a:pPr>
+            <a:r>
+              <a:rPr sz="1500" b="1">
+                <a:solidFill>
+                  <a:srgbClr val="2AA7B8"/>
+                </a:solidFill>
+                <a:latin typeface="맑은 고딕"/>
+              </a:rPr>
+              <a:t>• </a:t>
+            </a:r>
+            <a:r>
+              <a:rPr sz="1500" b="0">
+                <a:solidFill>
+                  <a:srgbClr val="222222"/>
+                </a:solidFill>
+                <a:latin typeface="맑은 고딕"/>
+              </a:rPr>
+              <a:t>3호기(대비 14 이상): MobileNetV3 4%, YOLO26n·RT-DETR-l 약 61%, R50·YOLOv3-tiny·D-FINE-N은 호기 차이가 작음</a:t>
+            </a:r>
+          </a:p>
+        </p:txBody>
+      </p:sp>
+    </p:spTree>
+  </p:cSld>
+  <p:clrMapOvr>
+    <a:masterClrMapping/>
+  </p:clrMapOvr>
+</p:sld>
+</file>
+
+<file path=ppt/slides/slide17.xml><?xml version="1.0" encoding="utf-8"?>
+<p:sld xmlns:a="http://schemas.openxmlformats.org/drawingml/2006/main" xmlns:p="http://schemas.openxmlformats.org/presentationml/2006/main" xmlns:r="http://schemas.openxmlformats.org/officeDocument/2006/relationships">
+  <p:cSld>
+    <p:spTree>
+      <p:nvGrpSpPr>
+        <p:cNvPr id="1" name=""/>
+        <p:cNvGrpSpPr/>
+        <p:nvPr/>
+      </p:nvGrpSpPr>
+      <p:grpSpPr/>
+      <p:sp>
+        <p:nvSpPr>
+          <p:cNvPr id="2" name="Rectangle 1"/>
+          <p:cNvSpPr/>
+          <p:nvPr/>
+        </p:nvSpPr>
+        <p:spPr>
+          <a:xfrm>
+            <a:off x="0" y="0"/>
+            <a:ext cx="164592" cy="6858000"/>
+          </a:xfrm>
+          <a:prstGeom prst="rect">
+            <a:avLst/>
+          </a:prstGeom>
+          <a:solidFill>
+            <a:srgbClr val="1F3A5F"/>
+          </a:solidFill>
+          <a:ln>
+            <a:noFill/>
+          </a:ln>
+        </p:spPr>
+        <p:style>
+          <a:lnRef idx="1">
+            <a:schemeClr val="accent1"/>
+          </a:lnRef>
+          <a:fillRef idx="3">
+            <a:schemeClr val="accent1"/>
+          </a:fillRef>
+          <a:effectRef idx="2">
+            <a:schemeClr val="accent1"/>
+          </a:effectRef>
+          <a:fontRef idx="minor">
+            <a:schemeClr val="lt1"/>
+          </a:fontRef>
+        </p:style>
+        <p:txBody>
+          <a:bodyPr rtlCol="0" anchor="ctr"/>
+          <a:lstStyle/>
+          <a:p>
+            <a:pPr algn="ctr"/>
+          </a:p>
+        </p:txBody>
+      </p:sp>
+      <p:sp>
+        <p:nvSpPr>
+          <p:cNvPr id="3" name="TextBox 2"/>
+          <p:cNvSpPr txBox="1"/>
+          <p:nvPr/>
+        </p:nvSpPr>
+        <p:spPr>
+          <a:xfrm>
+            <a:off x="502920" y="274320"/>
+            <a:ext cx="11185855" cy="731520"/>
+          </a:xfrm>
+          <a:prstGeom prst="rect">
+            <a:avLst/>
+          </a:prstGeom>
+          <a:noFill/>
+        </p:spPr>
+        <p:txBody>
+          <a:bodyPr wrap="square" anchor="ctr" lIns="45720" rIns="45720">
+            <a:spAutoFit/>
+          </a:bodyPr>
+          <a:lstStyle/>
+          <a:p>
+            <a:pPr algn="l"/>
+            <a:r>
+              <a:rPr sz="2800" b="1">
+                <a:solidFill>
+                  <a:srgbClr val="1F3A5F"/>
+                </a:solidFill>
+                <a:latin typeface="맑은 고딕"/>
+              </a:rPr>
+              <a:t>호기·해상도: 뚜렷한 효과는 확인되지 않았다</a:t>
+            </a:r>
+          </a:p>
+        </p:txBody>
+      </p:sp>
+      <p:sp>
+        <p:nvSpPr>
+          <p:cNvPr id="4" name="TextBox 3"/>
+          <p:cNvSpPr txBox="1"/>
+          <p:nvPr/>
+        </p:nvSpPr>
+        <p:spPr>
+          <a:xfrm>
+            <a:off x="502920" y="1005840"/>
+            <a:ext cx="11185855" cy="640080"/>
+          </a:xfrm>
+          <a:prstGeom prst="rect">
+            <a:avLst/>
+          </a:prstGeom>
+          <a:noFill/>
+        </p:spPr>
+        <p:txBody>
+          <a:bodyPr wrap="square" anchor="t" lIns="45720" rIns="45720">
+            <a:spAutoFit/>
+          </a:bodyPr>
+          <a:lstStyle/>
+          <a:p>
+            <a:pPr algn="l"/>
+            <a:r>
+              <a:rPr sz="1800" b="1">
+                <a:solidFill>
+                  <a:srgbClr val="2AA7B8"/>
+                </a:solidFill>
+                <a:latin typeface="맑은 고딕"/>
+              </a:rPr>
+              <a:t>가장 낮은 그룹은 공식 라벨 박스가 76%여서 IoU 점수가 낮을 뿐이다</a:t>
+            </a:r>
+          </a:p>
+        </p:txBody>
+      </p:sp>
+      <p:sp>
+        <p:nvSpPr>
+          <p:cNvPr id="5" name="TextBox 4"/>
+          <p:cNvSpPr txBox="1"/>
+          <p:nvPr/>
+        </p:nvSpPr>
+        <p:spPr>
+          <a:xfrm>
+            <a:off x="11094415" y="6400800"/>
+            <a:ext cx="822960" cy="320040"/>
+          </a:xfrm>
+          <a:prstGeom prst="rect">
+            <a:avLst/>
+          </a:prstGeom>
+          <a:noFill/>
+        </p:spPr>
+        <p:txBody>
+          <a:bodyPr wrap="square" anchor="t" lIns="45720" rIns="45720">
+            <a:spAutoFit/>
+          </a:bodyPr>
+          <a:lstStyle/>
+          <a:p>
+            <a:pPr algn="r"/>
+            <a:r>
+              <a:rPr sz="1200" b="0">
+                <a:solidFill>
+                  <a:srgbClr val="555B66"/>
+                </a:solidFill>
+                <a:latin typeface="맑은 고딕"/>
+              </a:rPr>
+              <a:t>17</a:t>
+            </a:r>
+          </a:p>
+        </p:txBody>
+      </p:sp>
+      <p:pic>
+        <p:nvPicPr>
+          <p:cNvPr id="6" name="Picture 5" descr="fig3f_groups_chart.png"/>
+          <p:cNvPicPr>
+            <a:picLocks noChangeAspect="1"/>
+          </p:cNvPicPr>
+          <p:nvPr/>
+        </p:nvPicPr>
+        <p:blipFill>
+          <a:blip r:embed="rId2"/>
+          <a:stretch>
+            <a:fillRect/>
+          </a:stretch>
+        </p:blipFill>
+        <p:spPr>
+          <a:xfrm>
+            <a:off x="550398" y="1554480"/>
+            <a:ext cx="11060723" cy="3383279"/>
+          </a:xfrm>
+          <a:prstGeom prst="rect">
+            <a:avLst/>
+          </a:prstGeom>
+        </p:spPr>
+      </p:pic>
+      <p:sp>
+        <p:nvSpPr>
+          <p:cNvPr id="7" name="TextBox 6"/>
+          <p:cNvSpPr txBox="1"/>
+          <p:nvPr/>
+        </p:nvSpPr>
+        <p:spPr>
+          <a:xfrm>
+            <a:off x="731520" y="5029200"/>
+            <a:ext cx="10789920" cy="1645920"/>
+          </a:xfrm>
+          <a:prstGeom prst="rect">
+            <a:avLst/>
+          </a:prstGeom>
+          <a:noFill/>
+        </p:spPr>
+        <p:txBody>
+          <a:bodyPr wrap="square" lIns="45720" rIns="45720">
+            <a:spAutoFit/>
+          </a:bodyPr>
+          <a:lstStyle/>
+          <a:p>
+            <a:pPr>
+              <a:spcAft>
+                <a:spcPts val="800"/>
+              </a:spcAft>
+            </a:pPr>
+            <a:r>
+              <a:rPr sz="1600" b="1">
+                <a:solidFill>
+                  <a:srgbClr val="2AA7B8"/>
+                </a:solidFill>
+                <a:latin typeface="맑은 고딕"/>
+              </a:rPr>
+              <a:t>• </a:t>
+            </a:r>
+            <a:r>
+              <a:rPr sz="1600" b="0">
+                <a:solidFill>
+                  <a:srgbClr val="222222"/>
+                </a:solidFill>
+                <a:latin typeface="맑은 고딕"/>
+              </a:rPr>
+              <a:t>해상도별 공식 라벨 박스 비율이 10~76%로 달라 라벨 구성이 섞인다. 공식 라벨 이미지끼리만 비교하면 F1이 0.956~0.977로 좁아지고 구간이 겹친다</a:t>
+            </a:r>
+          </a:p>
+          <a:p>
+            <a:pPr>
+              <a:spcAft>
+                <a:spcPts val="800"/>
+              </a:spcAft>
+            </a:pPr>
+            <a:r>
+              <a:rPr sz="1600" b="1">
+                <a:solidFill>
+                  <a:srgbClr val="2AA7B8"/>
+                </a:solidFill>
+                <a:latin typeface="맑은 고딕"/>
+              </a:rPr>
+              <a:t>• </a:t>
+            </a:r>
+            <a:r>
+              <a:rPr sz="1600" b="0">
+                <a:solidFill>
+                  <a:srgbClr val="222222"/>
+                </a:solidFill>
+                <a:latin typeface="맑은 고딕"/>
+              </a:rPr>
+              <a:t>그룹별 표본이 작다(공식 라벨 이미지 호기별 20~36장). 합성 점에서 보인 3호기 약점은 </a:t>
+            </a:r>
+            <a:r>
+              <a:rPr sz="1600" b="1">
+                <a:solidFill>
+                  <a:srgbClr val="222222"/>
+                </a:solidFill>
+                <a:latin typeface="맑은 고딕"/>
+              </a:rPr>
+              <a:t>모델에 따라</a:t>
+            </a:r>
+            <a:r>
+              <a:rPr sz="1600" b="0">
+                <a:solidFill>
+                  <a:srgbClr val="222222"/>
+                </a:solidFill>
+                <a:latin typeface="맑은 고딕"/>
+              </a:rPr>
+              <a:t> 다르다(앞 슬라이드)</a:t>
+            </a:r>
+          </a:p>
+        </p:txBody>
+      </p:sp>
+    </p:spTree>
+  </p:cSld>
+  <p:clrMapOvr>
+    <a:masterClrMapping/>
+  </p:clrMapOvr>
+</p:sld>
+</file>
+
+<file path=ppt/slides/slide18.xml><?xml version="1.0" encoding="utf-8"?>
+<p:sld xmlns:a="http://schemas.openxmlformats.org/drawingml/2006/main" xmlns:p="http://schemas.openxmlformats.org/presentationml/2006/main" xmlns:r="http://schemas.openxmlformats.org/officeDocument/2006/relationships">
+  <p:cSld>
+    <p:spTree>
+      <p:nvGrpSpPr>
+        <p:cNvPr id="1" name=""/>
+        <p:cNvGrpSpPr/>
+        <p:nvPr/>
+      </p:nvGrpSpPr>
+      <p:grpSpPr/>
+      <p:sp>
+        <p:nvSpPr>
+          <p:cNvPr id="2" name="Rectangle 1"/>
+          <p:cNvSpPr/>
+          <p:nvPr/>
+        </p:nvSpPr>
+        <p:spPr>
+          <a:xfrm>
+            <a:off x="0" y="0"/>
+            <a:ext cx="164592" cy="6858000"/>
+          </a:xfrm>
+          <a:prstGeom prst="rect">
+            <a:avLst/>
+          </a:prstGeom>
+          <a:solidFill>
+            <a:srgbClr val="1F3A5F"/>
+          </a:solidFill>
+          <a:ln>
+            <a:noFill/>
+          </a:ln>
+        </p:spPr>
+        <p:style>
+          <a:lnRef idx="1">
+            <a:schemeClr val="accent1"/>
+          </a:lnRef>
+          <a:fillRef idx="3">
+            <a:schemeClr val="accent1"/>
+          </a:fillRef>
+          <a:effectRef idx="2">
+            <a:schemeClr val="accent1"/>
+          </a:effectRef>
+          <a:fontRef idx="minor">
+            <a:schemeClr val="lt1"/>
+          </a:fontRef>
+        </p:style>
+        <p:txBody>
+          <a:bodyPr rtlCol="0" anchor="ctr"/>
+          <a:lstStyle/>
+          <a:p>
+            <a:pPr algn="ctr"/>
+          </a:p>
+        </p:txBody>
+      </p:sp>
+      <p:sp>
+        <p:nvSpPr>
+          <p:cNvPr id="3" name="TextBox 2"/>
+          <p:cNvSpPr txBox="1"/>
+          <p:nvPr/>
+        </p:nvSpPr>
+        <p:spPr>
+          <a:xfrm>
+            <a:off x="502920" y="274320"/>
+            <a:ext cx="11185855" cy="731520"/>
+          </a:xfrm>
+          <a:prstGeom prst="rect">
+            <a:avLst/>
+          </a:prstGeom>
+          <a:noFill/>
+        </p:spPr>
+        <p:txBody>
+          <a:bodyPr wrap="square" anchor="ctr" lIns="45720" rIns="45720">
+            <a:spAutoFit/>
+          </a:bodyPr>
+          <a:lstStyle/>
+          <a:p>
+            <a:pPr algn="l"/>
+            <a:r>
+              <a:rPr sz="2800" b="1">
+                <a:solidFill>
+                  <a:srgbClr val="1F3A5F"/>
+                </a:solidFill>
+                <a:latin typeface="맑은 고딕"/>
+              </a:rPr>
+              <a:t>③ 종합: 모델별 성적표</a:t>
+            </a:r>
+          </a:p>
+        </p:txBody>
+      </p:sp>
+      <p:sp>
+        <p:nvSpPr>
+          <p:cNvPr id="4" name="TextBox 3"/>
+          <p:cNvSpPr txBox="1"/>
+          <p:nvPr/>
+        </p:nvSpPr>
+        <p:spPr>
+          <a:xfrm>
+            <a:off x="502920" y="1005840"/>
+            <a:ext cx="11185855" cy="640080"/>
+          </a:xfrm>
+          <a:prstGeom prst="rect">
+            <a:avLst/>
+          </a:prstGeom>
+          <a:noFill/>
+        </p:spPr>
+        <p:txBody>
+          <a:bodyPr wrap="square" anchor="t" lIns="45720" rIns="45720">
+            <a:spAutoFit/>
+          </a:bodyPr>
+          <a:lstStyle/>
+          <a:p>
+            <a:pPr algn="l"/>
+            <a:r>
+              <a:rPr sz="1800" b="1">
+                <a:solidFill>
+                  <a:srgbClr val="2AA7B8"/>
+                </a:solidFill>
+                <a:latin typeface="맑은 고딕"/>
+              </a:rPr>
+              <a:t>한 모델이 모든 항목에서 1등은 아니다</a:t>
+            </a:r>
+          </a:p>
+        </p:txBody>
+      </p:sp>
+      <p:sp>
+        <p:nvSpPr>
+          <p:cNvPr id="5" name="TextBox 4"/>
+          <p:cNvSpPr txBox="1"/>
+          <p:nvPr/>
+        </p:nvSpPr>
+        <p:spPr>
+          <a:xfrm>
+            <a:off x="11094415" y="6400800"/>
+            <a:ext cx="822960" cy="320040"/>
+          </a:xfrm>
+          <a:prstGeom prst="rect">
+            <a:avLst/>
+          </a:prstGeom>
+          <a:noFill/>
+        </p:spPr>
+        <p:txBody>
+          <a:bodyPr wrap="square" anchor="t" lIns="45720" rIns="45720">
+            <a:spAutoFit/>
+          </a:bodyPr>
+          <a:lstStyle/>
+          <a:p>
+            <a:pPr algn="r"/>
+            <a:r>
+              <a:rPr sz="1200" b="0">
+                <a:solidFill>
+                  <a:srgbClr val="555B66"/>
+                </a:solidFill>
+                <a:latin typeface="맑은 고딕"/>
+              </a:rPr>
+              <a:t>18</a:t>
             </a:r>
           </a:p>
         </p:txBody>
@@ -6126,7 +7708,7 @@
 </p:sld>
 </file>
 
-<file path=ppt/slides/slide15.xml><?xml version="1.0" encoding="utf-8"?>
+<file path=ppt/slides/slide19.xml><?xml version="1.0" encoding="utf-8"?>
 <p:sld xmlns:a="http://schemas.openxmlformats.org/drawingml/2006/main" xmlns:p="http://schemas.openxmlformats.org/presentationml/2006/main" xmlns:r="http://schemas.openxmlformats.org/officeDocument/2006/relationships">
   <p:cSld>
     <p:spTree>
@@ -6279,7 +7861,7 @@
                 </a:solidFill>
                 <a:latin typeface="맑은 고딕"/>
               </a:rPr>
-              <a:t>15</a:t>
+              <a:t>19</a:t>
             </a:r>
           </a:p>
         </p:txBody>
@@ -6319,16 +7901,40 @@
           </a:p>
         </p:txBody>
       </p:sp>
-      <p:sp>
-        <p:nvSpPr>
-          <p:cNvPr id="7" name="TextBox 6"/>
+      <p:pic>
+        <p:nvPicPr>
+          <p:cNvPr id="7" name="Picture 6" descr="fig5e_select_ci.png"/>
+          <p:cNvPicPr>
+            <a:picLocks noChangeAspect="1"/>
+          </p:cNvPicPr>
+          <p:nvPr/>
+        </p:nvPicPr>
+        <p:blipFill>
+          <a:blip r:embed="rId2"/>
+          <a:stretch>
+            <a:fillRect/>
+          </a:stretch>
+        </p:blipFill>
+        <p:spPr>
+          <a:xfrm>
+            <a:off x="274320" y="1590775"/>
+            <a:ext cx="7863840" cy="2899209"/>
+          </a:xfrm>
+          <a:prstGeom prst="rect">
+            <a:avLst/>
+          </a:prstGeom>
+        </p:spPr>
+      </p:pic>
+      <p:sp>
+        <p:nvSpPr>
+          <p:cNvPr id="8" name="TextBox 7"/>
           <p:cNvSpPr txBox="1"/>
           <p:nvPr/>
         </p:nvSpPr>
         <p:spPr>
           <a:xfrm>
-            <a:off x="548640" y="1783080"/>
-            <a:ext cx="6949440" cy="4572000"/>
+            <a:off x="8229600" y="1691640"/>
+            <a:ext cx="3657600" cy="3017520"/>
           </a:xfrm>
           <a:prstGeom prst="rect">
             <a:avLst/>
@@ -6343,11 +7949,11 @@
           <a:p>
             <a:pPr>
               <a:spcAft>
-                <a:spcPts val="1000"/>
+                <a:spcPts val="800"/>
               </a:spcAft>
             </a:pPr>
             <a:r>
-              <a:rPr sz="1500" b="1">
+              <a:rPr sz="1400" b="1">
                 <a:solidFill>
                   <a:srgbClr val="2AA7B8"/>
                 </a:solidFill>
@@ -6356,50 +7962,32 @@
               <a:t>• </a:t>
             </a:r>
             <a:r>
-              <a:rPr sz="1500" b="1">
-                <a:solidFill>
-                  <a:srgbClr val="222222"/>
-                </a:solidFill>
-                <a:latin typeface="맑은 고딕"/>
-              </a:rPr>
-              <a:t>① val mAP50-95</a:t>
-            </a:r>
-            <a:r>
-              <a:rPr sz="1500" b="0">
-                <a:solidFill>
-                  <a:srgbClr val="222222"/>
-                </a:solidFill>
-                <a:latin typeface="맑은 고딕"/>
-              </a:rPr>
-              <a:t>: val 이미지 복원추출 1,000회로 비교하니 </a:t>
-            </a:r>
-            <a:r>
-              <a:rPr sz="1500" b="1">
-                <a:solidFill>
-                  <a:srgbClr val="222222"/>
-                </a:solidFill>
-                <a:latin typeface="맑은 고딕"/>
-              </a:rPr>
-              <a:t>RT-DETR-l 0.662와 D-FINE-N 0.655가 동률 선두</a:t>
-            </a:r>
-            <a:r>
-              <a:rPr sz="1500" b="0">
-                <a:solidFill>
-                  <a:srgbClr val="222222"/>
-                </a:solidFill>
-                <a:latin typeface="맑은 고딕"/>
-              </a:rPr>
-              <a:t>(차이 −0.008, 95% 구간 −0.016~0.000). R50(0.615)·YOLO26n(0.642)은 유의하게 낮음. 공식 라벨만 보면 R50도 동률</a:t>
+              <a:rPr sz="1400" b="1">
+                <a:solidFill>
+                  <a:srgbClr val="222222"/>
+                </a:solidFill>
+                <a:latin typeface="맑은 고딕"/>
+              </a:rPr>
+              <a:t>약점</a:t>
+            </a:r>
+            <a:r>
+              <a:rPr sz="1400" b="0">
+                <a:solidFill>
+                  <a:srgbClr val="222222"/>
+                </a:solidFill>
+                <a:latin typeface="맑은 고딕"/>
+              </a:rPr>
+              <a:t>: 노이즈 보간 오경보 49%, 신뢰도가 0.9 근처에서 포화</a:t>
             </a:r>
           </a:p>
           <a:p>
             <a:pPr>
               <a:spcAft>
-                <a:spcPts val="1000"/>
+                <a:spcPts val="800"/>
               </a:spcAft>
             </a:pPr>
             <a:r>
-              <a:rPr sz="1500" b="1">
+              <a:rPr sz="1400" b="1">
                 <a:solidFill>
                   <a:srgbClr val="2AA7B8"/>
                 </a:solidFill>
@@ -6408,32 +7996,32 @@
               <a:t>• </a:t>
             </a:r>
             <a:r>
-              <a:rPr sz="1500" b="1">
-                <a:solidFill>
-                  <a:srgbClr val="222222"/>
-                </a:solidFill>
-                <a:latin typeface="맑은 고딕"/>
-              </a:rPr>
-              <a:t>② 동률이면 강건성</a:t>
-            </a:r>
-            <a:r>
-              <a:rPr sz="1500" b="0">
-                <a:solidFill>
-                  <a:srgbClr val="222222"/>
-                </a:solidFill>
-                <a:latin typeface="맑은 고딕"/>
-              </a:rPr>
-              <a:t>: 합성 점 AP와 3호기 검출은 D-FINE-N이 우세(0.574 대 0.451, 89% 대 61%), 가짜 정상 오경보는 RT-DETR-l이 우세(37% 대 49%)</a:t>
+              <a:rPr sz="1400" b="1">
+                <a:solidFill>
+                  <a:srgbClr val="222222"/>
+                </a:solidFill>
+                <a:latin typeface="맑은 고딕"/>
+              </a:rPr>
+              <a:t>대안</a:t>
+            </a:r>
+            <a:r>
+              <a:rPr sz="1400" b="0">
+                <a:solidFill>
+                  <a:srgbClr val="222222"/>
+                </a:solidFill>
+                <a:latin typeface="맑은 고딕"/>
+              </a:rPr>
+              <a:t>: 오경보 우선이면 R50 / YOLO26n, CPU 전용이면 YOLOv3-tiny</a:t>
             </a:r>
           </a:p>
           <a:p>
             <a:pPr>
               <a:spcAft>
-                <a:spcPts val="1000"/>
+                <a:spcPts val="800"/>
               </a:spcAft>
             </a:pPr>
             <a:r>
-              <a:rPr sz="1500" b="1">
+              <a:rPr sz="1400" b="1">
                 <a:solidFill>
                   <a:srgbClr val="2AA7B8"/>
                 </a:solidFill>
@@ -6442,79 +8030,45 @@
               <a:t>• </a:t>
             </a:r>
             <a:r>
-              <a:rPr sz="1500" b="0">
-                <a:solidFill>
-                  <a:srgbClr val="222222"/>
-                </a:solidFill>
-                <a:latin typeface="맑은 고딕"/>
-              </a:rPr>
-              <a:t>→ 과제가 "AI 미탐지 조건 분석"이고 놓침이 재검사보다 비싸다고 보아 </a:t>
-            </a:r>
-            <a:r>
-              <a:rPr sz="1500" b="1">
-                <a:solidFill>
-                  <a:srgbClr val="222222"/>
-                </a:solidFill>
-                <a:latin typeface="맑은 고딕"/>
-              </a:rPr>
-              <a:t>미탐지를 우선</a:t>
-            </a:r>
-            <a:r>
-              <a:rPr sz="1500" b="0">
-                <a:solidFill>
-                  <a:srgbClr val="222222"/>
-                </a:solidFill>
-                <a:latin typeface="맑은 고딕"/>
-              </a:rPr>
-              <a:t>했다</a:t>
-            </a:r>
-          </a:p>
-          <a:p>
-            <a:pPr>
-              <a:spcAft>
-                <a:spcPts val="1000"/>
-              </a:spcAft>
-            </a:pPr>
-            <a:r>
-              <a:rPr sz="1500" b="1">
-                <a:solidFill>
-                  <a:srgbClr val="2AA7B8"/>
-                </a:solidFill>
-                <a:latin typeface="맑은 고딕"/>
-              </a:rPr>
-              <a:t>• </a:t>
-            </a:r>
-            <a:r>
-              <a:rPr sz="1500" b="1">
-                <a:solidFill>
-                  <a:srgbClr val="222222"/>
-                </a:solidFill>
-                <a:latin typeface="맑은 고딕"/>
-              </a:rPr>
-              <a:t>③ 크기</a:t>
-            </a:r>
-            <a:r>
-              <a:rPr sz="1500" b="0">
-                <a:solidFill>
-                  <a:srgbClr val="222222"/>
-                </a:solidFill>
-                <a:latin typeface="맑은 고딕"/>
-              </a:rPr>
-              <a:t>: 3.7M(15MB)로 RT-DETR-l(32.8M)의 약 1/9</a:t>
-            </a:r>
-          </a:p>
-        </p:txBody>
-      </p:sp>
-      <p:sp>
-        <p:nvSpPr>
-          <p:cNvPr id="8" name="TextBox 7"/>
+              <a:rPr sz="1400" b="0">
+                <a:solidFill>
+                  <a:srgbClr val="222222"/>
+                </a:solidFill>
+                <a:latin typeface="맑은 고딕"/>
+              </a:rPr>
+              <a:t>'미탐지 우선'은 </a:t>
+            </a:r>
+            <a:r>
+              <a:rPr sz="1400" b="1">
+                <a:solidFill>
+                  <a:srgbClr val="222222"/>
+                </a:solidFill>
+                <a:latin typeface="맑은 고딕"/>
+              </a:rPr>
+              <a:t>결과를 본 뒤 정한 우선순위</a:t>
+            </a:r>
+            <a:r>
+              <a:rPr sz="1400" b="0">
+                <a:solidFill>
+                  <a:srgbClr val="222222"/>
+                </a:solidFill>
+                <a:latin typeface="맑은 고딕"/>
+              </a:rPr>
+              <a:t>라 보고서에 그대로 밝힌다</a:t>
+            </a:r>
+          </a:p>
+        </p:txBody>
+      </p:sp>
+      <p:sp>
+        <p:nvSpPr>
+          <p:cNvPr id="9" name="TextBox 8"/>
           <p:cNvSpPr txBox="1"/>
           <p:nvPr/>
         </p:nvSpPr>
         <p:spPr>
           <a:xfrm>
-            <a:off x="7772400" y="1783080"/>
-            <a:ext cx="4114800" cy="4572000"/>
+            <a:off x="548640" y="4663440"/>
+            <a:ext cx="11155680" cy="2011680"/>
           </a:xfrm>
           <a:prstGeom prst="rect">
             <a:avLst/>
@@ -6529,11 +8083,11 @@
           <a:p>
             <a:pPr>
               <a:spcAft>
-                <a:spcPts val="1000"/>
+                <a:spcPts val="500"/>
               </a:spcAft>
             </a:pPr>
             <a:r>
-              <a:rPr sz="1500" b="1">
+              <a:rPr sz="1400" b="1">
                 <a:solidFill>
                   <a:srgbClr val="2AA7B8"/>
                 </a:solidFill>
@@ -6542,32 +8096,50 @@
               <a:t>• </a:t>
             </a:r>
             <a:r>
-              <a:rPr sz="1500" b="1">
-                <a:solidFill>
-                  <a:srgbClr val="222222"/>
-                </a:solidFill>
-                <a:latin typeface="맑은 고딕"/>
-              </a:rPr>
-              <a:t>약점</a:t>
-            </a:r>
-            <a:r>
-              <a:rPr sz="1500" b="0">
-                <a:solidFill>
-                  <a:srgbClr val="222222"/>
-                </a:solidFill>
-                <a:latin typeface="맑은 고딕"/>
-              </a:rPr>
-              <a:t>: 노이즈 보간 오경보 49%, 신뢰도가 0.9 근처에서 포화</a:t>
+              <a:rPr sz="1400" b="1">
+                <a:solidFill>
+                  <a:srgbClr val="222222"/>
+                </a:solidFill>
+                <a:latin typeface="맑은 고딕"/>
+              </a:rPr>
+              <a:t>① val mAP50-95</a:t>
+            </a:r>
+            <a:r>
+              <a:rPr sz="1400" b="0">
+                <a:solidFill>
+                  <a:srgbClr val="222222"/>
+                </a:solidFill>
+                <a:latin typeface="맑은 고딕"/>
+              </a:rPr>
+              <a:t>: val 이미지 복원추출 1,000회로 비교하니 </a:t>
+            </a:r>
+            <a:r>
+              <a:rPr sz="1400" b="1">
+                <a:solidFill>
+                  <a:srgbClr val="222222"/>
+                </a:solidFill>
+                <a:latin typeface="맑은 고딕"/>
+              </a:rPr>
+              <a:t>RT-DETR-l 0.662와 D-FINE-N 0.655가 동률 선두</a:t>
+            </a:r>
+            <a:r>
+              <a:rPr sz="1400" b="0">
+                <a:solidFill>
+                  <a:srgbClr val="222222"/>
+                </a:solidFill>
+                <a:latin typeface="맑은 고딕"/>
+              </a:rPr>
+              <a:t>(차이 −0.008, 95% 구간 −0.016~0.000). R50·YOLO26n은 유의하게 낮고, 공식 라벨만 보면 R50도 동률</a:t>
             </a:r>
           </a:p>
           <a:p>
             <a:pPr>
               <a:spcAft>
-                <a:spcPts val="1000"/>
+                <a:spcPts val="500"/>
               </a:spcAft>
             </a:pPr>
             <a:r>
-              <a:rPr sz="1500" b="1">
+              <a:rPr sz="1400" b="1">
                 <a:solidFill>
                   <a:srgbClr val="2AA7B8"/>
                 </a:solidFill>
@@ -6576,32 +8148,41 @@
               <a:t>• </a:t>
             </a:r>
             <a:r>
-              <a:rPr sz="1500" b="1">
-                <a:solidFill>
-                  <a:srgbClr val="222222"/>
-                </a:solidFill>
-                <a:latin typeface="맑은 고딕"/>
-              </a:rPr>
-              <a:t>대안</a:t>
-            </a:r>
-            <a:r>
-              <a:rPr sz="1500" b="0">
-                <a:solidFill>
-                  <a:srgbClr val="222222"/>
-                </a:solidFill>
-                <a:latin typeface="맑은 고딕"/>
-              </a:rPr>
-              <a:t>: 오경보 우선이면 R50 / YOLO26n, CPU 전용이면 YOLOv3-tiny</a:t>
+              <a:rPr sz="1400" b="1">
+                <a:solidFill>
+                  <a:srgbClr val="222222"/>
+                </a:solidFill>
+                <a:latin typeface="맑은 고딕"/>
+              </a:rPr>
+              <a:t>② 동률이면 강건성</a:t>
+            </a:r>
+            <a:r>
+              <a:rPr sz="1400" b="0">
+                <a:solidFill>
+                  <a:srgbClr val="222222"/>
+                </a:solidFill>
+                <a:latin typeface="맑은 고딕"/>
+              </a:rPr>
+              <a:t>: 합성 점 AP와 3호기 검출은 D-FINE-N 우세(0.574 대 0.451, 89% 대 61%), 가짜 정상 오경보는 RT-DETR-l 우세(37% 대 49%) → 놓침이 더 비싸다고 보아 </a:t>
+            </a:r>
+            <a:r>
+              <a:rPr sz="1400" b="1">
+                <a:solidFill>
+                  <a:srgbClr val="222222"/>
+                </a:solidFill>
+                <a:latin typeface="맑은 고딕"/>
+              </a:rPr>
+              <a:t>미탐지를 우선</a:t>
             </a:r>
           </a:p>
           <a:p>
             <a:pPr>
               <a:spcAft>
-                <a:spcPts val="1000"/>
+                <a:spcPts val="500"/>
               </a:spcAft>
             </a:pPr>
             <a:r>
-              <a:rPr sz="1500" b="1">
+              <a:rPr sz="1400" b="1">
                 <a:solidFill>
                   <a:srgbClr val="2AA7B8"/>
                 </a:solidFill>
@@ -6610,56 +8191,22 @@
               <a:t>• </a:t>
             </a:r>
             <a:r>
-              <a:rPr sz="1500" b="0">
-                <a:solidFill>
-                  <a:srgbClr val="222222"/>
-                </a:solidFill>
-                <a:latin typeface="맑은 고딕"/>
-              </a:rPr>
-              <a:t>MobileNetV3는 위치 의존·노이즈 오경보로 비권장</a:t>
-            </a:r>
-          </a:p>
-          <a:p>
-            <a:pPr>
-              <a:spcAft>
-                <a:spcPts val="1000"/>
-              </a:spcAft>
-            </a:pPr>
-            <a:r>
-              <a:rPr sz="1500" b="1">
-                <a:solidFill>
-                  <a:srgbClr val="2AA7B8"/>
-                </a:solidFill>
-                <a:latin typeface="맑은 고딕"/>
-              </a:rPr>
-              <a:t>• </a:t>
-            </a:r>
-            <a:r>
-              <a:rPr sz="1500" b="0">
-                <a:solidFill>
-                  <a:srgbClr val="222222"/>
-                </a:solidFill>
-                <a:latin typeface="맑은 고딕"/>
-              </a:rPr>
-              <a:t>이 우선순위는 </a:t>
-            </a:r>
-            <a:r>
-              <a:rPr sz="1500" b="1">
-                <a:solidFill>
-                  <a:srgbClr val="222222"/>
-                </a:solidFill>
-                <a:latin typeface="맑은 고딕"/>
-              </a:rPr>
-              <a:t>결과를 본 뒤 정한 것</a:t>
-            </a:r>
-            <a:r>
-              <a:rPr sz="1500" b="0">
-                <a:solidFill>
-                  <a:srgbClr val="222222"/>
-                </a:solidFill>
-                <a:latin typeface="맑은 고딕"/>
-              </a:rPr>
-              <a:t>이라 보고서에 그대로 밝힌다</a:t>
+              <a:rPr sz="1400" b="1">
+                <a:solidFill>
+                  <a:srgbClr val="222222"/>
+                </a:solidFill>
+                <a:latin typeface="맑은 고딕"/>
+              </a:rPr>
+              <a:t>③ 크기</a:t>
+            </a:r>
+            <a:r>
+              <a:rPr sz="1400" b="0">
+                <a:solidFill>
+                  <a:srgbClr val="222222"/>
+                </a:solidFill>
+                <a:latin typeface="맑은 고딕"/>
+              </a:rPr>
+              <a:t>: 3.7M(15MB)로 RT-DETR-l(32.8M)의 약 1/9</a:t>
             </a:r>
           </a:p>
         </p:txBody>
@@ -6672,7 +8219,7 @@
 </p:sld>
 </file>
 
-<file path=ppt/slides/slide16.xml><?xml version="1.0" encoding="utf-8"?>
+<file path=ppt/slides/slide2.xml><?xml version="1.0" encoding="utf-8"?>
 <p:sld xmlns:a="http://schemas.openxmlformats.org/drawingml/2006/main" xmlns:p="http://schemas.openxmlformats.org/presentationml/2006/main" xmlns:r="http://schemas.openxmlformats.org/officeDocument/2006/relationships">
   <p:cSld>
     <p:spTree>
@@ -6755,7 +8302,7 @@
                 </a:solidFill>
                 <a:latin typeface="맑은 고딕"/>
               </a:rPr>
-              <a:t>현장 활용: 3단 판정과 재검사 구간</a:t>
+              <a:t>문제와 데이터</a:t>
             </a:r>
           </a:p>
         </p:txBody>
@@ -6790,7 +8337,7 @@
                 </a:solidFill>
                 <a:latin typeface="맑은 고딕"/>
               </a:rPr>
-              <a:t>실제 test에서는 결함 369장(≥0.748)과 빈 라벨 27장(≤0.04)이 완전히 갈린다</a:t>
+              <a:t>약 10px의 작은 점(금속구)을 찾는 검출 문제, 이미지는 모두 NG 판정</a:t>
             </a:r>
           </a:p>
         </p:txBody>
@@ -6825,7 +8372,433 @@
                 </a:solidFill>
                 <a:latin typeface="맑은 고딕"/>
               </a:rPr>
-              <a:t>16</a:t>
+              <a:t>2</a:t>
+            </a:r>
+          </a:p>
+        </p:txBody>
+      </p:sp>
+      <p:sp>
+        <p:nvSpPr>
+          <p:cNvPr id="6" name="TextBox 5"/>
+          <p:cNvSpPr txBox="1"/>
+          <p:nvPr/>
+        </p:nvSpPr>
+        <p:spPr>
+          <a:xfrm>
+            <a:off x="502920" y="1737360"/>
+            <a:ext cx="4754880" cy="4754880"/>
+          </a:xfrm>
+          <a:prstGeom prst="rect">
+            <a:avLst/>
+          </a:prstGeom>
+          <a:noFill/>
+        </p:spPr>
+        <p:txBody>
+          <a:bodyPr wrap="square" lIns="45720" rIns="45720">
+            <a:spAutoFit/>
+          </a:bodyPr>
+          <a:lstStyle/>
+          <a:p>
+            <a:pPr>
+              <a:spcAft>
+                <a:spcPts val="600"/>
+              </a:spcAft>
+            </a:pPr>
+            <a:r>
+              <a:rPr sz="1600" b="1">
+                <a:solidFill>
+                  <a:srgbClr val="2AA7B8"/>
+                </a:solidFill>
+                <a:latin typeface="맑은 고딕"/>
+              </a:rPr>
+              <a:t>• </a:t>
+            </a:r>
+            <a:r>
+              <a:rPr sz="1600" b="0">
+                <a:solidFill>
+                  <a:srgbClr val="222222"/>
+                </a:solidFill>
+                <a:latin typeface="맑은 고딕"/>
+              </a:rPr>
+              <a:t>X-ray 이물 검출기 영상 </a:t>
+            </a:r>
+            <a:r>
+              <a:rPr sz="1600" b="1">
+                <a:solidFill>
+                  <a:srgbClr val="222222"/>
+                </a:solidFill>
+                <a:latin typeface="맑은 고딕"/>
+              </a:rPr>
+              <a:t>2,532장</a:t>
+            </a:r>
+            <a:r>
+              <a:rPr sz="1600" b="0">
+                <a:solidFill>
+                  <a:srgbClr val="222222"/>
+                </a:solidFill>
+                <a:latin typeface="맑은 고딕"/>
+              </a:rPr>
+              <a:t>, 박스 4,494개</a:t>
+            </a:r>
+          </a:p>
+          <a:p>
+            <a:pPr>
+              <a:spcAft>
+                <a:spcPts val="600"/>
+              </a:spcAft>
+            </a:pPr>
+            <a:r>
+              <a:rPr sz="1600" b="1">
+                <a:solidFill>
+                  <a:srgbClr val="2AA7B8"/>
+                </a:solidFill>
+                <a:latin typeface="맑은 고딕"/>
+              </a:rPr>
+              <a:t>• </a:t>
+            </a:r>
+            <a:r>
+              <a:rPr sz="1600" b="0">
+                <a:solidFill>
+                  <a:srgbClr val="222222"/>
+                </a:solidFill>
+                <a:latin typeface="맑은 고딕"/>
+              </a:rPr>
+              <a:t>호기 3종, 해상도 4종 (316x332 ~ 576x444)</a:t>
+            </a:r>
+          </a:p>
+          <a:p>
+            <a:pPr>
+              <a:spcAft>
+                <a:spcPts val="600"/>
+              </a:spcAft>
+            </a:pPr>
+            <a:r>
+              <a:rPr sz="1600" b="1">
+                <a:solidFill>
+                  <a:srgbClr val="2AA7B8"/>
+                </a:solidFill>
+                <a:latin typeface="맑은 고딕"/>
+              </a:rPr>
+              <a:t>• </a:t>
+            </a:r>
+            <a:r>
+              <a:rPr sz="1600" b="0">
+                <a:solidFill>
+                  <a:srgbClr val="222222"/>
+                </a:solidFill>
+                <a:latin typeface="맑은 고딕"/>
+              </a:rPr>
+              <a:t>train 1,767 / val 369 / test 396장 (연속 촬영 묶음 단위, 시드 42)</a:t>
+            </a:r>
+          </a:p>
+          <a:p>
+            <a:pPr>
+              <a:spcAft>
+                <a:spcPts val="600"/>
+              </a:spcAft>
+            </a:pPr>
+            <a:r>
+              <a:rPr sz="1600" b="1">
+                <a:solidFill>
+                  <a:srgbClr val="2AA7B8"/>
+                </a:solidFill>
+                <a:latin typeface="맑은 고딕"/>
+              </a:rPr>
+              <a:t>• </a:t>
+            </a:r>
+            <a:r>
+              <a:rPr sz="1600" b="1">
+                <a:solidFill>
+                  <a:srgbClr val="222222"/>
+                </a:solidFill>
+                <a:latin typeface="맑은 고딕"/>
+              </a:rPr>
+              <a:t>라벨이 두 종류</a:t>
+            </a:r>
+            <a:r>
+              <a:rPr sz="1600" b="0">
+                <a:solidFill>
+                  <a:srgbClr val="222222"/>
+                </a:solidFill>
+                <a:latin typeface="맑은 고딕"/>
+              </a:rPr>
+              <a:t>: 공식 500장은 사람이 그려 크기가 제각각(5~21px), 팀 라벨 2,032장은 클릭 중심에 </a:t>
+            </a:r>
+            <a:r>
+              <a:rPr sz="1600" b="1">
+                <a:solidFill>
+                  <a:srgbClr val="222222"/>
+                </a:solidFill>
+                <a:latin typeface="맑은 고딕"/>
+              </a:rPr>
+              <a:t>고정 크기 네모(10·13px)</a:t>
+            </a:r>
+            <a:r>
+              <a:rPr sz="1600" b="0">
+                <a:solidFill>
+                  <a:srgbClr val="222222"/>
+                </a:solidFill>
+                <a:latin typeface="맑은 고딕"/>
+              </a:rPr>
+              <a:t> 를 자동 생성</a:t>
+            </a:r>
+          </a:p>
+          <a:p>
+            <a:pPr>
+              <a:spcAft>
+                <a:spcPts val="600"/>
+              </a:spcAft>
+            </a:pPr>
+            <a:r>
+              <a:rPr sz="1600" b="1">
+                <a:solidFill>
+                  <a:srgbClr val="2AA7B8"/>
+                </a:solidFill>
+                <a:latin typeface="맑은 고딕"/>
+              </a:rPr>
+              <a:t>• </a:t>
+            </a:r>
+            <a:r>
+              <a:rPr sz="1600" b="0">
+                <a:solidFill>
+                  <a:srgbClr val="222222"/>
+                </a:solidFill>
+                <a:latin typeface="맑은 고딕"/>
+              </a:rPr>
+              <a:t>정상 이미지가 없다(빈 라벨 105장은 제품이 반만 찍힌 사진)</a:t>
+            </a:r>
+          </a:p>
+          <a:p>
+            <a:pPr>
+              <a:spcAft>
+                <a:spcPts val="600"/>
+              </a:spcAft>
+            </a:pPr>
+            <a:r>
+              <a:rPr sz="1600" b="1">
+                <a:solidFill>
+                  <a:srgbClr val="2AA7B8"/>
+                </a:solidFill>
+                <a:latin typeface="맑은 고딕"/>
+              </a:rPr>
+              <a:t>• </a:t>
+            </a:r>
+            <a:r>
+              <a:rPr sz="1600" b="0">
+                <a:solidFill>
+                  <a:srgbClr val="222222"/>
+                </a:solidFill>
+                <a:latin typeface="맑은 고딕"/>
+              </a:rPr>
+              <a:t>장비가 그린 </a:t>
+            </a:r>
+            <a:r>
+              <a:rPr sz="1600" b="1">
+                <a:solidFill>
+                  <a:srgbClr val="222222"/>
+                </a:solidFill>
+                <a:latin typeface="맑은 고딕"/>
+              </a:rPr>
+              <a:t>색 표시는 전처리로 제거</a:t>
+            </a:r>
+            <a:r>
+              <a:rPr sz="1600" b="0">
+                <a:solidFill>
+                  <a:srgbClr val="222222"/>
+                </a:solidFill>
+                <a:latin typeface="맑은 고딕"/>
+              </a:rPr>
+              <a:t>(다음 슬라이드)</a:t>
+            </a:r>
+          </a:p>
+        </p:txBody>
+      </p:sp>
+      <p:pic>
+        <p:nvPicPr>
+          <p:cNvPr id="7" name="Picture 6" descr="fig1a_data_labels.png"/>
+          <p:cNvPicPr>
+            <a:picLocks noChangeAspect="1"/>
+          </p:cNvPicPr>
+          <p:nvPr/>
+        </p:nvPicPr>
+        <p:blipFill>
+          <a:blip r:embed="rId2"/>
+          <a:stretch>
+            <a:fillRect/>
+          </a:stretch>
+        </p:blipFill>
+        <p:spPr>
+          <a:xfrm>
+            <a:off x="5394960" y="2672161"/>
+            <a:ext cx="6400800" cy="2610956"/>
+          </a:xfrm>
+          <a:prstGeom prst="rect">
+            <a:avLst/>
+          </a:prstGeom>
+        </p:spPr>
+      </p:pic>
+    </p:spTree>
+  </p:cSld>
+  <p:clrMapOvr>
+    <a:masterClrMapping/>
+  </p:clrMapOvr>
+</p:sld>
+</file>
+
+<file path=ppt/slides/slide20.xml><?xml version="1.0" encoding="utf-8"?>
+<p:sld xmlns:a="http://schemas.openxmlformats.org/drawingml/2006/main" xmlns:p="http://schemas.openxmlformats.org/presentationml/2006/main" xmlns:r="http://schemas.openxmlformats.org/officeDocument/2006/relationships">
+  <p:cSld>
+    <p:spTree>
+      <p:nvGrpSpPr>
+        <p:cNvPr id="1" name=""/>
+        <p:cNvGrpSpPr/>
+        <p:nvPr/>
+      </p:nvGrpSpPr>
+      <p:grpSpPr/>
+      <p:sp>
+        <p:nvSpPr>
+          <p:cNvPr id="2" name="Rectangle 1"/>
+          <p:cNvSpPr/>
+          <p:nvPr/>
+        </p:nvSpPr>
+        <p:spPr>
+          <a:xfrm>
+            <a:off x="0" y="0"/>
+            <a:ext cx="164592" cy="6858000"/>
+          </a:xfrm>
+          <a:prstGeom prst="rect">
+            <a:avLst/>
+          </a:prstGeom>
+          <a:solidFill>
+            <a:srgbClr val="1F3A5F"/>
+          </a:solidFill>
+          <a:ln>
+            <a:noFill/>
+          </a:ln>
+        </p:spPr>
+        <p:style>
+          <a:lnRef idx="1">
+            <a:schemeClr val="accent1"/>
+          </a:lnRef>
+          <a:fillRef idx="3">
+            <a:schemeClr val="accent1"/>
+          </a:fillRef>
+          <a:effectRef idx="2">
+            <a:schemeClr val="accent1"/>
+          </a:effectRef>
+          <a:fontRef idx="minor">
+            <a:schemeClr val="lt1"/>
+          </a:fontRef>
+        </p:style>
+        <p:txBody>
+          <a:bodyPr rtlCol="0" anchor="ctr"/>
+          <a:lstStyle/>
+          <a:p>
+            <a:pPr algn="ctr"/>
+          </a:p>
+        </p:txBody>
+      </p:sp>
+      <p:sp>
+        <p:nvSpPr>
+          <p:cNvPr id="3" name="TextBox 2"/>
+          <p:cNvSpPr txBox="1"/>
+          <p:nvPr/>
+        </p:nvSpPr>
+        <p:spPr>
+          <a:xfrm>
+            <a:off x="502920" y="274320"/>
+            <a:ext cx="11185855" cy="731520"/>
+          </a:xfrm>
+          <a:prstGeom prst="rect">
+            <a:avLst/>
+          </a:prstGeom>
+          <a:noFill/>
+        </p:spPr>
+        <p:txBody>
+          <a:bodyPr wrap="square" anchor="ctr" lIns="45720" rIns="45720">
+            <a:spAutoFit/>
+          </a:bodyPr>
+          <a:lstStyle/>
+          <a:p>
+            <a:pPr algn="l"/>
+            <a:r>
+              <a:rPr sz="2800" b="1">
+                <a:solidFill>
+                  <a:srgbClr val="1F3A5F"/>
+                </a:solidFill>
+                <a:latin typeface="맑은 고딕"/>
+              </a:rPr>
+              <a:t>현장 활용: 3단 판정과 재검사 구간</a:t>
+            </a:r>
+          </a:p>
+        </p:txBody>
+      </p:sp>
+      <p:sp>
+        <p:nvSpPr>
+          <p:cNvPr id="4" name="TextBox 3"/>
+          <p:cNvSpPr txBox="1"/>
+          <p:nvPr/>
+        </p:nvSpPr>
+        <p:spPr>
+          <a:xfrm>
+            <a:off x="502920" y="1005840"/>
+            <a:ext cx="11185855" cy="640080"/>
+          </a:xfrm>
+          <a:prstGeom prst="rect">
+            <a:avLst/>
+          </a:prstGeom>
+          <a:noFill/>
+        </p:spPr>
+        <p:txBody>
+          <a:bodyPr wrap="square" anchor="t" lIns="45720" rIns="45720">
+            <a:spAutoFit/>
+          </a:bodyPr>
+          <a:lstStyle/>
+          <a:p>
+            <a:pPr algn="l"/>
+            <a:r>
+              <a:rPr sz="1800" b="1">
+                <a:solidFill>
+                  <a:srgbClr val="2AA7B8"/>
+                </a:solidFill>
+                <a:latin typeface="맑은 고딕"/>
+              </a:rPr>
+              <a:t>실제 test에서는 결함 369장(≥0.748)과 빈 라벨 27장(≤0.04)이 완전히 갈린다</a:t>
+            </a:r>
+          </a:p>
+        </p:txBody>
+      </p:sp>
+      <p:sp>
+        <p:nvSpPr>
+          <p:cNvPr id="5" name="TextBox 4"/>
+          <p:cNvSpPr txBox="1"/>
+          <p:nvPr/>
+        </p:nvSpPr>
+        <p:spPr>
+          <a:xfrm>
+            <a:off x="11094415" y="6400800"/>
+            <a:ext cx="822960" cy="320040"/>
+          </a:xfrm>
+          <a:prstGeom prst="rect">
+            <a:avLst/>
+          </a:prstGeom>
+          <a:noFill/>
+        </p:spPr>
+        <p:txBody>
+          <a:bodyPr wrap="square" anchor="t" lIns="45720" rIns="45720">
+            <a:spAutoFit/>
+          </a:bodyPr>
+          <a:lstStyle/>
+          <a:p>
+            <a:pPr algn="r"/>
+            <a:r>
+              <a:rPr sz="1200" b="0">
+                <a:solidFill>
+                  <a:srgbClr val="555B66"/>
+                </a:solidFill>
+                <a:latin typeface="맑은 고딕"/>
+              </a:rPr>
+              <a:t>20</a:t>
             </a:r>
           </a:p>
         </p:txBody>
@@ -7040,7 +9013,7 @@
 </p:sld>
 </file>
 
-<file path=ppt/slides/slide17.xml><?xml version="1.0" encoding="utf-8"?>
+<file path=ppt/slides/slide21.xml><?xml version="1.0" encoding="utf-8"?>
 <p:sld xmlns:a="http://schemas.openxmlformats.org/drawingml/2006/main" xmlns:p="http://schemas.openxmlformats.org/presentationml/2006/main" xmlns:r="http://schemas.openxmlformats.org/officeDocument/2006/relationships">
   <p:cSld>
     <p:spTree>
@@ -7193,7 +9166,7 @@
                 </a:solidFill>
                 <a:latin typeface="맑은 고딕"/>
               </a:rPr>
-              <a:t>17</a:t>
+              <a:t>21</a:t>
             </a:r>
           </a:p>
         </p:txBody>
@@ -8143,7 +10116,7 @@
 </p:sld>
 </file>
 
-<file path=ppt/slides/slide18.xml><?xml version="1.0" encoding="utf-8"?>
+<file path=ppt/slides/slide22.xml><?xml version="1.0" encoding="utf-8"?>
 <p:sld xmlns:a="http://schemas.openxmlformats.org/drawingml/2006/main" xmlns:p="http://schemas.openxmlformats.org/presentationml/2006/main" xmlns:r="http://schemas.openxmlformats.org/officeDocument/2006/relationships">
   <p:cSld>
     <p:spTree>
@@ -8296,7 +10269,7 @@
                 </a:solidFill>
                 <a:latin typeface="맑은 고딕"/>
               </a:rPr>
-              <a:t>18</a:t>
+              <a:t>22</a:t>
             </a:r>
           </a:p>
         </p:txBody>
@@ -8554,7 +10527,7 @@
 </p:sld>
 </file>
 
-<file path=ppt/slides/slide19.xml><?xml version="1.0" encoding="utf-8"?>
+<file path=ppt/slides/slide23.xml><?xml version="1.0" encoding="utf-8"?>
 <p:sld xmlns:a="http://schemas.openxmlformats.org/drawingml/2006/main" xmlns:p="http://schemas.openxmlformats.org/presentationml/2006/main" xmlns:r="http://schemas.openxmlformats.org/officeDocument/2006/relationships">
   <p:cSld>
     <p:spTree>
@@ -8707,7 +10680,7 @@
                 </a:solidFill>
                 <a:latin typeface="맑은 고딕"/>
               </a:rPr>
-              <a:t>19</a:t>
+              <a:t>23</a:t>
             </a:r>
           </a:p>
         </p:txBody>
@@ -9069,7 +11042,7 @@
 </p:sld>
 </file>
 
-<file path=ppt/slides/slide2.xml><?xml version="1.0" encoding="utf-8"?>
+<file path=ppt/slides/slide24.xml><?xml version="1.0" encoding="utf-8"?>
 <p:sld xmlns:a="http://schemas.openxmlformats.org/drawingml/2006/main" xmlns:p="http://schemas.openxmlformats.org/presentationml/2006/main" xmlns:r="http://schemas.openxmlformats.org/officeDocument/2006/relationships">
   <p:cSld>
     <p:spTree>
@@ -9152,7 +11125,7 @@
                 </a:solidFill>
                 <a:latin typeface="맑은 고딕"/>
               </a:rPr>
-              <a:t>문제와 데이터</a:t>
+              <a:t>한계와 향후 과제</a:t>
             </a:r>
           </a:p>
         </p:txBody>
@@ -9187,7 +11160,7 @@
                 </a:solidFill>
                 <a:latin typeface="맑은 고딕"/>
               </a:rPr>
-              <a:t>약 10px의 작은 점(금속구)을 찾는 검출 문제, 이미지는 모두 NG 판정</a:t>
+              <a:t>숨기지 않고 적는다</a:t>
             </a:r>
           </a:p>
         </p:txBody>
@@ -9222,7 +11195,7 @@
                 </a:solidFill>
                 <a:latin typeface="맑은 고딕"/>
               </a:rPr>
-              <a:t>2</a:t>
+              <a:t>24</a:t>
             </a:r>
           </a:p>
         </p:txBody>
@@ -9235,8 +11208,8 @@
         </p:nvSpPr>
         <p:spPr>
           <a:xfrm>
-            <a:off x="502920" y="1737360"/>
-            <a:ext cx="4754880" cy="4754880"/>
+            <a:off x="640080" y="1783080"/>
+            <a:ext cx="10972800" cy="4572000"/>
           </a:xfrm>
           <a:prstGeom prst="rect">
             <a:avLst/>
@@ -9251,11 +11224,11 @@
           <a:p>
             <a:pPr>
               <a:spcAft>
-                <a:spcPts val="600"/>
+                <a:spcPts val="1100"/>
               </a:spcAft>
             </a:pPr>
             <a:r>
-              <a:rPr sz="1500" b="1">
+              <a:rPr sz="1800" b="1">
                 <a:solidFill>
                   <a:srgbClr val="2AA7B8"/>
                 </a:solidFill>
@@ -9264,41 +11237,41 @@
               <a:t>• </a:t>
             </a:r>
             <a:r>
-              <a:rPr sz="1500" b="0">
-                <a:solidFill>
-                  <a:srgbClr val="222222"/>
-                </a:solidFill>
-                <a:latin typeface="맑은 고딕"/>
-              </a:rPr>
-              <a:t>X-ray 이물 검출기 영상 </a:t>
-            </a:r>
-            <a:r>
-              <a:rPr sz="1500" b="1">
-                <a:solidFill>
-                  <a:srgbClr val="222222"/>
-                </a:solidFill>
-                <a:latin typeface="맑은 고딕"/>
-              </a:rPr>
-              <a:t>2,532장</a:t>
-            </a:r>
-            <a:r>
-              <a:rPr sz="1500" b="0">
-                <a:solidFill>
-                  <a:srgbClr val="222222"/>
-                </a:solidFill>
-                <a:latin typeface="맑은 고딕"/>
-              </a:rPr>
-              <a:t>, 박스 4,494개</a:t>
+              <a:rPr sz="1800" b="0">
+                <a:solidFill>
+                  <a:srgbClr val="222222"/>
+                </a:solidFill>
+                <a:latin typeface="맑은 고딕"/>
+              </a:rPr>
+              <a:t>합성 점과 가짜 정상은 </a:t>
+            </a:r>
+            <a:r>
+              <a:rPr sz="1800" b="1">
+                <a:solidFill>
+                  <a:srgbClr val="222222"/>
+                </a:solidFill>
+                <a:latin typeface="맑은 고딕"/>
+              </a:rPr>
+              <a:t>인위적인 이미지</a:t>
+            </a:r>
+            <a:r>
+              <a:rPr sz="1800" b="0">
+                <a:solidFill>
+                  <a:srgbClr val="222222"/>
+                </a:solidFill>
+                <a:latin typeface="맑은 고딕"/>
+              </a:rPr>
+              <a:t>다. 실제 현장 성능이 아니라 상대 비교와 취약점 탐색으로만 해석한다</a:t>
             </a:r>
           </a:p>
           <a:p>
             <a:pPr>
               <a:spcAft>
-                <a:spcPts val="600"/>
+                <a:spcPts val="1100"/>
               </a:spcAft>
             </a:pPr>
             <a:r>
-              <a:rPr sz="1500" b="1">
+              <a:rPr sz="1800" b="1">
                 <a:solidFill>
                   <a:srgbClr val="2AA7B8"/>
                 </a:solidFill>
@@ -9307,23 +11280,41 @@
               <a:t>• </a:t>
             </a:r>
             <a:r>
-              <a:rPr sz="1500" b="0">
-                <a:solidFill>
-                  <a:srgbClr val="222222"/>
-                </a:solidFill>
-                <a:latin typeface="맑은 고딕"/>
-              </a:rPr>
-              <a:t>호기 3종, 해상도 4종 (316x332 ~ 576x444)</a:t>
+              <a:rPr sz="1800" b="0">
+                <a:solidFill>
+                  <a:srgbClr val="222222"/>
+                </a:solidFill>
+                <a:latin typeface="맑은 고딕"/>
+              </a:rPr>
+              <a:t>강건성 시험은 </a:t>
+            </a:r>
+            <a:r>
+              <a:rPr sz="1800" b="1">
+                <a:solidFill>
+                  <a:srgbClr val="222222"/>
+                </a:solidFill>
+                <a:latin typeface="맑은 고딕"/>
+              </a:rPr>
+              <a:t>test 이미지</a:t>
+            </a:r>
+            <a:r>
+              <a:rPr sz="1800" b="0">
+                <a:solidFill>
+                  <a:srgbClr val="222222"/>
+                </a:solidFill>
+                <a:latin typeface="맑은 고딕"/>
+              </a:rPr>
+              <a:t>로 먼저 수행했다. 모델 선정에는 val 지표만 썼지만, 선정 근거로 쓰려면 val로 반복해야 한다</a:t>
             </a:r>
           </a:p>
           <a:p>
             <a:pPr>
               <a:spcAft>
-                <a:spcPts val="600"/>
+                <a:spcPts val="1100"/>
               </a:spcAft>
             </a:pPr>
             <a:r>
-              <a:rPr sz="1500" b="1">
+              <a:rPr sz="1800" b="1">
                 <a:solidFill>
                   <a:srgbClr val="2AA7B8"/>
                 </a:solidFill>
@@ -9332,23 +11323,23 @@
               <a:t>• </a:t>
             </a:r>
             <a:r>
-              <a:rPr sz="1500" b="0">
-                <a:solidFill>
-                  <a:srgbClr val="222222"/>
-                </a:solidFill>
-                <a:latin typeface="맑은 고딕"/>
-              </a:rPr>
-              <a:t>train 1,767 / val 369 / test 396장 (연속 촬영 묶음 단위, 시드 42)</a:t>
+              <a:rPr sz="1800" b="0">
+                <a:solidFill>
+                  <a:srgbClr val="222222"/>
+                </a:solidFill>
+                <a:latin typeface="맑은 고딕"/>
+              </a:rPr>
+              <a:t>'미탐지 우선'이라는 우선순위는 결과를 본 뒤 정했다. 오경보 우선이면 선정이 바뀐다</a:t>
             </a:r>
           </a:p>
           <a:p>
             <a:pPr>
               <a:spcAft>
-                <a:spcPts val="600"/>
+                <a:spcPts val="1100"/>
               </a:spcAft>
             </a:pPr>
             <a:r>
-              <a:rPr sz="1500" b="1">
+              <a:rPr sz="1800" b="1">
                 <a:solidFill>
                   <a:srgbClr val="2AA7B8"/>
                 </a:solidFill>
@@ -9357,50 +11348,41 @@
               <a:t>• </a:t>
             </a:r>
             <a:r>
-              <a:rPr sz="1500" b="1">
-                <a:solidFill>
-                  <a:srgbClr val="222222"/>
-                </a:solidFill>
-                <a:latin typeface="맑은 고딕"/>
-              </a:rPr>
-              <a:t>라벨이 두 종류</a:t>
-            </a:r>
-            <a:r>
-              <a:rPr sz="1500" b="0">
-                <a:solidFill>
-                  <a:srgbClr val="222222"/>
-                </a:solidFill>
-                <a:latin typeface="맑은 고딕"/>
-              </a:rPr>
-              <a:t>: 공식 500장은 사람이 그려 크기가 제각각(5~21px), 팀 라벨 2,032장은 클릭 중심에 </a:t>
-            </a:r>
-            <a:r>
-              <a:rPr sz="1500" b="1">
-                <a:solidFill>
-                  <a:srgbClr val="222222"/>
-                </a:solidFill>
-                <a:latin typeface="맑은 고딕"/>
-              </a:rPr>
-              <a:t>고정 크기 네모(10·13px)</a:t>
-            </a:r>
-            <a:r>
-              <a:rPr sz="1500" b="0">
-                <a:solidFill>
-                  <a:srgbClr val="222222"/>
-                </a:solidFill>
-                <a:latin typeface="맑은 고딕"/>
-              </a:rPr>
-              <a:t> 를 자동 생성</a:t>
+              <a:rPr sz="1800" b="0">
+                <a:solidFill>
+                  <a:srgbClr val="222222"/>
+                </a:solidFill>
+                <a:latin typeface="맑은 고딕"/>
+              </a:rPr>
+              <a:t>표시(색 사각형) 제거의 </a:t>
+            </a:r>
+            <a:r>
+              <a:rPr sz="1800" b="1">
+                <a:solidFill>
+                  <a:srgbClr val="222222"/>
+                </a:solidFill>
+                <a:latin typeface="맑은 고딕"/>
+              </a:rPr>
+              <a:t>흔적</a:t>
+            </a:r>
+            <a:r>
+              <a:rPr sz="1800" b="0">
+                <a:solidFill>
+                  <a:srgbClr val="222222"/>
+                </a:solidFill>
+                <a:latin typeface="맑은 고딕"/>
+              </a:rPr>
+              <a:t>이 단서가 되는지는 검증하지 못했다</a:t>
             </a:r>
           </a:p>
           <a:p>
             <a:pPr>
               <a:spcAft>
-                <a:spcPts val="600"/>
+                <a:spcPts val="1100"/>
               </a:spcAft>
             </a:pPr>
             <a:r>
-              <a:rPr sz="1500" b="1">
+              <a:rPr sz="1800" b="1">
                 <a:solidFill>
                   <a:srgbClr val="2AA7B8"/>
                 </a:solidFill>
@@ -9409,23 +11391,23 @@
               <a:t>• </a:t>
             </a:r>
             <a:r>
-              <a:rPr sz="1500" b="0">
-                <a:solidFill>
-                  <a:srgbClr val="222222"/>
-                </a:solidFill>
-                <a:latin typeface="맑은 고딕"/>
-              </a:rPr>
-              <a:t>정상 이미지가 없다(빈 라벨 105장은 제품이 반만 찍힌 사진)</a:t>
+              <a:rPr sz="1800" b="0">
+                <a:solidFill>
+                  <a:srgbClr val="222222"/>
+                </a:solidFill>
+                <a:latin typeface="맑은 고딕"/>
+              </a:rPr>
+              <a:t>학습 시드가 하나이고, 팀원 모델은 학습 조건이 우리와 다르다(임계값은 우리 규칙으로 재선정)</a:t>
             </a:r>
           </a:p>
           <a:p>
             <a:pPr>
               <a:spcAft>
-                <a:spcPts val="600"/>
+                <a:spcPts val="1100"/>
               </a:spcAft>
             </a:pPr>
             <a:r>
-              <a:rPr sz="1500" b="1">
+              <a:rPr sz="1800" b="1">
                 <a:solidFill>
                   <a:srgbClr val="2AA7B8"/>
                 </a:solidFill>
@@ -9434,59 +11416,42 @@
               <a:t>• </a:t>
             </a:r>
             <a:r>
-              <a:rPr sz="1500" b="1">
-                <a:solidFill>
-                  <a:srgbClr val="222222"/>
-                </a:solidFill>
-                <a:latin typeface="맑은 고딕"/>
-              </a:rPr>
-              <a:t>전처리</a:t>
-            </a:r>
-            <a:r>
-              <a:rPr sz="1500" b="0">
-                <a:solidFill>
-                  <a:srgbClr val="222222"/>
-                </a:solidFill>
-                <a:latin typeface="맑은 고딕"/>
-              </a:rPr>
-              <a:t>: 원본 BMP → 중복 제거(277쌍) → 장비의 색 표시 제거(주변 회색 5x5 평균으로 메움) → 회색조 PNG. 원본에 다시 적용하면 2,532장이 </a:t>
-            </a:r>
-            <a:r>
-              <a:rPr sz="1500" b="1">
-                <a:solidFill>
-                  <a:srgbClr val="222222"/>
-                </a:solidFill>
-                <a:latin typeface="맑은 고딕"/>
-              </a:rPr>
-              <a:t>픽셀 단위로 모두 일치</a:t>
-            </a:r>
-          </a:p>
-        </p:txBody>
-      </p:sp>
-      <p:pic>
-        <p:nvPicPr>
-          <p:cNvPr id="7" name="Picture 6" descr="fig1a_data_labels.png"/>
-          <p:cNvPicPr>
-            <a:picLocks noChangeAspect="1"/>
-          </p:cNvPicPr>
-          <p:nvPr/>
-        </p:nvPicPr>
-        <p:blipFill>
-          <a:blip r:embed="rId2"/>
-          <a:stretch>
-            <a:fillRect/>
-          </a:stretch>
-        </p:blipFill>
-        <p:spPr>
-          <a:xfrm>
-            <a:off x="5394960" y="2672161"/>
-            <a:ext cx="6400800" cy="2610956"/>
-          </a:xfrm>
-          <a:prstGeom prst="rect">
-            <a:avLst/>
-          </a:prstGeom>
-        </p:spPr>
-      </p:pic>
+              <a:rPr sz="1800" b="0">
+                <a:solidFill>
+                  <a:srgbClr val="222222"/>
+                </a:solidFill>
+                <a:latin typeface="맑은 고딕"/>
+              </a:rPr>
+              <a:t>속도는 노트북에서 측정했고 실행마다 변동이 크다. 현장 장비 사양과 재검사 비용은 알지 못한다</a:t>
+            </a:r>
+          </a:p>
+          <a:p>
+            <a:pPr>
+              <a:spcAft>
+                <a:spcPts val="1100"/>
+              </a:spcAft>
+            </a:pPr>
+            <a:r>
+              <a:rPr sz="1800" b="1">
+                <a:solidFill>
+                  <a:srgbClr val="2AA7B8"/>
+                </a:solidFill>
+                <a:latin typeface="맑은 고딕"/>
+              </a:rPr>
+              <a:t>• </a:t>
+            </a:r>
+            <a:r>
+              <a:rPr sz="1800" b="0">
+                <a:solidFill>
+                  <a:srgbClr val="222222"/>
+                </a:solidFill>
+                <a:latin typeface="맑은 고딕"/>
+              </a:rPr>
+              <a:t>향후: 흔적 검증(원본 BMP 2x2 실험), 실제 정상 제품 이미지 확보, val 반복, 합성 점 대조군(s=0)</a:t>
+            </a:r>
+          </a:p>
+        </p:txBody>
+      </p:sp>
     </p:spTree>
   </p:cSld>
   <p:clrMapOvr>
@@ -9495,7 +11460,7 @@
 </p:sld>
 </file>
 
-<file path=ppt/slides/slide20.xml><?xml version="1.0" encoding="utf-8"?>
+<file path=ppt/slides/slide25.xml><?xml version="1.0" encoding="utf-8"?>
 <p:sld xmlns:a="http://schemas.openxmlformats.org/drawingml/2006/main" xmlns:p="http://schemas.openxmlformats.org/presentationml/2006/main" xmlns:r="http://schemas.openxmlformats.org/officeDocument/2006/relationships">
   <p:cSld>
     <p:spTree>
@@ -9578,7 +11543,7 @@
                 </a:solidFill>
                 <a:latin typeface="맑은 고딕"/>
               </a:rPr>
-              <a:t>한계와 향후 과제</a:t>
+              <a:t>결론</a:t>
             </a:r>
           </a:p>
         </p:txBody>
@@ -9591,8 +11556,8 @@
         </p:nvSpPr>
         <p:spPr>
           <a:xfrm>
-            <a:off x="502920" y="1005840"/>
-            <a:ext cx="11185855" cy="640080"/>
+            <a:off x="11094415" y="6400800"/>
+            <a:ext cx="822960" cy="320040"/>
           </a:xfrm>
           <a:prstGeom prst="rect">
             <a:avLst/>
@@ -9605,41 +11570,6 @@
           </a:bodyPr>
           <a:lstStyle/>
           <a:p>
-            <a:pPr algn="l"/>
-            <a:r>
-              <a:rPr sz="1800" b="1">
-                <a:solidFill>
-                  <a:srgbClr val="2AA7B8"/>
-                </a:solidFill>
-                <a:latin typeface="맑은 고딕"/>
-              </a:rPr>
-              <a:t>숨기지 않고 적는다</a:t>
-            </a:r>
-          </a:p>
-        </p:txBody>
-      </p:sp>
-      <p:sp>
-        <p:nvSpPr>
-          <p:cNvPr id="5" name="TextBox 4"/>
-          <p:cNvSpPr txBox="1"/>
-          <p:nvPr/>
-        </p:nvSpPr>
-        <p:spPr>
-          <a:xfrm>
-            <a:off x="11094415" y="6400800"/>
-            <a:ext cx="822960" cy="320040"/>
-          </a:xfrm>
-          <a:prstGeom prst="rect">
-            <a:avLst/>
-          </a:prstGeom>
-          <a:noFill/>
-        </p:spPr>
-        <p:txBody>
-          <a:bodyPr wrap="square" anchor="t" lIns="45720" rIns="45720">
-            <a:spAutoFit/>
-          </a:bodyPr>
-          <a:lstStyle/>
-          <a:p>
             <a:pPr algn="r"/>
             <a:r>
               <a:rPr sz="1200" b="0">
@@ -9648,390 +11578,7 @@
                 </a:solidFill>
                 <a:latin typeface="맑은 고딕"/>
               </a:rPr>
-              <a:t>20</a:t>
-            </a:r>
-          </a:p>
-        </p:txBody>
-      </p:sp>
-      <p:sp>
-        <p:nvSpPr>
-          <p:cNvPr id="6" name="TextBox 5"/>
-          <p:cNvSpPr txBox="1"/>
-          <p:nvPr/>
-        </p:nvSpPr>
-        <p:spPr>
-          <a:xfrm>
-            <a:off x="640080" y="1783080"/>
-            <a:ext cx="10972800" cy="4572000"/>
-          </a:xfrm>
-          <a:prstGeom prst="rect">
-            <a:avLst/>
-          </a:prstGeom>
-          <a:noFill/>
-        </p:spPr>
-        <p:txBody>
-          <a:bodyPr wrap="square" lIns="45720" rIns="45720">
-            <a:spAutoFit/>
-          </a:bodyPr>
-          <a:lstStyle/>
-          <a:p>
-            <a:pPr>
-              <a:spcAft>
-                <a:spcPts val="1100"/>
-              </a:spcAft>
-            </a:pPr>
-            <a:r>
-              <a:rPr sz="1800" b="1">
-                <a:solidFill>
-                  <a:srgbClr val="2AA7B8"/>
-                </a:solidFill>
-                <a:latin typeface="맑은 고딕"/>
-              </a:rPr>
-              <a:t>• </a:t>
-            </a:r>
-            <a:r>
-              <a:rPr sz="1800" b="0">
-                <a:solidFill>
-                  <a:srgbClr val="222222"/>
-                </a:solidFill>
-                <a:latin typeface="맑은 고딕"/>
-              </a:rPr>
-              <a:t>합성 점과 가짜 정상은 </a:t>
-            </a:r>
-            <a:r>
-              <a:rPr sz="1800" b="1">
-                <a:solidFill>
-                  <a:srgbClr val="222222"/>
-                </a:solidFill>
-                <a:latin typeface="맑은 고딕"/>
-              </a:rPr>
-              <a:t>인위적인 이미지</a:t>
-            </a:r>
-            <a:r>
-              <a:rPr sz="1800" b="0">
-                <a:solidFill>
-                  <a:srgbClr val="222222"/>
-                </a:solidFill>
-                <a:latin typeface="맑은 고딕"/>
-              </a:rPr>
-              <a:t>다. 실제 현장 성능이 아니라 상대 비교와 취약점 탐색으로만 해석한다</a:t>
-            </a:r>
-          </a:p>
-          <a:p>
-            <a:pPr>
-              <a:spcAft>
-                <a:spcPts val="1100"/>
-              </a:spcAft>
-            </a:pPr>
-            <a:r>
-              <a:rPr sz="1800" b="1">
-                <a:solidFill>
-                  <a:srgbClr val="2AA7B8"/>
-                </a:solidFill>
-                <a:latin typeface="맑은 고딕"/>
-              </a:rPr>
-              <a:t>• </a:t>
-            </a:r>
-            <a:r>
-              <a:rPr sz="1800" b="0">
-                <a:solidFill>
-                  <a:srgbClr val="222222"/>
-                </a:solidFill>
-                <a:latin typeface="맑은 고딕"/>
-              </a:rPr>
-              <a:t>강건성 시험은 </a:t>
-            </a:r>
-            <a:r>
-              <a:rPr sz="1800" b="1">
-                <a:solidFill>
-                  <a:srgbClr val="222222"/>
-                </a:solidFill>
-                <a:latin typeface="맑은 고딕"/>
-              </a:rPr>
-              <a:t>test 이미지</a:t>
-            </a:r>
-            <a:r>
-              <a:rPr sz="1800" b="0">
-                <a:solidFill>
-                  <a:srgbClr val="222222"/>
-                </a:solidFill>
-                <a:latin typeface="맑은 고딕"/>
-              </a:rPr>
-              <a:t>로 먼저 수행했다. 모델 선정에는 val 지표만 썼지만, 선정 근거로 쓰려면 val로 반복해야 한다</a:t>
-            </a:r>
-          </a:p>
-          <a:p>
-            <a:pPr>
-              <a:spcAft>
-                <a:spcPts val="1100"/>
-              </a:spcAft>
-            </a:pPr>
-            <a:r>
-              <a:rPr sz="1800" b="1">
-                <a:solidFill>
-                  <a:srgbClr val="2AA7B8"/>
-                </a:solidFill>
-                <a:latin typeface="맑은 고딕"/>
-              </a:rPr>
-              <a:t>• </a:t>
-            </a:r>
-            <a:r>
-              <a:rPr sz="1800" b="0">
-                <a:solidFill>
-                  <a:srgbClr val="222222"/>
-                </a:solidFill>
-                <a:latin typeface="맑은 고딕"/>
-              </a:rPr>
-              <a:t>'미탐지 우선'이라는 우선순위는 결과를 본 뒤 정했다. 오경보 우선이면 선정이 바뀐다</a:t>
-            </a:r>
-          </a:p>
-          <a:p>
-            <a:pPr>
-              <a:spcAft>
-                <a:spcPts val="1100"/>
-              </a:spcAft>
-            </a:pPr>
-            <a:r>
-              <a:rPr sz="1800" b="1">
-                <a:solidFill>
-                  <a:srgbClr val="2AA7B8"/>
-                </a:solidFill>
-                <a:latin typeface="맑은 고딕"/>
-              </a:rPr>
-              <a:t>• </a:t>
-            </a:r>
-            <a:r>
-              <a:rPr sz="1800" b="0">
-                <a:solidFill>
-                  <a:srgbClr val="222222"/>
-                </a:solidFill>
-                <a:latin typeface="맑은 고딕"/>
-              </a:rPr>
-              <a:t>표시(색 사각형) 제거의 </a:t>
-            </a:r>
-            <a:r>
-              <a:rPr sz="1800" b="1">
-                <a:solidFill>
-                  <a:srgbClr val="222222"/>
-                </a:solidFill>
-                <a:latin typeface="맑은 고딕"/>
-              </a:rPr>
-              <a:t>흔적</a:t>
-            </a:r>
-            <a:r>
-              <a:rPr sz="1800" b="0">
-                <a:solidFill>
-                  <a:srgbClr val="222222"/>
-                </a:solidFill>
-                <a:latin typeface="맑은 고딕"/>
-              </a:rPr>
-              <a:t>이 단서가 되는지는 검증하지 못했다</a:t>
-            </a:r>
-          </a:p>
-          <a:p>
-            <a:pPr>
-              <a:spcAft>
-                <a:spcPts val="1100"/>
-              </a:spcAft>
-            </a:pPr>
-            <a:r>
-              <a:rPr sz="1800" b="1">
-                <a:solidFill>
-                  <a:srgbClr val="2AA7B8"/>
-                </a:solidFill>
-                <a:latin typeface="맑은 고딕"/>
-              </a:rPr>
-              <a:t>• </a:t>
-            </a:r>
-            <a:r>
-              <a:rPr sz="1800" b="0">
-                <a:solidFill>
-                  <a:srgbClr val="222222"/>
-                </a:solidFill>
-                <a:latin typeface="맑은 고딕"/>
-              </a:rPr>
-              <a:t>학습 시드가 하나이고, 팀원 모델은 학습 조건이 우리와 다르다(임계값은 우리 규칙으로 재선정)</a:t>
-            </a:r>
-          </a:p>
-          <a:p>
-            <a:pPr>
-              <a:spcAft>
-                <a:spcPts val="1100"/>
-              </a:spcAft>
-            </a:pPr>
-            <a:r>
-              <a:rPr sz="1800" b="1">
-                <a:solidFill>
-                  <a:srgbClr val="2AA7B8"/>
-                </a:solidFill>
-                <a:latin typeface="맑은 고딕"/>
-              </a:rPr>
-              <a:t>• </a:t>
-            </a:r>
-            <a:r>
-              <a:rPr sz="1800" b="0">
-                <a:solidFill>
-                  <a:srgbClr val="222222"/>
-                </a:solidFill>
-                <a:latin typeface="맑은 고딕"/>
-              </a:rPr>
-              <a:t>속도는 노트북에서 측정했고 실행마다 변동이 크다. 현장 장비 사양과 재검사 비용은 알지 못한다</a:t>
-            </a:r>
-          </a:p>
-          <a:p>
-            <a:pPr>
-              <a:spcAft>
-                <a:spcPts val="1100"/>
-              </a:spcAft>
-            </a:pPr>
-            <a:r>
-              <a:rPr sz="1800" b="1">
-                <a:solidFill>
-                  <a:srgbClr val="2AA7B8"/>
-                </a:solidFill>
-                <a:latin typeface="맑은 고딕"/>
-              </a:rPr>
-              <a:t>• </a:t>
-            </a:r>
-            <a:r>
-              <a:rPr sz="1800" b="0">
-                <a:solidFill>
-                  <a:srgbClr val="222222"/>
-                </a:solidFill>
-                <a:latin typeface="맑은 고딕"/>
-              </a:rPr>
-              <a:t>향후: 흔적 검증(원본 BMP 2x2 실험), 실제 정상 제품 이미지 확보, val 반복, 합성 점 대조군(s=0)</a:t>
-            </a:r>
-          </a:p>
-        </p:txBody>
-      </p:sp>
-    </p:spTree>
-  </p:cSld>
-  <p:clrMapOvr>
-    <a:masterClrMapping/>
-  </p:clrMapOvr>
-</p:sld>
-</file>
-
-<file path=ppt/slides/slide21.xml><?xml version="1.0" encoding="utf-8"?>
-<p:sld xmlns:a="http://schemas.openxmlformats.org/drawingml/2006/main" xmlns:p="http://schemas.openxmlformats.org/presentationml/2006/main" xmlns:r="http://schemas.openxmlformats.org/officeDocument/2006/relationships">
-  <p:cSld>
-    <p:spTree>
-      <p:nvGrpSpPr>
-        <p:cNvPr id="1" name=""/>
-        <p:cNvGrpSpPr/>
-        <p:nvPr/>
-      </p:nvGrpSpPr>
-      <p:grpSpPr/>
-      <p:sp>
-        <p:nvSpPr>
-          <p:cNvPr id="2" name="Rectangle 1"/>
-          <p:cNvSpPr/>
-          <p:nvPr/>
-        </p:nvSpPr>
-        <p:spPr>
-          <a:xfrm>
-            <a:off x="0" y="0"/>
-            <a:ext cx="164592" cy="6858000"/>
-          </a:xfrm>
-          <a:prstGeom prst="rect">
-            <a:avLst/>
-          </a:prstGeom>
-          <a:solidFill>
-            <a:srgbClr val="1F3A5F"/>
-          </a:solidFill>
-          <a:ln>
-            <a:noFill/>
-          </a:ln>
-        </p:spPr>
-        <p:style>
-          <a:lnRef idx="1">
-            <a:schemeClr val="accent1"/>
-          </a:lnRef>
-          <a:fillRef idx="3">
-            <a:schemeClr val="accent1"/>
-          </a:fillRef>
-          <a:effectRef idx="2">
-            <a:schemeClr val="accent1"/>
-          </a:effectRef>
-          <a:fontRef idx="minor">
-            <a:schemeClr val="lt1"/>
-          </a:fontRef>
-        </p:style>
-        <p:txBody>
-          <a:bodyPr rtlCol="0" anchor="ctr"/>
-          <a:lstStyle/>
-          <a:p>
-            <a:pPr algn="ctr"/>
-          </a:p>
-        </p:txBody>
-      </p:sp>
-      <p:sp>
-        <p:nvSpPr>
-          <p:cNvPr id="3" name="TextBox 2"/>
-          <p:cNvSpPr txBox="1"/>
-          <p:nvPr/>
-        </p:nvSpPr>
-        <p:spPr>
-          <a:xfrm>
-            <a:off x="502920" y="274320"/>
-            <a:ext cx="11185855" cy="731520"/>
-          </a:xfrm>
-          <a:prstGeom prst="rect">
-            <a:avLst/>
-          </a:prstGeom>
-          <a:noFill/>
-        </p:spPr>
-        <p:txBody>
-          <a:bodyPr wrap="square" anchor="ctr" lIns="45720" rIns="45720">
-            <a:spAutoFit/>
-          </a:bodyPr>
-          <a:lstStyle/>
-          <a:p>
-            <a:pPr algn="l"/>
-            <a:r>
-              <a:rPr sz="2800" b="1">
-                <a:solidFill>
-                  <a:srgbClr val="1F3A5F"/>
-                </a:solidFill>
-                <a:latin typeface="맑은 고딕"/>
-              </a:rPr>
-              <a:t>결론</a:t>
-            </a:r>
-          </a:p>
-        </p:txBody>
-      </p:sp>
-      <p:sp>
-        <p:nvSpPr>
-          <p:cNvPr id="4" name="TextBox 3"/>
-          <p:cNvSpPr txBox="1"/>
-          <p:nvPr/>
-        </p:nvSpPr>
-        <p:spPr>
-          <a:xfrm>
-            <a:off x="11094415" y="6400800"/>
-            <a:ext cx="822960" cy="320040"/>
-          </a:xfrm>
-          <a:prstGeom prst="rect">
-            <a:avLst/>
-          </a:prstGeom>
-          <a:noFill/>
-        </p:spPr>
-        <p:txBody>
-          <a:bodyPr wrap="square" anchor="t" lIns="45720" rIns="45720">
-            <a:spAutoFit/>
-          </a:bodyPr>
-          <a:lstStyle/>
-          <a:p>
-            <a:pPr algn="r"/>
-            <a:r>
-              <a:rPr sz="1200" b="0">
-                <a:solidFill>
-                  <a:srgbClr val="555B66"/>
-                </a:solidFill>
-                <a:latin typeface="맑은 고딕"/>
-              </a:rPr>
-              <a:t>21</a:t>
+              <a:t>25</a:t>
             </a:r>
           </a:p>
         </p:txBody>
@@ -10331,7 +11878,7 @@
                 </a:solidFill>
                 <a:latin typeface="맑은 고딕"/>
               </a:rPr>
-              <a:t>실험 흐름</a:t>
+              <a:t>전처리: 색 윤곽만 지우고 점은 남긴다</a:t>
             </a:r>
           </a:p>
         </p:txBody>
@@ -10366,7 +11913,7 @@
                 </a:solidFill>
                 <a:latin typeface="맑은 고딕"/>
               </a:rPr>
-              <a:t>학습·평가 → 못 찾은 것의 원인 → 일반화·robust 평가 → 베스트 모델</a:t>
+              <a:t>장비가 그린 색 사각형을 주변 회색 5x5 평균으로 메운 뒤 회색조 PNG로 저장</a:t>
             </a:r>
           </a:p>
         </p:txBody>
@@ -10406,128 +11953,30 @@
           </a:p>
         </p:txBody>
       </p:sp>
-      <p:sp>
-        <p:nvSpPr>
-          <p:cNvPr id="6" name="Rounded Rectangle 5"/>
-          <p:cNvSpPr/>
+      <p:pic>
+        <p:nvPicPr>
+          <p:cNvPr id="6" name="Picture 5" descr="fig5a_preprocess.png"/>
+          <p:cNvPicPr>
+            <a:picLocks noChangeAspect="1"/>
+          </p:cNvPicPr>
           <p:nvPr/>
-        </p:nvSpPr>
-        <p:spPr>
-          <a:xfrm>
-            <a:off x="457200" y="1828800"/>
-            <a:ext cx="1764792" cy="3017520"/>
-          </a:xfrm>
-          <a:prstGeom prst="roundRect">
+        </p:nvPicPr>
+        <p:blipFill>
+          <a:blip r:embed="rId2"/>
+          <a:stretch>
+            <a:fillRect/>
+          </a:stretch>
+        </p:blipFill>
+        <p:spPr>
+          <a:xfrm>
+            <a:off x="444869" y="1600200"/>
+            <a:ext cx="7065541" cy="4892040"/>
+          </a:xfrm>
+          <a:prstGeom prst="rect">
             <a:avLst/>
           </a:prstGeom>
-          <a:solidFill>
-            <a:srgbClr val="DDE6F7"/>
-          </a:solidFill>
-          <a:ln>
-            <a:solidFill>
-              <a:srgbClr val="555B66"/>
-            </a:solidFill>
-          </a:ln>
-        </p:spPr>
-        <p:style>
-          <a:lnRef idx="1">
-            <a:schemeClr val="accent1"/>
-          </a:lnRef>
-          <a:fillRef idx="3">
-            <a:schemeClr val="accent1"/>
-          </a:fillRef>
-          <a:effectRef idx="2">
-            <a:schemeClr val="accent1"/>
-          </a:effectRef>
-          <a:fontRef idx="minor">
-            <a:schemeClr val="lt1"/>
-          </a:fontRef>
-        </p:style>
-        <p:txBody>
-          <a:bodyPr rtlCol="0" anchor="ctr" wrap="square" lIns="73152" rIns="73152"/>
-          <a:lstStyle/>
-          <a:p>
-            <a:pPr algn="ctr">
-              <a:spcAft>
-                <a:spcPts val="0"/>
-              </a:spcAft>
-            </a:pPr>
-            <a:r>
-              <a:rPr sz="1600" b="1">
-                <a:solidFill>
-                  <a:srgbClr val="1F3A5F"/>
-                </a:solidFill>
-                <a:latin typeface="맑은 고딕"/>
-              </a:rPr>
-              <a:t>① 학습·검증</a:t>
-            </a:r>
-          </a:p>
-          <a:p>
-            <a:pPr algn="ctr">
-              <a:spcAft>
-                <a:spcPts val="1000"/>
-              </a:spcAft>
-            </a:pPr>
-            <a:r>
-              <a:rPr sz="1600" b="1">
-                <a:solidFill>
-                  <a:srgbClr val="1F3A5F"/>
-                </a:solidFill>
-                <a:latin typeface="맑은 고딕"/>
-              </a:rPr>
-              <a:t>·평가</a:t>
-            </a:r>
-          </a:p>
-          <a:p>
-            <a:pPr algn="ctr">
-              <a:spcAft>
-                <a:spcPts val="300"/>
-              </a:spcAft>
-            </a:pPr>
-            <a:r>
-              <a:rPr sz="1300">
-                <a:solidFill>
-                  <a:srgbClr val="222222"/>
-                </a:solidFill>
-                <a:latin typeface="맑은 고딕"/>
-              </a:rPr>
-              <a:t>6개 모델</a:t>
-            </a:r>
-          </a:p>
-          <a:p>
-            <a:pPr algn="ctr">
-              <a:spcAft>
-                <a:spcPts val="300"/>
-              </a:spcAft>
-            </a:pPr>
-            <a:r>
-              <a:rPr sz="1300">
-                <a:solidFill>
-                  <a:srgbClr val="222222"/>
-                </a:solidFill>
-                <a:latin typeface="맑은 고딕"/>
-              </a:rPr>
-              <a:t>임계값 val 고정</a:t>
-            </a:r>
-          </a:p>
-          <a:p>
-            <a:pPr algn="ctr">
-              <a:spcAft>
-                <a:spcPts val="300"/>
-              </a:spcAft>
-            </a:pPr>
-            <a:r>
-              <a:rPr sz="1300">
-                <a:solidFill>
-                  <a:srgbClr val="222222"/>
-                </a:solidFill>
-                <a:latin typeface="맑은 고딕"/>
-              </a:rPr>
-              <a:t>test는 한 번</a:t>
-            </a:r>
-          </a:p>
-        </p:txBody>
-      </p:sp>
+        </p:spPr>
+      </p:pic>
       <p:sp>
         <p:nvSpPr>
           <p:cNvPr id="7" name="TextBox 6"/>
@@ -10536,8 +11985,8 @@
         </p:nvSpPr>
         <p:spPr>
           <a:xfrm>
-            <a:off x="2185415" y="3154680"/>
-            <a:ext cx="219456" cy="365760"/>
+            <a:off x="7772400" y="1783080"/>
+            <a:ext cx="4114800" cy="4572000"/>
           </a:xfrm>
           <a:prstGeom prst="rect">
             <a:avLst/>
@@ -10545,839 +11994,6 @@
           <a:noFill/>
         </p:spPr>
         <p:txBody>
-          <a:bodyPr wrap="square" anchor="t" lIns="45720" rIns="45720">
-            <a:spAutoFit/>
-          </a:bodyPr>
-          <a:lstStyle/>
-          <a:p>
-            <a:pPr algn="ctr"/>
-            <a:r>
-              <a:rPr sz="1000" b="0">
-                <a:solidFill>
-                  <a:srgbClr val="555B66"/>
-                </a:solidFill>
-                <a:latin typeface="맑은 고딕"/>
-              </a:rPr>
-              <a:t>▶</a:t>
-            </a:r>
-          </a:p>
-        </p:txBody>
-      </p:sp>
-      <p:sp>
-        <p:nvSpPr>
-          <p:cNvPr id="8" name="Rounded Rectangle 7"/>
-          <p:cNvSpPr/>
-          <p:nvPr/>
-        </p:nvSpPr>
-        <p:spPr>
-          <a:xfrm>
-            <a:off x="2368296" y="1828800"/>
-            <a:ext cx="1764792" cy="3017520"/>
-          </a:xfrm>
-          <a:prstGeom prst="roundRect">
-            <a:avLst/>
-          </a:prstGeom>
-          <a:solidFill>
-            <a:srgbClr val="FBE7CC"/>
-          </a:solidFill>
-          <a:ln>
-            <a:solidFill>
-              <a:srgbClr val="555B66"/>
-            </a:solidFill>
-          </a:ln>
-        </p:spPr>
-        <p:style>
-          <a:lnRef idx="1">
-            <a:schemeClr val="accent1"/>
-          </a:lnRef>
-          <a:fillRef idx="3">
-            <a:schemeClr val="accent1"/>
-          </a:fillRef>
-          <a:effectRef idx="2">
-            <a:schemeClr val="accent1"/>
-          </a:effectRef>
-          <a:fontRef idx="minor">
-            <a:schemeClr val="lt1"/>
-          </a:fontRef>
-        </p:style>
-        <p:txBody>
-          <a:bodyPr rtlCol="0" anchor="ctr" wrap="square" lIns="73152" rIns="73152"/>
-          <a:lstStyle/>
-          <a:p>
-            <a:pPr algn="ctr">
-              <a:spcAft>
-                <a:spcPts val="0"/>
-              </a:spcAft>
-            </a:pPr>
-            <a:r>
-              <a:rPr sz="1600" b="1">
-                <a:solidFill>
-                  <a:srgbClr val="1F3A5F"/>
-                </a:solidFill>
-                <a:latin typeface="맑은 고딕"/>
-              </a:rPr>
-              <a:t>② 못 찾은</a:t>
-            </a:r>
-          </a:p>
-          <a:p>
-            <a:pPr algn="ctr">
-              <a:spcAft>
-                <a:spcPts val="1000"/>
-              </a:spcAft>
-            </a:pPr>
-            <a:r>
-              <a:rPr sz="1600" b="1">
-                <a:solidFill>
-                  <a:srgbClr val="1F3A5F"/>
-                </a:solidFill>
-                <a:latin typeface="맑은 고딕"/>
-              </a:rPr>
-              <a:t>것이 있다</a:t>
-            </a:r>
-          </a:p>
-          <a:p>
-            <a:pPr algn="ctr">
-              <a:spcAft>
-                <a:spcPts val="300"/>
-              </a:spcAft>
-            </a:pPr>
-            <a:r>
-              <a:rPr sz="1300">
-                <a:solidFill>
-                  <a:srgbClr val="222222"/>
-                </a:solidFill>
-                <a:latin typeface="맑은 고딕"/>
-              </a:rPr>
-              <a:t>정답 663개 중</a:t>
-            </a:r>
-          </a:p>
-          <a:p>
-            <a:pPr algn="ctr">
-              <a:spcAft>
-                <a:spcPts val="300"/>
-              </a:spcAft>
-            </a:pPr>
-            <a:r>
-              <a:rPr sz="1300">
-                <a:solidFill>
-                  <a:srgbClr val="222222"/>
-                </a:solidFill>
-                <a:latin typeface="맑은 고딕"/>
-              </a:rPr>
-              <a:t>6~9개 놓침</a:t>
-            </a:r>
-          </a:p>
-          <a:p>
-            <a:pPr algn="ctr">
-              <a:spcAft>
-                <a:spcPts val="300"/>
-              </a:spcAft>
-            </a:pPr>
-            <a:r>
-              <a:rPr sz="1300">
-                <a:solidFill>
-                  <a:srgbClr val="222222"/>
-                </a:solidFill>
-                <a:latin typeface="맑은 고딕"/>
-              </a:rPr>
-              <a:t>F1 0.99 안팎</a:t>
-            </a:r>
-          </a:p>
-        </p:txBody>
-      </p:sp>
-      <p:sp>
-        <p:nvSpPr>
-          <p:cNvPr id="9" name="TextBox 8"/>
-          <p:cNvSpPr txBox="1"/>
-          <p:nvPr/>
-        </p:nvSpPr>
-        <p:spPr>
-          <a:xfrm>
-            <a:off x="4096511" y="3154680"/>
-            <a:ext cx="219456" cy="365760"/>
-          </a:xfrm>
-          <a:prstGeom prst="rect">
-            <a:avLst/>
-          </a:prstGeom>
-          <a:noFill/>
-        </p:spPr>
-        <p:txBody>
-          <a:bodyPr wrap="square" anchor="t" lIns="45720" rIns="45720">
-            <a:spAutoFit/>
-          </a:bodyPr>
-          <a:lstStyle/>
-          <a:p>
-            <a:pPr algn="ctr"/>
-            <a:r>
-              <a:rPr sz="1000" b="0">
-                <a:solidFill>
-                  <a:srgbClr val="555B66"/>
-                </a:solidFill>
-                <a:latin typeface="맑은 고딕"/>
-              </a:rPr>
-              <a:t>▶</a:t>
-            </a:r>
-          </a:p>
-        </p:txBody>
-      </p:sp>
-      <p:sp>
-        <p:nvSpPr>
-          <p:cNvPr id="10" name="Rounded Rectangle 9"/>
-          <p:cNvSpPr/>
-          <p:nvPr/>
-        </p:nvSpPr>
-        <p:spPr>
-          <a:xfrm>
-            <a:off x="4279392" y="1828800"/>
-            <a:ext cx="1764792" cy="3017520"/>
-          </a:xfrm>
-          <a:prstGeom prst="roundRect">
-            <a:avLst/>
-          </a:prstGeom>
-          <a:solidFill>
-            <a:srgbClr val="D6ECDC"/>
-          </a:solidFill>
-          <a:ln>
-            <a:solidFill>
-              <a:srgbClr val="555B66"/>
-            </a:solidFill>
-          </a:ln>
-        </p:spPr>
-        <p:style>
-          <a:lnRef idx="1">
-            <a:schemeClr val="accent1"/>
-          </a:lnRef>
-          <a:fillRef idx="3">
-            <a:schemeClr val="accent1"/>
-          </a:fillRef>
-          <a:effectRef idx="2">
-            <a:schemeClr val="accent1"/>
-          </a:effectRef>
-          <a:fontRef idx="minor">
-            <a:schemeClr val="lt1"/>
-          </a:fontRef>
-        </p:style>
-        <p:txBody>
-          <a:bodyPr rtlCol="0" anchor="ctr" wrap="square" lIns="73152" rIns="73152"/>
-          <a:lstStyle/>
-          <a:p>
-            <a:pPr algn="ctr">
-              <a:spcAft>
-                <a:spcPts val="0"/>
-              </a:spcAft>
-            </a:pPr>
-            <a:r>
-              <a:rPr sz="1600" b="1">
-                <a:solidFill>
-                  <a:srgbClr val="1F3A5F"/>
-                </a:solidFill>
-                <a:latin typeface="맑은 고딕"/>
-              </a:rPr>
-              <a:t>③ 원인은</a:t>
-            </a:r>
-          </a:p>
-          <a:p>
-            <a:pPr algn="ctr">
-              <a:spcAft>
-                <a:spcPts val="1000"/>
-              </a:spcAft>
-            </a:pPr>
-            <a:r>
-              <a:rPr sz="1600" b="1">
-                <a:solidFill>
-                  <a:srgbClr val="1F3A5F"/>
-                </a:solidFill>
-                <a:latin typeface="맑은 고딕"/>
-              </a:rPr>
-              <a:t>라벨 문제</a:t>
-            </a:r>
-          </a:p>
-          <a:p>
-            <a:pPr algn="ctr">
-              <a:spcAft>
-                <a:spcPts val="300"/>
-              </a:spcAft>
-            </a:pPr>
-            <a:r>
-              <a:rPr sz="1300">
-                <a:solidFill>
-                  <a:srgbClr val="222222"/>
-                </a:solidFill>
-                <a:latin typeface="맑은 고딕"/>
-              </a:rPr>
-              <a:t>공식 라벨</a:t>
-            </a:r>
-          </a:p>
-          <a:p>
-            <a:pPr algn="ctr">
-              <a:spcAft>
-                <a:spcPts val="300"/>
-              </a:spcAft>
-            </a:pPr>
-            <a:r>
-              <a:rPr sz="1300">
-                <a:solidFill>
-                  <a:srgbClr val="222222"/>
-                </a:solidFill>
-                <a:latin typeface="맑은 고딕"/>
-              </a:rPr>
-              <a:t>박스 크기 문제</a:t>
-            </a:r>
-          </a:p>
-          <a:p>
-            <a:pPr algn="ctr">
-              <a:spcAft>
-                <a:spcPts val="300"/>
-              </a:spcAft>
-            </a:pPr>
-            <a:r>
-              <a:rPr sz="1300">
-                <a:solidFill>
-                  <a:srgbClr val="222222"/>
-                </a:solidFill>
-                <a:latin typeface="맑은 고딕"/>
-              </a:rPr>
-              <a:t>중심 거리로</a:t>
-            </a:r>
-          </a:p>
-          <a:p>
-            <a:pPr algn="ctr">
-              <a:spcAft>
-                <a:spcPts val="300"/>
-              </a:spcAft>
-            </a:pPr>
-            <a:r>
-              <a:rPr sz="1300">
-                <a:solidFill>
-                  <a:srgbClr val="222222"/>
-                </a:solidFill>
-                <a:latin typeface="맑은 고딕"/>
-              </a:rPr>
-              <a:t>재채점</a:t>
-            </a:r>
-          </a:p>
-          <a:p>
-            <a:pPr algn="ctr">
-              <a:spcAft>
-                <a:spcPts val="300"/>
-              </a:spcAft>
-            </a:pPr>
-            <a:r>
-              <a:rPr sz="1300">
-                <a:solidFill>
-                  <a:srgbClr val="222222"/>
-                </a:solidFill>
-                <a:latin typeface="맑은 고딕"/>
-              </a:rPr>
-              <a:t>→ 거의 다 찾음</a:t>
-            </a:r>
-          </a:p>
-        </p:txBody>
-      </p:sp>
-      <p:sp>
-        <p:nvSpPr>
-          <p:cNvPr id="11" name="TextBox 10"/>
-          <p:cNvSpPr txBox="1"/>
-          <p:nvPr/>
-        </p:nvSpPr>
-        <p:spPr>
-          <a:xfrm>
-            <a:off x="6007607" y="3154680"/>
-            <a:ext cx="219456" cy="365760"/>
-          </a:xfrm>
-          <a:prstGeom prst="rect">
-            <a:avLst/>
-          </a:prstGeom>
-          <a:noFill/>
-        </p:spPr>
-        <p:txBody>
-          <a:bodyPr wrap="square" anchor="t" lIns="45720" rIns="45720">
-            <a:spAutoFit/>
-          </a:bodyPr>
-          <a:lstStyle/>
-          <a:p>
-            <a:pPr algn="ctr"/>
-            <a:r>
-              <a:rPr sz="1000" b="0">
-                <a:solidFill>
-                  <a:srgbClr val="555B66"/>
-                </a:solidFill>
-                <a:latin typeface="맑은 고딕"/>
-              </a:rPr>
-              <a:t>▶</a:t>
-            </a:r>
-          </a:p>
-        </p:txBody>
-      </p:sp>
-      <p:sp>
-        <p:nvSpPr>
-          <p:cNvPr id="12" name="Rounded Rectangle 11"/>
-          <p:cNvSpPr/>
-          <p:nvPr/>
-        </p:nvSpPr>
-        <p:spPr>
-          <a:xfrm>
-            <a:off x="6190488" y="1828800"/>
-            <a:ext cx="1764792" cy="3017520"/>
-          </a:xfrm>
-          <a:prstGeom prst="roundRect">
-            <a:avLst/>
-          </a:prstGeom>
-          <a:solidFill>
-            <a:srgbClr val="F5D9D9"/>
-          </a:solidFill>
-          <a:ln>
-            <a:solidFill>
-              <a:srgbClr val="555B66"/>
-            </a:solidFill>
-          </a:ln>
-        </p:spPr>
-        <p:style>
-          <a:lnRef idx="1">
-            <a:schemeClr val="accent1"/>
-          </a:lnRef>
-          <a:fillRef idx="3">
-            <a:schemeClr val="accent1"/>
-          </a:fillRef>
-          <a:effectRef idx="2">
-            <a:schemeClr val="accent1"/>
-          </a:effectRef>
-          <a:fontRef idx="minor">
-            <a:schemeClr val="lt1"/>
-          </a:fontRef>
-        </p:style>
-        <p:txBody>
-          <a:bodyPr rtlCol="0" anchor="ctr" wrap="square" lIns="73152" rIns="73152"/>
-          <a:lstStyle/>
-          <a:p>
-            <a:pPr algn="ctr">
-              <a:spcAft>
-                <a:spcPts val="0"/>
-              </a:spcAft>
-            </a:pPr>
-            <a:r>
-              <a:rPr sz="1600" b="1">
-                <a:solidFill>
-                  <a:srgbClr val="1F3A5F"/>
-                </a:solidFill>
-                <a:latin typeface="맑은 고딕"/>
-              </a:rPr>
-              <a:t>④ 일반화</a:t>
-            </a:r>
-          </a:p>
-          <a:p>
-            <a:pPr algn="ctr">
-              <a:spcAft>
-                <a:spcPts val="1000"/>
-              </a:spcAft>
-            </a:pPr>
-            <a:r>
-              <a:rPr sz="1600" b="1">
-                <a:solidFill>
-                  <a:srgbClr val="1F3A5F"/>
-                </a:solidFill>
-                <a:latin typeface="맑은 고딕"/>
-              </a:rPr>
-              <a:t>·robust 평가</a:t>
-            </a:r>
-          </a:p>
-          <a:p>
-            <a:pPr algn="ctr">
-              <a:spcAft>
-                <a:spcPts val="300"/>
-              </a:spcAft>
-            </a:pPr>
-            <a:r>
-              <a:rPr sz="1300">
-                <a:solidFill>
-                  <a:srgbClr val="222222"/>
-                </a:solidFill>
-                <a:latin typeface="맑은 고딕"/>
-              </a:rPr>
-              <a:t>점 제거</a:t>
-            </a:r>
-          </a:p>
-          <a:p>
-            <a:pPr algn="ctr">
-              <a:spcAft>
-                <a:spcPts val="300"/>
-              </a:spcAft>
-            </a:pPr>
-            <a:r>
-              <a:rPr sz="1300">
-                <a:solidFill>
-                  <a:srgbClr val="222222"/>
-                </a:solidFill>
-                <a:latin typeface="맑은 고딕"/>
-              </a:rPr>
-              <a:t>가짜 정상</a:t>
-            </a:r>
-          </a:p>
-          <a:p>
-            <a:pPr algn="ctr">
-              <a:spcAft>
-                <a:spcPts val="300"/>
-              </a:spcAft>
-            </a:pPr>
-            <a:r>
-              <a:rPr sz="1300">
-                <a:solidFill>
-                  <a:srgbClr val="222222"/>
-                </a:solidFill>
-                <a:latin typeface="맑은 고딕"/>
-              </a:rPr>
-              <a:t>합성 점</a:t>
-            </a:r>
-          </a:p>
-          <a:p>
-            <a:pPr algn="ctr">
-              <a:spcAft>
-                <a:spcPts val="300"/>
-              </a:spcAft>
-            </a:pPr>
-            <a:r>
-              <a:rPr sz="1300">
-                <a:solidFill>
-                  <a:srgbClr val="222222"/>
-                </a:solidFill>
-                <a:latin typeface="맑은 고딕"/>
-              </a:rPr>
-              <a:t>호기별</a:t>
-            </a:r>
-          </a:p>
-        </p:txBody>
-      </p:sp>
-      <p:sp>
-        <p:nvSpPr>
-          <p:cNvPr id="13" name="TextBox 12"/>
-          <p:cNvSpPr txBox="1"/>
-          <p:nvPr/>
-        </p:nvSpPr>
-        <p:spPr>
-          <a:xfrm>
-            <a:off x="7918704" y="3154680"/>
-            <a:ext cx="219456" cy="365760"/>
-          </a:xfrm>
-          <a:prstGeom prst="rect">
-            <a:avLst/>
-          </a:prstGeom>
-          <a:noFill/>
-        </p:spPr>
-        <p:txBody>
-          <a:bodyPr wrap="square" anchor="t" lIns="45720" rIns="45720">
-            <a:spAutoFit/>
-          </a:bodyPr>
-          <a:lstStyle/>
-          <a:p>
-            <a:pPr algn="ctr"/>
-            <a:r>
-              <a:rPr sz="1000" b="0">
-                <a:solidFill>
-                  <a:srgbClr val="555B66"/>
-                </a:solidFill>
-                <a:latin typeface="맑은 고딕"/>
-              </a:rPr>
-              <a:t>▶</a:t>
-            </a:r>
-          </a:p>
-        </p:txBody>
-      </p:sp>
-      <p:sp>
-        <p:nvSpPr>
-          <p:cNvPr id="14" name="Rounded Rectangle 13"/>
-          <p:cNvSpPr/>
-          <p:nvPr/>
-        </p:nvSpPr>
-        <p:spPr>
-          <a:xfrm>
-            <a:off x="8101583" y="1828800"/>
-            <a:ext cx="1764792" cy="3017520"/>
-          </a:xfrm>
-          <a:prstGeom prst="roundRect">
-            <a:avLst/>
-          </a:prstGeom>
-          <a:solidFill>
-            <a:srgbClr val="E6DCF0"/>
-          </a:solidFill>
-          <a:ln>
-            <a:solidFill>
-              <a:srgbClr val="555B66"/>
-            </a:solidFill>
-          </a:ln>
-        </p:spPr>
-        <p:style>
-          <a:lnRef idx="1">
-            <a:schemeClr val="accent1"/>
-          </a:lnRef>
-          <a:fillRef idx="3">
-            <a:schemeClr val="accent1"/>
-          </a:fillRef>
-          <a:effectRef idx="2">
-            <a:schemeClr val="accent1"/>
-          </a:effectRef>
-          <a:fontRef idx="minor">
-            <a:schemeClr val="lt1"/>
-          </a:fontRef>
-        </p:style>
-        <p:txBody>
-          <a:bodyPr rtlCol="0" anchor="ctr" wrap="square" lIns="73152" rIns="73152"/>
-          <a:lstStyle/>
-          <a:p>
-            <a:pPr algn="ctr">
-              <a:spcAft>
-                <a:spcPts val="0"/>
-              </a:spcAft>
-            </a:pPr>
-            <a:r>
-              <a:rPr sz="1600" b="1">
-                <a:solidFill>
-                  <a:srgbClr val="1F3A5F"/>
-                </a:solidFill>
-                <a:latin typeface="맑은 고딕"/>
-              </a:rPr>
-              <a:t>⑤ 종합 →</a:t>
-            </a:r>
-          </a:p>
-          <a:p>
-            <a:pPr algn="ctr">
-              <a:spcAft>
-                <a:spcPts val="1000"/>
-              </a:spcAft>
-            </a:pPr>
-            <a:r>
-              <a:rPr sz="1600" b="1">
-                <a:solidFill>
-                  <a:srgbClr val="1F3A5F"/>
-                </a:solidFill>
-                <a:latin typeface="맑은 고딕"/>
-              </a:rPr>
-              <a:t>베스트 모델</a:t>
-            </a:r>
-          </a:p>
-          <a:p>
-            <a:pPr algn="ctr">
-              <a:spcAft>
-                <a:spcPts val="300"/>
-              </a:spcAft>
-            </a:pPr>
-            <a:r>
-              <a:rPr sz="1300">
-                <a:solidFill>
-                  <a:srgbClr val="222222"/>
-                </a:solidFill>
-                <a:latin typeface="맑은 고딕"/>
-              </a:rPr>
-              <a:t>val 동률 선두</a:t>
-            </a:r>
-          </a:p>
-          <a:p>
-            <a:pPr algn="ctr">
-              <a:spcAft>
-                <a:spcPts val="300"/>
-              </a:spcAft>
-            </a:pPr>
-            <a:r>
-              <a:rPr sz="1300">
-                <a:solidFill>
-                  <a:srgbClr val="222222"/>
-                </a:solidFill>
-                <a:latin typeface="맑은 고딕"/>
-              </a:rPr>
-              <a:t>미탐지 강건성</a:t>
-            </a:r>
-          </a:p>
-          <a:p>
-            <a:pPr algn="ctr">
-              <a:spcAft>
-                <a:spcPts val="300"/>
-              </a:spcAft>
-            </a:pPr>
-            <a:r>
-              <a:rPr sz="1300">
-                <a:solidFill>
-                  <a:srgbClr val="222222"/>
-                </a:solidFill>
-                <a:latin typeface="맑은 고딕"/>
-              </a:rPr>
-              <a:t>최상</a:t>
-            </a:r>
-          </a:p>
-          <a:p>
-            <a:pPr algn="ctr">
-              <a:spcAft>
-                <a:spcPts val="300"/>
-              </a:spcAft>
-            </a:pPr>
-            <a:r>
-              <a:rPr sz="1300">
-                <a:solidFill>
-                  <a:srgbClr val="222222"/>
-                </a:solidFill>
-                <a:latin typeface="맑은 고딕"/>
-              </a:rPr>
-              <a:t>→ D-FINE-N</a:t>
-            </a:r>
-          </a:p>
-        </p:txBody>
-      </p:sp>
-      <p:sp>
-        <p:nvSpPr>
-          <p:cNvPr id="15" name="TextBox 14"/>
-          <p:cNvSpPr txBox="1"/>
-          <p:nvPr/>
-        </p:nvSpPr>
-        <p:spPr>
-          <a:xfrm>
-            <a:off x="9829800" y="3154680"/>
-            <a:ext cx="219456" cy="365760"/>
-          </a:xfrm>
-          <a:prstGeom prst="rect">
-            <a:avLst/>
-          </a:prstGeom>
-          <a:noFill/>
-        </p:spPr>
-        <p:txBody>
-          <a:bodyPr wrap="square" anchor="t" lIns="45720" rIns="45720">
-            <a:spAutoFit/>
-          </a:bodyPr>
-          <a:lstStyle/>
-          <a:p>
-            <a:pPr algn="ctr"/>
-            <a:r>
-              <a:rPr sz="1000" b="0">
-                <a:solidFill>
-                  <a:srgbClr val="555B66"/>
-                </a:solidFill>
-                <a:latin typeface="맑은 고딕"/>
-              </a:rPr>
-              <a:t>▶</a:t>
-            </a:r>
-          </a:p>
-        </p:txBody>
-      </p:sp>
-      <p:sp>
-        <p:nvSpPr>
-          <p:cNvPr id="16" name="Rounded Rectangle 15"/>
-          <p:cNvSpPr/>
-          <p:nvPr/>
-        </p:nvSpPr>
-        <p:spPr>
-          <a:xfrm>
-            <a:off x="10012680" y="1828800"/>
-            <a:ext cx="1764792" cy="3017520"/>
-          </a:xfrm>
-          <a:prstGeom prst="roundRect">
-            <a:avLst/>
-          </a:prstGeom>
-          <a:solidFill>
-            <a:srgbClr val="F1ECD2"/>
-          </a:solidFill>
-          <a:ln>
-            <a:solidFill>
-              <a:srgbClr val="555B66"/>
-            </a:solidFill>
-          </a:ln>
-        </p:spPr>
-        <p:style>
-          <a:lnRef idx="1">
-            <a:schemeClr val="accent1"/>
-          </a:lnRef>
-          <a:fillRef idx="3">
-            <a:schemeClr val="accent1"/>
-          </a:fillRef>
-          <a:effectRef idx="2">
-            <a:schemeClr val="accent1"/>
-          </a:effectRef>
-          <a:fontRef idx="minor">
-            <a:schemeClr val="lt1"/>
-          </a:fontRef>
-        </p:style>
-        <p:txBody>
-          <a:bodyPr rtlCol="0" anchor="ctr" wrap="square" lIns="73152" rIns="73152"/>
-          <a:lstStyle/>
-          <a:p>
-            <a:pPr algn="ctr">
-              <a:spcAft>
-                <a:spcPts val="1000"/>
-              </a:spcAft>
-            </a:pPr>
-            <a:r>
-              <a:rPr sz="1600" b="1">
-                <a:solidFill>
-                  <a:srgbClr val="1F3A5F"/>
-                </a:solidFill>
-                <a:latin typeface="맑은 고딕"/>
-              </a:rPr>
-              <a:t>⑥ 현장 활용</a:t>
-            </a:r>
-          </a:p>
-          <a:p>
-            <a:pPr algn="ctr">
-              <a:spcAft>
-                <a:spcPts val="300"/>
-              </a:spcAft>
-            </a:pPr>
-            <a:r>
-              <a:rPr sz="1300">
-                <a:solidFill>
-                  <a:srgbClr val="222222"/>
-                </a:solidFill>
-                <a:latin typeface="맑은 고딕"/>
-              </a:rPr>
-              <a:t>3단 판정</a:t>
-            </a:r>
-          </a:p>
-          <a:p>
-            <a:pPr algn="ctr">
-              <a:spcAft>
-                <a:spcPts val="300"/>
-              </a:spcAft>
-            </a:pPr>
-            <a:r>
-              <a:rPr sz="1300">
-                <a:solidFill>
-                  <a:srgbClr val="222222"/>
-                </a:solidFill>
-                <a:latin typeface="맑은 고딕"/>
-              </a:rPr>
-              <a:t>재검사 구간</a:t>
-            </a:r>
-          </a:p>
-          <a:p>
-            <a:pPr algn="ctr">
-              <a:spcAft>
-                <a:spcPts val="300"/>
-              </a:spcAft>
-            </a:pPr>
-            <a:r>
-              <a:rPr sz="1300">
-                <a:solidFill>
-                  <a:srgbClr val="222222"/>
-                </a:solidFill>
-                <a:latin typeface="맑은 고딕"/>
-              </a:rPr>
-              <a:t>모델 선택 가이드</a:t>
-            </a:r>
-          </a:p>
-        </p:txBody>
-      </p:sp>
-      <p:sp>
-        <p:nvSpPr>
-          <p:cNvPr id="17" name="TextBox 16"/>
-          <p:cNvSpPr txBox="1"/>
-          <p:nvPr/>
-        </p:nvSpPr>
-        <p:spPr>
-          <a:xfrm>
-            <a:off x="731520" y="5120640"/>
-            <a:ext cx="10789920" cy="1554480"/>
-          </a:xfrm>
-          <a:prstGeom prst="rect">
-            <a:avLst/>
-          </a:prstGeom>
-          <a:noFill/>
-        </p:spPr>
-        <p:txBody>
           <a:bodyPr wrap="square" lIns="45720" rIns="45720">
             <a:spAutoFit/>
           </a:bodyPr>
@@ -11385,11 +12001,11 @@
           <a:p>
             <a:pPr>
               <a:spcAft>
-                <a:spcPts val="600"/>
+                <a:spcPts val="900"/>
               </a:spcAft>
             </a:pPr>
             <a:r>
-              <a:rPr sz="1600" b="1">
+              <a:rPr sz="1500" b="1">
                 <a:solidFill>
                   <a:srgbClr val="2AA7B8"/>
                 </a:solidFill>
@@ -11398,23 +12014,41 @@
               <a:t>• </a:t>
             </a:r>
             <a:r>
-              <a:rPr sz="1600" b="0">
-                <a:solidFill>
-                  <a:srgbClr val="222222"/>
-                </a:solidFill>
-                <a:latin typeface="맑은 고딕"/>
-              </a:rPr>
-              <a:t>모델 6개: 베이스라인 YOLOv3-tiny, Faster R-CNN(ResNet-50, MobileNetV3), 팀원 모델 YOLO26n · RT-DETR-l · D-FINE-N</a:t>
+              <a:rPr sz="1500" b="0">
+                <a:solidFill>
+                  <a:srgbClr val="222222"/>
+                </a:solidFill>
+                <a:latin typeface="맑은 고딕"/>
+              </a:rPr>
+              <a:t>색 표시는 결함 둘레의 </a:t>
+            </a:r>
+            <a:r>
+              <a:rPr sz="1500" b="1">
+                <a:solidFill>
+                  <a:srgbClr val="222222"/>
+                </a:solidFill>
+                <a:latin typeface="맑은 고딕"/>
+              </a:rPr>
+              <a:t>가는 사각형 윤곽</a:t>
+            </a:r>
+            <a:r>
+              <a:rPr sz="1500" b="0">
+                <a:solidFill>
+                  <a:srgbClr val="222222"/>
+                </a:solidFill>
+                <a:latin typeface="맑은 고딕"/>
+              </a:rPr>
+              <a:t>(장당 128~660픽셀), 점은 그대로 남는다</a:t>
             </a:r>
           </a:p>
           <a:p>
             <a:pPr>
               <a:spcAft>
-                <a:spcPts val="600"/>
+                <a:spcPts val="900"/>
               </a:spcAft>
             </a:pPr>
             <a:r>
-              <a:rPr sz="1600" b="1">
+              <a:rPr sz="1500" b="1">
                 <a:solidFill>
                   <a:srgbClr val="2AA7B8"/>
                 </a:solidFill>
@@ -11423,31 +12057,81 @@
               <a:t>• </a:t>
             </a:r>
             <a:r>
-              <a:rPr sz="1600" b="0">
-                <a:solidFill>
-                  <a:srgbClr val="222222"/>
-                </a:solidFill>
-                <a:latin typeface="맑은 고딕"/>
-              </a:rPr>
-              <a:t>모든 모델을 </a:t>
-            </a:r>
-            <a:r>
-              <a:rPr sz="1600" b="1">
-                <a:solidFill>
-                  <a:srgbClr val="222222"/>
-                </a:solidFill>
-                <a:latin typeface="맑은 고딕"/>
-              </a:rPr>
-              <a:t>같은 평가 코드</a:t>
-            </a:r>
-            <a:r>
-              <a:rPr sz="1600" b="0">
-                <a:solidFill>
-                  <a:srgbClr val="222222"/>
-                </a:solidFill>
-                <a:latin typeface="맑은 고딕"/>
-              </a:rPr>
-              <a:t>로 채점하고, 임계값은 val에서 정해 고정, test는 한 번만 본다</a:t>
+              <a:rPr sz="1500" b="0">
+                <a:solidFill>
+                  <a:srgbClr val="222222"/>
+                </a:solidFill>
+                <a:latin typeface="맑은 고딕"/>
+              </a:rPr>
+              <a:t>지우는 이유: 공식 라벨 중심의 99.8%가 색 박스 안 → 지우지 않으면 모델이 "색 네모 찾기"를 배운다</a:t>
+            </a:r>
+          </a:p>
+          <a:p>
+            <a:pPr>
+              <a:spcAft>
+                <a:spcPts val="900"/>
+              </a:spcAft>
+            </a:pPr>
+            <a:r>
+              <a:rPr sz="1500" b="1">
+                <a:solidFill>
+                  <a:srgbClr val="2AA7B8"/>
+                </a:solidFill>
+                <a:latin typeface="맑은 고딕"/>
+              </a:rPr>
+              <a:t>• </a:t>
+            </a:r>
+            <a:r>
+              <a:rPr sz="1500" b="0">
+                <a:solidFill>
+                  <a:srgbClr val="222222"/>
+                </a:solidFill>
+                <a:latin typeface="맑은 고딕"/>
+              </a:rPr>
+              <a:t>원본 BMP에 같은 방법을 다시 적용하면 </a:t>
+            </a:r>
+            <a:r>
+              <a:rPr sz="1500" b="1">
+                <a:solidFill>
+                  <a:srgbClr val="222222"/>
+                </a:solidFill>
+                <a:latin typeface="맑은 고딕"/>
+              </a:rPr>
+              <a:t>2,532장 모두 픽셀 단위로 일치</a:t>
+            </a:r>
+            <a:r>
+              <a:rPr sz="1500" b="0">
+                <a:solidFill>
+                  <a:srgbClr val="222222"/>
+                </a:solidFill>
+                <a:latin typeface="맑은 고딕"/>
+              </a:rPr>
+              <a:t>(검증 코드 포함)</a:t>
+            </a:r>
+          </a:p>
+          <a:p>
+            <a:pPr>
+              <a:spcAft>
+                <a:spcPts val="900"/>
+              </a:spcAft>
+            </a:pPr>
+            <a:r>
+              <a:rPr sz="1500" b="1">
+                <a:solidFill>
+                  <a:srgbClr val="2AA7B8"/>
+                </a:solidFill>
+                <a:latin typeface="맑은 고딕"/>
+              </a:rPr>
+              <a:t>• </a:t>
+            </a:r>
+            <a:r>
+              <a:rPr sz="1500" b="0">
+                <a:solidFill>
+                  <a:srgbClr val="222222"/>
+                </a:solidFill>
+                <a:latin typeface="맑은 고딕"/>
+              </a:rPr>
+              <a:t>코드는 이총의 브랜치(scripts/preprocess/)에 있고 main 병합이 필요하다</a:t>
             </a:r>
           </a:p>
         </p:txBody>
@@ -11543,7 +12227,7 @@
                 </a:solidFill>
                 <a:latin typeface="맑은 고딕"/>
               </a:rPr>
-              <a:t>① 학습 · 검증 · 평가</a:t>
+              <a:t>실험 흐름</a:t>
             </a:r>
           </a:p>
         </p:txBody>
@@ -11578,7 +12262,7 @@
                 </a:solidFill>
                 <a:latin typeface="맑은 고딕"/>
               </a:rPr>
-              <a:t>지금 있는 데이터로 6개 모델을 같은 조건에서 학습하고 평가했다</a:t>
+              <a:t>학습·평가 → 못 찾은 것의 원인 → 일반화·robust 평가 → 베스트 모델</a:t>
             </a:r>
           </a:p>
         </p:txBody>
@@ -11614,6 +12298,1218 @@
                 <a:latin typeface="맑은 고딕"/>
               </a:rPr>
               <a:t>4</a:t>
+            </a:r>
+          </a:p>
+        </p:txBody>
+      </p:sp>
+      <p:sp>
+        <p:nvSpPr>
+          <p:cNvPr id="6" name="Rounded Rectangle 5"/>
+          <p:cNvSpPr/>
+          <p:nvPr/>
+        </p:nvSpPr>
+        <p:spPr>
+          <a:xfrm>
+            <a:off x="457200" y="1828800"/>
+            <a:ext cx="1764792" cy="3017520"/>
+          </a:xfrm>
+          <a:prstGeom prst="roundRect">
+            <a:avLst/>
+          </a:prstGeom>
+          <a:solidFill>
+            <a:srgbClr val="DDE6F7"/>
+          </a:solidFill>
+          <a:ln>
+            <a:solidFill>
+              <a:srgbClr val="555B66"/>
+            </a:solidFill>
+          </a:ln>
+        </p:spPr>
+        <p:style>
+          <a:lnRef idx="1">
+            <a:schemeClr val="accent1"/>
+          </a:lnRef>
+          <a:fillRef idx="3">
+            <a:schemeClr val="accent1"/>
+          </a:fillRef>
+          <a:effectRef idx="2">
+            <a:schemeClr val="accent1"/>
+          </a:effectRef>
+          <a:fontRef idx="minor">
+            <a:schemeClr val="lt1"/>
+          </a:fontRef>
+        </p:style>
+        <p:txBody>
+          <a:bodyPr rtlCol="0" anchor="ctr" wrap="square" lIns="73152" rIns="73152"/>
+          <a:lstStyle/>
+          <a:p>
+            <a:pPr algn="ctr">
+              <a:spcAft>
+                <a:spcPts val="0"/>
+              </a:spcAft>
+            </a:pPr>
+            <a:r>
+              <a:rPr sz="1600" b="1">
+                <a:solidFill>
+                  <a:srgbClr val="1F3A5F"/>
+                </a:solidFill>
+                <a:latin typeface="맑은 고딕"/>
+              </a:rPr>
+              <a:t>① 학습·검증</a:t>
+            </a:r>
+          </a:p>
+          <a:p>
+            <a:pPr algn="ctr">
+              <a:spcAft>
+                <a:spcPts val="1000"/>
+              </a:spcAft>
+            </a:pPr>
+            <a:r>
+              <a:rPr sz="1600" b="1">
+                <a:solidFill>
+                  <a:srgbClr val="1F3A5F"/>
+                </a:solidFill>
+                <a:latin typeface="맑은 고딕"/>
+              </a:rPr>
+              <a:t>·평가</a:t>
+            </a:r>
+          </a:p>
+          <a:p>
+            <a:pPr algn="ctr">
+              <a:spcAft>
+                <a:spcPts val="300"/>
+              </a:spcAft>
+            </a:pPr>
+            <a:r>
+              <a:rPr sz="1300">
+                <a:solidFill>
+                  <a:srgbClr val="222222"/>
+                </a:solidFill>
+                <a:latin typeface="맑은 고딕"/>
+              </a:rPr>
+              <a:t>6개 모델</a:t>
+            </a:r>
+          </a:p>
+          <a:p>
+            <a:pPr algn="ctr">
+              <a:spcAft>
+                <a:spcPts val="300"/>
+              </a:spcAft>
+            </a:pPr>
+            <a:r>
+              <a:rPr sz="1300">
+                <a:solidFill>
+                  <a:srgbClr val="222222"/>
+                </a:solidFill>
+                <a:latin typeface="맑은 고딕"/>
+              </a:rPr>
+              <a:t>임계값 val 고정</a:t>
+            </a:r>
+          </a:p>
+          <a:p>
+            <a:pPr algn="ctr">
+              <a:spcAft>
+                <a:spcPts val="300"/>
+              </a:spcAft>
+            </a:pPr>
+            <a:r>
+              <a:rPr sz="1300">
+                <a:solidFill>
+                  <a:srgbClr val="222222"/>
+                </a:solidFill>
+                <a:latin typeface="맑은 고딕"/>
+              </a:rPr>
+              <a:t>test는 한 번</a:t>
+            </a:r>
+          </a:p>
+        </p:txBody>
+      </p:sp>
+      <p:sp>
+        <p:nvSpPr>
+          <p:cNvPr id="7" name="TextBox 6"/>
+          <p:cNvSpPr txBox="1"/>
+          <p:nvPr/>
+        </p:nvSpPr>
+        <p:spPr>
+          <a:xfrm>
+            <a:off x="2185415" y="3154680"/>
+            <a:ext cx="219456" cy="365760"/>
+          </a:xfrm>
+          <a:prstGeom prst="rect">
+            <a:avLst/>
+          </a:prstGeom>
+          <a:noFill/>
+        </p:spPr>
+        <p:txBody>
+          <a:bodyPr wrap="square" anchor="t" lIns="45720" rIns="45720">
+            <a:spAutoFit/>
+          </a:bodyPr>
+          <a:lstStyle/>
+          <a:p>
+            <a:pPr algn="ctr"/>
+            <a:r>
+              <a:rPr sz="1000" b="0">
+                <a:solidFill>
+                  <a:srgbClr val="555B66"/>
+                </a:solidFill>
+                <a:latin typeface="맑은 고딕"/>
+              </a:rPr>
+              <a:t>▶</a:t>
+            </a:r>
+          </a:p>
+        </p:txBody>
+      </p:sp>
+      <p:sp>
+        <p:nvSpPr>
+          <p:cNvPr id="8" name="Rounded Rectangle 7"/>
+          <p:cNvSpPr/>
+          <p:nvPr/>
+        </p:nvSpPr>
+        <p:spPr>
+          <a:xfrm>
+            <a:off x="2368296" y="1828800"/>
+            <a:ext cx="1764792" cy="3017520"/>
+          </a:xfrm>
+          <a:prstGeom prst="roundRect">
+            <a:avLst/>
+          </a:prstGeom>
+          <a:solidFill>
+            <a:srgbClr val="FBE7CC"/>
+          </a:solidFill>
+          <a:ln>
+            <a:solidFill>
+              <a:srgbClr val="555B66"/>
+            </a:solidFill>
+          </a:ln>
+        </p:spPr>
+        <p:style>
+          <a:lnRef idx="1">
+            <a:schemeClr val="accent1"/>
+          </a:lnRef>
+          <a:fillRef idx="3">
+            <a:schemeClr val="accent1"/>
+          </a:fillRef>
+          <a:effectRef idx="2">
+            <a:schemeClr val="accent1"/>
+          </a:effectRef>
+          <a:fontRef idx="minor">
+            <a:schemeClr val="lt1"/>
+          </a:fontRef>
+        </p:style>
+        <p:txBody>
+          <a:bodyPr rtlCol="0" anchor="ctr" wrap="square" lIns="73152" rIns="73152"/>
+          <a:lstStyle/>
+          <a:p>
+            <a:pPr algn="ctr">
+              <a:spcAft>
+                <a:spcPts val="0"/>
+              </a:spcAft>
+            </a:pPr>
+            <a:r>
+              <a:rPr sz="1600" b="1">
+                <a:solidFill>
+                  <a:srgbClr val="1F3A5F"/>
+                </a:solidFill>
+                <a:latin typeface="맑은 고딕"/>
+              </a:rPr>
+              <a:t>② 못 찾은</a:t>
+            </a:r>
+          </a:p>
+          <a:p>
+            <a:pPr algn="ctr">
+              <a:spcAft>
+                <a:spcPts val="1000"/>
+              </a:spcAft>
+            </a:pPr>
+            <a:r>
+              <a:rPr sz="1600" b="1">
+                <a:solidFill>
+                  <a:srgbClr val="1F3A5F"/>
+                </a:solidFill>
+                <a:latin typeface="맑은 고딕"/>
+              </a:rPr>
+              <a:t>것이 있다</a:t>
+            </a:r>
+          </a:p>
+          <a:p>
+            <a:pPr algn="ctr">
+              <a:spcAft>
+                <a:spcPts val="300"/>
+              </a:spcAft>
+            </a:pPr>
+            <a:r>
+              <a:rPr sz="1300">
+                <a:solidFill>
+                  <a:srgbClr val="222222"/>
+                </a:solidFill>
+                <a:latin typeface="맑은 고딕"/>
+              </a:rPr>
+              <a:t>정답 663개 중</a:t>
+            </a:r>
+          </a:p>
+          <a:p>
+            <a:pPr algn="ctr">
+              <a:spcAft>
+                <a:spcPts val="300"/>
+              </a:spcAft>
+            </a:pPr>
+            <a:r>
+              <a:rPr sz="1300">
+                <a:solidFill>
+                  <a:srgbClr val="222222"/>
+                </a:solidFill>
+                <a:latin typeface="맑은 고딕"/>
+              </a:rPr>
+              <a:t>6~9개 놓침</a:t>
+            </a:r>
+          </a:p>
+          <a:p>
+            <a:pPr algn="ctr">
+              <a:spcAft>
+                <a:spcPts val="300"/>
+              </a:spcAft>
+            </a:pPr>
+            <a:r>
+              <a:rPr sz="1300">
+                <a:solidFill>
+                  <a:srgbClr val="222222"/>
+                </a:solidFill>
+                <a:latin typeface="맑은 고딕"/>
+              </a:rPr>
+              <a:t>F1 0.99 안팎</a:t>
+            </a:r>
+          </a:p>
+        </p:txBody>
+      </p:sp>
+      <p:sp>
+        <p:nvSpPr>
+          <p:cNvPr id="9" name="TextBox 8"/>
+          <p:cNvSpPr txBox="1"/>
+          <p:nvPr/>
+        </p:nvSpPr>
+        <p:spPr>
+          <a:xfrm>
+            <a:off x="4096511" y="3154680"/>
+            <a:ext cx="219456" cy="365760"/>
+          </a:xfrm>
+          <a:prstGeom prst="rect">
+            <a:avLst/>
+          </a:prstGeom>
+          <a:noFill/>
+        </p:spPr>
+        <p:txBody>
+          <a:bodyPr wrap="square" anchor="t" lIns="45720" rIns="45720">
+            <a:spAutoFit/>
+          </a:bodyPr>
+          <a:lstStyle/>
+          <a:p>
+            <a:pPr algn="ctr"/>
+            <a:r>
+              <a:rPr sz="1000" b="0">
+                <a:solidFill>
+                  <a:srgbClr val="555B66"/>
+                </a:solidFill>
+                <a:latin typeface="맑은 고딕"/>
+              </a:rPr>
+              <a:t>▶</a:t>
+            </a:r>
+          </a:p>
+        </p:txBody>
+      </p:sp>
+      <p:sp>
+        <p:nvSpPr>
+          <p:cNvPr id="10" name="Rounded Rectangle 9"/>
+          <p:cNvSpPr/>
+          <p:nvPr/>
+        </p:nvSpPr>
+        <p:spPr>
+          <a:xfrm>
+            <a:off x="4279392" y="1828800"/>
+            <a:ext cx="1764792" cy="3017520"/>
+          </a:xfrm>
+          <a:prstGeom prst="roundRect">
+            <a:avLst/>
+          </a:prstGeom>
+          <a:solidFill>
+            <a:srgbClr val="D6ECDC"/>
+          </a:solidFill>
+          <a:ln>
+            <a:solidFill>
+              <a:srgbClr val="555B66"/>
+            </a:solidFill>
+          </a:ln>
+        </p:spPr>
+        <p:style>
+          <a:lnRef idx="1">
+            <a:schemeClr val="accent1"/>
+          </a:lnRef>
+          <a:fillRef idx="3">
+            <a:schemeClr val="accent1"/>
+          </a:fillRef>
+          <a:effectRef idx="2">
+            <a:schemeClr val="accent1"/>
+          </a:effectRef>
+          <a:fontRef idx="minor">
+            <a:schemeClr val="lt1"/>
+          </a:fontRef>
+        </p:style>
+        <p:txBody>
+          <a:bodyPr rtlCol="0" anchor="ctr" wrap="square" lIns="73152" rIns="73152"/>
+          <a:lstStyle/>
+          <a:p>
+            <a:pPr algn="ctr">
+              <a:spcAft>
+                <a:spcPts val="0"/>
+              </a:spcAft>
+            </a:pPr>
+            <a:r>
+              <a:rPr sz="1600" b="1">
+                <a:solidFill>
+                  <a:srgbClr val="1F3A5F"/>
+                </a:solidFill>
+                <a:latin typeface="맑은 고딕"/>
+              </a:rPr>
+              <a:t>③ 원인은</a:t>
+            </a:r>
+          </a:p>
+          <a:p>
+            <a:pPr algn="ctr">
+              <a:spcAft>
+                <a:spcPts val="1000"/>
+              </a:spcAft>
+            </a:pPr>
+            <a:r>
+              <a:rPr sz="1600" b="1">
+                <a:solidFill>
+                  <a:srgbClr val="1F3A5F"/>
+                </a:solidFill>
+                <a:latin typeface="맑은 고딕"/>
+              </a:rPr>
+              <a:t>라벨 문제</a:t>
+            </a:r>
+          </a:p>
+          <a:p>
+            <a:pPr algn="ctr">
+              <a:spcAft>
+                <a:spcPts val="300"/>
+              </a:spcAft>
+            </a:pPr>
+            <a:r>
+              <a:rPr sz="1300">
+                <a:solidFill>
+                  <a:srgbClr val="222222"/>
+                </a:solidFill>
+                <a:latin typeface="맑은 고딕"/>
+              </a:rPr>
+              <a:t>공식 라벨</a:t>
+            </a:r>
+          </a:p>
+          <a:p>
+            <a:pPr algn="ctr">
+              <a:spcAft>
+                <a:spcPts val="300"/>
+              </a:spcAft>
+            </a:pPr>
+            <a:r>
+              <a:rPr sz="1300">
+                <a:solidFill>
+                  <a:srgbClr val="222222"/>
+                </a:solidFill>
+                <a:latin typeface="맑은 고딕"/>
+              </a:rPr>
+              <a:t>박스 크기 문제</a:t>
+            </a:r>
+          </a:p>
+          <a:p>
+            <a:pPr algn="ctr">
+              <a:spcAft>
+                <a:spcPts val="300"/>
+              </a:spcAft>
+            </a:pPr>
+            <a:r>
+              <a:rPr sz="1300">
+                <a:solidFill>
+                  <a:srgbClr val="222222"/>
+                </a:solidFill>
+                <a:latin typeface="맑은 고딕"/>
+              </a:rPr>
+              <a:t>중심 거리로</a:t>
+            </a:r>
+          </a:p>
+          <a:p>
+            <a:pPr algn="ctr">
+              <a:spcAft>
+                <a:spcPts val="300"/>
+              </a:spcAft>
+            </a:pPr>
+            <a:r>
+              <a:rPr sz="1300">
+                <a:solidFill>
+                  <a:srgbClr val="222222"/>
+                </a:solidFill>
+                <a:latin typeface="맑은 고딕"/>
+              </a:rPr>
+              <a:t>재채점</a:t>
+            </a:r>
+          </a:p>
+          <a:p>
+            <a:pPr algn="ctr">
+              <a:spcAft>
+                <a:spcPts val="300"/>
+              </a:spcAft>
+            </a:pPr>
+            <a:r>
+              <a:rPr sz="1300">
+                <a:solidFill>
+                  <a:srgbClr val="222222"/>
+                </a:solidFill>
+                <a:latin typeface="맑은 고딕"/>
+              </a:rPr>
+              <a:t>→ 거의 다 찾음</a:t>
+            </a:r>
+          </a:p>
+        </p:txBody>
+      </p:sp>
+      <p:sp>
+        <p:nvSpPr>
+          <p:cNvPr id="11" name="TextBox 10"/>
+          <p:cNvSpPr txBox="1"/>
+          <p:nvPr/>
+        </p:nvSpPr>
+        <p:spPr>
+          <a:xfrm>
+            <a:off x="6007607" y="3154680"/>
+            <a:ext cx="219456" cy="365760"/>
+          </a:xfrm>
+          <a:prstGeom prst="rect">
+            <a:avLst/>
+          </a:prstGeom>
+          <a:noFill/>
+        </p:spPr>
+        <p:txBody>
+          <a:bodyPr wrap="square" anchor="t" lIns="45720" rIns="45720">
+            <a:spAutoFit/>
+          </a:bodyPr>
+          <a:lstStyle/>
+          <a:p>
+            <a:pPr algn="ctr"/>
+            <a:r>
+              <a:rPr sz="1000" b="0">
+                <a:solidFill>
+                  <a:srgbClr val="555B66"/>
+                </a:solidFill>
+                <a:latin typeface="맑은 고딕"/>
+              </a:rPr>
+              <a:t>▶</a:t>
+            </a:r>
+          </a:p>
+        </p:txBody>
+      </p:sp>
+      <p:sp>
+        <p:nvSpPr>
+          <p:cNvPr id="12" name="Rounded Rectangle 11"/>
+          <p:cNvSpPr/>
+          <p:nvPr/>
+        </p:nvSpPr>
+        <p:spPr>
+          <a:xfrm>
+            <a:off x="6190488" y="1828800"/>
+            <a:ext cx="1764792" cy="3017520"/>
+          </a:xfrm>
+          <a:prstGeom prst="roundRect">
+            <a:avLst/>
+          </a:prstGeom>
+          <a:solidFill>
+            <a:srgbClr val="F5D9D9"/>
+          </a:solidFill>
+          <a:ln>
+            <a:solidFill>
+              <a:srgbClr val="555B66"/>
+            </a:solidFill>
+          </a:ln>
+        </p:spPr>
+        <p:style>
+          <a:lnRef idx="1">
+            <a:schemeClr val="accent1"/>
+          </a:lnRef>
+          <a:fillRef idx="3">
+            <a:schemeClr val="accent1"/>
+          </a:fillRef>
+          <a:effectRef idx="2">
+            <a:schemeClr val="accent1"/>
+          </a:effectRef>
+          <a:fontRef idx="minor">
+            <a:schemeClr val="lt1"/>
+          </a:fontRef>
+        </p:style>
+        <p:txBody>
+          <a:bodyPr rtlCol="0" anchor="ctr" wrap="square" lIns="73152" rIns="73152"/>
+          <a:lstStyle/>
+          <a:p>
+            <a:pPr algn="ctr">
+              <a:spcAft>
+                <a:spcPts val="0"/>
+              </a:spcAft>
+            </a:pPr>
+            <a:r>
+              <a:rPr sz="1600" b="1">
+                <a:solidFill>
+                  <a:srgbClr val="1F3A5F"/>
+                </a:solidFill>
+                <a:latin typeface="맑은 고딕"/>
+              </a:rPr>
+              <a:t>④ 일반화</a:t>
+            </a:r>
+          </a:p>
+          <a:p>
+            <a:pPr algn="ctr">
+              <a:spcAft>
+                <a:spcPts val="1000"/>
+              </a:spcAft>
+            </a:pPr>
+            <a:r>
+              <a:rPr sz="1600" b="1">
+                <a:solidFill>
+                  <a:srgbClr val="1F3A5F"/>
+                </a:solidFill>
+                <a:latin typeface="맑은 고딕"/>
+              </a:rPr>
+              <a:t>·robust 평가</a:t>
+            </a:r>
+          </a:p>
+          <a:p>
+            <a:pPr algn="ctr">
+              <a:spcAft>
+                <a:spcPts val="300"/>
+              </a:spcAft>
+            </a:pPr>
+            <a:r>
+              <a:rPr sz="1300">
+                <a:solidFill>
+                  <a:srgbClr val="222222"/>
+                </a:solidFill>
+                <a:latin typeface="맑은 고딕"/>
+              </a:rPr>
+              <a:t>점 제거</a:t>
+            </a:r>
+          </a:p>
+          <a:p>
+            <a:pPr algn="ctr">
+              <a:spcAft>
+                <a:spcPts val="300"/>
+              </a:spcAft>
+            </a:pPr>
+            <a:r>
+              <a:rPr sz="1300">
+                <a:solidFill>
+                  <a:srgbClr val="222222"/>
+                </a:solidFill>
+                <a:latin typeface="맑은 고딕"/>
+              </a:rPr>
+              <a:t>가짜 정상</a:t>
+            </a:r>
+          </a:p>
+          <a:p>
+            <a:pPr algn="ctr">
+              <a:spcAft>
+                <a:spcPts val="300"/>
+              </a:spcAft>
+            </a:pPr>
+            <a:r>
+              <a:rPr sz="1300">
+                <a:solidFill>
+                  <a:srgbClr val="222222"/>
+                </a:solidFill>
+                <a:latin typeface="맑은 고딕"/>
+              </a:rPr>
+              <a:t>합성 점</a:t>
+            </a:r>
+          </a:p>
+          <a:p>
+            <a:pPr algn="ctr">
+              <a:spcAft>
+                <a:spcPts val="300"/>
+              </a:spcAft>
+            </a:pPr>
+            <a:r>
+              <a:rPr sz="1300">
+                <a:solidFill>
+                  <a:srgbClr val="222222"/>
+                </a:solidFill>
+                <a:latin typeface="맑은 고딕"/>
+              </a:rPr>
+              <a:t>호기별</a:t>
+            </a:r>
+          </a:p>
+        </p:txBody>
+      </p:sp>
+      <p:sp>
+        <p:nvSpPr>
+          <p:cNvPr id="13" name="TextBox 12"/>
+          <p:cNvSpPr txBox="1"/>
+          <p:nvPr/>
+        </p:nvSpPr>
+        <p:spPr>
+          <a:xfrm>
+            <a:off x="7918704" y="3154680"/>
+            <a:ext cx="219456" cy="365760"/>
+          </a:xfrm>
+          <a:prstGeom prst="rect">
+            <a:avLst/>
+          </a:prstGeom>
+          <a:noFill/>
+        </p:spPr>
+        <p:txBody>
+          <a:bodyPr wrap="square" anchor="t" lIns="45720" rIns="45720">
+            <a:spAutoFit/>
+          </a:bodyPr>
+          <a:lstStyle/>
+          <a:p>
+            <a:pPr algn="ctr"/>
+            <a:r>
+              <a:rPr sz="1000" b="0">
+                <a:solidFill>
+                  <a:srgbClr val="555B66"/>
+                </a:solidFill>
+                <a:latin typeface="맑은 고딕"/>
+              </a:rPr>
+              <a:t>▶</a:t>
+            </a:r>
+          </a:p>
+        </p:txBody>
+      </p:sp>
+      <p:sp>
+        <p:nvSpPr>
+          <p:cNvPr id="14" name="Rounded Rectangle 13"/>
+          <p:cNvSpPr/>
+          <p:nvPr/>
+        </p:nvSpPr>
+        <p:spPr>
+          <a:xfrm>
+            <a:off x="8101583" y="1828800"/>
+            <a:ext cx="1764792" cy="3017520"/>
+          </a:xfrm>
+          <a:prstGeom prst="roundRect">
+            <a:avLst/>
+          </a:prstGeom>
+          <a:solidFill>
+            <a:srgbClr val="E6DCF0"/>
+          </a:solidFill>
+          <a:ln>
+            <a:solidFill>
+              <a:srgbClr val="555B66"/>
+            </a:solidFill>
+          </a:ln>
+        </p:spPr>
+        <p:style>
+          <a:lnRef idx="1">
+            <a:schemeClr val="accent1"/>
+          </a:lnRef>
+          <a:fillRef idx="3">
+            <a:schemeClr val="accent1"/>
+          </a:fillRef>
+          <a:effectRef idx="2">
+            <a:schemeClr val="accent1"/>
+          </a:effectRef>
+          <a:fontRef idx="minor">
+            <a:schemeClr val="lt1"/>
+          </a:fontRef>
+        </p:style>
+        <p:txBody>
+          <a:bodyPr rtlCol="0" anchor="ctr" wrap="square" lIns="73152" rIns="73152"/>
+          <a:lstStyle/>
+          <a:p>
+            <a:pPr algn="ctr">
+              <a:spcAft>
+                <a:spcPts val="0"/>
+              </a:spcAft>
+            </a:pPr>
+            <a:r>
+              <a:rPr sz="1600" b="1">
+                <a:solidFill>
+                  <a:srgbClr val="1F3A5F"/>
+                </a:solidFill>
+                <a:latin typeface="맑은 고딕"/>
+              </a:rPr>
+              <a:t>⑤ 종합 →</a:t>
+            </a:r>
+          </a:p>
+          <a:p>
+            <a:pPr algn="ctr">
+              <a:spcAft>
+                <a:spcPts val="1000"/>
+              </a:spcAft>
+            </a:pPr>
+            <a:r>
+              <a:rPr sz="1600" b="1">
+                <a:solidFill>
+                  <a:srgbClr val="1F3A5F"/>
+                </a:solidFill>
+                <a:latin typeface="맑은 고딕"/>
+              </a:rPr>
+              <a:t>베스트 모델</a:t>
+            </a:r>
+          </a:p>
+          <a:p>
+            <a:pPr algn="ctr">
+              <a:spcAft>
+                <a:spcPts val="300"/>
+              </a:spcAft>
+            </a:pPr>
+            <a:r>
+              <a:rPr sz="1300">
+                <a:solidFill>
+                  <a:srgbClr val="222222"/>
+                </a:solidFill>
+                <a:latin typeface="맑은 고딕"/>
+              </a:rPr>
+              <a:t>val 동률 선두</a:t>
+            </a:r>
+          </a:p>
+          <a:p>
+            <a:pPr algn="ctr">
+              <a:spcAft>
+                <a:spcPts val="300"/>
+              </a:spcAft>
+            </a:pPr>
+            <a:r>
+              <a:rPr sz="1300">
+                <a:solidFill>
+                  <a:srgbClr val="222222"/>
+                </a:solidFill>
+                <a:latin typeface="맑은 고딕"/>
+              </a:rPr>
+              <a:t>미탐지 강건성</a:t>
+            </a:r>
+          </a:p>
+          <a:p>
+            <a:pPr algn="ctr">
+              <a:spcAft>
+                <a:spcPts val="300"/>
+              </a:spcAft>
+            </a:pPr>
+            <a:r>
+              <a:rPr sz="1300">
+                <a:solidFill>
+                  <a:srgbClr val="222222"/>
+                </a:solidFill>
+                <a:latin typeface="맑은 고딕"/>
+              </a:rPr>
+              <a:t>최상</a:t>
+            </a:r>
+          </a:p>
+          <a:p>
+            <a:pPr algn="ctr">
+              <a:spcAft>
+                <a:spcPts val="300"/>
+              </a:spcAft>
+            </a:pPr>
+            <a:r>
+              <a:rPr sz="1300">
+                <a:solidFill>
+                  <a:srgbClr val="222222"/>
+                </a:solidFill>
+                <a:latin typeface="맑은 고딕"/>
+              </a:rPr>
+              <a:t>→ D-FINE-N</a:t>
+            </a:r>
+          </a:p>
+        </p:txBody>
+      </p:sp>
+      <p:sp>
+        <p:nvSpPr>
+          <p:cNvPr id="15" name="TextBox 14"/>
+          <p:cNvSpPr txBox="1"/>
+          <p:nvPr/>
+        </p:nvSpPr>
+        <p:spPr>
+          <a:xfrm>
+            <a:off x="9829800" y="3154680"/>
+            <a:ext cx="219456" cy="365760"/>
+          </a:xfrm>
+          <a:prstGeom prst="rect">
+            <a:avLst/>
+          </a:prstGeom>
+          <a:noFill/>
+        </p:spPr>
+        <p:txBody>
+          <a:bodyPr wrap="square" anchor="t" lIns="45720" rIns="45720">
+            <a:spAutoFit/>
+          </a:bodyPr>
+          <a:lstStyle/>
+          <a:p>
+            <a:pPr algn="ctr"/>
+            <a:r>
+              <a:rPr sz="1000" b="0">
+                <a:solidFill>
+                  <a:srgbClr val="555B66"/>
+                </a:solidFill>
+                <a:latin typeface="맑은 고딕"/>
+              </a:rPr>
+              <a:t>▶</a:t>
+            </a:r>
+          </a:p>
+        </p:txBody>
+      </p:sp>
+      <p:sp>
+        <p:nvSpPr>
+          <p:cNvPr id="16" name="Rounded Rectangle 15"/>
+          <p:cNvSpPr/>
+          <p:nvPr/>
+        </p:nvSpPr>
+        <p:spPr>
+          <a:xfrm>
+            <a:off x="10012680" y="1828800"/>
+            <a:ext cx="1764792" cy="3017520"/>
+          </a:xfrm>
+          <a:prstGeom prst="roundRect">
+            <a:avLst/>
+          </a:prstGeom>
+          <a:solidFill>
+            <a:srgbClr val="F1ECD2"/>
+          </a:solidFill>
+          <a:ln>
+            <a:solidFill>
+              <a:srgbClr val="555B66"/>
+            </a:solidFill>
+          </a:ln>
+        </p:spPr>
+        <p:style>
+          <a:lnRef idx="1">
+            <a:schemeClr val="accent1"/>
+          </a:lnRef>
+          <a:fillRef idx="3">
+            <a:schemeClr val="accent1"/>
+          </a:fillRef>
+          <a:effectRef idx="2">
+            <a:schemeClr val="accent1"/>
+          </a:effectRef>
+          <a:fontRef idx="minor">
+            <a:schemeClr val="lt1"/>
+          </a:fontRef>
+        </p:style>
+        <p:txBody>
+          <a:bodyPr rtlCol="0" anchor="ctr" wrap="square" lIns="73152" rIns="73152"/>
+          <a:lstStyle/>
+          <a:p>
+            <a:pPr algn="ctr">
+              <a:spcAft>
+                <a:spcPts val="1000"/>
+              </a:spcAft>
+            </a:pPr>
+            <a:r>
+              <a:rPr sz="1600" b="1">
+                <a:solidFill>
+                  <a:srgbClr val="1F3A5F"/>
+                </a:solidFill>
+                <a:latin typeface="맑은 고딕"/>
+              </a:rPr>
+              <a:t>⑥ 현장 활용</a:t>
+            </a:r>
+          </a:p>
+          <a:p>
+            <a:pPr algn="ctr">
+              <a:spcAft>
+                <a:spcPts val="300"/>
+              </a:spcAft>
+            </a:pPr>
+            <a:r>
+              <a:rPr sz="1300">
+                <a:solidFill>
+                  <a:srgbClr val="222222"/>
+                </a:solidFill>
+                <a:latin typeface="맑은 고딕"/>
+              </a:rPr>
+              <a:t>3단 판정</a:t>
+            </a:r>
+          </a:p>
+          <a:p>
+            <a:pPr algn="ctr">
+              <a:spcAft>
+                <a:spcPts val="300"/>
+              </a:spcAft>
+            </a:pPr>
+            <a:r>
+              <a:rPr sz="1300">
+                <a:solidFill>
+                  <a:srgbClr val="222222"/>
+                </a:solidFill>
+                <a:latin typeface="맑은 고딕"/>
+              </a:rPr>
+              <a:t>재검사 구간</a:t>
+            </a:r>
+          </a:p>
+          <a:p>
+            <a:pPr algn="ctr">
+              <a:spcAft>
+                <a:spcPts val="300"/>
+              </a:spcAft>
+            </a:pPr>
+            <a:r>
+              <a:rPr sz="1300">
+                <a:solidFill>
+                  <a:srgbClr val="222222"/>
+                </a:solidFill>
+                <a:latin typeface="맑은 고딕"/>
+              </a:rPr>
+              <a:t>모델 선택 가이드</a:t>
+            </a:r>
+          </a:p>
+        </p:txBody>
+      </p:sp>
+      <p:sp>
+        <p:nvSpPr>
+          <p:cNvPr id="17" name="TextBox 16"/>
+          <p:cNvSpPr txBox="1"/>
+          <p:nvPr/>
+        </p:nvSpPr>
+        <p:spPr>
+          <a:xfrm>
+            <a:off x="731520" y="5120640"/>
+            <a:ext cx="10789920" cy="1554480"/>
+          </a:xfrm>
+          <a:prstGeom prst="rect">
+            <a:avLst/>
+          </a:prstGeom>
+          <a:noFill/>
+        </p:spPr>
+        <p:txBody>
+          <a:bodyPr wrap="square" lIns="45720" rIns="45720">
+            <a:spAutoFit/>
+          </a:bodyPr>
+          <a:lstStyle/>
+          <a:p>
+            <a:pPr>
+              <a:spcAft>
+                <a:spcPts val="600"/>
+              </a:spcAft>
+            </a:pPr>
+            <a:r>
+              <a:rPr sz="1600" b="1">
+                <a:solidFill>
+                  <a:srgbClr val="2AA7B8"/>
+                </a:solidFill>
+                <a:latin typeface="맑은 고딕"/>
+              </a:rPr>
+              <a:t>• </a:t>
+            </a:r>
+            <a:r>
+              <a:rPr sz="1600" b="0">
+                <a:solidFill>
+                  <a:srgbClr val="222222"/>
+                </a:solidFill>
+                <a:latin typeface="맑은 고딕"/>
+              </a:rPr>
+              <a:t>모델 6개: 베이스라인 YOLOv3-tiny, Faster R-CNN(ResNet-50, MobileNetV3), 팀원 모델 YOLO26n · RT-DETR-l · D-FINE-N</a:t>
+            </a:r>
+          </a:p>
+          <a:p>
+            <a:pPr>
+              <a:spcAft>
+                <a:spcPts val="600"/>
+              </a:spcAft>
+            </a:pPr>
+            <a:r>
+              <a:rPr sz="1600" b="1">
+                <a:solidFill>
+                  <a:srgbClr val="2AA7B8"/>
+                </a:solidFill>
+                <a:latin typeface="맑은 고딕"/>
+              </a:rPr>
+              <a:t>• </a:t>
+            </a:r>
+            <a:r>
+              <a:rPr sz="1600" b="0">
+                <a:solidFill>
+                  <a:srgbClr val="222222"/>
+                </a:solidFill>
+                <a:latin typeface="맑은 고딕"/>
+              </a:rPr>
+              <a:t>모든 모델을 </a:t>
+            </a:r>
+            <a:r>
+              <a:rPr sz="1600" b="1">
+                <a:solidFill>
+                  <a:srgbClr val="222222"/>
+                </a:solidFill>
+                <a:latin typeface="맑은 고딕"/>
+              </a:rPr>
+              <a:t>같은 평가 코드</a:t>
+            </a:r>
+            <a:r>
+              <a:rPr sz="1600" b="0">
+                <a:solidFill>
+                  <a:srgbClr val="222222"/>
+                </a:solidFill>
+                <a:latin typeface="맑은 고딕"/>
+              </a:rPr>
+              <a:t>로 채점하고, 임계값은 val에서 정해 고정, test는 한 번만 본다</a:t>
+            </a:r>
+          </a:p>
+        </p:txBody>
+      </p:sp>
+    </p:spTree>
+  </p:cSld>
+  <p:clrMapOvr>
+    <a:masterClrMapping/>
+  </p:clrMapOvr>
+</p:sld>
+</file>
+
+<file path=ppt/slides/slide5.xml><?xml version="1.0" encoding="utf-8"?>
+<p:sld xmlns:a="http://schemas.openxmlformats.org/drawingml/2006/main" xmlns:p="http://schemas.openxmlformats.org/presentationml/2006/main" xmlns:r="http://schemas.openxmlformats.org/officeDocument/2006/relationships">
+  <p:cSld>
+    <p:spTree>
+      <p:nvGrpSpPr>
+        <p:cNvPr id="1" name=""/>
+        <p:cNvGrpSpPr/>
+        <p:nvPr/>
+      </p:nvGrpSpPr>
+      <p:grpSpPr/>
+      <p:sp>
+        <p:nvSpPr>
+          <p:cNvPr id="2" name="Rectangle 1"/>
+          <p:cNvSpPr/>
+          <p:nvPr/>
+        </p:nvSpPr>
+        <p:spPr>
+          <a:xfrm>
+            <a:off x="0" y="0"/>
+            <a:ext cx="164592" cy="6858000"/>
+          </a:xfrm>
+          <a:prstGeom prst="rect">
+            <a:avLst/>
+          </a:prstGeom>
+          <a:solidFill>
+            <a:srgbClr val="1F3A5F"/>
+          </a:solidFill>
+          <a:ln>
+            <a:noFill/>
+          </a:ln>
+        </p:spPr>
+        <p:style>
+          <a:lnRef idx="1">
+            <a:schemeClr val="accent1"/>
+          </a:lnRef>
+          <a:fillRef idx="3">
+            <a:schemeClr val="accent1"/>
+          </a:fillRef>
+          <a:effectRef idx="2">
+            <a:schemeClr val="accent1"/>
+          </a:effectRef>
+          <a:fontRef idx="minor">
+            <a:schemeClr val="lt1"/>
+          </a:fontRef>
+        </p:style>
+        <p:txBody>
+          <a:bodyPr rtlCol="0" anchor="ctr"/>
+          <a:lstStyle/>
+          <a:p>
+            <a:pPr algn="ctr"/>
+          </a:p>
+        </p:txBody>
+      </p:sp>
+      <p:sp>
+        <p:nvSpPr>
+          <p:cNvPr id="3" name="TextBox 2"/>
+          <p:cNvSpPr txBox="1"/>
+          <p:nvPr/>
+        </p:nvSpPr>
+        <p:spPr>
+          <a:xfrm>
+            <a:off x="502920" y="274320"/>
+            <a:ext cx="11185855" cy="731520"/>
+          </a:xfrm>
+          <a:prstGeom prst="rect">
+            <a:avLst/>
+          </a:prstGeom>
+          <a:noFill/>
+        </p:spPr>
+        <p:txBody>
+          <a:bodyPr wrap="square" anchor="ctr" lIns="45720" rIns="45720">
+            <a:spAutoFit/>
+          </a:bodyPr>
+          <a:lstStyle/>
+          <a:p>
+            <a:pPr algn="l"/>
+            <a:r>
+              <a:rPr sz="2800" b="1">
+                <a:solidFill>
+                  <a:srgbClr val="1F3A5F"/>
+                </a:solidFill>
+                <a:latin typeface="맑은 고딕"/>
+              </a:rPr>
+              <a:t>① 학습 · 검증 · 평가</a:t>
+            </a:r>
+          </a:p>
+        </p:txBody>
+      </p:sp>
+      <p:sp>
+        <p:nvSpPr>
+          <p:cNvPr id="4" name="TextBox 3"/>
+          <p:cNvSpPr txBox="1"/>
+          <p:nvPr/>
+        </p:nvSpPr>
+        <p:spPr>
+          <a:xfrm>
+            <a:off x="502920" y="1005840"/>
+            <a:ext cx="11185855" cy="640080"/>
+          </a:xfrm>
+          <a:prstGeom prst="rect">
+            <a:avLst/>
+          </a:prstGeom>
+          <a:noFill/>
+        </p:spPr>
+        <p:txBody>
+          <a:bodyPr wrap="square" anchor="t" lIns="45720" rIns="45720">
+            <a:spAutoFit/>
+          </a:bodyPr>
+          <a:lstStyle/>
+          <a:p>
+            <a:pPr algn="l"/>
+            <a:r>
+              <a:rPr sz="1800" b="1">
+                <a:solidFill>
+                  <a:srgbClr val="2AA7B8"/>
+                </a:solidFill>
+                <a:latin typeface="맑은 고딕"/>
+              </a:rPr>
+              <a:t>지금 있는 데이터로 6개 모델을 같은 조건에서 학습하고 평가했다</a:t>
+            </a:r>
+          </a:p>
+        </p:txBody>
+      </p:sp>
+      <p:sp>
+        <p:nvSpPr>
+          <p:cNvPr id="5" name="TextBox 4"/>
+          <p:cNvSpPr txBox="1"/>
+          <p:nvPr/>
+        </p:nvSpPr>
+        <p:spPr>
+          <a:xfrm>
+            <a:off x="11094415" y="6400800"/>
+            <a:ext cx="822960" cy="320040"/>
+          </a:xfrm>
+          <a:prstGeom prst="rect">
+            <a:avLst/>
+          </a:prstGeom>
+          <a:noFill/>
+        </p:spPr>
+        <p:txBody>
+          <a:bodyPr wrap="square" anchor="t" lIns="45720" rIns="45720">
+            <a:spAutoFit/>
+          </a:bodyPr>
+          <a:lstStyle/>
+          <a:p>
+            <a:pPr algn="r"/>
+            <a:r>
+              <a:rPr sz="1200" b="0">
+                <a:solidFill>
+                  <a:srgbClr val="555B66"/>
+                </a:solidFill>
+                <a:latin typeface="맑은 고딕"/>
+              </a:rPr>
+              <a:t>5</a:t>
             </a:r>
           </a:p>
         </p:txBody>
@@ -12462,7 +14358,7 @@
 </p:sld>
 </file>
 
-<file path=ppt/slides/slide5.xml><?xml version="1.0" encoding="utf-8"?>
+<file path=ppt/slides/slide6.xml><?xml version="1.0" encoding="utf-8"?>
 <p:sld xmlns:a="http://schemas.openxmlformats.org/drawingml/2006/main" xmlns:p="http://schemas.openxmlformats.org/presentationml/2006/main" xmlns:r="http://schemas.openxmlformats.org/officeDocument/2006/relationships">
   <p:cSld>
     <p:spTree>
@@ -12615,7 +14511,7 @@
                 </a:solidFill>
                 <a:latin typeface="맑은 고딕"/>
               </a:rPr>
-              <a:t>5</a:t>
+              <a:t>6</a:t>
             </a:r>
           </a:p>
         </p:txBody>
@@ -13430,7 +15326,7 @@
 </p:sld>
 </file>
 
-<file path=ppt/slides/slide6.xml><?xml version="1.0" encoding="utf-8"?>
+<file path=ppt/slides/slide7.xml><?xml version="1.0" encoding="utf-8"?>
 <p:sld xmlns:a="http://schemas.openxmlformats.org/drawingml/2006/main" xmlns:p="http://schemas.openxmlformats.org/presentationml/2006/main" xmlns:r="http://schemas.openxmlformats.org/officeDocument/2006/relationships">
   <p:cSld>
     <p:spTree>
@@ -13513,7 +15409,7 @@
                 </a:solidFill>
                 <a:latin typeface="맑은 고딕"/>
               </a:rPr>
-              <a:t>원인: 공식 라벨의 박스 크기</a:t>
+              <a:t>실제 검출 예시: 6개 모델이 같은 점을 찾았다</a:t>
             </a:r>
           </a:p>
         </p:txBody>
@@ -13548,7 +15444,7 @@
                 </a:solidFill>
                 <a:latin typeface="맑은 고딕"/>
               </a:rPr>
-              <a:t>놓친 것이 아니라 정답 박스의 크기가 달라서 IoU가 0.5에 못 미친 것이다</a:t>
+              <a:t>호기마다 한 장씩, 초록 = 정답, 색 = 모델의 검출과 신뢰도</a:t>
             </a:r>
           </a:p>
         </p:txBody>
@@ -13583,14 +15479,14 @@
                 </a:solidFill>
                 <a:latin typeface="맑은 고딕"/>
               </a:rPr>
-              <a:t>6</a:t>
+              <a:t>7</a:t>
             </a:r>
           </a:p>
         </p:txBody>
       </p:sp>
       <p:pic>
         <p:nvPicPr>
-          <p:cNvPr id="6" name="Picture 5" descr="fig3a_fn_cases.png"/>
+          <p:cNvPr id="6" name="Picture 5" descr="fig5b_detection_examples.png"/>
           <p:cNvPicPr>
             <a:picLocks noChangeAspect="1"/>
           </p:cNvPicPr>
@@ -13604,8 +15500,8 @@
         </p:blipFill>
         <p:spPr>
           <a:xfrm>
-            <a:off x="548640" y="1900183"/>
-            <a:ext cx="6949440" cy="4154912"/>
+            <a:off x="833410" y="1508759"/>
+            <a:ext cx="6379899" cy="5074920"/>
           </a:xfrm>
           <a:prstGeom prst="rect">
             <a:avLst/>
@@ -13620,8 +15516,8 @@
         </p:nvSpPr>
         <p:spPr>
           <a:xfrm>
-            <a:off x="7680960" y="1783080"/>
-            <a:ext cx="4114800" cy="4572000"/>
+            <a:off x="7955279" y="1783080"/>
+            <a:ext cx="3931920" cy="4572000"/>
           </a:xfrm>
           <a:prstGeom prst="rect">
             <a:avLst/>
@@ -13636,11 +15532,11 @@
           <a:p>
             <a:pPr>
               <a:spcAft>
-                <a:spcPts val="900"/>
+                <a:spcPts val="1000"/>
               </a:spcAft>
             </a:pPr>
             <a:r>
-              <a:rPr sz="1600" b="1">
+              <a:rPr sz="1500" b="1">
                 <a:solidFill>
                   <a:srgbClr val="2AA7B8"/>
                 </a:solidFill>
@@ -13649,41 +15545,23 @@
               <a:t>• </a:t>
             </a:r>
             <a:r>
-              <a:rPr sz="1600" b="0">
-                <a:solidFill>
-                  <a:srgbClr val="222222"/>
-                </a:solidFill>
-                <a:latin typeface="맑은 고딕"/>
-              </a:rPr>
-              <a:t>오류가 난 이미지는 거의 전부 </a:t>
-            </a:r>
-            <a:r>
-              <a:rPr sz="1600" b="1">
-                <a:solidFill>
-                  <a:srgbClr val="222222"/>
-                </a:solidFill>
-                <a:latin typeface="맑은 고딕"/>
-              </a:rPr>
-              <a:t>공식 라벨</a:t>
-            </a:r>
-            <a:r>
-              <a:rPr sz="1600" b="0">
-                <a:solidFill>
-                  <a:srgbClr val="222222"/>
-                </a:solidFill>
-                <a:latin typeface="맑은 고딕"/>
-              </a:rPr>
-              <a:t>(사람이 그려 크기가 제각각)</a:t>
+              <a:rPr sz="1500" b="0">
+                <a:solidFill>
+                  <a:srgbClr val="222222"/>
+                </a:solidFill>
+                <a:latin typeface="맑은 고딕"/>
+              </a:rPr>
+              <a:t>1~3행: 6개 모델 모두 점을 정확히 감싼다</a:t>
             </a:r>
           </a:p>
           <a:p>
             <a:pPr>
               <a:spcAft>
-                <a:spcPts val="900"/>
+                <a:spcPts val="1000"/>
               </a:spcAft>
             </a:pPr>
             <a:r>
-              <a:rPr sz="1600" b="1">
+              <a:rPr sz="1500" b="1">
                 <a:solidFill>
                   <a:srgbClr val="2AA7B8"/>
                 </a:solidFill>
@@ -13692,23 +15570,41 @@
               <a:t>• </a:t>
             </a:r>
             <a:r>
-              <a:rPr sz="1600" b="0">
-                <a:solidFill>
-                  <a:srgbClr val="222222"/>
-                </a:solidFill>
-                <a:latin typeface="맑은 고딕"/>
-              </a:rPr>
-              <a:t>확대하면 모델 박스는 점을 정확히 감쌈(중심 거리 0.5~1.2px)</a:t>
+              <a:rPr sz="1500" b="0">
+                <a:solidFill>
+                  <a:srgbClr val="222222"/>
+                </a:solidFill>
+                <a:latin typeface="맑은 고딕"/>
+              </a:rPr>
+              <a:t>신뢰도 척도가 모델마다 다르다(YOLOv3-tiny 0.4~0.5, 나머지 0.8~1.0) → 임계값을 </a:t>
+            </a:r>
+            <a:r>
+              <a:rPr sz="1500" b="1">
+                <a:solidFill>
+                  <a:srgbClr val="222222"/>
+                </a:solidFill>
+                <a:latin typeface="맑은 고딕"/>
+              </a:rPr>
+              <a:t>모델마다 val에서 따로</a:t>
+            </a:r>
+            <a:r>
+              <a:rPr sz="1500" b="0">
+                <a:solidFill>
+                  <a:srgbClr val="222222"/>
+                </a:solidFill>
+                <a:latin typeface="맑은 고딕"/>
+              </a:rPr>
+              <a:t> 정한 이유</a:t>
             </a:r>
           </a:p>
           <a:p>
             <a:pPr>
               <a:spcAft>
-                <a:spcPts val="900"/>
+                <a:spcPts val="1000"/>
               </a:spcAft>
             </a:pPr>
             <a:r>
-              <a:rPr sz="1600" b="1">
+              <a:rPr sz="1500" b="1">
                 <a:solidFill>
                   <a:srgbClr val="2AA7B8"/>
                 </a:solidFill>
@@ -13717,267 +15613,13 @@
               <a:t>• </a:t>
             </a:r>
             <a:r>
-              <a:rPr sz="1600" b="0">
-                <a:solidFill>
-                  <a:srgbClr val="222222"/>
-                </a:solidFill>
-                <a:latin typeface="맑은 고딕"/>
-              </a:rPr>
-              <a:t>정답 박스가 더 작거나(6x7, 9x5) 더 큼(14x15)</a:t>
-            </a:r>
-          </a:p>
-          <a:p>
-            <a:pPr>
-              <a:spcAft>
-                <a:spcPts val="900"/>
-              </a:spcAft>
-            </a:pPr>
-            <a:r>
-              <a:rPr sz="1600" b="1">
-                <a:solidFill>
-                  <a:srgbClr val="2AA7B8"/>
-                </a:solidFill>
-                <a:latin typeface="맑은 고딕"/>
-              </a:rPr>
-              <a:t>• </a:t>
-            </a:r>
-            <a:r>
-              <a:rPr sz="1600" b="0">
-                <a:solidFill>
-                  <a:srgbClr val="222222"/>
-                </a:solidFill>
-                <a:latin typeface="맑은 고딕"/>
-              </a:rPr>
-              <a:t>팀 라벨은 고정 크기라 IoU가 잘 맞아 점수가 부풀려진다</a:t>
-            </a:r>
-          </a:p>
-        </p:txBody>
-      </p:sp>
-    </p:spTree>
-  </p:cSld>
-  <p:clrMapOvr>
-    <a:masterClrMapping/>
-  </p:clrMapOvr>
-</p:sld>
-</file>
-
-<file path=ppt/slides/slide7.xml><?xml version="1.0" encoding="utf-8"?>
-<p:sld xmlns:a="http://schemas.openxmlformats.org/drawingml/2006/main" xmlns:p="http://schemas.openxmlformats.org/presentationml/2006/main" xmlns:r="http://schemas.openxmlformats.org/officeDocument/2006/relationships">
-  <p:cSld>
-    <p:spTree>
-      <p:nvGrpSpPr>
-        <p:cNvPr id="1" name=""/>
-        <p:cNvGrpSpPr/>
-        <p:nvPr/>
-      </p:nvGrpSpPr>
-      <p:grpSpPr/>
-      <p:sp>
-        <p:nvSpPr>
-          <p:cNvPr id="2" name="Rectangle 1"/>
-          <p:cNvSpPr/>
-          <p:nvPr/>
-        </p:nvSpPr>
-        <p:spPr>
-          <a:xfrm>
-            <a:off x="0" y="0"/>
-            <a:ext cx="164592" cy="6858000"/>
-          </a:xfrm>
-          <a:prstGeom prst="rect">
-            <a:avLst/>
-          </a:prstGeom>
-          <a:solidFill>
-            <a:srgbClr val="1F3A5F"/>
-          </a:solidFill>
-          <a:ln>
-            <a:noFill/>
-          </a:ln>
-        </p:spPr>
-        <p:style>
-          <a:lnRef idx="1">
-            <a:schemeClr val="accent1"/>
-          </a:lnRef>
-          <a:fillRef idx="3">
-            <a:schemeClr val="accent1"/>
-          </a:fillRef>
-          <a:effectRef idx="2">
-            <a:schemeClr val="accent1"/>
-          </a:effectRef>
-          <a:fontRef idx="minor">
-            <a:schemeClr val="lt1"/>
-          </a:fontRef>
-        </p:style>
-        <p:txBody>
-          <a:bodyPr rtlCol="0" anchor="ctr"/>
-          <a:lstStyle/>
-          <a:p>
-            <a:pPr algn="ctr"/>
-          </a:p>
-        </p:txBody>
-      </p:sp>
-      <p:sp>
-        <p:nvSpPr>
-          <p:cNvPr id="3" name="TextBox 2"/>
-          <p:cNvSpPr txBox="1"/>
-          <p:nvPr/>
-        </p:nvSpPr>
-        <p:spPr>
-          <a:xfrm>
-            <a:off x="502920" y="274320"/>
-            <a:ext cx="11185855" cy="731520"/>
-          </a:xfrm>
-          <a:prstGeom prst="rect">
-            <a:avLst/>
-          </a:prstGeom>
-          <a:noFill/>
-        </p:spPr>
-        <p:txBody>
-          <a:bodyPr wrap="square" anchor="ctr" lIns="45720" rIns="45720">
-            <a:spAutoFit/>
-          </a:bodyPr>
-          <a:lstStyle/>
-          <a:p>
-            <a:pPr algn="l"/>
-            <a:r>
-              <a:rPr sz="2800" b="1">
-                <a:solidFill>
-                  <a:srgbClr val="1F3A5F"/>
-                </a:solidFill>
-                <a:latin typeface="맑은 고딕"/>
-              </a:rPr>
-              <a:t>해결: 중심 거리로 재채점</a:t>
-            </a:r>
-          </a:p>
-        </p:txBody>
-      </p:sp>
-      <p:sp>
-        <p:nvSpPr>
-          <p:cNvPr id="4" name="TextBox 3"/>
-          <p:cNvSpPr txBox="1"/>
-          <p:nvPr/>
-        </p:nvSpPr>
-        <p:spPr>
-          <a:xfrm>
-            <a:off x="502920" y="1005840"/>
-            <a:ext cx="11185855" cy="640080"/>
-          </a:xfrm>
-          <a:prstGeom prst="rect">
-            <a:avLst/>
-          </a:prstGeom>
-          <a:noFill/>
-        </p:spPr>
-        <p:txBody>
-          <a:bodyPr wrap="square" anchor="t" lIns="45720" rIns="45720">
-            <a:spAutoFit/>
-          </a:bodyPr>
-          <a:lstStyle/>
-          <a:p>
-            <a:pPr algn="l"/>
-            <a:r>
-              <a:rPr sz="1800" b="1">
-                <a:solidFill>
-                  <a:srgbClr val="2AA7B8"/>
-                </a:solidFill>
-                <a:latin typeface="맑은 고딕"/>
-              </a:rPr>
-              <a:t>중심이 정답에서 R(px) 이내면 찾은 것으로 보면 거의 다 찾는다</a:t>
-            </a:r>
-          </a:p>
-        </p:txBody>
-      </p:sp>
-      <p:sp>
-        <p:nvSpPr>
-          <p:cNvPr id="5" name="TextBox 4"/>
-          <p:cNvSpPr txBox="1"/>
-          <p:nvPr/>
-        </p:nvSpPr>
-        <p:spPr>
-          <a:xfrm>
-            <a:off x="11094415" y="6400800"/>
-            <a:ext cx="822960" cy="320040"/>
-          </a:xfrm>
-          <a:prstGeom prst="rect">
-            <a:avLst/>
-          </a:prstGeom>
-          <a:noFill/>
-        </p:spPr>
-        <p:txBody>
-          <a:bodyPr wrap="square" anchor="t" lIns="45720" rIns="45720">
-            <a:spAutoFit/>
-          </a:bodyPr>
-          <a:lstStyle/>
-          <a:p>
-            <a:pPr algn="r"/>
-            <a:r>
-              <a:rPr sz="1200" b="0">
-                <a:solidFill>
-                  <a:srgbClr val="555B66"/>
-                </a:solidFill>
-                <a:latin typeface="맑은 고딕"/>
-              </a:rPr>
-              <a:t>7</a:t>
-            </a:r>
-          </a:p>
-        </p:txBody>
-      </p:sp>
-      <p:pic>
-        <p:nvPicPr>
-          <p:cNvPr id="6" name="Picture 5" descr="fig2b_center_distance.png"/>
-          <p:cNvPicPr>
-            <a:picLocks noChangeAspect="1"/>
-          </p:cNvPicPr>
-          <p:nvPr/>
-        </p:nvPicPr>
-        <p:blipFill>
-          <a:blip r:embed="rId2"/>
-          <a:stretch>
-            <a:fillRect/>
-          </a:stretch>
-        </p:blipFill>
-        <p:spPr>
-          <a:xfrm>
-            <a:off x="457200" y="2479565"/>
-            <a:ext cx="6675120" cy="2996148"/>
-          </a:xfrm>
-          <a:prstGeom prst="rect">
-            <a:avLst/>
-          </a:prstGeom>
-        </p:spPr>
-      </p:pic>
-      <p:sp>
-        <p:nvSpPr>
-          <p:cNvPr id="7" name="TextBox 6"/>
-          <p:cNvSpPr txBox="1"/>
-          <p:nvPr/>
-        </p:nvSpPr>
-        <p:spPr>
-          <a:xfrm>
-            <a:off x="7315200" y="1783080"/>
-            <a:ext cx="4572000" cy="4572000"/>
-          </a:xfrm>
-          <a:prstGeom prst="rect">
-            <a:avLst/>
-          </a:prstGeom>
-          <a:noFill/>
-        </p:spPr>
-        <p:txBody>
-          <a:bodyPr wrap="square" lIns="45720" rIns="45720">
-            <a:spAutoFit/>
-          </a:bodyPr>
-          <a:lstStyle/>
-          <a:p>
-            <a:pPr>
-              <a:spcAft>
-                <a:spcPts val="800"/>
-              </a:spcAft>
-            </a:pPr>
-            <a:r>
               <a:rPr sz="1500" b="1">
                 <a:solidFill>
-                  <a:srgbClr val="2AA7B8"/>
-                </a:solidFill>
-                <a:latin typeface="맑은 고딕"/>
-              </a:rPr>
-              <a:t>• </a:t>
+                  <a:srgbClr val="222222"/>
+                </a:solidFill>
+                <a:latin typeface="맑은 고딕"/>
+              </a:rPr>
+              <a:t>4행</a:t>
             </a:r>
             <a:r>
               <a:rPr sz="1500" b="0">
@@ -13986,127 +15628,7 @@
                 </a:solidFill>
                 <a:latin typeface="맑은 고딕"/>
               </a:rPr>
-              <a:t>R = 5px로 재채점하면 못 찾은 것이 4개 모델은 </a:t>
-            </a:r>
-            <a:r>
-              <a:rPr sz="1500" b="1">
-                <a:solidFill>
-                  <a:srgbClr val="222222"/>
-                </a:solidFill>
-                <a:latin typeface="맑은 고딕"/>
-              </a:rPr>
-              <a:t>0개</a:t>
-            </a:r>
-            <a:r>
-              <a:rPr sz="1500" b="0">
-                <a:solidFill>
-                  <a:srgbClr val="222222"/>
-                </a:solidFill>
-                <a:latin typeface="맑은 고딕"/>
-              </a:rPr>
-              <a:t>, MobileNetV3·RT-DETR-l은 </a:t>
-            </a:r>
-            <a:r>
-              <a:rPr sz="1500" b="1">
-                <a:solidFill>
-                  <a:srgbClr val="222222"/>
-                </a:solidFill>
-                <a:latin typeface="맑은 고딕"/>
-              </a:rPr>
-              <a:t>1개</a:t>
-            </a:r>
-          </a:p>
-          <a:p>
-            <a:pPr>
-              <a:spcAft>
-                <a:spcPts val="800"/>
-              </a:spcAft>
-            </a:pPr>
-            <a:r>
-              <a:rPr sz="1500" b="1">
-                <a:solidFill>
-                  <a:srgbClr val="2AA7B8"/>
-                </a:solidFill>
-                <a:latin typeface="맑은 고딕"/>
-              </a:rPr>
-              <a:t>• </a:t>
-            </a:r>
-            <a:r>
-              <a:rPr sz="1500" b="0">
-                <a:solidFill>
-                  <a:srgbClr val="222222"/>
-                </a:solidFill>
-                <a:latin typeface="맑은 고딕"/>
-              </a:rPr>
-              <a:t>R ≥ 3px에서 6개 모델의 F1은 </a:t>
-            </a:r>
-            <a:r>
-              <a:rPr sz="1500" b="1">
-                <a:solidFill>
-                  <a:srgbClr val="222222"/>
-                </a:solidFill>
-                <a:latin typeface="맑은 고딕"/>
-              </a:rPr>
-              <a:t>0.998~1.000</a:t>
-            </a:r>
-            <a:r>
-              <a:rPr sz="1500" b="0">
-                <a:solidFill>
-                  <a:srgbClr val="222222"/>
-                </a:solidFill>
-                <a:latin typeface="맑은 고딕"/>
-              </a:rPr>
-              <a:t>(포화)</a:t>
-            </a:r>
-          </a:p>
-          <a:p>
-            <a:pPr>
-              <a:spcAft>
-                <a:spcPts val="800"/>
-              </a:spcAft>
-            </a:pPr>
-            <a:r>
-              <a:rPr sz="1500" b="1">
-                <a:solidFill>
-                  <a:srgbClr val="2AA7B8"/>
-                </a:solidFill>
-                <a:latin typeface="맑은 고딕"/>
-              </a:rPr>
-              <a:t>• </a:t>
-            </a:r>
-            <a:r>
-              <a:rPr sz="1500" b="0">
-                <a:solidFill>
-                  <a:srgbClr val="222222"/>
-                </a:solidFill>
-                <a:latin typeface="맑은 고딕"/>
-              </a:rPr>
-              <a:t>IoU 0.5는 사실상 "중심이 2px 이내인가"를 재고 있었다</a:t>
-            </a:r>
-          </a:p>
-          <a:p>
-            <a:pPr>
-              <a:spcAft>
-                <a:spcPts val="800"/>
-              </a:spcAft>
-            </a:pPr>
-            <a:r>
-              <a:rPr sz="1500" b="1">
-                <a:solidFill>
-                  <a:srgbClr val="2AA7B8"/>
-                </a:solidFill>
-                <a:latin typeface="맑은 고딕"/>
-              </a:rPr>
-              <a:t>• </a:t>
-            </a:r>
-            <a:r>
-              <a:rPr sz="1500" b="0">
-                <a:solidFill>
-                  <a:srgbClr val="222222"/>
-                </a:solidFill>
-                <a:latin typeface="맑은 고딕"/>
-              </a:rPr>
-              <a:t>남는 차이는 위치 정밀도: mAP50-95는 D-FINE-N 0.659 &gt; RT-DETR-l 0.639 &gt; YOLO26n 0.633 &gt; R50 0.611 &gt; MobileNetV3 0.559 ≈ YOLOv3-tiny 0.558 (공식 라벨만 보면 0.335~0.365로 좁아짐)</a:t>
+              <a:t>: 점은 찾았지만 정답 박스(초록)가 더 커서 IoU가 0.5에 못 미친다 → "못 찾음"으로 집계</a:t>
             </a:r>
           </a:p>
         </p:txBody>
@@ -14202,7 +15724,7 @@
                 </a:solidFill>
                 <a:latin typeface="맑은 고딕"/>
               </a:rPr>
-              <a:t>② 일반화와 robust 평가</a:t>
+              <a:t>원인: 공식 라벨의 박스 크기</a:t>
             </a:r>
           </a:p>
         </p:txBody>
@@ -14237,7 +15759,7 @@
                 </a:solidFill>
                 <a:latin typeface="맑은 고딕"/>
               </a:rPr>
-              <a:t>실제 데이터에서는 다 찾으니, 조건을 인위적으로 바꿔 모델을 시험한다</a:t>
+              <a:t>놓친 것이 아니라 정답 박스의 크기가 달라서 IoU가 0.5에 못 미친 것이다</a:t>
             </a:r>
           </a:p>
         </p:txBody>
@@ -14277,388 +15799,30 @@
           </a:p>
         </p:txBody>
       </p:sp>
-      <p:graphicFrame>
-        <p:nvGraphicFramePr>
-          <p:cNvPr id="6" name="Table 5"/>
-          <p:cNvGraphicFramePr>
-            <a:graphicFrameLocks noGrp="1"/>
-          </p:cNvGraphicFramePr>
+      <p:pic>
+        <p:nvPicPr>
+          <p:cNvPr id="6" name="Picture 5" descr="fig3a_fn_cases.png"/>
+          <p:cNvPicPr>
+            <a:picLocks noChangeAspect="1"/>
+          </p:cNvPicPr>
           <p:nvPr/>
-        </p:nvGraphicFramePr>
-        <p:xfrm>
-          <a:off x="548640" y="1783080"/>
-          <a:ext cx="11064239" cy="3657600"/>
-        </p:xfrm>
-        <a:graphic>
-          <a:graphicData uri="http://schemas.openxmlformats.org/drawingml/2006/table">
-            <a:tbl>
-              <a:tblPr firstRow="1" bandRow="1">
-                <a:tableStyleId>{5C22544A-7EE6-4342-B048-85BDC9FD1C3A}</a:tableStyleId>
-              </a:tblPr>
-              <a:tblGrid>
-                <a:gridCol w="1645920"/>
-                <a:gridCol w="4754880"/>
-                <a:gridCol w="4663439"/>
-              </a:tblGrid>
-              <a:tr h="731520">
-                <a:tc>
-                  <a:txBody>
-                    <a:bodyPr/>
-                    <a:lstStyle/>
-                    <a:p>
-                      <a:pPr algn="l"/>
-                      <a:r>
-                        <a:rPr sz="1500" b="1">
-                          <a:solidFill>
-                            <a:srgbClr val="FFFFFF"/>
-                          </a:solidFill>
-                          <a:latin typeface="맑은 고딕"/>
-                        </a:rPr>
-                        <a:t>시험</a:t>
-                      </a:r>
-                    </a:p>
-                  </a:txBody>
-                  <a:tcPr anchor="ctr" marL="54864" marR="54864">
-                    <a:solidFill>
-                      <a:srgbClr val="1F3A5F"/>
-                    </a:solidFill>
-                  </a:tcPr>
-                </a:tc>
-                <a:tc>
-                  <a:txBody>
-                    <a:bodyPr/>
-                    <a:lstStyle/>
-                    <a:p>
-                      <a:pPr algn="ctr"/>
-                      <a:r>
-                        <a:rPr sz="1500" b="1">
-                          <a:solidFill>
-                            <a:srgbClr val="FFFFFF"/>
-                          </a:solidFill>
-                          <a:latin typeface="맑은 고딕"/>
-                        </a:rPr>
-                        <a:t>묻는 것</a:t>
-                      </a:r>
-                    </a:p>
-                  </a:txBody>
-                  <a:tcPr anchor="ctr" marL="54864" marR="54864">
-                    <a:solidFill>
-                      <a:srgbClr val="1F3A5F"/>
-                    </a:solidFill>
-                  </a:tcPr>
-                </a:tc>
-                <a:tc>
-                  <a:txBody>
-                    <a:bodyPr/>
-                    <a:lstStyle/>
-                    <a:p>
-                      <a:pPr algn="ctr"/>
-                      <a:r>
-                        <a:rPr sz="1500" b="1">
-                          <a:solidFill>
-                            <a:srgbClr val="FFFFFF"/>
-                          </a:solidFill>
-                          <a:latin typeface="맑은 고딕"/>
-                        </a:rPr>
-                        <a:t>방법</a:t>
-                      </a:r>
-                    </a:p>
-                  </a:txBody>
-                  <a:tcPr anchor="ctr" marL="54864" marR="54864">
-                    <a:solidFill>
-                      <a:srgbClr val="1F3A5F"/>
-                    </a:solidFill>
-                  </a:tcPr>
-                </a:tc>
-              </a:tr>
-              <a:tr h="731520">
-                <a:tc>
-                  <a:txBody>
-                    <a:bodyPr/>
-                    <a:lstStyle/>
-                    <a:p>
-                      <a:pPr algn="l"/>
-                      <a:r>
-                        <a:rPr sz="1500" b="0">
-                          <a:solidFill>
-                            <a:srgbClr val="222222"/>
-                          </a:solidFill>
-                          <a:latin typeface="맑은 고딕"/>
-                        </a:rPr>
-                        <a:t>점 제거</a:t>
-                      </a:r>
-                    </a:p>
-                  </a:txBody>
-                  <a:tcPr anchor="ctr" marL="54864" marR="54864">
-                    <a:solidFill>
-                      <a:srgbClr val="FFFFFF"/>
-                    </a:solidFill>
-                  </a:tcPr>
-                </a:tc>
-                <a:tc>
-                  <a:txBody>
-                    <a:bodyPr/>
-                    <a:lstStyle/>
-                    <a:p>
-                      <a:pPr algn="ctr"/>
-                      <a:r>
-                        <a:rPr sz="1500" b="0">
-                          <a:solidFill>
-                            <a:srgbClr val="222222"/>
-                          </a:solidFill>
-                          <a:latin typeface="맑은 고딕"/>
-                        </a:rPr>
-                        <a:t>모델이 결함의 점 자체를 보는가, 위치나 주변만 보는가</a:t>
-                      </a:r>
-                    </a:p>
-                  </a:txBody>
-                  <a:tcPr anchor="ctr" marL="54864" marR="54864">
-                    <a:solidFill>
-                      <a:srgbClr val="FFFFFF"/>
-                    </a:solidFill>
-                  </a:tcPr>
-                </a:tc>
-                <a:tc>
-                  <a:txBody>
-                    <a:bodyPr/>
-                    <a:lstStyle/>
-                    <a:p>
-                      <a:pPr algn="ctr"/>
-                      <a:r>
-                        <a:rPr sz="1500" b="0">
-                          <a:solidFill>
-                            <a:srgbClr val="222222"/>
-                          </a:solidFill>
-                          <a:latin typeface="맑은 고딕"/>
-                        </a:rPr>
-                        <a:t>정답의 점을 보간으로 지운 이미지에 다시 적용</a:t>
-                      </a:r>
-                    </a:p>
-                  </a:txBody>
-                  <a:tcPr anchor="ctr" marL="54864" marR="54864">
-                    <a:solidFill>
-                      <a:srgbClr val="FFFFFF"/>
-                    </a:solidFill>
-                  </a:tcPr>
-                </a:tc>
-              </a:tr>
-              <a:tr h="731520">
-                <a:tc>
-                  <a:txBody>
-                    <a:bodyPr/>
-                    <a:lstStyle/>
-                    <a:p>
-                      <a:pPr algn="l"/>
-                      <a:r>
-                        <a:rPr sz="1500" b="0">
-                          <a:solidFill>
-                            <a:srgbClr val="222222"/>
-                          </a:solidFill>
-                          <a:latin typeface="맑은 고딕"/>
-                        </a:rPr>
-                        <a:t>가짜 정상</a:t>
-                      </a:r>
-                    </a:p>
-                  </a:txBody>
-                  <a:tcPr anchor="ctr" marL="54864" marR="54864">
-                    <a:solidFill>
-                      <a:srgbClr val="F2F5FA"/>
-                    </a:solidFill>
-                  </a:tcPr>
-                </a:tc>
-                <a:tc>
-                  <a:txBody>
-                    <a:bodyPr/>
-                    <a:lstStyle/>
-                    <a:p>
-                      <a:pPr algn="ctr"/>
-                      <a:r>
-                        <a:rPr sz="1500" b="0">
-                          <a:solidFill>
-                            <a:srgbClr val="222222"/>
-                          </a:solidFill>
-                          <a:latin typeface="맑은 고딕"/>
-                        </a:rPr>
-                        <a:t>결함이 없는 이미지에서 오경보를 내는가</a:t>
-                      </a:r>
-                    </a:p>
-                  </a:txBody>
-                  <a:tcPr anchor="ctr" marL="54864" marR="54864">
-                    <a:solidFill>
-                      <a:srgbClr val="F2F5FA"/>
-                    </a:solidFill>
-                  </a:tcPr>
-                </a:tc>
-                <a:tc>
-                  <a:txBody>
-                    <a:bodyPr/>
-                    <a:lstStyle/>
-                    <a:p>
-                      <a:pPr algn="ctr"/>
-                      <a:r>
-                        <a:rPr sz="1500" b="0">
-                          <a:solidFill>
-                            <a:srgbClr val="222222"/>
-                          </a:solidFill>
-                          <a:latin typeface="맑은 고딕"/>
-                        </a:rPr>
-                        <a:t>점을 지운 이미지(결함 369장)를 가짜 정상으로 사용</a:t>
-                      </a:r>
-                    </a:p>
-                  </a:txBody>
-                  <a:tcPr anchor="ctr" marL="54864" marR="54864">
-                    <a:solidFill>
-                      <a:srgbClr val="F2F5FA"/>
-                    </a:solidFill>
-                  </a:tcPr>
-                </a:tc>
-              </a:tr>
-              <a:tr h="731520">
-                <a:tc>
-                  <a:txBody>
-                    <a:bodyPr/>
-                    <a:lstStyle/>
-                    <a:p>
-                      <a:pPr algn="l"/>
-                      <a:r>
-                        <a:rPr sz="1500" b="0">
-                          <a:solidFill>
-                            <a:srgbClr val="222222"/>
-                          </a:solidFill>
-                          <a:latin typeface="맑은 고딕"/>
-                        </a:rPr>
-                        <a:t>합성 점</a:t>
-                      </a:r>
-                    </a:p>
-                  </a:txBody>
-                  <a:tcPr anchor="ctr" marL="54864" marR="54864">
-                    <a:solidFill>
-                      <a:srgbClr val="FFFFFF"/>
-                    </a:solidFill>
-                  </a:tcPr>
-                </a:tc>
-                <a:tc>
-                  <a:txBody>
-                    <a:bodyPr/>
-                    <a:lstStyle/>
-                    <a:p>
-                      <a:pPr algn="ctr"/>
-                      <a:r>
-                        <a:rPr sz="1500" b="0">
-                          <a:solidFill>
-                            <a:srgbClr val="222222"/>
-                          </a:solidFill>
-                          <a:latin typeface="맑은 고딕"/>
-                        </a:rPr>
-                        <a:t>옅은 점·다른 호기에서도 찾는가</a:t>
-                      </a:r>
-                    </a:p>
-                  </a:txBody>
-                  <a:tcPr anchor="ctr" marL="54864" marR="54864">
-                    <a:solidFill>
-                      <a:srgbClr val="FFFFFF"/>
-                    </a:solidFill>
-                  </a:tcPr>
-                </a:tc>
-                <a:tc>
-                  <a:txBody>
-                    <a:bodyPr/>
-                    <a:lstStyle/>
-                    <a:p>
-                      <a:pPr algn="ctr"/>
-                      <a:r>
-                        <a:rPr sz="1500" b="0">
-                          <a:solidFill>
-                            <a:srgbClr val="222222"/>
-                          </a:solidFill>
-                          <a:latin typeface="맑은 고딕"/>
-                        </a:rPr>
-                        <a:t>작대기 안에만 점을 합성(진하기 4 x 크기 3), 시드 42</a:t>
-                      </a:r>
-                    </a:p>
-                  </a:txBody>
-                  <a:tcPr anchor="ctr" marL="54864" marR="54864">
-                    <a:solidFill>
-                      <a:srgbClr val="FFFFFF"/>
-                    </a:solidFill>
-                  </a:tcPr>
-                </a:tc>
-              </a:tr>
-              <a:tr h="731520">
-                <a:tc>
-                  <a:txBody>
-                    <a:bodyPr/>
-                    <a:lstStyle/>
-                    <a:p>
-                      <a:pPr algn="l"/>
-                      <a:r>
-                        <a:rPr sz="1500" b="0">
-                          <a:solidFill>
-                            <a:srgbClr val="222222"/>
-                          </a:solidFill>
-                          <a:latin typeface="맑은 고딕"/>
-                        </a:rPr>
-                        <a:t>호기·해상도</a:t>
-                      </a:r>
-                    </a:p>
-                  </a:txBody>
-                  <a:tcPr anchor="ctr" marL="54864" marR="54864">
-                    <a:solidFill>
-                      <a:srgbClr val="F2F5FA"/>
-                    </a:solidFill>
-                  </a:tcPr>
-                </a:tc>
-                <a:tc>
-                  <a:txBody>
-                    <a:bodyPr/>
-                    <a:lstStyle/>
-                    <a:p>
-                      <a:pPr algn="ctr"/>
-                      <a:r>
-                        <a:rPr sz="1500" b="0">
-                          <a:solidFill>
-                            <a:srgbClr val="222222"/>
-                          </a:solidFill>
-                          <a:latin typeface="맑은 고딕"/>
-                        </a:rPr>
-                        <a:t>특정 호기나 해상도에서 약한가</a:t>
-                      </a:r>
-                    </a:p>
-                  </a:txBody>
-                  <a:tcPr anchor="ctr" marL="54864" marR="54864">
-                    <a:solidFill>
-                      <a:srgbClr val="F2F5FA"/>
-                    </a:solidFill>
-                  </a:tcPr>
-                </a:tc>
-                <a:tc>
-                  <a:txBody>
-                    <a:bodyPr/>
-                    <a:lstStyle/>
-                    <a:p>
-                      <a:pPr algn="ctr"/>
-                      <a:r>
-                        <a:rPr sz="1500" b="0">
-                          <a:solidFill>
-                            <a:srgbClr val="222222"/>
-                          </a:solidFill>
-                          <a:latin typeface="맑은 고딕"/>
-                        </a:rPr>
-                        <a:t>호기·해상도별로 나눠 평가</a:t>
-                      </a:r>
-                    </a:p>
-                  </a:txBody>
-                  <a:tcPr anchor="ctr" marL="54864" marR="54864">
-                    <a:solidFill>
-                      <a:srgbClr val="F2F5FA"/>
-                    </a:solidFill>
-                  </a:tcPr>
-                </a:tc>
-              </a:tr>
-            </a:tbl>
-          </a:graphicData>
-        </a:graphic>
-      </p:graphicFrame>
+        </p:nvPicPr>
+        <p:blipFill>
+          <a:blip r:embed="rId2"/>
+          <a:stretch>
+            <a:fillRect/>
+          </a:stretch>
+        </p:blipFill>
+        <p:spPr>
+          <a:xfrm>
+            <a:off x="548640" y="1900183"/>
+            <a:ext cx="6949440" cy="4154912"/>
+          </a:xfrm>
+          <a:prstGeom prst="rect">
+            <a:avLst/>
+          </a:prstGeom>
+        </p:spPr>
+      </p:pic>
       <p:sp>
         <p:nvSpPr>
           <p:cNvPr id="7" name="TextBox 6"/>
@@ -14667,8 +15831,8 @@
         </p:nvSpPr>
         <p:spPr>
           <a:xfrm>
-            <a:off x="548640" y="5486400"/>
-            <a:ext cx="10972800" cy="1097280"/>
+            <a:off x="7680960" y="1783080"/>
+            <a:ext cx="4114800" cy="4572000"/>
           </a:xfrm>
           <a:prstGeom prst="rect">
             <a:avLst/>
@@ -14683,7 +15847,7 @@
           <a:p>
             <a:pPr>
               <a:spcAft>
-                <a:spcPts val="600"/>
+                <a:spcPts val="900"/>
               </a:spcAft>
             </a:pPr>
             <a:r>
@@ -14702,7 +15866,7 @@
                 </a:solidFill>
                 <a:latin typeface="맑은 고딕"/>
               </a:rPr>
-              <a:t>합성·가짜 정상은 </a:t>
+              <a:t>오류가 난 이미지는 거의 전부 </a:t>
             </a:r>
             <a:r>
               <a:rPr sz="1600" b="1">
@@ -14711,7 +15875,7 @@
                 </a:solidFill>
                 <a:latin typeface="맑은 고딕"/>
               </a:rPr>
-              <a:t>인위적인 이미지</a:t>
+              <a:t>공식 라벨</a:t>
             </a:r>
             <a:r>
               <a:rPr sz="1600" b="0">
@@ -14720,16 +15884,23 @@
                 </a:solidFill>
                 <a:latin typeface="맑은 고딕"/>
               </a:rPr>
-              <a:t>라 실제 현장 성능이 아니라 </a:t>
-            </a:r>
+              <a:t>(사람이 그려 크기가 제각각)</a:t>
+            </a:r>
+          </a:p>
+          <a:p>
+            <a:pPr>
+              <a:spcAft>
+                <a:spcPts val="900"/>
+              </a:spcAft>
+            </a:pPr>
             <a:r>
               <a:rPr sz="1600" b="1">
                 <a:solidFill>
-                  <a:srgbClr val="222222"/>
-                </a:solidFill>
-                <a:latin typeface="맑은 고딕"/>
-              </a:rPr>
-              <a:t>모델 간 상대 비교와 취약점 탐색</a:t>
+                  <a:srgbClr val="2AA7B8"/>
+                </a:solidFill>
+                <a:latin typeface="맑은 고딕"/>
+              </a:rPr>
+              <a:t>• </a:t>
             </a:r>
             <a:r>
               <a:rPr sz="1600" b="0">
@@ -14738,7 +15909,57 @@
                 </a:solidFill>
                 <a:latin typeface="맑은 고딕"/>
               </a:rPr>
-              <a:t>으로 해석한다</a:t>
+              <a:t>확대하면 모델 박스는 점을 정확히 감쌈(중심 거리 0.5~1.2px)</a:t>
+            </a:r>
+          </a:p>
+          <a:p>
+            <a:pPr>
+              <a:spcAft>
+                <a:spcPts val="900"/>
+              </a:spcAft>
+            </a:pPr>
+            <a:r>
+              <a:rPr sz="1600" b="1">
+                <a:solidFill>
+                  <a:srgbClr val="2AA7B8"/>
+                </a:solidFill>
+                <a:latin typeface="맑은 고딕"/>
+              </a:rPr>
+              <a:t>• </a:t>
+            </a:r>
+            <a:r>
+              <a:rPr sz="1600" b="0">
+                <a:solidFill>
+                  <a:srgbClr val="222222"/>
+                </a:solidFill>
+                <a:latin typeface="맑은 고딕"/>
+              </a:rPr>
+              <a:t>정답 박스가 더 작거나(6x7, 9x5) 더 큼(14x15)</a:t>
+            </a:r>
+          </a:p>
+          <a:p>
+            <a:pPr>
+              <a:spcAft>
+                <a:spcPts val="900"/>
+              </a:spcAft>
+            </a:pPr>
+            <a:r>
+              <a:rPr sz="1600" b="1">
+                <a:solidFill>
+                  <a:srgbClr val="2AA7B8"/>
+                </a:solidFill>
+                <a:latin typeface="맑은 고딕"/>
+              </a:rPr>
+              <a:t>• </a:t>
+            </a:r>
+            <a:r>
+              <a:rPr sz="1600" b="0">
+                <a:solidFill>
+                  <a:srgbClr val="222222"/>
+                </a:solidFill>
+                <a:latin typeface="맑은 고딕"/>
+              </a:rPr>
+              <a:t>팀 라벨은 고정 크기라 IoU가 잘 맞아 점수가 부풀려진다</a:t>
             </a:r>
           </a:p>
         </p:txBody>
@@ -14834,7 +16055,7 @@
                 </a:solidFill>
                 <a:latin typeface="맑은 고딕"/>
               </a:rPr>
-              <a:t>점 제거: 모델은 점 자체를 본다</a:t>
+              <a:t>해결: 중심 거리로 재채점</a:t>
             </a:r>
           </a:p>
         </p:txBody>
@@ -14869,7 +16090,7 @@
                 </a:solidFill>
                 <a:latin typeface="맑은 고딕"/>
               </a:rPr>
-              <a:t>결함의 점을 지우면 검출이 사라진다 → 위치만 보는 지름길이 아니다</a:t>
+              <a:t>중심이 정답에서 R(px) 이내면 찾은 것으로 보면 거의 다 찾는다</a:t>
             </a:r>
           </a:p>
         </p:txBody>
@@ -14911,7 +16132,7 @@
       </p:sp>
       <p:pic>
         <p:nvPicPr>
-          <p:cNvPr id="6" name="Picture 5" descr="fig3b_dot_removal.png"/>
+          <p:cNvPr id="6" name="Picture 5" descr="fig5d_fn_by_model.png"/>
           <p:cNvPicPr>
             <a:picLocks noChangeAspect="1"/>
           </p:cNvPicPr>
@@ -14925,24 +16146,48 @@
         </p:blipFill>
         <p:spPr>
           <a:xfrm>
-            <a:off x="2397900" y="1554479"/>
-            <a:ext cx="7365719" cy="3291840"/>
+            <a:off x="274320" y="1864069"/>
+            <a:ext cx="6309360" cy="2764100"/>
           </a:xfrm>
           <a:prstGeom prst="rect">
             <a:avLst/>
           </a:prstGeom>
         </p:spPr>
       </p:pic>
-      <p:sp>
-        <p:nvSpPr>
-          <p:cNvPr id="7" name="TextBox 6"/>
+      <p:pic>
+        <p:nvPicPr>
+          <p:cNvPr id="7" name="Picture 6" descr="fig2b_center_distance.png"/>
+          <p:cNvPicPr>
+            <a:picLocks noChangeAspect="1"/>
+          </p:cNvPicPr>
+          <p:nvPr/>
+        </p:nvPicPr>
+        <p:blipFill>
+          <a:blip r:embed="rId3"/>
+          <a:stretch>
+            <a:fillRect/>
+          </a:stretch>
+        </p:blipFill>
+        <p:spPr>
+          <a:xfrm>
+            <a:off x="6583680" y="2055869"/>
+            <a:ext cx="5303520" cy="2380501"/>
+          </a:xfrm>
+          <a:prstGeom prst="rect">
+            <a:avLst/>
+          </a:prstGeom>
+        </p:spPr>
+      </p:pic>
+      <p:sp>
+        <p:nvSpPr>
+          <p:cNvPr id="8" name="TextBox 7"/>
           <p:cNvSpPr txBox="1"/>
           <p:nvPr/>
         </p:nvSpPr>
         <p:spPr>
           <a:xfrm>
-            <a:off x="731520" y="4937760"/>
-            <a:ext cx="10789920" cy="1737360"/>
+            <a:off x="548640" y="4983480"/>
+            <a:ext cx="11155680" cy="1737360"/>
           </a:xfrm>
           <a:prstGeom prst="rect">
             <a:avLst/>
@@ -14957,11 +16202,11 @@
           <a:p>
             <a:pPr>
               <a:spcAft>
-                <a:spcPts val="800"/>
+                <a:spcPts val="600"/>
               </a:spcAft>
             </a:pPr>
             <a:r>
-              <a:rPr sz="1600" b="1">
+              <a:rPr sz="1400" b="1">
                 <a:solidFill>
                   <a:srgbClr val="2AA7B8"/>
                 </a:solidFill>
@@ -14970,41 +16215,77 @@
               <a:t>• </a:t>
             </a:r>
             <a:r>
-              <a:rPr sz="1600" b="0">
-                <a:solidFill>
-                  <a:srgbClr val="222222"/>
-                </a:solidFill>
-                <a:latin typeface="맑은 고딕"/>
-              </a:rPr>
-              <a:t>test 정답 663개의 점을 보간으로 지우고 같은 모델을 다시 적용: 노이즈 없는 평균 보간으로 13x13 이상 지우면 </a:t>
-            </a:r>
-            <a:r>
-              <a:rPr sz="1600" b="1">
-                <a:solidFill>
-                  <a:srgbClr val="222222"/>
-                </a:solidFill>
-                <a:latin typeface="맑은 고딕"/>
-              </a:rPr>
-              <a:t>6개 모델 모두 0~3개</a:t>
-            </a:r>
-            <a:r>
-              <a:rPr sz="1600" b="0">
-                <a:solidFill>
-                  <a:srgbClr val="222222"/>
-                </a:solidFill>
-                <a:latin typeface="맑은 고딕"/>
-              </a:rPr>
-              <a:t>만 검출</a:t>
+              <a:rPr sz="1400" b="0">
+                <a:solidFill>
+                  <a:srgbClr val="222222"/>
+                </a:solidFill>
+                <a:latin typeface="맑은 고딕"/>
+              </a:rPr>
+              <a:t>R = 5px로 재채점하면 못 찾은 것이 4개 모델은 </a:t>
+            </a:r>
+            <a:r>
+              <a:rPr sz="1400" b="1">
+                <a:solidFill>
+                  <a:srgbClr val="222222"/>
+                </a:solidFill>
+                <a:latin typeface="맑은 고딕"/>
+              </a:rPr>
+              <a:t>0개</a:t>
+            </a:r>
+            <a:r>
+              <a:rPr sz="1400" b="0">
+                <a:solidFill>
+                  <a:srgbClr val="222222"/>
+                </a:solidFill>
+                <a:latin typeface="맑은 고딕"/>
+              </a:rPr>
+              <a:t>, MobileNetV3·RT-DETR-l은 </a:t>
+            </a:r>
+            <a:r>
+              <a:rPr sz="1400" b="1">
+                <a:solidFill>
+                  <a:srgbClr val="222222"/>
+                </a:solidFill>
+                <a:latin typeface="맑은 고딕"/>
+              </a:rPr>
+              <a:t>1개</a:t>
+            </a:r>
+            <a:r>
+              <a:rPr sz="1400" b="0">
+                <a:solidFill>
+                  <a:srgbClr val="222222"/>
+                </a:solidFill>
+                <a:latin typeface="맑은 고딕"/>
+              </a:rPr>
+              <a:t>. R ≥ 3px에서 6개 모델의 F1은 </a:t>
+            </a:r>
+            <a:r>
+              <a:rPr sz="1400" b="1">
+                <a:solidFill>
+                  <a:srgbClr val="222222"/>
+                </a:solidFill>
+                <a:latin typeface="맑은 고딕"/>
+              </a:rPr>
+              <a:t>0.998~1.000</a:t>
+            </a:r>
+            <a:r>
+              <a:rPr sz="1400" b="0">
+                <a:solidFill>
+                  <a:srgbClr val="222222"/>
+                </a:solidFill>
+                <a:latin typeface="맑은 고딕"/>
+              </a:rPr>
+              <a:t>(포화)</a:t>
             </a:r>
           </a:p>
           <a:p>
             <a:pPr>
               <a:spcAft>
-                <a:spcPts val="800"/>
+                <a:spcPts val="600"/>
               </a:spcAft>
             </a:pPr>
             <a:r>
-              <a:rPr sz="1600" b="1">
+              <a:rPr sz="1400" b="1">
                 <a:solidFill>
                   <a:srgbClr val="2AA7B8"/>
                 </a:solidFill>
@@ -15013,31 +16294,13 @@
               <a:t>• </a:t>
             </a:r>
             <a:r>
-              <a:rPr sz="1600" b="0">
-                <a:solidFill>
-                  <a:srgbClr val="222222"/>
-                </a:solidFill>
-                <a:latin typeface="맑은 고딕"/>
-              </a:rPr>
-              <a:t>YOLOv3-tiny 등에 남는 반응은 보간에 더한 </a:t>
-            </a:r>
-            <a:r>
-              <a:rPr sz="1600" b="1">
-                <a:solidFill>
-                  <a:srgbClr val="222222"/>
-                </a:solidFill>
-                <a:latin typeface="맑은 고딕"/>
-              </a:rPr>
-              <a:t>노이즈 무늬</a:t>
-            </a:r>
-            <a:r>
-              <a:rPr sz="1600" b="0">
-                <a:solidFill>
-                  <a:srgbClr val="222222"/>
-                </a:solidFill>
-                <a:latin typeface="맑은 고딕"/>
-              </a:rPr>
-              <a:t> 때문 → 다음 질문: 노이즈 무늬에 속아 오경보를 내는가?</a:t>
+              <a:rPr sz="1400" b="0">
+                <a:solidFill>
+                  <a:srgbClr val="222222"/>
+                </a:solidFill>
+                <a:latin typeface="맑은 고딕"/>
+              </a:rPr>
+              <a:t>IoU 0.5는 사실상 "중심이 2px 이내인가"를 재고 있었다(2px로 조이면 8~23개). 남는 차이는 위치 정밀도: mAP50-95는 D-FINE-N 0.659 &gt; RT-DETR-l 0.639 &gt; YOLO26n 0.633 &gt; R50 0.611 &gt; MobileNetV3 0.559 ≈ YOLOv3-tiny 0.558 (공식 라벨만 보면 0.335~0.365로 좁아짐)</a:t>
             </a:r>
           </a:p>
         </p:txBody>

--- a/ppt/presentation.pptx
+++ b/ppt/presentation.pptx
@@ -34,6 +34,7 @@
     <p:sldId id="282" r:id="rId33"/>
     <p:sldId id="283" r:id="rId34"/>
     <p:sldId id="284" r:id="rId35"/>
+    <p:sldId id="285" r:id="rId36"/>
   </p:sldIdLst>
   <p:sldSz cx="12191695" cy="6858000" type="screen4x3"/>
   <p:notesSz cx="6858000" cy="9144000"/>
@@ -3426,7 +3427,7 @@
                 </a:solidFill>
                 <a:latin typeface="맑은 고딕"/>
               </a:rPr>
-              <a:t>결과: 몇 개를 못 찾았다</a:t>
+              <a:t>평가 아키텍처: 같은 코드로 모든 모델을 채점</a:t>
             </a:r>
           </a:p>
         </p:txBody>
@@ -3461,7 +3462,7 @@
                 </a:solidFill>
                 <a:latin typeface="맑은 고딕"/>
               </a:rPr>
-              <a:t>F1은 0.986~0.991, 정답 663개 중 6~9개를 놓쳤고 거의 전부 공식 라벨 이미지다</a:t>
+              <a:t>임계값은 val에서 정해 고정하고, test는 한 번만 본다</a:t>
             </a:r>
           </a:p>
         </p:txBody>
@@ -3497,6 +3498,1646 @@
                 <a:latin typeface="맑은 고딕"/>
               </a:rPr>
               <a:t>10</a:t>
+            </a:r>
+          </a:p>
+        </p:txBody>
+      </p:sp>
+      <p:sp>
+        <p:nvSpPr>
+          <p:cNvPr id="6" name="TextBox 5"/>
+          <p:cNvSpPr txBox="1"/>
+          <p:nvPr/>
+        </p:nvSpPr>
+        <p:spPr>
+          <a:xfrm>
+            <a:off x="502920" y="6355080"/>
+            <a:ext cx="10180015" cy="365760"/>
+          </a:xfrm>
+          <a:prstGeom prst="rect">
+            <a:avLst/>
+          </a:prstGeom>
+          <a:noFill/>
+        </p:spPr>
+        <p:txBody>
+          <a:bodyPr wrap="square" anchor="t" lIns="45720" rIns="45720">
+            <a:spAutoFit/>
+          </a:bodyPr>
+          <a:lstStyle/>
+          <a:p>
+            <a:pPr algn="l"/>
+            <a:r>
+              <a:rPr sz="1100" b="0">
+                <a:solidFill>
+                  <a:srgbClr val="555B66"/>
+                </a:solidFill>
+                <a:latin typeface="맑은 고딕"/>
+              </a:rPr>
+              <a:t>평가(정답 있음)는 신뢰도와 IoU(또는 중심 거리)를 둘 다 보고, 현장 판정(정답 없음)은 신뢰도만 본다. 코드: src/minyeop/faster_rcnn/metrics.py, report.py</a:t>
+            </a:r>
+          </a:p>
+        </p:txBody>
+      </p:sp>
+      <p:sp>
+        <p:nvSpPr>
+          <p:cNvPr id="7" name="TextBox 6"/>
+          <p:cNvSpPr txBox="1"/>
+          <p:nvPr/>
+        </p:nvSpPr>
+        <p:spPr>
+          <a:xfrm>
+            <a:off x="457200" y="1600200"/>
+            <a:ext cx="11247120" cy="320040"/>
+          </a:xfrm>
+          <a:prstGeom prst="rect">
+            <a:avLst/>
+          </a:prstGeom>
+          <a:noFill/>
+        </p:spPr>
+        <p:txBody>
+          <a:bodyPr wrap="square" anchor="t" lIns="45720" rIns="45720">
+            <a:spAutoFit/>
+          </a:bodyPr>
+          <a:lstStyle/>
+          <a:p>
+            <a:pPr algn="l"/>
+            <a:r>
+              <a:rPr sz="1400" b="1">
+                <a:solidFill>
+                  <a:srgbClr val="1F3A5F"/>
+                </a:solidFill>
+                <a:latin typeface="맑은 고딕"/>
+              </a:rPr>
+              <a:t>① 예측과 임계값 선정</a:t>
+            </a:r>
+          </a:p>
+        </p:txBody>
+      </p:sp>
+      <p:sp>
+        <p:nvSpPr>
+          <p:cNvPr id="8" name="Rounded Rectangle 7"/>
+          <p:cNvSpPr/>
+          <p:nvPr/>
+        </p:nvSpPr>
+        <p:spPr>
+          <a:xfrm>
+            <a:off x="457200" y="1920240"/>
+            <a:ext cx="2103120" cy="1051560"/>
+          </a:xfrm>
+          <a:prstGeom prst="roundRect">
+            <a:avLst/>
+          </a:prstGeom>
+          <a:solidFill>
+            <a:srgbClr val="DDE6F7"/>
+          </a:solidFill>
+          <a:ln>
+            <a:solidFill>
+              <a:srgbClr val="555B66"/>
+            </a:solidFill>
+          </a:ln>
+        </p:spPr>
+        <p:style>
+          <a:lnRef idx="1">
+            <a:schemeClr val="accent1"/>
+          </a:lnRef>
+          <a:fillRef idx="3">
+            <a:schemeClr val="accent1"/>
+          </a:fillRef>
+          <a:effectRef idx="2">
+            <a:schemeClr val="accent1"/>
+          </a:effectRef>
+          <a:fontRef idx="minor">
+            <a:schemeClr val="lt1"/>
+          </a:fontRef>
+        </p:style>
+        <p:txBody>
+          <a:bodyPr rtlCol="0" anchor="ctr" wrap="square" lIns="64008" rIns="64008" tIns="27432" bIns="27432"/>
+          <a:lstStyle/>
+          <a:p>
+            <a:pPr algn="ctr">
+              <a:spcAft>
+                <a:spcPts val="300"/>
+              </a:spcAft>
+            </a:pPr>
+            <a:r>
+              <a:rPr sz="1400" b="1">
+                <a:solidFill>
+                  <a:srgbClr val="1F3A5F"/>
+                </a:solidFill>
+                <a:latin typeface="맑은 고딕"/>
+              </a:rPr>
+              <a:t>데이터 v2</a:t>
+            </a:r>
+          </a:p>
+          <a:p>
+            <a:pPr algn="ctr">
+              <a:spcAft>
+                <a:spcPts val="100"/>
+              </a:spcAft>
+            </a:pPr>
+            <a:r>
+              <a:rPr sz="1200">
+                <a:solidFill>
+                  <a:srgbClr val="222222"/>
+                </a:solidFill>
+                <a:latin typeface="맑은 고딕"/>
+              </a:rPr>
+              <a:t>train 1,767 · val 369</a:t>
+            </a:r>
+          </a:p>
+          <a:p>
+            <a:pPr algn="ctr">
+              <a:spcAft>
+                <a:spcPts val="100"/>
+              </a:spcAft>
+            </a:pPr>
+            <a:r>
+              <a:rPr sz="1200">
+                <a:solidFill>
+                  <a:srgbClr val="222222"/>
+                </a:solidFill>
+                <a:latin typeface="맑은 고딕"/>
+              </a:rPr>
+              <a:t>test 396 · 분할 시드 42</a:t>
+            </a:r>
+          </a:p>
+        </p:txBody>
+      </p:sp>
+      <p:sp>
+        <p:nvSpPr>
+          <p:cNvPr id="9" name="TextBox 8"/>
+          <p:cNvSpPr txBox="1"/>
+          <p:nvPr/>
+        </p:nvSpPr>
+        <p:spPr>
+          <a:xfrm>
+            <a:off x="2560320" y="2286000"/>
+            <a:ext cx="182880" cy="365760"/>
+          </a:xfrm>
+          <a:prstGeom prst="rect">
+            <a:avLst/>
+          </a:prstGeom>
+          <a:noFill/>
+        </p:spPr>
+        <p:txBody>
+          <a:bodyPr wrap="square" anchor="t" lIns="45720" rIns="45720">
+            <a:spAutoFit/>
+          </a:bodyPr>
+          <a:lstStyle/>
+          <a:p>
+            <a:pPr algn="ctr"/>
+            <a:r>
+              <a:rPr sz="1200" b="0">
+                <a:solidFill>
+                  <a:srgbClr val="555B66"/>
+                </a:solidFill>
+                <a:latin typeface="맑은 고딕"/>
+              </a:rPr>
+              <a:t>▶</a:t>
+            </a:r>
+          </a:p>
+        </p:txBody>
+      </p:sp>
+      <p:sp>
+        <p:nvSpPr>
+          <p:cNvPr id="10" name="Rounded Rectangle 9"/>
+          <p:cNvSpPr/>
+          <p:nvPr/>
+        </p:nvSpPr>
+        <p:spPr>
+          <a:xfrm>
+            <a:off x="2743200" y="1920240"/>
+            <a:ext cx="2103120" cy="1051560"/>
+          </a:xfrm>
+          <a:prstGeom prst="roundRect">
+            <a:avLst/>
+          </a:prstGeom>
+          <a:solidFill>
+            <a:srgbClr val="DDE6F7"/>
+          </a:solidFill>
+          <a:ln>
+            <a:solidFill>
+              <a:srgbClr val="555B66"/>
+            </a:solidFill>
+          </a:ln>
+        </p:spPr>
+        <p:style>
+          <a:lnRef idx="1">
+            <a:schemeClr val="accent1"/>
+          </a:lnRef>
+          <a:fillRef idx="3">
+            <a:schemeClr val="accent1"/>
+          </a:fillRef>
+          <a:effectRef idx="2">
+            <a:schemeClr val="accent1"/>
+          </a:effectRef>
+          <a:fontRef idx="minor">
+            <a:schemeClr val="lt1"/>
+          </a:fontRef>
+        </p:style>
+        <p:txBody>
+          <a:bodyPr rtlCol="0" anchor="ctr" wrap="square" lIns="64008" rIns="64008" tIns="27432" bIns="27432"/>
+          <a:lstStyle/>
+          <a:p>
+            <a:pPr algn="ctr">
+              <a:spcAft>
+                <a:spcPts val="300"/>
+              </a:spcAft>
+            </a:pPr>
+            <a:r>
+              <a:rPr sz="1400" b="1">
+                <a:solidFill>
+                  <a:srgbClr val="1F3A5F"/>
+                </a:solidFill>
+                <a:latin typeface="맑은 고딕"/>
+              </a:rPr>
+              <a:t>학습</a:t>
+            </a:r>
+          </a:p>
+          <a:p>
+            <a:pPr algn="ctr">
+              <a:spcAft>
+                <a:spcPts val="100"/>
+              </a:spcAft>
+            </a:pPr>
+            <a:r>
+              <a:rPr sz="1200">
+                <a:solidFill>
+                  <a:srgbClr val="222222"/>
+                </a:solidFill>
+                <a:latin typeface="맑은 고딕"/>
+              </a:rPr>
+              <a:t>6개 모델, train만 사용</a:t>
+            </a:r>
+          </a:p>
+          <a:p>
+            <a:pPr algn="ctr">
+              <a:spcAft>
+                <a:spcPts val="100"/>
+              </a:spcAft>
+            </a:pPr>
+            <a:r>
+              <a:rPr sz="1200">
+                <a:solidFill>
+                  <a:srgbClr val="222222"/>
+                </a:solidFill>
+                <a:latin typeface="맑은 고딕"/>
+              </a:rPr>
+              <a:t>test는 학습에 쓰지 않음</a:t>
+            </a:r>
+          </a:p>
+        </p:txBody>
+      </p:sp>
+      <p:sp>
+        <p:nvSpPr>
+          <p:cNvPr id="11" name="TextBox 10"/>
+          <p:cNvSpPr txBox="1"/>
+          <p:nvPr/>
+        </p:nvSpPr>
+        <p:spPr>
+          <a:xfrm>
+            <a:off x="4846320" y="2286000"/>
+            <a:ext cx="182880" cy="365760"/>
+          </a:xfrm>
+          <a:prstGeom prst="rect">
+            <a:avLst/>
+          </a:prstGeom>
+          <a:noFill/>
+        </p:spPr>
+        <p:txBody>
+          <a:bodyPr wrap="square" anchor="t" lIns="45720" rIns="45720">
+            <a:spAutoFit/>
+          </a:bodyPr>
+          <a:lstStyle/>
+          <a:p>
+            <a:pPr algn="ctr"/>
+            <a:r>
+              <a:rPr sz="1200" b="0">
+                <a:solidFill>
+                  <a:srgbClr val="555B66"/>
+                </a:solidFill>
+                <a:latin typeface="맑은 고딕"/>
+              </a:rPr>
+              <a:t>▶</a:t>
+            </a:r>
+          </a:p>
+        </p:txBody>
+      </p:sp>
+      <p:sp>
+        <p:nvSpPr>
+          <p:cNvPr id="12" name="Rounded Rectangle 11"/>
+          <p:cNvSpPr/>
+          <p:nvPr/>
+        </p:nvSpPr>
+        <p:spPr>
+          <a:xfrm>
+            <a:off x="5029200" y="1920240"/>
+            <a:ext cx="2103120" cy="1051560"/>
+          </a:xfrm>
+          <a:prstGeom prst="roundRect">
+            <a:avLst/>
+          </a:prstGeom>
+          <a:solidFill>
+            <a:srgbClr val="FBE7CC"/>
+          </a:solidFill>
+          <a:ln>
+            <a:solidFill>
+              <a:srgbClr val="555B66"/>
+            </a:solidFill>
+          </a:ln>
+        </p:spPr>
+        <p:style>
+          <a:lnRef idx="1">
+            <a:schemeClr val="accent1"/>
+          </a:lnRef>
+          <a:fillRef idx="3">
+            <a:schemeClr val="accent1"/>
+          </a:fillRef>
+          <a:effectRef idx="2">
+            <a:schemeClr val="accent1"/>
+          </a:effectRef>
+          <a:fontRef idx="minor">
+            <a:schemeClr val="lt1"/>
+          </a:fontRef>
+        </p:style>
+        <p:txBody>
+          <a:bodyPr rtlCol="0" anchor="ctr" wrap="square" lIns="64008" rIns="64008" tIns="27432" bIns="27432"/>
+          <a:lstStyle/>
+          <a:p>
+            <a:pPr algn="ctr">
+              <a:spcAft>
+                <a:spcPts val="300"/>
+              </a:spcAft>
+            </a:pPr>
+            <a:r>
+              <a:rPr sz="1400" b="1">
+                <a:solidFill>
+                  <a:srgbClr val="1F3A5F"/>
+                </a:solidFill>
+                <a:latin typeface="맑은 고딕"/>
+              </a:rPr>
+              <a:t>val 예측</a:t>
+            </a:r>
+          </a:p>
+          <a:p>
+            <a:pPr algn="ctr">
+              <a:spcAft>
+                <a:spcPts val="100"/>
+              </a:spcAft>
+            </a:pPr>
+            <a:r>
+              <a:rPr sz="1200">
+                <a:solidFill>
+                  <a:srgbClr val="222222"/>
+                </a:solidFill>
+                <a:latin typeface="맑은 고딕"/>
+              </a:rPr>
+              <a:t>신뢰도 0.001 이상 검출을</a:t>
+            </a:r>
+          </a:p>
+          <a:p>
+            <a:pPr algn="ctr">
+              <a:spcAft>
+                <a:spcPts val="100"/>
+              </a:spcAft>
+            </a:pPr>
+            <a:r>
+              <a:rPr sz="1200">
+                <a:solidFill>
+                  <a:srgbClr val="222222"/>
+                </a:solidFill>
+                <a:latin typeface="맑은 고딕"/>
+              </a:rPr>
+              <a:t>전부 저장</a:t>
+            </a:r>
+          </a:p>
+        </p:txBody>
+      </p:sp>
+      <p:sp>
+        <p:nvSpPr>
+          <p:cNvPr id="13" name="TextBox 12"/>
+          <p:cNvSpPr txBox="1"/>
+          <p:nvPr/>
+        </p:nvSpPr>
+        <p:spPr>
+          <a:xfrm>
+            <a:off x="7132320" y="2286000"/>
+            <a:ext cx="182880" cy="365760"/>
+          </a:xfrm>
+          <a:prstGeom prst="rect">
+            <a:avLst/>
+          </a:prstGeom>
+          <a:noFill/>
+        </p:spPr>
+        <p:txBody>
+          <a:bodyPr wrap="square" anchor="t" lIns="45720" rIns="45720">
+            <a:spAutoFit/>
+          </a:bodyPr>
+          <a:lstStyle/>
+          <a:p>
+            <a:pPr algn="ctr"/>
+            <a:r>
+              <a:rPr sz="1200" b="0">
+                <a:solidFill>
+                  <a:srgbClr val="555B66"/>
+                </a:solidFill>
+                <a:latin typeface="맑은 고딕"/>
+              </a:rPr>
+              <a:t>▶</a:t>
+            </a:r>
+          </a:p>
+        </p:txBody>
+      </p:sp>
+      <p:sp>
+        <p:nvSpPr>
+          <p:cNvPr id="14" name="Rounded Rectangle 13"/>
+          <p:cNvSpPr/>
+          <p:nvPr/>
+        </p:nvSpPr>
+        <p:spPr>
+          <a:xfrm>
+            <a:off x="7315200" y="1920240"/>
+            <a:ext cx="2103120" cy="1051560"/>
+          </a:xfrm>
+          <a:prstGeom prst="roundRect">
+            <a:avLst/>
+          </a:prstGeom>
+          <a:solidFill>
+            <a:srgbClr val="FBE7CC"/>
+          </a:solidFill>
+          <a:ln>
+            <a:solidFill>
+              <a:srgbClr val="555B66"/>
+            </a:solidFill>
+          </a:ln>
+        </p:spPr>
+        <p:style>
+          <a:lnRef idx="1">
+            <a:schemeClr val="accent1"/>
+          </a:lnRef>
+          <a:fillRef idx="3">
+            <a:schemeClr val="accent1"/>
+          </a:fillRef>
+          <a:effectRef idx="2">
+            <a:schemeClr val="accent1"/>
+          </a:effectRef>
+          <a:fontRef idx="minor">
+            <a:schemeClr val="lt1"/>
+          </a:fontRef>
+        </p:style>
+        <p:txBody>
+          <a:bodyPr rtlCol="0" anchor="ctr" wrap="square" lIns="64008" rIns="64008" tIns="27432" bIns="27432"/>
+          <a:lstStyle/>
+          <a:p>
+            <a:pPr algn="ctr">
+              <a:spcAft>
+                <a:spcPts val="300"/>
+              </a:spcAft>
+            </a:pPr>
+            <a:r>
+              <a:rPr sz="1400" b="1">
+                <a:solidFill>
+                  <a:srgbClr val="1F3A5F"/>
+                </a:solidFill>
+                <a:latin typeface="맑은 고딕"/>
+              </a:rPr>
+              <a:t>임계값 선정</a:t>
+            </a:r>
+          </a:p>
+          <a:p>
+            <a:pPr algn="ctr">
+              <a:spcAft>
+                <a:spcPts val="100"/>
+              </a:spcAft>
+            </a:pPr>
+            <a:r>
+              <a:rPr sz="1200">
+                <a:solidFill>
+                  <a:srgbClr val="222222"/>
+                </a:solidFill>
+                <a:latin typeface="맑은 고딕"/>
+              </a:rPr>
+              <a:t>val에서 F1이 최대인 값</a:t>
+            </a:r>
+          </a:p>
+          <a:p>
+            <a:pPr algn="ctr">
+              <a:spcAft>
+                <a:spcPts val="100"/>
+              </a:spcAft>
+            </a:pPr>
+            <a:r>
+              <a:rPr sz="1200">
+                <a:solidFill>
+                  <a:srgbClr val="222222"/>
+                </a:solidFill>
+                <a:latin typeface="맑은 고딕"/>
+              </a:rPr>
+              <a:t>모델마다 따로 정해 고정</a:t>
+            </a:r>
+          </a:p>
+        </p:txBody>
+      </p:sp>
+      <p:sp>
+        <p:nvSpPr>
+          <p:cNvPr id="15" name="TextBox 14"/>
+          <p:cNvSpPr txBox="1"/>
+          <p:nvPr/>
+        </p:nvSpPr>
+        <p:spPr>
+          <a:xfrm>
+            <a:off x="9418320" y="2286000"/>
+            <a:ext cx="182880" cy="365760"/>
+          </a:xfrm>
+          <a:prstGeom prst="rect">
+            <a:avLst/>
+          </a:prstGeom>
+          <a:noFill/>
+        </p:spPr>
+        <p:txBody>
+          <a:bodyPr wrap="square" anchor="t" lIns="45720" rIns="45720">
+            <a:spAutoFit/>
+          </a:bodyPr>
+          <a:lstStyle/>
+          <a:p>
+            <a:pPr algn="ctr"/>
+            <a:r>
+              <a:rPr sz="1200" b="0">
+                <a:solidFill>
+                  <a:srgbClr val="555B66"/>
+                </a:solidFill>
+                <a:latin typeface="맑은 고딕"/>
+              </a:rPr>
+              <a:t>▶</a:t>
+            </a:r>
+          </a:p>
+        </p:txBody>
+      </p:sp>
+      <p:sp>
+        <p:nvSpPr>
+          <p:cNvPr id="16" name="Rounded Rectangle 15"/>
+          <p:cNvSpPr/>
+          <p:nvPr/>
+        </p:nvSpPr>
+        <p:spPr>
+          <a:xfrm>
+            <a:off x="9601200" y="1920240"/>
+            <a:ext cx="2103120" cy="1051560"/>
+          </a:xfrm>
+          <a:prstGeom prst="roundRect">
+            <a:avLst/>
+          </a:prstGeom>
+          <a:solidFill>
+            <a:srgbClr val="FBE7CC"/>
+          </a:solidFill>
+          <a:ln>
+            <a:solidFill>
+              <a:srgbClr val="555B66"/>
+            </a:solidFill>
+          </a:ln>
+        </p:spPr>
+        <p:style>
+          <a:lnRef idx="1">
+            <a:schemeClr val="accent1"/>
+          </a:lnRef>
+          <a:fillRef idx="3">
+            <a:schemeClr val="accent1"/>
+          </a:fillRef>
+          <a:effectRef idx="2">
+            <a:schemeClr val="accent1"/>
+          </a:effectRef>
+          <a:fontRef idx="minor">
+            <a:schemeClr val="lt1"/>
+          </a:fontRef>
+        </p:style>
+        <p:txBody>
+          <a:bodyPr rtlCol="0" anchor="ctr" wrap="square" lIns="64008" rIns="64008" tIns="27432" bIns="27432"/>
+          <a:lstStyle/>
+          <a:p>
+            <a:pPr algn="ctr">
+              <a:spcAft>
+                <a:spcPts val="300"/>
+              </a:spcAft>
+            </a:pPr>
+            <a:r>
+              <a:rPr sz="1400" b="1">
+                <a:solidFill>
+                  <a:srgbClr val="1F3A5F"/>
+                </a:solidFill>
+                <a:latin typeface="맑은 고딕"/>
+              </a:rPr>
+              <a:t>test 예측 (1회)</a:t>
+            </a:r>
+          </a:p>
+          <a:p>
+            <a:pPr algn="ctr">
+              <a:spcAft>
+                <a:spcPts val="100"/>
+              </a:spcAft>
+            </a:pPr>
+            <a:r>
+              <a:rPr sz="1200">
+                <a:solidFill>
+                  <a:srgbClr val="222222"/>
+                </a:solidFill>
+                <a:latin typeface="맑은 고딕"/>
+              </a:rPr>
+              <a:t>고정한 임계값으로</a:t>
+            </a:r>
+          </a:p>
+          <a:p>
+            <a:pPr algn="ctr">
+              <a:spcAft>
+                <a:spcPts val="100"/>
+              </a:spcAft>
+            </a:pPr>
+            <a:r>
+              <a:rPr sz="1200">
+                <a:solidFill>
+                  <a:srgbClr val="222222"/>
+                </a:solidFill>
+                <a:latin typeface="맑은 고딕"/>
+              </a:rPr>
+              <a:t>test는 한 번만 채점</a:t>
+            </a:r>
+          </a:p>
+        </p:txBody>
+      </p:sp>
+      <p:sp>
+        <p:nvSpPr>
+          <p:cNvPr id="17" name="TextBox 16"/>
+          <p:cNvSpPr txBox="1"/>
+          <p:nvPr/>
+        </p:nvSpPr>
+        <p:spPr>
+          <a:xfrm>
+            <a:off x="457200" y="3108960"/>
+            <a:ext cx="11247120" cy="320040"/>
+          </a:xfrm>
+          <a:prstGeom prst="rect">
+            <a:avLst/>
+          </a:prstGeom>
+          <a:noFill/>
+        </p:spPr>
+        <p:txBody>
+          <a:bodyPr wrap="square" anchor="t" lIns="45720" rIns="45720">
+            <a:spAutoFit/>
+          </a:bodyPr>
+          <a:lstStyle/>
+          <a:p>
+            <a:pPr algn="l"/>
+            <a:r>
+              <a:rPr sz="1400" b="1">
+                <a:solidFill>
+                  <a:srgbClr val="1F3A5F"/>
+                </a:solidFill>
+                <a:latin typeface="맑은 고딕"/>
+              </a:rPr>
+              <a:t>② 채점 (정답 있음): 신뢰도와 IoU를 둘 다 본다</a:t>
+            </a:r>
+          </a:p>
+        </p:txBody>
+      </p:sp>
+      <p:sp>
+        <p:nvSpPr>
+          <p:cNvPr id="18" name="Rounded Rectangle 17"/>
+          <p:cNvSpPr/>
+          <p:nvPr/>
+        </p:nvSpPr>
+        <p:spPr>
+          <a:xfrm>
+            <a:off x="457200" y="3429000"/>
+            <a:ext cx="2651760" cy="1371600"/>
+          </a:xfrm>
+          <a:prstGeom prst="roundRect">
+            <a:avLst/>
+          </a:prstGeom>
+          <a:solidFill>
+            <a:srgbClr val="D6ECDC"/>
+          </a:solidFill>
+          <a:ln>
+            <a:solidFill>
+              <a:srgbClr val="555B66"/>
+            </a:solidFill>
+          </a:ln>
+        </p:spPr>
+        <p:style>
+          <a:lnRef idx="1">
+            <a:schemeClr val="accent1"/>
+          </a:lnRef>
+          <a:fillRef idx="3">
+            <a:schemeClr val="accent1"/>
+          </a:fillRef>
+          <a:effectRef idx="2">
+            <a:schemeClr val="accent1"/>
+          </a:effectRef>
+          <a:fontRef idx="minor">
+            <a:schemeClr val="lt1"/>
+          </a:fontRef>
+        </p:style>
+        <p:txBody>
+          <a:bodyPr rtlCol="0" anchor="ctr" wrap="square" lIns="64008" rIns="64008" tIns="27432" bIns="27432"/>
+          <a:lstStyle/>
+          <a:p>
+            <a:pPr algn="ctr">
+              <a:spcAft>
+                <a:spcPts val="300"/>
+              </a:spcAft>
+            </a:pPr>
+            <a:r>
+              <a:rPr sz="1400" b="1">
+                <a:solidFill>
+                  <a:srgbClr val="1F3A5F"/>
+                </a:solidFill>
+                <a:latin typeface="맑은 고딕"/>
+              </a:rPr>
+              <a:t>신뢰도 필터</a:t>
+            </a:r>
+          </a:p>
+          <a:p>
+            <a:pPr algn="ctr">
+              <a:spcAft>
+                <a:spcPts val="100"/>
+              </a:spcAft>
+            </a:pPr>
+            <a:r>
+              <a:rPr sz="1200">
+                <a:solidFill>
+                  <a:srgbClr val="222222"/>
+                </a:solidFill>
+                <a:latin typeface="맑은 고딕"/>
+              </a:rPr>
+              <a:t>신뢰도 ≥ 임계값인</a:t>
+            </a:r>
+          </a:p>
+          <a:p>
+            <a:pPr algn="ctr">
+              <a:spcAft>
+                <a:spcPts val="100"/>
+              </a:spcAft>
+            </a:pPr>
+            <a:r>
+              <a:rPr sz="1200">
+                <a:solidFill>
+                  <a:srgbClr val="222222"/>
+                </a:solidFill>
+                <a:latin typeface="맑은 고딕"/>
+              </a:rPr>
+              <a:t>검출만 사용</a:t>
+            </a:r>
+          </a:p>
+        </p:txBody>
+      </p:sp>
+      <p:sp>
+        <p:nvSpPr>
+          <p:cNvPr id="19" name="TextBox 18"/>
+          <p:cNvSpPr txBox="1"/>
+          <p:nvPr/>
+        </p:nvSpPr>
+        <p:spPr>
+          <a:xfrm>
+            <a:off x="3108960" y="3931920"/>
+            <a:ext cx="182880" cy="365760"/>
+          </a:xfrm>
+          <a:prstGeom prst="rect">
+            <a:avLst/>
+          </a:prstGeom>
+          <a:noFill/>
+        </p:spPr>
+        <p:txBody>
+          <a:bodyPr wrap="square" anchor="t" lIns="45720" rIns="45720">
+            <a:spAutoFit/>
+          </a:bodyPr>
+          <a:lstStyle/>
+          <a:p>
+            <a:pPr algn="ctr"/>
+            <a:r>
+              <a:rPr sz="1200" b="0">
+                <a:solidFill>
+                  <a:srgbClr val="555B66"/>
+                </a:solidFill>
+                <a:latin typeface="맑은 고딕"/>
+              </a:rPr>
+              <a:t>▶</a:t>
+            </a:r>
+          </a:p>
+        </p:txBody>
+      </p:sp>
+      <p:sp>
+        <p:nvSpPr>
+          <p:cNvPr id="20" name="Rounded Rectangle 19"/>
+          <p:cNvSpPr/>
+          <p:nvPr/>
+        </p:nvSpPr>
+        <p:spPr>
+          <a:xfrm>
+            <a:off x="3291840" y="3429000"/>
+            <a:ext cx="2651760" cy="1371600"/>
+          </a:xfrm>
+          <a:prstGeom prst="roundRect">
+            <a:avLst/>
+          </a:prstGeom>
+          <a:solidFill>
+            <a:srgbClr val="D6ECDC"/>
+          </a:solidFill>
+          <a:ln>
+            <a:solidFill>
+              <a:srgbClr val="555B66"/>
+            </a:solidFill>
+          </a:ln>
+        </p:spPr>
+        <p:style>
+          <a:lnRef idx="1">
+            <a:schemeClr val="accent1"/>
+          </a:lnRef>
+          <a:fillRef idx="3">
+            <a:schemeClr val="accent1"/>
+          </a:fillRef>
+          <a:effectRef idx="2">
+            <a:schemeClr val="accent1"/>
+          </a:effectRef>
+          <a:fontRef idx="minor">
+            <a:schemeClr val="lt1"/>
+          </a:fontRef>
+        </p:style>
+        <p:txBody>
+          <a:bodyPr rtlCol="0" anchor="ctr" wrap="square" lIns="64008" rIns="64008" tIns="27432" bIns="27432"/>
+          <a:lstStyle/>
+          <a:p>
+            <a:pPr algn="ctr">
+              <a:spcAft>
+                <a:spcPts val="300"/>
+              </a:spcAft>
+            </a:pPr>
+            <a:r>
+              <a:rPr sz="1400" b="1">
+                <a:solidFill>
+                  <a:srgbClr val="1F3A5F"/>
+                </a:solidFill>
+                <a:latin typeface="맑은 고딕"/>
+              </a:rPr>
+              <a:t>매칭</a:t>
+            </a:r>
+          </a:p>
+          <a:p>
+            <a:pPr algn="ctr">
+              <a:spcAft>
+                <a:spcPts val="100"/>
+              </a:spcAft>
+            </a:pPr>
+            <a:r>
+              <a:rPr sz="1200">
+                <a:solidFill>
+                  <a:srgbClr val="222222"/>
+                </a:solidFill>
+                <a:latin typeface="맑은 고딕"/>
+              </a:rPr>
+              <a:t>신뢰도 높은 순으로 정답 1개에</a:t>
+            </a:r>
+          </a:p>
+          <a:p>
+            <a:pPr algn="ctr">
+              <a:spcAft>
+                <a:spcPts val="100"/>
+              </a:spcAft>
+            </a:pPr>
+            <a:r>
+              <a:rPr sz="1200">
+                <a:solidFill>
+                  <a:srgbClr val="222222"/>
+                </a:solidFill>
+                <a:latin typeface="맑은 고딕"/>
+              </a:rPr>
+              <a:t>검출 1개 짝짓기</a:t>
+            </a:r>
+          </a:p>
+          <a:p>
+            <a:pPr algn="ctr">
+              <a:spcAft>
+                <a:spcPts val="100"/>
+              </a:spcAft>
+            </a:pPr>
+            <a:r>
+              <a:rPr sz="1200">
+                <a:solidFill>
+                  <a:srgbClr val="222222"/>
+                </a:solidFill>
+                <a:latin typeface="맑은 고딕"/>
+              </a:rPr>
+              <a:t>IoU ≥ 0.5 (기본)</a:t>
+            </a:r>
+          </a:p>
+          <a:p>
+            <a:pPr algn="ctr">
+              <a:spcAft>
+                <a:spcPts val="100"/>
+              </a:spcAft>
+            </a:pPr>
+            <a:r>
+              <a:rPr sz="1200">
+                <a:solidFill>
+                  <a:srgbClr val="222222"/>
+                </a:solidFill>
+                <a:latin typeface="맑은 고딕"/>
+              </a:rPr>
+              <a:t>중심 거리 ≤ R px (v2)</a:t>
+            </a:r>
+          </a:p>
+        </p:txBody>
+      </p:sp>
+      <p:sp>
+        <p:nvSpPr>
+          <p:cNvPr id="21" name="TextBox 20"/>
+          <p:cNvSpPr txBox="1"/>
+          <p:nvPr/>
+        </p:nvSpPr>
+        <p:spPr>
+          <a:xfrm>
+            <a:off x="5943600" y="3931920"/>
+            <a:ext cx="182880" cy="365760"/>
+          </a:xfrm>
+          <a:prstGeom prst="rect">
+            <a:avLst/>
+          </a:prstGeom>
+          <a:noFill/>
+        </p:spPr>
+        <p:txBody>
+          <a:bodyPr wrap="square" anchor="t" lIns="45720" rIns="45720">
+            <a:spAutoFit/>
+          </a:bodyPr>
+          <a:lstStyle/>
+          <a:p>
+            <a:pPr algn="ctr"/>
+            <a:r>
+              <a:rPr sz="1200" b="0">
+                <a:solidFill>
+                  <a:srgbClr val="555B66"/>
+                </a:solidFill>
+                <a:latin typeface="맑은 고딕"/>
+              </a:rPr>
+              <a:t>▶</a:t>
+            </a:r>
+          </a:p>
+        </p:txBody>
+      </p:sp>
+      <p:sp>
+        <p:nvSpPr>
+          <p:cNvPr id="22" name="Rounded Rectangle 21"/>
+          <p:cNvSpPr/>
+          <p:nvPr/>
+        </p:nvSpPr>
+        <p:spPr>
+          <a:xfrm>
+            <a:off x="6126480" y="3429000"/>
+            <a:ext cx="2651760" cy="1371600"/>
+          </a:xfrm>
+          <a:prstGeom prst="roundRect">
+            <a:avLst/>
+          </a:prstGeom>
+          <a:solidFill>
+            <a:srgbClr val="D6ECDC"/>
+          </a:solidFill>
+          <a:ln>
+            <a:solidFill>
+              <a:srgbClr val="555B66"/>
+            </a:solidFill>
+          </a:ln>
+        </p:spPr>
+        <p:style>
+          <a:lnRef idx="1">
+            <a:schemeClr val="accent1"/>
+          </a:lnRef>
+          <a:fillRef idx="3">
+            <a:schemeClr val="accent1"/>
+          </a:fillRef>
+          <a:effectRef idx="2">
+            <a:schemeClr val="accent1"/>
+          </a:effectRef>
+          <a:fontRef idx="minor">
+            <a:schemeClr val="lt1"/>
+          </a:fontRef>
+        </p:style>
+        <p:txBody>
+          <a:bodyPr rtlCol="0" anchor="ctr" wrap="square" lIns="64008" rIns="64008" tIns="27432" bIns="27432"/>
+          <a:lstStyle/>
+          <a:p>
+            <a:pPr algn="ctr">
+              <a:spcAft>
+                <a:spcPts val="300"/>
+              </a:spcAft>
+            </a:pPr>
+            <a:r>
+              <a:rPr sz="1400" b="1">
+                <a:solidFill>
+                  <a:srgbClr val="1F3A5F"/>
+                </a:solidFill>
+                <a:latin typeface="맑은 고딕"/>
+              </a:rPr>
+              <a:t>TP / FP / FN</a:t>
+            </a:r>
+          </a:p>
+          <a:p>
+            <a:pPr algn="ctr">
+              <a:spcAft>
+                <a:spcPts val="100"/>
+              </a:spcAft>
+            </a:pPr>
+            <a:r>
+              <a:rPr sz="1200">
+                <a:solidFill>
+                  <a:srgbClr val="222222"/>
+                </a:solidFill>
+                <a:latin typeface="맑은 고딕"/>
+              </a:rPr>
+              <a:t>짝이 있으면 TP</a:t>
+            </a:r>
+          </a:p>
+          <a:p>
+            <a:pPr algn="ctr">
+              <a:spcAft>
+                <a:spcPts val="100"/>
+              </a:spcAft>
+            </a:pPr>
+            <a:r>
+              <a:rPr sz="1200">
+                <a:solidFill>
+                  <a:srgbClr val="222222"/>
+                </a:solidFill>
+                <a:latin typeface="맑은 고딕"/>
+              </a:rPr>
+              <a:t>짝 없는 검출 FP</a:t>
+            </a:r>
+          </a:p>
+          <a:p>
+            <a:pPr algn="ctr">
+              <a:spcAft>
+                <a:spcPts val="100"/>
+              </a:spcAft>
+            </a:pPr>
+            <a:r>
+              <a:rPr sz="1200">
+                <a:solidFill>
+                  <a:srgbClr val="222222"/>
+                </a:solidFill>
+                <a:latin typeface="맑은 고딕"/>
+              </a:rPr>
+              <a:t>짝 없는 정답 FN</a:t>
+            </a:r>
+          </a:p>
+        </p:txBody>
+      </p:sp>
+      <p:sp>
+        <p:nvSpPr>
+          <p:cNvPr id="23" name="TextBox 22"/>
+          <p:cNvSpPr txBox="1"/>
+          <p:nvPr/>
+        </p:nvSpPr>
+        <p:spPr>
+          <a:xfrm>
+            <a:off x="8778240" y="3931920"/>
+            <a:ext cx="182880" cy="365760"/>
+          </a:xfrm>
+          <a:prstGeom prst="rect">
+            <a:avLst/>
+          </a:prstGeom>
+          <a:noFill/>
+        </p:spPr>
+        <p:txBody>
+          <a:bodyPr wrap="square" anchor="t" lIns="45720" rIns="45720">
+            <a:spAutoFit/>
+          </a:bodyPr>
+          <a:lstStyle/>
+          <a:p>
+            <a:pPr algn="ctr"/>
+            <a:r>
+              <a:rPr sz="1200" b="0">
+                <a:solidFill>
+                  <a:srgbClr val="555B66"/>
+                </a:solidFill>
+                <a:latin typeface="맑은 고딕"/>
+              </a:rPr>
+              <a:t>▶</a:t>
+            </a:r>
+          </a:p>
+        </p:txBody>
+      </p:sp>
+      <p:sp>
+        <p:nvSpPr>
+          <p:cNvPr id="24" name="Rounded Rectangle 23"/>
+          <p:cNvSpPr/>
+          <p:nvPr/>
+        </p:nvSpPr>
+        <p:spPr>
+          <a:xfrm>
+            <a:off x="8961120" y="3429000"/>
+            <a:ext cx="2651760" cy="1371600"/>
+          </a:xfrm>
+          <a:prstGeom prst="roundRect">
+            <a:avLst/>
+          </a:prstGeom>
+          <a:solidFill>
+            <a:srgbClr val="D6ECDC"/>
+          </a:solidFill>
+          <a:ln>
+            <a:solidFill>
+              <a:srgbClr val="555B66"/>
+            </a:solidFill>
+          </a:ln>
+        </p:spPr>
+        <p:style>
+          <a:lnRef idx="1">
+            <a:schemeClr val="accent1"/>
+          </a:lnRef>
+          <a:fillRef idx="3">
+            <a:schemeClr val="accent1"/>
+          </a:fillRef>
+          <a:effectRef idx="2">
+            <a:schemeClr val="accent1"/>
+          </a:effectRef>
+          <a:fontRef idx="minor">
+            <a:schemeClr val="lt1"/>
+          </a:fontRef>
+        </p:style>
+        <p:txBody>
+          <a:bodyPr rtlCol="0" anchor="ctr" wrap="square" lIns="64008" rIns="64008" tIns="27432" bIns="27432"/>
+          <a:lstStyle/>
+          <a:p>
+            <a:pPr algn="ctr">
+              <a:spcAft>
+                <a:spcPts val="300"/>
+              </a:spcAft>
+            </a:pPr>
+            <a:r>
+              <a:rPr sz="1400" b="1">
+                <a:solidFill>
+                  <a:srgbClr val="1F3A5F"/>
+                </a:solidFill>
+                <a:latin typeface="맑은 고딕"/>
+              </a:rPr>
+              <a:t>지표</a:t>
+            </a:r>
+          </a:p>
+          <a:p>
+            <a:pPr algn="ctr">
+              <a:spcAft>
+                <a:spcPts val="100"/>
+              </a:spcAft>
+            </a:pPr>
+            <a:r>
+              <a:rPr sz="1200">
+                <a:solidFill>
+                  <a:srgbClr val="222222"/>
+                </a:solidFill>
+                <a:latin typeface="맑은 고딕"/>
+              </a:rPr>
+              <a:t>P · R · F1(고정 임계값)</a:t>
+            </a:r>
+          </a:p>
+          <a:p>
+            <a:pPr algn="ctr">
+              <a:spcAft>
+                <a:spcPts val="100"/>
+              </a:spcAft>
+            </a:pPr>
+            <a:r>
+              <a:rPr sz="1200">
+                <a:solidFill>
+                  <a:srgbClr val="222222"/>
+                </a:solidFill>
+                <a:latin typeface="맑은 고딕"/>
+              </a:rPr>
+              <a:t>AP50, mAP50-95(임계값 무관)</a:t>
+            </a:r>
+          </a:p>
+          <a:p>
+            <a:pPr algn="ctr">
+              <a:spcAft>
+                <a:spcPts val="100"/>
+              </a:spcAft>
+            </a:pPr>
+            <a:r>
+              <a:rPr sz="1200">
+                <a:solidFill>
+                  <a:srgbClr val="222222"/>
+                </a:solidFill>
+                <a:latin typeface="맑은 고딕"/>
+              </a:rPr>
+              <a:t>전체 / 공식 라벨만, 호기별</a:t>
+            </a:r>
+          </a:p>
+        </p:txBody>
+      </p:sp>
+      <p:sp>
+        <p:nvSpPr>
+          <p:cNvPr id="25" name="TextBox 24"/>
+          <p:cNvSpPr txBox="1"/>
+          <p:nvPr/>
+        </p:nvSpPr>
+        <p:spPr>
+          <a:xfrm>
+            <a:off x="457200" y="4892040"/>
+            <a:ext cx="5486400" cy="320040"/>
+          </a:xfrm>
+          <a:prstGeom prst="rect">
+            <a:avLst/>
+          </a:prstGeom>
+          <a:noFill/>
+        </p:spPr>
+        <p:txBody>
+          <a:bodyPr wrap="square" anchor="t" lIns="45720" rIns="45720">
+            <a:spAutoFit/>
+          </a:bodyPr>
+          <a:lstStyle/>
+          <a:p>
+            <a:pPr algn="l"/>
+            <a:r>
+              <a:rPr sz="1400" b="1">
+                <a:solidFill>
+                  <a:srgbClr val="1F3A5F"/>
+                </a:solidFill>
+                <a:latin typeface="맑은 고딕"/>
+              </a:rPr>
+              <a:t>③ 일반화·robust 평가</a:t>
+            </a:r>
+          </a:p>
+        </p:txBody>
+      </p:sp>
+      <p:sp>
+        <p:nvSpPr>
+          <p:cNvPr id="26" name="Rounded Rectangle 25"/>
+          <p:cNvSpPr/>
+          <p:nvPr/>
+        </p:nvSpPr>
+        <p:spPr>
+          <a:xfrm>
+            <a:off x="457200" y="5212080"/>
+            <a:ext cx="6309360" cy="1097280"/>
+          </a:xfrm>
+          <a:prstGeom prst="roundRect">
+            <a:avLst/>
+          </a:prstGeom>
+          <a:solidFill>
+            <a:srgbClr val="F5D9D9"/>
+          </a:solidFill>
+          <a:ln>
+            <a:solidFill>
+              <a:srgbClr val="555B66"/>
+            </a:solidFill>
+          </a:ln>
+        </p:spPr>
+        <p:style>
+          <a:lnRef idx="1">
+            <a:schemeClr val="accent1"/>
+          </a:lnRef>
+          <a:fillRef idx="3">
+            <a:schemeClr val="accent1"/>
+          </a:fillRef>
+          <a:effectRef idx="2">
+            <a:schemeClr val="accent1"/>
+          </a:effectRef>
+          <a:fontRef idx="minor">
+            <a:schemeClr val="lt1"/>
+          </a:fontRef>
+        </p:style>
+        <p:txBody>
+          <a:bodyPr rtlCol="0" anchor="ctr" wrap="square" lIns="64008" rIns="64008" tIns="27432" bIns="27432"/>
+          <a:lstStyle/>
+          <a:p>
+            <a:pPr algn="ctr">
+              <a:spcAft>
+                <a:spcPts val="300"/>
+              </a:spcAft>
+            </a:pPr>
+            <a:r>
+              <a:rPr sz="1400" b="1">
+                <a:solidFill>
+                  <a:srgbClr val="1F3A5F"/>
+                </a:solidFill>
+                <a:latin typeface="맑은 고딕"/>
+              </a:rPr>
+              <a:t>같은 임계값, 이미지만 바꿔 시험</a:t>
+            </a:r>
+          </a:p>
+          <a:p>
+            <a:pPr algn="ctr">
+              <a:spcAft>
+                <a:spcPts val="100"/>
+              </a:spcAft>
+            </a:pPr>
+            <a:r>
+              <a:rPr sz="1200">
+                <a:solidFill>
+                  <a:srgbClr val="222222"/>
+                </a:solidFill>
+                <a:latin typeface="맑은 고딕"/>
+              </a:rPr>
+              <a:t>점 제거 · 가짜 정상 · 합성 점 · 호기별</a:t>
+            </a:r>
+          </a:p>
+          <a:p>
+            <a:pPr algn="ctr">
+              <a:spcAft>
+                <a:spcPts val="100"/>
+              </a:spcAft>
+            </a:pPr>
+            <a:r>
+              <a:rPr sz="1200">
+                <a:solidFill>
+                  <a:srgbClr val="222222"/>
+                </a:solidFill>
+                <a:latin typeface="맑은 고딕"/>
+              </a:rPr>
+              <a:t>→ 이미지 단위 오경보율, 합성 점 검출률·AP</a:t>
+            </a:r>
+          </a:p>
+        </p:txBody>
+      </p:sp>
+      <p:sp>
+        <p:nvSpPr>
+          <p:cNvPr id="27" name="TextBox 26"/>
+          <p:cNvSpPr txBox="1"/>
+          <p:nvPr/>
+        </p:nvSpPr>
+        <p:spPr>
+          <a:xfrm>
+            <a:off x="6949440" y="4892040"/>
+            <a:ext cx="4754880" cy="320040"/>
+          </a:xfrm>
+          <a:prstGeom prst="rect">
+            <a:avLst/>
+          </a:prstGeom>
+          <a:noFill/>
+        </p:spPr>
+        <p:txBody>
+          <a:bodyPr wrap="square" anchor="t" lIns="45720" rIns="45720">
+            <a:spAutoFit/>
+          </a:bodyPr>
+          <a:lstStyle/>
+          <a:p>
+            <a:pPr algn="l"/>
+            <a:r>
+              <a:rPr sz="1400" b="1">
+                <a:solidFill>
+                  <a:srgbClr val="1F3A5F"/>
+                </a:solidFill>
+                <a:latin typeface="맑은 고딕"/>
+              </a:rPr>
+              <a:t>현장 판정 (정답 없음)</a:t>
+            </a:r>
+          </a:p>
+        </p:txBody>
+      </p:sp>
+      <p:sp>
+        <p:nvSpPr>
+          <p:cNvPr id="28" name="Rounded Rectangle 27"/>
+          <p:cNvSpPr/>
+          <p:nvPr/>
+        </p:nvSpPr>
+        <p:spPr>
+          <a:xfrm>
+            <a:off x="6949440" y="5212080"/>
+            <a:ext cx="4754880" cy="1097280"/>
+          </a:xfrm>
+          <a:prstGeom prst="roundRect">
+            <a:avLst/>
+          </a:prstGeom>
+          <a:solidFill>
+            <a:srgbClr val="E6DCF0"/>
+          </a:solidFill>
+          <a:ln>
+            <a:solidFill>
+              <a:srgbClr val="555B66"/>
+            </a:solidFill>
+          </a:ln>
+        </p:spPr>
+        <p:style>
+          <a:lnRef idx="1">
+            <a:schemeClr val="accent1"/>
+          </a:lnRef>
+          <a:fillRef idx="3">
+            <a:schemeClr val="accent1"/>
+          </a:fillRef>
+          <a:effectRef idx="2">
+            <a:schemeClr val="accent1"/>
+          </a:effectRef>
+          <a:fontRef idx="minor">
+            <a:schemeClr val="lt1"/>
+          </a:fontRef>
+        </p:style>
+        <p:txBody>
+          <a:bodyPr rtlCol="0" anchor="ctr" wrap="square" lIns="64008" rIns="64008" tIns="27432" bIns="27432"/>
+          <a:lstStyle/>
+          <a:p>
+            <a:pPr algn="ctr">
+              <a:spcAft>
+                <a:spcPts val="300"/>
+              </a:spcAft>
+            </a:pPr>
+            <a:r>
+              <a:rPr sz="1400" b="1">
+                <a:solidFill>
+                  <a:srgbClr val="1F3A5F"/>
+                </a:solidFill>
+                <a:latin typeface="맑은 고딕"/>
+              </a:rPr>
+              <a:t>신뢰도만 본다 (IoU 사용 안 함)</a:t>
+            </a:r>
+          </a:p>
+          <a:p>
+            <a:pPr algn="ctr">
+              <a:spcAft>
+                <a:spcPts val="100"/>
+              </a:spcAft>
+            </a:pPr>
+            <a:r>
+              <a:rPr sz="1200">
+                <a:solidFill>
+                  <a:srgbClr val="222222"/>
+                </a:solidFill>
+                <a:latin typeface="맑은 고딕"/>
+              </a:rPr>
+              <a:t>이미지 최고 신뢰도 ≥ 임계값이면 NG</a:t>
+            </a:r>
+          </a:p>
+          <a:p>
+            <a:pPr algn="ctr">
+              <a:spcAft>
+                <a:spcPts val="100"/>
+              </a:spcAft>
+            </a:pPr>
+            <a:r>
+              <a:rPr sz="1200">
+                <a:solidFill>
+                  <a:srgbClr val="222222"/>
+                </a:solidFill>
+                <a:latin typeface="맑은 고딕"/>
+              </a:rPr>
+              <a:t>→ 불합격 / 재검사 / 합격 3단 판정</a:t>
+            </a:r>
+          </a:p>
+        </p:txBody>
+      </p:sp>
+    </p:spTree>
+  </p:cSld>
+  <p:clrMapOvr>
+    <a:masterClrMapping/>
+  </p:clrMapOvr>
+</p:sld>
+</file>
+
+<file path=ppt/slides/slide11.xml><?xml version="1.0" encoding="utf-8"?>
+<p:sld xmlns:a="http://schemas.openxmlformats.org/drawingml/2006/main" xmlns:p="http://schemas.openxmlformats.org/presentationml/2006/main" xmlns:r="http://schemas.openxmlformats.org/officeDocument/2006/relationships">
+  <p:cSld>
+    <p:spTree>
+      <p:nvGrpSpPr>
+        <p:cNvPr id="1" name=""/>
+        <p:cNvGrpSpPr/>
+        <p:nvPr/>
+      </p:nvGrpSpPr>
+      <p:grpSpPr/>
+      <p:sp>
+        <p:nvSpPr>
+          <p:cNvPr id="2" name="Rectangle 1"/>
+          <p:cNvSpPr/>
+          <p:nvPr/>
+        </p:nvSpPr>
+        <p:spPr>
+          <a:xfrm>
+            <a:off x="0" y="0"/>
+            <a:ext cx="164592" cy="6858000"/>
+          </a:xfrm>
+          <a:prstGeom prst="rect">
+            <a:avLst/>
+          </a:prstGeom>
+          <a:solidFill>
+            <a:srgbClr val="1F3A5F"/>
+          </a:solidFill>
+          <a:ln>
+            <a:noFill/>
+          </a:ln>
+        </p:spPr>
+        <p:style>
+          <a:lnRef idx="1">
+            <a:schemeClr val="accent1"/>
+          </a:lnRef>
+          <a:fillRef idx="3">
+            <a:schemeClr val="accent1"/>
+          </a:fillRef>
+          <a:effectRef idx="2">
+            <a:schemeClr val="accent1"/>
+          </a:effectRef>
+          <a:fontRef idx="minor">
+            <a:schemeClr val="lt1"/>
+          </a:fontRef>
+        </p:style>
+        <p:txBody>
+          <a:bodyPr rtlCol="0" anchor="ctr"/>
+          <a:lstStyle/>
+          <a:p>
+            <a:pPr algn="ctr"/>
+          </a:p>
+        </p:txBody>
+      </p:sp>
+      <p:sp>
+        <p:nvSpPr>
+          <p:cNvPr id="3" name="TextBox 2"/>
+          <p:cNvSpPr txBox="1"/>
+          <p:nvPr/>
+        </p:nvSpPr>
+        <p:spPr>
+          <a:xfrm>
+            <a:off x="502920" y="274320"/>
+            <a:ext cx="11185855" cy="731520"/>
+          </a:xfrm>
+          <a:prstGeom prst="rect">
+            <a:avLst/>
+          </a:prstGeom>
+          <a:noFill/>
+        </p:spPr>
+        <p:txBody>
+          <a:bodyPr wrap="square" anchor="ctr" lIns="45720" rIns="45720">
+            <a:spAutoFit/>
+          </a:bodyPr>
+          <a:lstStyle/>
+          <a:p>
+            <a:pPr algn="l"/>
+            <a:r>
+              <a:rPr sz="2800" b="1">
+                <a:solidFill>
+                  <a:srgbClr val="1F3A5F"/>
+                </a:solidFill>
+                <a:latin typeface="맑은 고딕"/>
+              </a:rPr>
+              <a:t>결과: 몇 개를 못 찾았다</a:t>
+            </a:r>
+          </a:p>
+        </p:txBody>
+      </p:sp>
+      <p:sp>
+        <p:nvSpPr>
+          <p:cNvPr id="4" name="TextBox 3"/>
+          <p:cNvSpPr txBox="1"/>
+          <p:nvPr/>
+        </p:nvSpPr>
+        <p:spPr>
+          <a:xfrm>
+            <a:off x="502920" y="1005840"/>
+            <a:ext cx="11185855" cy="640080"/>
+          </a:xfrm>
+          <a:prstGeom prst="rect">
+            <a:avLst/>
+          </a:prstGeom>
+          <a:noFill/>
+        </p:spPr>
+        <p:txBody>
+          <a:bodyPr wrap="square" anchor="t" lIns="45720" rIns="45720">
+            <a:spAutoFit/>
+          </a:bodyPr>
+          <a:lstStyle/>
+          <a:p>
+            <a:pPr algn="l"/>
+            <a:r>
+              <a:rPr sz="1800" b="1">
+                <a:solidFill>
+                  <a:srgbClr val="2AA7B8"/>
+                </a:solidFill>
+                <a:latin typeface="맑은 고딕"/>
+              </a:rPr>
+              <a:t>F1은 0.986~0.991, 정답 663개 중 6~9개를 놓쳤고 거의 전부 공식 라벨 이미지다</a:t>
+            </a:r>
+          </a:p>
+        </p:txBody>
+      </p:sp>
+      <p:sp>
+        <p:nvSpPr>
+          <p:cNvPr id="5" name="TextBox 4"/>
+          <p:cNvSpPr txBox="1"/>
+          <p:nvPr/>
+        </p:nvSpPr>
+        <p:spPr>
+          <a:xfrm>
+            <a:off x="11094415" y="6400800"/>
+            <a:ext cx="822960" cy="320040"/>
+          </a:xfrm>
+          <a:prstGeom prst="rect">
+            <a:avLst/>
+          </a:prstGeom>
+          <a:noFill/>
+        </p:spPr>
+        <p:txBody>
+          <a:bodyPr wrap="square" anchor="t" lIns="45720" rIns="45720">
+            <a:spAutoFit/>
+          </a:bodyPr>
+          <a:lstStyle/>
+          <a:p>
+            <a:pPr algn="r"/>
+            <a:r>
+              <a:rPr sz="1200" b="0">
+                <a:solidFill>
+                  <a:srgbClr val="555B66"/>
+                </a:solidFill>
+                <a:latin typeface="맑은 고딕"/>
+              </a:rPr>
+              <a:t>11</a:t>
             </a:r>
           </a:p>
         </p:txBody>
@@ -4311,7 +5952,7 @@
 </p:sld>
 </file>
 
-<file path=ppt/slides/slide11.xml><?xml version="1.0" encoding="utf-8"?>
+<file path=ppt/slides/slide12.xml><?xml version="1.0" encoding="utf-8"?>
 <p:sld xmlns:a="http://schemas.openxmlformats.org/drawingml/2006/main" xmlns:p="http://schemas.openxmlformats.org/presentationml/2006/main" xmlns:r="http://schemas.openxmlformats.org/officeDocument/2006/relationships">
   <p:cSld>
     <p:spTree>
@@ -4464,7 +6105,7 @@
                 </a:solidFill>
                 <a:latin typeface="맑은 고딕"/>
               </a:rPr>
-              <a:t>11</a:t>
+              <a:t>12</a:t>
             </a:r>
           </a:p>
         </p:txBody>
@@ -4614,337 +6255,6 @@
                 <a:latin typeface="맑은 고딕"/>
               </a:rPr>
               <a:t>: 점은 찾았지만 정답 박스(초록)가 더 커서 IoU가 0.5에 못 미친다 → "못 찾음"으로 집계</a:t>
-            </a:r>
-          </a:p>
-        </p:txBody>
-      </p:sp>
-    </p:spTree>
-  </p:cSld>
-  <p:clrMapOvr>
-    <a:masterClrMapping/>
-  </p:clrMapOvr>
-</p:sld>
-</file>
-
-<file path=ppt/slides/slide12.xml><?xml version="1.0" encoding="utf-8"?>
-<p:sld xmlns:a="http://schemas.openxmlformats.org/drawingml/2006/main" xmlns:p="http://schemas.openxmlformats.org/presentationml/2006/main" xmlns:r="http://schemas.openxmlformats.org/officeDocument/2006/relationships">
-  <p:cSld>
-    <p:spTree>
-      <p:nvGrpSpPr>
-        <p:cNvPr id="1" name=""/>
-        <p:cNvGrpSpPr/>
-        <p:nvPr/>
-      </p:nvGrpSpPr>
-      <p:grpSpPr/>
-      <p:sp>
-        <p:nvSpPr>
-          <p:cNvPr id="2" name="Rectangle 1"/>
-          <p:cNvSpPr/>
-          <p:nvPr/>
-        </p:nvSpPr>
-        <p:spPr>
-          <a:xfrm>
-            <a:off x="0" y="0"/>
-            <a:ext cx="164592" cy="6858000"/>
-          </a:xfrm>
-          <a:prstGeom prst="rect">
-            <a:avLst/>
-          </a:prstGeom>
-          <a:solidFill>
-            <a:srgbClr val="1F3A5F"/>
-          </a:solidFill>
-          <a:ln>
-            <a:noFill/>
-          </a:ln>
-        </p:spPr>
-        <p:style>
-          <a:lnRef idx="1">
-            <a:schemeClr val="accent1"/>
-          </a:lnRef>
-          <a:fillRef idx="3">
-            <a:schemeClr val="accent1"/>
-          </a:fillRef>
-          <a:effectRef idx="2">
-            <a:schemeClr val="accent1"/>
-          </a:effectRef>
-          <a:fontRef idx="minor">
-            <a:schemeClr val="lt1"/>
-          </a:fontRef>
-        </p:style>
-        <p:txBody>
-          <a:bodyPr rtlCol="0" anchor="ctr"/>
-          <a:lstStyle/>
-          <a:p>
-            <a:pPr algn="ctr"/>
-          </a:p>
-        </p:txBody>
-      </p:sp>
-      <p:sp>
-        <p:nvSpPr>
-          <p:cNvPr id="3" name="TextBox 2"/>
-          <p:cNvSpPr txBox="1"/>
-          <p:nvPr/>
-        </p:nvSpPr>
-        <p:spPr>
-          <a:xfrm>
-            <a:off x="502920" y="274320"/>
-            <a:ext cx="11185855" cy="731520"/>
-          </a:xfrm>
-          <a:prstGeom prst="rect">
-            <a:avLst/>
-          </a:prstGeom>
-          <a:noFill/>
-        </p:spPr>
-        <p:txBody>
-          <a:bodyPr wrap="square" anchor="ctr" lIns="45720" rIns="45720">
-            <a:spAutoFit/>
-          </a:bodyPr>
-          <a:lstStyle/>
-          <a:p>
-            <a:pPr algn="l"/>
-            <a:r>
-              <a:rPr sz="2800" b="1">
-                <a:solidFill>
-                  <a:srgbClr val="1F3A5F"/>
-                </a:solidFill>
-                <a:latin typeface="맑은 고딕"/>
-              </a:rPr>
-              <a:t>원인: 공식 라벨의 박스 크기</a:t>
-            </a:r>
-          </a:p>
-        </p:txBody>
-      </p:sp>
-      <p:sp>
-        <p:nvSpPr>
-          <p:cNvPr id="4" name="TextBox 3"/>
-          <p:cNvSpPr txBox="1"/>
-          <p:nvPr/>
-        </p:nvSpPr>
-        <p:spPr>
-          <a:xfrm>
-            <a:off x="502920" y="1005840"/>
-            <a:ext cx="11185855" cy="640080"/>
-          </a:xfrm>
-          <a:prstGeom prst="rect">
-            <a:avLst/>
-          </a:prstGeom>
-          <a:noFill/>
-        </p:spPr>
-        <p:txBody>
-          <a:bodyPr wrap="square" anchor="t" lIns="45720" rIns="45720">
-            <a:spAutoFit/>
-          </a:bodyPr>
-          <a:lstStyle/>
-          <a:p>
-            <a:pPr algn="l"/>
-            <a:r>
-              <a:rPr sz="1800" b="1">
-                <a:solidFill>
-                  <a:srgbClr val="2AA7B8"/>
-                </a:solidFill>
-                <a:latin typeface="맑은 고딕"/>
-              </a:rPr>
-              <a:t>놓친 것이 아니라 정답 박스의 크기가 달라서 IoU가 0.5에 못 미친 것이다</a:t>
-            </a:r>
-          </a:p>
-        </p:txBody>
-      </p:sp>
-      <p:sp>
-        <p:nvSpPr>
-          <p:cNvPr id="5" name="TextBox 4"/>
-          <p:cNvSpPr txBox="1"/>
-          <p:nvPr/>
-        </p:nvSpPr>
-        <p:spPr>
-          <a:xfrm>
-            <a:off x="11094415" y="6400800"/>
-            <a:ext cx="822960" cy="320040"/>
-          </a:xfrm>
-          <a:prstGeom prst="rect">
-            <a:avLst/>
-          </a:prstGeom>
-          <a:noFill/>
-        </p:spPr>
-        <p:txBody>
-          <a:bodyPr wrap="square" anchor="t" lIns="45720" rIns="45720">
-            <a:spAutoFit/>
-          </a:bodyPr>
-          <a:lstStyle/>
-          <a:p>
-            <a:pPr algn="r"/>
-            <a:r>
-              <a:rPr sz="1200" b="0">
-                <a:solidFill>
-                  <a:srgbClr val="555B66"/>
-                </a:solidFill>
-                <a:latin typeface="맑은 고딕"/>
-              </a:rPr>
-              <a:t>12</a:t>
-            </a:r>
-          </a:p>
-        </p:txBody>
-      </p:sp>
-      <p:pic>
-        <p:nvPicPr>
-          <p:cNvPr id="6" name="Picture 5" descr="fig3a_fn_cases.png"/>
-          <p:cNvPicPr>
-            <a:picLocks noChangeAspect="1"/>
-          </p:cNvPicPr>
-          <p:nvPr/>
-        </p:nvPicPr>
-        <p:blipFill>
-          <a:blip r:embed="rId2"/>
-          <a:stretch>
-            <a:fillRect/>
-          </a:stretch>
-        </p:blipFill>
-        <p:spPr>
-          <a:xfrm>
-            <a:off x="548640" y="1900183"/>
-            <a:ext cx="6949440" cy="4154912"/>
-          </a:xfrm>
-          <a:prstGeom prst="rect">
-            <a:avLst/>
-          </a:prstGeom>
-        </p:spPr>
-      </p:pic>
-      <p:sp>
-        <p:nvSpPr>
-          <p:cNvPr id="7" name="TextBox 6"/>
-          <p:cNvSpPr txBox="1"/>
-          <p:nvPr/>
-        </p:nvSpPr>
-        <p:spPr>
-          <a:xfrm>
-            <a:off x="7680960" y="1783080"/>
-            <a:ext cx="4114800" cy="4572000"/>
-          </a:xfrm>
-          <a:prstGeom prst="rect">
-            <a:avLst/>
-          </a:prstGeom>
-          <a:noFill/>
-        </p:spPr>
-        <p:txBody>
-          <a:bodyPr wrap="square" lIns="45720" rIns="45720">
-            <a:spAutoFit/>
-          </a:bodyPr>
-          <a:lstStyle/>
-          <a:p>
-            <a:pPr>
-              <a:spcAft>
-                <a:spcPts val="900"/>
-              </a:spcAft>
-            </a:pPr>
-            <a:r>
-              <a:rPr sz="1600" b="1">
-                <a:solidFill>
-                  <a:srgbClr val="2AA7B8"/>
-                </a:solidFill>
-                <a:latin typeface="맑은 고딕"/>
-              </a:rPr>
-              <a:t>• </a:t>
-            </a:r>
-            <a:r>
-              <a:rPr sz="1600" b="0">
-                <a:solidFill>
-                  <a:srgbClr val="222222"/>
-                </a:solidFill>
-                <a:latin typeface="맑은 고딕"/>
-              </a:rPr>
-              <a:t>오류가 난 이미지는 거의 전부 </a:t>
-            </a:r>
-            <a:r>
-              <a:rPr sz="1600" b="1">
-                <a:solidFill>
-                  <a:srgbClr val="222222"/>
-                </a:solidFill>
-                <a:latin typeface="맑은 고딕"/>
-              </a:rPr>
-              <a:t>공식 라벨</a:t>
-            </a:r>
-            <a:r>
-              <a:rPr sz="1600" b="0">
-                <a:solidFill>
-                  <a:srgbClr val="222222"/>
-                </a:solidFill>
-                <a:latin typeface="맑은 고딕"/>
-              </a:rPr>
-              <a:t>(사람이 그려 크기가 제각각)</a:t>
-            </a:r>
-          </a:p>
-          <a:p>
-            <a:pPr>
-              <a:spcAft>
-                <a:spcPts val="900"/>
-              </a:spcAft>
-            </a:pPr>
-            <a:r>
-              <a:rPr sz="1600" b="1">
-                <a:solidFill>
-                  <a:srgbClr val="2AA7B8"/>
-                </a:solidFill>
-                <a:latin typeface="맑은 고딕"/>
-              </a:rPr>
-              <a:t>• </a:t>
-            </a:r>
-            <a:r>
-              <a:rPr sz="1600" b="0">
-                <a:solidFill>
-                  <a:srgbClr val="222222"/>
-                </a:solidFill>
-                <a:latin typeface="맑은 고딕"/>
-              </a:rPr>
-              <a:t>확대하면 모델 박스는 점을 정확히 감쌈(중심 거리 0.5~1.2px)</a:t>
-            </a:r>
-          </a:p>
-          <a:p>
-            <a:pPr>
-              <a:spcAft>
-                <a:spcPts val="900"/>
-              </a:spcAft>
-            </a:pPr>
-            <a:r>
-              <a:rPr sz="1600" b="1">
-                <a:solidFill>
-                  <a:srgbClr val="2AA7B8"/>
-                </a:solidFill>
-                <a:latin typeface="맑은 고딕"/>
-              </a:rPr>
-              <a:t>• </a:t>
-            </a:r>
-            <a:r>
-              <a:rPr sz="1600" b="0">
-                <a:solidFill>
-                  <a:srgbClr val="222222"/>
-                </a:solidFill>
-                <a:latin typeface="맑은 고딕"/>
-              </a:rPr>
-              <a:t>정답 박스가 더 작거나(6x7, 9x5) 더 큼(14x15)</a:t>
-            </a:r>
-          </a:p>
-          <a:p>
-            <a:pPr>
-              <a:spcAft>
-                <a:spcPts val="900"/>
-              </a:spcAft>
-            </a:pPr>
-            <a:r>
-              <a:rPr sz="1600" b="1">
-                <a:solidFill>
-                  <a:srgbClr val="2AA7B8"/>
-                </a:solidFill>
-                <a:latin typeface="맑은 고딕"/>
-              </a:rPr>
-              <a:t>• </a:t>
-            </a:r>
-            <a:r>
-              <a:rPr sz="1600" b="0">
-                <a:solidFill>
-                  <a:srgbClr val="222222"/>
-                </a:solidFill>
-                <a:latin typeface="맑은 고딕"/>
-              </a:rPr>
-              <a:t>팀 라벨은 고정 크기라 IoU가 잘 맞아 점수가 부풀려진다</a:t>
             </a:r>
           </a:p>
         </p:txBody>
@@ -5040,7 +6350,7 @@
                 </a:solidFill>
                 <a:latin typeface="맑은 고딕"/>
               </a:rPr>
-              <a:t>해결: 중심 거리로 재채점</a:t>
+              <a:t>원인: 공식 라벨의 박스 크기</a:t>
             </a:r>
           </a:p>
         </p:txBody>
@@ -5075,7 +6385,7 @@
                 </a:solidFill>
                 <a:latin typeface="맑은 고딕"/>
               </a:rPr>
-              <a:t>중심이 정답에서 R(px) 이내면 찾은 것으로 보면 거의 다 찾는다</a:t>
+              <a:t>놓친 것이 아니라 정답 박스의 크기가 달라서 IoU가 0.5에 못 미친 것이다</a:t>
             </a:r>
           </a:p>
         </p:txBody>
@@ -5117,7 +6427,7 @@
       </p:sp>
       <p:pic>
         <p:nvPicPr>
-          <p:cNvPr id="6" name="Picture 5" descr="fig5d_fn_by_model.png"/>
+          <p:cNvPr id="6" name="Picture 5" descr="fig3a_fn_cases.png"/>
           <p:cNvPicPr>
             <a:picLocks noChangeAspect="1"/>
           </p:cNvPicPr>
@@ -5131,48 +6441,24 @@
         </p:blipFill>
         <p:spPr>
           <a:xfrm>
-            <a:off x="274320" y="1864069"/>
-            <a:ext cx="6309360" cy="2764100"/>
+            <a:off x="548640" y="1900183"/>
+            <a:ext cx="6949440" cy="4154912"/>
           </a:xfrm>
           <a:prstGeom prst="rect">
             <a:avLst/>
           </a:prstGeom>
         </p:spPr>
       </p:pic>
-      <p:pic>
-        <p:nvPicPr>
-          <p:cNvPr id="7" name="Picture 6" descr="fig2b_center_distance.png"/>
-          <p:cNvPicPr>
-            <a:picLocks noChangeAspect="1"/>
-          </p:cNvPicPr>
-          <p:nvPr/>
-        </p:nvPicPr>
-        <p:blipFill>
-          <a:blip r:embed="rId3"/>
-          <a:stretch>
-            <a:fillRect/>
-          </a:stretch>
-        </p:blipFill>
-        <p:spPr>
-          <a:xfrm>
-            <a:off x="6583680" y="2055869"/>
-            <a:ext cx="5303520" cy="2380501"/>
-          </a:xfrm>
-          <a:prstGeom prst="rect">
-            <a:avLst/>
-          </a:prstGeom>
-        </p:spPr>
-      </p:pic>
-      <p:sp>
-        <p:nvSpPr>
-          <p:cNvPr id="8" name="TextBox 7"/>
+      <p:sp>
+        <p:nvSpPr>
+          <p:cNvPr id="7" name="TextBox 6"/>
           <p:cNvSpPr txBox="1"/>
           <p:nvPr/>
         </p:nvSpPr>
         <p:spPr>
           <a:xfrm>
-            <a:off x="548640" y="4983480"/>
-            <a:ext cx="11155680" cy="1737360"/>
+            <a:off x="7680960" y="1783080"/>
+            <a:ext cx="4114800" cy="4572000"/>
           </a:xfrm>
           <a:prstGeom prst="rect">
             <a:avLst/>
@@ -5187,11 +6473,11 @@
           <a:p>
             <a:pPr>
               <a:spcAft>
-                <a:spcPts val="600"/>
+                <a:spcPts val="900"/>
               </a:spcAft>
             </a:pPr>
             <a:r>
-              <a:rPr sz="1400" b="1">
+              <a:rPr sz="1600" b="1">
                 <a:solidFill>
                   <a:srgbClr val="2AA7B8"/>
                 </a:solidFill>
@@ -5200,77 +6486,41 @@
               <a:t>• </a:t>
             </a:r>
             <a:r>
-              <a:rPr sz="1400" b="0">
-                <a:solidFill>
-                  <a:srgbClr val="222222"/>
-                </a:solidFill>
-                <a:latin typeface="맑은 고딕"/>
-              </a:rPr>
-              <a:t>R = 5px로 재채점하면 못 찾은 것이 4개 모델은 </a:t>
-            </a:r>
-            <a:r>
-              <a:rPr sz="1400" b="1">
-                <a:solidFill>
-                  <a:srgbClr val="222222"/>
-                </a:solidFill>
-                <a:latin typeface="맑은 고딕"/>
-              </a:rPr>
-              <a:t>0개</a:t>
-            </a:r>
-            <a:r>
-              <a:rPr sz="1400" b="0">
-                <a:solidFill>
-                  <a:srgbClr val="222222"/>
-                </a:solidFill>
-                <a:latin typeface="맑은 고딕"/>
-              </a:rPr>
-              <a:t>, MobileNetV3·RT-DETR-l은 </a:t>
-            </a:r>
-            <a:r>
-              <a:rPr sz="1400" b="1">
-                <a:solidFill>
-                  <a:srgbClr val="222222"/>
-                </a:solidFill>
-                <a:latin typeface="맑은 고딕"/>
-              </a:rPr>
-              <a:t>1개</a:t>
-            </a:r>
-            <a:r>
-              <a:rPr sz="1400" b="0">
-                <a:solidFill>
-                  <a:srgbClr val="222222"/>
-                </a:solidFill>
-                <a:latin typeface="맑은 고딕"/>
-              </a:rPr>
-              <a:t>. R ≥ 3px에서 6개 모델의 F1은 </a:t>
-            </a:r>
-            <a:r>
-              <a:rPr sz="1400" b="1">
-                <a:solidFill>
-                  <a:srgbClr val="222222"/>
-                </a:solidFill>
-                <a:latin typeface="맑은 고딕"/>
-              </a:rPr>
-              <a:t>0.998~1.000</a:t>
-            </a:r>
-            <a:r>
-              <a:rPr sz="1400" b="0">
-                <a:solidFill>
-                  <a:srgbClr val="222222"/>
-                </a:solidFill>
-                <a:latin typeface="맑은 고딕"/>
-              </a:rPr>
-              <a:t>(포화)</a:t>
+              <a:rPr sz="1600" b="0">
+                <a:solidFill>
+                  <a:srgbClr val="222222"/>
+                </a:solidFill>
+                <a:latin typeface="맑은 고딕"/>
+              </a:rPr>
+              <a:t>오류가 난 이미지는 거의 전부 </a:t>
+            </a:r>
+            <a:r>
+              <a:rPr sz="1600" b="1">
+                <a:solidFill>
+                  <a:srgbClr val="222222"/>
+                </a:solidFill>
+                <a:latin typeface="맑은 고딕"/>
+              </a:rPr>
+              <a:t>공식 라벨</a:t>
+            </a:r>
+            <a:r>
+              <a:rPr sz="1600" b="0">
+                <a:solidFill>
+                  <a:srgbClr val="222222"/>
+                </a:solidFill>
+                <a:latin typeface="맑은 고딕"/>
+              </a:rPr>
+              <a:t>(사람이 그려 크기가 제각각)</a:t>
             </a:r>
           </a:p>
           <a:p>
             <a:pPr>
               <a:spcAft>
-                <a:spcPts val="600"/>
+                <a:spcPts val="900"/>
               </a:spcAft>
             </a:pPr>
             <a:r>
-              <a:rPr sz="1400" b="1">
+              <a:rPr sz="1600" b="1">
                 <a:solidFill>
                   <a:srgbClr val="2AA7B8"/>
                 </a:solidFill>
@@ -5279,13 +6529,63 @@
               <a:t>• </a:t>
             </a:r>
             <a:r>
-              <a:rPr sz="1400" b="0">
-                <a:solidFill>
-                  <a:srgbClr val="222222"/>
-                </a:solidFill>
-                <a:latin typeface="맑은 고딕"/>
-              </a:rPr>
-              <a:t>IoU 0.5는 사실상 "중심이 2px 이내인가"를 재고 있었다(2px로 조이면 8~23개). 남는 차이는 위치 정밀도: mAP50-95는 D-FINE-N 0.659 &gt; RT-DETR-l 0.639 &gt; YOLO26n 0.633 &gt; R50 0.611 &gt; MobileNetV3 0.559 ≈ YOLOv3-tiny 0.558 (공식 라벨만 보면 0.335~0.365로 좁아짐)</a:t>
+              <a:rPr sz="1600" b="0">
+                <a:solidFill>
+                  <a:srgbClr val="222222"/>
+                </a:solidFill>
+                <a:latin typeface="맑은 고딕"/>
+              </a:rPr>
+              <a:t>확대하면 모델 박스는 점을 정확히 감쌈(중심 거리 0.5~1.2px)</a:t>
+            </a:r>
+          </a:p>
+          <a:p>
+            <a:pPr>
+              <a:spcAft>
+                <a:spcPts val="900"/>
+              </a:spcAft>
+            </a:pPr>
+            <a:r>
+              <a:rPr sz="1600" b="1">
+                <a:solidFill>
+                  <a:srgbClr val="2AA7B8"/>
+                </a:solidFill>
+                <a:latin typeface="맑은 고딕"/>
+              </a:rPr>
+              <a:t>• </a:t>
+            </a:r>
+            <a:r>
+              <a:rPr sz="1600" b="0">
+                <a:solidFill>
+                  <a:srgbClr val="222222"/>
+                </a:solidFill>
+                <a:latin typeface="맑은 고딕"/>
+              </a:rPr>
+              <a:t>정답 박스가 더 작거나(6x7, 9x5) 더 큼(14x15)</a:t>
+            </a:r>
+          </a:p>
+          <a:p>
+            <a:pPr>
+              <a:spcAft>
+                <a:spcPts val="900"/>
+              </a:spcAft>
+            </a:pPr>
+            <a:r>
+              <a:rPr sz="1600" b="1">
+                <a:solidFill>
+                  <a:srgbClr val="2AA7B8"/>
+                </a:solidFill>
+                <a:latin typeface="맑은 고딕"/>
+              </a:rPr>
+              <a:t>• </a:t>
+            </a:r>
+            <a:r>
+              <a:rPr sz="1600" b="0">
+                <a:solidFill>
+                  <a:srgbClr val="222222"/>
+                </a:solidFill>
+                <a:latin typeface="맑은 고딕"/>
+              </a:rPr>
+              <a:t>팀 라벨은 고정 크기라 IoU가 잘 맞아 점수가 부풀려진다</a:t>
             </a:r>
           </a:p>
         </p:txBody>
@@ -5381,7 +6681,7 @@
                 </a:solidFill>
                 <a:latin typeface="맑은 고딕"/>
               </a:rPr>
-              <a:t>② 일반화와 robust 평가</a:t>
+              <a:t>해결: 중심 거리로 재채점</a:t>
             </a:r>
           </a:p>
         </p:txBody>
@@ -5416,7 +6716,7 @@
                 </a:solidFill>
                 <a:latin typeface="맑은 고딕"/>
               </a:rPr>
-              <a:t>실제 데이터에서는 다 찾으니, 조건을 인위적으로 바꿔 모델을 시험한다</a:t>
+              <a:t>중심이 정답에서 R(px) 이내면 찾은 것으로 보면 거의 다 찾는다</a:t>
             </a:r>
           </a:p>
         </p:txBody>
@@ -5452,6 +6752,347 @@
                 <a:latin typeface="맑은 고딕"/>
               </a:rPr>
               <a:t>14</a:t>
+            </a:r>
+          </a:p>
+        </p:txBody>
+      </p:sp>
+      <p:pic>
+        <p:nvPicPr>
+          <p:cNvPr id="6" name="Picture 5" descr="fig5d_fn_by_model.png"/>
+          <p:cNvPicPr>
+            <a:picLocks noChangeAspect="1"/>
+          </p:cNvPicPr>
+          <p:nvPr/>
+        </p:nvPicPr>
+        <p:blipFill>
+          <a:blip r:embed="rId2"/>
+          <a:stretch>
+            <a:fillRect/>
+          </a:stretch>
+        </p:blipFill>
+        <p:spPr>
+          <a:xfrm>
+            <a:off x="274320" y="1864069"/>
+            <a:ext cx="6309360" cy="2764100"/>
+          </a:xfrm>
+          <a:prstGeom prst="rect">
+            <a:avLst/>
+          </a:prstGeom>
+        </p:spPr>
+      </p:pic>
+      <p:pic>
+        <p:nvPicPr>
+          <p:cNvPr id="7" name="Picture 6" descr="fig2b_center_distance.png"/>
+          <p:cNvPicPr>
+            <a:picLocks noChangeAspect="1"/>
+          </p:cNvPicPr>
+          <p:nvPr/>
+        </p:nvPicPr>
+        <p:blipFill>
+          <a:blip r:embed="rId3"/>
+          <a:stretch>
+            <a:fillRect/>
+          </a:stretch>
+        </p:blipFill>
+        <p:spPr>
+          <a:xfrm>
+            <a:off x="6583680" y="2055869"/>
+            <a:ext cx="5303520" cy="2380501"/>
+          </a:xfrm>
+          <a:prstGeom prst="rect">
+            <a:avLst/>
+          </a:prstGeom>
+        </p:spPr>
+      </p:pic>
+      <p:sp>
+        <p:nvSpPr>
+          <p:cNvPr id="8" name="TextBox 7"/>
+          <p:cNvSpPr txBox="1"/>
+          <p:nvPr/>
+        </p:nvSpPr>
+        <p:spPr>
+          <a:xfrm>
+            <a:off x="548640" y="4983480"/>
+            <a:ext cx="11155680" cy="1737360"/>
+          </a:xfrm>
+          <a:prstGeom prst="rect">
+            <a:avLst/>
+          </a:prstGeom>
+          <a:noFill/>
+        </p:spPr>
+        <p:txBody>
+          <a:bodyPr wrap="square" lIns="45720" rIns="45720">
+            <a:spAutoFit/>
+          </a:bodyPr>
+          <a:lstStyle/>
+          <a:p>
+            <a:pPr>
+              <a:spcAft>
+                <a:spcPts val="600"/>
+              </a:spcAft>
+            </a:pPr>
+            <a:r>
+              <a:rPr sz="1400" b="1">
+                <a:solidFill>
+                  <a:srgbClr val="2AA7B8"/>
+                </a:solidFill>
+                <a:latin typeface="맑은 고딕"/>
+              </a:rPr>
+              <a:t>• </a:t>
+            </a:r>
+            <a:r>
+              <a:rPr sz="1400" b="0">
+                <a:solidFill>
+                  <a:srgbClr val="222222"/>
+                </a:solidFill>
+                <a:latin typeface="맑은 고딕"/>
+              </a:rPr>
+              <a:t>R = 5px로 재채점하면 못 찾은 것이 4개 모델은 </a:t>
+            </a:r>
+            <a:r>
+              <a:rPr sz="1400" b="1">
+                <a:solidFill>
+                  <a:srgbClr val="222222"/>
+                </a:solidFill>
+                <a:latin typeface="맑은 고딕"/>
+              </a:rPr>
+              <a:t>0개</a:t>
+            </a:r>
+            <a:r>
+              <a:rPr sz="1400" b="0">
+                <a:solidFill>
+                  <a:srgbClr val="222222"/>
+                </a:solidFill>
+                <a:latin typeface="맑은 고딕"/>
+              </a:rPr>
+              <a:t>, MobileNetV3·RT-DETR-l은 </a:t>
+            </a:r>
+            <a:r>
+              <a:rPr sz="1400" b="1">
+                <a:solidFill>
+                  <a:srgbClr val="222222"/>
+                </a:solidFill>
+                <a:latin typeface="맑은 고딕"/>
+              </a:rPr>
+              <a:t>1개</a:t>
+            </a:r>
+            <a:r>
+              <a:rPr sz="1400" b="0">
+                <a:solidFill>
+                  <a:srgbClr val="222222"/>
+                </a:solidFill>
+                <a:latin typeface="맑은 고딕"/>
+              </a:rPr>
+              <a:t>. R ≥ 3px에서 6개 모델의 F1은 </a:t>
+            </a:r>
+            <a:r>
+              <a:rPr sz="1400" b="1">
+                <a:solidFill>
+                  <a:srgbClr val="222222"/>
+                </a:solidFill>
+                <a:latin typeface="맑은 고딕"/>
+              </a:rPr>
+              <a:t>0.998~1.000</a:t>
+            </a:r>
+            <a:r>
+              <a:rPr sz="1400" b="0">
+                <a:solidFill>
+                  <a:srgbClr val="222222"/>
+                </a:solidFill>
+                <a:latin typeface="맑은 고딕"/>
+              </a:rPr>
+              <a:t>(포화)</a:t>
+            </a:r>
+          </a:p>
+          <a:p>
+            <a:pPr>
+              <a:spcAft>
+                <a:spcPts val="600"/>
+              </a:spcAft>
+            </a:pPr>
+            <a:r>
+              <a:rPr sz="1400" b="1">
+                <a:solidFill>
+                  <a:srgbClr val="2AA7B8"/>
+                </a:solidFill>
+                <a:latin typeface="맑은 고딕"/>
+              </a:rPr>
+              <a:t>• </a:t>
+            </a:r>
+            <a:r>
+              <a:rPr sz="1400" b="0">
+                <a:solidFill>
+                  <a:srgbClr val="222222"/>
+                </a:solidFill>
+                <a:latin typeface="맑은 고딕"/>
+              </a:rPr>
+              <a:t>IoU 0.5는 사실상 "중심이 2px 이내인가"를 재고 있었다(2px로 조이면 8~23개). 남는 차이는 위치 정밀도: mAP50-95는 D-FINE-N 0.659 &gt; RT-DETR-l 0.639 &gt; YOLO26n 0.633 &gt; R50 0.611 &gt; MobileNetV3 0.559 ≈ YOLOv3-tiny 0.558 (공식 라벨만 보면 0.335~0.365로 좁아짐)</a:t>
+            </a:r>
+          </a:p>
+        </p:txBody>
+      </p:sp>
+    </p:spTree>
+  </p:cSld>
+  <p:clrMapOvr>
+    <a:masterClrMapping/>
+  </p:clrMapOvr>
+</p:sld>
+</file>
+
+<file path=ppt/slides/slide15.xml><?xml version="1.0" encoding="utf-8"?>
+<p:sld xmlns:a="http://schemas.openxmlformats.org/drawingml/2006/main" xmlns:p="http://schemas.openxmlformats.org/presentationml/2006/main" xmlns:r="http://schemas.openxmlformats.org/officeDocument/2006/relationships">
+  <p:cSld>
+    <p:spTree>
+      <p:nvGrpSpPr>
+        <p:cNvPr id="1" name=""/>
+        <p:cNvGrpSpPr/>
+        <p:nvPr/>
+      </p:nvGrpSpPr>
+      <p:grpSpPr/>
+      <p:sp>
+        <p:nvSpPr>
+          <p:cNvPr id="2" name="Rectangle 1"/>
+          <p:cNvSpPr/>
+          <p:nvPr/>
+        </p:nvSpPr>
+        <p:spPr>
+          <a:xfrm>
+            <a:off x="0" y="0"/>
+            <a:ext cx="164592" cy="6858000"/>
+          </a:xfrm>
+          <a:prstGeom prst="rect">
+            <a:avLst/>
+          </a:prstGeom>
+          <a:solidFill>
+            <a:srgbClr val="1F3A5F"/>
+          </a:solidFill>
+          <a:ln>
+            <a:noFill/>
+          </a:ln>
+        </p:spPr>
+        <p:style>
+          <a:lnRef idx="1">
+            <a:schemeClr val="accent1"/>
+          </a:lnRef>
+          <a:fillRef idx="3">
+            <a:schemeClr val="accent1"/>
+          </a:fillRef>
+          <a:effectRef idx="2">
+            <a:schemeClr val="accent1"/>
+          </a:effectRef>
+          <a:fontRef idx="minor">
+            <a:schemeClr val="lt1"/>
+          </a:fontRef>
+        </p:style>
+        <p:txBody>
+          <a:bodyPr rtlCol="0" anchor="ctr"/>
+          <a:lstStyle/>
+          <a:p>
+            <a:pPr algn="ctr"/>
+          </a:p>
+        </p:txBody>
+      </p:sp>
+      <p:sp>
+        <p:nvSpPr>
+          <p:cNvPr id="3" name="TextBox 2"/>
+          <p:cNvSpPr txBox="1"/>
+          <p:nvPr/>
+        </p:nvSpPr>
+        <p:spPr>
+          <a:xfrm>
+            <a:off x="502920" y="274320"/>
+            <a:ext cx="11185855" cy="731520"/>
+          </a:xfrm>
+          <a:prstGeom prst="rect">
+            <a:avLst/>
+          </a:prstGeom>
+          <a:noFill/>
+        </p:spPr>
+        <p:txBody>
+          <a:bodyPr wrap="square" anchor="ctr" lIns="45720" rIns="45720">
+            <a:spAutoFit/>
+          </a:bodyPr>
+          <a:lstStyle/>
+          <a:p>
+            <a:pPr algn="l"/>
+            <a:r>
+              <a:rPr sz="2800" b="1">
+                <a:solidFill>
+                  <a:srgbClr val="1F3A5F"/>
+                </a:solidFill>
+                <a:latin typeface="맑은 고딕"/>
+              </a:rPr>
+              <a:t>② 일반화와 robust 평가</a:t>
+            </a:r>
+          </a:p>
+        </p:txBody>
+      </p:sp>
+      <p:sp>
+        <p:nvSpPr>
+          <p:cNvPr id="4" name="TextBox 3"/>
+          <p:cNvSpPr txBox="1"/>
+          <p:nvPr/>
+        </p:nvSpPr>
+        <p:spPr>
+          <a:xfrm>
+            <a:off x="502920" y="1005840"/>
+            <a:ext cx="11185855" cy="640080"/>
+          </a:xfrm>
+          <a:prstGeom prst="rect">
+            <a:avLst/>
+          </a:prstGeom>
+          <a:noFill/>
+        </p:spPr>
+        <p:txBody>
+          <a:bodyPr wrap="square" anchor="t" lIns="45720" rIns="45720">
+            <a:spAutoFit/>
+          </a:bodyPr>
+          <a:lstStyle/>
+          <a:p>
+            <a:pPr algn="l"/>
+            <a:r>
+              <a:rPr sz="1800" b="1">
+                <a:solidFill>
+                  <a:srgbClr val="2AA7B8"/>
+                </a:solidFill>
+                <a:latin typeface="맑은 고딕"/>
+              </a:rPr>
+              <a:t>실제 데이터에서는 다 찾으니, 조건을 인위적으로 바꿔 모델을 시험한다</a:t>
+            </a:r>
+          </a:p>
+        </p:txBody>
+      </p:sp>
+      <p:sp>
+        <p:nvSpPr>
+          <p:cNvPr id="5" name="TextBox 4"/>
+          <p:cNvSpPr txBox="1"/>
+          <p:nvPr/>
+        </p:nvSpPr>
+        <p:spPr>
+          <a:xfrm>
+            <a:off x="11094415" y="6400800"/>
+            <a:ext cx="822960" cy="320040"/>
+          </a:xfrm>
+          <a:prstGeom prst="rect">
+            <a:avLst/>
+          </a:prstGeom>
+          <a:noFill/>
+        </p:spPr>
+        <p:txBody>
+          <a:bodyPr wrap="square" anchor="t" lIns="45720" rIns="45720">
+            <a:spAutoFit/>
+          </a:bodyPr>
+          <a:lstStyle/>
+          <a:p>
+            <a:pPr algn="r"/>
+            <a:r>
+              <a:rPr sz="1200" b="0">
+                <a:solidFill>
+                  <a:srgbClr val="555B66"/>
+                </a:solidFill>
+                <a:latin typeface="맑은 고딕"/>
+              </a:rPr>
+              <a:t>15</a:t>
             </a:r>
           </a:p>
         </p:txBody>
@@ -5930,7 +7571,7 @@
 </p:sld>
 </file>
 
-<file path=ppt/slides/slide15.xml><?xml version="1.0" encoding="utf-8"?>
+<file path=ppt/slides/slide16.xml><?xml version="1.0" encoding="utf-8"?>
 <p:sld xmlns:a="http://schemas.openxmlformats.org/drawingml/2006/main" xmlns:p="http://schemas.openxmlformats.org/presentationml/2006/main" xmlns:r="http://schemas.openxmlformats.org/officeDocument/2006/relationships">
   <p:cSld>
     <p:spTree>
@@ -6083,7 +7724,7 @@
                 </a:solidFill>
                 <a:latin typeface="맑은 고딕"/>
               </a:rPr>
-              <a:t>15</a:t>
+              <a:t>16</a:t>
             </a:r>
           </a:p>
         </p:txBody>
@@ -6217,340 +7858,6 @@
                 <a:latin typeface="맑은 고딕"/>
               </a:rPr>
               <a:t> 때문 → 다음 질문: 노이즈 무늬에 속아 오경보를 내는가?</a:t>
-            </a:r>
-          </a:p>
-        </p:txBody>
-      </p:sp>
-    </p:spTree>
-  </p:cSld>
-  <p:clrMapOvr>
-    <a:masterClrMapping/>
-  </p:clrMapOvr>
-</p:sld>
-</file>
-
-<file path=ppt/slides/slide16.xml><?xml version="1.0" encoding="utf-8"?>
-<p:sld xmlns:a="http://schemas.openxmlformats.org/drawingml/2006/main" xmlns:p="http://schemas.openxmlformats.org/presentationml/2006/main" xmlns:r="http://schemas.openxmlformats.org/officeDocument/2006/relationships">
-  <p:cSld>
-    <p:spTree>
-      <p:nvGrpSpPr>
-        <p:cNvPr id="1" name=""/>
-        <p:cNvGrpSpPr/>
-        <p:nvPr/>
-      </p:nvGrpSpPr>
-      <p:grpSpPr/>
-      <p:sp>
-        <p:nvSpPr>
-          <p:cNvPr id="2" name="Rectangle 1"/>
-          <p:cNvSpPr/>
-          <p:nvPr/>
-        </p:nvSpPr>
-        <p:spPr>
-          <a:xfrm>
-            <a:off x="0" y="0"/>
-            <a:ext cx="164592" cy="6858000"/>
-          </a:xfrm>
-          <a:prstGeom prst="rect">
-            <a:avLst/>
-          </a:prstGeom>
-          <a:solidFill>
-            <a:srgbClr val="1F3A5F"/>
-          </a:solidFill>
-          <a:ln>
-            <a:noFill/>
-          </a:ln>
-        </p:spPr>
-        <p:style>
-          <a:lnRef idx="1">
-            <a:schemeClr val="accent1"/>
-          </a:lnRef>
-          <a:fillRef idx="3">
-            <a:schemeClr val="accent1"/>
-          </a:fillRef>
-          <a:effectRef idx="2">
-            <a:schemeClr val="accent1"/>
-          </a:effectRef>
-          <a:fontRef idx="minor">
-            <a:schemeClr val="lt1"/>
-          </a:fontRef>
-        </p:style>
-        <p:txBody>
-          <a:bodyPr rtlCol="0" anchor="ctr"/>
-          <a:lstStyle/>
-          <a:p>
-            <a:pPr algn="ctr"/>
-          </a:p>
-        </p:txBody>
-      </p:sp>
-      <p:sp>
-        <p:nvSpPr>
-          <p:cNvPr id="3" name="TextBox 2"/>
-          <p:cNvSpPr txBox="1"/>
-          <p:nvPr/>
-        </p:nvSpPr>
-        <p:spPr>
-          <a:xfrm>
-            <a:off x="502920" y="274320"/>
-            <a:ext cx="11185855" cy="731520"/>
-          </a:xfrm>
-          <a:prstGeom prst="rect">
-            <a:avLst/>
-          </a:prstGeom>
-          <a:noFill/>
-        </p:spPr>
-        <p:txBody>
-          <a:bodyPr wrap="square" anchor="ctr" lIns="45720" rIns="45720">
-            <a:spAutoFit/>
-          </a:bodyPr>
-          <a:lstStyle/>
-          <a:p>
-            <a:pPr algn="l"/>
-            <a:r>
-              <a:rPr sz="2800" b="1">
-                <a:solidFill>
-                  <a:srgbClr val="1F3A5F"/>
-                </a:solidFill>
-                <a:latin typeface="맑은 고딕"/>
-              </a:rPr>
-              <a:t>가짜 정상: 노이즈 보간에는 R50과 YOLO26n만 속지 않는다</a:t>
-            </a:r>
-          </a:p>
-        </p:txBody>
-      </p:sp>
-      <p:sp>
-        <p:nvSpPr>
-          <p:cNvPr id="4" name="TextBox 3"/>
-          <p:cNvSpPr txBox="1"/>
-          <p:nvPr/>
-        </p:nvSpPr>
-        <p:spPr>
-          <a:xfrm>
-            <a:off x="502920" y="1005840"/>
-            <a:ext cx="11185855" cy="640080"/>
-          </a:xfrm>
-          <a:prstGeom prst="rect">
-            <a:avLst/>
-          </a:prstGeom>
-          <a:noFill/>
-        </p:spPr>
-        <p:txBody>
-          <a:bodyPr wrap="square" anchor="t" lIns="45720" rIns="45720">
-            <a:spAutoFit/>
-          </a:bodyPr>
-          <a:lstStyle/>
-          <a:p>
-            <a:pPr algn="l"/>
-            <a:r>
-              <a:rPr sz="1800" b="1">
-                <a:solidFill>
-                  <a:srgbClr val="2AA7B8"/>
-                </a:solidFill>
-                <a:latin typeface="맑은 고딕"/>
-              </a:rPr>
-              <a:t>정상 이미지가 없어 결함의 점을 지운 이미지로 오경보를 쟀다</a:t>
-            </a:r>
-          </a:p>
-        </p:txBody>
-      </p:sp>
-      <p:sp>
-        <p:nvSpPr>
-          <p:cNvPr id="5" name="TextBox 4"/>
-          <p:cNvSpPr txBox="1"/>
-          <p:nvPr/>
-        </p:nvSpPr>
-        <p:spPr>
-          <a:xfrm>
-            <a:off x="11094415" y="6400800"/>
-            <a:ext cx="822960" cy="320040"/>
-          </a:xfrm>
-          <a:prstGeom prst="rect">
-            <a:avLst/>
-          </a:prstGeom>
-          <a:noFill/>
-        </p:spPr>
-        <p:txBody>
-          <a:bodyPr wrap="square" anchor="t" lIns="45720" rIns="45720">
-            <a:spAutoFit/>
-          </a:bodyPr>
-          <a:lstStyle/>
-          <a:p>
-            <a:pPr algn="r"/>
-            <a:r>
-              <a:rPr sz="1200" b="0">
-                <a:solidFill>
-                  <a:srgbClr val="555B66"/>
-                </a:solidFill>
-                <a:latin typeface="맑은 고딕"/>
-              </a:rPr>
-              <a:t>16</a:t>
-            </a:r>
-          </a:p>
-        </p:txBody>
-      </p:sp>
-      <p:sp>
-        <p:nvSpPr>
-          <p:cNvPr id="6" name="TextBox 5"/>
-          <p:cNvSpPr txBox="1"/>
-          <p:nvPr/>
-        </p:nvSpPr>
-        <p:spPr>
-          <a:xfrm>
-            <a:off x="502920" y="6355080"/>
-            <a:ext cx="10180015" cy="365760"/>
-          </a:xfrm>
-          <a:prstGeom prst="rect">
-            <a:avLst/>
-          </a:prstGeom>
-          <a:noFill/>
-        </p:spPr>
-        <p:txBody>
-          <a:bodyPr wrap="square" anchor="t" lIns="45720" rIns="45720">
-            <a:spAutoFit/>
-          </a:bodyPr>
-          <a:lstStyle/>
-          <a:p>
-            <a:pPr algn="l"/>
-            <a:r>
-              <a:rPr sz="1100" b="0">
-                <a:solidFill>
-                  <a:srgbClr val="555B66"/>
-                </a:solidFill>
-                <a:latin typeface="맑은 고딕"/>
-              </a:rPr>
-              <a:t>가짜 정상은 진짜 정상 제품이 아니다. 오경보율은 범위로 해석한다.</a:t>
-            </a:r>
-          </a:p>
-        </p:txBody>
-      </p:sp>
-      <p:pic>
-        <p:nvPicPr>
-          <p:cNvPr id="7" name="Picture 6" descr="fig3l_robust6.png"/>
-          <p:cNvPicPr>
-            <a:picLocks noChangeAspect="1"/>
-          </p:cNvPicPr>
-          <p:nvPr/>
-        </p:nvPicPr>
-        <p:blipFill>
-          <a:blip r:embed="rId2"/>
-          <a:stretch>
-            <a:fillRect/>
-          </a:stretch>
-        </p:blipFill>
-        <p:spPr>
-          <a:xfrm>
-            <a:off x="457200" y="1849795"/>
-            <a:ext cx="11247120" cy="3158409"/>
-          </a:xfrm>
-          <a:prstGeom prst="rect">
-            <a:avLst/>
-          </a:prstGeom>
-        </p:spPr>
-      </p:pic>
-      <p:sp>
-        <p:nvSpPr>
-          <p:cNvPr id="8" name="TextBox 7"/>
-          <p:cNvSpPr txBox="1"/>
-          <p:nvPr/>
-        </p:nvSpPr>
-        <p:spPr>
-          <a:xfrm>
-            <a:off x="640080" y="5120640"/>
-            <a:ext cx="10972800" cy="1554480"/>
-          </a:xfrm>
-          <a:prstGeom prst="rect">
-            <a:avLst/>
-          </a:prstGeom>
-          <a:noFill/>
-        </p:spPr>
-        <p:txBody>
-          <a:bodyPr wrap="square" lIns="45720" rIns="45720">
-            <a:spAutoFit/>
-          </a:bodyPr>
-          <a:lstStyle/>
-          <a:p>
-            <a:pPr>
-              <a:spcAft>
-                <a:spcPts val="400"/>
-              </a:spcAft>
-            </a:pPr>
-            <a:r>
-              <a:rPr sz="1500" b="1">
-                <a:solidFill>
-                  <a:srgbClr val="2AA7B8"/>
-                </a:solidFill>
-                <a:latin typeface="맑은 고딕"/>
-              </a:rPr>
-              <a:t>• </a:t>
-            </a:r>
-            <a:r>
-              <a:rPr sz="1500" b="0">
-                <a:solidFill>
-                  <a:srgbClr val="222222"/>
-                </a:solidFill>
-                <a:latin typeface="맑은 고딕"/>
-              </a:rPr>
-              <a:t>NS+노이즈 6px 오경보율: </a:t>
-            </a:r>
-            <a:r>
-              <a:rPr sz="1500" b="1">
-                <a:solidFill>
-                  <a:srgbClr val="222222"/>
-                </a:solidFill>
-                <a:latin typeface="맑은 고딕"/>
-              </a:rPr>
-              <a:t>R50 0.5%, YOLO26n 4.1%</a:t>
-            </a:r>
-            <a:r>
-              <a:rPr sz="1500" b="0">
-                <a:solidFill>
-                  <a:srgbClr val="222222"/>
-                </a:solidFill>
-                <a:latin typeface="맑은 고딕"/>
-              </a:rPr>
-              <a:t>, RT-DETR-l 37%, YOLOv3-tiny 39%, D-FINE-N 49%, MobileNetV3 64%</a:t>
-            </a:r>
-          </a:p>
-          <a:p>
-            <a:pPr>
-              <a:spcAft>
-                <a:spcPts val="400"/>
-              </a:spcAft>
-            </a:pPr>
-            <a:r>
-              <a:rPr sz="1500" b="1">
-                <a:solidFill>
-                  <a:srgbClr val="2AA7B8"/>
-                </a:solidFill>
-                <a:latin typeface="맑은 고딕"/>
-              </a:rPr>
-              <a:t>• </a:t>
-            </a:r>
-            <a:r>
-              <a:rPr sz="1500" b="0">
-                <a:solidFill>
-                  <a:srgbClr val="222222"/>
-                </a:solidFill>
-                <a:latin typeface="맑은 고딕"/>
-              </a:rPr>
-              <a:t>오경보는 대부분 </a:t>
-            </a:r>
-            <a:r>
-              <a:rPr sz="1500" b="1">
-                <a:solidFill>
-                  <a:srgbClr val="222222"/>
-                </a:solidFill>
-                <a:latin typeface="맑은 고딕"/>
-              </a:rPr>
-              <a:t>지운 자리</a:t>
-            </a:r>
-            <a:r>
-              <a:rPr sz="1500" b="0">
-                <a:solidFill>
-                  <a:srgbClr val="222222"/>
-                </a:solidFill>
-                <a:latin typeface="맑은 고딕"/>
-              </a:rPr>
-              <a:t>에서 발생, 분리도(AUC)는 MobileNet 0.842·D-FINE 0.900이 가장 나쁨</a:t>
             </a:r>
           </a:p>
         </p:txBody>
@@ -6646,7 +7953,7 @@
                 </a:solidFill>
                 <a:latin typeface="맑은 고딕"/>
               </a:rPr>
-              <a:t>가짜 정상 예시: 노이즈 무늬를 점으로 착각한다</a:t>
+              <a:t>가짜 정상: 노이즈 보간에는 R50과 YOLO26n만 속지 않는다</a:t>
             </a:r>
           </a:p>
         </p:txBody>
@@ -6681,7 +7988,7 @@
                 </a:solidFill>
                 <a:latin typeface="맑은 고딕"/>
               </a:rPr>
-              <a:t>평균 보간으로 지우면 반응이 없지만, 노이즈를 더하면 일부 모델이 반응한다</a:t>
+              <a:t>정상 이미지가 없어 결함의 점을 지운 이미지로 오경보를 쟀다</a:t>
             </a:r>
           </a:p>
         </p:txBody>
@@ -6751,14 +8058,14 @@
                 </a:solidFill>
                 <a:latin typeface="맑은 고딕"/>
               </a:rPr>
-              <a:t>예시 두 장(집계는 앞 슬라이드의 369장). 이 예시의 노이즈는 이미지마다 새 난수(시드 0)로 만들어 집계용 이미지와 값이 다르다.</a:t>
+              <a:t>가짜 정상은 진짜 정상 제품이 아니다. 오경보율은 범위로 해석한다.</a:t>
             </a:r>
           </a:p>
         </p:txBody>
       </p:sp>
       <p:pic>
         <p:nvPicPr>
-          <p:cNvPr id="7" name="Picture 6" descr="fig5c_fake_examples.png"/>
+          <p:cNvPr id="7" name="Picture 6" descr="fig3l_robust6.png"/>
           <p:cNvPicPr>
             <a:picLocks noChangeAspect="1"/>
           </p:cNvPicPr>
@@ -6772,8 +8079,8 @@
         </p:blipFill>
         <p:spPr>
           <a:xfrm>
-            <a:off x="1009515" y="1463040"/>
-            <a:ext cx="5296168" cy="4663440"/>
+            <a:off x="457200" y="1849795"/>
+            <a:ext cx="11247120" cy="3158409"/>
           </a:xfrm>
           <a:prstGeom prst="rect">
             <a:avLst/>
@@ -6788,8 +8095,8 @@
         </p:nvSpPr>
         <p:spPr>
           <a:xfrm>
-            <a:off x="7223760" y="1783080"/>
-            <a:ext cx="4663440" cy="4572000"/>
+            <a:off x="640080" y="5120640"/>
+            <a:ext cx="10972800" cy="1554480"/>
           </a:xfrm>
           <a:prstGeom prst="rect">
             <a:avLst/>
@@ -6804,7 +8111,7 @@
           <a:p>
             <a:pPr>
               <a:spcAft>
-                <a:spcPts val="1000"/>
+                <a:spcPts val="400"/>
               </a:spcAft>
             </a:pPr>
             <a:r>
@@ -6823,13 +8130,31 @@
                 </a:solidFill>
                 <a:latin typeface="맑은 고딕"/>
               </a:rPr>
-              <a:t>왼쪽 열: 원본 → 6개 모델이 모두 검출</a:t>
+              <a:t>NS+노이즈 6px 오경보율: </a:t>
+            </a:r>
+            <a:r>
+              <a:rPr sz="1500" b="1">
+                <a:solidFill>
+                  <a:srgbClr val="222222"/>
+                </a:solidFill>
+                <a:latin typeface="맑은 고딕"/>
+              </a:rPr>
+              <a:t>R50 0.5%, YOLO26n 4.1%</a:t>
+            </a:r>
+            <a:r>
+              <a:rPr sz="1500" b="0">
+                <a:solidFill>
+                  <a:srgbClr val="222222"/>
+                </a:solidFill>
+                <a:latin typeface="맑은 고딕"/>
+              </a:rPr>
+              <a:t>, RT-DETR-l 37%, YOLOv3-tiny 39%, D-FINE-N 49%, MobileNetV3 64%</a:t>
             </a:r>
           </a:p>
           <a:p>
             <a:pPr>
               <a:spcAft>
-                <a:spcPts val="1000"/>
+                <a:spcPts val="400"/>
               </a:spcAft>
             </a:pPr>
             <a:r>
@@ -6848,23 +8173,16 @@
                 </a:solidFill>
                 <a:latin typeface="맑은 고딕"/>
               </a:rPr>
-              <a:t>가운데: 평균 보간으로 점을 지움 → 반응 없음(점이 단서)</a:t>
-            </a:r>
-          </a:p>
-          <a:p>
-            <a:pPr>
-              <a:spcAft>
-                <a:spcPts val="1000"/>
-              </a:spcAft>
-            </a:pPr>
+              <a:t>오경보는 대부분 </a:t>
+            </a:r>
             <a:r>
               <a:rPr sz="1500" b="1">
                 <a:solidFill>
-                  <a:srgbClr val="2AA7B8"/>
-                </a:solidFill>
-                <a:latin typeface="맑은 고딕"/>
-              </a:rPr>
-              <a:t>• </a:t>
+                  <a:srgbClr val="222222"/>
+                </a:solidFill>
+                <a:latin typeface="맑은 고딕"/>
+              </a:rPr>
+              <a:t>지운 자리</a:t>
             </a:r>
             <a:r>
               <a:rPr sz="1500" b="0">
@@ -6873,68 +8191,7 @@
                 </a:solidFill>
                 <a:latin typeface="맑은 고딕"/>
               </a:rPr>
-              <a:t>오른쪽 아래(1호기): NS 보간 + 노이즈로 지운 자리의 </a:t>
-            </a:r>
-            <a:r>
-              <a:rPr sz="1500" b="1">
-                <a:solidFill>
-                  <a:srgbClr val="222222"/>
-                </a:solidFill>
-                <a:latin typeface="맑은 고딕"/>
-              </a:rPr>
-              <a:t>노이즈 무늬를 점으로 착각</a:t>
-            </a:r>
-            <a:r>
-              <a:rPr sz="1500" b="0">
-                <a:solidFill>
-                  <a:srgbClr val="222222"/>
-                </a:solidFill>
-                <a:latin typeface="맑은 고딕"/>
-              </a:rPr>
-              <a:t>해 YOLOv3-tiny, MobileNetV3, RT-DETR-l, D-FINE-N이 반응, R50과 YOLO26n은 반응 없음</a:t>
-            </a:r>
-          </a:p>
-          <a:p>
-            <a:pPr>
-              <a:spcAft>
-                <a:spcPts val="1000"/>
-              </a:spcAft>
-            </a:pPr>
-            <a:r>
-              <a:rPr sz="1500" b="1">
-                <a:solidFill>
-                  <a:srgbClr val="2AA7B8"/>
-                </a:solidFill>
-                <a:latin typeface="맑은 고딕"/>
-              </a:rPr>
-              <a:t>• </a:t>
-            </a:r>
-            <a:r>
-              <a:rPr sz="1500" b="0">
-                <a:solidFill>
-                  <a:srgbClr val="222222"/>
-                </a:solidFill>
-                <a:latin typeface="맑은 고딕"/>
-              </a:rPr>
-              <a:t>→ 점의 모양보다 </a:t>
-            </a:r>
-            <a:r>
-              <a:rPr sz="1500" b="1">
-                <a:solidFill>
-                  <a:srgbClr val="222222"/>
-                </a:solidFill>
-                <a:latin typeface="맑은 고딕"/>
-              </a:rPr>
-              <a:t>질감</a:t>
-            </a:r>
-            <a:r>
-              <a:rPr sz="1500" b="0">
-                <a:solidFill>
-                  <a:srgbClr val="222222"/>
-                </a:solidFill>
-                <a:latin typeface="맑은 고딕"/>
-              </a:rPr>
-              <a:t>에 반응하는 모델이 있다</a:t>
+              <a:t>에서 발생, 분리도(AUC)는 MobileNet 0.842·D-FINE 0.900이 가장 나쁨</a:t>
             </a:r>
           </a:p>
         </p:txBody>
@@ -7030,7 +8287,7 @@
                 </a:solidFill>
                 <a:latin typeface="맑은 고딕"/>
               </a:rPr>
-              <a:t>합성 점: 작대기 안에만, 시드 42로 모두가 같게</a:t>
+              <a:t>가짜 정상 예시: 노이즈 무늬를 점으로 착각한다</a:t>
             </a:r>
           </a:p>
         </p:txBody>
@@ -7065,7 +8322,7 @@
                 </a:solidFill>
                 <a:latin typeface="맑은 고딕"/>
               </a:rPr>
-              <a:t>실제로는 놓침이 사실상 없어서, 미탐지 조건을 직접 만들어 시험했다</a:t>
+              <a:t>평균 보간으로 지우면 반응이 없지만, 노이즈를 더하면 일부 모델이 반응한다</a:t>
             </a:r>
           </a:p>
         </p:txBody>
@@ -7105,9 +8362,44 @@
           </a:p>
         </p:txBody>
       </p:sp>
+      <p:sp>
+        <p:nvSpPr>
+          <p:cNvPr id="6" name="TextBox 5"/>
+          <p:cNvSpPr txBox="1"/>
+          <p:nvPr/>
+        </p:nvSpPr>
+        <p:spPr>
+          <a:xfrm>
+            <a:off x="502920" y="6355080"/>
+            <a:ext cx="10180015" cy="365760"/>
+          </a:xfrm>
+          <a:prstGeom prst="rect">
+            <a:avLst/>
+          </a:prstGeom>
+          <a:noFill/>
+        </p:spPr>
+        <p:txBody>
+          <a:bodyPr wrap="square" anchor="t" lIns="45720" rIns="45720">
+            <a:spAutoFit/>
+          </a:bodyPr>
+          <a:lstStyle/>
+          <a:p>
+            <a:pPr algn="l"/>
+            <a:r>
+              <a:rPr sz="1100" b="0">
+                <a:solidFill>
+                  <a:srgbClr val="555B66"/>
+                </a:solidFill>
+                <a:latin typeface="맑은 고딕"/>
+              </a:rPr>
+              <a:t>예시 두 장(집계는 앞 슬라이드의 369장). 이 예시의 노이즈는 이미지마다 새 난수(시드 0)로 만들어 집계용 이미지와 값이 다르다.</a:t>
+            </a:r>
+          </a:p>
+        </p:txBody>
+      </p:sp>
       <p:pic>
         <p:nvPicPr>
-          <p:cNvPr id="6" name="Picture 5" descr="fig3m_synth_bars.png"/>
+          <p:cNvPr id="7" name="Picture 6" descr="fig5c_fake_examples.png"/>
           <p:cNvPicPr>
             <a:picLocks noChangeAspect="1"/>
           </p:cNvPicPr>
@@ -7121,8 +8413,8 @@
         </p:blipFill>
         <p:spPr>
           <a:xfrm>
-            <a:off x="1181898" y="1645920"/>
-            <a:ext cx="4677083" cy="4846320"/>
+            <a:off x="1009515" y="1463040"/>
+            <a:ext cx="5296168" cy="4663440"/>
           </a:xfrm>
           <a:prstGeom prst="rect">
             <a:avLst/>
@@ -7131,14 +8423,14 @@
       </p:pic>
       <p:sp>
         <p:nvSpPr>
-          <p:cNvPr id="7" name="TextBox 6"/>
+          <p:cNvPr id="8" name="TextBox 7"/>
           <p:cNvSpPr txBox="1"/>
           <p:nvPr/>
         </p:nvSpPr>
         <p:spPr>
           <a:xfrm>
-            <a:off x="6766560" y="1783080"/>
-            <a:ext cx="5029200" cy="4572000"/>
+            <a:off x="7223760" y="1783080"/>
+            <a:ext cx="4663440" cy="4572000"/>
           </a:xfrm>
           <a:prstGeom prst="rect">
             <a:avLst/>
@@ -7153,7 +8445,7 @@
           <a:p>
             <a:pPr>
               <a:spcAft>
-                <a:spcPts val="600"/>
+                <a:spcPts val="1000"/>
               </a:spcAft>
             </a:pPr>
             <a:r>
@@ -7172,31 +8464,13 @@
                 </a:solidFill>
                 <a:latin typeface="맑은 고딕"/>
               </a:rPr>
-              <a:t>실제 점을 지우고 영상에서 찾은 </a:t>
-            </a:r>
-            <a:r>
-              <a:rPr sz="1500" b="1">
-                <a:solidFill>
-                  <a:srgbClr val="222222"/>
-                </a:solidFill>
-                <a:latin typeface="맑은 고딕"/>
-              </a:rPr>
-              <a:t>작대기(막대) 안쪽</a:t>
-            </a:r>
-            <a:r>
-              <a:rPr sz="1500" b="0">
-                <a:solidFill>
-                  <a:srgbClr val="222222"/>
-                </a:solidFill>
-                <a:latin typeface="맑은 고딕"/>
-              </a:rPr>
-              <a:t>에만 val의 실제 점(투과율 조각)을 합성</a:t>
+              <a:t>왼쪽 열: 원본 → 6개 모델이 모두 검출</a:t>
             </a:r>
           </a:p>
           <a:p>
             <a:pPr>
               <a:spcAft>
-                <a:spcPts val="600"/>
+                <a:spcPts val="1000"/>
               </a:spcAft>
             </a:pPr>
             <a:r>
@@ -7215,31 +8489,13 @@
                 </a:solidFill>
                 <a:latin typeface="맑은 고딕"/>
               </a:rPr>
-              <a:t>점의 </a:t>
-            </a:r>
-            <a:r>
-              <a:rPr sz="1500" b="1">
-                <a:solidFill>
-                  <a:srgbClr val="222222"/>
-                </a:solidFill>
-                <a:latin typeface="맑은 고딕"/>
-              </a:rPr>
-              <a:t>진하기(4단계) x 크기(3단계)</a:t>
-            </a:r>
-            <a:r>
-              <a:rPr sz="1500" b="0">
-                <a:solidFill>
-                  <a:srgbClr val="222222"/>
-                </a:solidFill>
-                <a:latin typeface="맑은 고딕"/>
-              </a:rPr>
-              <a:t>를 바꿔 옅은 점까지 시험</a:t>
+              <a:t>가운데: 평균 보간으로 점을 지움 → 반응 없음(점이 단서)</a:t>
             </a:r>
           </a:p>
           <a:p>
             <a:pPr>
               <a:spcAft>
-                <a:spcPts val="600"/>
+                <a:spcPts val="1000"/>
               </a:spcAft>
             </a:pPr>
             <a:r>
@@ -7258,7 +8514,7 @@
                 </a:solidFill>
                 <a:latin typeface="맑은 고딕"/>
               </a:rPr>
-              <a:t>test 바탕 386장, 점 1,436개. 실제 점 663개가 </a:t>
+              <a:t>오른쪽 아래(1호기): NS 보간 + 노이즈로 지운 자리의 </a:t>
             </a:r>
             <a:r>
               <a:rPr sz="1500" b="1">
@@ -7267,13 +8523,22 @@
                 </a:solidFill>
                 <a:latin typeface="맑은 고딕"/>
               </a:rPr>
-              <a:t>전부 검출된 막대에 닿음</a:t>
+              <a:t>노이즈 무늬를 점으로 착각</a:t>
+            </a:r>
+            <a:r>
+              <a:rPr sz="1500" b="0">
+                <a:solidFill>
+                  <a:srgbClr val="222222"/>
+                </a:solidFill>
+                <a:latin typeface="맑은 고딕"/>
+              </a:rPr>
+              <a:t>해 YOLOv3-tiny, MobileNetV3, RT-DETR-l, D-FINE-N이 반응, R50과 YOLO26n은 반응 없음</a:t>
             </a:r>
           </a:p>
           <a:p>
             <a:pPr>
               <a:spcAft>
-                <a:spcPts val="600"/>
+                <a:spcPts val="1000"/>
               </a:spcAft>
             </a:pPr>
             <a:r>
@@ -7286,13 +8551,22 @@
               <a:t>• </a:t>
             </a:r>
             <a:r>
+              <a:rPr sz="1500" b="0">
+                <a:solidFill>
+                  <a:srgbClr val="222222"/>
+                </a:solidFill>
+                <a:latin typeface="맑은 고딕"/>
+              </a:rPr>
+              <a:t>→ 점의 모양보다 </a:t>
+            </a:r>
+            <a:r>
               <a:rPr sz="1500" b="1">
                 <a:solidFill>
                   <a:srgbClr val="222222"/>
                 </a:solidFill>
                 <a:latin typeface="맑은 고딕"/>
               </a:rPr>
-              <a:t>시드 42 + 이미지 이름별 시드</a:t>
+              <a:t>질감</a:t>
             </a:r>
             <a:r>
               <a:rPr sz="1500" b="0">
@@ -7301,41 +8575,7 @@
                 </a:solidFill>
                 <a:latin typeface="맑은 고딕"/>
               </a:rPr>
-              <a:t>로 고정, 기준본과 --verify로 팀원 PC에서 같은 데이터인지 확인</a:t>
-            </a:r>
-          </a:p>
-          <a:p>
-            <a:pPr>
-              <a:spcAft>
-                <a:spcPts val="600"/>
-              </a:spcAft>
-            </a:pPr>
-            <a:r>
-              <a:rPr sz="1500" b="1">
-                <a:solidFill>
-                  <a:srgbClr val="2AA7B8"/>
-                </a:solidFill>
-                <a:latin typeface="맑은 고딕"/>
-              </a:rPr>
-              <a:t>• </a:t>
-            </a:r>
-            <a:r>
-              <a:rPr sz="1500" b="0">
-                <a:solidFill>
-                  <a:srgbClr val="222222"/>
-                </a:solidFill>
-                <a:latin typeface="맑은 고딕"/>
-              </a:rPr>
-              <a:t>합성은 실제보다 약 10%p 덜 현실적 → 절대 수치가 아닌 </a:t>
-            </a:r>
-            <a:r>
-              <a:rPr sz="1500" b="1">
-                <a:solidFill>
-                  <a:srgbClr val="222222"/>
-                </a:solidFill>
-                <a:latin typeface="맑은 고딕"/>
-              </a:rPr>
-              <a:t>상대 비교</a:t>
+              <a:t>에 반응하는 모델이 있다</a:t>
             </a:r>
           </a:p>
         </p:txBody>
@@ -7431,7 +8671,7 @@
                 </a:solidFill>
                 <a:latin typeface="맑은 고딕"/>
               </a:rPr>
-              <a:t>합성 점 조건별 확대</a:t>
+              <a:t>합성 점: 작대기 안에만, 시드 42로 모두가 같게</a:t>
             </a:r>
           </a:p>
         </p:txBody>
@@ -7466,7 +8706,7 @@
                 </a:solidFill>
                 <a:latin typeface="맑은 고딕"/>
               </a:rPr>
-              <a:t>진하기(s)와 크기(f)를 바꾸면 대비가 달라지고, 대비가 낮을수록 눈에도 안 보인다</a:t>
+              <a:t>실제로는 놓침이 사실상 없어서, 미탐지 조건을 직접 만들어 시험했다</a:t>
             </a:r>
           </a:p>
         </p:txBody>
@@ -7508,7 +8748,7 @@
       </p:sp>
       <p:pic>
         <p:nvPicPr>
-          <p:cNvPr id="6" name="Picture 5" descr="fig3n_synth_dots.png"/>
+          <p:cNvPr id="6" name="Picture 5" descr="fig3m_synth_bars.png"/>
           <p:cNvPicPr>
             <a:picLocks noChangeAspect="1"/>
           </p:cNvPicPr>
@@ -7522,8 +8762,8 @@
         </p:blipFill>
         <p:spPr>
           <a:xfrm>
-            <a:off x="1309254" y="1600200"/>
-            <a:ext cx="9543010" cy="3749039"/>
+            <a:off x="1181898" y="1645920"/>
+            <a:ext cx="4677083" cy="4846320"/>
           </a:xfrm>
           <a:prstGeom prst="rect">
             <a:avLst/>
@@ -7538,8 +8778,8 @@
         </p:nvSpPr>
         <p:spPr>
           <a:xfrm>
-            <a:off x="731520" y="5440680"/>
-            <a:ext cx="10789920" cy="1280160"/>
+            <a:off x="6766560" y="1783080"/>
+            <a:ext cx="5029200" cy="4572000"/>
           </a:xfrm>
           <a:prstGeom prst="rect">
             <a:avLst/>
@@ -7573,7 +8813,25 @@
                 </a:solidFill>
                 <a:latin typeface="맑은 고딕"/>
               </a:rPr>
-              <a:t>s = 깊이 배율(1.0이 실제 점 세기), f = 크기 배율, 대비 = 둘레 밝기 − 점 밝기. 40x40px를 7배 확대</a:t>
+              <a:t>실제 점을 지우고 영상에서 찾은 </a:t>
+            </a:r>
+            <a:r>
+              <a:rPr sz="1500" b="1">
+                <a:solidFill>
+                  <a:srgbClr val="222222"/>
+                </a:solidFill>
+                <a:latin typeface="맑은 고딕"/>
+              </a:rPr>
+              <a:t>작대기(막대) 안쪽</a:t>
+            </a:r>
+            <a:r>
+              <a:rPr sz="1500" b="0">
+                <a:solidFill>
+                  <a:srgbClr val="222222"/>
+                </a:solidFill>
+                <a:latin typeface="맑은 고딕"/>
+              </a:rPr>
+              <a:t>에만 val의 실제 점(투과율 조각)을 합성</a:t>
             </a:r>
           </a:p>
           <a:p>
@@ -7598,7 +8856,127 @@
                 </a:solidFill>
                 <a:latin typeface="맑은 고딕"/>
               </a:rPr>
-              <a:t>대비 6 미만은 거의 보이지 않고 모든 모델이 못 찾는다. 실제 test 점의 대비 중앙값은 22.8이라 s=1.0 근처가 실제 수준이다</a:t>
+              <a:t>점의 </a:t>
+            </a:r>
+            <a:r>
+              <a:rPr sz="1500" b="1">
+                <a:solidFill>
+                  <a:srgbClr val="222222"/>
+                </a:solidFill>
+                <a:latin typeface="맑은 고딕"/>
+              </a:rPr>
+              <a:t>진하기(4단계) x 크기(3단계)</a:t>
+            </a:r>
+            <a:r>
+              <a:rPr sz="1500" b="0">
+                <a:solidFill>
+                  <a:srgbClr val="222222"/>
+                </a:solidFill>
+                <a:latin typeface="맑은 고딕"/>
+              </a:rPr>
+              <a:t>를 바꿔 옅은 점까지 시험</a:t>
+            </a:r>
+          </a:p>
+          <a:p>
+            <a:pPr>
+              <a:spcAft>
+                <a:spcPts val="600"/>
+              </a:spcAft>
+            </a:pPr>
+            <a:r>
+              <a:rPr sz="1500" b="1">
+                <a:solidFill>
+                  <a:srgbClr val="2AA7B8"/>
+                </a:solidFill>
+                <a:latin typeface="맑은 고딕"/>
+              </a:rPr>
+              <a:t>• </a:t>
+            </a:r>
+            <a:r>
+              <a:rPr sz="1500" b="0">
+                <a:solidFill>
+                  <a:srgbClr val="222222"/>
+                </a:solidFill>
+                <a:latin typeface="맑은 고딕"/>
+              </a:rPr>
+              <a:t>test 바탕 386장, 점 1,436개. 실제 점 663개가 </a:t>
+            </a:r>
+            <a:r>
+              <a:rPr sz="1500" b="1">
+                <a:solidFill>
+                  <a:srgbClr val="222222"/>
+                </a:solidFill>
+                <a:latin typeface="맑은 고딕"/>
+              </a:rPr>
+              <a:t>전부 검출된 막대에 닿음</a:t>
+            </a:r>
+          </a:p>
+          <a:p>
+            <a:pPr>
+              <a:spcAft>
+                <a:spcPts val="600"/>
+              </a:spcAft>
+            </a:pPr>
+            <a:r>
+              <a:rPr sz="1500" b="1">
+                <a:solidFill>
+                  <a:srgbClr val="2AA7B8"/>
+                </a:solidFill>
+                <a:latin typeface="맑은 고딕"/>
+              </a:rPr>
+              <a:t>• </a:t>
+            </a:r>
+            <a:r>
+              <a:rPr sz="1500" b="1">
+                <a:solidFill>
+                  <a:srgbClr val="222222"/>
+                </a:solidFill>
+                <a:latin typeface="맑은 고딕"/>
+              </a:rPr>
+              <a:t>시드 42 + 이미지 이름별 시드</a:t>
+            </a:r>
+            <a:r>
+              <a:rPr sz="1500" b="0">
+                <a:solidFill>
+                  <a:srgbClr val="222222"/>
+                </a:solidFill>
+                <a:latin typeface="맑은 고딕"/>
+              </a:rPr>
+              <a:t>로 고정, 기준본과 --verify로 팀원 PC에서 같은 데이터인지 확인</a:t>
+            </a:r>
+          </a:p>
+          <a:p>
+            <a:pPr>
+              <a:spcAft>
+                <a:spcPts val="600"/>
+              </a:spcAft>
+            </a:pPr>
+            <a:r>
+              <a:rPr sz="1500" b="1">
+                <a:solidFill>
+                  <a:srgbClr val="2AA7B8"/>
+                </a:solidFill>
+                <a:latin typeface="맑은 고딕"/>
+              </a:rPr>
+              <a:t>• </a:t>
+            </a:r>
+            <a:r>
+              <a:rPr sz="1500" b="0">
+                <a:solidFill>
+                  <a:srgbClr val="222222"/>
+                </a:solidFill>
+                <a:latin typeface="맑은 고딕"/>
+              </a:rPr>
+              <a:t>합성은 실제보다 약 10%p 덜 현실적 → 절대 수치가 아닌 </a:t>
+            </a:r>
+            <a:r>
+              <a:rPr sz="1500" b="1">
+                <a:solidFill>
+                  <a:srgbClr val="222222"/>
+                </a:solidFill>
+                <a:latin typeface="맑은 고딕"/>
+              </a:rPr>
+              <a:t>상대 비교</a:t>
             </a:r>
           </a:p>
         </p:txBody>
@@ -8120,7 +9498,7 @@
                 </a:solidFill>
                 <a:latin typeface="맑은 고딕"/>
               </a:rPr>
-              <a:t>합성 점 결과: 옅은 점이 미탐지 조건이다</a:t>
+              <a:t>합성 점 조건별 확대</a:t>
             </a:r>
           </a:p>
         </p:txBody>
@@ -8155,7 +9533,7 @@
                 </a:solidFill>
                 <a:latin typeface="맑은 고딕"/>
               </a:rPr>
-              <a:t>val 임계값에서는 D-FINE-N이 앞서지만 대부분 느슨한 임계값 효과, 맞추면 차이가 줄어든다</a:t>
+              <a:t>진하기(s)와 크기(f)를 바꾸면 대비가 달라지고, 대비가 낮을수록 눈에도 안 보인다</a:t>
             </a:r>
           </a:p>
         </p:txBody>
@@ -8195,44 +9573,9 @@
           </a:p>
         </p:txBody>
       </p:sp>
-      <p:sp>
-        <p:nvSpPr>
-          <p:cNvPr id="6" name="TextBox 5"/>
-          <p:cNvSpPr txBox="1"/>
-          <p:nvPr/>
-        </p:nvSpPr>
-        <p:spPr>
-          <a:xfrm>
-            <a:off x="502920" y="6355080"/>
-            <a:ext cx="10180015" cy="365760"/>
-          </a:xfrm>
-          <a:prstGeom prst="rect">
-            <a:avLst/>
-          </a:prstGeom>
-          <a:noFill/>
-        </p:spPr>
-        <p:txBody>
-          <a:bodyPr wrap="square" anchor="t" lIns="45720" rIns="45720">
-            <a:spAutoFit/>
-          </a:bodyPr>
-          <a:lstStyle/>
-          <a:p>
-            <a:pPr algn="l"/>
-            <a:r>
-              <a:rPr sz="1100" b="0">
-                <a:solidFill>
-                  <a:srgbClr val="555B66"/>
-                </a:solidFill>
-                <a:latin typeface="맑은 고딕"/>
-              </a:rPr>
-              <a:t>합성 점 시험은 test 이미지가 바탕이며 참고용이다. 합성 점 AP와 오경보 예산 비교는 합성 이미지 자체로 계산한 분석용 수치다.</a:t>
-            </a:r>
-          </a:p>
-        </p:txBody>
-      </p:sp>
       <p:pic>
         <p:nvPicPr>
-          <p:cNvPr id="7" name="Picture 6" descr="fig3k_compare6.png"/>
+          <p:cNvPr id="6" name="Picture 5" descr="fig3n_synth_dots.png"/>
           <p:cNvPicPr>
             <a:picLocks noChangeAspect="1"/>
           </p:cNvPicPr>
@@ -8246,8 +9589,8 @@
         </p:blipFill>
         <p:spPr>
           <a:xfrm>
-            <a:off x="547460" y="1645919"/>
-            <a:ext cx="11066599" cy="3383280"/>
+            <a:off x="1309254" y="1600200"/>
+            <a:ext cx="9543010" cy="3749039"/>
           </a:xfrm>
           <a:prstGeom prst="rect">
             <a:avLst/>
@@ -8256,14 +9599,14 @@
       </p:pic>
       <p:sp>
         <p:nvSpPr>
-          <p:cNvPr id="8" name="TextBox 7"/>
+          <p:cNvPr id="7" name="TextBox 6"/>
           <p:cNvSpPr txBox="1"/>
           <p:nvPr/>
         </p:nvSpPr>
         <p:spPr>
           <a:xfrm>
-            <a:off x="640080" y="4983480"/>
-            <a:ext cx="10972800" cy="1645920"/>
+            <a:off x="731520" y="5440680"/>
+            <a:ext cx="10789920" cy="1280160"/>
           </a:xfrm>
           <a:prstGeom prst="rect">
             <a:avLst/>
@@ -8278,7 +9621,7 @@
           <a:p>
             <a:pPr>
               <a:spcAft>
-                <a:spcPts val="300"/>
+                <a:spcPts val="600"/>
               </a:spcAft>
             </a:pPr>
             <a:r>
@@ -8297,13 +9640,13 @@
                 </a:solidFill>
                 <a:latin typeface="맑은 고딕"/>
               </a:rPr>
-              <a:t>대비(둘레-점 밝기) 6 미만은 모든 모델이 거의 0%, 20 이상에서 약 77~89%</a:t>
+              <a:t>s = 깊이 배율(1.0이 실제 점 세기), f = 크기 배율, 대비 = 둘레 밝기 − 점 밝기. 40x40px를 7배 확대</a:t>
             </a:r>
           </a:p>
           <a:p>
             <a:pPr>
               <a:spcAft>
-                <a:spcPts val="300"/>
+                <a:spcPts val="600"/>
               </a:spcAft>
             </a:pPr>
             <a:r>
@@ -8322,59 +9665,7 @@
                 </a:solidFill>
                 <a:latin typeface="맑은 고딕"/>
               </a:rPr>
-              <a:t>임계값과 무관한 합성 점 AP: </a:t>
-            </a:r>
-            <a:r>
-              <a:rPr sz="1500" b="1">
-                <a:solidFill>
-                  <a:srgbClr val="222222"/>
-                </a:solidFill>
-                <a:latin typeface="맑은 고딕"/>
-              </a:rPr>
-              <a:t>D-FINE-N 0.574 ≈ R50 0.567</a:t>
-            </a:r>
-            <a:r>
-              <a:rPr sz="1500" b="0">
-                <a:solidFill>
-                  <a:srgbClr val="222222"/>
-                </a:solidFill>
-                <a:latin typeface="맑은 고딕"/>
-              </a:rPr>
-              <a:t> &gt; YOLOv3-tiny 0.515 ≈ YOLO26n 0.501 &gt; RT-DETR-l 0.451 &gt;&gt; </a:t>
-            </a:r>
-            <a:r>
-              <a:rPr sz="1500" b="1">
-                <a:solidFill>
-                  <a:srgbClr val="222222"/>
-                </a:solidFill>
-                <a:latin typeface="맑은 고딕"/>
-              </a:rPr>
-              <a:t>MobileNetV3 0.262</a:t>
-            </a:r>
-          </a:p>
-          <a:p>
-            <a:pPr>
-              <a:spcAft>
-                <a:spcPts val="300"/>
-              </a:spcAft>
-            </a:pPr>
-            <a:r>
-              <a:rPr sz="1500" b="1">
-                <a:solidFill>
-                  <a:srgbClr val="2AA7B8"/>
-                </a:solidFill>
-                <a:latin typeface="맑은 고딕"/>
-              </a:rPr>
-              <a:t>• </a:t>
-            </a:r>
-            <a:r>
-              <a:rPr sz="1500" b="0">
-                <a:solidFill>
-                  <a:srgbClr val="222222"/>
-                </a:solidFill>
-                <a:latin typeface="맑은 고딕"/>
-              </a:rPr>
-              <a:t>3호기(대비 14 이상): MobileNetV3 4%, YOLO26n·RT-DETR-l 약 61%, R50·YOLOv3-tiny·D-FINE-N은 호기 차이가 작음</a:t>
+              <a:t>대비 6 미만은 거의 보이지 않고 모든 모델이 못 찾는다. 실제 test 점의 대비 중앙값은 22.8이라 s=1.0 근처가 실제 수준이다</a:t>
             </a:r>
           </a:p>
         </p:txBody>
@@ -8470,7 +9761,7 @@
                 </a:solidFill>
                 <a:latin typeface="맑은 고딕"/>
               </a:rPr>
-              <a:t>호기·해상도: 뚜렷한 효과는 확인되지 않았다</a:t>
+              <a:t>합성 점 결과: 옅은 점이 미탐지 조건이다</a:t>
             </a:r>
           </a:p>
         </p:txBody>
@@ -8505,7 +9796,7 @@
                 </a:solidFill>
                 <a:latin typeface="맑은 고딕"/>
               </a:rPr>
-              <a:t>가장 낮은 그룹(test)은 공식 라벨 박스가 76%여서 IoU 점수가 낮을 뿐이다</a:t>
+              <a:t>val 임계값에서는 D-FINE-N이 앞서지만 대부분 느슨한 임계값 효과, 맞추면 차이가 줄어든다</a:t>
             </a:r>
           </a:p>
         </p:txBody>
@@ -8545,9 +9836,44 @@
           </a:p>
         </p:txBody>
       </p:sp>
+      <p:sp>
+        <p:nvSpPr>
+          <p:cNvPr id="6" name="TextBox 5"/>
+          <p:cNvSpPr txBox="1"/>
+          <p:nvPr/>
+        </p:nvSpPr>
+        <p:spPr>
+          <a:xfrm>
+            <a:off x="502920" y="6355080"/>
+            <a:ext cx="10180015" cy="365760"/>
+          </a:xfrm>
+          <a:prstGeom prst="rect">
+            <a:avLst/>
+          </a:prstGeom>
+          <a:noFill/>
+        </p:spPr>
+        <p:txBody>
+          <a:bodyPr wrap="square" anchor="t" lIns="45720" rIns="45720">
+            <a:spAutoFit/>
+          </a:bodyPr>
+          <a:lstStyle/>
+          <a:p>
+            <a:pPr algn="l"/>
+            <a:r>
+              <a:rPr sz="1100" b="0">
+                <a:solidFill>
+                  <a:srgbClr val="555B66"/>
+                </a:solidFill>
+                <a:latin typeface="맑은 고딕"/>
+              </a:rPr>
+              <a:t>합성 점 시험은 test 이미지가 바탕이며 참고용이다. 합성 점 AP와 오경보 예산 비교는 합성 이미지 자체로 계산한 분석용 수치다.</a:t>
+            </a:r>
+          </a:p>
+        </p:txBody>
+      </p:sp>
       <p:pic>
         <p:nvPicPr>
-          <p:cNvPr id="6" name="Picture 5" descr="fig3f_groups_chart.png"/>
+          <p:cNvPr id="7" name="Picture 6" descr="fig3k_compare6.png"/>
           <p:cNvPicPr>
             <a:picLocks noChangeAspect="1"/>
           </p:cNvPicPr>
@@ -8561,8 +9887,8 @@
         </p:blipFill>
         <p:spPr>
           <a:xfrm>
-            <a:off x="550398" y="1554480"/>
-            <a:ext cx="11060723" cy="3383279"/>
+            <a:off x="547460" y="1645919"/>
+            <a:ext cx="11066599" cy="3383280"/>
           </a:xfrm>
           <a:prstGeom prst="rect">
             <a:avLst/>
@@ -8571,14 +9897,14 @@
       </p:pic>
       <p:sp>
         <p:nvSpPr>
-          <p:cNvPr id="7" name="TextBox 6"/>
+          <p:cNvPr id="8" name="TextBox 7"/>
           <p:cNvSpPr txBox="1"/>
           <p:nvPr/>
         </p:nvSpPr>
         <p:spPr>
           <a:xfrm>
-            <a:off x="731520" y="5029200"/>
-            <a:ext cx="10789920" cy="1645920"/>
+            <a:off x="640080" y="4983480"/>
+            <a:ext cx="10972800" cy="1645920"/>
           </a:xfrm>
           <a:prstGeom prst="rect">
             <a:avLst/>
@@ -8593,11 +9919,11 @@
           <a:p>
             <a:pPr>
               <a:spcAft>
-                <a:spcPts val="800"/>
+                <a:spcPts val="300"/>
               </a:spcAft>
             </a:pPr>
             <a:r>
-              <a:rPr sz="1600" b="1">
+              <a:rPr sz="1500" b="1">
                 <a:solidFill>
                   <a:srgbClr val="2AA7B8"/>
                 </a:solidFill>
@@ -8606,23 +9932,23 @@
               <a:t>• </a:t>
             </a:r>
             <a:r>
-              <a:rPr sz="1600" b="0">
-                <a:solidFill>
-                  <a:srgbClr val="222222"/>
-                </a:solidFill>
-                <a:latin typeface="맑은 고딕"/>
-              </a:rPr>
-              <a:t>해상도별 공식 라벨 박스 비율(test 기준)이 10~76%로 달라 라벨 구성이 섞인다. 공식 라벨 이미지끼리만 비교하면 F1이 0.956~0.977로 좁아지고 구간이 겹친다</a:t>
+              <a:rPr sz="1500" b="0">
+                <a:solidFill>
+                  <a:srgbClr val="222222"/>
+                </a:solidFill>
+                <a:latin typeface="맑은 고딕"/>
+              </a:rPr>
+              <a:t>대비(둘레-점 밝기) 6 미만은 모든 모델이 거의 0%, 20 이상에서 약 77~89%</a:t>
             </a:r>
           </a:p>
           <a:p>
             <a:pPr>
               <a:spcAft>
-                <a:spcPts val="800"/>
+                <a:spcPts val="300"/>
               </a:spcAft>
             </a:pPr>
             <a:r>
-              <a:rPr sz="1600" b="1">
+              <a:rPr sz="1500" b="1">
                 <a:solidFill>
                   <a:srgbClr val="2AA7B8"/>
                 </a:solidFill>
@@ -8631,31 +9957,65 @@
               <a:t>• </a:t>
             </a:r>
             <a:r>
-              <a:rPr sz="1600" b="0">
-                <a:solidFill>
-                  <a:srgbClr val="222222"/>
-                </a:solidFill>
-                <a:latin typeface="맑은 고딕"/>
-              </a:rPr>
-              <a:t>그룹별 표본이 작다(공식 라벨 이미지 호기별 20~36장). 합성 점에서 보인 3호기 약점은 </a:t>
-            </a:r>
-            <a:r>
-              <a:rPr sz="1600" b="1">
-                <a:solidFill>
-                  <a:srgbClr val="222222"/>
-                </a:solidFill>
-                <a:latin typeface="맑은 고딕"/>
-              </a:rPr>
-              <a:t>모델에 따라</a:t>
-            </a:r>
-            <a:r>
-              <a:rPr sz="1600" b="0">
-                <a:solidFill>
-                  <a:srgbClr val="222222"/>
-                </a:solidFill>
-                <a:latin typeface="맑은 고딕"/>
-              </a:rPr>
-              <a:t> 다르다(앞 슬라이드)</a:t>
+              <a:rPr sz="1500" b="0">
+                <a:solidFill>
+                  <a:srgbClr val="222222"/>
+                </a:solidFill>
+                <a:latin typeface="맑은 고딕"/>
+              </a:rPr>
+              <a:t>임계값과 무관한 합성 점 AP: </a:t>
+            </a:r>
+            <a:r>
+              <a:rPr sz="1500" b="1">
+                <a:solidFill>
+                  <a:srgbClr val="222222"/>
+                </a:solidFill>
+                <a:latin typeface="맑은 고딕"/>
+              </a:rPr>
+              <a:t>D-FINE-N 0.574 ≈ R50 0.567</a:t>
+            </a:r>
+            <a:r>
+              <a:rPr sz="1500" b="0">
+                <a:solidFill>
+                  <a:srgbClr val="222222"/>
+                </a:solidFill>
+                <a:latin typeface="맑은 고딕"/>
+              </a:rPr>
+              <a:t> &gt; YOLOv3-tiny 0.515 ≈ YOLO26n 0.501 &gt; RT-DETR-l 0.451 &gt;&gt; </a:t>
+            </a:r>
+            <a:r>
+              <a:rPr sz="1500" b="1">
+                <a:solidFill>
+                  <a:srgbClr val="222222"/>
+                </a:solidFill>
+                <a:latin typeface="맑은 고딕"/>
+              </a:rPr>
+              <a:t>MobileNetV3 0.262</a:t>
+            </a:r>
+          </a:p>
+          <a:p>
+            <a:pPr>
+              <a:spcAft>
+                <a:spcPts val="300"/>
+              </a:spcAft>
+            </a:pPr>
+            <a:r>
+              <a:rPr sz="1500" b="1">
+                <a:solidFill>
+                  <a:srgbClr val="2AA7B8"/>
+                </a:solidFill>
+                <a:latin typeface="맑은 고딕"/>
+              </a:rPr>
+              <a:t>• </a:t>
+            </a:r>
+            <a:r>
+              <a:rPr sz="1500" b="0">
+                <a:solidFill>
+                  <a:srgbClr val="222222"/>
+                </a:solidFill>
+                <a:latin typeface="맑은 고딕"/>
+              </a:rPr>
+              <a:t>3호기(대비 14 이상): MobileNetV3 4%, YOLO26n·RT-DETR-l 약 61%, R50·YOLOv3-tiny·D-FINE-N은 호기 차이가 작음</a:t>
             </a:r>
           </a:p>
         </p:txBody>
@@ -8751,7 +10111,7 @@
                 </a:solidFill>
                 <a:latin typeface="맑은 고딕"/>
               </a:rPr>
-              <a:t>③ 종합: 모델별 성적표</a:t>
+              <a:t>호기·해상도: 뚜렷한 효과는 확인되지 않았다</a:t>
             </a:r>
           </a:p>
         </p:txBody>
@@ -8786,7 +10146,7 @@
                 </a:solidFill>
                 <a:latin typeface="맑은 고딕"/>
               </a:rPr>
-              <a:t>한 모델이 모든 항목에서 1등은 아니다</a:t>
+              <a:t>가장 낮은 그룹(test)은 공식 라벨 박스가 76%여서 IoU 점수가 낮을 뿐이다</a:t>
             </a:r>
           </a:p>
         </p:txBody>
@@ -8822,6 +10182,287 @@
                 <a:latin typeface="맑은 고딕"/>
               </a:rPr>
               <a:t>22</a:t>
+            </a:r>
+          </a:p>
+        </p:txBody>
+      </p:sp>
+      <p:pic>
+        <p:nvPicPr>
+          <p:cNvPr id="6" name="Picture 5" descr="fig3f_groups_chart.png"/>
+          <p:cNvPicPr>
+            <a:picLocks noChangeAspect="1"/>
+          </p:cNvPicPr>
+          <p:nvPr/>
+        </p:nvPicPr>
+        <p:blipFill>
+          <a:blip r:embed="rId2"/>
+          <a:stretch>
+            <a:fillRect/>
+          </a:stretch>
+        </p:blipFill>
+        <p:spPr>
+          <a:xfrm>
+            <a:off x="550398" y="1554480"/>
+            <a:ext cx="11060723" cy="3383279"/>
+          </a:xfrm>
+          <a:prstGeom prst="rect">
+            <a:avLst/>
+          </a:prstGeom>
+        </p:spPr>
+      </p:pic>
+      <p:sp>
+        <p:nvSpPr>
+          <p:cNvPr id="7" name="TextBox 6"/>
+          <p:cNvSpPr txBox="1"/>
+          <p:nvPr/>
+        </p:nvSpPr>
+        <p:spPr>
+          <a:xfrm>
+            <a:off x="731520" y="5029200"/>
+            <a:ext cx="10789920" cy="1645920"/>
+          </a:xfrm>
+          <a:prstGeom prst="rect">
+            <a:avLst/>
+          </a:prstGeom>
+          <a:noFill/>
+        </p:spPr>
+        <p:txBody>
+          <a:bodyPr wrap="square" lIns="45720" rIns="45720">
+            <a:spAutoFit/>
+          </a:bodyPr>
+          <a:lstStyle/>
+          <a:p>
+            <a:pPr>
+              <a:spcAft>
+                <a:spcPts val="800"/>
+              </a:spcAft>
+            </a:pPr>
+            <a:r>
+              <a:rPr sz="1600" b="1">
+                <a:solidFill>
+                  <a:srgbClr val="2AA7B8"/>
+                </a:solidFill>
+                <a:latin typeface="맑은 고딕"/>
+              </a:rPr>
+              <a:t>• </a:t>
+            </a:r>
+            <a:r>
+              <a:rPr sz="1600" b="0">
+                <a:solidFill>
+                  <a:srgbClr val="222222"/>
+                </a:solidFill>
+                <a:latin typeface="맑은 고딕"/>
+              </a:rPr>
+              <a:t>해상도별 공식 라벨 박스 비율(test 기준)이 10~76%로 달라 라벨 구성이 섞인다. 공식 라벨 이미지끼리만 비교하면 F1이 0.956~0.977로 좁아지고 구간이 겹친다</a:t>
+            </a:r>
+          </a:p>
+          <a:p>
+            <a:pPr>
+              <a:spcAft>
+                <a:spcPts val="800"/>
+              </a:spcAft>
+            </a:pPr>
+            <a:r>
+              <a:rPr sz="1600" b="1">
+                <a:solidFill>
+                  <a:srgbClr val="2AA7B8"/>
+                </a:solidFill>
+                <a:latin typeface="맑은 고딕"/>
+              </a:rPr>
+              <a:t>• </a:t>
+            </a:r>
+            <a:r>
+              <a:rPr sz="1600" b="0">
+                <a:solidFill>
+                  <a:srgbClr val="222222"/>
+                </a:solidFill>
+                <a:latin typeface="맑은 고딕"/>
+              </a:rPr>
+              <a:t>그룹별 표본이 작다(공식 라벨 이미지 호기별 20~36장). 합성 점에서 보인 3호기 약점은 </a:t>
+            </a:r>
+            <a:r>
+              <a:rPr sz="1600" b="1">
+                <a:solidFill>
+                  <a:srgbClr val="222222"/>
+                </a:solidFill>
+                <a:latin typeface="맑은 고딕"/>
+              </a:rPr>
+              <a:t>모델에 따라</a:t>
+            </a:r>
+            <a:r>
+              <a:rPr sz="1600" b="0">
+                <a:solidFill>
+                  <a:srgbClr val="222222"/>
+                </a:solidFill>
+                <a:latin typeface="맑은 고딕"/>
+              </a:rPr>
+              <a:t> 다르다(앞 슬라이드)</a:t>
+            </a:r>
+          </a:p>
+        </p:txBody>
+      </p:sp>
+    </p:spTree>
+  </p:cSld>
+  <p:clrMapOvr>
+    <a:masterClrMapping/>
+  </p:clrMapOvr>
+</p:sld>
+</file>
+
+<file path=ppt/slides/slide23.xml><?xml version="1.0" encoding="utf-8"?>
+<p:sld xmlns:a="http://schemas.openxmlformats.org/drawingml/2006/main" xmlns:p="http://schemas.openxmlformats.org/presentationml/2006/main" xmlns:r="http://schemas.openxmlformats.org/officeDocument/2006/relationships">
+  <p:cSld>
+    <p:spTree>
+      <p:nvGrpSpPr>
+        <p:cNvPr id="1" name=""/>
+        <p:cNvGrpSpPr/>
+        <p:nvPr/>
+      </p:nvGrpSpPr>
+      <p:grpSpPr/>
+      <p:sp>
+        <p:nvSpPr>
+          <p:cNvPr id="2" name="Rectangle 1"/>
+          <p:cNvSpPr/>
+          <p:nvPr/>
+        </p:nvSpPr>
+        <p:spPr>
+          <a:xfrm>
+            <a:off x="0" y="0"/>
+            <a:ext cx="164592" cy="6858000"/>
+          </a:xfrm>
+          <a:prstGeom prst="rect">
+            <a:avLst/>
+          </a:prstGeom>
+          <a:solidFill>
+            <a:srgbClr val="1F3A5F"/>
+          </a:solidFill>
+          <a:ln>
+            <a:noFill/>
+          </a:ln>
+        </p:spPr>
+        <p:style>
+          <a:lnRef idx="1">
+            <a:schemeClr val="accent1"/>
+          </a:lnRef>
+          <a:fillRef idx="3">
+            <a:schemeClr val="accent1"/>
+          </a:fillRef>
+          <a:effectRef idx="2">
+            <a:schemeClr val="accent1"/>
+          </a:effectRef>
+          <a:fontRef idx="minor">
+            <a:schemeClr val="lt1"/>
+          </a:fontRef>
+        </p:style>
+        <p:txBody>
+          <a:bodyPr rtlCol="0" anchor="ctr"/>
+          <a:lstStyle/>
+          <a:p>
+            <a:pPr algn="ctr"/>
+          </a:p>
+        </p:txBody>
+      </p:sp>
+      <p:sp>
+        <p:nvSpPr>
+          <p:cNvPr id="3" name="TextBox 2"/>
+          <p:cNvSpPr txBox="1"/>
+          <p:nvPr/>
+        </p:nvSpPr>
+        <p:spPr>
+          <a:xfrm>
+            <a:off x="502920" y="274320"/>
+            <a:ext cx="11185855" cy="731520"/>
+          </a:xfrm>
+          <a:prstGeom prst="rect">
+            <a:avLst/>
+          </a:prstGeom>
+          <a:noFill/>
+        </p:spPr>
+        <p:txBody>
+          <a:bodyPr wrap="square" anchor="ctr" lIns="45720" rIns="45720">
+            <a:spAutoFit/>
+          </a:bodyPr>
+          <a:lstStyle/>
+          <a:p>
+            <a:pPr algn="l"/>
+            <a:r>
+              <a:rPr sz="2800" b="1">
+                <a:solidFill>
+                  <a:srgbClr val="1F3A5F"/>
+                </a:solidFill>
+                <a:latin typeface="맑은 고딕"/>
+              </a:rPr>
+              <a:t>③ 종합: 모델별 성적표</a:t>
+            </a:r>
+          </a:p>
+        </p:txBody>
+      </p:sp>
+      <p:sp>
+        <p:nvSpPr>
+          <p:cNvPr id="4" name="TextBox 3"/>
+          <p:cNvSpPr txBox="1"/>
+          <p:nvPr/>
+        </p:nvSpPr>
+        <p:spPr>
+          <a:xfrm>
+            <a:off x="502920" y="1005840"/>
+            <a:ext cx="11185855" cy="640080"/>
+          </a:xfrm>
+          <a:prstGeom prst="rect">
+            <a:avLst/>
+          </a:prstGeom>
+          <a:noFill/>
+        </p:spPr>
+        <p:txBody>
+          <a:bodyPr wrap="square" anchor="t" lIns="45720" rIns="45720">
+            <a:spAutoFit/>
+          </a:bodyPr>
+          <a:lstStyle/>
+          <a:p>
+            <a:pPr algn="l"/>
+            <a:r>
+              <a:rPr sz="1800" b="1">
+                <a:solidFill>
+                  <a:srgbClr val="2AA7B8"/>
+                </a:solidFill>
+                <a:latin typeface="맑은 고딕"/>
+              </a:rPr>
+              <a:t>한 모델이 모든 항목에서 1등은 아니다</a:t>
+            </a:r>
+          </a:p>
+        </p:txBody>
+      </p:sp>
+      <p:sp>
+        <p:nvSpPr>
+          <p:cNvPr id="5" name="TextBox 4"/>
+          <p:cNvSpPr txBox="1"/>
+          <p:nvPr/>
+        </p:nvSpPr>
+        <p:spPr>
+          <a:xfrm>
+            <a:off x="11094415" y="6400800"/>
+            <a:ext cx="822960" cy="320040"/>
+          </a:xfrm>
+          <a:prstGeom prst="rect">
+            <a:avLst/>
+          </a:prstGeom>
+          <a:noFill/>
+        </p:spPr>
+        <p:txBody>
+          <a:bodyPr wrap="square" anchor="t" lIns="45720" rIns="45720">
+            <a:spAutoFit/>
+          </a:bodyPr>
+          <a:lstStyle/>
+          <a:p>
+            <a:pPr algn="r"/>
+            <a:r>
+              <a:rPr sz="1200" b="0">
+                <a:solidFill>
+                  <a:srgbClr val="555B66"/>
+                </a:solidFill>
+                <a:latin typeface="맑은 고딕"/>
+              </a:rPr>
+              <a:t>23</a:t>
             </a:r>
           </a:p>
         </p:txBody>
@@ -10093,7 +11734,7 @@
 </p:sld>
 </file>
 
-<file path=ppt/slides/slide23.xml><?xml version="1.0" encoding="utf-8"?>
+<file path=ppt/slides/slide24.xml><?xml version="1.0" encoding="utf-8"?>
 <p:sld xmlns:a="http://schemas.openxmlformats.org/drawingml/2006/main" xmlns:p="http://schemas.openxmlformats.org/presentationml/2006/main" xmlns:r="http://schemas.openxmlformats.org/officeDocument/2006/relationships">
   <p:cSld>
     <p:spTree>
@@ -10246,7 +11887,7 @@
                 </a:solidFill>
                 <a:latin typeface="맑은 고딕"/>
               </a:rPr>
-              <a:t>23</a:t>
+              <a:t>24</a:t>
             </a:r>
           </a:p>
         </p:txBody>
@@ -10592,374 +12233,6 @@
                 <a:latin typeface="맑은 고딕"/>
               </a:rPr>
               <a:t>: 3.7M(15MB)로 RT-DETR-l(32.8M)의 약 1/9</a:t>
-            </a:r>
-          </a:p>
-        </p:txBody>
-      </p:sp>
-    </p:spTree>
-  </p:cSld>
-  <p:clrMapOvr>
-    <a:masterClrMapping/>
-  </p:clrMapOvr>
-</p:sld>
-</file>
-
-<file path=ppt/slides/slide24.xml><?xml version="1.0" encoding="utf-8"?>
-<p:sld xmlns:a="http://schemas.openxmlformats.org/drawingml/2006/main" xmlns:p="http://schemas.openxmlformats.org/presentationml/2006/main" xmlns:r="http://schemas.openxmlformats.org/officeDocument/2006/relationships">
-  <p:cSld>
-    <p:spTree>
-      <p:nvGrpSpPr>
-        <p:cNvPr id="1" name=""/>
-        <p:cNvGrpSpPr/>
-        <p:nvPr/>
-      </p:nvGrpSpPr>
-      <p:grpSpPr/>
-      <p:sp>
-        <p:nvSpPr>
-          <p:cNvPr id="2" name="Rectangle 1"/>
-          <p:cNvSpPr/>
-          <p:nvPr/>
-        </p:nvSpPr>
-        <p:spPr>
-          <a:xfrm>
-            <a:off x="0" y="0"/>
-            <a:ext cx="164592" cy="6858000"/>
-          </a:xfrm>
-          <a:prstGeom prst="rect">
-            <a:avLst/>
-          </a:prstGeom>
-          <a:solidFill>
-            <a:srgbClr val="1F3A5F"/>
-          </a:solidFill>
-          <a:ln>
-            <a:noFill/>
-          </a:ln>
-        </p:spPr>
-        <p:style>
-          <a:lnRef idx="1">
-            <a:schemeClr val="accent1"/>
-          </a:lnRef>
-          <a:fillRef idx="3">
-            <a:schemeClr val="accent1"/>
-          </a:fillRef>
-          <a:effectRef idx="2">
-            <a:schemeClr val="accent1"/>
-          </a:effectRef>
-          <a:fontRef idx="minor">
-            <a:schemeClr val="lt1"/>
-          </a:fontRef>
-        </p:style>
-        <p:txBody>
-          <a:bodyPr rtlCol="0" anchor="ctr"/>
-          <a:lstStyle/>
-          <a:p>
-            <a:pPr algn="ctr"/>
-          </a:p>
-        </p:txBody>
-      </p:sp>
-      <p:sp>
-        <p:nvSpPr>
-          <p:cNvPr id="3" name="TextBox 2"/>
-          <p:cNvSpPr txBox="1"/>
-          <p:nvPr/>
-        </p:nvSpPr>
-        <p:spPr>
-          <a:xfrm>
-            <a:off x="502920" y="274320"/>
-            <a:ext cx="11185855" cy="731520"/>
-          </a:xfrm>
-          <a:prstGeom prst="rect">
-            <a:avLst/>
-          </a:prstGeom>
-          <a:noFill/>
-        </p:spPr>
-        <p:txBody>
-          <a:bodyPr wrap="square" anchor="ctr" lIns="45720" rIns="45720">
-            <a:spAutoFit/>
-          </a:bodyPr>
-          <a:lstStyle/>
-          <a:p>
-            <a:pPr algn="l"/>
-            <a:r>
-              <a:rPr sz="2800" b="1">
-                <a:solidFill>
-                  <a:srgbClr val="1F3A5F"/>
-                </a:solidFill>
-                <a:latin typeface="맑은 고딕"/>
-              </a:rPr>
-              <a:t>현장 활용: 3단 판정과 재검사 구간</a:t>
-            </a:r>
-          </a:p>
-        </p:txBody>
-      </p:sp>
-      <p:sp>
-        <p:nvSpPr>
-          <p:cNvPr id="4" name="TextBox 3"/>
-          <p:cNvSpPr txBox="1"/>
-          <p:nvPr/>
-        </p:nvSpPr>
-        <p:spPr>
-          <a:xfrm>
-            <a:off x="502920" y="1005840"/>
-            <a:ext cx="11185855" cy="640080"/>
-          </a:xfrm>
-          <a:prstGeom prst="rect">
-            <a:avLst/>
-          </a:prstGeom>
-          <a:noFill/>
-        </p:spPr>
-        <p:txBody>
-          <a:bodyPr wrap="square" anchor="t" lIns="45720" rIns="45720">
-            <a:spAutoFit/>
-          </a:bodyPr>
-          <a:lstStyle/>
-          <a:p>
-            <a:pPr algn="l"/>
-            <a:r>
-              <a:rPr sz="1800" b="1">
-                <a:solidFill>
-                  <a:srgbClr val="2AA7B8"/>
-                </a:solidFill>
-                <a:latin typeface="맑은 고딕"/>
-              </a:rPr>
-              <a:t>실제 test에서는 결함 369장(≥0.748)과 빈 라벨 27장(≤0.04)이 완전히 갈린다</a:t>
-            </a:r>
-          </a:p>
-        </p:txBody>
-      </p:sp>
-      <p:sp>
-        <p:nvSpPr>
-          <p:cNvPr id="5" name="TextBox 4"/>
-          <p:cNvSpPr txBox="1"/>
-          <p:nvPr/>
-        </p:nvSpPr>
-        <p:spPr>
-          <a:xfrm>
-            <a:off x="11094415" y="6400800"/>
-            <a:ext cx="822960" cy="320040"/>
-          </a:xfrm>
-          <a:prstGeom prst="rect">
-            <a:avLst/>
-          </a:prstGeom>
-          <a:noFill/>
-        </p:spPr>
-        <p:txBody>
-          <a:bodyPr wrap="square" anchor="t" lIns="45720" rIns="45720">
-            <a:spAutoFit/>
-          </a:bodyPr>
-          <a:lstStyle/>
-          <a:p>
-            <a:pPr algn="r"/>
-            <a:r>
-              <a:rPr sz="1200" b="0">
-                <a:solidFill>
-                  <a:srgbClr val="555B66"/>
-                </a:solidFill>
-                <a:latin typeface="맑은 고딕"/>
-              </a:rPr>
-              <a:t>24</a:t>
-            </a:r>
-          </a:p>
-        </p:txBody>
-      </p:sp>
-      <p:sp>
-        <p:nvSpPr>
-          <p:cNvPr id="6" name="TextBox 5"/>
-          <p:cNvSpPr txBox="1"/>
-          <p:nvPr/>
-        </p:nvSpPr>
-        <p:spPr>
-          <a:xfrm>
-            <a:off x="502920" y="6355080"/>
-            <a:ext cx="10180015" cy="365760"/>
-          </a:xfrm>
-          <a:prstGeom prst="rect">
-            <a:avLst/>
-          </a:prstGeom>
-          <a:noFill/>
-        </p:spPr>
-        <p:txBody>
-          <a:bodyPr wrap="square" anchor="t" lIns="45720" rIns="45720">
-            <a:spAutoFit/>
-          </a:bodyPr>
-          <a:lstStyle/>
-          <a:p>
-            <a:pPr algn="l"/>
-            <a:r>
-              <a:rPr sz="1100" b="0">
-                <a:solidFill>
-                  <a:srgbClr val="555B66"/>
-                </a:solidFill>
-                <a:latin typeface="맑은 고딕"/>
-              </a:rPr>
-              <a:t>재검사 구간의 효과는 합성·가짜 정상에 기반한 참고 수치다. 재검사·놓침 비용은 현장 값을 몰라 가정하지 않았다.</a:t>
-            </a:r>
-          </a:p>
-        </p:txBody>
-      </p:sp>
-      <p:pic>
-        <p:nvPicPr>
-          <p:cNvPr id="7" name="Picture 6" descr="fig4b_final_dfine.png"/>
-          <p:cNvPicPr>
-            <a:picLocks noChangeAspect="1"/>
-          </p:cNvPicPr>
-          <p:nvPr/>
-        </p:nvPicPr>
-        <p:blipFill>
-          <a:blip r:embed="rId2"/>
-          <a:stretch>
-            <a:fillRect/>
-          </a:stretch>
-        </p:blipFill>
-        <p:spPr>
-          <a:xfrm>
-            <a:off x="1687794" y="1508760"/>
-            <a:ext cx="8785931" cy="3246120"/>
-          </a:xfrm>
-          <a:prstGeom prst="rect">
-            <a:avLst/>
-          </a:prstGeom>
-        </p:spPr>
-      </p:pic>
-      <p:sp>
-        <p:nvSpPr>
-          <p:cNvPr id="8" name="TextBox 7"/>
-          <p:cNvSpPr txBox="1"/>
-          <p:nvPr/>
-        </p:nvSpPr>
-        <p:spPr>
-          <a:xfrm>
-            <a:off x="731520" y="4846320"/>
-            <a:ext cx="10789920" cy="1463040"/>
-          </a:xfrm>
-          <a:prstGeom prst="rect">
-            <a:avLst/>
-          </a:prstGeom>
-          <a:noFill/>
-        </p:spPr>
-        <p:txBody>
-          <a:bodyPr wrap="square" lIns="45720" rIns="45720">
-            <a:spAutoFit/>
-          </a:bodyPr>
-          <a:lstStyle/>
-          <a:p>
-            <a:pPr>
-              <a:spcAft>
-                <a:spcPts val="600"/>
-              </a:spcAft>
-            </a:pPr>
-            <a:r>
-              <a:rPr sz="1600" b="1">
-                <a:solidFill>
-                  <a:srgbClr val="2AA7B8"/>
-                </a:solidFill>
-                <a:latin typeface="맑은 고딕"/>
-              </a:rPr>
-              <a:t>• </a:t>
-            </a:r>
-            <a:r>
-              <a:rPr sz="1600" b="1">
-                <a:solidFill>
-                  <a:srgbClr val="222222"/>
-                </a:solidFill>
-                <a:latin typeface="맑은 고딕"/>
-              </a:rPr>
-              <a:t>불합격</a:t>
-            </a:r>
-            <a:r>
-              <a:rPr sz="1600" b="0">
-                <a:solidFill>
-                  <a:srgbClr val="222222"/>
-                </a:solidFill>
-                <a:latin typeface="맑은 고딕"/>
-              </a:rPr>
-              <a:t> 최고 신뢰도 ≥ 0.66(val 임계값)  |  </a:t>
-            </a:r>
-            <a:r>
-              <a:rPr sz="1600" b="1">
-                <a:solidFill>
-                  <a:srgbClr val="222222"/>
-                </a:solidFill>
-                <a:latin typeface="맑은 고딕"/>
-              </a:rPr>
-              <a:t>재검사</a:t>
-            </a:r>
-            <a:r>
-              <a:rPr sz="1600" b="0">
-                <a:solidFill>
-                  <a:srgbClr val="222222"/>
-                </a:solidFill>
-                <a:latin typeface="맑은 고딕"/>
-              </a:rPr>
-              <a:t> 0.3 ~ 0.66  |  </a:t>
-            </a:r>
-            <a:r>
-              <a:rPr sz="1600" b="1">
-                <a:solidFill>
-                  <a:srgbClr val="222222"/>
-                </a:solidFill>
-                <a:latin typeface="맑은 고딕"/>
-              </a:rPr>
-              <a:t>합격</a:t>
-            </a:r>
-            <a:r>
-              <a:rPr sz="1600" b="0">
-                <a:solidFill>
-                  <a:srgbClr val="222222"/>
-                </a:solidFill>
-                <a:latin typeface="맑은 고딕"/>
-              </a:rPr>
-              <a:t> &lt; 0.3</a:t>
-            </a:r>
-          </a:p>
-          <a:p>
-            <a:pPr>
-              <a:spcAft>
-                <a:spcPts val="600"/>
-              </a:spcAft>
-            </a:pPr>
-            <a:r>
-              <a:rPr sz="1600" b="1">
-                <a:solidFill>
-                  <a:srgbClr val="2AA7B8"/>
-                </a:solidFill>
-                <a:latin typeface="맑은 고딕"/>
-              </a:rPr>
-              <a:t>• </a:t>
-            </a:r>
-            <a:r>
-              <a:rPr sz="1600" b="0">
-                <a:solidFill>
-                  <a:srgbClr val="222222"/>
-                </a:solidFill>
-                <a:latin typeface="맑은 고딕"/>
-              </a:rPr>
-              <a:t>하한을 0.3으로 낮추면 옅은 점 검출 61.9% → 67.1%, 대신 가짜 정상 오경보 4.1% → 5.7%(평균 보간), 49% → 59%(노이즈 보간)</a:t>
-            </a:r>
-          </a:p>
-          <a:p>
-            <a:pPr>
-              <a:spcAft>
-                <a:spcPts val="600"/>
-              </a:spcAft>
-            </a:pPr>
-            <a:r>
-              <a:rPr sz="1600" b="1">
-                <a:solidFill>
-                  <a:srgbClr val="2AA7B8"/>
-                </a:solidFill>
-                <a:latin typeface="맑은 고딕"/>
-              </a:rPr>
-              <a:t>• </a:t>
-            </a:r>
-            <a:r>
-              <a:rPr sz="1600" b="0">
-                <a:solidFill>
-                  <a:srgbClr val="222222"/>
-                </a:solidFill>
-                <a:latin typeface="맑은 고딕"/>
-              </a:rPr>
-              <a:t>오경보가 비싼 현장은 재검사 구간의 이득이 작다</a:t>
             </a:r>
           </a:p>
         </p:txBody>
@@ -11055,7 +12328,7 @@
                 </a:solidFill>
                 <a:latin typeface="맑은 고딕"/>
               </a:rPr>
-              <a:t>모델 선택 가이드와 처리 속도</a:t>
+              <a:t>현장 활용: 3단 판정과 재검사 구간</a:t>
             </a:r>
           </a:p>
         </p:txBody>
@@ -11090,7 +12363,7 @@
                 </a:solidFill>
                 <a:latin typeface="맑은 고딕"/>
               </a:rPr>
-              <a:t>촬영 간격(중앙값 4초)보다 모든 모델이 빠르다</a:t>
+              <a:t>실제 test에서는 결함 369장(≥0.748)과 빈 라벨 27장(≤0.04)이 완전히 갈린다</a:t>
             </a:r>
           </a:p>
         </p:txBody>
@@ -11126,6 +12399,374 @@
                 <a:latin typeface="맑은 고딕"/>
               </a:rPr>
               <a:t>25</a:t>
+            </a:r>
+          </a:p>
+        </p:txBody>
+      </p:sp>
+      <p:sp>
+        <p:nvSpPr>
+          <p:cNvPr id="6" name="TextBox 5"/>
+          <p:cNvSpPr txBox="1"/>
+          <p:nvPr/>
+        </p:nvSpPr>
+        <p:spPr>
+          <a:xfrm>
+            <a:off x="502920" y="6355080"/>
+            <a:ext cx="10180015" cy="365760"/>
+          </a:xfrm>
+          <a:prstGeom prst="rect">
+            <a:avLst/>
+          </a:prstGeom>
+          <a:noFill/>
+        </p:spPr>
+        <p:txBody>
+          <a:bodyPr wrap="square" anchor="t" lIns="45720" rIns="45720">
+            <a:spAutoFit/>
+          </a:bodyPr>
+          <a:lstStyle/>
+          <a:p>
+            <a:pPr algn="l"/>
+            <a:r>
+              <a:rPr sz="1100" b="0">
+                <a:solidFill>
+                  <a:srgbClr val="555B66"/>
+                </a:solidFill>
+                <a:latin typeface="맑은 고딕"/>
+              </a:rPr>
+              <a:t>재검사 구간의 효과는 합성·가짜 정상에 기반한 참고 수치다. 재검사·놓침 비용은 현장 값을 몰라 가정하지 않았다.</a:t>
+            </a:r>
+          </a:p>
+        </p:txBody>
+      </p:sp>
+      <p:pic>
+        <p:nvPicPr>
+          <p:cNvPr id="7" name="Picture 6" descr="fig4b_final_dfine.png"/>
+          <p:cNvPicPr>
+            <a:picLocks noChangeAspect="1"/>
+          </p:cNvPicPr>
+          <p:nvPr/>
+        </p:nvPicPr>
+        <p:blipFill>
+          <a:blip r:embed="rId2"/>
+          <a:stretch>
+            <a:fillRect/>
+          </a:stretch>
+        </p:blipFill>
+        <p:spPr>
+          <a:xfrm>
+            <a:off x="1687794" y="1508760"/>
+            <a:ext cx="8785931" cy="3246120"/>
+          </a:xfrm>
+          <a:prstGeom prst="rect">
+            <a:avLst/>
+          </a:prstGeom>
+        </p:spPr>
+      </p:pic>
+      <p:sp>
+        <p:nvSpPr>
+          <p:cNvPr id="8" name="TextBox 7"/>
+          <p:cNvSpPr txBox="1"/>
+          <p:nvPr/>
+        </p:nvSpPr>
+        <p:spPr>
+          <a:xfrm>
+            <a:off x="731520" y="4846320"/>
+            <a:ext cx="10789920" cy="1463040"/>
+          </a:xfrm>
+          <a:prstGeom prst="rect">
+            <a:avLst/>
+          </a:prstGeom>
+          <a:noFill/>
+        </p:spPr>
+        <p:txBody>
+          <a:bodyPr wrap="square" lIns="45720" rIns="45720">
+            <a:spAutoFit/>
+          </a:bodyPr>
+          <a:lstStyle/>
+          <a:p>
+            <a:pPr>
+              <a:spcAft>
+                <a:spcPts val="600"/>
+              </a:spcAft>
+            </a:pPr>
+            <a:r>
+              <a:rPr sz="1600" b="1">
+                <a:solidFill>
+                  <a:srgbClr val="2AA7B8"/>
+                </a:solidFill>
+                <a:latin typeface="맑은 고딕"/>
+              </a:rPr>
+              <a:t>• </a:t>
+            </a:r>
+            <a:r>
+              <a:rPr sz="1600" b="1">
+                <a:solidFill>
+                  <a:srgbClr val="222222"/>
+                </a:solidFill>
+                <a:latin typeface="맑은 고딕"/>
+              </a:rPr>
+              <a:t>불합격</a:t>
+            </a:r>
+            <a:r>
+              <a:rPr sz="1600" b="0">
+                <a:solidFill>
+                  <a:srgbClr val="222222"/>
+                </a:solidFill>
+                <a:latin typeface="맑은 고딕"/>
+              </a:rPr>
+              <a:t> 최고 신뢰도 ≥ 0.66(val 임계값)  |  </a:t>
+            </a:r>
+            <a:r>
+              <a:rPr sz="1600" b="1">
+                <a:solidFill>
+                  <a:srgbClr val="222222"/>
+                </a:solidFill>
+                <a:latin typeface="맑은 고딕"/>
+              </a:rPr>
+              <a:t>재검사</a:t>
+            </a:r>
+            <a:r>
+              <a:rPr sz="1600" b="0">
+                <a:solidFill>
+                  <a:srgbClr val="222222"/>
+                </a:solidFill>
+                <a:latin typeface="맑은 고딕"/>
+              </a:rPr>
+              <a:t> 0.3 ~ 0.66  |  </a:t>
+            </a:r>
+            <a:r>
+              <a:rPr sz="1600" b="1">
+                <a:solidFill>
+                  <a:srgbClr val="222222"/>
+                </a:solidFill>
+                <a:latin typeface="맑은 고딕"/>
+              </a:rPr>
+              <a:t>합격</a:t>
+            </a:r>
+            <a:r>
+              <a:rPr sz="1600" b="0">
+                <a:solidFill>
+                  <a:srgbClr val="222222"/>
+                </a:solidFill>
+                <a:latin typeface="맑은 고딕"/>
+              </a:rPr>
+              <a:t> &lt; 0.3</a:t>
+            </a:r>
+          </a:p>
+          <a:p>
+            <a:pPr>
+              <a:spcAft>
+                <a:spcPts val="600"/>
+              </a:spcAft>
+            </a:pPr>
+            <a:r>
+              <a:rPr sz="1600" b="1">
+                <a:solidFill>
+                  <a:srgbClr val="2AA7B8"/>
+                </a:solidFill>
+                <a:latin typeface="맑은 고딕"/>
+              </a:rPr>
+              <a:t>• </a:t>
+            </a:r>
+            <a:r>
+              <a:rPr sz="1600" b="0">
+                <a:solidFill>
+                  <a:srgbClr val="222222"/>
+                </a:solidFill>
+                <a:latin typeface="맑은 고딕"/>
+              </a:rPr>
+              <a:t>하한을 0.3으로 낮추면 옅은 점 검출 61.9% → 67.1%, 대신 가짜 정상 오경보 4.1% → 5.7%(평균 보간), 49% → 59%(노이즈 보간)</a:t>
+            </a:r>
+          </a:p>
+          <a:p>
+            <a:pPr>
+              <a:spcAft>
+                <a:spcPts val="600"/>
+              </a:spcAft>
+            </a:pPr>
+            <a:r>
+              <a:rPr sz="1600" b="1">
+                <a:solidFill>
+                  <a:srgbClr val="2AA7B8"/>
+                </a:solidFill>
+                <a:latin typeface="맑은 고딕"/>
+              </a:rPr>
+              <a:t>• </a:t>
+            </a:r>
+            <a:r>
+              <a:rPr sz="1600" b="0">
+                <a:solidFill>
+                  <a:srgbClr val="222222"/>
+                </a:solidFill>
+                <a:latin typeface="맑은 고딕"/>
+              </a:rPr>
+              <a:t>오경보가 비싼 현장은 재검사 구간의 이득이 작다</a:t>
+            </a:r>
+          </a:p>
+        </p:txBody>
+      </p:sp>
+    </p:spTree>
+  </p:cSld>
+  <p:clrMapOvr>
+    <a:masterClrMapping/>
+  </p:clrMapOvr>
+</p:sld>
+</file>
+
+<file path=ppt/slides/slide26.xml><?xml version="1.0" encoding="utf-8"?>
+<p:sld xmlns:a="http://schemas.openxmlformats.org/drawingml/2006/main" xmlns:p="http://schemas.openxmlformats.org/presentationml/2006/main" xmlns:r="http://schemas.openxmlformats.org/officeDocument/2006/relationships">
+  <p:cSld>
+    <p:spTree>
+      <p:nvGrpSpPr>
+        <p:cNvPr id="1" name=""/>
+        <p:cNvGrpSpPr/>
+        <p:nvPr/>
+      </p:nvGrpSpPr>
+      <p:grpSpPr/>
+      <p:sp>
+        <p:nvSpPr>
+          <p:cNvPr id="2" name="Rectangle 1"/>
+          <p:cNvSpPr/>
+          <p:nvPr/>
+        </p:nvSpPr>
+        <p:spPr>
+          <a:xfrm>
+            <a:off x="0" y="0"/>
+            <a:ext cx="164592" cy="6858000"/>
+          </a:xfrm>
+          <a:prstGeom prst="rect">
+            <a:avLst/>
+          </a:prstGeom>
+          <a:solidFill>
+            <a:srgbClr val="1F3A5F"/>
+          </a:solidFill>
+          <a:ln>
+            <a:noFill/>
+          </a:ln>
+        </p:spPr>
+        <p:style>
+          <a:lnRef idx="1">
+            <a:schemeClr val="accent1"/>
+          </a:lnRef>
+          <a:fillRef idx="3">
+            <a:schemeClr val="accent1"/>
+          </a:fillRef>
+          <a:effectRef idx="2">
+            <a:schemeClr val="accent1"/>
+          </a:effectRef>
+          <a:fontRef idx="minor">
+            <a:schemeClr val="lt1"/>
+          </a:fontRef>
+        </p:style>
+        <p:txBody>
+          <a:bodyPr rtlCol="0" anchor="ctr"/>
+          <a:lstStyle/>
+          <a:p>
+            <a:pPr algn="ctr"/>
+          </a:p>
+        </p:txBody>
+      </p:sp>
+      <p:sp>
+        <p:nvSpPr>
+          <p:cNvPr id="3" name="TextBox 2"/>
+          <p:cNvSpPr txBox="1"/>
+          <p:nvPr/>
+        </p:nvSpPr>
+        <p:spPr>
+          <a:xfrm>
+            <a:off x="502920" y="274320"/>
+            <a:ext cx="11185855" cy="731520"/>
+          </a:xfrm>
+          <a:prstGeom prst="rect">
+            <a:avLst/>
+          </a:prstGeom>
+          <a:noFill/>
+        </p:spPr>
+        <p:txBody>
+          <a:bodyPr wrap="square" anchor="ctr" lIns="45720" rIns="45720">
+            <a:spAutoFit/>
+          </a:bodyPr>
+          <a:lstStyle/>
+          <a:p>
+            <a:pPr algn="l"/>
+            <a:r>
+              <a:rPr sz="2800" b="1">
+                <a:solidFill>
+                  <a:srgbClr val="1F3A5F"/>
+                </a:solidFill>
+                <a:latin typeface="맑은 고딕"/>
+              </a:rPr>
+              <a:t>모델 선택 가이드와 처리 속도</a:t>
+            </a:r>
+          </a:p>
+        </p:txBody>
+      </p:sp>
+      <p:sp>
+        <p:nvSpPr>
+          <p:cNvPr id="4" name="TextBox 3"/>
+          <p:cNvSpPr txBox="1"/>
+          <p:nvPr/>
+        </p:nvSpPr>
+        <p:spPr>
+          <a:xfrm>
+            <a:off x="502920" y="1005840"/>
+            <a:ext cx="11185855" cy="640080"/>
+          </a:xfrm>
+          <a:prstGeom prst="rect">
+            <a:avLst/>
+          </a:prstGeom>
+          <a:noFill/>
+        </p:spPr>
+        <p:txBody>
+          <a:bodyPr wrap="square" anchor="t" lIns="45720" rIns="45720">
+            <a:spAutoFit/>
+          </a:bodyPr>
+          <a:lstStyle/>
+          <a:p>
+            <a:pPr algn="l"/>
+            <a:r>
+              <a:rPr sz="1800" b="1">
+                <a:solidFill>
+                  <a:srgbClr val="2AA7B8"/>
+                </a:solidFill>
+                <a:latin typeface="맑은 고딕"/>
+              </a:rPr>
+              <a:t>촬영 간격(중앙값 4초)보다 모든 모델이 빠르다</a:t>
+            </a:r>
+          </a:p>
+        </p:txBody>
+      </p:sp>
+      <p:sp>
+        <p:nvSpPr>
+          <p:cNvPr id="5" name="TextBox 4"/>
+          <p:cNvSpPr txBox="1"/>
+          <p:nvPr/>
+        </p:nvSpPr>
+        <p:spPr>
+          <a:xfrm>
+            <a:off x="11094415" y="6400800"/>
+            <a:ext cx="822960" cy="320040"/>
+          </a:xfrm>
+          <a:prstGeom prst="rect">
+            <a:avLst/>
+          </a:prstGeom>
+          <a:noFill/>
+        </p:spPr>
+        <p:txBody>
+          <a:bodyPr wrap="square" anchor="t" lIns="45720" rIns="45720">
+            <a:spAutoFit/>
+          </a:bodyPr>
+          <a:lstStyle/>
+          <a:p>
+            <a:pPr algn="r"/>
+            <a:r>
+              <a:rPr sz="1200" b="0">
+                <a:solidFill>
+                  <a:srgbClr val="555B66"/>
+                </a:solidFill>
+                <a:latin typeface="맑은 고딕"/>
+              </a:rPr>
+              <a:t>26</a:t>
             </a:r>
           </a:p>
         </p:txBody>
@@ -12075,7 +13716,7 @@
 </p:sld>
 </file>
 
-<file path=ppt/slides/slide26.xml><?xml version="1.0" encoding="utf-8"?>
+<file path=ppt/slides/slide27.xml><?xml version="1.0" encoding="utf-8"?>
 <p:sld xmlns:a="http://schemas.openxmlformats.org/drawingml/2006/main" xmlns:p="http://schemas.openxmlformats.org/presentationml/2006/main" xmlns:r="http://schemas.openxmlformats.org/officeDocument/2006/relationships">
   <p:cSld>
     <p:spTree>
@@ -12228,7 +13869,7 @@
                 </a:solidFill>
                 <a:latin typeface="맑은 고딕"/>
               </a:rPr>
-              <a:t>26</a:t>
+              <a:t>27</a:t>
             </a:r>
           </a:p>
         </p:txBody>
@@ -12474,521 +14115,6 @@
                 <a:latin typeface="맑은 고딕"/>
               </a:rPr>
               <a:t>: 취약점이 모델 선택 가이드와 재검사 구간으로 이어짐</a:t>
-            </a:r>
-          </a:p>
-        </p:txBody>
-      </p:sp>
-    </p:spTree>
-  </p:cSld>
-  <p:clrMapOvr>
-    <a:masterClrMapping/>
-  </p:clrMapOvr>
-</p:sld>
-</file>
-
-<file path=ppt/slides/slide27.xml><?xml version="1.0" encoding="utf-8"?>
-<p:sld xmlns:a="http://schemas.openxmlformats.org/drawingml/2006/main" xmlns:p="http://schemas.openxmlformats.org/presentationml/2006/main" xmlns:r="http://schemas.openxmlformats.org/officeDocument/2006/relationships">
-  <p:cSld>
-    <p:spTree>
-      <p:nvGrpSpPr>
-        <p:cNvPr id="1" name=""/>
-        <p:cNvGrpSpPr/>
-        <p:nvPr/>
-      </p:nvGrpSpPr>
-      <p:grpSpPr/>
-      <p:sp>
-        <p:nvSpPr>
-          <p:cNvPr id="2" name="Rectangle 1"/>
-          <p:cNvSpPr/>
-          <p:nvPr/>
-        </p:nvSpPr>
-        <p:spPr>
-          <a:xfrm>
-            <a:off x="0" y="0"/>
-            <a:ext cx="164592" cy="6858000"/>
-          </a:xfrm>
-          <a:prstGeom prst="rect">
-            <a:avLst/>
-          </a:prstGeom>
-          <a:solidFill>
-            <a:srgbClr val="1F3A5F"/>
-          </a:solidFill>
-          <a:ln>
-            <a:noFill/>
-          </a:ln>
-        </p:spPr>
-        <p:style>
-          <a:lnRef idx="1">
-            <a:schemeClr val="accent1"/>
-          </a:lnRef>
-          <a:fillRef idx="3">
-            <a:schemeClr val="accent1"/>
-          </a:fillRef>
-          <a:effectRef idx="2">
-            <a:schemeClr val="accent1"/>
-          </a:effectRef>
-          <a:fontRef idx="minor">
-            <a:schemeClr val="lt1"/>
-          </a:fontRef>
-        </p:style>
-        <p:txBody>
-          <a:bodyPr rtlCol="0" anchor="ctr"/>
-          <a:lstStyle/>
-          <a:p>
-            <a:pPr algn="ctr"/>
-          </a:p>
-        </p:txBody>
-      </p:sp>
-      <p:sp>
-        <p:nvSpPr>
-          <p:cNvPr id="3" name="TextBox 2"/>
-          <p:cNvSpPr txBox="1"/>
-          <p:nvPr/>
-        </p:nvSpPr>
-        <p:spPr>
-          <a:xfrm>
-            <a:off x="502920" y="274320"/>
-            <a:ext cx="11185855" cy="731520"/>
-          </a:xfrm>
-          <a:prstGeom prst="rect">
-            <a:avLst/>
-          </a:prstGeom>
-          <a:noFill/>
-        </p:spPr>
-        <p:txBody>
-          <a:bodyPr wrap="square" anchor="ctr" lIns="45720" rIns="45720">
-            <a:spAutoFit/>
-          </a:bodyPr>
-          <a:lstStyle/>
-          <a:p>
-            <a:pPr algn="l"/>
-            <a:r>
-              <a:rPr sz="2800" b="1">
-                <a:solidFill>
-                  <a:srgbClr val="1F3A5F"/>
-                </a:solidFill>
-                <a:latin typeface="맑은 고딕"/>
-              </a:rPr>
-              <a:t>코드 구성과 재현성</a:t>
-            </a:r>
-          </a:p>
-        </p:txBody>
-      </p:sp>
-      <p:sp>
-        <p:nvSpPr>
-          <p:cNvPr id="4" name="TextBox 3"/>
-          <p:cNvSpPr txBox="1"/>
-          <p:nvPr/>
-        </p:nvSpPr>
-        <p:spPr>
-          <a:xfrm>
-            <a:off x="502920" y="1005840"/>
-            <a:ext cx="11185855" cy="640080"/>
-          </a:xfrm>
-          <a:prstGeom prst="rect">
-            <a:avLst/>
-          </a:prstGeom>
-          <a:noFill/>
-        </p:spPr>
-        <p:txBody>
-          <a:bodyPr wrap="square" anchor="t" lIns="45720" rIns="45720">
-            <a:spAutoFit/>
-          </a:bodyPr>
-          <a:lstStyle/>
-          <a:p>
-            <a:pPr algn="l"/>
-            <a:r>
-              <a:rPr sz="1800" b="1">
-                <a:solidFill>
-                  <a:srgbClr val="2AA7B8"/>
-                </a:solidFill>
-                <a:latin typeface="맑은 고딕"/>
-              </a:rPr>
-              <a:t>전처리 · 학습 · 추론 · 평가 · 분석을 폴더별로 분리하고 실행 명령을 문서화했다</a:t>
-            </a:r>
-          </a:p>
-        </p:txBody>
-      </p:sp>
-      <p:sp>
-        <p:nvSpPr>
-          <p:cNvPr id="5" name="TextBox 4"/>
-          <p:cNvSpPr txBox="1"/>
-          <p:nvPr/>
-        </p:nvSpPr>
-        <p:spPr>
-          <a:xfrm>
-            <a:off x="11094415" y="6400800"/>
-            <a:ext cx="822960" cy="320040"/>
-          </a:xfrm>
-          <a:prstGeom prst="rect">
-            <a:avLst/>
-          </a:prstGeom>
-          <a:noFill/>
-        </p:spPr>
-        <p:txBody>
-          <a:bodyPr wrap="square" anchor="t" lIns="45720" rIns="45720">
-            <a:spAutoFit/>
-          </a:bodyPr>
-          <a:lstStyle/>
-          <a:p>
-            <a:pPr algn="r"/>
-            <a:r>
-              <a:rPr sz="1200" b="0">
-                <a:solidFill>
-                  <a:srgbClr val="555B66"/>
-                </a:solidFill>
-                <a:latin typeface="맑은 고딕"/>
-              </a:rPr>
-              <a:t>27</a:t>
-            </a:r>
-          </a:p>
-        </p:txBody>
-      </p:sp>
-      <p:sp>
-        <p:nvSpPr>
-          <p:cNvPr id="6" name="TextBox 5"/>
-          <p:cNvSpPr txBox="1"/>
-          <p:nvPr/>
-        </p:nvSpPr>
-        <p:spPr>
-          <a:xfrm>
-            <a:off x="502920" y="6355080"/>
-            <a:ext cx="10180015" cy="365760"/>
-          </a:xfrm>
-          <a:prstGeom prst="rect">
-            <a:avLst/>
-          </a:prstGeom>
-          <a:noFill/>
-        </p:spPr>
-        <p:txBody>
-          <a:bodyPr wrap="square" anchor="t" lIns="45720" rIns="45720">
-            <a:spAutoFit/>
-          </a:bodyPr>
-          <a:lstStyle/>
-          <a:p>
-            <a:pPr algn="l"/>
-            <a:r>
-              <a:rPr sz="1100" b="0">
-                <a:solidFill>
-                  <a:srgbClr val="555B66"/>
-                </a:solidFill>
-                <a:latin typeface="맑은 고딕"/>
-              </a:rPr>
-              <a:t>전처리 코드는 이총의 브랜치에 있어 main 병합이 필요하다. 한 번에 실행하는 스크립트와 테스트 예측 결과 CSV는 제출 전에 정리할 항목이다 [작성 필요].</a:t>
-            </a:r>
-          </a:p>
-        </p:txBody>
-      </p:sp>
-      <p:sp>
-        <p:nvSpPr>
-          <p:cNvPr id="7" name="TextBox 6"/>
-          <p:cNvSpPr txBox="1"/>
-          <p:nvPr/>
-        </p:nvSpPr>
-        <p:spPr>
-          <a:xfrm>
-            <a:off x="640080" y="1783080"/>
-            <a:ext cx="5577840" cy="4572000"/>
-          </a:xfrm>
-          <a:prstGeom prst="rect">
-            <a:avLst/>
-          </a:prstGeom>
-          <a:noFill/>
-        </p:spPr>
-        <p:txBody>
-          <a:bodyPr wrap="square" lIns="45720" rIns="45720">
-            <a:spAutoFit/>
-          </a:bodyPr>
-          <a:lstStyle/>
-          <a:p>
-            <a:pPr>
-              <a:spcAft>
-                <a:spcPts val="900"/>
-              </a:spcAft>
-            </a:pPr>
-            <a:r>
-              <a:rPr sz="1700" b="1">
-                <a:solidFill>
-                  <a:srgbClr val="2AA7B8"/>
-                </a:solidFill>
-                <a:latin typeface="맑은 고딕"/>
-              </a:rPr>
-              <a:t>• </a:t>
-            </a:r>
-            <a:r>
-              <a:rPr sz="1700" b="0">
-                <a:solidFill>
-                  <a:srgbClr val="222222"/>
-                </a:solidFill>
-                <a:latin typeface="맑은 고딕"/>
-              </a:rPr>
-              <a:t>환경: conda KAMP(Python 3.10), torch 2.6, 한글 경로용 PYTHONUTF8=1, requirements.txt</a:t>
-            </a:r>
-          </a:p>
-          <a:p>
-            <a:pPr>
-              <a:spcAft>
-                <a:spcPts val="900"/>
-              </a:spcAft>
-            </a:pPr>
-            <a:r>
-              <a:rPr sz="1700" b="1">
-                <a:solidFill>
-                  <a:srgbClr val="2AA7B8"/>
-                </a:solidFill>
-                <a:latin typeface="맑은 고딕"/>
-              </a:rPr>
-              <a:t>• </a:t>
-            </a:r>
-            <a:r>
-              <a:rPr sz="1700" b="0">
-                <a:solidFill>
-                  <a:srgbClr val="222222"/>
-                </a:solidFill>
-                <a:latin typeface="맑은 고딕"/>
-              </a:rPr>
-              <a:t>src/yolov3/: 베이스라인(호환 수정본)</a:t>
-            </a:r>
-          </a:p>
-          <a:p>
-            <a:pPr>
-              <a:spcAft>
-                <a:spcPts val="900"/>
-              </a:spcAft>
-            </a:pPr>
-            <a:r>
-              <a:rPr sz="1700" b="1">
-                <a:solidFill>
-                  <a:srgbClr val="2AA7B8"/>
-                </a:solidFill>
-                <a:latin typeface="맑은 고딕"/>
-              </a:rPr>
-              <a:t>• </a:t>
-            </a:r>
-            <a:r>
-              <a:rPr sz="1700" b="0">
-                <a:solidFill>
-                  <a:srgbClr val="222222"/>
-                </a:solidFill>
-                <a:latin typeface="맑은 고딕"/>
-              </a:rPr>
-              <a:t>src/minyeop/: Faster R-CNN, MobileNet, YOLOv3-tiny, 팀원 모델 평가, 분석(점 제거, 가짜 정상, 합성 점, 호기 통계)</a:t>
-            </a:r>
-          </a:p>
-          <a:p>
-            <a:pPr>
-              <a:spcAft>
-                <a:spcPts val="900"/>
-              </a:spcAft>
-            </a:pPr>
-            <a:r>
-              <a:rPr sz="1700" b="1">
-                <a:solidFill>
-                  <a:srgbClr val="2AA7B8"/>
-                </a:solidFill>
-                <a:latin typeface="맑은 고딕"/>
-              </a:rPr>
-              <a:t>• </a:t>
-            </a:r>
-            <a:r>
-              <a:rPr sz="1700" b="0">
-                <a:solidFill>
-                  <a:srgbClr val="222222"/>
-                </a:solidFill>
-                <a:latin typeface="맑은 고딕"/>
-              </a:rPr>
-              <a:t>scripts/synth_eval.py: 시드 42 합성 평가 데이터 생성기</a:t>
-            </a:r>
-          </a:p>
-          <a:p>
-            <a:pPr>
-              <a:spcAft>
-                <a:spcPts val="900"/>
-              </a:spcAft>
-            </a:pPr>
-            <a:r>
-              <a:rPr sz="1700" b="1">
-                <a:solidFill>
-                  <a:srgbClr val="2AA7B8"/>
-                </a:solidFill>
-                <a:latin typeface="맑은 고딕"/>
-              </a:rPr>
-              <a:t>• </a:t>
-            </a:r>
-            <a:r>
-              <a:rPr sz="1700" b="0">
-                <a:solidFill>
-                  <a:srgbClr val="222222"/>
-                </a:solidFill>
-                <a:latin typeface="맑은 고딕"/>
-              </a:rPr>
-              <a:t>docs/: 지표, 실험 결과 표, 분석 해석</a:t>
-            </a:r>
-          </a:p>
-        </p:txBody>
-      </p:sp>
-      <p:sp>
-        <p:nvSpPr>
-          <p:cNvPr id="8" name="TextBox 7"/>
-          <p:cNvSpPr txBox="1"/>
-          <p:nvPr/>
-        </p:nvSpPr>
-        <p:spPr>
-          <a:xfrm>
-            <a:off x="6400800" y="1783080"/>
-            <a:ext cx="5394960" cy="4572000"/>
-          </a:xfrm>
-          <a:prstGeom prst="rect">
-            <a:avLst/>
-          </a:prstGeom>
-          <a:noFill/>
-        </p:spPr>
-        <p:txBody>
-          <a:bodyPr wrap="square" lIns="45720" rIns="45720">
-            <a:spAutoFit/>
-          </a:bodyPr>
-          <a:lstStyle/>
-          <a:p>
-            <a:pPr>
-              <a:spcAft>
-                <a:spcPts val="900"/>
-              </a:spcAft>
-            </a:pPr>
-            <a:r>
-              <a:rPr sz="1700" b="1">
-                <a:solidFill>
-                  <a:srgbClr val="2AA7B8"/>
-                </a:solidFill>
-                <a:latin typeface="맑은 고딕"/>
-              </a:rPr>
-              <a:t>• </a:t>
-            </a:r>
-            <a:r>
-              <a:rPr sz="1700" b="0">
-                <a:solidFill>
-                  <a:srgbClr val="222222"/>
-                </a:solidFill>
-                <a:latin typeface="맑은 고딕"/>
-              </a:rPr>
-              <a:t>평가 규칙: 임계값은 </a:t>
-            </a:r>
-            <a:r>
-              <a:rPr sz="1700" b="1">
-                <a:solidFill>
-                  <a:srgbClr val="222222"/>
-                </a:solidFill>
-                <a:latin typeface="맑은 고딕"/>
-              </a:rPr>
-              <a:t>val에서 고정</a:t>
-            </a:r>
-            <a:r>
-              <a:rPr sz="1700" b="0">
-                <a:solidFill>
-                  <a:srgbClr val="222222"/>
-                </a:solidFill>
-                <a:latin typeface="맑은 고딕"/>
-              </a:rPr>
-              <a:t>, test는 한 번만</a:t>
-            </a:r>
-          </a:p>
-          <a:p>
-            <a:pPr>
-              <a:spcAft>
-                <a:spcPts val="900"/>
-              </a:spcAft>
-            </a:pPr>
-            <a:r>
-              <a:rPr sz="1700" b="1">
-                <a:solidFill>
-                  <a:srgbClr val="2AA7B8"/>
-                </a:solidFill>
-                <a:latin typeface="맑은 고딕"/>
-              </a:rPr>
-              <a:t>• </a:t>
-            </a:r>
-            <a:r>
-              <a:rPr sz="1700" b="0">
-                <a:solidFill>
-                  <a:srgbClr val="222222"/>
-                </a:solidFill>
-                <a:latin typeface="맑은 고딕"/>
-              </a:rPr>
-              <a:t>데이터 버전: manifest.csv의 sha256으로 확인</a:t>
-            </a:r>
-          </a:p>
-          <a:p>
-            <a:pPr>
-              <a:spcAft>
-                <a:spcPts val="900"/>
-              </a:spcAft>
-            </a:pPr>
-            <a:r>
-              <a:rPr sz="1700" b="1">
-                <a:solidFill>
-                  <a:srgbClr val="2AA7B8"/>
-                </a:solidFill>
-                <a:latin typeface="맑은 고딕"/>
-              </a:rPr>
-              <a:t>• </a:t>
-            </a:r>
-            <a:r>
-              <a:rPr sz="1700" b="0">
-                <a:solidFill>
-                  <a:srgbClr val="222222"/>
-                </a:solidFill>
-                <a:latin typeface="맑은 고딕"/>
-              </a:rPr>
-              <a:t>합성 평가 데이터: 기준본과 --verify로 비교(위치·조건·픽셀 해시)</a:t>
-            </a:r>
-          </a:p>
-          <a:p>
-            <a:pPr>
-              <a:spcAft>
-                <a:spcPts val="900"/>
-              </a:spcAft>
-            </a:pPr>
-            <a:r>
-              <a:rPr sz="1700" b="1">
-                <a:solidFill>
-                  <a:srgbClr val="2AA7B8"/>
-                </a:solidFill>
-                <a:latin typeface="맑은 고딕"/>
-              </a:rPr>
-              <a:t>• </a:t>
-            </a:r>
-            <a:r>
-              <a:rPr sz="1700" b="0">
-                <a:solidFill>
-                  <a:srgbClr val="222222"/>
-                </a:solidFill>
-                <a:latin typeface="맑은 고딕"/>
-              </a:rPr>
-              <a:t>모델 선정: val 부트스트랩 구간으로 "동률"을 객관적으로 판정</a:t>
-            </a:r>
-          </a:p>
-          <a:p>
-            <a:pPr>
-              <a:spcAft>
-                <a:spcPts val="900"/>
-              </a:spcAft>
-            </a:pPr>
-            <a:r>
-              <a:rPr sz="1700" b="1">
-                <a:solidFill>
-                  <a:srgbClr val="2AA7B8"/>
-                </a:solidFill>
-                <a:latin typeface="맑은 고딕"/>
-              </a:rPr>
-              <a:t>• </a:t>
-            </a:r>
-            <a:r>
-              <a:rPr sz="1700" b="0">
-                <a:solidFill>
-                  <a:srgbClr val="222222"/>
-                </a:solidFill>
-                <a:latin typeface="맑은 고딕"/>
-              </a:rPr>
-              <a:t>모든 수치의 출처 파일을 docs/와 runs/에 보존(예측 JSON은 제외)</a:t>
             </a:r>
           </a:p>
         </p:txBody>
@@ -13084,7 +14210,7 @@
                 </a:solidFill>
                 <a:latin typeface="맑은 고딕"/>
               </a:rPr>
-              <a:t>한계와 향후 과제</a:t>
+              <a:t>코드 구성과 재현성</a:t>
             </a:r>
           </a:p>
         </p:txBody>
@@ -13119,7 +14245,7 @@
                 </a:solidFill>
                 <a:latin typeface="맑은 고딕"/>
               </a:rPr>
-              <a:t>숨기지 않고 적는다</a:t>
+              <a:t>전처리 · 학습 · 추론 · 평가 · 분석을 폴더별로 분리하고 실행 명령을 문서화했다</a:t>
             </a:r>
           </a:p>
         </p:txBody>
@@ -13167,8 +14293,8 @@
         </p:nvSpPr>
         <p:spPr>
           <a:xfrm>
-            <a:off x="640080" y="1783080"/>
-            <a:ext cx="10972800" cy="4572000"/>
+            <a:off x="502920" y="6355080"/>
+            <a:ext cx="10180015" cy="365760"/>
           </a:xfrm>
           <a:prstGeom prst="rect">
             <a:avLst/>
@@ -13176,6 +14302,41 @@
           <a:noFill/>
         </p:spPr>
         <p:txBody>
+          <a:bodyPr wrap="square" anchor="t" lIns="45720" rIns="45720">
+            <a:spAutoFit/>
+          </a:bodyPr>
+          <a:lstStyle/>
+          <a:p>
+            <a:pPr algn="l"/>
+            <a:r>
+              <a:rPr sz="1100" b="0">
+                <a:solidFill>
+                  <a:srgbClr val="555B66"/>
+                </a:solidFill>
+                <a:latin typeface="맑은 고딕"/>
+              </a:rPr>
+              <a:t>전처리 코드는 이총의 브랜치에 있어 main 병합이 필요하다. 한 번에 실행하는 스크립트와 테스트 예측 결과 CSV는 제출 전에 정리할 항목이다 [작성 필요].</a:t>
+            </a:r>
+          </a:p>
+        </p:txBody>
+      </p:sp>
+      <p:sp>
+        <p:nvSpPr>
+          <p:cNvPr id="7" name="TextBox 6"/>
+          <p:cNvSpPr txBox="1"/>
+          <p:nvPr/>
+        </p:nvSpPr>
+        <p:spPr>
+          <a:xfrm>
+            <a:off x="640080" y="1783080"/>
+            <a:ext cx="5577840" cy="4572000"/>
+          </a:xfrm>
+          <a:prstGeom prst="rect">
+            <a:avLst/>
+          </a:prstGeom>
+          <a:noFill/>
+        </p:spPr>
+        <p:txBody>
           <a:bodyPr wrap="square" lIns="45720" rIns="45720">
             <a:spAutoFit/>
           </a:bodyPr>
@@ -13183,11 +14344,11 @@
           <a:p>
             <a:pPr>
               <a:spcAft>
-                <a:spcPts val="1100"/>
+                <a:spcPts val="900"/>
               </a:spcAft>
             </a:pPr>
             <a:r>
-              <a:rPr sz="1800" b="1">
+              <a:rPr sz="1700" b="1">
                 <a:solidFill>
                   <a:srgbClr val="2AA7B8"/>
                 </a:solidFill>
@@ -13196,41 +14357,23 @@
               <a:t>• </a:t>
             </a:r>
             <a:r>
-              <a:rPr sz="1800" b="0">
-                <a:solidFill>
-                  <a:srgbClr val="222222"/>
-                </a:solidFill>
-                <a:latin typeface="맑은 고딕"/>
-              </a:rPr>
-              <a:t>합성 점과 가짜 정상은 </a:t>
-            </a:r>
-            <a:r>
-              <a:rPr sz="1800" b="1">
-                <a:solidFill>
-                  <a:srgbClr val="222222"/>
-                </a:solidFill>
-                <a:latin typeface="맑은 고딕"/>
-              </a:rPr>
-              <a:t>인위적인 이미지</a:t>
-            </a:r>
-            <a:r>
-              <a:rPr sz="1800" b="0">
-                <a:solidFill>
-                  <a:srgbClr val="222222"/>
-                </a:solidFill>
-                <a:latin typeface="맑은 고딕"/>
-              </a:rPr>
-              <a:t>다. 실제 현장 성능이 아니라 상대 비교와 취약점 탐색으로만 해석한다</a:t>
+              <a:rPr sz="1700" b="0">
+                <a:solidFill>
+                  <a:srgbClr val="222222"/>
+                </a:solidFill>
+                <a:latin typeface="맑은 고딕"/>
+              </a:rPr>
+              <a:t>환경: conda KAMP(Python 3.10), torch 2.6, 한글 경로용 PYTHONUTF8=1, requirements.txt</a:t>
             </a:r>
           </a:p>
           <a:p>
             <a:pPr>
               <a:spcAft>
-                <a:spcPts val="1100"/>
+                <a:spcPts val="900"/>
               </a:spcAft>
             </a:pPr>
             <a:r>
-              <a:rPr sz="1800" b="1">
+              <a:rPr sz="1700" b="1">
                 <a:solidFill>
                   <a:srgbClr val="2AA7B8"/>
                 </a:solidFill>
@@ -13239,41 +14382,23 @@
               <a:t>• </a:t>
             </a:r>
             <a:r>
-              <a:rPr sz="1800" b="0">
-                <a:solidFill>
-                  <a:srgbClr val="222222"/>
-                </a:solidFill>
-                <a:latin typeface="맑은 고딕"/>
-              </a:rPr>
-              <a:t>강건성 시험은 </a:t>
-            </a:r>
-            <a:r>
-              <a:rPr sz="1800" b="1">
-                <a:solidFill>
-                  <a:srgbClr val="222222"/>
-                </a:solidFill>
-                <a:latin typeface="맑은 고딕"/>
-              </a:rPr>
-              <a:t>test 이미지</a:t>
-            </a:r>
-            <a:r>
-              <a:rPr sz="1800" b="0">
-                <a:solidFill>
-                  <a:srgbClr val="222222"/>
-                </a:solidFill>
-                <a:latin typeface="맑은 고딕"/>
-              </a:rPr>
-              <a:t>로 먼저 수행했다. 모델 선정에는 val 지표만 썼지만, 선정 근거로 쓰려면 val로 반복해야 한다</a:t>
+              <a:rPr sz="1700" b="0">
+                <a:solidFill>
+                  <a:srgbClr val="222222"/>
+                </a:solidFill>
+                <a:latin typeface="맑은 고딕"/>
+              </a:rPr>
+              <a:t>src/yolov3/: 베이스라인(호환 수정본)</a:t>
             </a:r>
           </a:p>
           <a:p>
             <a:pPr>
               <a:spcAft>
-                <a:spcPts val="1100"/>
+                <a:spcPts val="900"/>
               </a:spcAft>
             </a:pPr>
             <a:r>
-              <a:rPr sz="1800" b="1">
+              <a:rPr sz="1700" b="1">
                 <a:solidFill>
                   <a:srgbClr val="2AA7B8"/>
                 </a:solidFill>
@@ -13282,23 +14407,23 @@
               <a:t>• </a:t>
             </a:r>
             <a:r>
-              <a:rPr sz="1800" b="0">
-                <a:solidFill>
-                  <a:srgbClr val="222222"/>
-                </a:solidFill>
-                <a:latin typeface="맑은 고딕"/>
-              </a:rPr>
-              <a:t>'미탐지 우선'이라는 우선순위는 결과를 본 뒤 정했다. 오경보 우선이면 선정이 바뀐다</a:t>
+              <a:rPr sz="1700" b="0">
+                <a:solidFill>
+                  <a:srgbClr val="222222"/>
+                </a:solidFill>
+                <a:latin typeface="맑은 고딕"/>
+              </a:rPr>
+              <a:t>src/minyeop/: Faster R-CNN, MobileNet, YOLOv3-tiny, 팀원 모델 평가, 분석(점 제거, 가짜 정상, 합성 점, 호기 통계)</a:t>
             </a:r>
           </a:p>
           <a:p>
             <a:pPr>
               <a:spcAft>
-                <a:spcPts val="1100"/>
+                <a:spcPts val="900"/>
               </a:spcAft>
             </a:pPr>
             <a:r>
-              <a:rPr sz="1800" b="1">
+              <a:rPr sz="1700" b="1">
                 <a:solidFill>
                   <a:srgbClr val="2AA7B8"/>
                 </a:solidFill>
@@ -13307,41 +14432,23 @@
               <a:t>• </a:t>
             </a:r>
             <a:r>
-              <a:rPr sz="1800" b="0">
-                <a:solidFill>
-                  <a:srgbClr val="222222"/>
-                </a:solidFill>
-                <a:latin typeface="맑은 고딕"/>
-              </a:rPr>
-              <a:t>표시(색 사각형) 제거의 </a:t>
-            </a:r>
-            <a:r>
-              <a:rPr sz="1800" b="1">
-                <a:solidFill>
-                  <a:srgbClr val="222222"/>
-                </a:solidFill>
-                <a:latin typeface="맑은 고딕"/>
-              </a:rPr>
-              <a:t>흔적</a:t>
-            </a:r>
-            <a:r>
-              <a:rPr sz="1800" b="0">
-                <a:solidFill>
-                  <a:srgbClr val="222222"/>
-                </a:solidFill>
-                <a:latin typeface="맑은 고딕"/>
-              </a:rPr>
-              <a:t>이 단서가 되는지는 검증하지 못했다</a:t>
+              <a:rPr sz="1700" b="0">
+                <a:solidFill>
+                  <a:srgbClr val="222222"/>
+                </a:solidFill>
+                <a:latin typeface="맑은 고딕"/>
+              </a:rPr>
+              <a:t>scripts/synth_eval.py: 시드 42 합성 평가 데이터 생성기</a:t>
             </a:r>
           </a:p>
           <a:p>
             <a:pPr>
               <a:spcAft>
-                <a:spcPts val="1100"/>
+                <a:spcPts val="900"/>
               </a:spcAft>
             </a:pPr>
             <a:r>
-              <a:rPr sz="1800" b="1">
+              <a:rPr sz="1700" b="1">
                 <a:solidFill>
                   <a:srgbClr val="2AA7B8"/>
                 </a:solidFill>
@@ -13350,23 +14457,46 @@
               <a:t>• </a:t>
             </a:r>
             <a:r>
-              <a:rPr sz="1800" b="0">
-                <a:solidFill>
-                  <a:srgbClr val="222222"/>
-                </a:solidFill>
-                <a:latin typeface="맑은 고딕"/>
-              </a:rPr>
-              <a:t>학습 시드가 하나이고, 팀원 모델은 학습 조건이 우리와 다르다(임계값은 우리 규칙으로 재선정)</a:t>
-            </a:r>
-          </a:p>
+              <a:rPr sz="1700" b="0">
+                <a:solidFill>
+                  <a:srgbClr val="222222"/>
+                </a:solidFill>
+                <a:latin typeface="맑은 고딕"/>
+              </a:rPr>
+              <a:t>docs/: 지표, 실험 결과 표, 분석 해석</a:t>
+            </a:r>
+          </a:p>
+        </p:txBody>
+      </p:sp>
+      <p:sp>
+        <p:nvSpPr>
+          <p:cNvPr id="8" name="TextBox 7"/>
+          <p:cNvSpPr txBox="1"/>
+          <p:nvPr/>
+        </p:nvSpPr>
+        <p:spPr>
+          <a:xfrm>
+            <a:off x="6400800" y="1783080"/>
+            <a:ext cx="5394960" cy="4572000"/>
+          </a:xfrm>
+          <a:prstGeom prst="rect">
+            <a:avLst/>
+          </a:prstGeom>
+          <a:noFill/>
+        </p:spPr>
+        <p:txBody>
+          <a:bodyPr wrap="square" lIns="45720" rIns="45720">
+            <a:spAutoFit/>
+          </a:bodyPr>
+          <a:lstStyle/>
           <a:p>
             <a:pPr>
               <a:spcAft>
-                <a:spcPts val="1100"/>
+                <a:spcPts val="900"/>
               </a:spcAft>
             </a:pPr>
             <a:r>
-              <a:rPr sz="1800" b="1">
+              <a:rPr sz="1700" b="1">
                 <a:solidFill>
                   <a:srgbClr val="2AA7B8"/>
                 </a:solidFill>
@@ -13375,23 +14505,41 @@
               <a:t>• </a:t>
             </a:r>
             <a:r>
-              <a:rPr sz="1800" b="0">
-                <a:solidFill>
-                  <a:srgbClr val="222222"/>
-                </a:solidFill>
-                <a:latin typeface="맑은 고딕"/>
-              </a:rPr>
-              <a:t>속도는 노트북에서 측정했고 실행마다 변동이 크다. 현장 장비 사양과 재검사 비용은 알지 못한다</a:t>
+              <a:rPr sz="1700" b="0">
+                <a:solidFill>
+                  <a:srgbClr val="222222"/>
+                </a:solidFill>
+                <a:latin typeface="맑은 고딕"/>
+              </a:rPr>
+              <a:t>평가 규칙: 임계값은 </a:t>
+            </a:r>
+            <a:r>
+              <a:rPr sz="1700" b="1">
+                <a:solidFill>
+                  <a:srgbClr val="222222"/>
+                </a:solidFill>
+                <a:latin typeface="맑은 고딕"/>
+              </a:rPr>
+              <a:t>val에서 고정</a:t>
+            </a:r>
+            <a:r>
+              <a:rPr sz="1700" b="0">
+                <a:solidFill>
+                  <a:srgbClr val="222222"/>
+                </a:solidFill>
+                <a:latin typeface="맑은 고딕"/>
+              </a:rPr>
+              <a:t>, test는 한 번만</a:t>
             </a:r>
           </a:p>
           <a:p>
             <a:pPr>
               <a:spcAft>
-                <a:spcPts val="1100"/>
+                <a:spcPts val="900"/>
               </a:spcAft>
             </a:pPr>
             <a:r>
-              <a:rPr sz="1800" b="1">
+              <a:rPr sz="1700" b="1">
                 <a:solidFill>
                   <a:srgbClr val="2AA7B8"/>
                 </a:solidFill>
@@ -13400,13 +14548,88 @@
               <a:t>• </a:t>
             </a:r>
             <a:r>
-              <a:rPr sz="1800" b="0">
-                <a:solidFill>
-                  <a:srgbClr val="222222"/>
-                </a:solidFill>
-                <a:latin typeface="맑은 고딕"/>
-              </a:rPr>
-              <a:t>향후: 흔적 검증(원본 BMP 2x2 실험), 실제 정상 제품 이미지 확보, val 반복, 합성 점 대조군(s=0)</a:t>
+              <a:rPr sz="1700" b="0">
+                <a:solidFill>
+                  <a:srgbClr val="222222"/>
+                </a:solidFill>
+                <a:latin typeface="맑은 고딕"/>
+              </a:rPr>
+              <a:t>데이터 버전: manifest.csv의 sha256으로 확인</a:t>
+            </a:r>
+          </a:p>
+          <a:p>
+            <a:pPr>
+              <a:spcAft>
+                <a:spcPts val="900"/>
+              </a:spcAft>
+            </a:pPr>
+            <a:r>
+              <a:rPr sz="1700" b="1">
+                <a:solidFill>
+                  <a:srgbClr val="2AA7B8"/>
+                </a:solidFill>
+                <a:latin typeface="맑은 고딕"/>
+              </a:rPr>
+              <a:t>• </a:t>
+            </a:r>
+            <a:r>
+              <a:rPr sz="1700" b="0">
+                <a:solidFill>
+                  <a:srgbClr val="222222"/>
+                </a:solidFill>
+                <a:latin typeface="맑은 고딕"/>
+              </a:rPr>
+              <a:t>합성 평가 데이터: 기준본과 --verify로 비교(위치·조건·픽셀 해시)</a:t>
+            </a:r>
+          </a:p>
+          <a:p>
+            <a:pPr>
+              <a:spcAft>
+                <a:spcPts val="900"/>
+              </a:spcAft>
+            </a:pPr>
+            <a:r>
+              <a:rPr sz="1700" b="1">
+                <a:solidFill>
+                  <a:srgbClr val="2AA7B8"/>
+                </a:solidFill>
+                <a:latin typeface="맑은 고딕"/>
+              </a:rPr>
+              <a:t>• </a:t>
+            </a:r>
+            <a:r>
+              <a:rPr sz="1700" b="0">
+                <a:solidFill>
+                  <a:srgbClr val="222222"/>
+                </a:solidFill>
+                <a:latin typeface="맑은 고딕"/>
+              </a:rPr>
+              <a:t>모델 선정: val 부트스트랩 구간으로 "동률"을 객관적으로 판정</a:t>
+            </a:r>
+          </a:p>
+          <a:p>
+            <a:pPr>
+              <a:spcAft>
+                <a:spcPts val="900"/>
+              </a:spcAft>
+            </a:pPr>
+            <a:r>
+              <a:rPr sz="1700" b="1">
+                <a:solidFill>
+                  <a:srgbClr val="2AA7B8"/>
+                </a:solidFill>
+                <a:latin typeface="맑은 고딕"/>
+              </a:rPr>
+              <a:t>• </a:t>
+            </a:r>
+            <a:r>
+              <a:rPr sz="1700" b="0">
+                <a:solidFill>
+                  <a:srgbClr val="222222"/>
+                </a:solidFill>
+                <a:latin typeface="맑은 고딕"/>
+              </a:rPr>
+              <a:t>모든 수치의 출처 파일을 docs/와 runs/에 보존(예측 JSON은 제외)</a:t>
             </a:r>
           </a:p>
         </p:txBody>
@@ -13502,7 +14725,7 @@
                 </a:solidFill>
                 <a:latin typeface="맑은 고딕"/>
               </a:rPr>
-              <a:t>결론</a:t>
+              <a:t>한계와 향후 과제</a:t>
             </a:r>
           </a:p>
         </p:txBody>
@@ -13515,8 +14738,8 @@
         </p:nvSpPr>
         <p:spPr>
           <a:xfrm>
-            <a:off x="11094415" y="6400800"/>
-            <a:ext cx="822960" cy="320040"/>
+            <a:off x="502920" y="1005840"/>
+            <a:ext cx="11185855" cy="640080"/>
           </a:xfrm>
           <a:prstGeom prst="rect">
             <a:avLst/>
@@ -13529,15 +14752,15 @@
           </a:bodyPr>
           <a:lstStyle/>
           <a:p>
-            <a:pPr algn="r"/>
-            <a:r>
-              <a:rPr sz="1200" b="0">
-                <a:solidFill>
-                  <a:srgbClr val="555B66"/>
-                </a:solidFill>
-                <a:latin typeface="맑은 고딕"/>
-              </a:rPr>
-              <a:t>29</a:t>
+            <a:pPr algn="l"/>
+            <a:r>
+              <a:rPr sz="1800" b="1">
+                <a:solidFill>
+                  <a:srgbClr val="2AA7B8"/>
+                </a:solidFill>
+                <a:latin typeface="맑은 고딕"/>
+              </a:rPr>
+              <a:t>숨기지 않고 적는다</a:t>
             </a:r>
           </a:p>
         </p:txBody>
@@ -13550,8 +14773,8 @@
         </p:nvSpPr>
         <p:spPr>
           <a:xfrm>
-            <a:off x="640080" y="1371600"/>
-            <a:ext cx="10972800" cy="5029200"/>
+            <a:off x="11094415" y="6400800"/>
+            <a:ext cx="822960" cy="320040"/>
           </a:xfrm>
           <a:prstGeom prst="rect">
             <a:avLst/>
@@ -13559,6 +14782,41 @@
           <a:noFill/>
         </p:spPr>
         <p:txBody>
+          <a:bodyPr wrap="square" anchor="t" lIns="45720" rIns="45720">
+            <a:spAutoFit/>
+          </a:bodyPr>
+          <a:lstStyle/>
+          <a:p>
+            <a:pPr algn="r"/>
+            <a:r>
+              <a:rPr sz="1200" b="0">
+                <a:solidFill>
+                  <a:srgbClr val="555B66"/>
+                </a:solidFill>
+                <a:latin typeface="맑은 고딕"/>
+              </a:rPr>
+              <a:t>29</a:t>
+            </a:r>
+          </a:p>
+        </p:txBody>
+      </p:sp>
+      <p:sp>
+        <p:nvSpPr>
+          <p:cNvPr id="6" name="TextBox 5"/>
+          <p:cNvSpPr txBox="1"/>
+          <p:nvPr/>
+        </p:nvSpPr>
+        <p:spPr>
+          <a:xfrm>
+            <a:off x="640080" y="1783080"/>
+            <a:ext cx="10972800" cy="4572000"/>
+          </a:xfrm>
+          <a:prstGeom prst="rect">
+            <a:avLst/>
+          </a:prstGeom>
+          <a:noFill/>
+        </p:spPr>
+        <p:txBody>
           <a:bodyPr wrap="square" lIns="45720" rIns="45720">
             <a:spAutoFit/>
           </a:bodyPr>
@@ -13566,11 +14824,11 @@
           <a:p>
             <a:pPr>
               <a:spcAft>
-                <a:spcPts val="2000"/>
+                <a:spcPts val="1100"/>
               </a:spcAft>
             </a:pPr>
             <a:r>
-              <a:rPr sz="2200" b="1">
+              <a:rPr sz="1800" b="1">
                 <a:solidFill>
                   <a:srgbClr val="2AA7B8"/>
                 </a:solidFill>
@@ -13579,59 +14837,41 @@
               <a:t>• </a:t>
             </a:r>
             <a:r>
-              <a:rPr sz="2200" b="0">
-                <a:solidFill>
-                  <a:srgbClr val="222222"/>
-                </a:solidFill>
-                <a:latin typeface="맑은 고딕"/>
-              </a:rPr>
-              <a:t>6개 모델을 같은 조건으로 학습·평가했고 F1은 0.99 안팎이었다. 몇 개 못 찾은 것은 </a:t>
-            </a:r>
-            <a:r>
-              <a:rPr sz="2200" b="1">
-                <a:solidFill>
-                  <a:srgbClr val="222222"/>
-                </a:solidFill>
-                <a:latin typeface="맑은 고딕"/>
-              </a:rPr>
-              <a:t>공식 라벨의 박스 크기</a:t>
-            </a:r>
-            <a:r>
-              <a:rPr sz="2200" b="0">
-                <a:solidFill>
-                  <a:srgbClr val="222222"/>
-                </a:solidFill>
-                <a:latin typeface="맑은 고딕"/>
-              </a:rPr>
-              <a:t> 때문이었고 </a:t>
-            </a:r>
-            <a:r>
-              <a:rPr sz="2200" b="1">
-                <a:solidFill>
-                  <a:srgbClr val="222222"/>
-                </a:solidFill>
-                <a:latin typeface="맑은 고딕"/>
-              </a:rPr>
-              <a:t>중심 거리</a:t>
-            </a:r>
-            <a:r>
-              <a:rPr sz="2200" b="0">
-                <a:solidFill>
-                  <a:srgbClr val="222222"/>
-                </a:solidFill>
-                <a:latin typeface="맑은 고딕"/>
-              </a:rPr>
-              <a:t>로 재채점하면 거의 다 찾았다</a:t>
+              <a:rPr sz="1800" b="0">
+                <a:solidFill>
+                  <a:srgbClr val="222222"/>
+                </a:solidFill>
+                <a:latin typeface="맑은 고딕"/>
+              </a:rPr>
+              <a:t>합성 점과 가짜 정상은 </a:t>
+            </a:r>
+            <a:r>
+              <a:rPr sz="1800" b="1">
+                <a:solidFill>
+                  <a:srgbClr val="222222"/>
+                </a:solidFill>
+                <a:latin typeface="맑은 고딕"/>
+              </a:rPr>
+              <a:t>인위적인 이미지</a:t>
+            </a:r>
+            <a:r>
+              <a:rPr sz="1800" b="0">
+                <a:solidFill>
+                  <a:srgbClr val="222222"/>
+                </a:solidFill>
+                <a:latin typeface="맑은 고딕"/>
+              </a:rPr>
+              <a:t>다. 실제 현장 성능이 아니라 상대 비교와 취약점 탐색으로만 해석한다</a:t>
             </a:r>
           </a:p>
           <a:p>
             <a:pPr>
               <a:spcAft>
-                <a:spcPts val="2000"/>
+                <a:spcPts val="1100"/>
               </a:spcAft>
             </a:pPr>
             <a:r>
-              <a:rPr sz="2200" b="1">
+              <a:rPr sz="1800" b="1">
                 <a:solidFill>
                   <a:srgbClr val="2AA7B8"/>
                 </a:solidFill>
@@ -13640,32 +14880,41 @@
               <a:t>• </a:t>
             </a:r>
             <a:r>
-              <a:rPr sz="2200" b="0">
-                <a:solidFill>
-                  <a:srgbClr val="222222"/>
-                </a:solidFill>
-                <a:latin typeface="맑은 고딕"/>
-              </a:rPr>
-              <a:t>일반화·robust 평가로 진짜 차이가 드러났다: </a:t>
-            </a:r>
-            <a:r>
-              <a:rPr sz="2200" b="1">
-                <a:solidFill>
-                  <a:srgbClr val="222222"/>
-                </a:solidFill>
-                <a:latin typeface="맑은 고딕"/>
-              </a:rPr>
-              <a:t>옅은 결함, 노이즈 무늬 오경보, MobileNetV3의 위치 의존</a:t>
+              <a:rPr sz="1800" b="0">
+                <a:solidFill>
+                  <a:srgbClr val="222222"/>
+                </a:solidFill>
+                <a:latin typeface="맑은 고딕"/>
+              </a:rPr>
+              <a:t>강건성 시험은 </a:t>
+            </a:r>
+            <a:r>
+              <a:rPr sz="1800" b="1">
+                <a:solidFill>
+                  <a:srgbClr val="222222"/>
+                </a:solidFill>
+                <a:latin typeface="맑은 고딕"/>
+              </a:rPr>
+              <a:t>test 이미지</a:t>
+            </a:r>
+            <a:r>
+              <a:rPr sz="1800" b="0">
+                <a:solidFill>
+                  <a:srgbClr val="222222"/>
+                </a:solidFill>
+                <a:latin typeface="맑은 고딕"/>
+              </a:rPr>
+              <a:t>로 먼저 수행했다. 모델 선정에는 val 지표만 썼지만, 선정 근거로 쓰려면 val로 반복해야 한다</a:t>
             </a:r>
           </a:p>
           <a:p>
             <a:pPr>
               <a:spcAft>
-                <a:spcPts val="2000"/>
+                <a:spcPts val="1100"/>
               </a:spcAft>
             </a:pPr>
             <a:r>
-              <a:rPr sz="2200" b="1">
+              <a:rPr sz="1800" b="1">
                 <a:solidFill>
                   <a:srgbClr val="2AA7B8"/>
                 </a:solidFill>
@@ -13674,41 +14923,23 @@
               <a:t>• </a:t>
             </a:r>
             <a:r>
-              <a:rPr sz="2200" b="0">
-                <a:solidFill>
-                  <a:srgbClr val="222222"/>
-                </a:solidFill>
-                <a:latin typeface="맑은 고딕"/>
-              </a:rPr>
-              <a:t>종합해서 </a:t>
-            </a:r>
-            <a:r>
-              <a:rPr sz="2200" b="1">
-                <a:solidFill>
-                  <a:srgbClr val="222222"/>
-                </a:solidFill>
-                <a:latin typeface="맑은 고딕"/>
-              </a:rPr>
-              <a:t>D-FINE-N</a:t>
-            </a:r>
-            <a:r>
-              <a:rPr sz="2200" b="0">
-                <a:solidFill>
-                  <a:srgbClr val="222222"/>
-                </a:solidFill>
-                <a:latin typeface="맑은 고딕"/>
-              </a:rPr>
-              <a:t>을 베스트 모델로 선정: val 동률 선두, 미탐지 강건성 최상, 작다. 약점(노이즈 오경보)은 임계값·재검사 구간과 대안 모델로 관리한다</a:t>
+              <a:rPr sz="1800" b="0">
+                <a:solidFill>
+                  <a:srgbClr val="222222"/>
+                </a:solidFill>
+                <a:latin typeface="맑은 고딕"/>
+              </a:rPr>
+              <a:t>'미탐지 우선'이라는 우선순위는 결과를 본 뒤 정했다. 오경보 우선이면 선정이 바뀐다</a:t>
             </a:r>
           </a:p>
           <a:p>
             <a:pPr>
               <a:spcAft>
-                <a:spcPts val="2000"/>
+                <a:spcPts val="1100"/>
               </a:spcAft>
             </a:pPr>
             <a:r>
-              <a:rPr sz="2200" b="1">
+              <a:rPr sz="1800" b="1">
                 <a:solidFill>
                   <a:srgbClr val="2AA7B8"/>
                 </a:solidFill>
@@ -13717,31 +14948,106 @@
               <a:t>• </a:t>
             </a:r>
             <a:r>
-              <a:rPr sz="2200" b="0">
-                <a:solidFill>
-                  <a:srgbClr val="222222"/>
-                </a:solidFill>
-                <a:latin typeface="맑은 고딕"/>
-              </a:rPr>
-              <a:t>공유 가능한 합성 평가 데이터와 검증 코드로 </a:t>
-            </a:r>
-            <a:r>
-              <a:rPr sz="2200" b="1">
-                <a:solidFill>
-                  <a:srgbClr val="222222"/>
-                </a:solidFill>
-                <a:latin typeface="맑은 고딕"/>
-              </a:rPr>
-              <a:t>팀 모두가 같은 시험을 재현</a:t>
-            </a:r>
-            <a:r>
-              <a:rPr sz="2200" b="0">
-                <a:solidFill>
-                  <a:srgbClr val="222222"/>
-                </a:solidFill>
-                <a:latin typeface="맑은 고딕"/>
-              </a:rPr>
-              <a:t>한다</a:t>
+              <a:rPr sz="1800" b="0">
+                <a:solidFill>
+                  <a:srgbClr val="222222"/>
+                </a:solidFill>
+                <a:latin typeface="맑은 고딕"/>
+              </a:rPr>
+              <a:t>표시(색 사각형) 제거의 </a:t>
+            </a:r>
+            <a:r>
+              <a:rPr sz="1800" b="1">
+                <a:solidFill>
+                  <a:srgbClr val="222222"/>
+                </a:solidFill>
+                <a:latin typeface="맑은 고딕"/>
+              </a:rPr>
+              <a:t>흔적</a:t>
+            </a:r>
+            <a:r>
+              <a:rPr sz="1800" b="0">
+                <a:solidFill>
+                  <a:srgbClr val="222222"/>
+                </a:solidFill>
+                <a:latin typeface="맑은 고딕"/>
+              </a:rPr>
+              <a:t>이 단서가 되는지는 검증하지 못했다</a:t>
+            </a:r>
+          </a:p>
+          <a:p>
+            <a:pPr>
+              <a:spcAft>
+                <a:spcPts val="1100"/>
+              </a:spcAft>
+            </a:pPr>
+            <a:r>
+              <a:rPr sz="1800" b="1">
+                <a:solidFill>
+                  <a:srgbClr val="2AA7B8"/>
+                </a:solidFill>
+                <a:latin typeface="맑은 고딕"/>
+              </a:rPr>
+              <a:t>• </a:t>
+            </a:r>
+            <a:r>
+              <a:rPr sz="1800" b="0">
+                <a:solidFill>
+                  <a:srgbClr val="222222"/>
+                </a:solidFill>
+                <a:latin typeface="맑은 고딕"/>
+              </a:rPr>
+              <a:t>학습 시드가 하나이고, 팀원 모델은 학습 조건이 우리와 다르다(임계값은 우리 규칙으로 재선정)</a:t>
+            </a:r>
+          </a:p>
+          <a:p>
+            <a:pPr>
+              <a:spcAft>
+                <a:spcPts val="1100"/>
+              </a:spcAft>
+            </a:pPr>
+            <a:r>
+              <a:rPr sz="1800" b="1">
+                <a:solidFill>
+                  <a:srgbClr val="2AA7B8"/>
+                </a:solidFill>
+                <a:latin typeface="맑은 고딕"/>
+              </a:rPr>
+              <a:t>• </a:t>
+            </a:r>
+            <a:r>
+              <a:rPr sz="1800" b="0">
+                <a:solidFill>
+                  <a:srgbClr val="222222"/>
+                </a:solidFill>
+                <a:latin typeface="맑은 고딕"/>
+              </a:rPr>
+              <a:t>속도는 노트북에서 측정했고 실행마다 변동이 크다. 현장 장비 사양과 재검사 비용은 알지 못한다</a:t>
+            </a:r>
+          </a:p>
+          <a:p>
+            <a:pPr>
+              <a:spcAft>
+                <a:spcPts val="1100"/>
+              </a:spcAft>
+            </a:pPr>
+            <a:r>
+              <a:rPr sz="1800" b="1">
+                <a:solidFill>
+                  <a:srgbClr val="2AA7B8"/>
+                </a:solidFill>
+                <a:latin typeface="맑은 고딕"/>
+              </a:rPr>
+              <a:t>• </a:t>
+            </a:r>
+            <a:r>
+              <a:rPr sz="1800" b="0">
+                <a:solidFill>
+                  <a:srgbClr val="222222"/>
+                </a:solidFill>
+                <a:latin typeface="맑은 고딕"/>
+              </a:rPr>
+              <a:t>향후: 흔적 검증(원본 BMP 2x2 실험), 실제 정상 제품 이미지 확보, val 반복, 합성 점 대조군(s=0)</a:t>
             </a:r>
           </a:p>
         </p:txBody>
@@ -14091,6 +15397,341 @@
                 <a:latin typeface="맑은 고딕"/>
               </a:rPr>
               <a:t>코드는 이총의 브랜치(scripts/preprocess/)에 있고 main 병합이 필요하다</a:t>
+            </a:r>
+          </a:p>
+        </p:txBody>
+      </p:sp>
+    </p:spTree>
+  </p:cSld>
+  <p:clrMapOvr>
+    <a:masterClrMapping/>
+  </p:clrMapOvr>
+</p:sld>
+</file>
+
+<file path=ppt/slides/slide30.xml><?xml version="1.0" encoding="utf-8"?>
+<p:sld xmlns:a="http://schemas.openxmlformats.org/drawingml/2006/main" xmlns:p="http://schemas.openxmlformats.org/presentationml/2006/main" xmlns:r="http://schemas.openxmlformats.org/officeDocument/2006/relationships">
+  <p:cSld>
+    <p:spTree>
+      <p:nvGrpSpPr>
+        <p:cNvPr id="1" name=""/>
+        <p:cNvGrpSpPr/>
+        <p:nvPr/>
+      </p:nvGrpSpPr>
+      <p:grpSpPr/>
+      <p:sp>
+        <p:nvSpPr>
+          <p:cNvPr id="2" name="Rectangle 1"/>
+          <p:cNvSpPr/>
+          <p:nvPr/>
+        </p:nvSpPr>
+        <p:spPr>
+          <a:xfrm>
+            <a:off x="0" y="0"/>
+            <a:ext cx="164592" cy="6858000"/>
+          </a:xfrm>
+          <a:prstGeom prst="rect">
+            <a:avLst/>
+          </a:prstGeom>
+          <a:solidFill>
+            <a:srgbClr val="1F3A5F"/>
+          </a:solidFill>
+          <a:ln>
+            <a:noFill/>
+          </a:ln>
+        </p:spPr>
+        <p:style>
+          <a:lnRef idx="1">
+            <a:schemeClr val="accent1"/>
+          </a:lnRef>
+          <a:fillRef idx="3">
+            <a:schemeClr val="accent1"/>
+          </a:fillRef>
+          <a:effectRef idx="2">
+            <a:schemeClr val="accent1"/>
+          </a:effectRef>
+          <a:fontRef idx="minor">
+            <a:schemeClr val="lt1"/>
+          </a:fontRef>
+        </p:style>
+        <p:txBody>
+          <a:bodyPr rtlCol="0" anchor="ctr"/>
+          <a:lstStyle/>
+          <a:p>
+            <a:pPr algn="ctr"/>
+          </a:p>
+        </p:txBody>
+      </p:sp>
+      <p:sp>
+        <p:nvSpPr>
+          <p:cNvPr id="3" name="TextBox 2"/>
+          <p:cNvSpPr txBox="1"/>
+          <p:nvPr/>
+        </p:nvSpPr>
+        <p:spPr>
+          <a:xfrm>
+            <a:off x="502920" y="274320"/>
+            <a:ext cx="11185855" cy="731520"/>
+          </a:xfrm>
+          <a:prstGeom prst="rect">
+            <a:avLst/>
+          </a:prstGeom>
+          <a:noFill/>
+        </p:spPr>
+        <p:txBody>
+          <a:bodyPr wrap="square" anchor="ctr" lIns="45720" rIns="45720">
+            <a:spAutoFit/>
+          </a:bodyPr>
+          <a:lstStyle/>
+          <a:p>
+            <a:pPr algn="l"/>
+            <a:r>
+              <a:rPr sz="2800" b="1">
+                <a:solidFill>
+                  <a:srgbClr val="1F3A5F"/>
+                </a:solidFill>
+                <a:latin typeface="맑은 고딕"/>
+              </a:rPr>
+              <a:t>결론</a:t>
+            </a:r>
+          </a:p>
+        </p:txBody>
+      </p:sp>
+      <p:sp>
+        <p:nvSpPr>
+          <p:cNvPr id="4" name="TextBox 3"/>
+          <p:cNvSpPr txBox="1"/>
+          <p:nvPr/>
+        </p:nvSpPr>
+        <p:spPr>
+          <a:xfrm>
+            <a:off x="11094415" y="6400800"/>
+            <a:ext cx="822960" cy="320040"/>
+          </a:xfrm>
+          <a:prstGeom prst="rect">
+            <a:avLst/>
+          </a:prstGeom>
+          <a:noFill/>
+        </p:spPr>
+        <p:txBody>
+          <a:bodyPr wrap="square" anchor="t" lIns="45720" rIns="45720">
+            <a:spAutoFit/>
+          </a:bodyPr>
+          <a:lstStyle/>
+          <a:p>
+            <a:pPr algn="r"/>
+            <a:r>
+              <a:rPr sz="1200" b="0">
+                <a:solidFill>
+                  <a:srgbClr val="555B66"/>
+                </a:solidFill>
+                <a:latin typeface="맑은 고딕"/>
+              </a:rPr>
+              <a:t>30</a:t>
+            </a:r>
+          </a:p>
+        </p:txBody>
+      </p:sp>
+      <p:sp>
+        <p:nvSpPr>
+          <p:cNvPr id="5" name="TextBox 4"/>
+          <p:cNvSpPr txBox="1"/>
+          <p:nvPr/>
+        </p:nvSpPr>
+        <p:spPr>
+          <a:xfrm>
+            <a:off x="640080" y="1371600"/>
+            <a:ext cx="10972800" cy="5029200"/>
+          </a:xfrm>
+          <a:prstGeom prst="rect">
+            <a:avLst/>
+          </a:prstGeom>
+          <a:noFill/>
+        </p:spPr>
+        <p:txBody>
+          <a:bodyPr wrap="square" lIns="45720" rIns="45720">
+            <a:spAutoFit/>
+          </a:bodyPr>
+          <a:lstStyle/>
+          <a:p>
+            <a:pPr>
+              <a:spcAft>
+                <a:spcPts val="2000"/>
+              </a:spcAft>
+            </a:pPr>
+            <a:r>
+              <a:rPr sz="2200" b="1">
+                <a:solidFill>
+                  <a:srgbClr val="2AA7B8"/>
+                </a:solidFill>
+                <a:latin typeface="맑은 고딕"/>
+              </a:rPr>
+              <a:t>• </a:t>
+            </a:r>
+            <a:r>
+              <a:rPr sz="2200" b="0">
+                <a:solidFill>
+                  <a:srgbClr val="222222"/>
+                </a:solidFill>
+                <a:latin typeface="맑은 고딕"/>
+              </a:rPr>
+              <a:t>6개 모델을 같은 조건으로 학습·평가했고 F1은 0.99 안팎이었다. 몇 개 못 찾은 것은 </a:t>
+            </a:r>
+            <a:r>
+              <a:rPr sz="2200" b="1">
+                <a:solidFill>
+                  <a:srgbClr val="222222"/>
+                </a:solidFill>
+                <a:latin typeface="맑은 고딕"/>
+              </a:rPr>
+              <a:t>공식 라벨의 박스 크기</a:t>
+            </a:r>
+            <a:r>
+              <a:rPr sz="2200" b="0">
+                <a:solidFill>
+                  <a:srgbClr val="222222"/>
+                </a:solidFill>
+                <a:latin typeface="맑은 고딕"/>
+              </a:rPr>
+              <a:t> 때문이었고 </a:t>
+            </a:r>
+            <a:r>
+              <a:rPr sz="2200" b="1">
+                <a:solidFill>
+                  <a:srgbClr val="222222"/>
+                </a:solidFill>
+                <a:latin typeface="맑은 고딕"/>
+              </a:rPr>
+              <a:t>중심 거리</a:t>
+            </a:r>
+            <a:r>
+              <a:rPr sz="2200" b="0">
+                <a:solidFill>
+                  <a:srgbClr val="222222"/>
+                </a:solidFill>
+                <a:latin typeface="맑은 고딕"/>
+              </a:rPr>
+              <a:t>로 재채점하면 거의 다 찾았다</a:t>
+            </a:r>
+          </a:p>
+          <a:p>
+            <a:pPr>
+              <a:spcAft>
+                <a:spcPts val="2000"/>
+              </a:spcAft>
+            </a:pPr>
+            <a:r>
+              <a:rPr sz="2200" b="1">
+                <a:solidFill>
+                  <a:srgbClr val="2AA7B8"/>
+                </a:solidFill>
+                <a:latin typeface="맑은 고딕"/>
+              </a:rPr>
+              <a:t>• </a:t>
+            </a:r>
+            <a:r>
+              <a:rPr sz="2200" b="0">
+                <a:solidFill>
+                  <a:srgbClr val="222222"/>
+                </a:solidFill>
+                <a:latin typeface="맑은 고딕"/>
+              </a:rPr>
+              <a:t>일반화·robust 평가로 진짜 차이가 드러났다: </a:t>
+            </a:r>
+            <a:r>
+              <a:rPr sz="2200" b="1">
+                <a:solidFill>
+                  <a:srgbClr val="222222"/>
+                </a:solidFill>
+                <a:latin typeface="맑은 고딕"/>
+              </a:rPr>
+              <a:t>옅은 결함, 노이즈 무늬 오경보, MobileNetV3의 위치 의존</a:t>
+            </a:r>
+          </a:p>
+          <a:p>
+            <a:pPr>
+              <a:spcAft>
+                <a:spcPts val="2000"/>
+              </a:spcAft>
+            </a:pPr>
+            <a:r>
+              <a:rPr sz="2200" b="1">
+                <a:solidFill>
+                  <a:srgbClr val="2AA7B8"/>
+                </a:solidFill>
+                <a:latin typeface="맑은 고딕"/>
+              </a:rPr>
+              <a:t>• </a:t>
+            </a:r>
+            <a:r>
+              <a:rPr sz="2200" b="0">
+                <a:solidFill>
+                  <a:srgbClr val="222222"/>
+                </a:solidFill>
+                <a:latin typeface="맑은 고딕"/>
+              </a:rPr>
+              <a:t>종합해서 </a:t>
+            </a:r>
+            <a:r>
+              <a:rPr sz="2200" b="1">
+                <a:solidFill>
+                  <a:srgbClr val="222222"/>
+                </a:solidFill>
+                <a:latin typeface="맑은 고딕"/>
+              </a:rPr>
+              <a:t>D-FINE-N</a:t>
+            </a:r>
+            <a:r>
+              <a:rPr sz="2200" b="0">
+                <a:solidFill>
+                  <a:srgbClr val="222222"/>
+                </a:solidFill>
+                <a:latin typeface="맑은 고딕"/>
+              </a:rPr>
+              <a:t>을 베스트 모델로 선정: val 동률 선두, 미탐지 강건성 최상, 작다. 약점(노이즈 오경보)은 임계값·재검사 구간과 대안 모델로 관리한다</a:t>
+            </a:r>
+          </a:p>
+          <a:p>
+            <a:pPr>
+              <a:spcAft>
+                <a:spcPts val="2000"/>
+              </a:spcAft>
+            </a:pPr>
+            <a:r>
+              <a:rPr sz="2200" b="1">
+                <a:solidFill>
+                  <a:srgbClr val="2AA7B8"/>
+                </a:solidFill>
+                <a:latin typeface="맑은 고딕"/>
+              </a:rPr>
+              <a:t>• </a:t>
+            </a:r>
+            <a:r>
+              <a:rPr sz="2200" b="0">
+                <a:solidFill>
+                  <a:srgbClr val="222222"/>
+                </a:solidFill>
+                <a:latin typeface="맑은 고딕"/>
+              </a:rPr>
+              <a:t>공유 가능한 합성 평가 데이터와 검증 코드로 </a:t>
+            </a:r>
+            <a:r>
+              <a:rPr sz="2200" b="1">
+                <a:solidFill>
+                  <a:srgbClr val="222222"/>
+                </a:solidFill>
+                <a:latin typeface="맑은 고딕"/>
+              </a:rPr>
+              <a:t>팀 모두가 같은 시험을 재현</a:t>
+            </a:r>
+            <a:r>
+              <a:rPr sz="2200" b="0">
+                <a:solidFill>
+                  <a:srgbClr val="222222"/>
+                </a:solidFill>
+                <a:latin typeface="맑은 고딕"/>
+              </a:rPr>
+              <a:t>한다</a:t>
             </a:r>
           </a:p>
         </p:txBody>

--- a/ppt/presentation.pptx
+++ b/ppt/presentation.pptx
@@ -35,6 +35,7 @@
     <p:sldId id="283" r:id="rId34"/>
     <p:sldId id="284" r:id="rId35"/>
     <p:sldId id="285" r:id="rId36"/>
+    <p:sldId id="286" r:id="rId37"/>
   </p:sldIdLst>
   <p:sldSz cx="12191695" cy="6858000" type="screen4x3"/>
   <p:notesSz cx="6858000" cy="9144000"/>
@@ -6756,9 +6757,44 @@
           </a:p>
         </p:txBody>
       </p:sp>
+      <p:sp>
+        <p:nvSpPr>
+          <p:cNvPr id="6" name="TextBox 5"/>
+          <p:cNvSpPr txBox="1"/>
+          <p:nvPr/>
+        </p:nvSpPr>
+        <p:spPr>
+          <a:xfrm>
+            <a:off x="502920" y="6355080"/>
+            <a:ext cx="10180015" cy="365760"/>
+          </a:xfrm>
+          <a:prstGeom prst="rect">
+            <a:avLst/>
+          </a:prstGeom>
+          <a:noFill/>
+        </p:spPr>
+        <p:txBody>
+          <a:bodyPr wrap="square" anchor="t" lIns="45720" rIns="45720">
+            <a:spAutoFit/>
+          </a:bodyPr>
+          <a:lstStyle/>
+          <a:p>
+            <a:pPr algn="l"/>
+            <a:r>
+              <a:rPr sz="1100" b="0">
+                <a:solidFill>
+                  <a:srgbClr val="555B66"/>
+                </a:solidFill>
+                <a:latin typeface="맑은 고딕"/>
+              </a:rPr>
+              <a:t>R마다 val에서 임계값을 다시 정했다(평가 v2). 6개 모델 전부, test 정답 663개.</a:t>
+            </a:r>
+          </a:p>
+        </p:txBody>
+      </p:sp>
       <p:pic>
         <p:nvPicPr>
-          <p:cNvPr id="6" name="Picture 5" descr="fig5d_fn_by_model.png"/>
+          <p:cNvPr id="7" name="Picture 6" descr="fig7a_v2_sweep.png"/>
           <p:cNvPicPr>
             <a:picLocks noChangeAspect="1"/>
           </p:cNvPicPr>
@@ -6772,38 +6808,14 @@
         </p:blipFill>
         <p:spPr>
           <a:xfrm>
-            <a:off x="274320" y="1864069"/>
-            <a:ext cx="6309360" cy="2764100"/>
+            <a:off x="1370967" y="1554480"/>
+            <a:ext cx="9419584" cy="3429000"/>
           </a:xfrm>
           <a:prstGeom prst="rect">
             <a:avLst/>
           </a:prstGeom>
         </p:spPr>
       </p:pic>
-      <p:pic>
-        <p:nvPicPr>
-          <p:cNvPr id="7" name="Picture 6" descr="fig2b_center_distance.png"/>
-          <p:cNvPicPr>
-            <a:picLocks noChangeAspect="1"/>
-          </p:cNvPicPr>
-          <p:nvPr/>
-        </p:nvPicPr>
-        <p:blipFill>
-          <a:blip r:embed="rId3"/>
-          <a:stretch>
-            <a:fillRect/>
-          </a:stretch>
-        </p:blipFill>
-        <p:spPr>
-          <a:xfrm>
-            <a:off x="6583680" y="2055869"/>
-            <a:ext cx="5303520" cy="2380501"/>
-          </a:xfrm>
-          <a:prstGeom prst="rect">
-            <a:avLst/>
-          </a:prstGeom>
-        </p:spPr>
-      </p:pic>
       <p:sp>
         <p:nvSpPr>
           <p:cNvPr id="8" name="TextBox 7"/>
@@ -6812,8 +6824,8 @@
         </p:nvSpPr>
         <p:spPr>
           <a:xfrm>
-            <a:off x="548640" y="4983480"/>
-            <a:ext cx="11155680" cy="1737360"/>
+            <a:off x="548640" y="5029200"/>
+            <a:ext cx="11155680" cy="1645920"/>
           </a:xfrm>
           <a:prstGeom prst="rect">
             <a:avLst/>
@@ -6883,7 +6895,25 @@
                 </a:solidFill>
                 <a:latin typeface="맑은 고딕"/>
               </a:rPr>
-              <a:t>. R ≥ 3px에서 6개 모델의 F1은 </a:t>
+              <a:t>. R = 3px에서 F1은 </a:t>
+            </a:r>
+            <a:r>
+              <a:rPr sz="1400" b="1">
+                <a:solidFill>
+                  <a:srgbClr val="222222"/>
+                </a:solidFill>
+                <a:latin typeface="맑은 고딕"/>
+              </a:rPr>
+              <a:t>0.997~1.000</a:t>
+            </a:r>
+            <a:r>
+              <a:rPr sz="1400" b="0">
+                <a:solidFill>
+                  <a:srgbClr val="222222"/>
+                </a:solidFill>
+                <a:latin typeface="맑은 고딕"/>
+              </a:rPr>
+              <a:t>, R = 4~5px에서 </a:t>
             </a:r>
             <a:r>
               <a:rPr sz="1400" b="1">
@@ -6926,7 +6956,7 @@
                 </a:solidFill>
                 <a:latin typeface="맑은 고딕"/>
               </a:rPr>
-              <a:t>IoU 0.5는 사실상 "중심이 2px 이내인가"를 재고 있었다(2px로 조이면 8~23개). 남는 차이는 위치 정밀도: mAP50-95는 D-FINE-N 0.659 &gt; RT-DETR-l 0.639 &gt; YOLO26n 0.633 &gt; R50 0.611 &gt; MobileNetV3 0.559 ≈ YOLOv3-tiny 0.558 (공식 라벨만 보면 0.335~0.365로 좁아짐)</a:t>
+              <a:t>IoU 0.5는 사실상 "중심이 2px 이내인가"를 재고 있었다(R = 2px에서 8~23개). R = 1px에서만 차이가 크다(YOLO26n 0.814, D-FINE-N 0.805, RT-DETR-l 0.804 &gt; R50 0.771 &gt; YOLOv3-tiny 0.719 &gt; MobileNetV3 0.682)</a:t>
             </a:r>
           </a:p>
         </p:txBody>
@@ -7022,7 +7052,7 @@
                 </a:solidFill>
                 <a:latin typeface="맑은 고딕"/>
               </a:rPr>
-              <a:t>② 일반화와 robust 평가</a:t>
+              <a:t>중심 거리 R별 결과: 6개 모델 전부</a:t>
             </a:r>
           </a:p>
         </p:txBody>
@@ -7057,7 +7087,7 @@
                 </a:solidFill>
                 <a:latin typeface="맑은 고딕"/>
               </a:rPr>
-              <a:t>실제 데이터에서는 다 찾으니, 조건을 인위적으로 바꿔 모델을 시험한다</a:t>
+              <a:t>F1 (못 찾은 정답 수). R마다 val에서 임계값을 다시 정해 test에 한 번 적용</a:t>
             </a:r>
           </a:p>
         </p:txBody>
@@ -7097,9 +7127,44 @@
           </a:p>
         </p:txBody>
       </p:sp>
+      <p:sp>
+        <p:nvSpPr>
+          <p:cNvPr id="6" name="TextBox 5"/>
+          <p:cNvSpPr txBox="1"/>
+          <p:nvPr/>
+        </p:nvSpPr>
+        <p:spPr>
+          <a:xfrm>
+            <a:off x="502920" y="6355080"/>
+            <a:ext cx="10180015" cy="365760"/>
+          </a:xfrm>
+          <a:prstGeom prst="rect">
+            <a:avLst/>
+          </a:prstGeom>
+          <a:noFill/>
+        </p:spPr>
+        <p:txBody>
+          <a:bodyPr wrap="square" anchor="t" lIns="45720" rIns="45720">
+            <a:spAutoFit/>
+          </a:bodyPr>
+          <a:lstStyle/>
+          <a:p>
+            <a:pPr algn="l"/>
+            <a:r>
+              <a:rPr sz="1100" b="0">
+                <a:solidFill>
+                  <a:srgbClr val="555B66"/>
+                </a:solidFill>
+                <a:latin typeface="맑은 고딕"/>
+              </a:rPr>
+              <a:t>평가 v2. R=1~3의 기존 3개 모델 값은 docs/experiments.md의 이전 표와 모두 같다(재현 확인). 공식 라벨만 보면 값이 더 낮다(docs/experiments.md).</a:t>
+            </a:r>
+          </a:p>
+        </p:txBody>
+      </p:sp>
       <p:graphicFrame>
         <p:nvGraphicFramePr>
-          <p:cNvPr id="6" name="Table 5"/>
+          <p:cNvPr id="7" name="Table 6"/>
           <p:cNvGraphicFramePr>
             <a:graphicFrameLocks noGrp="1"/>
           </p:cNvGraphicFramePr>
@@ -7107,7 +7172,7 @@
         </p:nvGraphicFramePr>
         <p:xfrm>
           <a:off x="548640" y="1783080"/>
-          <a:ext cx="11064239" cy="3657600"/>
+          <a:ext cx="11064235" cy="3968496"/>
         </p:xfrm>
         <a:graphic>
           <a:graphicData uri="http://schemas.openxmlformats.org/drawingml/2006/table">
@@ -7116,11 +7181,15 @@
                 <a:tableStyleId>{5C22544A-7EE6-4342-B048-85BDC9FD1C3A}</a:tableStyleId>
               </a:tblPr>
               <a:tblGrid>
-                <a:gridCol w="1645920"/>
-                <a:gridCol w="4754880"/>
-                <a:gridCol w="4663439"/>
+                <a:gridCol w="2479915"/>
+                <a:gridCol w="1430720"/>
+                <a:gridCol w="1430720"/>
+                <a:gridCol w="1430720"/>
+                <a:gridCol w="1430720"/>
+                <a:gridCol w="1430720"/>
+                <a:gridCol w="1430720"/>
               </a:tblGrid>
-              <a:tr h="731520">
+              <a:tr h="566928">
                 <a:tc>
                   <a:txBody>
                     <a:bodyPr/>
@@ -7128,13 +7197,13 @@
                     <a:p>
                       <a:pPr algn="l"/>
                       <a:r>
-                        <a:rPr sz="1500" b="1">
+                        <a:rPr sz="1600" b="1">
                           <a:solidFill>
                             <a:srgbClr val="FFFFFF"/>
                           </a:solidFill>
                           <a:latin typeface="맑은 고딕"/>
                         </a:rPr>
-                        <a:t>시험</a:t>
+                        <a:t>모델 / R (px)</a:t>
                       </a:r>
                     </a:p>
                   </a:txBody>
@@ -7151,13 +7220,13 @@
                     <a:p>
                       <a:pPr algn="ctr"/>
                       <a:r>
-                        <a:rPr sz="1500" b="1">
+                        <a:rPr sz="1600" b="1">
                           <a:solidFill>
                             <a:srgbClr val="FFFFFF"/>
                           </a:solidFill>
                           <a:latin typeface="맑은 고딕"/>
                         </a:rPr>
-                        <a:t>묻는 것</a:t>
+                        <a:t>1</a:t>
                       </a:r>
                     </a:p>
                   </a:txBody>
@@ -7174,13 +7243,13 @@
                     <a:p>
                       <a:pPr algn="ctr"/>
                       <a:r>
-                        <a:rPr sz="1500" b="1">
+                        <a:rPr sz="1600" b="1">
                           <a:solidFill>
                             <a:srgbClr val="FFFFFF"/>
                           </a:solidFill>
                           <a:latin typeface="맑은 고딕"/>
                         </a:rPr>
-                        <a:t>방법</a:t>
+                        <a:t>1.5</a:t>
                       </a:r>
                     </a:p>
                   </a:txBody>
@@ -7190,8 +7259,100 @@
                     </a:solidFill>
                   </a:tcPr>
                 </a:tc>
+                <a:tc>
+                  <a:txBody>
+                    <a:bodyPr/>
+                    <a:lstStyle/>
+                    <a:p>
+                      <a:pPr algn="ctr"/>
+                      <a:r>
+                        <a:rPr sz="1600" b="1">
+                          <a:solidFill>
+                            <a:srgbClr val="FFFFFF"/>
+                          </a:solidFill>
+                          <a:latin typeface="맑은 고딕"/>
+                        </a:rPr>
+                        <a:t>2</a:t>
+                      </a:r>
+                    </a:p>
+                  </a:txBody>
+                  <a:tcPr anchor="ctr" marL="54864" marR="54864">
+                    <a:solidFill>
+                      <a:srgbClr val="1F3A5F"/>
+                    </a:solidFill>
+                  </a:tcPr>
+                </a:tc>
+                <a:tc>
+                  <a:txBody>
+                    <a:bodyPr/>
+                    <a:lstStyle/>
+                    <a:p>
+                      <a:pPr algn="ctr"/>
+                      <a:r>
+                        <a:rPr sz="1600" b="1">
+                          <a:solidFill>
+                            <a:srgbClr val="FFFFFF"/>
+                          </a:solidFill>
+                          <a:latin typeface="맑은 고딕"/>
+                        </a:rPr>
+                        <a:t>3</a:t>
+                      </a:r>
+                    </a:p>
+                  </a:txBody>
+                  <a:tcPr anchor="ctr" marL="54864" marR="54864">
+                    <a:solidFill>
+                      <a:srgbClr val="1F3A5F"/>
+                    </a:solidFill>
+                  </a:tcPr>
+                </a:tc>
+                <a:tc>
+                  <a:txBody>
+                    <a:bodyPr/>
+                    <a:lstStyle/>
+                    <a:p>
+                      <a:pPr algn="ctr"/>
+                      <a:r>
+                        <a:rPr sz="1600" b="1">
+                          <a:solidFill>
+                            <a:srgbClr val="FFFFFF"/>
+                          </a:solidFill>
+                          <a:latin typeface="맑은 고딕"/>
+                        </a:rPr>
+                        <a:t>4</a:t>
+                      </a:r>
+                    </a:p>
+                  </a:txBody>
+                  <a:tcPr anchor="ctr" marL="54864" marR="54864">
+                    <a:solidFill>
+                      <a:srgbClr val="1F3A5F"/>
+                    </a:solidFill>
+                  </a:tcPr>
+                </a:tc>
+                <a:tc>
+                  <a:txBody>
+                    <a:bodyPr/>
+                    <a:lstStyle/>
+                    <a:p>
+                      <a:pPr algn="ctr"/>
+                      <a:r>
+                        <a:rPr sz="1600" b="1">
+                          <a:solidFill>
+                            <a:srgbClr val="FFFFFF"/>
+                          </a:solidFill>
+                          <a:latin typeface="맑은 고딕"/>
+                        </a:rPr>
+                        <a:t>5</a:t>
+                      </a:r>
+                    </a:p>
+                  </a:txBody>
+                  <a:tcPr anchor="ctr" marL="54864" marR="54864">
+                    <a:solidFill>
+                      <a:srgbClr val="1F3A5F"/>
+                    </a:solidFill>
+                  </a:tcPr>
+                </a:tc>
               </a:tr>
-              <a:tr h="731520">
+              <a:tr h="566928">
                 <a:tc>
                   <a:txBody>
                     <a:bodyPr/>
@@ -7199,13 +7360,13 @@
                     <a:p>
                       <a:pPr algn="l"/>
                       <a:r>
-                        <a:rPr sz="1500" b="0">
-                          <a:solidFill>
-                            <a:srgbClr val="222222"/>
-                          </a:solidFill>
-                          <a:latin typeface="맑은 고딕"/>
-                        </a:rPr>
-                        <a:t>점 제거</a:t>
+                        <a:rPr sz="1600" b="0">
+                          <a:solidFill>
+                            <a:srgbClr val="222222"/>
+                          </a:solidFill>
+                          <a:latin typeface="맑은 고딕"/>
+                        </a:rPr>
+                        <a:t>R50-FPN</a:t>
                       </a:r>
                     </a:p>
                   </a:txBody>
@@ -7222,13 +7383,13 @@
                     <a:p>
                       <a:pPr algn="ctr"/>
                       <a:r>
-                        <a:rPr sz="1500" b="0">
-                          <a:solidFill>
-                            <a:srgbClr val="222222"/>
-                          </a:solidFill>
-                          <a:latin typeface="맑은 고딕"/>
-                        </a:rPr>
-                        <a:t>모델이 결함의 점 자체를 보는가, 위치나 주변만 보는가</a:t>
+                        <a:rPr sz="1600" b="0">
+                          <a:solidFill>
+                            <a:srgbClr val="222222"/>
+                          </a:solidFill>
+                          <a:latin typeface="맑은 고딕"/>
+                        </a:rPr>
+                        <a:t>0.771  (152)</a:t>
                       </a:r>
                     </a:p>
                   </a:txBody>
@@ -7245,13 +7406,13 @@
                     <a:p>
                       <a:pPr algn="ctr"/>
                       <a:r>
-                        <a:rPr sz="1500" b="0">
-                          <a:solidFill>
-                            <a:srgbClr val="222222"/>
-                          </a:solidFill>
-                          <a:latin typeface="맑은 고딕"/>
-                        </a:rPr>
-                        <a:t>정답의 점을 보간으로 지운 이미지에 다시 적용</a:t>
+                        <a:rPr sz="1600" b="0">
+                          <a:solidFill>
+                            <a:srgbClr val="222222"/>
+                          </a:solidFill>
+                          <a:latin typeface="맑은 고딕"/>
+                        </a:rPr>
+                        <a:t>0.953  (31)</a:t>
                       </a:r>
                     </a:p>
                   </a:txBody>
@@ -7261,8 +7422,100 @@
                     </a:solidFill>
                   </a:tcPr>
                 </a:tc>
+                <a:tc>
+                  <a:txBody>
+                    <a:bodyPr/>
+                    <a:lstStyle/>
+                    <a:p>
+                      <a:pPr algn="ctr"/>
+                      <a:r>
+                        <a:rPr sz="1600" b="0">
+                          <a:solidFill>
+                            <a:srgbClr val="222222"/>
+                          </a:solidFill>
+                          <a:latin typeface="맑은 고딕"/>
+                        </a:rPr>
+                        <a:t>0.988  (8)</a:t>
+                      </a:r>
+                    </a:p>
+                  </a:txBody>
+                  <a:tcPr anchor="ctr" marL="54864" marR="54864">
+                    <a:solidFill>
+                      <a:srgbClr val="FFFFFF"/>
+                    </a:solidFill>
+                  </a:tcPr>
+                </a:tc>
+                <a:tc>
+                  <a:txBody>
+                    <a:bodyPr/>
+                    <a:lstStyle/>
+                    <a:p>
+                      <a:pPr algn="ctr"/>
+                      <a:r>
+                        <a:rPr sz="1600" b="0">
+                          <a:solidFill>
+                            <a:srgbClr val="222222"/>
+                          </a:solidFill>
+                          <a:latin typeface="맑은 고딕"/>
+                        </a:rPr>
+                        <a:t>1.000  (0)</a:t>
+                      </a:r>
+                    </a:p>
+                  </a:txBody>
+                  <a:tcPr anchor="ctr" marL="54864" marR="54864">
+                    <a:solidFill>
+                      <a:srgbClr val="FFFFFF"/>
+                    </a:solidFill>
+                  </a:tcPr>
+                </a:tc>
+                <a:tc>
+                  <a:txBody>
+                    <a:bodyPr/>
+                    <a:lstStyle/>
+                    <a:p>
+                      <a:pPr algn="ctr"/>
+                      <a:r>
+                        <a:rPr sz="1600" b="0">
+                          <a:solidFill>
+                            <a:srgbClr val="222222"/>
+                          </a:solidFill>
+                          <a:latin typeface="맑은 고딕"/>
+                        </a:rPr>
+                        <a:t>1.000  (0)</a:t>
+                      </a:r>
+                    </a:p>
+                  </a:txBody>
+                  <a:tcPr anchor="ctr" marL="54864" marR="54864">
+                    <a:solidFill>
+                      <a:srgbClr val="FFFFFF"/>
+                    </a:solidFill>
+                  </a:tcPr>
+                </a:tc>
+                <a:tc>
+                  <a:txBody>
+                    <a:bodyPr/>
+                    <a:lstStyle/>
+                    <a:p>
+                      <a:pPr algn="ctr"/>
+                      <a:r>
+                        <a:rPr sz="1600" b="0">
+                          <a:solidFill>
+                            <a:srgbClr val="222222"/>
+                          </a:solidFill>
+                          <a:latin typeface="맑은 고딕"/>
+                        </a:rPr>
+                        <a:t>1.000  (0)</a:t>
+                      </a:r>
+                    </a:p>
+                  </a:txBody>
+                  <a:tcPr anchor="ctr" marL="54864" marR="54864">
+                    <a:solidFill>
+                      <a:srgbClr val="FFFFFF"/>
+                    </a:solidFill>
+                  </a:tcPr>
+                </a:tc>
               </a:tr>
-              <a:tr h="731520">
+              <a:tr h="566928">
                 <a:tc>
                   <a:txBody>
                     <a:bodyPr/>
@@ -7270,13 +7523,13 @@
                     <a:p>
                       <a:pPr algn="l"/>
                       <a:r>
-                        <a:rPr sz="1500" b="0">
-                          <a:solidFill>
-                            <a:srgbClr val="222222"/>
-                          </a:solidFill>
-                          <a:latin typeface="맑은 고딕"/>
-                        </a:rPr>
-                        <a:t>가짜 정상</a:t>
+                        <a:rPr sz="1600" b="0">
+                          <a:solidFill>
+                            <a:srgbClr val="222222"/>
+                          </a:solidFill>
+                          <a:latin typeface="맑은 고딕"/>
+                        </a:rPr>
+                        <a:t>YOLOv3-tiny</a:t>
                       </a:r>
                     </a:p>
                   </a:txBody>
@@ -7293,13 +7546,13 @@
                     <a:p>
                       <a:pPr algn="ctr"/>
                       <a:r>
-                        <a:rPr sz="1500" b="0">
-                          <a:solidFill>
-                            <a:srgbClr val="222222"/>
-                          </a:solidFill>
-                          <a:latin typeface="맑은 고딕"/>
-                        </a:rPr>
-                        <a:t>결함이 없는 이미지에서 오경보를 내는가</a:t>
+                        <a:rPr sz="1600" b="0">
+                          <a:solidFill>
+                            <a:srgbClr val="222222"/>
+                          </a:solidFill>
+                          <a:latin typeface="맑은 고딕"/>
+                        </a:rPr>
+                        <a:t>0.719  (186)</a:t>
                       </a:r>
                     </a:p>
                   </a:txBody>
@@ -7316,13 +7569,13 @@
                     <a:p>
                       <a:pPr algn="ctr"/>
                       <a:r>
-                        <a:rPr sz="1500" b="0">
-                          <a:solidFill>
-                            <a:srgbClr val="222222"/>
-                          </a:solidFill>
-                          <a:latin typeface="맑은 고딕"/>
-                        </a:rPr>
-                        <a:t>점을 지운 이미지(결함 369장)를 가짜 정상으로 사용</a:t>
+                        <a:rPr sz="1600" b="0">
+                          <a:solidFill>
+                            <a:srgbClr val="222222"/>
+                          </a:solidFill>
+                          <a:latin typeface="맑은 고딕"/>
+                        </a:rPr>
+                        <a:t>0.934  (44)</a:t>
                       </a:r>
                     </a:p>
                   </a:txBody>
@@ -7332,8 +7585,100 @@
                     </a:solidFill>
                   </a:tcPr>
                 </a:tc>
+                <a:tc>
+                  <a:txBody>
+                    <a:bodyPr/>
+                    <a:lstStyle/>
+                    <a:p>
+                      <a:pPr algn="ctr"/>
+                      <a:r>
+                        <a:rPr sz="1600" b="0">
+                          <a:solidFill>
+                            <a:srgbClr val="222222"/>
+                          </a:solidFill>
+                          <a:latin typeface="맑은 고딕"/>
+                        </a:rPr>
+                        <a:t>0.982  (12)</a:t>
+                      </a:r>
+                    </a:p>
+                  </a:txBody>
+                  <a:tcPr anchor="ctr" marL="54864" marR="54864">
+                    <a:solidFill>
+                      <a:srgbClr val="F2F5FA"/>
+                    </a:solidFill>
+                  </a:tcPr>
+                </a:tc>
+                <a:tc>
+                  <a:txBody>
+                    <a:bodyPr/>
+                    <a:lstStyle/>
+                    <a:p>
+                      <a:pPr algn="ctr"/>
+                      <a:r>
+                        <a:rPr sz="1600" b="0">
+                          <a:solidFill>
+                            <a:srgbClr val="222222"/>
+                          </a:solidFill>
+                          <a:latin typeface="맑은 고딕"/>
+                        </a:rPr>
+                        <a:t>0.998  (1)</a:t>
+                      </a:r>
+                    </a:p>
+                  </a:txBody>
+                  <a:tcPr anchor="ctr" marL="54864" marR="54864">
+                    <a:solidFill>
+                      <a:srgbClr val="F2F5FA"/>
+                    </a:solidFill>
+                  </a:tcPr>
+                </a:tc>
+                <a:tc>
+                  <a:txBody>
+                    <a:bodyPr/>
+                    <a:lstStyle/>
+                    <a:p>
+                      <a:pPr algn="ctr"/>
+                      <a:r>
+                        <a:rPr sz="1600" b="0">
+                          <a:solidFill>
+                            <a:srgbClr val="222222"/>
+                          </a:solidFill>
+                          <a:latin typeface="맑은 고딕"/>
+                        </a:rPr>
+                        <a:t>1.000  (0)</a:t>
+                      </a:r>
+                    </a:p>
+                  </a:txBody>
+                  <a:tcPr anchor="ctr" marL="54864" marR="54864">
+                    <a:solidFill>
+                      <a:srgbClr val="F2F5FA"/>
+                    </a:solidFill>
+                  </a:tcPr>
+                </a:tc>
+                <a:tc>
+                  <a:txBody>
+                    <a:bodyPr/>
+                    <a:lstStyle/>
+                    <a:p>
+                      <a:pPr algn="ctr"/>
+                      <a:r>
+                        <a:rPr sz="1600" b="0">
+                          <a:solidFill>
+                            <a:srgbClr val="222222"/>
+                          </a:solidFill>
+                          <a:latin typeface="맑은 고딕"/>
+                        </a:rPr>
+                        <a:t>1.000  (0)</a:t>
+                      </a:r>
+                    </a:p>
+                  </a:txBody>
+                  <a:tcPr anchor="ctr" marL="54864" marR="54864">
+                    <a:solidFill>
+                      <a:srgbClr val="F2F5FA"/>
+                    </a:solidFill>
+                  </a:tcPr>
+                </a:tc>
               </a:tr>
-              <a:tr h="731520">
+              <a:tr h="566928">
                 <a:tc>
                   <a:txBody>
                     <a:bodyPr/>
@@ -7341,13 +7686,13 @@
                     <a:p>
                       <a:pPr algn="l"/>
                       <a:r>
-                        <a:rPr sz="1500" b="0">
-                          <a:solidFill>
-                            <a:srgbClr val="222222"/>
-                          </a:solidFill>
-                          <a:latin typeface="맑은 고딕"/>
-                        </a:rPr>
-                        <a:t>합성 점</a:t>
+                        <a:rPr sz="1600" b="0">
+                          <a:solidFill>
+                            <a:srgbClr val="222222"/>
+                          </a:solidFill>
+                          <a:latin typeface="맑은 고딕"/>
+                        </a:rPr>
+                        <a:t>MobileNetV3-FPN</a:t>
                       </a:r>
                     </a:p>
                   </a:txBody>
@@ -7364,13 +7709,13 @@
                     <a:p>
                       <a:pPr algn="ctr"/>
                       <a:r>
-                        <a:rPr sz="1500" b="0">
-                          <a:solidFill>
-                            <a:srgbClr val="222222"/>
-                          </a:solidFill>
-                          <a:latin typeface="맑은 고딕"/>
-                        </a:rPr>
-                        <a:t>옅은 점·다른 호기에서도 찾는가</a:t>
+                        <a:rPr sz="1600" b="0">
+                          <a:solidFill>
+                            <a:srgbClr val="222222"/>
+                          </a:solidFill>
+                          <a:latin typeface="맑은 고딕"/>
+                        </a:rPr>
+                        <a:t>0.682  (211)</a:t>
                       </a:r>
                     </a:p>
                   </a:txBody>
@@ -7387,13 +7732,13 @@
                     <a:p>
                       <a:pPr algn="ctr"/>
                       <a:r>
-                        <a:rPr sz="1500" b="0">
-                          <a:solidFill>
-                            <a:srgbClr val="222222"/>
-                          </a:solidFill>
-                          <a:latin typeface="맑은 고딕"/>
-                        </a:rPr>
-                        <a:t>작대기 안에만 점을 합성(진하기 4 x 크기 3), 시드 42</a:t>
+                        <a:rPr sz="1600" b="0">
+                          <a:solidFill>
+                            <a:srgbClr val="222222"/>
+                          </a:solidFill>
+                          <a:latin typeface="맑은 고딕"/>
+                        </a:rPr>
+                        <a:t>0.900  (66)</a:t>
                       </a:r>
                     </a:p>
                   </a:txBody>
@@ -7403,8 +7748,100 @@
                     </a:solidFill>
                   </a:tcPr>
                 </a:tc>
+                <a:tc>
+                  <a:txBody>
+                    <a:bodyPr/>
+                    <a:lstStyle/>
+                    <a:p>
+                      <a:pPr algn="ctr"/>
+                      <a:r>
+                        <a:rPr sz="1600" b="0">
+                          <a:solidFill>
+                            <a:srgbClr val="222222"/>
+                          </a:solidFill>
+                          <a:latin typeface="맑은 고딕"/>
+                        </a:rPr>
+                        <a:t>0.965  (23)</a:t>
+                      </a:r>
+                    </a:p>
+                  </a:txBody>
+                  <a:tcPr anchor="ctr" marL="54864" marR="54864">
+                    <a:solidFill>
+                      <a:srgbClr val="FFFFFF"/>
+                    </a:solidFill>
+                  </a:tcPr>
+                </a:tc>
+                <a:tc>
+                  <a:txBody>
+                    <a:bodyPr/>
+                    <a:lstStyle/>
+                    <a:p>
+                      <a:pPr algn="ctr"/>
+                      <a:r>
+                        <a:rPr sz="1600" b="0">
+                          <a:solidFill>
+                            <a:srgbClr val="222222"/>
+                          </a:solidFill>
+                          <a:latin typeface="맑은 고딕"/>
+                        </a:rPr>
+                        <a:t>0.997  (2)</a:t>
+                      </a:r>
+                    </a:p>
+                  </a:txBody>
+                  <a:tcPr anchor="ctr" marL="54864" marR="54864">
+                    <a:solidFill>
+                      <a:srgbClr val="FFFFFF"/>
+                    </a:solidFill>
+                  </a:tcPr>
+                </a:tc>
+                <a:tc>
+                  <a:txBody>
+                    <a:bodyPr/>
+                    <a:lstStyle/>
+                    <a:p>
+                      <a:pPr algn="ctr"/>
+                      <a:r>
+                        <a:rPr sz="1600" b="0">
+                          <a:solidFill>
+                            <a:srgbClr val="222222"/>
+                          </a:solidFill>
+                          <a:latin typeface="맑은 고딕"/>
+                        </a:rPr>
+                        <a:t>0.998  (1)</a:t>
+                      </a:r>
+                    </a:p>
+                  </a:txBody>
+                  <a:tcPr anchor="ctr" marL="54864" marR="54864">
+                    <a:solidFill>
+                      <a:srgbClr val="FFFFFF"/>
+                    </a:solidFill>
+                  </a:tcPr>
+                </a:tc>
+                <a:tc>
+                  <a:txBody>
+                    <a:bodyPr/>
+                    <a:lstStyle/>
+                    <a:p>
+                      <a:pPr algn="ctr"/>
+                      <a:r>
+                        <a:rPr sz="1600" b="0">
+                          <a:solidFill>
+                            <a:srgbClr val="222222"/>
+                          </a:solidFill>
+                          <a:latin typeface="맑은 고딕"/>
+                        </a:rPr>
+                        <a:t>0.998  (1)</a:t>
+                      </a:r>
+                    </a:p>
+                  </a:txBody>
+                  <a:tcPr anchor="ctr" marL="54864" marR="54864">
+                    <a:solidFill>
+                      <a:srgbClr val="FFFFFF"/>
+                    </a:solidFill>
+                  </a:tcPr>
+                </a:tc>
               </a:tr>
-              <a:tr h="731520">
+              <a:tr h="566928">
                 <a:tc>
                   <a:txBody>
                     <a:bodyPr/>
@@ -7412,13 +7849,13 @@
                     <a:p>
                       <a:pPr algn="l"/>
                       <a:r>
-                        <a:rPr sz="1500" b="0">
-                          <a:solidFill>
-                            <a:srgbClr val="222222"/>
-                          </a:solidFill>
-                          <a:latin typeface="맑은 고딕"/>
-                        </a:rPr>
-                        <a:t>호기·해상도</a:t>
+                        <a:rPr sz="1600" b="0">
+                          <a:solidFill>
+                            <a:srgbClr val="222222"/>
+                          </a:solidFill>
+                          <a:latin typeface="맑은 고딕"/>
+                        </a:rPr>
+                        <a:t>YOLO26n</a:t>
                       </a:r>
                     </a:p>
                   </a:txBody>
@@ -7435,13 +7872,13 @@
                     <a:p>
                       <a:pPr algn="ctr"/>
                       <a:r>
-                        <a:rPr sz="1500" b="0">
-                          <a:solidFill>
-                            <a:srgbClr val="222222"/>
-                          </a:solidFill>
-                          <a:latin typeface="맑은 고딕"/>
-                        </a:rPr>
-                        <a:t>특정 호기나 해상도에서 약한가</a:t>
+                        <a:rPr sz="1600" b="0">
+                          <a:solidFill>
+                            <a:srgbClr val="222222"/>
+                          </a:solidFill>
+                          <a:latin typeface="맑은 고딕"/>
+                        </a:rPr>
+                        <a:t>0.814  (123)</a:t>
                       </a:r>
                     </a:p>
                   </a:txBody>
@@ -7458,13 +7895,431 @@
                     <a:p>
                       <a:pPr algn="ctr"/>
                       <a:r>
-                        <a:rPr sz="1500" b="0">
-                          <a:solidFill>
-                            <a:srgbClr val="222222"/>
-                          </a:solidFill>
-                          <a:latin typeface="맑은 고딕"/>
-                        </a:rPr>
-                        <a:t>호기·해상도별로 나눠 평가</a:t>
+                        <a:rPr sz="1600" b="0">
+                          <a:solidFill>
+                            <a:srgbClr val="222222"/>
+                          </a:solidFill>
+                          <a:latin typeface="맑은 고딕"/>
+                        </a:rPr>
+                        <a:t>0.950  (33)</a:t>
+                      </a:r>
+                    </a:p>
+                  </a:txBody>
+                  <a:tcPr anchor="ctr" marL="54864" marR="54864">
+                    <a:solidFill>
+                      <a:srgbClr val="F2F5FA"/>
+                    </a:solidFill>
+                  </a:tcPr>
+                </a:tc>
+                <a:tc>
+                  <a:txBody>
+                    <a:bodyPr/>
+                    <a:lstStyle/>
+                    <a:p>
+                      <a:pPr algn="ctr"/>
+                      <a:r>
+                        <a:rPr sz="1600" b="0">
+                          <a:solidFill>
+                            <a:srgbClr val="222222"/>
+                          </a:solidFill>
+                          <a:latin typeface="맑은 고딕"/>
+                        </a:rPr>
+                        <a:t>0.983  (11)</a:t>
+                      </a:r>
+                    </a:p>
+                  </a:txBody>
+                  <a:tcPr anchor="ctr" marL="54864" marR="54864">
+                    <a:solidFill>
+                      <a:srgbClr val="F2F5FA"/>
+                    </a:solidFill>
+                  </a:tcPr>
+                </a:tc>
+                <a:tc>
+                  <a:txBody>
+                    <a:bodyPr/>
+                    <a:lstStyle/>
+                    <a:p>
+                      <a:pPr algn="ctr"/>
+                      <a:r>
+                        <a:rPr sz="1600" b="0">
+                          <a:solidFill>
+                            <a:srgbClr val="222222"/>
+                          </a:solidFill>
+                          <a:latin typeface="맑은 고딕"/>
+                        </a:rPr>
+                        <a:t>1.000  (0)</a:t>
+                      </a:r>
+                    </a:p>
+                  </a:txBody>
+                  <a:tcPr anchor="ctr" marL="54864" marR="54864">
+                    <a:solidFill>
+                      <a:srgbClr val="F2F5FA"/>
+                    </a:solidFill>
+                  </a:tcPr>
+                </a:tc>
+                <a:tc>
+                  <a:txBody>
+                    <a:bodyPr/>
+                    <a:lstStyle/>
+                    <a:p>
+                      <a:pPr algn="ctr"/>
+                      <a:r>
+                        <a:rPr sz="1600" b="0">
+                          <a:solidFill>
+                            <a:srgbClr val="222222"/>
+                          </a:solidFill>
+                          <a:latin typeface="맑은 고딕"/>
+                        </a:rPr>
+                        <a:t>1.000  (0)</a:t>
+                      </a:r>
+                    </a:p>
+                  </a:txBody>
+                  <a:tcPr anchor="ctr" marL="54864" marR="54864">
+                    <a:solidFill>
+                      <a:srgbClr val="F2F5FA"/>
+                    </a:solidFill>
+                  </a:tcPr>
+                </a:tc>
+                <a:tc>
+                  <a:txBody>
+                    <a:bodyPr/>
+                    <a:lstStyle/>
+                    <a:p>
+                      <a:pPr algn="ctr"/>
+                      <a:r>
+                        <a:rPr sz="1600" b="0">
+                          <a:solidFill>
+                            <a:srgbClr val="222222"/>
+                          </a:solidFill>
+                          <a:latin typeface="맑은 고딕"/>
+                        </a:rPr>
+                        <a:t>1.000  (0)</a:t>
+                      </a:r>
+                    </a:p>
+                  </a:txBody>
+                  <a:tcPr anchor="ctr" marL="54864" marR="54864">
+                    <a:solidFill>
+                      <a:srgbClr val="F2F5FA"/>
+                    </a:solidFill>
+                  </a:tcPr>
+                </a:tc>
+              </a:tr>
+              <a:tr h="566928">
+                <a:tc>
+                  <a:txBody>
+                    <a:bodyPr/>
+                    <a:lstStyle/>
+                    <a:p>
+                      <a:pPr algn="l"/>
+                      <a:r>
+                        <a:rPr sz="1600" b="0">
+                          <a:solidFill>
+                            <a:srgbClr val="222222"/>
+                          </a:solidFill>
+                          <a:latin typeface="맑은 고딕"/>
+                        </a:rPr>
+                        <a:t>RT-DETR-l</a:t>
+                      </a:r>
+                    </a:p>
+                  </a:txBody>
+                  <a:tcPr anchor="ctr" marL="54864" marR="54864">
+                    <a:solidFill>
+                      <a:srgbClr val="FFFFFF"/>
+                    </a:solidFill>
+                  </a:tcPr>
+                </a:tc>
+                <a:tc>
+                  <a:txBody>
+                    <a:bodyPr/>
+                    <a:lstStyle/>
+                    <a:p>
+                      <a:pPr algn="ctr"/>
+                      <a:r>
+                        <a:rPr sz="1600" b="0">
+                          <a:solidFill>
+                            <a:srgbClr val="222222"/>
+                          </a:solidFill>
+                          <a:latin typeface="맑은 고딕"/>
+                        </a:rPr>
+                        <a:t>0.804  (130)</a:t>
+                      </a:r>
+                    </a:p>
+                  </a:txBody>
+                  <a:tcPr anchor="ctr" marL="54864" marR="54864">
+                    <a:solidFill>
+                      <a:srgbClr val="FFFFFF"/>
+                    </a:solidFill>
+                  </a:tcPr>
+                </a:tc>
+                <a:tc>
+                  <a:txBody>
+                    <a:bodyPr/>
+                    <a:lstStyle/>
+                    <a:p>
+                      <a:pPr algn="ctr"/>
+                      <a:r>
+                        <a:rPr sz="1600" b="0">
+                          <a:solidFill>
+                            <a:srgbClr val="222222"/>
+                          </a:solidFill>
+                          <a:latin typeface="맑은 고딕"/>
+                        </a:rPr>
+                        <a:t>0.947  (35)</a:t>
+                      </a:r>
+                    </a:p>
+                  </a:txBody>
+                  <a:tcPr anchor="ctr" marL="54864" marR="54864">
+                    <a:solidFill>
+                      <a:srgbClr val="FFFFFF"/>
+                    </a:solidFill>
+                  </a:tcPr>
+                </a:tc>
+                <a:tc>
+                  <a:txBody>
+                    <a:bodyPr/>
+                    <a:lstStyle/>
+                    <a:p>
+                      <a:pPr algn="ctr"/>
+                      <a:r>
+                        <a:rPr sz="1600" b="0">
+                          <a:solidFill>
+                            <a:srgbClr val="222222"/>
+                          </a:solidFill>
+                          <a:latin typeface="맑은 고딕"/>
+                        </a:rPr>
+                        <a:t>0.983  (11)</a:t>
+                      </a:r>
+                    </a:p>
+                  </a:txBody>
+                  <a:tcPr anchor="ctr" marL="54864" marR="54864">
+                    <a:solidFill>
+                      <a:srgbClr val="FFFFFF"/>
+                    </a:solidFill>
+                  </a:tcPr>
+                </a:tc>
+                <a:tc>
+                  <a:txBody>
+                    <a:bodyPr/>
+                    <a:lstStyle/>
+                    <a:p>
+                      <a:pPr algn="ctr"/>
+                      <a:r>
+                        <a:rPr sz="1600" b="0">
+                          <a:solidFill>
+                            <a:srgbClr val="222222"/>
+                          </a:solidFill>
+                          <a:latin typeface="맑은 고딕"/>
+                        </a:rPr>
+                        <a:t>0.998  (1)</a:t>
+                      </a:r>
+                    </a:p>
+                  </a:txBody>
+                  <a:tcPr anchor="ctr" marL="54864" marR="54864">
+                    <a:solidFill>
+                      <a:srgbClr val="FFFFFF"/>
+                    </a:solidFill>
+                  </a:tcPr>
+                </a:tc>
+                <a:tc>
+                  <a:txBody>
+                    <a:bodyPr/>
+                    <a:lstStyle/>
+                    <a:p>
+                      <a:pPr algn="ctr"/>
+                      <a:r>
+                        <a:rPr sz="1600" b="0">
+                          <a:solidFill>
+                            <a:srgbClr val="222222"/>
+                          </a:solidFill>
+                          <a:latin typeface="맑은 고딕"/>
+                        </a:rPr>
+                        <a:t>0.998  (1)</a:t>
+                      </a:r>
+                    </a:p>
+                  </a:txBody>
+                  <a:tcPr anchor="ctr" marL="54864" marR="54864">
+                    <a:solidFill>
+                      <a:srgbClr val="FFFFFF"/>
+                    </a:solidFill>
+                  </a:tcPr>
+                </a:tc>
+                <a:tc>
+                  <a:txBody>
+                    <a:bodyPr/>
+                    <a:lstStyle/>
+                    <a:p>
+                      <a:pPr algn="ctr"/>
+                      <a:r>
+                        <a:rPr sz="1600" b="0">
+                          <a:solidFill>
+                            <a:srgbClr val="222222"/>
+                          </a:solidFill>
+                          <a:latin typeface="맑은 고딕"/>
+                        </a:rPr>
+                        <a:t>0.998  (1)</a:t>
+                      </a:r>
+                    </a:p>
+                  </a:txBody>
+                  <a:tcPr anchor="ctr" marL="54864" marR="54864">
+                    <a:solidFill>
+                      <a:srgbClr val="FFFFFF"/>
+                    </a:solidFill>
+                  </a:tcPr>
+                </a:tc>
+              </a:tr>
+              <a:tr h="566928">
+                <a:tc>
+                  <a:txBody>
+                    <a:bodyPr/>
+                    <a:lstStyle/>
+                    <a:p>
+                      <a:pPr algn="l"/>
+                      <a:r>
+                        <a:rPr sz="1600" b="0">
+                          <a:solidFill>
+                            <a:srgbClr val="222222"/>
+                          </a:solidFill>
+                          <a:latin typeface="맑은 고딕"/>
+                        </a:rPr>
+                        <a:t>D-FINE-N</a:t>
+                      </a:r>
+                    </a:p>
+                  </a:txBody>
+                  <a:tcPr anchor="ctr" marL="54864" marR="54864">
+                    <a:solidFill>
+                      <a:srgbClr val="F2F5FA"/>
+                    </a:solidFill>
+                  </a:tcPr>
+                </a:tc>
+                <a:tc>
+                  <a:txBody>
+                    <a:bodyPr/>
+                    <a:lstStyle/>
+                    <a:p>
+                      <a:pPr algn="ctr"/>
+                      <a:r>
+                        <a:rPr sz="1600" b="0">
+                          <a:solidFill>
+                            <a:srgbClr val="222222"/>
+                          </a:solidFill>
+                          <a:latin typeface="맑은 고딕"/>
+                        </a:rPr>
+                        <a:t>0.805  (130)</a:t>
+                      </a:r>
+                    </a:p>
+                  </a:txBody>
+                  <a:tcPr anchor="ctr" marL="54864" marR="54864">
+                    <a:solidFill>
+                      <a:srgbClr val="F2F5FA"/>
+                    </a:solidFill>
+                  </a:tcPr>
+                </a:tc>
+                <a:tc>
+                  <a:txBody>
+                    <a:bodyPr/>
+                    <a:lstStyle/>
+                    <a:p>
+                      <a:pPr algn="ctr"/>
+                      <a:r>
+                        <a:rPr sz="1600" b="0">
+                          <a:solidFill>
+                            <a:srgbClr val="222222"/>
+                          </a:solidFill>
+                          <a:latin typeface="맑은 고딕"/>
+                        </a:rPr>
+                        <a:t>0.947  (35)</a:t>
+                      </a:r>
+                    </a:p>
+                  </a:txBody>
+                  <a:tcPr anchor="ctr" marL="54864" marR="54864">
+                    <a:solidFill>
+                      <a:srgbClr val="F2F5FA"/>
+                    </a:solidFill>
+                  </a:tcPr>
+                </a:tc>
+                <a:tc>
+                  <a:txBody>
+                    <a:bodyPr/>
+                    <a:lstStyle/>
+                    <a:p>
+                      <a:pPr algn="ctr"/>
+                      <a:r>
+                        <a:rPr sz="1600" b="0">
+                          <a:solidFill>
+                            <a:srgbClr val="222222"/>
+                          </a:solidFill>
+                          <a:latin typeface="맑은 고딕"/>
+                        </a:rPr>
+                        <a:t>0.988  (8)</a:t>
+                      </a:r>
+                    </a:p>
+                  </a:txBody>
+                  <a:tcPr anchor="ctr" marL="54864" marR="54864">
+                    <a:solidFill>
+                      <a:srgbClr val="F2F5FA"/>
+                    </a:solidFill>
+                  </a:tcPr>
+                </a:tc>
+                <a:tc>
+                  <a:txBody>
+                    <a:bodyPr/>
+                    <a:lstStyle/>
+                    <a:p>
+                      <a:pPr algn="ctr"/>
+                      <a:r>
+                        <a:rPr sz="1600" b="0">
+                          <a:solidFill>
+                            <a:srgbClr val="222222"/>
+                          </a:solidFill>
+                          <a:latin typeface="맑은 고딕"/>
+                        </a:rPr>
+                        <a:t>0.998  (1)</a:t>
+                      </a:r>
+                    </a:p>
+                  </a:txBody>
+                  <a:tcPr anchor="ctr" marL="54864" marR="54864">
+                    <a:solidFill>
+                      <a:srgbClr val="F2F5FA"/>
+                    </a:solidFill>
+                  </a:tcPr>
+                </a:tc>
+                <a:tc>
+                  <a:txBody>
+                    <a:bodyPr/>
+                    <a:lstStyle/>
+                    <a:p>
+                      <a:pPr algn="ctr"/>
+                      <a:r>
+                        <a:rPr sz="1600" b="0">
+                          <a:solidFill>
+                            <a:srgbClr val="222222"/>
+                          </a:solidFill>
+                          <a:latin typeface="맑은 고딕"/>
+                        </a:rPr>
+                        <a:t>1.000  (0)</a:t>
+                      </a:r>
+                    </a:p>
+                  </a:txBody>
+                  <a:tcPr anchor="ctr" marL="54864" marR="54864">
+                    <a:solidFill>
+                      <a:srgbClr val="F2F5FA"/>
+                    </a:solidFill>
+                  </a:tcPr>
+                </a:tc>
+                <a:tc>
+                  <a:txBody>
+                    <a:bodyPr/>
+                    <a:lstStyle/>
+                    <a:p>
+                      <a:pPr algn="ctr"/>
+                      <a:r>
+                        <a:rPr sz="1600" b="0">
+                          <a:solidFill>
+                            <a:srgbClr val="222222"/>
+                          </a:solidFill>
+                          <a:latin typeface="맑은 고딕"/>
+                        </a:rPr>
+                        <a:t>1.000  (0)</a:t>
                       </a:r>
                     </a:p>
                   </a:txBody>
@@ -7481,14 +8336,14 @@
       </p:graphicFrame>
       <p:sp>
         <p:nvSpPr>
-          <p:cNvPr id="7" name="TextBox 6"/>
+          <p:cNvPr id="8" name="TextBox 7"/>
           <p:cNvSpPr txBox="1"/>
           <p:nvPr/>
         </p:nvSpPr>
         <p:spPr>
           <a:xfrm>
-            <a:off x="548640" y="5486400"/>
-            <a:ext cx="10972800" cy="1097280"/>
+            <a:off x="548640" y="5852160"/>
+            <a:ext cx="11064240" cy="731520"/>
           </a:xfrm>
           <a:prstGeom prst="rect">
             <a:avLst/>
@@ -7507,7 +8362,7 @@
               </a:spcAft>
             </a:pPr>
             <a:r>
-              <a:rPr sz="1600" b="1">
+              <a:rPr sz="1400" b="1">
                 <a:solidFill>
                   <a:srgbClr val="2AA7B8"/>
                 </a:solidFill>
@@ -7516,49 +8371,13 @@
               <a:t>• </a:t>
             </a:r>
             <a:r>
-              <a:rPr sz="1600" b="0">
-                <a:solidFill>
-                  <a:srgbClr val="222222"/>
-                </a:solidFill>
-                <a:latin typeface="맑은 고딕"/>
-              </a:rPr>
-              <a:t>합성·가짜 정상은 </a:t>
-            </a:r>
-            <a:r>
-              <a:rPr sz="1600" b="1">
-                <a:solidFill>
-                  <a:srgbClr val="222222"/>
-                </a:solidFill>
-                <a:latin typeface="맑은 고딕"/>
-              </a:rPr>
-              <a:t>인위적인 이미지</a:t>
-            </a:r>
-            <a:r>
-              <a:rPr sz="1600" b="0">
-                <a:solidFill>
-                  <a:srgbClr val="222222"/>
-                </a:solidFill>
-                <a:latin typeface="맑은 고딕"/>
-              </a:rPr>
-              <a:t>라 실제 현장 성능이 아니라 </a:t>
-            </a:r>
-            <a:r>
-              <a:rPr sz="1600" b="1">
-                <a:solidFill>
-                  <a:srgbClr val="222222"/>
-                </a:solidFill>
-                <a:latin typeface="맑은 고딕"/>
-              </a:rPr>
-              <a:t>모델 간 상대 비교와 취약점 탐색</a:t>
-            </a:r>
-            <a:r>
-              <a:rPr sz="1600" b="0">
-                <a:solidFill>
-                  <a:srgbClr val="222222"/>
-                </a:solidFill>
-                <a:latin typeface="맑은 고딕"/>
-              </a:rPr>
-              <a:t>으로 해석한다</a:t>
+              <a:rPr sz="1400" b="0">
+                <a:solidFill>
+                  <a:srgbClr val="222222"/>
+                </a:solidFill>
+                <a:latin typeface="맑은 고딕"/>
+              </a:rPr>
+              <a:t>R이 작을수록 모델 차이가 보이고(1px), R = 3px부터 포화한다. 2px는 IoU 0.5와 엄격도가 비슷해 함께 보고했다.</a:t>
             </a:r>
           </a:p>
         </p:txBody>
@@ -7654,7 +8473,7 @@
                 </a:solidFill>
                 <a:latin typeface="맑은 고딕"/>
               </a:rPr>
-              <a:t>점 제거: 모델은 점 자체를 본다</a:t>
+              <a:t>② 일반화와 robust 평가</a:t>
             </a:r>
           </a:p>
         </p:txBody>
@@ -7689,7 +8508,7 @@
                 </a:solidFill>
                 <a:latin typeface="맑은 고딕"/>
               </a:rPr>
-              <a:t>결함의 점을 지우면 검출이 사라진다 → 위치만 보는 지름길이 아니다</a:t>
+              <a:t>실제 데이터에서는 다 찾으니, 조건을 인위적으로 바꿔 모델을 시험한다</a:t>
             </a:r>
           </a:p>
         </p:txBody>
@@ -7729,30 +8548,388 @@
           </a:p>
         </p:txBody>
       </p:sp>
-      <p:pic>
-        <p:nvPicPr>
-          <p:cNvPr id="6" name="Picture 5" descr="fig3b_dot_removal.png"/>
-          <p:cNvPicPr>
-            <a:picLocks noChangeAspect="1"/>
-          </p:cNvPicPr>
+      <p:graphicFrame>
+        <p:nvGraphicFramePr>
+          <p:cNvPr id="6" name="Table 5"/>
+          <p:cNvGraphicFramePr>
+            <a:graphicFrameLocks noGrp="1"/>
+          </p:cNvGraphicFramePr>
           <p:nvPr/>
-        </p:nvPicPr>
-        <p:blipFill>
-          <a:blip r:embed="rId2"/>
-          <a:stretch>
-            <a:fillRect/>
-          </a:stretch>
-        </p:blipFill>
-        <p:spPr>
-          <a:xfrm>
-            <a:off x="2397900" y="1554479"/>
-            <a:ext cx="7365719" cy="3291840"/>
-          </a:xfrm>
-          <a:prstGeom prst="rect">
-            <a:avLst/>
-          </a:prstGeom>
-        </p:spPr>
-      </p:pic>
+        </p:nvGraphicFramePr>
+        <p:xfrm>
+          <a:off x="548640" y="1783080"/>
+          <a:ext cx="11064239" cy="3657600"/>
+        </p:xfrm>
+        <a:graphic>
+          <a:graphicData uri="http://schemas.openxmlformats.org/drawingml/2006/table">
+            <a:tbl>
+              <a:tblPr firstRow="1" bandRow="1">
+                <a:tableStyleId>{5C22544A-7EE6-4342-B048-85BDC9FD1C3A}</a:tableStyleId>
+              </a:tblPr>
+              <a:tblGrid>
+                <a:gridCol w="1645920"/>
+                <a:gridCol w="4754880"/>
+                <a:gridCol w="4663439"/>
+              </a:tblGrid>
+              <a:tr h="731520">
+                <a:tc>
+                  <a:txBody>
+                    <a:bodyPr/>
+                    <a:lstStyle/>
+                    <a:p>
+                      <a:pPr algn="l"/>
+                      <a:r>
+                        <a:rPr sz="1500" b="1">
+                          <a:solidFill>
+                            <a:srgbClr val="FFFFFF"/>
+                          </a:solidFill>
+                          <a:latin typeface="맑은 고딕"/>
+                        </a:rPr>
+                        <a:t>시험</a:t>
+                      </a:r>
+                    </a:p>
+                  </a:txBody>
+                  <a:tcPr anchor="ctr" marL="54864" marR="54864">
+                    <a:solidFill>
+                      <a:srgbClr val="1F3A5F"/>
+                    </a:solidFill>
+                  </a:tcPr>
+                </a:tc>
+                <a:tc>
+                  <a:txBody>
+                    <a:bodyPr/>
+                    <a:lstStyle/>
+                    <a:p>
+                      <a:pPr algn="ctr"/>
+                      <a:r>
+                        <a:rPr sz="1500" b="1">
+                          <a:solidFill>
+                            <a:srgbClr val="FFFFFF"/>
+                          </a:solidFill>
+                          <a:latin typeface="맑은 고딕"/>
+                        </a:rPr>
+                        <a:t>묻는 것</a:t>
+                      </a:r>
+                    </a:p>
+                  </a:txBody>
+                  <a:tcPr anchor="ctr" marL="54864" marR="54864">
+                    <a:solidFill>
+                      <a:srgbClr val="1F3A5F"/>
+                    </a:solidFill>
+                  </a:tcPr>
+                </a:tc>
+                <a:tc>
+                  <a:txBody>
+                    <a:bodyPr/>
+                    <a:lstStyle/>
+                    <a:p>
+                      <a:pPr algn="ctr"/>
+                      <a:r>
+                        <a:rPr sz="1500" b="1">
+                          <a:solidFill>
+                            <a:srgbClr val="FFFFFF"/>
+                          </a:solidFill>
+                          <a:latin typeface="맑은 고딕"/>
+                        </a:rPr>
+                        <a:t>방법</a:t>
+                      </a:r>
+                    </a:p>
+                  </a:txBody>
+                  <a:tcPr anchor="ctr" marL="54864" marR="54864">
+                    <a:solidFill>
+                      <a:srgbClr val="1F3A5F"/>
+                    </a:solidFill>
+                  </a:tcPr>
+                </a:tc>
+              </a:tr>
+              <a:tr h="731520">
+                <a:tc>
+                  <a:txBody>
+                    <a:bodyPr/>
+                    <a:lstStyle/>
+                    <a:p>
+                      <a:pPr algn="l"/>
+                      <a:r>
+                        <a:rPr sz="1500" b="0">
+                          <a:solidFill>
+                            <a:srgbClr val="222222"/>
+                          </a:solidFill>
+                          <a:latin typeface="맑은 고딕"/>
+                        </a:rPr>
+                        <a:t>점 제거</a:t>
+                      </a:r>
+                    </a:p>
+                  </a:txBody>
+                  <a:tcPr anchor="ctr" marL="54864" marR="54864">
+                    <a:solidFill>
+                      <a:srgbClr val="FFFFFF"/>
+                    </a:solidFill>
+                  </a:tcPr>
+                </a:tc>
+                <a:tc>
+                  <a:txBody>
+                    <a:bodyPr/>
+                    <a:lstStyle/>
+                    <a:p>
+                      <a:pPr algn="ctr"/>
+                      <a:r>
+                        <a:rPr sz="1500" b="0">
+                          <a:solidFill>
+                            <a:srgbClr val="222222"/>
+                          </a:solidFill>
+                          <a:latin typeface="맑은 고딕"/>
+                        </a:rPr>
+                        <a:t>모델이 결함의 점 자체를 보는가, 위치나 주변만 보는가</a:t>
+                      </a:r>
+                    </a:p>
+                  </a:txBody>
+                  <a:tcPr anchor="ctr" marL="54864" marR="54864">
+                    <a:solidFill>
+                      <a:srgbClr val="FFFFFF"/>
+                    </a:solidFill>
+                  </a:tcPr>
+                </a:tc>
+                <a:tc>
+                  <a:txBody>
+                    <a:bodyPr/>
+                    <a:lstStyle/>
+                    <a:p>
+                      <a:pPr algn="ctr"/>
+                      <a:r>
+                        <a:rPr sz="1500" b="0">
+                          <a:solidFill>
+                            <a:srgbClr val="222222"/>
+                          </a:solidFill>
+                          <a:latin typeface="맑은 고딕"/>
+                        </a:rPr>
+                        <a:t>정답의 점을 보간으로 지운 이미지에 다시 적용</a:t>
+                      </a:r>
+                    </a:p>
+                  </a:txBody>
+                  <a:tcPr anchor="ctr" marL="54864" marR="54864">
+                    <a:solidFill>
+                      <a:srgbClr val="FFFFFF"/>
+                    </a:solidFill>
+                  </a:tcPr>
+                </a:tc>
+              </a:tr>
+              <a:tr h="731520">
+                <a:tc>
+                  <a:txBody>
+                    <a:bodyPr/>
+                    <a:lstStyle/>
+                    <a:p>
+                      <a:pPr algn="l"/>
+                      <a:r>
+                        <a:rPr sz="1500" b="0">
+                          <a:solidFill>
+                            <a:srgbClr val="222222"/>
+                          </a:solidFill>
+                          <a:latin typeface="맑은 고딕"/>
+                        </a:rPr>
+                        <a:t>가짜 정상</a:t>
+                      </a:r>
+                    </a:p>
+                  </a:txBody>
+                  <a:tcPr anchor="ctr" marL="54864" marR="54864">
+                    <a:solidFill>
+                      <a:srgbClr val="F2F5FA"/>
+                    </a:solidFill>
+                  </a:tcPr>
+                </a:tc>
+                <a:tc>
+                  <a:txBody>
+                    <a:bodyPr/>
+                    <a:lstStyle/>
+                    <a:p>
+                      <a:pPr algn="ctr"/>
+                      <a:r>
+                        <a:rPr sz="1500" b="0">
+                          <a:solidFill>
+                            <a:srgbClr val="222222"/>
+                          </a:solidFill>
+                          <a:latin typeface="맑은 고딕"/>
+                        </a:rPr>
+                        <a:t>결함이 없는 이미지에서 오경보를 내는가</a:t>
+                      </a:r>
+                    </a:p>
+                  </a:txBody>
+                  <a:tcPr anchor="ctr" marL="54864" marR="54864">
+                    <a:solidFill>
+                      <a:srgbClr val="F2F5FA"/>
+                    </a:solidFill>
+                  </a:tcPr>
+                </a:tc>
+                <a:tc>
+                  <a:txBody>
+                    <a:bodyPr/>
+                    <a:lstStyle/>
+                    <a:p>
+                      <a:pPr algn="ctr"/>
+                      <a:r>
+                        <a:rPr sz="1500" b="0">
+                          <a:solidFill>
+                            <a:srgbClr val="222222"/>
+                          </a:solidFill>
+                          <a:latin typeface="맑은 고딕"/>
+                        </a:rPr>
+                        <a:t>점을 지운 이미지(결함 369장)를 가짜 정상으로 사용</a:t>
+                      </a:r>
+                    </a:p>
+                  </a:txBody>
+                  <a:tcPr anchor="ctr" marL="54864" marR="54864">
+                    <a:solidFill>
+                      <a:srgbClr val="F2F5FA"/>
+                    </a:solidFill>
+                  </a:tcPr>
+                </a:tc>
+              </a:tr>
+              <a:tr h="731520">
+                <a:tc>
+                  <a:txBody>
+                    <a:bodyPr/>
+                    <a:lstStyle/>
+                    <a:p>
+                      <a:pPr algn="l"/>
+                      <a:r>
+                        <a:rPr sz="1500" b="0">
+                          <a:solidFill>
+                            <a:srgbClr val="222222"/>
+                          </a:solidFill>
+                          <a:latin typeface="맑은 고딕"/>
+                        </a:rPr>
+                        <a:t>합성 점</a:t>
+                      </a:r>
+                    </a:p>
+                  </a:txBody>
+                  <a:tcPr anchor="ctr" marL="54864" marR="54864">
+                    <a:solidFill>
+                      <a:srgbClr val="FFFFFF"/>
+                    </a:solidFill>
+                  </a:tcPr>
+                </a:tc>
+                <a:tc>
+                  <a:txBody>
+                    <a:bodyPr/>
+                    <a:lstStyle/>
+                    <a:p>
+                      <a:pPr algn="ctr"/>
+                      <a:r>
+                        <a:rPr sz="1500" b="0">
+                          <a:solidFill>
+                            <a:srgbClr val="222222"/>
+                          </a:solidFill>
+                          <a:latin typeface="맑은 고딕"/>
+                        </a:rPr>
+                        <a:t>옅은 점·다른 호기에서도 찾는가</a:t>
+                      </a:r>
+                    </a:p>
+                  </a:txBody>
+                  <a:tcPr anchor="ctr" marL="54864" marR="54864">
+                    <a:solidFill>
+                      <a:srgbClr val="FFFFFF"/>
+                    </a:solidFill>
+                  </a:tcPr>
+                </a:tc>
+                <a:tc>
+                  <a:txBody>
+                    <a:bodyPr/>
+                    <a:lstStyle/>
+                    <a:p>
+                      <a:pPr algn="ctr"/>
+                      <a:r>
+                        <a:rPr sz="1500" b="0">
+                          <a:solidFill>
+                            <a:srgbClr val="222222"/>
+                          </a:solidFill>
+                          <a:latin typeface="맑은 고딕"/>
+                        </a:rPr>
+                        <a:t>작대기 안에만 점을 합성(진하기 4 x 크기 3), 시드 42</a:t>
+                      </a:r>
+                    </a:p>
+                  </a:txBody>
+                  <a:tcPr anchor="ctr" marL="54864" marR="54864">
+                    <a:solidFill>
+                      <a:srgbClr val="FFFFFF"/>
+                    </a:solidFill>
+                  </a:tcPr>
+                </a:tc>
+              </a:tr>
+              <a:tr h="731520">
+                <a:tc>
+                  <a:txBody>
+                    <a:bodyPr/>
+                    <a:lstStyle/>
+                    <a:p>
+                      <a:pPr algn="l"/>
+                      <a:r>
+                        <a:rPr sz="1500" b="0">
+                          <a:solidFill>
+                            <a:srgbClr val="222222"/>
+                          </a:solidFill>
+                          <a:latin typeface="맑은 고딕"/>
+                        </a:rPr>
+                        <a:t>호기·해상도</a:t>
+                      </a:r>
+                    </a:p>
+                  </a:txBody>
+                  <a:tcPr anchor="ctr" marL="54864" marR="54864">
+                    <a:solidFill>
+                      <a:srgbClr val="F2F5FA"/>
+                    </a:solidFill>
+                  </a:tcPr>
+                </a:tc>
+                <a:tc>
+                  <a:txBody>
+                    <a:bodyPr/>
+                    <a:lstStyle/>
+                    <a:p>
+                      <a:pPr algn="ctr"/>
+                      <a:r>
+                        <a:rPr sz="1500" b="0">
+                          <a:solidFill>
+                            <a:srgbClr val="222222"/>
+                          </a:solidFill>
+                          <a:latin typeface="맑은 고딕"/>
+                        </a:rPr>
+                        <a:t>특정 호기나 해상도에서 약한가</a:t>
+                      </a:r>
+                    </a:p>
+                  </a:txBody>
+                  <a:tcPr anchor="ctr" marL="54864" marR="54864">
+                    <a:solidFill>
+                      <a:srgbClr val="F2F5FA"/>
+                    </a:solidFill>
+                  </a:tcPr>
+                </a:tc>
+                <a:tc>
+                  <a:txBody>
+                    <a:bodyPr/>
+                    <a:lstStyle/>
+                    <a:p>
+                      <a:pPr algn="ctr"/>
+                      <a:r>
+                        <a:rPr sz="1500" b="0">
+                          <a:solidFill>
+                            <a:srgbClr val="222222"/>
+                          </a:solidFill>
+                          <a:latin typeface="맑은 고딕"/>
+                        </a:rPr>
+                        <a:t>호기·해상도별로 나눠 평가</a:t>
+                      </a:r>
+                    </a:p>
+                  </a:txBody>
+                  <a:tcPr anchor="ctr" marL="54864" marR="54864">
+                    <a:solidFill>
+                      <a:srgbClr val="F2F5FA"/>
+                    </a:solidFill>
+                  </a:tcPr>
+                </a:tc>
+              </a:tr>
+            </a:tbl>
+          </a:graphicData>
+        </a:graphic>
+      </p:graphicFrame>
       <p:sp>
         <p:nvSpPr>
           <p:cNvPr id="7" name="TextBox 6"/>
@@ -7761,8 +8938,8 @@
         </p:nvSpPr>
         <p:spPr>
           <a:xfrm>
-            <a:off x="731520" y="4937760"/>
-            <a:ext cx="10789920" cy="1737360"/>
+            <a:off x="548640" y="5486400"/>
+            <a:ext cx="10972800" cy="1097280"/>
           </a:xfrm>
           <a:prstGeom prst="rect">
             <a:avLst/>
@@ -7777,7 +8954,7 @@
           <a:p>
             <a:pPr>
               <a:spcAft>
-                <a:spcPts val="800"/>
+                <a:spcPts val="600"/>
               </a:spcAft>
             </a:pPr>
             <a:r>
@@ -7796,7 +8973,7 @@
                 </a:solidFill>
                 <a:latin typeface="맑은 고딕"/>
               </a:rPr>
-              <a:t>test 정답 663개의 점을 보간으로 지우고 같은 모델을 다시 적용: 노이즈 없는 평균 보간으로 13x13 이상 지우면 </a:t>
+              <a:t>합성·가짜 정상은 </a:t>
             </a:r>
             <a:r>
               <a:rPr sz="1600" b="1">
@@ -7805,7 +8982,7 @@
                 </a:solidFill>
                 <a:latin typeface="맑은 고딕"/>
               </a:rPr>
-              <a:t>6개 모델 모두 0~3개</a:t>
+              <a:t>인위적인 이미지</a:t>
             </a:r>
             <a:r>
               <a:rPr sz="1600" b="0">
@@ -7814,23 +8991,16 @@
                 </a:solidFill>
                 <a:latin typeface="맑은 고딕"/>
               </a:rPr>
-              <a:t>만 검출</a:t>
-            </a:r>
-          </a:p>
-          <a:p>
-            <a:pPr>
-              <a:spcAft>
-                <a:spcPts val="800"/>
-              </a:spcAft>
-            </a:pPr>
+              <a:t>라 실제 현장 성능이 아니라 </a:t>
+            </a:r>
             <a:r>
               <a:rPr sz="1600" b="1">
                 <a:solidFill>
-                  <a:srgbClr val="2AA7B8"/>
-                </a:solidFill>
-                <a:latin typeface="맑은 고딕"/>
-              </a:rPr>
-              <a:t>• </a:t>
+                  <a:srgbClr val="222222"/>
+                </a:solidFill>
+                <a:latin typeface="맑은 고딕"/>
+              </a:rPr>
+              <a:t>모델 간 상대 비교와 취약점 탐색</a:t>
             </a:r>
             <a:r>
               <a:rPr sz="1600" b="0">
@@ -7839,25 +9009,7 @@
                 </a:solidFill>
                 <a:latin typeface="맑은 고딕"/>
               </a:rPr>
-              <a:t>YOLOv3-tiny 등에 남는 반응은 보간에 더한 </a:t>
-            </a:r>
-            <a:r>
-              <a:rPr sz="1600" b="1">
-                <a:solidFill>
-                  <a:srgbClr val="222222"/>
-                </a:solidFill>
-                <a:latin typeface="맑은 고딕"/>
-              </a:rPr>
-              <a:t>노이즈 무늬</a:t>
-            </a:r>
-            <a:r>
-              <a:rPr sz="1600" b="0">
-                <a:solidFill>
-                  <a:srgbClr val="222222"/>
-                </a:solidFill>
-                <a:latin typeface="맑은 고딕"/>
-              </a:rPr>
-              <a:t> 때문 → 다음 질문: 노이즈 무늬에 속아 오경보를 내는가?</a:t>
+              <a:t>으로 해석한다</a:t>
             </a:r>
           </a:p>
         </p:txBody>
@@ -7953,7 +9105,7 @@
                 </a:solidFill>
                 <a:latin typeface="맑은 고딕"/>
               </a:rPr>
-              <a:t>가짜 정상: 노이즈 보간에는 R50과 YOLO26n만 속지 않는다</a:t>
+              <a:t>점 제거: 모델은 점 자체를 본다</a:t>
             </a:r>
           </a:p>
         </p:txBody>
@@ -7988,7 +9140,7 @@
                 </a:solidFill>
                 <a:latin typeface="맑은 고딕"/>
               </a:rPr>
-              <a:t>정상 이미지가 없어 결함의 점을 지운 이미지로 오경보를 쟀다</a:t>
+              <a:t>결함의 점을 지우면 검출이 사라진다 → 위치만 보는 지름길이 아니다</a:t>
             </a:r>
           </a:p>
         </p:txBody>
@@ -8028,44 +9180,9 @@
           </a:p>
         </p:txBody>
       </p:sp>
-      <p:sp>
-        <p:nvSpPr>
-          <p:cNvPr id="6" name="TextBox 5"/>
-          <p:cNvSpPr txBox="1"/>
-          <p:nvPr/>
-        </p:nvSpPr>
-        <p:spPr>
-          <a:xfrm>
-            <a:off x="502920" y="6355080"/>
-            <a:ext cx="10180015" cy="365760"/>
-          </a:xfrm>
-          <a:prstGeom prst="rect">
-            <a:avLst/>
-          </a:prstGeom>
-          <a:noFill/>
-        </p:spPr>
-        <p:txBody>
-          <a:bodyPr wrap="square" anchor="t" lIns="45720" rIns="45720">
-            <a:spAutoFit/>
-          </a:bodyPr>
-          <a:lstStyle/>
-          <a:p>
-            <a:pPr algn="l"/>
-            <a:r>
-              <a:rPr sz="1100" b="0">
-                <a:solidFill>
-                  <a:srgbClr val="555B66"/>
-                </a:solidFill>
-                <a:latin typeface="맑은 고딕"/>
-              </a:rPr>
-              <a:t>가짜 정상은 진짜 정상 제품이 아니다. 오경보율은 범위로 해석한다.</a:t>
-            </a:r>
-          </a:p>
-        </p:txBody>
-      </p:sp>
       <p:pic>
         <p:nvPicPr>
-          <p:cNvPr id="7" name="Picture 6" descr="fig3l_robust6.png"/>
+          <p:cNvPr id="6" name="Picture 5" descr="fig7b_dot_removal_6models.png"/>
           <p:cNvPicPr>
             <a:picLocks noChangeAspect="1"/>
           </p:cNvPicPr>
@@ -8079,8 +9196,8 @@
         </p:blipFill>
         <p:spPr>
           <a:xfrm>
-            <a:off x="457200" y="1849795"/>
-            <a:ext cx="11247120" cy="3158409"/>
+            <a:off x="1741931" y="1554480"/>
+            <a:ext cx="8677656" cy="3337560"/>
           </a:xfrm>
           <a:prstGeom prst="rect">
             <a:avLst/>
@@ -8089,14 +9206,14 @@
       </p:pic>
       <p:sp>
         <p:nvSpPr>
-          <p:cNvPr id="8" name="TextBox 7"/>
+          <p:cNvPr id="7" name="TextBox 6"/>
           <p:cNvSpPr txBox="1"/>
           <p:nvPr/>
         </p:nvSpPr>
         <p:spPr>
           <a:xfrm>
-            <a:off x="640080" y="5120640"/>
-            <a:ext cx="10972800" cy="1554480"/>
+            <a:off x="731520" y="4937760"/>
+            <a:ext cx="10789920" cy="1737360"/>
           </a:xfrm>
           <a:prstGeom prst="rect">
             <a:avLst/>
@@ -8111,11 +9228,11 @@
           <a:p>
             <a:pPr>
               <a:spcAft>
-                <a:spcPts val="400"/>
+                <a:spcPts val="800"/>
               </a:spcAft>
             </a:pPr>
             <a:r>
-              <a:rPr sz="1500" b="1">
+              <a:rPr sz="1600" b="1">
                 <a:solidFill>
                   <a:srgbClr val="2AA7B8"/>
                 </a:solidFill>
@@ -8124,41 +9241,41 @@
               <a:t>• </a:t>
             </a:r>
             <a:r>
-              <a:rPr sz="1500" b="0">
-                <a:solidFill>
-                  <a:srgbClr val="222222"/>
-                </a:solidFill>
-                <a:latin typeface="맑은 고딕"/>
-              </a:rPr>
-              <a:t>NS+노이즈 6px 오경보율: </a:t>
-            </a:r>
-            <a:r>
-              <a:rPr sz="1500" b="1">
-                <a:solidFill>
-                  <a:srgbClr val="222222"/>
-                </a:solidFill>
-                <a:latin typeface="맑은 고딕"/>
-              </a:rPr>
-              <a:t>R50 0.5%, YOLO26n 4.1%</a:t>
-            </a:r>
-            <a:r>
-              <a:rPr sz="1500" b="0">
-                <a:solidFill>
-                  <a:srgbClr val="222222"/>
-                </a:solidFill>
-                <a:latin typeface="맑은 고딕"/>
-              </a:rPr>
-              <a:t>, RT-DETR-l 37%, YOLOv3-tiny 39%, D-FINE-N 49%, MobileNetV3 64%</a:t>
+              <a:rPr sz="1600" b="0">
+                <a:solidFill>
+                  <a:srgbClr val="222222"/>
+                </a:solidFill>
+                <a:latin typeface="맑은 고딕"/>
+              </a:rPr>
+              <a:t>test 정답 663개의 점을 보간으로 지우고 같은 모델을 다시 적용: 노이즈 없는 평균 보간으로 13x13 이상 지우면 </a:t>
+            </a:r>
+            <a:r>
+              <a:rPr sz="1600" b="1">
+                <a:solidFill>
+                  <a:srgbClr val="222222"/>
+                </a:solidFill>
+                <a:latin typeface="맑은 고딕"/>
+              </a:rPr>
+              <a:t>6개 모델 모두 0~3개</a:t>
+            </a:r>
+            <a:r>
+              <a:rPr sz="1600" b="0">
+                <a:solidFill>
+                  <a:srgbClr val="222222"/>
+                </a:solidFill>
+                <a:latin typeface="맑은 고딕"/>
+              </a:rPr>
+              <a:t>만 검출</a:t>
             </a:r>
           </a:p>
           <a:p>
             <a:pPr>
               <a:spcAft>
-                <a:spcPts val="400"/>
+                <a:spcPts val="800"/>
               </a:spcAft>
             </a:pPr>
             <a:r>
-              <a:rPr sz="1500" b="1">
+              <a:rPr sz="1600" b="1">
                 <a:solidFill>
                   <a:srgbClr val="2AA7B8"/>
                 </a:solidFill>
@@ -8167,31 +9284,31 @@
               <a:t>• </a:t>
             </a:r>
             <a:r>
-              <a:rPr sz="1500" b="0">
-                <a:solidFill>
-                  <a:srgbClr val="222222"/>
-                </a:solidFill>
-                <a:latin typeface="맑은 고딕"/>
-              </a:rPr>
-              <a:t>오경보는 대부분 </a:t>
-            </a:r>
-            <a:r>
-              <a:rPr sz="1500" b="1">
-                <a:solidFill>
-                  <a:srgbClr val="222222"/>
-                </a:solidFill>
-                <a:latin typeface="맑은 고딕"/>
-              </a:rPr>
-              <a:t>지운 자리</a:t>
-            </a:r>
-            <a:r>
-              <a:rPr sz="1500" b="0">
-                <a:solidFill>
-                  <a:srgbClr val="222222"/>
-                </a:solidFill>
-                <a:latin typeface="맑은 고딕"/>
-              </a:rPr>
-              <a:t>에서 발생, 분리도(AUC)는 MobileNet 0.842·D-FINE 0.900이 가장 나쁨</a:t>
+              <a:rPr sz="1600" b="0">
+                <a:solidFill>
+                  <a:srgbClr val="222222"/>
+                </a:solidFill>
+                <a:latin typeface="맑은 고딕"/>
+              </a:rPr>
+              <a:t>YOLOv3-tiny 등에 남는 반응은 보간에 더한 </a:t>
+            </a:r>
+            <a:r>
+              <a:rPr sz="1600" b="1">
+                <a:solidFill>
+                  <a:srgbClr val="222222"/>
+                </a:solidFill>
+                <a:latin typeface="맑은 고딕"/>
+              </a:rPr>
+              <a:t>노이즈 무늬</a:t>
+            </a:r>
+            <a:r>
+              <a:rPr sz="1600" b="0">
+                <a:solidFill>
+                  <a:srgbClr val="222222"/>
+                </a:solidFill>
+                <a:latin typeface="맑은 고딕"/>
+              </a:rPr>
+              <a:t> 때문 → 다음 질문: 노이즈 무늬에 속아 오경보를 내는가?</a:t>
             </a:r>
           </a:p>
         </p:txBody>
@@ -8287,7 +9404,7 @@
                 </a:solidFill>
                 <a:latin typeface="맑은 고딕"/>
               </a:rPr>
-              <a:t>가짜 정상 예시: 노이즈 무늬를 점으로 착각한다</a:t>
+              <a:t>가짜 정상: 노이즈 보간에는 R50과 YOLO26n만 속지 않는다</a:t>
             </a:r>
           </a:p>
         </p:txBody>
@@ -8322,7 +9439,7 @@
                 </a:solidFill>
                 <a:latin typeface="맑은 고딕"/>
               </a:rPr>
-              <a:t>평균 보간으로 지우면 반응이 없지만, 노이즈를 더하면 일부 모델이 반응한다</a:t>
+              <a:t>정상 이미지가 없어 결함의 점을 지운 이미지로 오경보를 쟀다</a:t>
             </a:r>
           </a:p>
         </p:txBody>
@@ -8392,14 +9509,14 @@
                 </a:solidFill>
                 <a:latin typeface="맑은 고딕"/>
               </a:rPr>
-              <a:t>예시 두 장(집계는 앞 슬라이드의 369장). 이 예시의 노이즈는 이미지마다 새 난수(시드 0)로 만들어 집계용 이미지와 값이 다르다.</a:t>
+              <a:t>가짜 정상은 진짜 정상 제품이 아니다. 오경보율은 범위로 해석한다.</a:t>
             </a:r>
           </a:p>
         </p:txBody>
       </p:sp>
       <p:pic>
         <p:nvPicPr>
-          <p:cNvPr id="7" name="Picture 6" descr="fig5c_fake_examples.png"/>
+          <p:cNvPr id="7" name="Picture 6" descr="fig3l_robust6.png"/>
           <p:cNvPicPr>
             <a:picLocks noChangeAspect="1"/>
           </p:cNvPicPr>
@@ -8413,8 +9530,8 @@
         </p:blipFill>
         <p:spPr>
           <a:xfrm>
-            <a:off x="1009515" y="1463040"/>
-            <a:ext cx="5296168" cy="4663440"/>
+            <a:off x="457200" y="1849795"/>
+            <a:ext cx="11247120" cy="3158409"/>
           </a:xfrm>
           <a:prstGeom prst="rect">
             <a:avLst/>
@@ -8429,8 +9546,8 @@
         </p:nvSpPr>
         <p:spPr>
           <a:xfrm>
-            <a:off x="7223760" y="1783080"/>
-            <a:ext cx="4663440" cy="4572000"/>
+            <a:off x="640080" y="5120640"/>
+            <a:ext cx="10972800" cy="1554480"/>
           </a:xfrm>
           <a:prstGeom prst="rect">
             <a:avLst/>
@@ -8445,7 +9562,7 @@
           <a:p>
             <a:pPr>
               <a:spcAft>
-                <a:spcPts val="1000"/>
+                <a:spcPts val="400"/>
               </a:spcAft>
             </a:pPr>
             <a:r>
@@ -8464,13 +9581,31 @@
                 </a:solidFill>
                 <a:latin typeface="맑은 고딕"/>
               </a:rPr>
-              <a:t>왼쪽 열: 원본 → 6개 모델이 모두 검출</a:t>
+              <a:t>NS+노이즈 6px 오경보율: </a:t>
+            </a:r>
+            <a:r>
+              <a:rPr sz="1500" b="1">
+                <a:solidFill>
+                  <a:srgbClr val="222222"/>
+                </a:solidFill>
+                <a:latin typeface="맑은 고딕"/>
+              </a:rPr>
+              <a:t>R50 0.5%, YOLO26n 4.1%</a:t>
+            </a:r>
+            <a:r>
+              <a:rPr sz="1500" b="0">
+                <a:solidFill>
+                  <a:srgbClr val="222222"/>
+                </a:solidFill>
+                <a:latin typeface="맑은 고딕"/>
+              </a:rPr>
+              <a:t>, RT-DETR-l 37%, YOLOv3-tiny 39%, D-FINE-N 49%, MobileNetV3 64%</a:t>
             </a:r>
           </a:p>
           <a:p>
             <a:pPr>
               <a:spcAft>
-                <a:spcPts val="1000"/>
+                <a:spcPts val="400"/>
               </a:spcAft>
             </a:pPr>
             <a:r>
@@ -8489,23 +9624,16 @@
                 </a:solidFill>
                 <a:latin typeface="맑은 고딕"/>
               </a:rPr>
-              <a:t>가운데: 평균 보간으로 점을 지움 → 반응 없음(점이 단서)</a:t>
-            </a:r>
-          </a:p>
-          <a:p>
-            <a:pPr>
-              <a:spcAft>
-                <a:spcPts val="1000"/>
-              </a:spcAft>
-            </a:pPr>
+              <a:t>오경보는 대부분 </a:t>
+            </a:r>
             <a:r>
               <a:rPr sz="1500" b="1">
                 <a:solidFill>
-                  <a:srgbClr val="2AA7B8"/>
-                </a:solidFill>
-                <a:latin typeface="맑은 고딕"/>
-              </a:rPr>
-              <a:t>• </a:t>
+                  <a:srgbClr val="222222"/>
+                </a:solidFill>
+                <a:latin typeface="맑은 고딕"/>
+              </a:rPr>
+              <a:t>지운 자리</a:t>
             </a:r>
             <a:r>
               <a:rPr sz="1500" b="0">
@@ -8514,68 +9642,7 @@
                 </a:solidFill>
                 <a:latin typeface="맑은 고딕"/>
               </a:rPr>
-              <a:t>오른쪽 아래(1호기): NS 보간 + 노이즈로 지운 자리의 </a:t>
-            </a:r>
-            <a:r>
-              <a:rPr sz="1500" b="1">
-                <a:solidFill>
-                  <a:srgbClr val="222222"/>
-                </a:solidFill>
-                <a:latin typeface="맑은 고딕"/>
-              </a:rPr>
-              <a:t>노이즈 무늬를 점으로 착각</a:t>
-            </a:r>
-            <a:r>
-              <a:rPr sz="1500" b="0">
-                <a:solidFill>
-                  <a:srgbClr val="222222"/>
-                </a:solidFill>
-                <a:latin typeface="맑은 고딕"/>
-              </a:rPr>
-              <a:t>해 YOLOv3-tiny, MobileNetV3, RT-DETR-l, D-FINE-N이 반응, R50과 YOLO26n은 반응 없음</a:t>
-            </a:r>
-          </a:p>
-          <a:p>
-            <a:pPr>
-              <a:spcAft>
-                <a:spcPts val="1000"/>
-              </a:spcAft>
-            </a:pPr>
-            <a:r>
-              <a:rPr sz="1500" b="1">
-                <a:solidFill>
-                  <a:srgbClr val="2AA7B8"/>
-                </a:solidFill>
-                <a:latin typeface="맑은 고딕"/>
-              </a:rPr>
-              <a:t>• </a:t>
-            </a:r>
-            <a:r>
-              <a:rPr sz="1500" b="0">
-                <a:solidFill>
-                  <a:srgbClr val="222222"/>
-                </a:solidFill>
-                <a:latin typeface="맑은 고딕"/>
-              </a:rPr>
-              <a:t>→ 점의 모양보다 </a:t>
-            </a:r>
-            <a:r>
-              <a:rPr sz="1500" b="1">
-                <a:solidFill>
-                  <a:srgbClr val="222222"/>
-                </a:solidFill>
-                <a:latin typeface="맑은 고딕"/>
-              </a:rPr>
-              <a:t>질감</a:t>
-            </a:r>
-            <a:r>
-              <a:rPr sz="1500" b="0">
-                <a:solidFill>
-                  <a:srgbClr val="222222"/>
-                </a:solidFill>
-                <a:latin typeface="맑은 고딕"/>
-              </a:rPr>
-              <a:t>에 반응하는 모델이 있다</a:t>
+              <a:t>에서 발생, 분리도(AUC)는 MobileNet 0.842·D-FINE 0.900이 가장 나쁨</a:t>
             </a:r>
           </a:p>
         </p:txBody>
@@ -8671,7 +9738,7 @@
                 </a:solidFill>
                 <a:latin typeface="맑은 고딕"/>
               </a:rPr>
-              <a:t>합성 점: 작대기 안에만, 시드 42로 모두가 같게</a:t>
+              <a:t>가짜 정상 예시: 노이즈 무늬를 점으로 착각한다</a:t>
             </a:r>
           </a:p>
         </p:txBody>
@@ -8706,7 +9773,7 @@
                 </a:solidFill>
                 <a:latin typeface="맑은 고딕"/>
               </a:rPr>
-              <a:t>실제로는 놓침이 사실상 없어서, 미탐지 조건을 직접 만들어 시험했다</a:t>
+              <a:t>평균 보간으로 지우면 반응이 없지만, 노이즈를 더하면 일부 모델이 반응한다</a:t>
             </a:r>
           </a:p>
         </p:txBody>
@@ -8746,9 +9813,44 @@
           </a:p>
         </p:txBody>
       </p:sp>
+      <p:sp>
+        <p:nvSpPr>
+          <p:cNvPr id="6" name="TextBox 5"/>
+          <p:cNvSpPr txBox="1"/>
+          <p:nvPr/>
+        </p:nvSpPr>
+        <p:spPr>
+          <a:xfrm>
+            <a:off x="502920" y="6355080"/>
+            <a:ext cx="10180015" cy="365760"/>
+          </a:xfrm>
+          <a:prstGeom prst="rect">
+            <a:avLst/>
+          </a:prstGeom>
+          <a:noFill/>
+        </p:spPr>
+        <p:txBody>
+          <a:bodyPr wrap="square" anchor="t" lIns="45720" rIns="45720">
+            <a:spAutoFit/>
+          </a:bodyPr>
+          <a:lstStyle/>
+          <a:p>
+            <a:pPr algn="l"/>
+            <a:r>
+              <a:rPr sz="1100" b="0">
+                <a:solidFill>
+                  <a:srgbClr val="555B66"/>
+                </a:solidFill>
+                <a:latin typeface="맑은 고딕"/>
+              </a:rPr>
+              <a:t>예시 두 장(집계는 앞 슬라이드의 369장). 이 예시의 노이즈는 이미지마다 새 난수(시드 0)로 만들어 집계용 이미지와 값이 다르다.</a:t>
+            </a:r>
+          </a:p>
+        </p:txBody>
+      </p:sp>
       <p:pic>
         <p:nvPicPr>
-          <p:cNvPr id="6" name="Picture 5" descr="fig3m_synth_bars.png"/>
+          <p:cNvPr id="7" name="Picture 6" descr="fig5c_fake_examples.png"/>
           <p:cNvPicPr>
             <a:picLocks noChangeAspect="1"/>
           </p:cNvPicPr>
@@ -8762,8 +9864,8 @@
         </p:blipFill>
         <p:spPr>
           <a:xfrm>
-            <a:off x="1181898" y="1645920"/>
-            <a:ext cx="4677083" cy="4846320"/>
+            <a:off x="1009515" y="1463040"/>
+            <a:ext cx="5296168" cy="4663440"/>
           </a:xfrm>
           <a:prstGeom prst="rect">
             <a:avLst/>
@@ -8772,14 +9874,14 @@
       </p:pic>
       <p:sp>
         <p:nvSpPr>
-          <p:cNvPr id="7" name="TextBox 6"/>
+          <p:cNvPr id="8" name="TextBox 7"/>
           <p:cNvSpPr txBox="1"/>
           <p:nvPr/>
         </p:nvSpPr>
         <p:spPr>
           <a:xfrm>
-            <a:off x="6766560" y="1783080"/>
-            <a:ext cx="5029200" cy="4572000"/>
+            <a:off x="7223760" y="1783080"/>
+            <a:ext cx="4663440" cy="4572000"/>
           </a:xfrm>
           <a:prstGeom prst="rect">
             <a:avLst/>
@@ -8794,7 +9896,7 @@
           <a:p>
             <a:pPr>
               <a:spcAft>
-                <a:spcPts val="600"/>
+                <a:spcPts val="1000"/>
               </a:spcAft>
             </a:pPr>
             <a:r>
@@ -8813,31 +9915,13 @@
                 </a:solidFill>
                 <a:latin typeface="맑은 고딕"/>
               </a:rPr>
-              <a:t>실제 점을 지우고 영상에서 찾은 </a:t>
-            </a:r>
-            <a:r>
-              <a:rPr sz="1500" b="1">
-                <a:solidFill>
-                  <a:srgbClr val="222222"/>
-                </a:solidFill>
-                <a:latin typeface="맑은 고딕"/>
-              </a:rPr>
-              <a:t>작대기(막대) 안쪽</a:t>
-            </a:r>
-            <a:r>
-              <a:rPr sz="1500" b="0">
-                <a:solidFill>
-                  <a:srgbClr val="222222"/>
-                </a:solidFill>
-                <a:latin typeface="맑은 고딕"/>
-              </a:rPr>
-              <a:t>에만 val의 실제 점(투과율 조각)을 합성</a:t>
+              <a:t>왼쪽 열: 원본 → 6개 모델이 모두 검출</a:t>
             </a:r>
           </a:p>
           <a:p>
             <a:pPr>
               <a:spcAft>
-                <a:spcPts val="600"/>
+                <a:spcPts val="1000"/>
               </a:spcAft>
             </a:pPr>
             <a:r>
@@ -8856,31 +9940,13 @@
                 </a:solidFill>
                 <a:latin typeface="맑은 고딕"/>
               </a:rPr>
-              <a:t>점의 </a:t>
-            </a:r>
-            <a:r>
-              <a:rPr sz="1500" b="1">
-                <a:solidFill>
-                  <a:srgbClr val="222222"/>
-                </a:solidFill>
-                <a:latin typeface="맑은 고딕"/>
-              </a:rPr>
-              <a:t>진하기(4단계) x 크기(3단계)</a:t>
-            </a:r>
-            <a:r>
-              <a:rPr sz="1500" b="0">
-                <a:solidFill>
-                  <a:srgbClr val="222222"/>
-                </a:solidFill>
-                <a:latin typeface="맑은 고딕"/>
-              </a:rPr>
-              <a:t>를 바꿔 옅은 점까지 시험</a:t>
+              <a:t>가운데: 평균 보간으로 점을 지움 → 반응 없음(점이 단서)</a:t>
             </a:r>
           </a:p>
           <a:p>
             <a:pPr>
               <a:spcAft>
-                <a:spcPts val="600"/>
+                <a:spcPts val="1000"/>
               </a:spcAft>
             </a:pPr>
             <a:r>
@@ -8899,7 +9965,7 @@
                 </a:solidFill>
                 <a:latin typeface="맑은 고딕"/>
               </a:rPr>
-              <a:t>test 바탕 386장, 점 1,436개. 실제 점 663개가 </a:t>
+              <a:t>오른쪽 아래(1호기): NS 보간 + 노이즈로 지운 자리의 </a:t>
             </a:r>
             <a:r>
               <a:rPr sz="1500" b="1">
@@ -8908,13 +9974,22 @@
                 </a:solidFill>
                 <a:latin typeface="맑은 고딕"/>
               </a:rPr>
-              <a:t>전부 검출된 막대에 닿음</a:t>
+              <a:t>노이즈 무늬를 점으로 착각</a:t>
+            </a:r>
+            <a:r>
+              <a:rPr sz="1500" b="0">
+                <a:solidFill>
+                  <a:srgbClr val="222222"/>
+                </a:solidFill>
+                <a:latin typeface="맑은 고딕"/>
+              </a:rPr>
+              <a:t>해 YOLOv3-tiny, MobileNetV3, RT-DETR-l, D-FINE-N이 반응, R50과 YOLO26n은 반응 없음</a:t>
             </a:r>
           </a:p>
           <a:p>
             <a:pPr>
               <a:spcAft>
-                <a:spcPts val="600"/>
+                <a:spcPts val="1000"/>
               </a:spcAft>
             </a:pPr>
             <a:r>
@@ -8927,13 +10002,22 @@
               <a:t>• </a:t>
             </a:r>
             <a:r>
+              <a:rPr sz="1500" b="0">
+                <a:solidFill>
+                  <a:srgbClr val="222222"/>
+                </a:solidFill>
+                <a:latin typeface="맑은 고딕"/>
+              </a:rPr>
+              <a:t>→ 점의 모양보다 </a:t>
+            </a:r>
+            <a:r>
               <a:rPr sz="1500" b="1">
                 <a:solidFill>
                   <a:srgbClr val="222222"/>
                 </a:solidFill>
                 <a:latin typeface="맑은 고딕"/>
               </a:rPr>
-              <a:t>시드 42 + 이미지 이름별 시드</a:t>
+              <a:t>질감</a:t>
             </a:r>
             <a:r>
               <a:rPr sz="1500" b="0">
@@ -8942,41 +10026,7 @@
                 </a:solidFill>
                 <a:latin typeface="맑은 고딕"/>
               </a:rPr>
-              <a:t>로 고정, 기준본과 --verify로 팀원 PC에서 같은 데이터인지 확인</a:t>
-            </a:r>
-          </a:p>
-          <a:p>
-            <a:pPr>
-              <a:spcAft>
-                <a:spcPts val="600"/>
-              </a:spcAft>
-            </a:pPr>
-            <a:r>
-              <a:rPr sz="1500" b="1">
-                <a:solidFill>
-                  <a:srgbClr val="2AA7B8"/>
-                </a:solidFill>
-                <a:latin typeface="맑은 고딕"/>
-              </a:rPr>
-              <a:t>• </a:t>
-            </a:r>
-            <a:r>
-              <a:rPr sz="1500" b="0">
-                <a:solidFill>
-                  <a:srgbClr val="222222"/>
-                </a:solidFill>
-                <a:latin typeface="맑은 고딕"/>
-              </a:rPr>
-              <a:t>합성은 실제보다 약 10%p 덜 현실적 → 절대 수치가 아닌 </a:t>
-            </a:r>
-            <a:r>
-              <a:rPr sz="1500" b="1">
-                <a:solidFill>
-                  <a:srgbClr val="222222"/>
-                </a:solidFill>
-                <a:latin typeface="맑은 고딕"/>
-              </a:rPr>
-              <a:t>상대 비교</a:t>
+              <a:t>에 반응하는 모델이 있다</a:t>
             </a:r>
           </a:p>
         </p:txBody>
@@ -9498,7 +10548,7 @@
                 </a:solidFill>
                 <a:latin typeface="맑은 고딕"/>
               </a:rPr>
-              <a:t>합성 점 조건별 확대</a:t>
+              <a:t>합성 점: 작대기 안에만, 시드 42로 모두가 같게</a:t>
             </a:r>
           </a:p>
         </p:txBody>
@@ -9533,7 +10583,7 @@
                 </a:solidFill>
                 <a:latin typeface="맑은 고딕"/>
               </a:rPr>
-              <a:t>진하기(s)와 크기(f)를 바꾸면 대비가 달라지고, 대비가 낮을수록 눈에도 안 보인다</a:t>
+              <a:t>실제로는 놓침이 사실상 없어서, 미탐지 조건을 직접 만들어 시험했다</a:t>
             </a:r>
           </a:p>
         </p:txBody>
@@ -9575,7 +10625,7 @@
       </p:sp>
       <p:pic>
         <p:nvPicPr>
-          <p:cNvPr id="6" name="Picture 5" descr="fig3n_synth_dots.png"/>
+          <p:cNvPr id="6" name="Picture 5" descr="fig3m_synth_bars.png"/>
           <p:cNvPicPr>
             <a:picLocks noChangeAspect="1"/>
           </p:cNvPicPr>
@@ -9589,8 +10639,8 @@
         </p:blipFill>
         <p:spPr>
           <a:xfrm>
-            <a:off x="1309254" y="1600200"/>
-            <a:ext cx="9543010" cy="3749039"/>
+            <a:off x="1181898" y="1645920"/>
+            <a:ext cx="4677083" cy="4846320"/>
           </a:xfrm>
           <a:prstGeom prst="rect">
             <a:avLst/>
@@ -9605,8 +10655,8 @@
         </p:nvSpPr>
         <p:spPr>
           <a:xfrm>
-            <a:off x="731520" y="5440680"/>
-            <a:ext cx="10789920" cy="1280160"/>
+            <a:off x="6766560" y="1783080"/>
+            <a:ext cx="5029200" cy="4572000"/>
           </a:xfrm>
           <a:prstGeom prst="rect">
             <a:avLst/>
@@ -9640,7 +10690,25 @@
                 </a:solidFill>
                 <a:latin typeface="맑은 고딕"/>
               </a:rPr>
-              <a:t>s = 깊이 배율(1.0이 실제 점 세기), f = 크기 배율, 대비 = 둘레 밝기 − 점 밝기. 40x40px를 7배 확대</a:t>
+              <a:t>실제 점을 지우고 영상에서 찾은 </a:t>
+            </a:r>
+            <a:r>
+              <a:rPr sz="1500" b="1">
+                <a:solidFill>
+                  <a:srgbClr val="222222"/>
+                </a:solidFill>
+                <a:latin typeface="맑은 고딕"/>
+              </a:rPr>
+              <a:t>작대기(막대) 안쪽</a:t>
+            </a:r>
+            <a:r>
+              <a:rPr sz="1500" b="0">
+                <a:solidFill>
+                  <a:srgbClr val="222222"/>
+                </a:solidFill>
+                <a:latin typeface="맑은 고딕"/>
+              </a:rPr>
+              <a:t>에만 val의 실제 점(투과율 조각)을 합성</a:t>
             </a:r>
           </a:p>
           <a:p>
@@ -9665,7 +10733,127 @@
                 </a:solidFill>
                 <a:latin typeface="맑은 고딕"/>
               </a:rPr>
-              <a:t>대비 6 미만은 거의 보이지 않고 모든 모델이 못 찾는다. 실제 test 점의 대비 중앙값은 22.8이라 s=1.0 근처가 실제 수준이다</a:t>
+              <a:t>점의 </a:t>
+            </a:r>
+            <a:r>
+              <a:rPr sz="1500" b="1">
+                <a:solidFill>
+                  <a:srgbClr val="222222"/>
+                </a:solidFill>
+                <a:latin typeface="맑은 고딕"/>
+              </a:rPr>
+              <a:t>진하기(4단계) x 크기(3단계)</a:t>
+            </a:r>
+            <a:r>
+              <a:rPr sz="1500" b="0">
+                <a:solidFill>
+                  <a:srgbClr val="222222"/>
+                </a:solidFill>
+                <a:latin typeface="맑은 고딕"/>
+              </a:rPr>
+              <a:t>를 바꿔 옅은 점까지 시험</a:t>
+            </a:r>
+          </a:p>
+          <a:p>
+            <a:pPr>
+              <a:spcAft>
+                <a:spcPts val="600"/>
+              </a:spcAft>
+            </a:pPr>
+            <a:r>
+              <a:rPr sz="1500" b="1">
+                <a:solidFill>
+                  <a:srgbClr val="2AA7B8"/>
+                </a:solidFill>
+                <a:latin typeface="맑은 고딕"/>
+              </a:rPr>
+              <a:t>• </a:t>
+            </a:r>
+            <a:r>
+              <a:rPr sz="1500" b="0">
+                <a:solidFill>
+                  <a:srgbClr val="222222"/>
+                </a:solidFill>
+                <a:latin typeface="맑은 고딕"/>
+              </a:rPr>
+              <a:t>test 바탕 386장, 점 1,436개. 실제 점 663개가 </a:t>
+            </a:r>
+            <a:r>
+              <a:rPr sz="1500" b="1">
+                <a:solidFill>
+                  <a:srgbClr val="222222"/>
+                </a:solidFill>
+                <a:latin typeface="맑은 고딕"/>
+              </a:rPr>
+              <a:t>전부 검출된 막대에 닿음</a:t>
+            </a:r>
+          </a:p>
+          <a:p>
+            <a:pPr>
+              <a:spcAft>
+                <a:spcPts val="600"/>
+              </a:spcAft>
+            </a:pPr>
+            <a:r>
+              <a:rPr sz="1500" b="1">
+                <a:solidFill>
+                  <a:srgbClr val="2AA7B8"/>
+                </a:solidFill>
+                <a:latin typeface="맑은 고딕"/>
+              </a:rPr>
+              <a:t>• </a:t>
+            </a:r>
+            <a:r>
+              <a:rPr sz="1500" b="1">
+                <a:solidFill>
+                  <a:srgbClr val="222222"/>
+                </a:solidFill>
+                <a:latin typeface="맑은 고딕"/>
+              </a:rPr>
+              <a:t>시드 42 + 이미지 이름별 시드</a:t>
+            </a:r>
+            <a:r>
+              <a:rPr sz="1500" b="0">
+                <a:solidFill>
+                  <a:srgbClr val="222222"/>
+                </a:solidFill>
+                <a:latin typeface="맑은 고딕"/>
+              </a:rPr>
+              <a:t>로 고정, 기준본과 --verify로 팀원 PC에서 같은 데이터인지 확인</a:t>
+            </a:r>
+          </a:p>
+          <a:p>
+            <a:pPr>
+              <a:spcAft>
+                <a:spcPts val="600"/>
+              </a:spcAft>
+            </a:pPr>
+            <a:r>
+              <a:rPr sz="1500" b="1">
+                <a:solidFill>
+                  <a:srgbClr val="2AA7B8"/>
+                </a:solidFill>
+                <a:latin typeface="맑은 고딕"/>
+              </a:rPr>
+              <a:t>• </a:t>
+            </a:r>
+            <a:r>
+              <a:rPr sz="1500" b="0">
+                <a:solidFill>
+                  <a:srgbClr val="222222"/>
+                </a:solidFill>
+                <a:latin typeface="맑은 고딕"/>
+              </a:rPr>
+              <a:t>합성은 실제보다 약 10%p 덜 현실적 → 절대 수치가 아닌 </a:t>
+            </a:r>
+            <a:r>
+              <a:rPr sz="1500" b="1">
+                <a:solidFill>
+                  <a:srgbClr val="222222"/>
+                </a:solidFill>
+                <a:latin typeface="맑은 고딕"/>
+              </a:rPr>
+              <a:t>상대 비교</a:t>
             </a:r>
           </a:p>
         </p:txBody>
@@ -9761,7 +10949,7 @@
                 </a:solidFill>
                 <a:latin typeface="맑은 고딕"/>
               </a:rPr>
-              <a:t>합성 점 결과: 옅은 점이 미탐지 조건이다</a:t>
+              <a:t>합성 점 조건별 확대</a:t>
             </a:r>
           </a:p>
         </p:txBody>
@@ -9796,7 +10984,7 @@
                 </a:solidFill>
                 <a:latin typeface="맑은 고딕"/>
               </a:rPr>
-              <a:t>val 임계값에서는 D-FINE-N이 앞서지만 대부분 느슨한 임계값 효과, 맞추면 차이가 줄어든다</a:t>
+              <a:t>진하기(s)와 크기(f)를 바꾸면 대비가 달라지고, 대비가 낮을수록 눈에도 안 보인다</a:t>
             </a:r>
           </a:p>
         </p:txBody>
@@ -9836,44 +11024,9 @@
           </a:p>
         </p:txBody>
       </p:sp>
-      <p:sp>
-        <p:nvSpPr>
-          <p:cNvPr id="6" name="TextBox 5"/>
-          <p:cNvSpPr txBox="1"/>
-          <p:nvPr/>
-        </p:nvSpPr>
-        <p:spPr>
-          <a:xfrm>
-            <a:off x="502920" y="6355080"/>
-            <a:ext cx="10180015" cy="365760"/>
-          </a:xfrm>
-          <a:prstGeom prst="rect">
-            <a:avLst/>
-          </a:prstGeom>
-          <a:noFill/>
-        </p:spPr>
-        <p:txBody>
-          <a:bodyPr wrap="square" anchor="t" lIns="45720" rIns="45720">
-            <a:spAutoFit/>
-          </a:bodyPr>
-          <a:lstStyle/>
-          <a:p>
-            <a:pPr algn="l"/>
-            <a:r>
-              <a:rPr sz="1100" b="0">
-                <a:solidFill>
-                  <a:srgbClr val="555B66"/>
-                </a:solidFill>
-                <a:latin typeface="맑은 고딕"/>
-              </a:rPr>
-              <a:t>합성 점 시험은 test 이미지가 바탕이며 참고용이다. 합성 점 AP와 오경보 예산 비교는 합성 이미지 자체로 계산한 분석용 수치다.</a:t>
-            </a:r>
-          </a:p>
-        </p:txBody>
-      </p:sp>
       <p:pic>
         <p:nvPicPr>
-          <p:cNvPr id="7" name="Picture 6" descr="fig3k_compare6.png"/>
+          <p:cNvPr id="6" name="Picture 5" descr="fig3n_synth_dots.png"/>
           <p:cNvPicPr>
             <a:picLocks noChangeAspect="1"/>
           </p:cNvPicPr>
@@ -9887,8 +11040,8 @@
         </p:blipFill>
         <p:spPr>
           <a:xfrm>
-            <a:off x="547460" y="1645919"/>
-            <a:ext cx="11066599" cy="3383280"/>
+            <a:off x="1309254" y="1600200"/>
+            <a:ext cx="9543010" cy="3749039"/>
           </a:xfrm>
           <a:prstGeom prst="rect">
             <a:avLst/>
@@ -9897,14 +11050,14 @@
       </p:pic>
       <p:sp>
         <p:nvSpPr>
-          <p:cNvPr id="8" name="TextBox 7"/>
+          <p:cNvPr id="7" name="TextBox 6"/>
           <p:cNvSpPr txBox="1"/>
           <p:nvPr/>
         </p:nvSpPr>
         <p:spPr>
           <a:xfrm>
-            <a:off x="640080" y="4983480"/>
-            <a:ext cx="10972800" cy="1645920"/>
+            <a:off x="731520" y="5440680"/>
+            <a:ext cx="10789920" cy="1280160"/>
           </a:xfrm>
           <a:prstGeom prst="rect">
             <a:avLst/>
@@ -9919,7 +11072,7 @@
           <a:p>
             <a:pPr>
               <a:spcAft>
-                <a:spcPts val="300"/>
+                <a:spcPts val="600"/>
               </a:spcAft>
             </a:pPr>
             <a:r>
@@ -9938,13 +11091,13 @@
                 </a:solidFill>
                 <a:latin typeface="맑은 고딕"/>
               </a:rPr>
-              <a:t>대비(둘레-점 밝기) 6 미만은 모든 모델이 거의 0%, 20 이상에서 약 77~89%</a:t>
+              <a:t>s = 깊이 배율(1.0이 실제 점 세기), f = 크기 배율, 대비 = 둘레 밝기 − 점 밝기. 40x40px를 7배 확대</a:t>
             </a:r>
           </a:p>
           <a:p>
             <a:pPr>
               <a:spcAft>
-                <a:spcPts val="300"/>
+                <a:spcPts val="600"/>
               </a:spcAft>
             </a:pPr>
             <a:r>
@@ -9963,59 +11116,7 @@
                 </a:solidFill>
                 <a:latin typeface="맑은 고딕"/>
               </a:rPr>
-              <a:t>임계값과 무관한 합성 점 AP: </a:t>
-            </a:r>
-            <a:r>
-              <a:rPr sz="1500" b="1">
-                <a:solidFill>
-                  <a:srgbClr val="222222"/>
-                </a:solidFill>
-                <a:latin typeface="맑은 고딕"/>
-              </a:rPr>
-              <a:t>D-FINE-N 0.574 ≈ R50 0.567</a:t>
-            </a:r>
-            <a:r>
-              <a:rPr sz="1500" b="0">
-                <a:solidFill>
-                  <a:srgbClr val="222222"/>
-                </a:solidFill>
-                <a:latin typeface="맑은 고딕"/>
-              </a:rPr>
-              <a:t> &gt; YOLOv3-tiny 0.515 ≈ YOLO26n 0.501 &gt; RT-DETR-l 0.451 &gt;&gt; </a:t>
-            </a:r>
-            <a:r>
-              <a:rPr sz="1500" b="1">
-                <a:solidFill>
-                  <a:srgbClr val="222222"/>
-                </a:solidFill>
-                <a:latin typeface="맑은 고딕"/>
-              </a:rPr>
-              <a:t>MobileNetV3 0.262</a:t>
-            </a:r>
-          </a:p>
-          <a:p>
-            <a:pPr>
-              <a:spcAft>
-                <a:spcPts val="300"/>
-              </a:spcAft>
-            </a:pPr>
-            <a:r>
-              <a:rPr sz="1500" b="1">
-                <a:solidFill>
-                  <a:srgbClr val="2AA7B8"/>
-                </a:solidFill>
-                <a:latin typeface="맑은 고딕"/>
-              </a:rPr>
-              <a:t>• </a:t>
-            </a:r>
-            <a:r>
-              <a:rPr sz="1500" b="0">
-                <a:solidFill>
-                  <a:srgbClr val="222222"/>
-                </a:solidFill>
-                <a:latin typeface="맑은 고딕"/>
-              </a:rPr>
-              <a:t>3호기(대비 14 이상): MobileNetV3 4%, YOLO26n·RT-DETR-l 약 61%, R50·YOLOv3-tiny·D-FINE-N은 호기 차이가 작음</a:t>
+              <a:t>대비 6 미만은 거의 보이지 않고 모든 모델이 못 찾는다. 실제 test 점의 대비 중앙값은 22.8이라 s=1.0 근처가 실제 수준이다</a:t>
             </a:r>
           </a:p>
         </p:txBody>
@@ -10111,7 +11212,7 @@
                 </a:solidFill>
                 <a:latin typeface="맑은 고딕"/>
               </a:rPr>
-              <a:t>호기·해상도: 뚜렷한 효과는 확인되지 않았다</a:t>
+              <a:t>합성 점 결과: 옅은 점이 미탐지 조건이다</a:t>
             </a:r>
           </a:p>
         </p:txBody>
@@ -10146,7 +11247,7 @@
                 </a:solidFill>
                 <a:latin typeface="맑은 고딕"/>
               </a:rPr>
-              <a:t>가장 낮은 그룹(test)은 공식 라벨 박스가 76%여서 IoU 점수가 낮을 뿐이다</a:t>
+              <a:t>val 임계값에서는 D-FINE-N이 앞서지만 대부분 느슨한 임계값 효과, 맞추면 차이가 줄어든다</a:t>
             </a:r>
           </a:p>
         </p:txBody>
@@ -10186,9 +11287,44 @@
           </a:p>
         </p:txBody>
       </p:sp>
+      <p:sp>
+        <p:nvSpPr>
+          <p:cNvPr id="6" name="TextBox 5"/>
+          <p:cNvSpPr txBox="1"/>
+          <p:nvPr/>
+        </p:nvSpPr>
+        <p:spPr>
+          <a:xfrm>
+            <a:off x="502920" y="6355080"/>
+            <a:ext cx="10180015" cy="365760"/>
+          </a:xfrm>
+          <a:prstGeom prst="rect">
+            <a:avLst/>
+          </a:prstGeom>
+          <a:noFill/>
+        </p:spPr>
+        <p:txBody>
+          <a:bodyPr wrap="square" anchor="t" lIns="45720" rIns="45720">
+            <a:spAutoFit/>
+          </a:bodyPr>
+          <a:lstStyle/>
+          <a:p>
+            <a:pPr algn="l"/>
+            <a:r>
+              <a:rPr sz="1100" b="0">
+                <a:solidFill>
+                  <a:srgbClr val="555B66"/>
+                </a:solidFill>
+                <a:latin typeface="맑은 고딕"/>
+              </a:rPr>
+              <a:t>합성 점 시험은 test 이미지가 바탕이며 참고용이다. 합성 점 AP와 오경보 예산 비교는 합성 이미지 자체로 계산한 분석용 수치다.</a:t>
+            </a:r>
+          </a:p>
+        </p:txBody>
+      </p:sp>
       <p:pic>
         <p:nvPicPr>
-          <p:cNvPr id="6" name="Picture 5" descr="fig3f_groups_chart.png"/>
+          <p:cNvPr id="7" name="Picture 6" descr="fig3k_compare6.png"/>
           <p:cNvPicPr>
             <a:picLocks noChangeAspect="1"/>
           </p:cNvPicPr>
@@ -10202,8 +11338,8 @@
         </p:blipFill>
         <p:spPr>
           <a:xfrm>
-            <a:off x="550398" y="1554480"/>
-            <a:ext cx="11060723" cy="3383279"/>
+            <a:off x="547460" y="1645919"/>
+            <a:ext cx="11066599" cy="3383280"/>
           </a:xfrm>
           <a:prstGeom prst="rect">
             <a:avLst/>
@@ -10212,14 +11348,14 @@
       </p:pic>
       <p:sp>
         <p:nvSpPr>
-          <p:cNvPr id="7" name="TextBox 6"/>
+          <p:cNvPr id="8" name="TextBox 7"/>
           <p:cNvSpPr txBox="1"/>
           <p:nvPr/>
         </p:nvSpPr>
         <p:spPr>
           <a:xfrm>
-            <a:off x="731520" y="5029200"/>
-            <a:ext cx="10789920" cy="1645920"/>
+            <a:off x="640080" y="4983480"/>
+            <a:ext cx="10972800" cy="1645920"/>
           </a:xfrm>
           <a:prstGeom prst="rect">
             <a:avLst/>
@@ -10234,11 +11370,11 @@
           <a:p>
             <a:pPr>
               <a:spcAft>
-                <a:spcPts val="800"/>
+                <a:spcPts val="300"/>
               </a:spcAft>
             </a:pPr>
             <a:r>
-              <a:rPr sz="1600" b="1">
+              <a:rPr sz="1500" b="1">
                 <a:solidFill>
                   <a:srgbClr val="2AA7B8"/>
                 </a:solidFill>
@@ -10247,23 +11383,23 @@
               <a:t>• </a:t>
             </a:r>
             <a:r>
-              <a:rPr sz="1600" b="0">
-                <a:solidFill>
-                  <a:srgbClr val="222222"/>
-                </a:solidFill>
-                <a:latin typeface="맑은 고딕"/>
-              </a:rPr>
-              <a:t>해상도별 공식 라벨 박스 비율(test 기준)이 10~76%로 달라 라벨 구성이 섞인다. 공식 라벨 이미지끼리만 비교하면 F1이 0.956~0.977로 좁아지고 구간이 겹친다</a:t>
+              <a:rPr sz="1500" b="0">
+                <a:solidFill>
+                  <a:srgbClr val="222222"/>
+                </a:solidFill>
+                <a:latin typeface="맑은 고딕"/>
+              </a:rPr>
+              <a:t>대비(둘레-점 밝기) 6 미만은 모든 모델이 거의 0%, 20 이상에서 약 77~89%</a:t>
             </a:r>
           </a:p>
           <a:p>
             <a:pPr>
               <a:spcAft>
-                <a:spcPts val="800"/>
+                <a:spcPts val="300"/>
               </a:spcAft>
             </a:pPr>
             <a:r>
-              <a:rPr sz="1600" b="1">
+              <a:rPr sz="1500" b="1">
                 <a:solidFill>
                   <a:srgbClr val="2AA7B8"/>
                 </a:solidFill>
@@ -10272,31 +11408,65 @@
               <a:t>• </a:t>
             </a:r>
             <a:r>
-              <a:rPr sz="1600" b="0">
-                <a:solidFill>
-                  <a:srgbClr val="222222"/>
-                </a:solidFill>
-                <a:latin typeface="맑은 고딕"/>
-              </a:rPr>
-              <a:t>그룹별 표본이 작다(공식 라벨 이미지 호기별 20~36장). 합성 점에서 보인 3호기 약점은 </a:t>
-            </a:r>
-            <a:r>
-              <a:rPr sz="1600" b="1">
-                <a:solidFill>
-                  <a:srgbClr val="222222"/>
-                </a:solidFill>
-                <a:latin typeface="맑은 고딕"/>
-              </a:rPr>
-              <a:t>모델에 따라</a:t>
-            </a:r>
-            <a:r>
-              <a:rPr sz="1600" b="0">
-                <a:solidFill>
-                  <a:srgbClr val="222222"/>
-                </a:solidFill>
-                <a:latin typeface="맑은 고딕"/>
-              </a:rPr>
-              <a:t> 다르다(앞 슬라이드)</a:t>
+              <a:rPr sz="1500" b="0">
+                <a:solidFill>
+                  <a:srgbClr val="222222"/>
+                </a:solidFill>
+                <a:latin typeface="맑은 고딕"/>
+              </a:rPr>
+              <a:t>임계값과 무관한 합성 점 AP: </a:t>
+            </a:r>
+            <a:r>
+              <a:rPr sz="1500" b="1">
+                <a:solidFill>
+                  <a:srgbClr val="222222"/>
+                </a:solidFill>
+                <a:latin typeface="맑은 고딕"/>
+              </a:rPr>
+              <a:t>D-FINE-N 0.574 ≈ R50 0.567</a:t>
+            </a:r>
+            <a:r>
+              <a:rPr sz="1500" b="0">
+                <a:solidFill>
+                  <a:srgbClr val="222222"/>
+                </a:solidFill>
+                <a:latin typeface="맑은 고딕"/>
+              </a:rPr>
+              <a:t> &gt; YOLOv3-tiny 0.515 ≈ YOLO26n 0.501 &gt; RT-DETR-l 0.451 &gt;&gt; </a:t>
+            </a:r>
+            <a:r>
+              <a:rPr sz="1500" b="1">
+                <a:solidFill>
+                  <a:srgbClr val="222222"/>
+                </a:solidFill>
+                <a:latin typeface="맑은 고딕"/>
+              </a:rPr>
+              <a:t>MobileNetV3 0.262</a:t>
+            </a:r>
+          </a:p>
+          <a:p>
+            <a:pPr>
+              <a:spcAft>
+                <a:spcPts val="300"/>
+              </a:spcAft>
+            </a:pPr>
+            <a:r>
+              <a:rPr sz="1500" b="1">
+                <a:solidFill>
+                  <a:srgbClr val="2AA7B8"/>
+                </a:solidFill>
+                <a:latin typeface="맑은 고딕"/>
+              </a:rPr>
+              <a:t>• </a:t>
+            </a:r>
+            <a:r>
+              <a:rPr sz="1500" b="0">
+                <a:solidFill>
+                  <a:srgbClr val="222222"/>
+                </a:solidFill>
+                <a:latin typeface="맑은 고딕"/>
+              </a:rPr>
+              <a:t>3호기(대비 14 이상): MobileNetV3 4%, YOLO26n·RT-DETR-l 약 61%, R50·YOLOv3-tiny·D-FINE-N은 호기 차이가 작음</a:t>
             </a:r>
           </a:p>
         </p:txBody>
@@ -10392,7 +11562,7 @@
                 </a:solidFill>
                 <a:latin typeface="맑은 고딕"/>
               </a:rPr>
-              <a:t>③ 종합: 모델별 성적표</a:t>
+              <a:t>호기·해상도: 뚜렷한 효과는 확인되지 않았다</a:t>
             </a:r>
           </a:p>
         </p:txBody>
@@ -10427,7 +11597,7 @@
                 </a:solidFill>
                 <a:latin typeface="맑은 고딕"/>
               </a:rPr>
-              <a:t>한 모델이 모든 항목에서 1등은 아니다</a:t>
+              <a:t>가장 낮은 그룹(test)은 공식 라벨 박스가 76%여서 IoU 점수가 낮을 뿐이다</a:t>
             </a:r>
           </a:p>
         </p:txBody>
@@ -10467,16 +11637,40 @@
           </a:p>
         </p:txBody>
       </p:sp>
-      <p:sp>
-        <p:nvSpPr>
-          <p:cNvPr id="6" name="TextBox 5"/>
+      <p:pic>
+        <p:nvPicPr>
+          <p:cNvPr id="6" name="Picture 5" descr="fig7c_groups_6models.png"/>
+          <p:cNvPicPr>
+            <a:picLocks noChangeAspect="1"/>
+          </p:cNvPicPr>
+          <p:nvPr/>
+        </p:nvPicPr>
+        <p:blipFill>
+          <a:blip r:embed="rId2"/>
+          <a:stretch>
+            <a:fillRect/>
+          </a:stretch>
+        </p:blipFill>
+        <p:spPr>
+          <a:xfrm>
+            <a:off x="365760" y="1644716"/>
+            <a:ext cx="11430000" cy="3248526"/>
+          </a:xfrm>
+          <a:prstGeom prst="rect">
+            <a:avLst/>
+          </a:prstGeom>
+        </p:spPr>
+      </p:pic>
+      <p:sp>
+        <p:nvSpPr>
+          <p:cNvPr id="7" name="TextBox 6"/>
           <p:cNvSpPr txBox="1"/>
           <p:nvPr/>
         </p:nvSpPr>
         <p:spPr>
           <a:xfrm>
-            <a:off x="502920" y="6355080"/>
-            <a:ext cx="10180015" cy="365760"/>
+            <a:off x="731520" y="5029200"/>
+            <a:ext cx="10789920" cy="1645920"/>
           </a:xfrm>
           <a:prstGeom prst="rect">
             <a:avLst/>
@@ -10484,1217 +11678,6 @@
           <a:noFill/>
         </p:spPr>
         <p:txBody>
-          <a:bodyPr wrap="square" anchor="t" lIns="45720" rIns="45720">
-            <a:spAutoFit/>
-          </a:bodyPr>
-          <a:lstStyle/>
-          <a:p>
-            <a:pPr algn="l"/>
-            <a:r>
-              <a:rPr sz="1100" b="0">
-                <a:solidFill>
-                  <a:srgbClr val="555B66"/>
-                </a:solidFill>
-                <a:latin typeface="맑은 고딕"/>
-              </a:rPr>
-              <a:t>val mAP50-95는 val, 나머지는 test 이미지 기준(가짜 정상·합성 점은 인위 이미지). 상세 수치는 docs/experiments.md.</a:t>
-            </a:r>
-          </a:p>
-        </p:txBody>
-      </p:sp>
-      <p:graphicFrame>
-        <p:nvGraphicFramePr>
-          <p:cNvPr id="7" name="Table 6"/>
-          <p:cNvGraphicFramePr>
-            <a:graphicFrameLocks noGrp="1"/>
-          </p:cNvGraphicFramePr>
-          <p:nvPr/>
-        </p:nvGraphicFramePr>
-        <p:xfrm>
-          <a:off x="457200" y="1783080"/>
-          <a:ext cx="11247119" cy="3968496"/>
-        </p:xfrm>
-        <a:graphic>
-          <a:graphicData uri="http://schemas.openxmlformats.org/drawingml/2006/table">
-            <a:tbl>
-              <a:tblPr firstRow="1" bandRow="1">
-                <a:tableStyleId>{5C22544A-7EE6-4342-B048-85BDC9FD1C3A}</a:tableStyleId>
-              </a:tblPr>
-              <a:tblGrid>
-                <a:gridCol w="2377440"/>
-                <a:gridCol w="1188720"/>
-                <a:gridCol w="1828800"/>
-                <a:gridCol w="1828800"/>
-                <a:gridCol w="1280159"/>
-                <a:gridCol w="1645920"/>
-                <a:gridCol w="1097280"/>
-              </a:tblGrid>
-              <a:tr h="566928">
-                <a:tc>
-                  <a:txBody>
-                    <a:bodyPr/>
-                    <a:lstStyle/>
-                    <a:p>
-                      <a:pPr algn="l"/>
-                      <a:r>
-                        <a:rPr sz="1400" b="1">
-                          <a:solidFill>
-                            <a:srgbClr val="FFFFFF"/>
-                          </a:solidFill>
-                          <a:latin typeface="맑은 고딕"/>
-                        </a:rPr>
-                        <a:t>모델</a:t>
-                      </a:r>
-                    </a:p>
-                  </a:txBody>
-                  <a:tcPr anchor="ctr" marL="54864" marR="54864">
-                    <a:solidFill>
-                      <a:srgbClr val="1F3A5F"/>
-                    </a:solidFill>
-                  </a:tcPr>
-                </a:tc>
-                <a:tc>
-                  <a:txBody>
-                    <a:bodyPr/>
-                    <a:lstStyle/>
-                    <a:p>
-                      <a:pPr algn="ctr"/>
-                      <a:r>
-                        <a:rPr sz="1400" b="1">
-                          <a:solidFill>
-                            <a:srgbClr val="FFFFFF"/>
-                          </a:solidFill>
-                          <a:latin typeface="맑은 고딕"/>
-                        </a:rPr>
-                        <a:t>test F1
-(IoU 0.5)</a:t>
-                      </a:r>
-                    </a:p>
-                  </a:txBody>
-                  <a:tcPr anchor="ctr" marL="54864" marR="54864">
-                    <a:solidFill>
-                      <a:srgbClr val="1F3A5F"/>
-                    </a:solidFill>
-                  </a:tcPr>
-                </a:tc>
-                <a:tc>
-                  <a:txBody>
-                    <a:bodyPr/>
-                    <a:lstStyle/>
-                    <a:p>
-                      <a:pPr algn="ctr"/>
-                      <a:r>
-                        <a:rPr sz="1400" b="1">
-                          <a:solidFill>
-                            <a:srgbClr val="FFFFFF"/>
-                          </a:solidFill>
-                          <a:latin typeface="맑은 고딕"/>
-                        </a:rPr>
-                        <a:t>val mAP50-95
-(전체 / 공식만)</a:t>
-                      </a:r>
-                    </a:p>
-                  </a:txBody>
-                  <a:tcPr anchor="ctr" marL="54864" marR="54864">
-                    <a:solidFill>
-                      <a:srgbClr val="1F3A5F"/>
-                    </a:solidFill>
-                  </a:tcPr>
-                </a:tc>
-                <a:tc>
-                  <a:txBody>
-                    <a:bodyPr/>
-                    <a:lstStyle/>
-                    <a:p>
-                      <a:pPr algn="ctr"/>
-                      <a:r>
-                        <a:rPr sz="1400" b="1">
-                          <a:solidFill>
-                            <a:srgbClr val="FFFFFF"/>
-                          </a:solidFill>
-                          <a:latin typeface="맑은 고딕"/>
-                        </a:rPr>
-                        <a:t>가짜 정상 오경보
-(NS+노이즈 6)</a:t>
-                      </a:r>
-                    </a:p>
-                  </a:txBody>
-                  <a:tcPr anchor="ctr" marL="54864" marR="54864">
-                    <a:solidFill>
-                      <a:srgbClr val="1F3A5F"/>
-                    </a:solidFill>
-                  </a:tcPr>
-                </a:tc>
-                <a:tc>
-                  <a:txBody>
-                    <a:bodyPr/>
-                    <a:lstStyle/>
-                    <a:p>
-                      <a:pPr algn="ctr"/>
-                      <a:r>
-                        <a:rPr sz="1400" b="1">
-                          <a:solidFill>
-                            <a:srgbClr val="FFFFFF"/>
-                          </a:solidFill>
-                          <a:latin typeface="맑은 고딕"/>
-                        </a:rPr>
-                        <a:t>합성 점 AP</a:t>
-                      </a:r>
-                    </a:p>
-                  </a:txBody>
-                  <a:tcPr anchor="ctr" marL="54864" marR="54864">
-                    <a:solidFill>
-                      <a:srgbClr val="1F3A5F"/>
-                    </a:solidFill>
-                  </a:tcPr>
-                </a:tc>
-                <a:tc>
-                  <a:txBody>
-                    <a:bodyPr/>
-                    <a:lstStyle/>
-                    <a:p>
-                      <a:pPr algn="ctr"/>
-                      <a:r>
-                        <a:rPr sz="1400" b="1">
-                          <a:solidFill>
-                            <a:srgbClr val="FFFFFF"/>
-                          </a:solidFill>
-                          <a:latin typeface="맑은 고딕"/>
-                        </a:rPr>
-                        <a:t>3호기 합성 점
-(대비 14 이상)</a:t>
-                      </a:r>
-                    </a:p>
-                  </a:txBody>
-                  <a:tcPr anchor="ctr" marL="54864" marR="54864">
-                    <a:solidFill>
-                      <a:srgbClr val="1F3A5F"/>
-                    </a:solidFill>
-                  </a:tcPr>
-                </a:tc>
-                <a:tc>
-                  <a:txBody>
-                    <a:bodyPr/>
-                    <a:lstStyle/>
-                    <a:p>
-                      <a:pPr algn="ctr"/>
-                      <a:r>
-                        <a:rPr sz="1400" b="1">
-                          <a:solidFill>
-                            <a:srgbClr val="FFFFFF"/>
-                          </a:solidFill>
-                          <a:latin typeface="맑은 고딕"/>
-                        </a:rPr>
-                        <a:t>파라미터</a:t>
-                      </a:r>
-                    </a:p>
-                  </a:txBody>
-                  <a:tcPr anchor="ctr" marL="54864" marR="54864">
-                    <a:solidFill>
-                      <a:srgbClr val="1F3A5F"/>
-                    </a:solidFill>
-                  </a:tcPr>
-                </a:tc>
-              </a:tr>
-              <a:tr h="566928">
-                <a:tc>
-                  <a:txBody>
-                    <a:bodyPr/>
-                    <a:lstStyle/>
-                    <a:p>
-                      <a:pPr algn="l"/>
-                      <a:r>
-                        <a:rPr sz="1400" b="1">
-                          <a:solidFill>
-                            <a:srgbClr val="222222"/>
-                          </a:solidFill>
-                          <a:latin typeface="맑은 고딕"/>
-                        </a:rPr>
-                        <a:t>D-FINE-N</a:t>
-                      </a:r>
-                    </a:p>
-                  </a:txBody>
-                  <a:tcPr anchor="ctr" marL="54864" marR="54864">
-                    <a:solidFill>
-                      <a:srgbClr val="DDF1F4"/>
-                    </a:solidFill>
-                  </a:tcPr>
-                </a:tc>
-                <a:tc>
-                  <a:txBody>
-                    <a:bodyPr/>
-                    <a:lstStyle/>
-                    <a:p>
-                      <a:pPr algn="ctr"/>
-                      <a:r>
-                        <a:rPr sz="1400" b="1">
-                          <a:solidFill>
-                            <a:srgbClr val="222222"/>
-                          </a:solidFill>
-                          <a:latin typeface="맑은 고딕"/>
-                        </a:rPr>
-                        <a:t>0.989</a:t>
-                      </a:r>
-                    </a:p>
-                  </a:txBody>
-                  <a:tcPr anchor="ctr" marL="54864" marR="54864">
-                    <a:solidFill>
-                      <a:srgbClr val="DDF1F4"/>
-                    </a:solidFill>
-                  </a:tcPr>
-                </a:tc>
-                <a:tc>
-                  <a:txBody>
-                    <a:bodyPr/>
-                    <a:lstStyle/>
-                    <a:p>
-                      <a:pPr algn="ctr"/>
-                      <a:r>
-                        <a:rPr sz="1400" b="1">
-                          <a:solidFill>
-                            <a:srgbClr val="222222"/>
-                          </a:solidFill>
-                          <a:latin typeface="맑은 고딕"/>
-                        </a:rPr>
-                        <a:t>0.655 / 0.343</a:t>
-                      </a:r>
-                    </a:p>
-                  </a:txBody>
-                  <a:tcPr anchor="ctr" marL="54864" marR="54864">
-                    <a:solidFill>
-                      <a:srgbClr val="DDF1F4"/>
-                    </a:solidFill>
-                  </a:tcPr>
-                </a:tc>
-                <a:tc>
-                  <a:txBody>
-                    <a:bodyPr/>
-                    <a:lstStyle/>
-                    <a:p>
-                      <a:pPr algn="ctr"/>
-                      <a:r>
-                        <a:rPr sz="1400" b="1">
-                          <a:solidFill>
-                            <a:srgbClr val="222222"/>
-                          </a:solidFill>
-                          <a:latin typeface="맑은 고딕"/>
-                        </a:rPr>
-                        <a:t>49.3%</a:t>
-                      </a:r>
-                    </a:p>
-                  </a:txBody>
-                  <a:tcPr anchor="ctr" marL="54864" marR="54864">
-                    <a:solidFill>
-                      <a:srgbClr val="DDF1F4"/>
-                    </a:solidFill>
-                  </a:tcPr>
-                </a:tc>
-                <a:tc>
-                  <a:txBody>
-                    <a:bodyPr/>
-                    <a:lstStyle/>
-                    <a:p>
-                      <a:pPr algn="ctr"/>
-                      <a:r>
-                        <a:rPr sz="1400" b="1">
-                          <a:solidFill>
-                            <a:srgbClr val="222222"/>
-                          </a:solidFill>
-                          <a:latin typeface="맑은 고딕"/>
-                        </a:rPr>
-                        <a:t>0.574</a:t>
-                      </a:r>
-                    </a:p>
-                  </a:txBody>
-                  <a:tcPr anchor="ctr" marL="54864" marR="54864">
-                    <a:solidFill>
-                      <a:srgbClr val="DDF1F4"/>
-                    </a:solidFill>
-                  </a:tcPr>
-                </a:tc>
-                <a:tc>
-                  <a:txBody>
-                    <a:bodyPr/>
-                    <a:lstStyle/>
-                    <a:p>
-                      <a:pPr algn="ctr"/>
-                      <a:r>
-                        <a:rPr sz="1400" b="1">
-                          <a:solidFill>
-                            <a:srgbClr val="222222"/>
-                          </a:solidFill>
-                          <a:latin typeface="맑은 고딕"/>
-                        </a:rPr>
-                        <a:t>89%</a:t>
-                      </a:r>
-                    </a:p>
-                  </a:txBody>
-                  <a:tcPr anchor="ctr" marL="54864" marR="54864">
-                    <a:solidFill>
-                      <a:srgbClr val="DDF1F4"/>
-                    </a:solidFill>
-                  </a:tcPr>
-                </a:tc>
-                <a:tc>
-                  <a:txBody>
-                    <a:bodyPr/>
-                    <a:lstStyle/>
-                    <a:p>
-                      <a:pPr algn="ctr"/>
-                      <a:r>
-                        <a:rPr sz="1400" b="1">
-                          <a:solidFill>
-                            <a:srgbClr val="222222"/>
-                          </a:solidFill>
-                          <a:latin typeface="맑은 고딕"/>
-                        </a:rPr>
-                        <a:t>3.7M</a:t>
-                      </a:r>
-                    </a:p>
-                  </a:txBody>
-                  <a:tcPr anchor="ctr" marL="54864" marR="54864">
-                    <a:solidFill>
-                      <a:srgbClr val="DDF1F4"/>
-                    </a:solidFill>
-                  </a:tcPr>
-                </a:tc>
-              </a:tr>
-              <a:tr h="566928">
-                <a:tc>
-                  <a:txBody>
-                    <a:bodyPr/>
-                    <a:lstStyle/>
-                    <a:p>
-                      <a:pPr algn="l"/>
-                      <a:r>
-                        <a:rPr sz="1400" b="0">
-                          <a:solidFill>
-                            <a:srgbClr val="222222"/>
-                          </a:solidFill>
-                          <a:latin typeface="맑은 고딕"/>
-                        </a:rPr>
-                        <a:t>RT-DETR-l</a:t>
-                      </a:r>
-                    </a:p>
-                  </a:txBody>
-                  <a:tcPr anchor="ctr" marL="54864" marR="54864">
-                    <a:solidFill>
-                      <a:srgbClr val="F2F5FA"/>
-                    </a:solidFill>
-                  </a:tcPr>
-                </a:tc>
-                <a:tc>
-                  <a:txBody>
-                    <a:bodyPr/>
-                    <a:lstStyle/>
-                    <a:p>
-                      <a:pPr algn="ctr"/>
-                      <a:r>
-                        <a:rPr sz="1400" b="0">
-                          <a:solidFill>
-                            <a:srgbClr val="222222"/>
-                          </a:solidFill>
-                          <a:latin typeface="맑은 고딕"/>
-                        </a:rPr>
-                        <a:t>0.988</a:t>
-                      </a:r>
-                    </a:p>
-                  </a:txBody>
-                  <a:tcPr anchor="ctr" marL="54864" marR="54864">
-                    <a:solidFill>
-                      <a:srgbClr val="F2F5FA"/>
-                    </a:solidFill>
-                  </a:tcPr>
-                </a:tc>
-                <a:tc>
-                  <a:txBody>
-                    <a:bodyPr/>
-                    <a:lstStyle/>
-                    <a:p>
-                      <a:pPr algn="ctr"/>
-                      <a:r>
-                        <a:rPr sz="1400" b="0">
-                          <a:solidFill>
-                            <a:srgbClr val="222222"/>
-                          </a:solidFill>
-                          <a:latin typeface="맑은 고딕"/>
-                        </a:rPr>
-                        <a:t>0.662 / 0.357</a:t>
-                      </a:r>
-                    </a:p>
-                  </a:txBody>
-                  <a:tcPr anchor="ctr" marL="54864" marR="54864">
-                    <a:solidFill>
-                      <a:srgbClr val="F2F5FA"/>
-                    </a:solidFill>
-                  </a:tcPr>
-                </a:tc>
-                <a:tc>
-                  <a:txBody>
-                    <a:bodyPr/>
-                    <a:lstStyle/>
-                    <a:p>
-                      <a:pPr algn="ctr"/>
-                      <a:r>
-                        <a:rPr sz="1400" b="0">
-                          <a:solidFill>
-                            <a:srgbClr val="222222"/>
-                          </a:solidFill>
-                          <a:latin typeface="맑은 고딕"/>
-                        </a:rPr>
-                        <a:t>36.6%</a:t>
-                      </a:r>
-                    </a:p>
-                  </a:txBody>
-                  <a:tcPr anchor="ctr" marL="54864" marR="54864">
-                    <a:solidFill>
-                      <a:srgbClr val="F2F5FA"/>
-                    </a:solidFill>
-                  </a:tcPr>
-                </a:tc>
-                <a:tc>
-                  <a:txBody>
-                    <a:bodyPr/>
-                    <a:lstStyle/>
-                    <a:p>
-                      <a:pPr algn="ctr"/>
-                      <a:r>
-                        <a:rPr sz="1400" b="0">
-                          <a:solidFill>
-                            <a:srgbClr val="222222"/>
-                          </a:solidFill>
-                          <a:latin typeface="맑은 고딕"/>
-                        </a:rPr>
-                        <a:t>0.451</a:t>
-                      </a:r>
-                    </a:p>
-                  </a:txBody>
-                  <a:tcPr anchor="ctr" marL="54864" marR="54864">
-                    <a:solidFill>
-                      <a:srgbClr val="F2F5FA"/>
-                    </a:solidFill>
-                  </a:tcPr>
-                </a:tc>
-                <a:tc>
-                  <a:txBody>
-                    <a:bodyPr/>
-                    <a:lstStyle/>
-                    <a:p>
-                      <a:pPr algn="ctr"/>
-                      <a:r>
-                        <a:rPr sz="1400" b="0">
-                          <a:solidFill>
-                            <a:srgbClr val="222222"/>
-                          </a:solidFill>
-                          <a:latin typeface="맑은 고딕"/>
-                        </a:rPr>
-                        <a:t>61%</a:t>
-                      </a:r>
-                    </a:p>
-                  </a:txBody>
-                  <a:tcPr anchor="ctr" marL="54864" marR="54864">
-                    <a:solidFill>
-                      <a:srgbClr val="F2F5FA"/>
-                    </a:solidFill>
-                  </a:tcPr>
-                </a:tc>
-                <a:tc>
-                  <a:txBody>
-                    <a:bodyPr/>
-                    <a:lstStyle/>
-                    <a:p>
-                      <a:pPr algn="ctr"/>
-                      <a:r>
-                        <a:rPr sz="1400" b="0">
-                          <a:solidFill>
-                            <a:srgbClr val="222222"/>
-                          </a:solidFill>
-                          <a:latin typeface="맑은 고딕"/>
-                        </a:rPr>
-                        <a:t>32.8M</a:t>
-                      </a:r>
-                    </a:p>
-                  </a:txBody>
-                  <a:tcPr anchor="ctr" marL="54864" marR="54864">
-                    <a:solidFill>
-                      <a:srgbClr val="F2F5FA"/>
-                    </a:solidFill>
-                  </a:tcPr>
-                </a:tc>
-              </a:tr>
-              <a:tr h="566928">
-                <a:tc>
-                  <a:txBody>
-                    <a:bodyPr/>
-                    <a:lstStyle/>
-                    <a:p>
-                      <a:pPr algn="l"/>
-                      <a:r>
-                        <a:rPr sz="1400" b="0">
-                          <a:solidFill>
-                            <a:srgbClr val="222222"/>
-                          </a:solidFill>
-                          <a:latin typeface="맑은 고딕"/>
-                        </a:rPr>
-                        <a:t>Faster R-CNN R50</a:t>
-                      </a:r>
-                    </a:p>
-                  </a:txBody>
-                  <a:tcPr anchor="ctr" marL="54864" marR="54864">
-                    <a:solidFill>
-                      <a:srgbClr val="FFFFFF"/>
-                    </a:solidFill>
-                  </a:tcPr>
-                </a:tc>
-                <a:tc>
-                  <a:txBody>
-                    <a:bodyPr/>
-                    <a:lstStyle/>
-                    <a:p>
-                      <a:pPr algn="ctr"/>
-                      <a:r>
-                        <a:rPr sz="1400" b="0">
-                          <a:solidFill>
-                            <a:srgbClr val="222222"/>
-                          </a:solidFill>
-                          <a:latin typeface="맑은 고딕"/>
-                        </a:rPr>
-                        <a:t>0.989</a:t>
-                      </a:r>
-                    </a:p>
-                  </a:txBody>
-                  <a:tcPr anchor="ctr" marL="54864" marR="54864">
-                    <a:solidFill>
-                      <a:srgbClr val="FFFFFF"/>
-                    </a:solidFill>
-                  </a:tcPr>
-                </a:tc>
-                <a:tc>
-                  <a:txBody>
-                    <a:bodyPr/>
-                    <a:lstStyle/>
-                    <a:p>
-                      <a:pPr algn="ctr"/>
-                      <a:r>
-                        <a:rPr sz="1400" b="0">
-                          <a:solidFill>
-                            <a:srgbClr val="222222"/>
-                          </a:solidFill>
-                          <a:latin typeface="맑은 고딕"/>
-                        </a:rPr>
-                        <a:t>0.615 / 0.337</a:t>
-                      </a:r>
-                    </a:p>
-                  </a:txBody>
-                  <a:tcPr anchor="ctr" marL="54864" marR="54864">
-                    <a:solidFill>
-                      <a:srgbClr val="FFFFFF"/>
-                    </a:solidFill>
-                  </a:tcPr>
-                </a:tc>
-                <a:tc>
-                  <a:txBody>
-                    <a:bodyPr/>
-                    <a:lstStyle/>
-                    <a:p>
-                      <a:pPr algn="ctr"/>
-                      <a:r>
-                        <a:rPr sz="1400" b="0">
-                          <a:solidFill>
-                            <a:srgbClr val="222222"/>
-                          </a:solidFill>
-                          <a:latin typeface="맑은 고딕"/>
-                        </a:rPr>
-                        <a:t>0.5%</a:t>
-                      </a:r>
-                    </a:p>
-                  </a:txBody>
-                  <a:tcPr anchor="ctr" marL="54864" marR="54864">
-                    <a:solidFill>
-                      <a:srgbClr val="FFFFFF"/>
-                    </a:solidFill>
-                  </a:tcPr>
-                </a:tc>
-                <a:tc>
-                  <a:txBody>
-                    <a:bodyPr/>
-                    <a:lstStyle/>
-                    <a:p>
-                      <a:pPr algn="ctr"/>
-                      <a:r>
-                        <a:rPr sz="1400" b="0">
-                          <a:solidFill>
-                            <a:srgbClr val="222222"/>
-                          </a:solidFill>
-                          <a:latin typeface="맑은 고딕"/>
-                        </a:rPr>
-                        <a:t>0.567</a:t>
-                      </a:r>
-                    </a:p>
-                  </a:txBody>
-                  <a:tcPr anchor="ctr" marL="54864" marR="54864">
-                    <a:solidFill>
-                      <a:srgbClr val="FFFFFF"/>
-                    </a:solidFill>
-                  </a:tcPr>
-                </a:tc>
-                <a:tc>
-                  <a:txBody>
-                    <a:bodyPr/>
-                    <a:lstStyle/>
-                    <a:p>
-                      <a:pPr algn="ctr"/>
-                      <a:r>
-                        <a:rPr sz="1400" b="0">
-                          <a:solidFill>
-                            <a:srgbClr val="222222"/>
-                          </a:solidFill>
-                          <a:latin typeface="맑은 고딕"/>
-                        </a:rPr>
-                        <a:t>75%</a:t>
-                      </a:r>
-                    </a:p>
-                  </a:txBody>
-                  <a:tcPr anchor="ctr" marL="54864" marR="54864">
-                    <a:solidFill>
-                      <a:srgbClr val="FFFFFF"/>
-                    </a:solidFill>
-                  </a:tcPr>
-                </a:tc>
-                <a:tc>
-                  <a:txBody>
-                    <a:bodyPr/>
-                    <a:lstStyle/>
-                    <a:p>
-                      <a:pPr algn="ctr"/>
-                      <a:r>
-                        <a:rPr sz="1400" b="0">
-                          <a:solidFill>
-                            <a:srgbClr val="222222"/>
-                          </a:solidFill>
-                          <a:latin typeface="맑은 고딕"/>
-                        </a:rPr>
-                        <a:t>41.4M</a:t>
-                      </a:r>
-                    </a:p>
-                  </a:txBody>
-                  <a:tcPr anchor="ctr" marL="54864" marR="54864">
-                    <a:solidFill>
-                      <a:srgbClr val="FFFFFF"/>
-                    </a:solidFill>
-                  </a:tcPr>
-                </a:tc>
-              </a:tr>
-              <a:tr h="566928">
-                <a:tc>
-                  <a:txBody>
-                    <a:bodyPr/>
-                    <a:lstStyle/>
-                    <a:p>
-                      <a:pPr algn="l"/>
-                      <a:r>
-                        <a:rPr sz="1400" b="0">
-                          <a:solidFill>
-                            <a:srgbClr val="222222"/>
-                          </a:solidFill>
-                          <a:latin typeface="맑은 고딕"/>
-                        </a:rPr>
-                        <a:t>YOLO26n</a:t>
-                      </a:r>
-                    </a:p>
-                  </a:txBody>
-                  <a:tcPr anchor="ctr" marL="54864" marR="54864">
-                    <a:solidFill>
-                      <a:srgbClr val="F2F5FA"/>
-                    </a:solidFill>
-                  </a:tcPr>
-                </a:tc>
-                <a:tc>
-                  <a:txBody>
-                    <a:bodyPr/>
-                    <a:lstStyle/>
-                    <a:p>
-                      <a:pPr algn="ctr"/>
-                      <a:r>
-                        <a:rPr sz="1400" b="0">
-                          <a:solidFill>
-                            <a:srgbClr val="222222"/>
-                          </a:solidFill>
-                          <a:latin typeface="맑은 고딕"/>
-                        </a:rPr>
-                        <a:t>0.991</a:t>
-                      </a:r>
-                    </a:p>
-                  </a:txBody>
-                  <a:tcPr anchor="ctr" marL="54864" marR="54864">
-                    <a:solidFill>
-                      <a:srgbClr val="F2F5FA"/>
-                    </a:solidFill>
-                  </a:tcPr>
-                </a:tc>
-                <a:tc>
-                  <a:txBody>
-                    <a:bodyPr/>
-                    <a:lstStyle/>
-                    <a:p>
-                      <a:pPr algn="ctr"/>
-                      <a:r>
-                        <a:rPr sz="1400" b="0">
-                          <a:solidFill>
-                            <a:srgbClr val="222222"/>
-                          </a:solidFill>
-                          <a:latin typeface="맑은 고딕"/>
-                        </a:rPr>
-                        <a:t>0.642 / 0.314</a:t>
-                      </a:r>
-                    </a:p>
-                  </a:txBody>
-                  <a:tcPr anchor="ctr" marL="54864" marR="54864">
-                    <a:solidFill>
-                      <a:srgbClr val="F2F5FA"/>
-                    </a:solidFill>
-                  </a:tcPr>
-                </a:tc>
-                <a:tc>
-                  <a:txBody>
-                    <a:bodyPr/>
-                    <a:lstStyle/>
-                    <a:p>
-                      <a:pPr algn="ctr"/>
-                      <a:r>
-                        <a:rPr sz="1400" b="0">
-                          <a:solidFill>
-                            <a:srgbClr val="222222"/>
-                          </a:solidFill>
-                          <a:latin typeface="맑은 고딕"/>
-                        </a:rPr>
-                        <a:t>4.1%</a:t>
-                      </a:r>
-                    </a:p>
-                  </a:txBody>
-                  <a:tcPr anchor="ctr" marL="54864" marR="54864">
-                    <a:solidFill>
-                      <a:srgbClr val="F2F5FA"/>
-                    </a:solidFill>
-                  </a:tcPr>
-                </a:tc>
-                <a:tc>
-                  <a:txBody>
-                    <a:bodyPr/>
-                    <a:lstStyle/>
-                    <a:p>
-                      <a:pPr algn="ctr"/>
-                      <a:r>
-                        <a:rPr sz="1400" b="0">
-                          <a:solidFill>
-                            <a:srgbClr val="222222"/>
-                          </a:solidFill>
-                          <a:latin typeface="맑은 고딕"/>
-                        </a:rPr>
-                        <a:t>0.501</a:t>
-                      </a:r>
-                    </a:p>
-                  </a:txBody>
-                  <a:tcPr anchor="ctr" marL="54864" marR="54864">
-                    <a:solidFill>
-                      <a:srgbClr val="F2F5FA"/>
-                    </a:solidFill>
-                  </a:tcPr>
-                </a:tc>
-                <a:tc>
-                  <a:txBody>
-                    <a:bodyPr/>
-                    <a:lstStyle/>
-                    <a:p>
-                      <a:pPr algn="ctr"/>
-                      <a:r>
-                        <a:rPr sz="1400" b="0">
-                          <a:solidFill>
-                            <a:srgbClr val="222222"/>
-                          </a:solidFill>
-                          <a:latin typeface="맑은 고딕"/>
-                        </a:rPr>
-                        <a:t>62%</a:t>
-                      </a:r>
-                    </a:p>
-                  </a:txBody>
-                  <a:tcPr anchor="ctr" marL="54864" marR="54864">
-                    <a:solidFill>
-                      <a:srgbClr val="F2F5FA"/>
-                    </a:solidFill>
-                  </a:tcPr>
-                </a:tc>
-                <a:tc>
-                  <a:txBody>
-                    <a:bodyPr/>
-                    <a:lstStyle/>
-                    <a:p>
-                      <a:pPr algn="ctr"/>
-                      <a:r>
-                        <a:rPr sz="1400" b="0">
-                          <a:solidFill>
-                            <a:srgbClr val="222222"/>
-                          </a:solidFill>
-                          <a:latin typeface="맑은 고딕"/>
-                        </a:rPr>
-                        <a:t>2.5M</a:t>
-                      </a:r>
-                    </a:p>
-                  </a:txBody>
-                  <a:tcPr anchor="ctr" marL="54864" marR="54864">
-                    <a:solidFill>
-                      <a:srgbClr val="F2F5FA"/>
-                    </a:solidFill>
-                  </a:tcPr>
-                </a:tc>
-              </a:tr>
-              <a:tr h="566928">
-                <a:tc>
-                  <a:txBody>
-                    <a:bodyPr/>
-                    <a:lstStyle/>
-                    <a:p>
-                      <a:pPr algn="l"/>
-                      <a:r>
-                        <a:rPr sz="1400" b="0">
-                          <a:solidFill>
-                            <a:srgbClr val="222222"/>
-                          </a:solidFill>
-                          <a:latin typeface="맑은 고딕"/>
-                        </a:rPr>
-                        <a:t>YOLOv3-tiny</a:t>
-                      </a:r>
-                    </a:p>
-                  </a:txBody>
-                  <a:tcPr anchor="ctr" marL="54864" marR="54864">
-                    <a:solidFill>
-                      <a:srgbClr val="FFFFFF"/>
-                    </a:solidFill>
-                  </a:tcPr>
-                </a:tc>
-                <a:tc>
-                  <a:txBody>
-                    <a:bodyPr/>
-                    <a:lstStyle/>
-                    <a:p>
-                      <a:pPr algn="ctr"/>
-                      <a:r>
-                        <a:rPr sz="1400" b="0">
-                          <a:solidFill>
-                            <a:srgbClr val="222222"/>
-                          </a:solidFill>
-                          <a:latin typeface="맑은 고딕"/>
-                        </a:rPr>
-                        <a:t>0.989</a:t>
-                      </a:r>
-                    </a:p>
-                  </a:txBody>
-                  <a:tcPr anchor="ctr" marL="54864" marR="54864">
-                    <a:solidFill>
-                      <a:srgbClr val="FFFFFF"/>
-                    </a:solidFill>
-                  </a:tcPr>
-                </a:tc>
-                <a:tc>
-                  <a:txBody>
-                    <a:bodyPr/>
-                    <a:lstStyle/>
-                    <a:p>
-                      <a:pPr algn="ctr"/>
-                      <a:r>
-                        <a:rPr sz="1400" b="0">
-                          <a:solidFill>
-                            <a:srgbClr val="222222"/>
-                          </a:solidFill>
-                          <a:latin typeface="맑은 고딕"/>
-                        </a:rPr>
-                        <a:t>0.579 / 0.311</a:t>
-                      </a:r>
-                    </a:p>
-                  </a:txBody>
-                  <a:tcPr anchor="ctr" marL="54864" marR="54864">
-                    <a:solidFill>
-                      <a:srgbClr val="FFFFFF"/>
-                    </a:solidFill>
-                  </a:tcPr>
-                </a:tc>
-                <a:tc>
-                  <a:txBody>
-                    <a:bodyPr/>
-                    <a:lstStyle/>
-                    <a:p>
-                      <a:pPr algn="ctr"/>
-                      <a:r>
-                        <a:rPr sz="1400" b="0">
-                          <a:solidFill>
-                            <a:srgbClr val="222222"/>
-                          </a:solidFill>
-                          <a:latin typeface="맑은 고딕"/>
-                        </a:rPr>
-                        <a:t>38.5%</a:t>
-                      </a:r>
-                    </a:p>
-                  </a:txBody>
-                  <a:tcPr anchor="ctr" marL="54864" marR="54864">
-                    <a:solidFill>
-                      <a:srgbClr val="FFFFFF"/>
-                    </a:solidFill>
-                  </a:tcPr>
-                </a:tc>
-                <a:tc>
-                  <a:txBody>
-                    <a:bodyPr/>
-                    <a:lstStyle/>
-                    <a:p>
-                      <a:pPr algn="ctr"/>
-                      <a:r>
-                        <a:rPr sz="1400" b="0">
-                          <a:solidFill>
-                            <a:srgbClr val="222222"/>
-                          </a:solidFill>
-                          <a:latin typeface="맑은 고딕"/>
-                        </a:rPr>
-                        <a:t>0.515</a:t>
-                      </a:r>
-                    </a:p>
-                  </a:txBody>
-                  <a:tcPr anchor="ctr" marL="54864" marR="54864">
-                    <a:solidFill>
-                      <a:srgbClr val="FFFFFF"/>
-                    </a:solidFill>
-                  </a:tcPr>
-                </a:tc>
-                <a:tc>
-                  <a:txBody>
-                    <a:bodyPr/>
-                    <a:lstStyle/>
-                    <a:p>
-                      <a:pPr algn="ctr"/>
-                      <a:r>
-                        <a:rPr sz="1400" b="0">
-                          <a:solidFill>
-                            <a:srgbClr val="222222"/>
-                          </a:solidFill>
-                          <a:latin typeface="맑은 고딕"/>
-                        </a:rPr>
-                        <a:t>70%</a:t>
-                      </a:r>
-                    </a:p>
-                  </a:txBody>
-                  <a:tcPr anchor="ctr" marL="54864" marR="54864">
-                    <a:solidFill>
-                      <a:srgbClr val="FFFFFF"/>
-                    </a:solidFill>
-                  </a:tcPr>
-                </a:tc>
-                <a:tc>
-                  <a:txBody>
-                    <a:bodyPr/>
-                    <a:lstStyle/>
-                    <a:p>
-                      <a:pPr algn="ctr"/>
-                      <a:r>
-                        <a:rPr sz="1400" b="0">
-                          <a:solidFill>
-                            <a:srgbClr val="222222"/>
-                          </a:solidFill>
-                          <a:latin typeface="맑은 고딕"/>
-                        </a:rPr>
-                        <a:t>8.7M</a:t>
-                      </a:r>
-                    </a:p>
-                  </a:txBody>
-                  <a:tcPr anchor="ctr" marL="54864" marR="54864">
-                    <a:solidFill>
-                      <a:srgbClr val="FFFFFF"/>
-                    </a:solidFill>
-                  </a:tcPr>
-                </a:tc>
-              </a:tr>
-              <a:tr h="566928">
-                <a:tc>
-                  <a:txBody>
-                    <a:bodyPr/>
-                    <a:lstStyle/>
-                    <a:p>
-                      <a:pPr algn="l"/>
-                      <a:r>
-                        <a:rPr sz="1400" b="0">
-                          <a:solidFill>
-                            <a:srgbClr val="222222"/>
-                          </a:solidFill>
-                          <a:latin typeface="맑은 고딕"/>
-                        </a:rPr>
-                        <a:t>Faster R-CNN MobileNetV3</a:t>
-                      </a:r>
-                    </a:p>
-                  </a:txBody>
-                  <a:tcPr anchor="ctr" marL="54864" marR="54864">
-                    <a:solidFill>
-                      <a:srgbClr val="F2F5FA"/>
-                    </a:solidFill>
-                  </a:tcPr>
-                </a:tc>
-                <a:tc>
-                  <a:txBody>
-                    <a:bodyPr/>
-                    <a:lstStyle/>
-                    <a:p>
-                      <a:pPr algn="ctr"/>
-                      <a:r>
-                        <a:rPr sz="1400" b="0">
-                          <a:solidFill>
-                            <a:srgbClr val="222222"/>
-                          </a:solidFill>
-                          <a:latin typeface="맑은 고딕"/>
-                        </a:rPr>
-                        <a:t>0.986</a:t>
-                      </a:r>
-                    </a:p>
-                  </a:txBody>
-                  <a:tcPr anchor="ctr" marL="54864" marR="54864">
-                    <a:solidFill>
-                      <a:srgbClr val="F2F5FA"/>
-                    </a:solidFill>
-                  </a:tcPr>
-                </a:tc>
-                <a:tc>
-                  <a:txBody>
-                    <a:bodyPr/>
-                    <a:lstStyle/>
-                    <a:p>
-                      <a:pPr algn="ctr"/>
-                      <a:r>
-                        <a:rPr sz="1400" b="0">
-                          <a:solidFill>
-                            <a:srgbClr val="222222"/>
-                          </a:solidFill>
-                          <a:latin typeface="맑은 고딕"/>
-                        </a:rPr>
-                        <a:t>0.583 / 0.322</a:t>
-                      </a:r>
-                    </a:p>
-                  </a:txBody>
-                  <a:tcPr anchor="ctr" marL="54864" marR="54864">
-                    <a:solidFill>
-                      <a:srgbClr val="F2F5FA"/>
-                    </a:solidFill>
-                  </a:tcPr>
-                </a:tc>
-                <a:tc>
-                  <a:txBody>
-                    <a:bodyPr/>
-                    <a:lstStyle/>
-                    <a:p>
-                      <a:pPr algn="ctr"/>
-                      <a:r>
-                        <a:rPr sz="1400" b="0">
-                          <a:solidFill>
-                            <a:srgbClr val="222222"/>
-                          </a:solidFill>
-                          <a:latin typeface="맑은 고딕"/>
-                        </a:rPr>
-                        <a:t>64.0%</a:t>
-                      </a:r>
-                    </a:p>
-                  </a:txBody>
-                  <a:tcPr anchor="ctr" marL="54864" marR="54864">
-                    <a:solidFill>
-                      <a:srgbClr val="F2F5FA"/>
-                    </a:solidFill>
-                  </a:tcPr>
-                </a:tc>
-                <a:tc>
-                  <a:txBody>
-                    <a:bodyPr/>
-                    <a:lstStyle/>
-                    <a:p>
-                      <a:pPr algn="ctr"/>
-                      <a:r>
-                        <a:rPr sz="1400" b="0">
-                          <a:solidFill>
-                            <a:srgbClr val="222222"/>
-                          </a:solidFill>
-                          <a:latin typeface="맑은 고딕"/>
-                        </a:rPr>
-                        <a:t>0.262</a:t>
-                      </a:r>
-                    </a:p>
-                  </a:txBody>
-                  <a:tcPr anchor="ctr" marL="54864" marR="54864">
-                    <a:solidFill>
-                      <a:srgbClr val="F2F5FA"/>
-                    </a:solidFill>
-                  </a:tcPr>
-                </a:tc>
-                <a:tc>
-                  <a:txBody>
-                    <a:bodyPr/>
-                    <a:lstStyle/>
-                    <a:p>
-                      <a:pPr algn="ctr"/>
-                      <a:r>
-                        <a:rPr sz="1400" b="0">
-                          <a:solidFill>
-                            <a:srgbClr val="222222"/>
-                          </a:solidFill>
-                          <a:latin typeface="맑은 고딕"/>
-                        </a:rPr>
-                        <a:t>4%</a:t>
-                      </a:r>
-                    </a:p>
-                  </a:txBody>
-                  <a:tcPr anchor="ctr" marL="54864" marR="54864">
-                    <a:solidFill>
-                      <a:srgbClr val="F2F5FA"/>
-                    </a:solidFill>
-                  </a:tcPr>
-                </a:tc>
-                <a:tc>
-                  <a:txBody>
-                    <a:bodyPr/>
-                    <a:lstStyle/>
-                    <a:p>
-                      <a:pPr algn="ctr"/>
-                      <a:r>
-                        <a:rPr sz="1400" b="0">
-                          <a:solidFill>
-                            <a:srgbClr val="222222"/>
-                          </a:solidFill>
-                          <a:latin typeface="맑은 고딕"/>
-                        </a:rPr>
-                        <a:t>19.0M</a:t>
-                      </a:r>
-                    </a:p>
-                  </a:txBody>
-                  <a:tcPr anchor="ctr" marL="54864" marR="54864">
-                    <a:solidFill>
-                      <a:srgbClr val="F2F5FA"/>
-                    </a:solidFill>
-                  </a:tcPr>
-                </a:tc>
-              </a:tr>
-            </a:tbl>
-          </a:graphicData>
-        </a:graphic>
-      </p:graphicFrame>
-      <p:sp>
-        <p:nvSpPr>
-          <p:cNvPr id="8" name="TextBox 7"/>
-          <p:cNvSpPr txBox="1"/>
-          <p:nvPr/>
-        </p:nvSpPr>
-        <p:spPr>
-          <a:xfrm>
-            <a:off x="548640" y="5806440"/>
-            <a:ext cx="10972800" cy="822960"/>
-          </a:xfrm>
-          <a:prstGeom prst="rect">
-            <a:avLst/>
-          </a:prstGeom>
-          <a:noFill/>
-        </p:spPr>
-        <p:txBody>
           <a:bodyPr wrap="square" lIns="45720" rIns="45720">
             <a:spAutoFit/>
           </a:bodyPr>
@@ -11702,11 +11685,11 @@
           <a:p>
             <a:pPr>
               <a:spcAft>
-                <a:spcPts val="600"/>
+                <a:spcPts val="800"/>
               </a:spcAft>
             </a:pPr>
             <a:r>
-              <a:rPr sz="1400" b="1">
+              <a:rPr sz="1600" b="1">
                 <a:solidFill>
                   <a:srgbClr val="2AA7B8"/>
                 </a:solidFill>
@@ -11715,13 +11698,56 @@
               <a:t>• </a:t>
             </a:r>
             <a:r>
-              <a:rPr sz="1400" b="0">
-                <a:solidFill>
-                  <a:srgbClr val="222222"/>
-                </a:solidFill>
-                <a:latin typeface="맑은 고딕"/>
-              </a:rPr>
-              <a:t>점 제거는 6개 모델 모두 0~3개만 남아 차이가 없다. test F1은 모두 포화다.</a:t>
+              <a:rPr sz="1600" b="0">
+                <a:solidFill>
+                  <a:srgbClr val="222222"/>
+                </a:solidFill>
+                <a:latin typeface="맑은 고딕"/>
+              </a:rPr>
+              <a:t>해상도별 공식 라벨 박스 비율(test 기준)이 10~76%로 달라 라벨 구성이 섞인다. 공식 라벨 이미지끼리만 비교하면 6개 모델의 해상도별 F1이 0.944~0.983으로 좁아지고 구간이 겹친다</a:t>
+            </a:r>
+          </a:p>
+          <a:p>
+            <a:pPr>
+              <a:spcAft>
+                <a:spcPts val="800"/>
+              </a:spcAft>
+            </a:pPr>
+            <a:r>
+              <a:rPr sz="1600" b="1">
+                <a:solidFill>
+                  <a:srgbClr val="2AA7B8"/>
+                </a:solidFill>
+                <a:latin typeface="맑은 고딕"/>
+              </a:rPr>
+              <a:t>• </a:t>
+            </a:r>
+            <a:r>
+              <a:rPr sz="1600" b="0">
+                <a:solidFill>
+                  <a:srgbClr val="222222"/>
+                </a:solidFill>
+                <a:latin typeface="맑은 고딕"/>
+              </a:rPr>
+              <a:t>6개 모델 모두 가장 낮은 그룹은 1호기·352x332(F1 0.953~0.966)다. 그룹별 표본이 작다(공식 라벨 이미지 호기별 20~36장). 합성 점에서 보인 3호기 약점은 </a:t>
+            </a:r>
+            <a:r>
+              <a:rPr sz="1600" b="1">
+                <a:solidFill>
+                  <a:srgbClr val="222222"/>
+                </a:solidFill>
+                <a:latin typeface="맑은 고딕"/>
+              </a:rPr>
+              <a:t>모델에 따라</a:t>
+            </a:r>
+            <a:r>
+              <a:rPr sz="1600" b="0">
+                <a:solidFill>
+                  <a:srgbClr val="222222"/>
+                </a:solidFill>
+                <a:latin typeface="맑은 고딕"/>
+              </a:rPr>
+              <a:t> 다르다(앞 슬라이드)</a:t>
             </a:r>
           </a:p>
         </p:txBody>
@@ -11817,7 +11843,7 @@
                 </a:solidFill>
                 <a:latin typeface="맑은 고딕"/>
               </a:rPr>
-              <a:t>베스트 모델: D-FINE-N</a:t>
+              <a:t>③ 종합: 모델별 성적표</a:t>
             </a:r>
           </a:p>
         </p:txBody>
@@ -11852,7 +11878,7 @@
                 </a:solidFill>
                 <a:latin typeface="맑은 고딕"/>
               </a:rPr>
-              <a:t>val 동률 선두 + 미탐지 강건성 최상 + 작다(3.7M)</a:t>
+              <a:t>한 모델이 모든 항목에서 1등은 아니다</a:t>
             </a:r>
           </a:p>
         </p:txBody>
@@ -11922,35 +11948,1187 @@
                 </a:solidFill>
                 <a:latin typeface="맑은 고딕"/>
               </a:rPr>
-              <a:t>선정 기준 ①②③은 팀원 모델 추가 전에 정했다. '미탐지 우선'은 결과를 본 뒤 정한 우선순위다. 상세는 docs/analysis.md 5절.</a:t>
-            </a:r>
-          </a:p>
-        </p:txBody>
-      </p:sp>
-      <p:pic>
-        <p:nvPicPr>
-          <p:cNvPr id="7" name="Picture 6" descr="fig5e_select_ci.png"/>
-          <p:cNvPicPr>
-            <a:picLocks noChangeAspect="1"/>
-          </p:cNvPicPr>
+              <a:t>val mAP50-95는 val, 나머지는 test 이미지 기준(가짜 정상·합성 점은 인위 이미지). 상세 수치는 docs/experiments.md.</a:t>
+            </a:r>
+          </a:p>
+        </p:txBody>
+      </p:sp>
+      <p:graphicFrame>
+        <p:nvGraphicFramePr>
+          <p:cNvPr id="7" name="Table 6"/>
+          <p:cNvGraphicFramePr>
+            <a:graphicFrameLocks noGrp="1"/>
+          </p:cNvGraphicFramePr>
           <p:nvPr/>
-        </p:nvPicPr>
-        <p:blipFill>
-          <a:blip r:embed="rId2"/>
-          <a:stretch>
-            <a:fillRect/>
-          </a:stretch>
-        </p:blipFill>
-        <p:spPr>
-          <a:xfrm>
-            <a:off x="274320" y="1590775"/>
-            <a:ext cx="7863840" cy="2899209"/>
-          </a:xfrm>
-          <a:prstGeom prst="rect">
-            <a:avLst/>
-          </a:prstGeom>
-        </p:spPr>
-      </p:pic>
+        </p:nvGraphicFramePr>
+        <p:xfrm>
+          <a:off x="457200" y="1783080"/>
+          <a:ext cx="11247119" cy="3968496"/>
+        </p:xfrm>
+        <a:graphic>
+          <a:graphicData uri="http://schemas.openxmlformats.org/drawingml/2006/table">
+            <a:tbl>
+              <a:tblPr firstRow="1" bandRow="1">
+                <a:tableStyleId>{5C22544A-7EE6-4342-B048-85BDC9FD1C3A}</a:tableStyleId>
+              </a:tblPr>
+              <a:tblGrid>
+                <a:gridCol w="2377440"/>
+                <a:gridCol w="1188720"/>
+                <a:gridCol w="1828800"/>
+                <a:gridCol w="1828800"/>
+                <a:gridCol w="1280159"/>
+                <a:gridCol w="1645920"/>
+                <a:gridCol w="1097280"/>
+              </a:tblGrid>
+              <a:tr h="566928">
+                <a:tc>
+                  <a:txBody>
+                    <a:bodyPr/>
+                    <a:lstStyle/>
+                    <a:p>
+                      <a:pPr algn="l"/>
+                      <a:r>
+                        <a:rPr sz="1400" b="1">
+                          <a:solidFill>
+                            <a:srgbClr val="FFFFFF"/>
+                          </a:solidFill>
+                          <a:latin typeface="맑은 고딕"/>
+                        </a:rPr>
+                        <a:t>모델</a:t>
+                      </a:r>
+                    </a:p>
+                  </a:txBody>
+                  <a:tcPr anchor="ctr" marL="54864" marR="54864">
+                    <a:solidFill>
+                      <a:srgbClr val="1F3A5F"/>
+                    </a:solidFill>
+                  </a:tcPr>
+                </a:tc>
+                <a:tc>
+                  <a:txBody>
+                    <a:bodyPr/>
+                    <a:lstStyle/>
+                    <a:p>
+                      <a:pPr algn="ctr"/>
+                      <a:r>
+                        <a:rPr sz="1400" b="1">
+                          <a:solidFill>
+                            <a:srgbClr val="FFFFFF"/>
+                          </a:solidFill>
+                          <a:latin typeface="맑은 고딕"/>
+                        </a:rPr>
+                        <a:t>test F1
+(IoU 0.5)</a:t>
+                      </a:r>
+                    </a:p>
+                  </a:txBody>
+                  <a:tcPr anchor="ctr" marL="54864" marR="54864">
+                    <a:solidFill>
+                      <a:srgbClr val="1F3A5F"/>
+                    </a:solidFill>
+                  </a:tcPr>
+                </a:tc>
+                <a:tc>
+                  <a:txBody>
+                    <a:bodyPr/>
+                    <a:lstStyle/>
+                    <a:p>
+                      <a:pPr algn="ctr"/>
+                      <a:r>
+                        <a:rPr sz="1400" b="1">
+                          <a:solidFill>
+                            <a:srgbClr val="FFFFFF"/>
+                          </a:solidFill>
+                          <a:latin typeface="맑은 고딕"/>
+                        </a:rPr>
+                        <a:t>val mAP50-95
+(전체 / 공식만)</a:t>
+                      </a:r>
+                    </a:p>
+                  </a:txBody>
+                  <a:tcPr anchor="ctr" marL="54864" marR="54864">
+                    <a:solidFill>
+                      <a:srgbClr val="1F3A5F"/>
+                    </a:solidFill>
+                  </a:tcPr>
+                </a:tc>
+                <a:tc>
+                  <a:txBody>
+                    <a:bodyPr/>
+                    <a:lstStyle/>
+                    <a:p>
+                      <a:pPr algn="ctr"/>
+                      <a:r>
+                        <a:rPr sz="1400" b="1">
+                          <a:solidFill>
+                            <a:srgbClr val="FFFFFF"/>
+                          </a:solidFill>
+                          <a:latin typeface="맑은 고딕"/>
+                        </a:rPr>
+                        <a:t>가짜 정상 오경보
+(NS+노이즈 6)</a:t>
+                      </a:r>
+                    </a:p>
+                  </a:txBody>
+                  <a:tcPr anchor="ctr" marL="54864" marR="54864">
+                    <a:solidFill>
+                      <a:srgbClr val="1F3A5F"/>
+                    </a:solidFill>
+                  </a:tcPr>
+                </a:tc>
+                <a:tc>
+                  <a:txBody>
+                    <a:bodyPr/>
+                    <a:lstStyle/>
+                    <a:p>
+                      <a:pPr algn="ctr"/>
+                      <a:r>
+                        <a:rPr sz="1400" b="1">
+                          <a:solidFill>
+                            <a:srgbClr val="FFFFFF"/>
+                          </a:solidFill>
+                          <a:latin typeface="맑은 고딕"/>
+                        </a:rPr>
+                        <a:t>합성 점 AP</a:t>
+                      </a:r>
+                    </a:p>
+                  </a:txBody>
+                  <a:tcPr anchor="ctr" marL="54864" marR="54864">
+                    <a:solidFill>
+                      <a:srgbClr val="1F3A5F"/>
+                    </a:solidFill>
+                  </a:tcPr>
+                </a:tc>
+                <a:tc>
+                  <a:txBody>
+                    <a:bodyPr/>
+                    <a:lstStyle/>
+                    <a:p>
+                      <a:pPr algn="ctr"/>
+                      <a:r>
+                        <a:rPr sz="1400" b="1">
+                          <a:solidFill>
+                            <a:srgbClr val="FFFFFF"/>
+                          </a:solidFill>
+                          <a:latin typeface="맑은 고딕"/>
+                        </a:rPr>
+                        <a:t>3호기 합성 점
+(대비 14 이상)</a:t>
+                      </a:r>
+                    </a:p>
+                  </a:txBody>
+                  <a:tcPr anchor="ctr" marL="54864" marR="54864">
+                    <a:solidFill>
+                      <a:srgbClr val="1F3A5F"/>
+                    </a:solidFill>
+                  </a:tcPr>
+                </a:tc>
+                <a:tc>
+                  <a:txBody>
+                    <a:bodyPr/>
+                    <a:lstStyle/>
+                    <a:p>
+                      <a:pPr algn="ctr"/>
+                      <a:r>
+                        <a:rPr sz="1400" b="1">
+                          <a:solidFill>
+                            <a:srgbClr val="FFFFFF"/>
+                          </a:solidFill>
+                          <a:latin typeface="맑은 고딕"/>
+                        </a:rPr>
+                        <a:t>파라미터</a:t>
+                      </a:r>
+                    </a:p>
+                  </a:txBody>
+                  <a:tcPr anchor="ctr" marL="54864" marR="54864">
+                    <a:solidFill>
+                      <a:srgbClr val="1F3A5F"/>
+                    </a:solidFill>
+                  </a:tcPr>
+                </a:tc>
+              </a:tr>
+              <a:tr h="566928">
+                <a:tc>
+                  <a:txBody>
+                    <a:bodyPr/>
+                    <a:lstStyle/>
+                    <a:p>
+                      <a:pPr algn="l"/>
+                      <a:r>
+                        <a:rPr sz="1400" b="1">
+                          <a:solidFill>
+                            <a:srgbClr val="222222"/>
+                          </a:solidFill>
+                          <a:latin typeface="맑은 고딕"/>
+                        </a:rPr>
+                        <a:t>D-FINE-N</a:t>
+                      </a:r>
+                    </a:p>
+                  </a:txBody>
+                  <a:tcPr anchor="ctr" marL="54864" marR="54864">
+                    <a:solidFill>
+                      <a:srgbClr val="DDF1F4"/>
+                    </a:solidFill>
+                  </a:tcPr>
+                </a:tc>
+                <a:tc>
+                  <a:txBody>
+                    <a:bodyPr/>
+                    <a:lstStyle/>
+                    <a:p>
+                      <a:pPr algn="ctr"/>
+                      <a:r>
+                        <a:rPr sz="1400" b="1">
+                          <a:solidFill>
+                            <a:srgbClr val="222222"/>
+                          </a:solidFill>
+                          <a:latin typeface="맑은 고딕"/>
+                        </a:rPr>
+                        <a:t>0.989</a:t>
+                      </a:r>
+                    </a:p>
+                  </a:txBody>
+                  <a:tcPr anchor="ctr" marL="54864" marR="54864">
+                    <a:solidFill>
+                      <a:srgbClr val="DDF1F4"/>
+                    </a:solidFill>
+                  </a:tcPr>
+                </a:tc>
+                <a:tc>
+                  <a:txBody>
+                    <a:bodyPr/>
+                    <a:lstStyle/>
+                    <a:p>
+                      <a:pPr algn="ctr"/>
+                      <a:r>
+                        <a:rPr sz="1400" b="1">
+                          <a:solidFill>
+                            <a:srgbClr val="222222"/>
+                          </a:solidFill>
+                          <a:latin typeface="맑은 고딕"/>
+                        </a:rPr>
+                        <a:t>0.655 / 0.343</a:t>
+                      </a:r>
+                    </a:p>
+                  </a:txBody>
+                  <a:tcPr anchor="ctr" marL="54864" marR="54864">
+                    <a:solidFill>
+                      <a:srgbClr val="DDF1F4"/>
+                    </a:solidFill>
+                  </a:tcPr>
+                </a:tc>
+                <a:tc>
+                  <a:txBody>
+                    <a:bodyPr/>
+                    <a:lstStyle/>
+                    <a:p>
+                      <a:pPr algn="ctr"/>
+                      <a:r>
+                        <a:rPr sz="1400" b="1">
+                          <a:solidFill>
+                            <a:srgbClr val="222222"/>
+                          </a:solidFill>
+                          <a:latin typeface="맑은 고딕"/>
+                        </a:rPr>
+                        <a:t>49.3%</a:t>
+                      </a:r>
+                    </a:p>
+                  </a:txBody>
+                  <a:tcPr anchor="ctr" marL="54864" marR="54864">
+                    <a:solidFill>
+                      <a:srgbClr val="DDF1F4"/>
+                    </a:solidFill>
+                  </a:tcPr>
+                </a:tc>
+                <a:tc>
+                  <a:txBody>
+                    <a:bodyPr/>
+                    <a:lstStyle/>
+                    <a:p>
+                      <a:pPr algn="ctr"/>
+                      <a:r>
+                        <a:rPr sz="1400" b="1">
+                          <a:solidFill>
+                            <a:srgbClr val="222222"/>
+                          </a:solidFill>
+                          <a:latin typeface="맑은 고딕"/>
+                        </a:rPr>
+                        <a:t>0.574</a:t>
+                      </a:r>
+                    </a:p>
+                  </a:txBody>
+                  <a:tcPr anchor="ctr" marL="54864" marR="54864">
+                    <a:solidFill>
+                      <a:srgbClr val="DDF1F4"/>
+                    </a:solidFill>
+                  </a:tcPr>
+                </a:tc>
+                <a:tc>
+                  <a:txBody>
+                    <a:bodyPr/>
+                    <a:lstStyle/>
+                    <a:p>
+                      <a:pPr algn="ctr"/>
+                      <a:r>
+                        <a:rPr sz="1400" b="1">
+                          <a:solidFill>
+                            <a:srgbClr val="222222"/>
+                          </a:solidFill>
+                          <a:latin typeface="맑은 고딕"/>
+                        </a:rPr>
+                        <a:t>89%</a:t>
+                      </a:r>
+                    </a:p>
+                  </a:txBody>
+                  <a:tcPr anchor="ctr" marL="54864" marR="54864">
+                    <a:solidFill>
+                      <a:srgbClr val="DDF1F4"/>
+                    </a:solidFill>
+                  </a:tcPr>
+                </a:tc>
+                <a:tc>
+                  <a:txBody>
+                    <a:bodyPr/>
+                    <a:lstStyle/>
+                    <a:p>
+                      <a:pPr algn="ctr"/>
+                      <a:r>
+                        <a:rPr sz="1400" b="1">
+                          <a:solidFill>
+                            <a:srgbClr val="222222"/>
+                          </a:solidFill>
+                          <a:latin typeface="맑은 고딕"/>
+                        </a:rPr>
+                        <a:t>3.7M</a:t>
+                      </a:r>
+                    </a:p>
+                  </a:txBody>
+                  <a:tcPr anchor="ctr" marL="54864" marR="54864">
+                    <a:solidFill>
+                      <a:srgbClr val="DDF1F4"/>
+                    </a:solidFill>
+                  </a:tcPr>
+                </a:tc>
+              </a:tr>
+              <a:tr h="566928">
+                <a:tc>
+                  <a:txBody>
+                    <a:bodyPr/>
+                    <a:lstStyle/>
+                    <a:p>
+                      <a:pPr algn="l"/>
+                      <a:r>
+                        <a:rPr sz="1400" b="0">
+                          <a:solidFill>
+                            <a:srgbClr val="222222"/>
+                          </a:solidFill>
+                          <a:latin typeface="맑은 고딕"/>
+                        </a:rPr>
+                        <a:t>RT-DETR-l</a:t>
+                      </a:r>
+                    </a:p>
+                  </a:txBody>
+                  <a:tcPr anchor="ctr" marL="54864" marR="54864">
+                    <a:solidFill>
+                      <a:srgbClr val="F2F5FA"/>
+                    </a:solidFill>
+                  </a:tcPr>
+                </a:tc>
+                <a:tc>
+                  <a:txBody>
+                    <a:bodyPr/>
+                    <a:lstStyle/>
+                    <a:p>
+                      <a:pPr algn="ctr"/>
+                      <a:r>
+                        <a:rPr sz="1400" b="0">
+                          <a:solidFill>
+                            <a:srgbClr val="222222"/>
+                          </a:solidFill>
+                          <a:latin typeface="맑은 고딕"/>
+                        </a:rPr>
+                        <a:t>0.988</a:t>
+                      </a:r>
+                    </a:p>
+                  </a:txBody>
+                  <a:tcPr anchor="ctr" marL="54864" marR="54864">
+                    <a:solidFill>
+                      <a:srgbClr val="F2F5FA"/>
+                    </a:solidFill>
+                  </a:tcPr>
+                </a:tc>
+                <a:tc>
+                  <a:txBody>
+                    <a:bodyPr/>
+                    <a:lstStyle/>
+                    <a:p>
+                      <a:pPr algn="ctr"/>
+                      <a:r>
+                        <a:rPr sz="1400" b="0">
+                          <a:solidFill>
+                            <a:srgbClr val="222222"/>
+                          </a:solidFill>
+                          <a:latin typeface="맑은 고딕"/>
+                        </a:rPr>
+                        <a:t>0.662 / 0.357</a:t>
+                      </a:r>
+                    </a:p>
+                  </a:txBody>
+                  <a:tcPr anchor="ctr" marL="54864" marR="54864">
+                    <a:solidFill>
+                      <a:srgbClr val="F2F5FA"/>
+                    </a:solidFill>
+                  </a:tcPr>
+                </a:tc>
+                <a:tc>
+                  <a:txBody>
+                    <a:bodyPr/>
+                    <a:lstStyle/>
+                    <a:p>
+                      <a:pPr algn="ctr"/>
+                      <a:r>
+                        <a:rPr sz="1400" b="0">
+                          <a:solidFill>
+                            <a:srgbClr val="222222"/>
+                          </a:solidFill>
+                          <a:latin typeface="맑은 고딕"/>
+                        </a:rPr>
+                        <a:t>36.6%</a:t>
+                      </a:r>
+                    </a:p>
+                  </a:txBody>
+                  <a:tcPr anchor="ctr" marL="54864" marR="54864">
+                    <a:solidFill>
+                      <a:srgbClr val="F2F5FA"/>
+                    </a:solidFill>
+                  </a:tcPr>
+                </a:tc>
+                <a:tc>
+                  <a:txBody>
+                    <a:bodyPr/>
+                    <a:lstStyle/>
+                    <a:p>
+                      <a:pPr algn="ctr"/>
+                      <a:r>
+                        <a:rPr sz="1400" b="0">
+                          <a:solidFill>
+                            <a:srgbClr val="222222"/>
+                          </a:solidFill>
+                          <a:latin typeface="맑은 고딕"/>
+                        </a:rPr>
+                        <a:t>0.451</a:t>
+                      </a:r>
+                    </a:p>
+                  </a:txBody>
+                  <a:tcPr anchor="ctr" marL="54864" marR="54864">
+                    <a:solidFill>
+                      <a:srgbClr val="F2F5FA"/>
+                    </a:solidFill>
+                  </a:tcPr>
+                </a:tc>
+                <a:tc>
+                  <a:txBody>
+                    <a:bodyPr/>
+                    <a:lstStyle/>
+                    <a:p>
+                      <a:pPr algn="ctr"/>
+                      <a:r>
+                        <a:rPr sz="1400" b="0">
+                          <a:solidFill>
+                            <a:srgbClr val="222222"/>
+                          </a:solidFill>
+                          <a:latin typeface="맑은 고딕"/>
+                        </a:rPr>
+                        <a:t>61%</a:t>
+                      </a:r>
+                    </a:p>
+                  </a:txBody>
+                  <a:tcPr anchor="ctr" marL="54864" marR="54864">
+                    <a:solidFill>
+                      <a:srgbClr val="F2F5FA"/>
+                    </a:solidFill>
+                  </a:tcPr>
+                </a:tc>
+                <a:tc>
+                  <a:txBody>
+                    <a:bodyPr/>
+                    <a:lstStyle/>
+                    <a:p>
+                      <a:pPr algn="ctr"/>
+                      <a:r>
+                        <a:rPr sz="1400" b="0">
+                          <a:solidFill>
+                            <a:srgbClr val="222222"/>
+                          </a:solidFill>
+                          <a:latin typeface="맑은 고딕"/>
+                        </a:rPr>
+                        <a:t>32.8M</a:t>
+                      </a:r>
+                    </a:p>
+                  </a:txBody>
+                  <a:tcPr anchor="ctr" marL="54864" marR="54864">
+                    <a:solidFill>
+                      <a:srgbClr val="F2F5FA"/>
+                    </a:solidFill>
+                  </a:tcPr>
+                </a:tc>
+              </a:tr>
+              <a:tr h="566928">
+                <a:tc>
+                  <a:txBody>
+                    <a:bodyPr/>
+                    <a:lstStyle/>
+                    <a:p>
+                      <a:pPr algn="l"/>
+                      <a:r>
+                        <a:rPr sz="1400" b="0">
+                          <a:solidFill>
+                            <a:srgbClr val="222222"/>
+                          </a:solidFill>
+                          <a:latin typeface="맑은 고딕"/>
+                        </a:rPr>
+                        <a:t>Faster R-CNN R50</a:t>
+                      </a:r>
+                    </a:p>
+                  </a:txBody>
+                  <a:tcPr anchor="ctr" marL="54864" marR="54864">
+                    <a:solidFill>
+                      <a:srgbClr val="FFFFFF"/>
+                    </a:solidFill>
+                  </a:tcPr>
+                </a:tc>
+                <a:tc>
+                  <a:txBody>
+                    <a:bodyPr/>
+                    <a:lstStyle/>
+                    <a:p>
+                      <a:pPr algn="ctr"/>
+                      <a:r>
+                        <a:rPr sz="1400" b="0">
+                          <a:solidFill>
+                            <a:srgbClr val="222222"/>
+                          </a:solidFill>
+                          <a:latin typeface="맑은 고딕"/>
+                        </a:rPr>
+                        <a:t>0.989</a:t>
+                      </a:r>
+                    </a:p>
+                  </a:txBody>
+                  <a:tcPr anchor="ctr" marL="54864" marR="54864">
+                    <a:solidFill>
+                      <a:srgbClr val="FFFFFF"/>
+                    </a:solidFill>
+                  </a:tcPr>
+                </a:tc>
+                <a:tc>
+                  <a:txBody>
+                    <a:bodyPr/>
+                    <a:lstStyle/>
+                    <a:p>
+                      <a:pPr algn="ctr"/>
+                      <a:r>
+                        <a:rPr sz="1400" b="0">
+                          <a:solidFill>
+                            <a:srgbClr val="222222"/>
+                          </a:solidFill>
+                          <a:latin typeface="맑은 고딕"/>
+                        </a:rPr>
+                        <a:t>0.615 / 0.337</a:t>
+                      </a:r>
+                    </a:p>
+                  </a:txBody>
+                  <a:tcPr anchor="ctr" marL="54864" marR="54864">
+                    <a:solidFill>
+                      <a:srgbClr val="FFFFFF"/>
+                    </a:solidFill>
+                  </a:tcPr>
+                </a:tc>
+                <a:tc>
+                  <a:txBody>
+                    <a:bodyPr/>
+                    <a:lstStyle/>
+                    <a:p>
+                      <a:pPr algn="ctr"/>
+                      <a:r>
+                        <a:rPr sz="1400" b="0">
+                          <a:solidFill>
+                            <a:srgbClr val="222222"/>
+                          </a:solidFill>
+                          <a:latin typeface="맑은 고딕"/>
+                        </a:rPr>
+                        <a:t>0.5%</a:t>
+                      </a:r>
+                    </a:p>
+                  </a:txBody>
+                  <a:tcPr anchor="ctr" marL="54864" marR="54864">
+                    <a:solidFill>
+                      <a:srgbClr val="FFFFFF"/>
+                    </a:solidFill>
+                  </a:tcPr>
+                </a:tc>
+                <a:tc>
+                  <a:txBody>
+                    <a:bodyPr/>
+                    <a:lstStyle/>
+                    <a:p>
+                      <a:pPr algn="ctr"/>
+                      <a:r>
+                        <a:rPr sz="1400" b="0">
+                          <a:solidFill>
+                            <a:srgbClr val="222222"/>
+                          </a:solidFill>
+                          <a:latin typeface="맑은 고딕"/>
+                        </a:rPr>
+                        <a:t>0.567</a:t>
+                      </a:r>
+                    </a:p>
+                  </a:txBody>
+                  <a:tcPr anchor="ctr" marL="54864" marR="54864">
+                    <a:solidFill>
+                      <a:srgbClr val="FFFFFF"/>
+                    </a:solidFill>
+                  </a:tcPr>
+                </a:tc>
+                <a:tc>
+                  <a:txBody>
+                    <a:bodyPr/>
+                    <a:lstStyle/>
+                    <a:p>
+                      <a:pPr algn="ctr"/>
+                      <a:r>
+                        <a:rPr sz="1400" b="0">
+                          <a:solidFill>
+                            <a:srgbClr val="222222"/>
+                          </a:solidFill>
+                          <a:latin typeface="맑은 고딕"/>
+                        </a:rPr>
+                        <a:t>75%</a:t>
+                      </a:r>
+                    </a:p>
+                  </a:txBody>
+                  <a:tcPr anchor="ctr" marL="54864" marR="54864">
+                    <a:solidFill>
+                      <a:srgbClr val="FFFFFF"/>
+                    </a:solidFill>
+                  </a:tcPr>
+                </a:tc>
+                <a:tc>
+                  <a:txBody>
+                    <a:bodyPr/>
+                    <a:lstStyle/>
+                    <a:p>
+                      <a:pPr algn="ctr"/>
+                      <a:r>
+                        <a:rPr sz="1400" b="0">
+                          <a:solidFill>
+                            <a:srgbClr val="222222"/>
+                          </a:solidFill>
+                          <a:latin typeface="맑은 고딕"/>
+                        </a:rPr>
+                        <a:t>41.4M</a:t>
+                      </a:r>
+                    </a:p>
+                  </a:txBody>
+                  <a:tcPr anchor="ctr" marL="54864" marR="54864">
+                    <a:solidFill>
+                      <a:srgbClr val="FFFFFF"/>
+                    </a:solidFill>
+                  </a:tcPr>
+                </a:tc>
+              </a:tr>
+              <a:tr h="566928">
+                <a:tc>
+                  <a:txBody>
+                    <a:bodyPr/>
+                    <a:lstStyle/>
+                    <a:p>
+                      <a:pPr algn="l"/>
+                      <a:r>
+                        <a:rPr sz="1400" b="0">
+                          <a:solidFill>
+                            <a:srgbClr val="222222"/>
+                          </a:solidFill>
+                          <a:latin typeface="맑은 고딕"/>
+                        </a:rPr>
+                        <a:t>YOLO26n</a:t>
+                      </a:r>
+                    </a:p>
+                  </a:txBody>
+                  <a:tcPr anchor="ctr" marL="54864" marR="54864">
+                    <a:solidFill>
+                      <a:srgbClr val="F2F5FA"/>
+                    </a:solidFill>
+                  </a:tcPr>
+                </a:tc>
+                <a:tc>
+                  <a:txBody>
+                    <a:bodyPr/>
+                    <a:lstStyle/>
+                    <a:p>
+                      <a:pPr algn="ctr"/>
+                      <a:r>
+                        <a:rPr sz="1400" b="0">
+                          <a:solidFill>
+                            <a:srgbClr val="222222"/>
+                          </a:solidFill>
+                          <a:latin typeface="맑은 고딕"/>
+                        </a:rPr>
+                        <a:t>0.991</a:t>
+                      </a:r>
+                    </a:p>
+                  </a:txBody>
+                  <a:tcPr anchor="ctr" marL="54864" marR="54864">
+                    <a:solidFill>
+                      <a:srgbClr val="F2F5FA"/>
+                    </a:solidFill>
+                  </a:tcPr>
+                </a:tc>
+                <a:tc>
+                  <a:txBody>
+                    <a:bodyPr/>
+                    <a:lstStyle/>
+                    <a:p>
+                      <a:pPr algn="ctr"/>
+                      <a:r>
+                        <a:rPr sz="1400" b="0">
+                          <a:solidFill>
+                            <a:srgbClr val="222222"/>
+                          </a:solidFill>
+                          <a:latin typeface="맑은 고딕"/>
+                        </a:rPr>
+                        <a:t>0.642 / 0.314</a:t>
+                      </a:r>
+                    </a:p>
+                  </a:txBody>
+                  <a:tcPr anchor="ctr" marL="54864" marR="54864">
+                    <a:solidFill>
+                      <a:srgbClr val="F2F5FA"/>
+                    </a:solidFill>
+                  </a:tcPr>
+                </a:tc>
+                <a:tc>
+                  <a:txBody>
+                    <a:bodyPr/>
+                    <a:lstStyle/>
+                    <a:p>
+                      <a:pPr algn="ctr"/>
+                      <a:r>
+                        <a:rPr sz="1400" b="0">
+                          <a:solidFill>
+                            <a:srgbClr val="222222"/>
+                          </a:solidFill>
+                          <a:latin typeface="맑은 고딕"/>
+                        </a:rPr>
+                        <a:t>4.1%</a:t>
+                      </a:r>
+                    </a:p>
+                  </a:txBody>
+                  <a:tcPr anchor="ctr" marL="54864" marR="54864">
+                    <a:solidFill>
+                      <a:srgbClr val="F2F5FA"/>
+                    </a:solidFill>
+                  </a:tcPr>
+                </a:tc>
+                <a:tc>
+                  <a:txBody>
+                    <a:bodyPr/>
+                    <a:lstStyle/>
+                    <a:p>
+                      <a:pPr algn="ctr"/>
+                      <a:r>
+                        <a:rPr sz="1400" b="0">
+                          <a:solidFill>
+                            <a:srgbClr val="222222"/>
+                          </a:solidFill>
+                          <a:latin typeface="맑은 고딕"/>
+                        </a:rPr>
+                        <a:t>0.501</a:t>
+                      </a:r>
+                    </a:p>
+                  </a:txBody>
+                  <a:tcPr anchor="ctr" marL="54864" marR="54864">
+                    <a:solidFill>
+                      <a:srgbClr val="F2F5FA"/>
+                    </a:solidFill>
+                  </a:tcPr>
+                </a:tc>
+                <a:tc>
+                  <a:txBody>
+                    <a:bodyPr/>
+                    <a:lstStyle/>
+                    <a:p>
+                      <a:pPr algn="ctr"/>
+                      <a:r>
+                        <a:rPr sz="1400" b="0">
+                          <a:solidFill>
+                            <a:srgbClr val="222222"/>
+                          </a:solidFill>
+                          <a:latin typeface="맑은 고딕"/>
+                        </a:rPr>
+                        <a:t>62%</a:t>
+                      </a:r>
+                    </a:p>
+                  </a:txBody>
+                  <a:tcPr anchor="ctr" marL="54864" marR="54864">
+                    <a:solidFill>
+                      <a:srgbClr val="F2F5FA"/>
+                    </a:solidFill>
+                  </a:tcPr>
+                </a:tc>
+                <a:tc>
+                  <a:txBody>
+                    <a:bodyPr/>
+                    <a:lstStyle/>
+                    <a:p>
+                      <a:pPr algn="ctr"/>
+                      <a:r>
+                        <a:rPr sz="1400" b="0">
+                          <a:solidFill>
+                            <a:srgbClr val="222222"/>
+                          </a:solidFill>
+                          <a:latin typeface="맑은 고딕"/>
+                        </a:rPr>
+                        <a:t>2.5M</a:t>
+                      </a:r>
+                    </a:p>
+                  </a:txBody>
+                  <a:tcPr anchor="ctr" marL="54864" marR="54864">
+                    <a:solidFill>
+                      <a:srgbClr val="F2F5FA"/>
+                    </a:solidFill>
+                  </a:tcPr>
+                </a:tc>
+              </a:tr>
+              <a:tr h="566928">
+                <a:tc>
+                  <a:txBody>
+                    <a:bodyPr/>
+                    <a:lstStyle/>
+                    <a:p>
+                      <a:pPr algn="l"/>
+                      <a:r>
+                        <a:rPr sz="1400" b="0">
+                          <a:solidFill>
+                            <a:srgbClr val="222222"/>
+                          </a:solidFill>
+                          <a:latin typeface="맑은 고딕"/>
+                        </a:rPr>
+                        <a:t>YOLOv3-tiny</a:t>
+                      </a:r>
+                    </a:p>
+                  </a:txBody>
+                  <a:tcPr anchor="ctr" marL="54864" marR="54864">
+                    <a:solidFill>
+                      <a:srgbClr val="FFFFFF"/>
+                    </a:solidFill>
+                  </a:tcPr>
+                </a:tc>
+                <a:tc>
+                  <a:txBody>
+                    <a:bodyPr/>
+                    <a:lstStyle/>
+                    <a:p>
+                      <a:pPr algn="ctr"/>
+                      <a:r>
+                        <a:rPr sz="1400" b="0">
+                          <a:solidFill>
+                            <a:srgbClr val="222222"/>
+                          </a:solidFill>
+                          <a:latin typeface="맑은 고딕"/>
+                        </a:rPr>
+                        <a:t>0.989</a:t>
+                      </a:r>
+                    </a:p>
+                  </a:txBody>
+                  <a:tcPr anchor="ctr" marL="54864" marR="54864">
+                    <a:solidFill>
+                      <a:srgbClr val="FFFFFF"/>
+                    </a:solidFill>
+                  </a:tcPr>
+                </a:tc>
+                <a:tc>
+                  <a:txBody>
+                    <a:bodyPr/>
+                    <a:lstStyle/>
+                    <a:p>
+                      <a:pPr algn="ctr"/>
+                      <a:r>
+                        <a:rPr sz="1400" b="0">
+                          <a:solidFill>
+                            <a:srgbClr val="222222"/>
+                          </a:solidFill>
+                          <a:latin typeface="맑은 고딕"/>
+                        </a:rPr>
+                        <a:t>0.579 / 0.311</a:t>
+                      </a:r>
+                    </a:p>
+                  </a:txBody>
+                  <a:tcPr anchor="ctr" marL="54864" marR="54864">
+                    <a:solidFill>
+                      <a:srgbClr val="FFFFFF"/>
+                    </a:solidFill>
+                  </a:tcPr>
+                </a:tc>
+                <a:tc>
+                  <a:txBody>
+                    <a:bodyPr/>
+                    <a:lstStyle/>
+                    <a:p>
+                      <a:pPr algn="ctr"/>
+                      <a:r>
+                        <a:rPr sz="1400" b="0">
+                          <a:solidFill>
+                            <a:srgbClr val="222222"/>
+                          </a:solidFill>
+                          <a:latin typeface="맑은 고딕"/>
+                        </a:rPr>
+                        <a:t>38.5%</a:t>
+                      </a:r>
+                    </a:p>
+                  </a:txBody>
+                  <a:tcPr anchor="ctr" marL="54864" marR="54864">
+                    <a:solidFill>
+                      <a:srgbClr val="FFFFFF"/>
+                    </a:solidFill>
+                  </a:tcPr>
+                </a:tc>
+                <a:tc>
+                  <a:txBody>
+                    <a:bodyPr/>
+                    <a:lstStyle/>
+                    <a:p>
+                      <a:pPr algn="ctr"/>
+                      <a:r>
+                        <a:rPr sz="1400" b="0">
+                          <a:solidFill>
+                            <a:srgbClr val="222222"/>
+                          </a:solidFill>
+                          <a:latin typeface="맑은 고딕"/>
+                        </a:rPr>
+                        <a:t>0.515</a:t>
+                      </a:r>
+                    </a:p>
+                  </a:txBody>
+                  <a:tcPr anchor="ctr" marL="54864" marR="54864">
+                    <a:solidFill>
+                      <a:srgbClr val="FFFFFF"/>
+                    </a:solidFill>
+                  </a:tcPr>
+                </a:tc>
+                <a:tc>
+                  <a:txBody>
+                    <a:bodyPr/>
+                    <a:lstStyle/>
+                    <a:p>
+                      <a:pPr algn="ctr"/>
+                      <a:r>
+                        <a:rPr sz="1400" b="0">
+                          <a:solidFill>
+                            <a:srgbClr val="222222"/>
+                          </a:solidFill>
+                          <a:latin typeface="맑은 고딕"/>
+                        </a:rPr>
+                        <a:t>70%</a:t>
+                      </a:r>
+                    </a:p>
+                  </a:txBody>
+                  <a:tcPr anchor="ctr" marL="54864" marR="54864">
+                    <a:solidFill>
+                      <a:srgbClr val="FFFFFF"/>
+                    </a:solidFill>
+                  </a:tcPr>
+                </a:tc>
+                <a:tc>
+                  <a:txBody>
+                    <a:bodyPr/>
+                    <a:lstStyle/>
+                    <a:p>
+                      <a:pPr algn="ctr"/>
+                      <a:r>
+                        <a:rPr sz="1400" b="0">
+                          <a:solidFill>
+                            <a:srgbClr val="222222"/>
+                          </a:solidFill>
+                          <a:latin typeface="맑은 고딕"/>
+                        </a:rPr>
+                        <a:t>8.7M</a:t>
+                      </a:r>
+                    </a:p>
+                  </a:txBody>
+                  <a:tcPr anchor="ctr" marL="54864" marR="54864">
+                    <a:solidFill>
+                      <a:srgbClr val="FFFFFF"/>
+                    </a:solidFill>
+                  </a:tcPr>
+                </a:tc>
+              </a:tr>
+              <a:tr h="566928">
+                <a:tc>
+                  <a:txBody>
+                    <a:bodyPr/>
+                    <a:lstStyle/>
+                    <a:p>
+                      <a:pPr algn="l"/>
+                      <a:r>
+                        <a:rPr sz="1400" b="0">
+                          <a:solidFill>
+                            <a:srgbClr val="222222"/>
+                          </a:solidFill>
+                          <a:latin typeface="맑은 고딕"/>
+                        </a:rPr>
+                        <a:t>Faster R-CNN MobileNetV3</a:t>
+                      </a:r>
+                    </a:p>
+                  </a:txBody>
+                  <a:tcPr anchor="ctr" marL="54864" marR="54864">
+                    <a:solidFill>
+                      <a:srgbClr val="F2F5FA"/>
+                    </a:solidFill>
+                  </a:tcPr>
+                </a:tc>
+                <a:tc>
+                  <a:txBody>
+                    <a:bodyPr/>
+                    <a:lstStyle/>
+                    <a:p>
+                      <a:pPr algn="ctr"/>
+                      <a:r>
+                        <a:rPr sz="1400" b="0">
+                          <a:solidFill>
+                            <a:srgbClr val="222222"/>
+                          </a:solidFill>
+                          <a:latin typeface="맑은 고딕"/>
+                        </a:rPr>
+                        <a:t>0.986</a:t>
+                      </a:r>
+                    </a:p>
+                  </a:txBody>
+                  <a:tcPr anchor="ctr" marL="54864" marR="54864">
+                    <a:solidFill>
+                      <a:srgbClr val="F2F5FA"/>
+                    </a:solidFill>
+                  </a:tcPr>
+                </a:tc>
+                <a:tc>
+                  <a:txBody>
+                    <a:bodyPr/>
+                    <a:lstStyle/>
+                    <a:p>
+                      <a:pPr algn="ctr"/>
+                      <a:r>
+                        <a:rPr sz="1400" b="0">
+                          <a:solidFill>
+                            <a:srgbClr val="222222"/>
+                          </a:solidFill>
+                          <a:latin typeface="맑은 고딕"/>
+                        </a:rPr>
+                        <a:t>0.583 / 0.322</a:t>
+                      </a:r>
+                    </a:p>
+                  </a:txBody>
+                  <a:tcPr anchor="ctr" marL="54864" marR="54864">
+                    <a:solidFill>
+                      <a:srgbClr val="F2F5FA"/>
+                    </a:solidFill>
+                  </a:tcPr>
+                </a:tc>
+                <a:tc>
+                  <a:txBody>
+                    <a:bodyPr/>
+                    <a:lstStyle/>
+                    <a:p>
+                      <a:pPr algn="ctr"/>
+                      <a:r>
+                        <a:rPr sz="1400" b="0">
+                          <a:solidFill>
+                            <a:srgbClr val="222222"/>
+                          </a:solidFill>
+                          <a:latin typeface="맑은 고딕"/>
+                        </a:rPr>
+                        <a:t>64.0%</a:t>
+                      </a:r>
+                    </a:p>
+                  </a:txBody>
+                  <a:tcPr anchor="ctr" marL="54864" marR="54864">
+                    <a:solidFill>
+                      <a:srgbClr val="F2F5FA"/>
+                    </a:solidFill>
+                  </a:tcPr>
+                </a:tc>
+                <a:tc>
+                  <a:txBody>
+                    <a:bodyPr/>
+                    <a:lstStyle/>
+                    <a:p>
+                      <a:pPr algn="ctr"/>
+                      <a:r>
+                        <a:rPr sz="1400" b="0">
+                          <a:solidFill>
+                            <a:srgbClr val="222222"/>
+                          </a:solidFill>
+                          <a:latin typeface="맑은 고딕"/>
+                        </a:rPr>
+                        <a:t>0.262</a:t>
+                      </a:r>
+                    </a:p>
+                  </a:txBody>
+                  <a:tcPr anchor="ctr" marL="54864" marR="54864">
+                    <a:solidFill>
+                      <a:srgbClr val="F2F5FA"/>
+                    </a:solidFill>
+                  </a:tcPr>
+                </a:tc>
+                <a:tc>
+                  <a:txBody>
+                    <a:bodyPr/>
+                    <a:lstStyle/>
+                    <a:p>
+                      <a:pPr algn="ctr"/>
+                      <a:r>
+                        <a:rPr sz="1400" b="0">
+                          <a:solidFill>
+                            <a:srgbClr val="222222"/>
+                          </a:solidFill>
+                          <a:latin typeface="맑은 고딕"/>
+                        </a:rPr>
+                        <a:t>4%</a:t>
+                      </a:r>
+                    </a:p>
+                  </a:txBody>
+                  <a:tcPr anchor="ctr" marL="54864" marR="54864">
+                    <a:solidFill>
+                      <a:srgbClr val="F2F5FA"/>
+                    </a:solidFill>
+                  </a:tcPr>
+                </a:tc>
+                <a:tc>
+                  <a:txBody>
+                    <a:bodyPr/>
+                    <a:lstStyle/>
+                    <a:p>
+                      <a:pPr algn="ctr"/>
+                      <a:r>
+                        <a:rPr sz="1400" b="0">
+                          <a:solidFill>
+                            <a:srgbClr val="222222"/>
+                          </a:solidFill>
+                          <a:latin typeface="맑은 고딕"/>
+                        </a:rPr>
+                        <a:t>19.0M</a:t>
+                      </a:r>
+                    </a:p>
+                  </a:txBody>
+                  <a:tcPr anchor="ctr" marL="54864" marR="54864">
+                    <a:solidFill>
+                      <a:srgbClr val="F2F5FA"/>
+                    </a:solidFill>
+                  </a:tcPr>
+                </a:tc>
+              </a:tr>
+            </a:tbl>
+          </a:graphicData>
+        </a:graphic>
+      </p:graphicFrame>
       <p:sp>
         <p:nvSpPr>
           <p:cNvPr id="8" name="TextBox 7"/>
@@ -11959,8 +13137,8 @@
         </p:nvSpPr>
         <p:spPr>
           <a:xfrm>
-            <a:off x="8229600" y="1691640"/>
-            <a:ext cx="3657600" cy="3017520"/>
+            <a:off x="548640" y="5806440"/>
+            <a:ext cx="10972800" cy="822960"/>
           </a:xfrm>
           <a:prstGeom prst="rect">
             <a:avLst/>
@@ -11975,7 +13153,7 @@
           <a:p>
             <a:pPr>
               <a:spcAft>
-                <a:spcPts val="800"/>
+                <a:spcPts val="600"/>
               </a:spcAft>
             </a:pPr>
             <a:r>
@@ -11988,251 +13166,13 @@
               <a:t>• </a:t>
             </a:r>
             <a:r>
-              <a:rPr sz="1400" b="1">
-                <a:solidFill>
-                  <a:srgbClr val="222222"/>
-                </a:solidFill>
-                <a:latin typeface="맑은 고딕"/>
-              </a:rPr>
-              <a:t>약점</a:t>
-            </a:r>
-            <a:r>
               <a:rPr sz="1400" b="0">
                 <a:solidFill>
                   <a:srgbClr val="222222"/>
                 </a:solidFill>
                 <a:latin typeface="맑은 고딕"/>
               </a:rPr>
-              <a:t>: 노이즈 보간 오경보 49%, 신뢰도가 0.9 근처에서 포화</a:t>
-            </a:r>
-          </a:p>
-          <a:p>
-            <a:pPr>
-              <a:spcAft>
-                <a:spcPts val="800"/>
-              </a:spcAft>
-            </a:pPr>
-            <a:r>
-              <a:rPr sz="1400" b="1">
-                <a:solidFill>
-                  <a:srgbClr val="2AA7B8"/>
-                </a:solidFill>
-                <a:latin typeface="맑은 고딕"/>
-              </a:rPr>
-              <a:t>• </a:t>
-            </a:r>
-            <a:r>
-              <a:rPr sz="1400" b="1">
-                <a:solidFill>
-                  <a:srgbClr val="222222"/>
-                </a:solidFill>
-                <a:latin typeface="맑은 고딕"/>
-              </a:rPr>
-              <a:t>대안</a:t>
-            </a:r>
-            <a:r>
-              <a:rPr sz="1400" b="0">
-                <a:solidFill>
-                  <a:srgbClr val="222222"/>
-                </a:solidFill>
-                <a:latin typeface="맑은 고딕"/>
-              </a:rPr>
-              <a:t>: 오경보 우선이면 R50 / YOLO26n, CPU 전용이면 YOLOv3-tiny</a:t>
-            </a:r>
-          </a:p>
-          <a:p>
-            <a:pPr>
-              <a:spcAft>
-                <a:spcPts val="800"/>
-              </a:spcAft>
-            </a:pPr>
-            <a:r>
-              <a:rPr sz="1400" b="1">
-                <a:solidFill>
-                  <a:srgbClr val="2AA7B8"/>
-                </a:solidFill>
-                <a:latin typeface="맑은 고딕"/>
-              </a:rPr>
-              <a:t>• </a:t>
-            </a:r>
-            <a:r>
-              <a:rPr sz="1400" b="0">
-                <a:solidFill>
-                  <a:srgbClr val="222222"/>
-                </a:solidFill>
-                <a:latin typeface="맑은 고딕"/>
-              </a:rPr>
-              <a:t>'미탐지 우선'은 </a:t>
-            </a:r>
-            <a:r>
-              <a:rPr sz="1400" b="1">
-                <a:solidFill>
-                  <a:srgbClr val="222222"/>
-                </a:solidFill>
-                <a:latin typeface="맑은 고딕"/>
-              </a:rPr>
-              <a:t>결과를 본 뒤 정한 우선순위</a:t>
-            </a:r>
-            <a:r>
-              <a:rPr sz="1400" b="0">
-                <a:solidFill>
-                  <a:srgbClr val="222222"/>
-                </a:solidFill>
-                <a:latin typeface="맑은 고딕"/>
-              </a:rPr>
-              <a:t>라 보고서에 그대로 밝힌다</a:t>
-            </a:r>
-          </a:p>
-        </p:txBody>
-      </p:sp>
-      <p:sp>
-        <p:nvSpPr>
-          <p:cNvPr id="9" name="TextBox 8"/>
-          <p:cNvSpPr txBox="1"/>
-          <p:nvPr/>
-        </p:nvSpPr>
-        <p:spPr>
-          <a:xfrm>
-            <a:off x="548640" y="4663440"/>
-            <a:ext cx="11155680" cy="2011680"/>
-          </a:xfrm>
-          <a:prstGeom prst="rect">
-            <a:avLst/>
-          </a:prstGeom>
-          <a:noFill/>
-        </p:spPr>
-        <p:txBody>
-          <a:bodyPr wrap="square" lIns="45720" rIns="45720">
-            <a:spAutoFit/>
-          </a:bodyPr>
-          <a:lstStyle/>
-          <a:p>
-            <a:pPr>
-              <a:spcAft>
-                <a:spcPts val="500"/>
-              </a:spcAft>
-            </a:pPr>
-            <a:r>
-              <a:rPr sz="1400" b="1">
-                <a:solidFill>
-                  <a:srgbClr val="2AA7B8"/>
-                </a:solidFill>
-                <a:latin typeface="맑은 고딕"/>
-              </a:rPr>
-              <a:t>• </a:t>
-            </a:r>
-            <a:r>
-              <a:rPr sz="1400" b="1">
-                <a:solidFill>
-                  <a:srgbClr val="222222"/>
-                </a:solidFill>
-                <a:latin typeface="맑은 고딕"/>
-              </a:rPr>
-              <a:t>① val mAP50-95</a:t>
-            </a:r>
-            <a:r>
-              <a:rPr sz="1400" b="0">
-                <a:solidFill>
-                  <a:srgbClr val="222222"/>
-                </a:solidFill>
-                <a:latin typeface="맑은 고딕"/>
-              </a:rPr>
-              <a:t>: val 이미지 복원추출 1,000회로 비교하니 </a:t>
-            </a:r>
-            <a:r>
-              <a:rPr sz="1400" b="1">
-                <a:solidFill>
-                  <a:srgbClr val="222222"/>
-                </a:solidFill>
-                <a:latin typeface="맑은 고딕"/>
-              </a:rPr>
-              <a:t>RT-DETR-l 0.662와 D-FINE-N 0.655가 동률 선두</a:t>
-            </a:r>
-            <a:r>
-              <a:rPr sz="1400" b="0">
-                <a:solidFill>
-                  <a:srgbClr val="222222"/>
-                </a:solidFill>
-                <a:latin typeface="맑은 고딕"/>
-              </a:rPr>
-              <a:t>(차이 −0.008, 95% 구간 −0.016~0.000). R50·YOLO26n은 유의하게 낮고, 공식 라벨만 보면 R50도 동률</a:t>
-            </a:r>
-          </a:p>
-          <a:p>
-            <a:pPr>
-              <a:spcAft>
-                <a:spcPts val="500"/>
-              </a:spcAft>
-            </a:pPr>
-            <a:r>
-              <a:rPr sz="1400" b="1">
-                <a:solidFill>
-                  <a:srgbClr val="2AA7B8"/>
-                </a:solidFill>
-                <a:latin typeface="맑은 고딕"/>
-              </a:rPr>
-              <a:t>• </a:t>
-            </a:r>
-            <a:r>
-              <a:rPr sz="1400" b="1">
-                <a:solidFill>
-                  <a:srgbClr val="222222"/>
-                </a:solidFill>
-                <a:latin typeface="맑은 고딕"/>
-              </a:rPr>
-              <a:t>② 동률이면 강건성</a:t>
-            </a:r>
-            <a:r>
-              <a:rPr sz="1400" b="0">
-                <a:solidFill>
-                  <a:srgbClr val="222222"/>
-                </a:solidFill>
-                <a:latin typeface="맑은 고딕"/>
-              </a:rPr>
-              <a:t>: 합성 점 AP와 3호기 검출은 D-FINE-N 우세(0.574 대 0.451, 89% 대 61%), 가짜 정상 오경보는 RT-DETR-l 우세(37% 대 49%) → 놓침이 더 비싸다고 보아 </a:t>
-            </a:r>
-            <a:r>
-              <a:rPr sz="1400" b="1">
-                <a:solidFill>
-                  <a:srgbClr val="222222"/>
-                </a:solidFill>
-                <a:latin typeface="맑은 고딕"/>
-              </a:rPr>
-              <a:t>미탐지를 우선</a:t>
-            </a:r>
-          </a:p>
-          <a:p>
-            <a:pPr>
-              <a:spcAft>
-                <a:spcPts val="500"/>
-              </a:spcAft>
-            </a:pPr>
-            <a:r>
-              <a:rPr sz="1400" b="1">
-                <a:solidFill>
-                  <a:srgbClr val="2AA7B8"/>
-                </a:solidFill>
-                <a:latin typeface="맑은 고딕"/>
-              </a:rPr>
-              <a:t>• </a:t>
-            </a:r>
-            <a:r>
-              <a:rPr sz="1400" b="1">
-                <a:solidFill>
-                  <a:srgbClr val="222222"/>
-                </a:solidFill>
-                <a:latin typeface="맑은 고딕"/>
-              </a:rPr>
-              <a:t>③ 크기</a:t>
-            </a:r>
-            <a:r>
-              <a:rPr sz="1400" b="0">
-                <a:solidFill>
-                  <a:srgbClr val="222222"/>
-                </a:solidFill>
-                <a:latin typeface="맑은 고딕"/>
-              </a:rPr>
-              <a:t>: 3.7M(15MB)로 RT-DETR-l(32.8M)의 약 1/9</a:t>
+              <a:t>점 제거는 6개 모델 모두 0~3개만 남아 차이가 없다. test F1은 모두 포화다.</a:t>
             </a:r>
           </a:p>
         </p:txBody>
@@ -12328,7 +13268,7 @@
                 </a:solidFill>
                 <a:latin typeface="맑은 고딕"/>
               </a:rPr>
-              <a:t>현장 활용: 3단 판정과 재검사 구간</a:t>
+              <a:t>베스트 모델: D-FINE-N</a:t>
             </a:r>
           </a:p>
         </p:txBody>
@@ -12363,7 +13303,7 @@
                 </a:solidFill>
                 <a:latin typeface="맑은 고딕"/>
               </a:rPr>
-              <a:t>실제 test에서는 결함 369장(≥0.748)과 빈 라벨 27장(≤0.04)이 완전히 갈린다</a:t>
+              <a:t>val 동률 선두 + 미탐지 강건성 최상 + 작다(3.7M)</a:t>
             </a:r>
           </a:p>
         </p:txBody>
@@ -12433,14 +13373,14 @@
                 </a:solidFill>
                 <a:latin typeface="맑은 고딕"/>
               </a:rPr>
-              <a:t>재검사 구간의 효과는 합성·가짜 정상에 기반한 참고 수치다. 재검사·놓침 비용은 현장 값을 몰라 가정하지 않았다.</a:t>
+              <a:t>선정 기준 ①②③은 팀원 모델 추가 전에 정했다. '미탐지 우선'은 결과를 본 뒤 정한 우선순위다. 상세는 docs/analysis.md 5절.</a:t>
             </a:r>
           </a:p>
         </p:txBody>
       </p:sp>
       <p:pic>
         <p:nvPicPr>
-          <p:cNvPr id="7" name="Picture 6" descr="fig4b_final_dfine.png"/>
+          <p:cNvPr id="7" name="Picture 6" descr="fig5e_select_ci.png"/>
           <p:cNvPicPr>
             <a:picLocks noChangeAspect="1"/>
           </p:cNvPicPr>
@@ -12454,8 +13394,8 @@
         </p:blipFill>
         <p:spPr>
           <a:xfrm>
-            <a:off x="1687794" y="1508760"/>
-            <a:ext cx="8785931" cy="3246120"/>
+            <a:off x="274320" y="1590775"/>
+            <a:ext cx="7863840" cy="2899209"/>
           </a:xfrm>
           <a:prstGeom prst="rect">
             <a:avLst/>
@@ -12470,8 +13410,8 @@
         </p:nvSpPr>
         <p:spPr>
           <a:xfrm>
-            <a:off x="731520" y="4846320"/>
-            <a:ext cx="10789920" cy="1463040"/>
+            <a:off x="8229600" y="1691640"/>
+            <a:ext cx="3657600" cy="3017520"/>
           </a:xfrm>
           <a:prstGeom prst="rect">
             <a:avLst/>
@@ -12486,11 +13426,11 @@
           <a:p>
             <a:pPr>
               <a:spcAft>
-                <a:spcPts val="600"/>
+                <a:spcPts val="800"/>
               </a:spcAft>
             </a:pPr>
             <a:r>
-              <a:rPr sz="1600" b="1">
+              <a:rPr sz="1400" b="1">
                 <a:solidFill>
                   <a:srgbClr val="2AA7B8"/>
                 </a:solidFill>
@@ -12499,68 +13439,32 @@
               <a:t>• </a:t>
             </a:r>
             <a:r>
-              <a:rPr sz="1600" b="1">
-                <a:solidFill>
-                  <a:srgbClr val="222222"/>
-                </a:solidFill>
-                <a:latin typeface="맑은 고딕"/>
-              </a:rPr>
-              <a:t>불합격</a:t>
-            </a:r>
-            <a:r>
-              <a:rPr sz="1600" b="0">
-                <a:solidFill>
-                  <a:srgbClr val="222222"/>
-                </a:solidFill>
-                <a:latin typeface="맑은 고딕"/>
-              </a:rPr>
-              <a:t> 최고 신뢰도 ≥ 0.66(val 임계값)  |  </a:t>
-            </a:r>
-            <a:r>
-              <a:rPr sz="1600" b="1">
-                <a:solidFill>
-                  <a:srgbClr val="222222"/>
-                </a:solidFill>
-                <a:latin typeface="맑은 고딕"/>
-              </a:rPr>
-              <a:t>재검사</a:t>
-            </a:r>
-            <a:r>
-              <a:rPr sz="1600" b="0">
-                <a:solidFill>
-                  <a:srgbClr val="222222"/>
-                </a:solidFill>
-                <a:latin typeface="맑은 고딕"/>
-              </a:rPr>
-              <a:t> 0.3 ~ 0.66  |  </a:t>
-            </a:r>
-            <a:r>
-              <a:rPr sz="1600" b="1">
-                <a:solidFill>
-                  <a:srgbClr val="222222"/>
-                </a:solidFill>
-                <a:latin typeface="맑은 고딕"/>
-              </a:rPr>
-              <a:t>합격</a:t>
-            </a:r>
-            <a:r>
-              <a:rPr sz="1600" b="0">
-                <a:solidFill>
-                  <a:srgbClr val="222222"/>
-                </a:solidFill>
-                <a:latin typeface="맑은 고딕"/>
-              </a:rPr>
-              <a:t> &lt; 0.3</a:t>
+              <a:rPr sz="1400" b="1">
+                <a:solidFill>
+                  <a:srgbClr val="222222"/>
+                </a:solidFill>
+                <a:latin typeface="맑은 고딕"/>
+              </a:rPr>
+              <a:t>약점</a:t>
+            </a:r>
+            <a:r>
+              <a:rPr sz="1400" b="0">
+                <a:solidFill>
+                  <a:srgbClr val="222222"/>
+                </a:solidFill>
+                <a:latin typeface="맑은 고딕"/>
+              </a:rPr>
+              <a:t>: 노이즈 보간 오경보 49%, 신뢰도가 0.9 근처에서 포화</a:t>
             </a:r>
           </a:p>
           <a:p>
             <a:pPr>
               <a:spcAft>
-                <a:spcPts val="600"/>
+                <a:spcPts val="800"/>
               </a:spcAft>
             </a:pPr>
             <a:r>
-              <a:rPr sz="1600" b="1">
+              <a:rPr sz="1400" b="1">
                 <a:solidFill>
                   <a:srgbClr val="2AA7B8"/>
                 </a:solidFill>
@@ -12569,23 +13473,32 @@
               <a:t>• </a:t>
             </a:r>
             <a:r>
-              <a:rPr sz="1600" b="0">
-                <a:solidFill>
-                  <a:srgbClr val="222222"/>
-                </a:solidFill>
-                <a:latin typeface="맑은 고딕"/>
-              </a:rPr>
-              <a:t>하한을 0.3으로 낮추면 옅은 점 검출 61.9% → 67.1%, 대신 가짜 정상 오경보 4.1% → 5.7%(평균 보간), 49% → 59%(노이즈 보간)</a:t>
+              <a:rPr sz="1400" b="1">
+                <a:solidFill>
+                  <a:srgbClr val="222222"/>
+                </a:solidFill>
+                <a:latin typeface="맑은 고딕"/>
+              </a:rPr>
+              <a:t>대안</a:t>
+            </a:r>
+            <a:r>
+              <a:rPr sz="1400" b="0">
+                <a:solidFill>
+                  <a:srgbClr val="222222"/>
+                </a:solidFill>
+                <a:latin typeface="맑은 고딕"/>
+              </a:rPr>
+              <a:t>: 오경보 우선이면 R50 / YOLO26n, CPU 전용이면 YOLOv3-tiny</a:t>
             </a:r>
           </a:p>
           <a:p>
             <a:pPr>
               <a:spcAft>
-                <a:spcPts val="600"/>
+                <a:spcPts val="800"/>
               </a:spcAft>
             </a:pPr>
             <a:r>
-              <a:rPr sz="1600" b="1">
+              <a:rPr sz="1400" b="1">
                 <a:solidFill>
                   <a:srgbClr val="2AA7B8"/>
                 </a:solidFill>
@@ -12594,13 +13507,183 @@
               <a:t>• </a:t>
             </a:r>
             <a:r>
-              <a:rPr sz="1600" b="0">
-                <a:solidFill>
-                  <a:srgbClr val="222222"/>
-                </a:solidFill>
-                <a:latin typeface="맑은 고딕"/>
-              </a:rPr>
-              <a:t>오경보가 비싼 현장은 재검사 구간의 이득이 작다</a:t>
+              <a:rPr sz="1400" b="0">
+                <a:solidFill>
+                  <a:srgbClr val="222222"/>
+                </a:solidFill>
+                <a:latin typeface="맑은 고딕"/>
+              </a:rPr>
+              <a:t>'미탐지 우선'은 </a:t>
+            </a:r>
+            <a:r>
+              <a:rPr sz="1400" b="1">
+                <a:solidFill>
+                  <a:srgbClr val="222222"/>
+                </a:solidFill>
+                <a:latin typeface="맑은 고딕"/>
+              </a:rPr>
+              <a:t>결과를 본 뒤 정한 우선순위</a:t>
+            </a:r>
+            <a:r>
+              <a:rPr sz="1400" b="0">
+                <a:solidFill>
+                  <a:srgbClr val="222222"/>
+                </a:solidFill>
+                <a:latin typeface="맑은 고딕"/>
+              </a:rPr>
+              <a:t>라 보고서에 그대로 밝힌다</a:t>
+            </a:r>
+          </a:p>
+        </p:txBody>
+      </p:sp>
+      <p:sp>
+        <p:nvSpPr>
+          <p:cNvPr id="9" name="TextBox 8"/>
+          <p:cNvSpPr txBox="1"/>
+          <p:nvPr/>
+        </p:nvSpPr>
+        <p:spPr>
+          <a:xfrm>
+            <a:off x="548640" y="4663440"/>
+            <a:ext cx="11155680" cy="2011680"/>
+          </a:xfrm>
+          <a:prstGeom prst="rect">
+            <a:avLst/>
+          </a:prstGeom>
+          <a:noFill/>
+        </p:spPr>
+        <p:txBody>
+          <a:bodyPr wrap="square" lIns="45720" rIns="45720">
+            <a:spAutoFit/>
+          </a:bodyPr>
+          <a:lstStyle/>
+          <a:p>
+            <a:pPr>
+              <a:spcAft>
+                <a:spcPts val="500"/>
+              </a:spcAft>
+            </a:pPr>
+            <a:r>
+              <a:rPr sz="1400" b="1">
+                <a:solidFill>
+                  <a:srgbClr val="2AA7B8"/>
+                </a:solidFill>
+                <a:latin typeface="맑은 고딕"/>
+              </a:rPr>
+              <a:t>• </a:t>
+            </a:r>
+            <a:r>
+              <a:rPr sz="1400" b="1">
+                <a:solidFill>
+                  <a:srgbClr val="222222"/>
+                </a:solidFill>
+                <a:latin typeface="맑은 고딕"/>
+              </a:rPr>
+              <a:t>① val mAP50-95</a:t>
+            </a:r>
+            <a:r>
+              <a:rPr sz="1400" b="0">
+                <a:solidFill>
+                  <a:srgbClr val="222222"/>
+                </a:solidFill>
+                <a:latin typeface="맑은 고딕"/>
+              </a:rPr>
+              <a:t>: val 이미지 복원추출 1,000회로 비교하니 </a:t>
+            </a:r>
+            <a:r>
+              <a:rPr sz="1400" b="1">
+                <a:solidFill>
+                  <a:srgbClr val="222222"/>
+                </a:solidFill>
+                <a:latin typeface="맑은 고딕"/>
+              </a:rPr>
+              <a:t>RT-DETR-l 0.662와 D-FINE-N 0.655가 동률 선두</a:t>
+            </a:r>
+            <a:r>
+              <a:rPr sz="1400" b="0">
+                <a:solidFill>
+                  <a:srgbClr val="222222"/>
+                </a:solidFill>
+                <a:latin typeface="맑은 고딕"/>
+              </a:rPr>
+              <a:t>(차이 −0.008, 95% 구간 −0.016~0.000). R50·YOLO26n은 유의하게 낮고, 공식 라벨만 보면 R50도 동률</a:t>
+            </a:r>
+          </a:p>
+          <a:p>
+            <a:pPr>
+              <a:spcAft>
+                <a:spcPts val="500"/>
+              </a:spcAft>
+            </a:pPr>
+            <a:r>
+              <a:rPr sz="1400" b="1">
+                <a:solidFill>
+                  <a:srgbClr val="2AA7B8"/>
+                </a:solidFill>
+                <a:latin typeface="맑은 고딕"/>
+              </a:rPr>
+              <a:t>• </a:t>
+            </a:r>
+            <a:r>
+              <a:rPr sz="1400" b="1">
+                <a:solidFill>
+                  <a:srgbClr val="222222"/>
+                </a:solidFill>
+                <a:latin typeface="맑은 고딕"/>
+              </a:rPr>
+              <a:t>② 동률이면 강건성</a:t>
+            </a:r>
+            <a:r>
+              <a:rPr sz="1400" b="0">
+                <a:solidFill>
+                  <a:srgbClr val="222222"/>
+                </a:solidFill>
+                <a:latin typeface="맑은 고딕"/>
+              </a:rPr>
+              <a:t>: 합성 점 AP와 3호기 검출은 D-FINE-N 우세(0.574 대 0.451, 89% 대 61%), 가짜 정상 오경보는 RT-DETR-l 우세(37% 대 49%) → 놓침이 더 비싸다고 보아 </a:t>
+            </a:r>
+            <a:r>
+              <a:rPr sz="1400" b="1">
+                <a:solidFill>
+                  <a:srgbClr val="222222"/>
+                </a:solidFill>
+                <a:latin typeface="맑은 고딕"/>
+              </a:rPr>
+              <a:t>미탐지를 우선</a:t>
+            </a:r>
+          </a:p>
+          <a:p>
+            <a:pPr>
+              <a:spcAft>
+                <a:spcPts val="500"/>
+              </a:spcAft>
+            </a:pPr>
+            <a:r>
+              <a:rPr sz="1400" b="1">
+                <a:solidFill>
+                  <a:srgbClr val="2AA7B8"/>
+                </a:solidFill>
+                <a:latin typeface="맑은 고딕"/>
+              </a:rPr>
+              <a:t>• </a:t>
+            </a:r>
+            <a:r>
+              <a:rPr sz="1400" b="1">
+                <a:solidFill>
+                  <a:srgbClr val="222222"/>
+                </a:solidFill>
+                <a:latin typeface="맑은 고딕"/>
+              </a:rPr>
+              <a:t>③ 크기</a:t>
+            </a:r>
+            <a:r>
+              <a:rPr sz="1400" b="0">
+                <a:solidFill>
+                  <a:srgbClr val="222222"/>
+                </a:solidFill>
+                <a:latin typeface="맑은 고딕"/>
+              </a:rPr>
+              <a:t>: 3.7M(15MB)로 RT-DETR-l(32.8M)의 약 1/9</a:t>
             </a:r>
           </a:p>
         </p:txBody>
@@ -12696,7 +13779,7 @@
                 </a:solidFill>
                 <a:latin typeface="맑은 고딕"/>
               </a:rPr>
-              <a:t>모델 선택 가이드와 처리 속도</a:t>
+              <a:t>현장 활용: 3단 판정과 재검사 구간</a:t>
             </a:r>
           </a:p>
         </p:txBody>
@@ -12731,7 +13814,7 @@
                 </a:solidFill>
                 <a:latin typeface="맑은 고딕"/>
               </a:rPr>
-              <a:t>촬영 간격(중앙값 4초)보다 모든 모델이 빠르다</a:t>
+              <a:t>실제 test에서는 결함 369장(≥0.748)과 빈 라벨 27장(≤0.04)이 완전히 갈린다</a:t>
             </a:r>
           </a:p>
         </p:txBody>
@@ -12767,6 +13850,374 @@
                 <a:latin typeface="맑은 고딕"/>
               </a:rPr>
               <a:t>26</a:t>
+            </a:r>
+          </a:p>
+        </p:txBody>
+      </p:sp>
+      <p:sp>
+        <p:nvSpPr>
+          <p:cNvPr id="6" name="TextBox 5"/>
+          <p:cNvSpPr txBox="1"/>
+          <p:nvPr/>
+        </p:nvSpPr>
+        <p:spPr>
+          <a:xfrm>
+            <a:off x="502920" y="6355080"/>
+            <a:ext cx="10180015" cy="365760"/>
+          </a:xfrm>
+          <a:prstGeom prst="rect">
+            <a:avLst/>
+          </a:prstGeom>
+          <a:noFill/>
+        </p:spPr>
+        <p:txBody>
+          <a:bodyPr wrap="square" anchor="t" lIns="45720" rIns="45720">
+            <a:spAutoFit/>
+          </a:bodyPr>
+          <a:lstStyle/>
+          <a:p>
+            <a:pPr algn="l"/>
+            <a:r>
+              <a:rPr sz="1100" b="0">
+                <a:solidFill>
+                  <a:srgbClr val="555B66"/>
+                </a:solidFill>
+                <a:latin typeface="맑은 고딕"/>
+              </a:rPr>
+              <a:t>재검사 구간의 효과는 합성·가짜 정상에 기반한 참고 수치다. 재검사·놓침 비용은 현장 값을 몰라 가정하지 않았다.</a:t>
+            </a:r>
+          </a:p>
+        </p:txBody>
+      </p:sp>
+      <p:pic>
+        <p:nvPicPr>
+          <p:cNvPr id="7" name="Picture 6" descr="fig4b_final_dfine.png"/>
+          <p:cNvPicPr>
+            <a:picLocks noChangeAspect="1"/>
+          </p:cNvPicPr>
+          <p:nvPr/>
+        </p:nvPicPr>
+        <p:blipFill>
+          <a:blip r:embed="rId2"/>
+          <a:stretch>
+            <a:fillRect/>
+          </a:stretch>
+        </p:blipFill>
+        <p:spPr>
+          <a:xfrm>
+            <a:off x="1687794" y="1508760"/>
+            <a:ext cx="8785931" cy="3246120"/>
+          </a:xfrm>
+          <a:prstGeom prst="rect">
+            <a:avLst/>
+          </a:prstGeom>
+        </p:spPr>
+      </p:pic>
+      <p:sp>
+        <p:nvSpPr>
+          <p:cNvPr id="8" name="TextBox 7"/>
+          <p:cNvSpPr txBox="1"/>
+          <p:nvPr/>
+        </p:nvSpPr>
+        <p:spPr>
+          <a:xfrm>
+            <a:off x="731520" y="4846320"/>
+            <a:ext cx="10789920" cy="1463040"/>
+          </a:xfrm>
+          <a:prstGeom prst="rect">
+            <a:avLst/>
+          </a:prstGeom>
+          <a:noFill/>
+        </p:spPr>
+        <p:txBody>
+          <a:bodyPr wrap="square" lIns="45720" rIns="45720">
+            <a:spAutoFit/>
+          </a:bodyPr>
+          <a:lstStyle/>
+          <a:p>
+            <a:pPr>
+              <a:spcAft>
+                <a:spcPts val="600"/>
+              </a:spcAft>
+            </a:pPr>
+            <a:r>
+              <a:rPr sz="1600" b="1">
+                <a:solidFill>
+                  <a:srgbClr val="2AA7B8"/>
+                </a:solidFill>
+                <a:latin typeface="맑은 고딕"/>
+              </a:rPr>
+              <a:t>• </a:t>
+            </a:r>
+            <a:r>
+              <a:rPr sz="1600" b="1">
+                <a:solidFill>
+                  <a:srgbClr val="222222"/>
+                </a:solidFill>
+                <a:latin typeface="맑은 고딕"/>
+              </a:rPr>
+              <a:t>불합격</a:t>
+            </a:r>
+            <a:r>
+              <a:rPr sz="1600" b="0">
+                <a:solidFill>
+                  <a:srgbClr val="222222"/>
+                </a:solidFill>
+                <a:latin typeface="맑은 고딕"/>
+              </a:rPr>
+              <a:t> 최고 신뢰도 ≥ 0.66(val 임계값)  |  </a:t>
+            </a:r>
+            <a:r>
+              <a:rPr sz="1600" b="1">
+                <a:solidFill>
+                  <a:srgbClr val="222222"/>
+                </a:solidFill>
+                <a:latin typeface="맑은 고딕"/>
+              </a:rPr>
+              <a:t>재검사</a:t>
+            </a:r>
+            <a:r>
+              <a:rPr sz="1600" b="0">
+                <a:solidFill>
+                  <a:srgbClr val="222222"/>
+                </a:solidFill>
+                <a:latin typeface="맑은 고딕"/>
+              </a:rPr>
+              <a:t> 0.3 ~ 0.66  |  </a:t>
+            </a:r>
+            <a:r>
+              <a:rPr sz="1600" b="1">
+                <a:solidFill>
+                  <a:srgbClr val="222222"/>
+                </a:solidFill>
+                <a:latin typeface="맑은 고딕"/>
+              </a:rPr>
+              <a:t>합격</a:t>
+            </a:r>
+            <a:r>
+              <a:rPr sz="1600" b="0">
+                <a:solidFill>
+                  <a:srgbClr val="222222"/>
+                </a:solidFill>
+                <a:latin typeface="맑은 고딕"/>
+              </a:rPr>
+              <a:t> &lt; 0.3</a:t>
+            </a:r>
+          </a:p>
+          <a:p>
+            <a:pPr>
+              <a:spcAft>
+                <a:spcPts val="600"/>
+              </a:spcAft>
+            </a:pPr>
+            <a:r>
+              <a:rPr sz="1600" b="1">
+                <a:solidFill>
+                  <a:srgbClr val="2AA7B8"/>
+                </a:solidFill>
+                <a:latin typeface="맑은 고딕"/>
+              </a:rPr>
+              <a:t>• </a:t>
+            </a:r>
+            <a:r>
+              <a:rPr sz="1600" b="0">
+                <a:solidFill>
+                  <a:srgbClr val="222222"/>
+                </a:solidFill>
+                <a:latin typeface="맑은 고딕"/>
+              </a:rPr>
+              <a:t>하한을 0.3으로 낮추면 옅은 점 검출 61.9% → 67.1%, 대신 가짜 정상 오경보 4.1% → 5.7%(평균 보간), 49% → 59%(노이즈 보간)</a:t>
+            </a:r>
+          </a:p>
+          <a:p>
+            <a:pPr>
+              <a:spcAft>
+                <a:spcPts val="600"/>
+              </a:spcAft>
+            </a:pPr>
+            <a:r>
+              <a:rPr sz="1600" b="1">
+                <a:solidFill>
+                  <a:srgbClr val="2AA7B8"/>
+                </a:solidFill>
+                <a:latin typeface="맑은 고딕"/>
+              </a:rPr>
+              <a:t>• </a:t>
+            </a:r>
+            <a:r>
+              <a:rPr sz="1600" b="0">
+                <a:solidFill>
+                  <a:srgbClr val="222222"/>
+                </a:solidFill>
+                <a:latin typeface="맑은 고딕"/>
+              </a:rPr>
+              <a:t>오경보가 비싼 현장은 재검사 구간의 이득이 작다</a:t>
+            </a:r>
+          </a:p>
+        </p:txBody>
+      </p:sp>
+    </p:spTree>
+  </p:cSld>
+  <p:clrMapOvr>
+    <a:masterClrMapping/>
+  </p:clrMapOvr>
+</p:sld>
+</file>
+
+<file path=ppt/slides/slide27.xml><?xml version="1.0" encoding="utf-8"?>
+<p:sld xmlns:a="http://schemas.openxmlformats.org/drawingml/2006/main" xmlns:p="http://schemas.openxmlformats.org/presentationml/2006/main" xmlns:r="http://schemas.openxmlformats.org/officeDocument/2006/relationships">
+  <p:cSld>
+    <p:spTree>
+      <p:nvGrpSpPr>
+        <p:cNvPr id="1" name=""/>
+        <p:cNvGrpSpPr/>
+        <p:nvPr/>
+      </p:nvGrpSpPr>
+      <p:grpSpPr/>
+      <p:sp>
+        <p:nvSpPr>
+          <p:cNvPr id="2" name="Rectangle 1"/>
+          <p:cNvSpPr/>
+          <p:nvPr/>
+        </p:nvSpPr>
+        <p:spPr>
+          <a:xfrm>
+            <a:off x="0" y="0"/>
+            <a:ext cx="164592" cy="6858000"/>
+          </a:xfrm>
+          <a:prstGeom prst="rect">
+            <a:avLst/>
+          </a:prstGeom>
+          <a:solidFill>
+            <a:srgbClr val="1F3A5F"/>
+          </a:solidFill>
+          <a:ln>
+            <a:noFill/>
+          </a:ln>
+        </p:spPr>
+        <p:style>
+          <a:lnRef idx="1">
+            <a:schemeClr val="accent1"/>
+          </a:lnRef>
+          <a:fillRef idx="3">
+            <a:schemeClr val="accent1"/>
+          </a:fillRef>
+          <a:effectRef idx="2">
+            <a:schemeClr val="accent1"/>
+          </a:effectRef>
+          <a:fontRef idx="minor">
+            <a:schemeClr val="lt1"/>
+          </a:fontRef>
+        </p:style>
+        <p:txBody>
+          <a:bodyPr rtlCol="0" anchor="ctr"/>
+          <a:lstStyle/>
+          <a:p>
+            <a:pPr algn="ctr"/>
+          </a:p>
+        </p:txBody>
+      </p:sp>
+      <p:sp>
+        <p:nvSpPr>
+          <p:cNvPr id="3" name="TextBox 2"/>
+          <p:cNvSpPr txBox="1"/>
+          <p:nvPr/>
+        </p:nvSpPr>
+        <p:spPr>
+          <a:xfrm>
+            <a:off x="502920" y="274320"/>
+            <a:ext cx="11185855" cy="731520"/>
+          </a:xfrm>
+          <a:prstGeom prst="rect">
+            <a:avLst/>
+          </a:prstGeom>
+          <a:noFill/>
+        </p:spPr>
+        <p:txBody>
+          <a:bodyPr wrap="square" anchor="ctr" lIns="45720" rIns="45720">
+            <a:spAutoFit/>
+          </a:bodyPr>
+          <a:lstStyle/>
+          <a:p>
+            <a:pPr algn="l"/>
+            <a:r>
+              <a:rPr sz="2800" b="1">
+                <a:solidFill>
+                  <a:srgbClr val="1F3A5F"/>
+                </a:solidFill>
+                <a:latin typeface="맑은 고딕"/>
+              </a:rPr>
+              <a:t>모델 선택 가이드와 처리 속도</a:t>
+            </a:r>
+          </a:p>
+        </p:txBody>
+      </p:sp>
+      <p:sp>
+        <p:nvSpPr>
+          <p:cNvPr id="4" name="TextBox 3"/>
+          <p:cNvSpPr txBox="1"/>
+          <p:nvPr/>
+        </p:nvSpPr>
+        <p:spPr>
+          <a:xfrm>
+            <a:off x="502920" y="1005840"/>
+            <a:ext cx="11185855" cy="640080"/>
+          </a:xfrm>
+          <a:prstGeom prst="rect">
+            <a:avLst/>
+          </a:prstGeom>
+          <a:noFill/>
+        </p:spPr>
+        <p:txBody>
+          <a:bodyPr wrap="square" anchor="t" lIns="45720" rIns="45720">
+            <a:spAutoFit/>
+          </a:bodyPr>
+          <a:lstStyle/>
+          <a:p>
+            <a:pPr algn="l"/>
+            <a:r>
+              <a:rPr sz="1800" b="1">
+                <a:solidFill>
+                  <a:srgbClr val="2AA7B8"/>
+                </a:solidFill>
+                <a:latin typeface="맑은 고딕"/>
+              </a:rPr>
+              <a:t>촬영 간격(중앙값 4초)보다 모든 모델이 빠르다</a:t>
+            </a:r>
+          </a:p>
+        </p:txBody>
+      </p:sp>
+      <p:sp>
+        <p:nvSpPr>
+          <p:cNvPr id="5" name="TextBox 4"/>
+          <p:cNvSpPr txBox="1"/>
+          <p:nvPr/>
+        </p:nvSpPr>
+        <p:spPr>
+          <a:xfrm>
+            <a:off x="11094415" y="6400800"/>
+            <a:ext cx="822960" cy="320040"/>
+          </a:xfrm>
+          <a:prstGeom prst="rect">
+            <a:avLst/>
+          </a:prstGeom>
+          <a:noFill/>
+        </p:spPr>
+        <p:txBody>
+          <a:bodyPr wrap="square" anchor="t" lIns="45720" rIns="45720">
+            <a:spAutoFit/>
+          </a:bodyPr>
+          <a:lstStyle/>
+          <a:p>
+            <a:pPr algn="r"/>
+            <a:r>
+              <a:rPr sz="1200" b="0">
+                <a:solidFill>
+                  <a:srgbClr val="555B66"/>
+                </a:solidFill>
+                <a:latin typeface="맑은 고딕"/>
+              </a:rPr>
+              <a:t>27</a:t>
             </a:r>
           </a:p>
         </p:txBody>
@@ -13716,7 +15167,7 @@
 </p:sld>
 </file>
 
-<file path=ppt/slides/slide27.xml><?xml version="1.0" encoding="utf-8"?>
+<file path=ppt/slides/slide28.xml><?xml version="1.0" encoding="utf-8"?>
 <p:sld xmlns:a="http://schemas.openxmlformats.org/drawingml/2006/main" xmlns:p="http://schemas.openxmlformats.org/presentationml/2006/main" xmlns:r="http://schemas.openxmlformats.org/officeDocument/2006/relationships">
   <p:cSld>
     <p:spTree>
@@ -13869,7 +15320,7 @@
                 </a:solidFill>
                 <a:latin typeface="맑은 고딕"/>
               </a:rPr>
-              <a:t>27</a:t>
+              <a:t>28</a:t>
             </a:r>
           </a:p>
         </p:txBody>
@@ -14127,7 +15578,7 @@
 </p:sld>
 </file>
 
-<file path=ppt/slides/slide28.xml><?xml version="1.0" encoding="utf-8"?>
+<file path=ppt/slides/slide29.xml><?xml version="1.0" encoding="utf-8"?>
 <p:sld xmlns:a="http://schemas.openxmlformats.org/drawingml/2006/main" xmlns:p="http://schemas.openxmlformats.org/presentationml/2006/main" xmlns:r="http://schemas.openxmlformats.org/officeDocument/2006/relationships">
   <p:cSld>
     <p:spTree>
@@ -14280,7 +15731,7 @@
                 </a:solidFill>
                 <a:latin typeface="맑은 고딕"/>
               </a:rPr>
-              <a:t>28</a:t>
+              <a:t>29</a:t>
             </a:r>
           </a:p>
         </p:txBody>
@@ -14642,7 +16093,7 @@
 </p:sld>
 </file>
 
-<file path=ppt/slides/slide29.xml><?xml version="1.0" encoding="utf-8"?>
+<file path=ppt/slides/slide3.xml><?xml version="1.0" encoding="utf-8"?>
 <p:sld xmlns:a="http://schemas.openxmlformats.org/drawingml/2006/main" xmlns:p="http://schemas.openxmlformats.org/presentationml/2006/main" xmlns:r="http://schemas.openxmlformats.org/officeDocument/2006/relationships">
   <p:cSld>
     <p:spTree>
@@ -14725,7 +16176,7 @@
                 </a:solidFill>
                 <a:latin typeface="맑은 고딕"/>
               </a:rPr>
-              <a:t>한계와 향후 과제</a:t>
+              <a:t>전처리: 색 윤곽만 지우고 점은 남긴다</a:t>
             </a:r>
           </a:p>
         </p:txBody>
@@ -14760,7 +16211,7 @@
                 </a:solidFill>
                 <a:latin typeface="맑은 고딕"/>
               </a:rPr>
-              <a:t>숨기지 않고 적는다</a:t>
+              <a:t>장비가 그린 색 사각형을 주변 회색 5x5 평균으로 메운 뒤 회색조 PNG로 저장</a:t>
             </a:r>
           </a:p>
         </p:txBody>
@@ -14795,21 +16246,45 @@
                 </a:solidFill>
                 <a:latin typeface="맑은 고딕"/>
               </a:rPr>
-              <a:t>29</a:t>
-            </a:r>
-          </a:p>
-        </p:txBody>
-      </p:sp>
-      <p:sp>
-        <p:nvSpPr>
-          <p:cNvPr id="6" name="TextBox 5"/>
+              <a:t>3</a:t>
+            </a:r>
+          </a:p>
+        </p:txBody>
+      </p:sp>
+      <p:pic>
+        <p:nvPicPr>
+          <p:cNvPr id="6" name="Picture 5" descr="fig5a_preprocess.png"/>
+          <p:cNvPicPr>
+            <a:picLocks noChangeAspect="1"/>
+          </p:cNvPicPr>
+          <p:nvPr/>
+        </p:nvPicPr>
+        <p:blipFill>
+          <a:blip r:embed="rId2"/>
+          <a:stretch>
+            <a:fillRect/>
+          </a:stretch>
+        </p:blipFill>
+        <p:spPr>
+          <a:xfrm>
+            <a:off x="444869" y="1600200"/>
+            <a:ext cx="7065541" cy="4892040"/>
+          </a:xfrm>
+          <a:prstGeom prst="rect">
+            <a:avLst/>
+          </a:prstGeom>
+        </p:spPr>
+      </p:pic>
+      <p:sp>
+        <p:nvSpPr>
+          <p:cNvPr id="7" name="TextBox 6"/>
           <p:cNvSpPr txBox="1"/>
           <p:nvPr/>
         </p:nvSpPr>
         <p:spPr>
           <a:xfrm>
-            <a:off x="640080" y="1783080"/>
-            <a:ext cx="10972800" cy="4572000"/>
+            <a:off x="7772400" y="1783080"/>
+            <a:ext cx="4114800" cy="4572000"/>
           </a:xfrm>
           <a:prstGeom prst="rect">
             <a:avLst/>
@@ -14824,11 +16299,11 @@
           <a:p>
             <a:pPr>
               <a:spcAft>
-                <a:spcPts val="1100"/>
+                <a:spcPts val="900"/>
               </a:spcAft>
             </a:pPr>
             <a:r>
-              <a:rPr sz="1800" b="1">
+              <a:rPr sz="1500" b="1">
                 <a:solidFill>
                   <a:srgbClr val="2AA7B8"/>
                 </a:solidFill>
@@ -14837,41 +16312,41 @@
               <a:t>• </a:t>
             </a:r>
             <a:r>
-              <a:rPr sz="1800" b="0">
-                <a:solidFill>
-                  <a:srgbClr val="222222"/>
-                </a:solidFill>
-                <a:latin typeface="맑은 고딕"/>
-              </a:rPr>
-              <a:t>합성 점과 가짜 정상은 </a:t>
-            </a:r>
-            <a:r>
-              <a:rPr sz="1800" b="1">
-                <a:solidFill>
-                  <a:srgbClr val="222222"/>
-                </a:solidFill>
-                <a:latin typeface="맑은 고딕"/>
-              </a:rPr>
-              <a:t>인위적인 이미지</a:t>
-            </a:r>
-            <a:r>
-              <a:rPr sz="1800" b="0">
-                <a:solidFill>
-                  <a:srgbClr val="222222"/>
-                </a:solidFill>
-                <a:latin typeface="맑은 고딕"/>
-              </a:rPr>
-              <a:t>다. 실제 현장 성능이 아니라 상대 비교와 취약점 탐색으로만 해석한다</a:t>
+              <a:rPr sz="1500" b="0">
+                <a:solidFill>
+                  <a:srgbClr val="222222"/>
+                </a:solidFill>
+                <a:latin typeface="맑은 고딕"/>
+              </a:rPr>
+              <a:t>색 표시는 결함 둘레의 </a:t>
+            </a:r>
+            <a:r>
+              <a:rPr sz="1500" b="1">
+                <a:solidFill>
+                  <a:srgbClr val="222222"/>
+                </a:solidFill>
+                <a:latin typeface="맑은 고딕"/>
+              </a:rPr>
+              <a:t>가는 사각형 윤곽</a:t>
+            </a:r>
+            <a:r>
+              <a:rPr sz="1500" b="0">
+                <a:solidFill>
+                  <a:srgbClr val="222222"/>
+                </a:solidFill>
+                <a:latin typeface="맑은 고딕"/>
+              </a:rPr>
+              <a:t>(장당 128~660픽셀), 점은 그대로 남는다</a:t>
             </a:r>
           </a:p>
           <a:p>
             <a:pPr>
               <a:spcAft>
-                <a:spcPts val="1100"/>
+                <a:spcPts val="900"/>
               </a:spcAft>
             </a:pPr>
             <a:r>
-              <a:rPr sz="1800" b="1">
+              <a:rPr sz="1500" b="1">
                 <a:solidFill>
                   <a:srgbClr val="2AA7B8"/>
                 </a:solidFill>
@@ -14880,41 +16355,23 @@
               <a:t>• </a:t>
             </a:r>
             <a:r>
-              <a:rPr sz="1800" b="0">
-                <a:solidFill>
-                  <a:srgbClr val="222222"/>
-                </a:solidFill>
-                <a:latin typeface="맑은 고딕"/>
-              </a:rPr>
-              <a:t>강건성 시험은 </a:t>
-            </a:r>
-            <a:r>
-              <a:rPr sz="1800" b="1">
-                <a:solidFill>
-                  <a:srgbClr val="222222"/>
-                </a:solidFill>
-                <a:latin typeface="맑은 고딕"/>
-              </a:rPr>
-              <a:t>test 이미지</a:t>
-            </a:r>
-            <a:r>
-              <a:rPr sz="1800" b="0">
-                <a:solidFill>
-                  <a:srgbClr val="222222"/>
-                </a:solidFill>
-                <a:latin typeface="맑은 고딕"/>
-              </a:rPr>
-              <a:t>로 먼저 수행했다. 모델 선정에는 val 지표만 썼지만, 선정 근거로 쓰려면 val로 반복해야 한다</a:t>
+              <a:rPr sz="1500" b="0">
+                <a:solidFill>
+                  <a:srgbClr val="222222"/>
+                </a:solidFill>
+                <a:latin typeface="맑은 고딕"/>
+              </a:rPr>
+              <a:t>지우는 이유: 공식 라벨 중심의 99.8%가 색 박스 안 → 지우지 않으면 모델이 "색 네모 찾기"를 배운다</a:t>
             </a:r>
           </a:p>
           <a:p>
             <a:pPr>
               <a:spcAft>
-                <a:spcPts val="1100"/>
+                <a:spcPts val="900"/>
               </a:spcAft>
             </a:pPr>
             <a:r>
-              <a:rPr sz="1800" b="1">
+              <a:rPr sz="1500" b="1">
                 <a:solidFill>
                   <a:srgbClr val="2AA7B8"/>
                 </a:solidFill>
@@ -14923,23 +16380,41 @@
               <a:t>• </a:t>
             </a:r>
             <a:r>
-              <a:rPr sz="1800" b="0">
-                <a:solidFill>
-                  <a:srgbClr val="222222"/>
-                </a:solidFill>
-                <a:latin typeface="맑은 고딕"/>
-              </a:rPr>
-              <a:t>'미탐지 우선'이라는 우선순위는 결과를 본 뒤 정했다. 오경보 우선이면 선정이 바뀐다</a:t>
+              <a:rPr sz="1500" b="0">
+                <a:solidFill>
+                  <a:srgbClr val="222222"/>
+                </a:solidFill>
+                <a:latin typeface="맑은 고딕"/>
+              </a:rPr>
+              <a:t>원본 BMP에 같은 방법을 다시 적용하면 </a:t>
+            </a:r>
+            <a:r>
+              <a:rPr sz="1500" b="1">
+                <a:solidFill>
+                  <a:srgbClr val="222222"/>
+                </a:solidFill>
+                <a:latin typeface="맑은 고딕"/>
+              </a:rPr>
+              <a:t>2,532장 모두 픽셀 단위로 일치</a:t>
+            </a:r>
+            <a:r>
+              <a:rPr sz="1500" b="0">
+                <a:solidFill>
+                  <a:srgbClr val="222222"/>
+                </a:solidFill>
+                <a:latin typeface="맑은 고딕"/>
+              </a:rPr>
+              <a:t>(검증 코드 포함)</a:t>
             </a:r>
           </a:p>
           <a:p>
             <a:pPr>
               <a:spcAft>
-                <a:spcPts val="1100"/>
+                <a:spcPts val="900"/>
               </a:spcAft>
             </a:pPr>
             <a:r>
-              <a:rPr sz="1800" b="1">
+              <a:rPr sz="1500" b="1">
                 <a:solidFill>
                   <a:srgbClr val="2AA7B8"/>
                 </a:solidFill>
@@ -14948,106 +16423,13 @@
               <a:t>• </a:t>
             </a:r>
             <a:r>
-              <a:rPr sz="1800" b="0">
-                <a:solidFill>
-                  <a:srgbClr val="222222"/>
-                </a:solidFill>
-                <a:latin typeface="맑은 고딕"/>
-              </a:rPr>
-              <a:t>표시(색 사각형) 제거의 </a:t>
-            </a:r>
-            <a:r>
-              <a:rPr sz="1800" b="1">
-                <a:solidFill>
-                  <a:srgbClr val="222222"/>
-                </a:solidFill>
-                <a:latin typeface="맑은 고딕"/>
-              </a:rPr>
-              <a:t>흔적</a:t>
-            </a:r>
-            <a:r>
-              <a:rPr sz="1800" b="0">
-                <a:solidFill>
-                  <a:srgbClr val="222222"/>
-                </a:solidFill>
-                <a:latin typeface="맑은 고딕"/>
-              </a:rPr>
-              <a:t>이 단서가 되는지는 검증하지 못했다</a:t>
-            </a:r>
-          </a:p>
-          <a:p>
-            <a:pPr>
-              <a:spcAft>
-                <a:spcPts val="1100"/>
-              </a:spcAft>
-            </a:pPr>
-            <a:r>
-              <a:rPr sz="1800" b="1">
-                <a:solidFill>
-                  <a:srgbClr val="2AA7B8"/>
-                </a:solidFill>
-                <a:latin typeface="맑은 고딕"/>
-              </a:rPr>
-              <a:t>• </a:t>
-            </a:r>
-            <a:r>
-              <a:rPr sz="1800" b="0">
-                <a:solidFill>
-                  <a:srgbClr val="222222"/>
-                </a:solidFill>
-                <a:latin typeface="맑은 고딕"/>
-              </a:rPr>
-              <a:t>학습 시드가 하나이고, 팀원 모델은 학습 조건이 우리와 다르다(임계값은 우리 규칙으로 재선정)</a:t>
-            </a:r>
-          </a:p>
-          <a:p>
-            <a:pPr>
-              <a:spcAft>
-                <a:spcPts val="1100"/>
-              </a:spcAft>
-            </a:pPr>
-            <a:r>
-              <a:rPr sz="1800" b="1">
-                <a:solidFill>
-                  <a:srgbClr val="2AA7B8"/>
-                </a:solidFill>
-                <a:latin typeface="맑은 고딕"/>
-              </a:rPr>
-              <a:t>• </a:t>
-            </a:r>
-            <a:r>
-              <a:rPr sz="1800" b="0">
-                <a:solidFill>
-                  <a:srgbClr val="222222"/>
-                </a:solidFill>
-                <a:latin typeface="맑은 고딕"/>
-              </a:rPr>
-              <a:t>속도는 노트북에서 측정했고 실행마다 변동이 크다. 현장 장비 사양과 재검사 비용은 알지 못한다</a:t>
-            </a:r>
-          </a:p>
-          <a:p>
-            <a:pPr>
-              <a:spcAft>
-                <a:spcPts val="1100"/>
-              </a:spcAft>
-            </a:pPr>
-            <a:r>
-              <a:rPr sz="1800" b="1">
-                <a:solidFill>
-                  <a:srgbClr val="2AA7B8"/>
-                </a:solidFill>
-                <a:latin typeface="맑은 고딕"/>
-              </a:rPr>
-              <a:t>• </a:t>
-            </a:r>
-            <a:r>
-              <a:rPr sz="1800" b="0">
-                <a:solidFill>
-                  <a:srgbClr val="222222"/>
-                </a:solidFill>
-                <a:latin typeface="맑은 고딕"/>
-              </a:rPr>
-              <a:t>향후: 흔적 검증(원본 BMP 2x2 실험), 실제 정상 제품 이미지 확보, val 반복, 합성 점 대조군(s=0)</a:t>
+              <a:rPr sz="1500" b="0">
+                <a:solidFill>
+                  <a:srgbClr val="222222"/>
+                </a:solidFill>
+                <a:latin typeface="맑은 고딕"/>
+              </a:rPr>
+              <a:t>코드는 이총의 브랜치(scripts/preprocess/)에 있고 main 병합이 필요하다</a:t>
             </a:r>
           </a:p>
         </p:txBody>
@@ -15060,7 +16442,7 @@
 </p:sld>
 </file>
 
-<file path=ppt/slides/slide3.xml><?xml version="1.0" encoding="utf-8"?>
+<file path=ppt/slides/slide30.xml><?xml version="1.0" encoding="utf-8"?>
 <p:sld xmlns:a="http://schemas.openxmlformats.org/drawingml/2006/main" xmlns:p="http://schemas.openxmlformats.org/presentationml/2006/main" xmlns:r="http://schemas.openxmlformats.org/officeDocument/2006/relationships">
   <p:cSld>
     <p:spTree>
@@ -15143,7 +16525,7 @@
                 </a:solidFill>
                 <a:latin typeface="맑은 고딕"/>
               </a:rPr>
-              <a:t>전처리: 색 윤곽만 지우고 점은 남긴다</a:t>
+              <a:t>한계와 향후 과제</a:t>
             </a:r>
           </a:p>
         </p:txBody>
@@ -15178,7 +16560,7 @@
                 </a:solidFill>
                 <a:latin typeface="맑은 고딕"/>
               </a:rPr>
-              <a:t>장비가 그린 색 사각형을 주변 회색 5x5 평균으로 메운 뒤 회색조 PNG로 저장</a:t>
+              <a:t>숨기지 않고 적는다</a:t>
             </a:r>
           </a:p>
         </p:txBody>
@@ -15213,45 +16595,21 @@
                 </a:solidFill>
                 <a:latin typeface="맑은 고딕"/>
               </a:rPr>
-              <a:t>3</a:t>
-            </a:r>
-          </a:p>
-        </p:txBody>
-      </p:sp>
-      <p:pic>
-        <p:nvPicPr>
-          <p:cNvPr id="6" name="Picture 5" descr="fig5a_preprocess.png"/>
-          <p:cNvPicPr>
-            <a:picLocks noChangeAspect="1"/>
-          </p:cNvPicPr>
+              <a:t>30</a:t>
+            </a:r>
+          </a:p>
+        </p:txBody>
+      </p:sp>
+      <p:sp>
+        <p:nvSpPr>
+          <p:cNvPr id="6" name="TextBox 5"/>
+          <p:cNvSpPr txBox="1"/>
           <p:nvPr/>
-        </p:nvPicPr>
-        <p:blipFill>
-          <a:blip r:embed="rId2"/>
-          <a:stretch>
-            <a:fillRect/>
-          </a:stretch>
-        </p:blipFill>
+        </p:nvSpPr>
         <p:spPr>
           <a:xfrm>
-            <a:off x="444869" y="1600200"/>
-            <a:ext cx="7065541" cy="4892040"/>
-          </a:xfrm>
-          <a:prstGeom prst="rect">
-            <a:avLst/>
-          </a:prstGeom>
-        </p:spPr>
-      </p:pic>
-      <p:sp>
-        <p:nvSpPr>
-          <p:cNvPr id="7" name="TextBox 6"/>
-          <p:cNvSpPr txBox="1"/>
-          <p:nvPr/>
-        </p:nvSpPr>
-        <p:spPr>
-          <a:xfrm>
-            <a:off x="7772400" y="1783080"/>
-            <a:ext cx="4114800" cy="4572000"/>
+            <a:off x="640080" y="1783080"/>
+            <a:ext cx="10972800" cy="4572000"/>
           </a:xfrm>
           <a:prstGeom prst="rect">
             <a:avLst/>
@@ -15266,11 +16624,11 @@
           <a:p>
             <a:pPr>
               <a:spcAft>
-                <a:spcPts val="900"/>
+                <a:spcPts val="1100"/>
               </a:spcAft>
             </a:pPr>
             <a:r>
-              <a:rPr sz="1500" b="1">
+              <a:rPr sz="1800" b="1">
                 <a:solidFill>
                   <a:srgbClr val="2AA7B8"/>
                 </a:solidFill>
@@ -15279,41 +16637,41 @@
               <a:t>• </a:t>
             </a:r>
             <a:r>
-              <a:rPr sz="1500" b="0">
-                <a:solidFill>
-                  <a:srgbClr val="222222"/>
-                </a:solidFill>
-                <a:latin typeface="맑은 고딕"/>
-              </a:rPr>
-              <a:t>색 표시는 결함 둘레의 </a:t>
-            </a:r>
-            <a:r>
-              <a:rPr sz="1500" b="1">
-                <a:solidFill>
-                  <a:srgbClr val="222222"/>
-                </a:solidFill>
-                <a:latin typeface="맑은 고딕"/>
-              </a:rPr>
-              <a:t>가는 사각형 윤곽</a:t>
-            </a:r>
-            <a:r>
-              <a:rPr sz="1500" b="0">
-                <a:solidFill>
-                  <a:srgbClr val="222222"/>
-                </a:solidFill>
-                <a:latin typeface="맑은 고딕"/>
-              </a:rPr>
-              <a:t>(장당 128~660픽셀), 점은 그대로 남는다</a:t>
+              <a:rPr sz="1800" b="0">
+                <a:solidFill>
+                  <a:srgbClr val="222222"/>
+                </a:solidFill>
+                <a:latin typeface="맑은 고딕"/>
+              </a:rPr>
+              <a:t>합성 점과 가짜 정상은 </a:t>
+            </a:r>
+            <a:r>
+              <a:rPr sz="1800" b="1">
+                <a:solidFill>
+                  <a:srgbClr val="222222"/>
+                </a:solidFill>
+                <a:latin typeface="맑은 고딕"/>
+              </a:rPr>
+              <a:t>인위적인 이미지</a:t>
+            </a:r>
+            <a:r>
+              <a:rPr sz="1800" b="0">
+                <a:solidFill>
+                  <a:srgbClr val="222222"/>
+                </a:solidFill>
+                <a:latin typeface="맑은 고딕"/>
+              </a:rPr>
+              <a:t>다. 실제 현장 성능이 아니라 상대 비교와 취약점 탐색으로만 해석한다</a:t>
             </a:r>
           </a:p>
           <a:p>
             <a:pPr>
               <a:spcAft>
-                <a:spcPts val="900"/>
+                <a:spcPts val="1100"/>
               </a:spcAft>
             </a:pPr>
             <a:r>
-              <a:rPr sz="1500" b="1">
+              <a:rPr sz="1800" b="1">
                 <a:solidFill>
                   <a:srgbClr val="2AA7B8"/>
                 </a:solidFill>
@@ -15322,23 +16680,41 @@
               <a:t>• </a:t>
             </a:r>
             <a:r>
-              <a:rPr sz="1500" b="0">
-                <a:solidFill>
-                  <a:srgbClr val="222222"/>
-                </a:solidFill>
-                <a:latin typeface="맑은 고딕"/>
-              </a:rPr>
-              <a:t>지우는 이유: 공식 라벨 중심의 99.8%가 색 박스 안 → 지우지 않으면 모델이 "색 네모 찾기"를 배운다</a:t>
+              <a:rPr sz="1800" b="0">
+                <a:solidFill>
+                  <a:srgbClr val="222222"/>
+                </a:solidFill>
+                <a:latin typeface="맑은 고딕"/>
+              </a:rPr>
+              <a:t>강건성 시험은 </a:t>
+            </a:r>
+            <a:r>
+              <a:rPr sz="1800" b="1">
+                <a:solidFill>
+                  <a:srgbClr val="222222"/>
+                </a:solidFill>
+                <a:latin typeface="맑은 고딕"/>
+              </a:rPr>
+              <a:t>test 이미지</a:t>
+            </a:r>
+            <a:r>
+              <a:rPr sz="1800" b="0">
+                <a:solidFill>
+                  <a:srgbClr val="222222"/>
+                </a:solidFill>
+                <a:latin typeface="맑은 고딕"/>
+              </a:rPr>
+              <a:t>로 먼저 수행했다. 모델 선정에는 val 지표만 썼지만, 선정 근거로 쓰려면 val로 반복해야 한다</a:t>
             </a:r>
           </a:p>
           <a:p>
             <a:pPr>
               <a:spcAft>
-                <a:spcPts val="900"/>
+                <a:spcPts val="1100"/>
               </a:spcAft>
             </a:pPr>
             <a:r>
-              <a:rPr sz="1500" b="1">
+              <a:rPr sz="1800" b="1">
                 <a:solidFill>
                   <a:srgbClr val="2AA7B8"/>
                 </a:solidFill>
@@ -15347,41 +16723,23 @@
               <a:t>• </a:t>
             </a:r>
             <a:r>
-              <a:rPr sz="1500" b="0">
-                <a:solidFill>
-                  <a:srgbClr val="222222"/>
-                </a:solidFill>
-                <a:latin typeface="맑은 고딕"/>
-              </a:rPr>
-              <a:t>원본 BMP에 같은 방법을 다시 적용하면 </a:t>
-            </a:r>
-            <a:r>
-              <a:rPr sz="1500" b="1">
-                <a:solidFill>
-                  <a:srgbClr val="222222"/>
-                </a:solidFill>
-                <a:latin typeface="맑은 고딕"/>
-              </a:rPr>
-              <a:t>2,532장 모두 픽셀 단위로 일치</a:t>
-            </a:r>
-            <a:r>
-              <a:rPr sz="1500" b="0">
-                <a:solidFill>
-                  <a:srgbClr val="222222"/>
-                </a:solidFill>
-                <a:latin typeface="맑은 고딕"/>
-              </a:rPr>
-              <a:t>(검증 코드 포함)</a:t>
+              <a:rPr sz="1800" b="0">
+                <a:solidFill>
+                  <a:srgbClr val="222222"/>
+                </a:solidFill>
+                <a:latin typeface="맑은 고딕"/>
+              </a:rPr>
+              <a:t>'미탐지 우선'이라는 우선순위는 결과를 본 뒤 정했다. 오경보 우선이면 선정이 바뀐다</a:t>
             </a:r>
           </a:p>
           <a:p>
             <a:pPr>
               <a:spcAft>
-                <a:spcPts val="900"/>
+                <a:spcPts val="1100"/>
               </a:spcAft>
             </a:pPr>
             <a:r>
-              <a:rPr sz="1500" b="1">
+              <a:rPr sz="1800" b="1">
                 <a:solidFill>
                   <a:srgbClr val="2AA7B8"/>
                 </a:solidFill>
@@ -15390,13 +16748,106 @@
               <a:t>• </a:t>
             </a:r>
             <a:r>
-              <a:rPr sz="1500" b="0">
-                <a:solidFill>
-                  <a:srgbClr val="222222"/>
-                </a:solidFill>
-                <a:latin typeface="맑은 고딕"/>
-              </a:rPr>
-              <a:t>코드는 이총의 브랜치(scripts/preprocess/)에 있고 main 병합이 필요하다</a:t>
+              <a:rPr sz="1800" b="0">
+                <a:solidFill>
+                  <a:srgbClr val="222222"/>
+                </a:solidFill>
+                <a:latin typeface="맑은 고딕"/>
+              </a:rPr>
+              <a:t>표시(색 사각형) 제거의 </a:t>
+            </a:r>
+            <a:r>
+              <a:rPr sz="1800" b="1">
+                <a:solidFill>
+                  <a:srgbClr val="222222"/>
+                </a:solidFill>
+                <a:latin typeface="맑은 고딕"/>
+              </a:rPr>
+              <a:t>흔적</a:t>
+            </a:r>
+            <a:r>
+              <a:rPr sz="1800" b="0">
+                <a:solidFill>
+                  <a:srgbClr val="222222"/>
+                </a:solidFill>
+                <a:latin typeface="맑은 고딕"/>
+              </a:rPr>
+              <a:t>이 단서가 되는지는 검증하지 못했다</a:t>
+            </a:r>
+          </a:p>
+          <a:p>
+            <a:pPr>
+              <a:spcAft>
+                <a:spcPts val="1100"/>
+              </a:spcAft>
+            </a:pPr>
+            <a:r>
+              <a:rPr sz="1800" b="1">
+                <a:solidFill>
+                  <a:srgbClr val="2AA7B8"/>
+                </a:solidFill>
+                <a:latin typeface="맑은 고딕"/>
+              </a:rPr>
+              <a:t>• </a:t>
+            </a:r>
+            <a:r>
+              <a:rPr sz="1800" b="0">
+                <a:solidFill>
+                  <a:srgbClr val="222222"/>
+                </a:solidFill>
+                <a:latin typeface="맑은 고딕"/>
+              </a:rPr>
+              <a:t>학습 시드가 하나이고, 팀원 모델은 학습 조건이 우리와 다르다(임계값은 우리 규칙으로 재선정)</a:t>
+            </a:r>
+          </a:p>
+          <a:p>
+            <a:pPr>
+              <a:spcAft>
+                <a:spcPts val="1100"/>
+              </a:spcAft>
+            </a:pPr>
+            <a:r>
+              <a:rPr sz="1800" b="1">
+                <a:solidFill>
+                  <a:srgbClr val="2AA7B8"/>
+                </a:solidFill>
+                <a:latin typeface="맑은 고딕"/>
+              </a:rPr>
+              <a:t>• </a:t>
+            </a:r>
+            <a:r>
+              <a:rPr sz="1800" b="0">
+                <a:solidFill>
+                  <a:srgbClr val="222222"/>
+                </a:solidFill>
+                <a:latin typeface="맑은 고딕"/>
+              </a:rPr>
+              <a:t>속도는 노트북에서 측정했고 실행마다 변동이 크다. 현장 장비 사양과 재검사 비용은 알지 못한다</a:t>
+            </a:r>
+          </a:p>
+          <a:p>
+            <a:pPr>
+              <a:spcAft>
+                <a:spcPts val="1100"/>
+              </a:spcAft>
+            </a:pPr>
+            <a:r>
+              <a:rPr sz="1800" b="1">
+                <a:solidFill>
+                  <a:srgbClr val="2AA7B8"/>
+                </a:solidFill>
+                <a:latin typeface="맑은 고딕"/>
+              </a:rPr>
+              <a:t>• </a:t>
+            </a:r>
+            <a:r>
+              <a:rPr sz="1800" b="0">
+                <a:solidFill>
+                  <a:srgbClr val="222222"/>
+                </a:solidFill>
+                <a:latin typeface="맑은 고딕"/>
+              </a:rPr>
+              <a:t>향후: 흔적 검증(원본 BMP 2x2 실험), 실제 정상 제품 이미지 확보, val 반복, 합성 점 대조군(s=0)</a:t>
             </a:r>
           </a:p>
         </p:txBody>
@@ -15409,7 +16860,7 @@
 </p:sld>
 </file>
 
-<file path=ppt/slides/slide30.xml><?xml version="1.0" encoding="utf-8"?>
+<file path=ppt/slides/slide31.xml><?xml version="1.0" encoding="utf-8"?>
 <p:sld xmlns:a="http://schemas.openxmlformats.org/drawingml/2006/main" xmlns:p="http://schemas.openxmlformats.org/presentationml/2006/main" xmlns:r="http://schemas.openxmlformats.org/officeDocument/2006/relationships">
   <p:cSld>
     <p:spTree>
@@ -15527,7 +16978,7 @@
                 </a:solidFill>
                 <a:latin typeface="맑은 고딕"/>
               </a:rPr>
-              <a:t>30</a:t>
+              <a:t>31</a:t>
             </a:r>
           </a:p>
         </p:txBody>

--- a/ppt/presentation.pptx
+++ b/ppt/presentation.pptx
@@ -36,6 +36,7 @@
     <p:sldId id="284" r:id="rId35"/>
     <p:sldId id="285" r:id="rId36"/>
     <p:sldId id="286" r:id="rId37"/>
+    <p:sldId id="287" r:id="rId38"/>
   </p:sldIdLst>
   <p:sldSz cx="12191695" cy="6858000" type="screen4x3"/>
   <p:notesSz cx="6858000" cy="9144000"/>
@@ -11562,7 +11563,7 @@
                 </a:solidFill>
                 <a:latin typeface="맑은 고딕"/>
               </a:rPr>
-              <a:t>호기·해상도: 뚜렷한 효과는 확인되지 않았다</a:t>
+              <a:t>합성 점 1차: 위치를 바꿔 시험</a:t>
             </a:r>
           </a:p>
         </p:txBody>
@@ -11597,7 +11598,7 @@
                 </a:solidFill>
                 <a:latin typeface="맑은 고딕"/>
               </a:rPr>
-              <a:t>가장 낮은 그룹(test)은 공식 라벨 박스가 76%여서 IoU 점수가 낮을 뿐이다</a:t>
+              <a:t>무작위 자리에서 MobileNetV3는 크게, YOLO26n·RT-DETR-l은 일부 떨어진다</a:t>
             </a:r>
           </a:p>
         </p:txBody>
@@ -11637,9 +11638,44 @@
           </a:p>
         </p:txBody>
       </p:sp>
+      <p:sp>
+        <p:nvSpPr>
+          <p:cNvPr id="6" name="TextBox 5"/>
+          <p:cNvSpPr txBox="1"/>
+          <p:nvPr/>
+        </p:nvSpPr>
+        <p:spPr>
+          <a:xfrm>
+            <a:off x="502920" y="6355080"/>
+            <a:ext cx="10180015" cy="365760"/>
+          </a:xfrm>
+          <a:prstGeom prst="rect">
+            <a:avLst/>
+          </a:prstGeom>
+          <a:noFill/>
+        </p:spPr>
+        <p:txBody>
+          <a:bodyPr wrap="square" anchor="t" lIns="45720" rIns="45720">
+            <a:spAutoFit/>
+          </a:bodyPr>
+          <a:lstStyle/>
+          <a:p>
+            <a:pPr algn="l"/>
+            <a:r>
+              <a:rPr sz="1100" b="0">
+                <a:solidFill>
+                  <a:srgbClr val="555B66"/>
+                </a:solidFill>
+                <a:latin typeface="맑은 고딕"/>
+              </a:rPr>
+              <a:t>1차 합성은 막대 밖 자리도 포함하고 합성 점의 사각형 자국이 교란 요인이다. 같은 시드로 기존 3개 모델 값이 모두 재현됐다. 합성 점이므로 상대 비교로만 쓴다.</a:t>
+            </a:r>
+          </a:p>
+        </p:txBody>
+      </p:sp>
       <p:pic>
         <p:nvPicPr>
-          <p:cNvPr id="6" name="Picture 5" descr="fig7c_groups_6models.png"/>
+          <p:cNvPr id="7" name="Picture 6" descr="fig7d_synth_insert_6models.png"/>
           <p:cNvPicPr>
             <a:picLocks noChangeAspect="1"/>
           </p:cNvPicPr>
@@ -11653,8 +11689,8 @@
         </p:blipFill>
         <p:spPr>
           <a:xfrm>
-            <a:off x="365760" y="1644716"/>
-            <a:ext cx="11430000" cy="3248526"/>
+            <a:off x="365760" y="1623240"/>
+            <a:ext cx="11430000" cy="3291479"/>
           </a:xfrm>
           <a:prstGeom prst="rect">
             <a:avLst/>
@@ -11663,14 +11699,14 @@
       </p:pic>
       <p:sp>
         <p:nvSpPr>
-          <p:cNvPr id="7" name="TextBox 6"/>
+          <p:cNvPr id="8" name="TextBox 7"/>
           <p:cNvSpPr txBox="1"/>
           <p:nvPr/>
         </p:nvSpPr>
         <p:spPr>
           <a:xfrm>
-            <a:off x="731520" y="5029200"/>
-            <a:ext cx="10789920" cy="1645920"/>
+            <a:off x="548640" y="5029200"/>
+            <a:ext cx="11155680" cy="1645920"/>
           </a:xfrm>
           <a:prstGeom prst="rect">
             <a:avLst/>
@@ -11685,11 +11721,11 @@
           <a:p>
             <a:pPr>
               <a:spcAft>
-                <a:spcPts val="800"/>
+                <a:spcPts val="600"/>
               </a:spcAft>
             </a:pPr>
             <a:r>
-              <a:rPr sz="1600" b="1">
+              <a:rPr sz="1400" b="1">
                 <a:solidFill>
                   <a:srgbClr val="2AA7B8"/>
                 </a:solidFill>
@@ -11698,23 +11734,32 @@
               <a:t>• </a:t>
             </a:r>
             <a:r>
-              <a:rPr sz="1600" b="0">
-                <a:solidFill>
-                  <a:srgbClr val="222222"/>
-                </a:solidFill>
-                <a:latin typeface="맑은 고딕"/>
-              </a:rPr>
-              <a:t>해상도별 공식 라벨 박스 비율(test 기준)이 10~76%로 달라 라벨 구성이 섞인다. 공식 라벨 이미지끼리만 비교하면 6개 모델의 해상도별 F1이 0.944~0.983으로 좁아지고 구간이 겹친다</a:t>
+              <a:rPr sz="1400" b="0">
+                <a:solidFill>
+                  <a:srgbClr val="222222"/>
+                </a:solidFill>
+                <a:latin typeface="맑은 고딕"/>
+              </a:rPr>
+              <a:t>실제 세기·크기(s=1.0, f=1.0): 원래 자리는 6개 모델 모두 90~97%, 무작위 자리는 D-FINE-N 93%, YOLOv3-tiny 90%, R50 89%, RT-DETR-l 85%, YOLO26n 75%, </a:t>
+            </a:r>
+            <a:r>
+              <a:rPr sz="1400" b="1">
+                <a:solidFill>
+                  <a:srgbClr val="222222"/>
+                </a:solidFill>
+                <a:latin typeface="맑은 고딕"/>
+              </a:rPr>
+              <a:t>MobileNetV3 30%</a:t>
             </a:r>
           </a:p>
           <a:p>
             <a:pPr>
               <a:spcAft>
-                <a:spcPts val="800"/>
+                <a:spcPts val="600"/>
               </a:spcAft>
             </a:pPr>
             <a:r>
-              <a:rPr sz="1600" b="1">
+              <a:rPr sz="1400" b="1">
                 <a:solidFill>
                   <a:srgbClr val="2AA7B8"/>
                 </a:solidFill>
@@ -11723,31 +11768,31 @@
               <a:t>• </a:t>
             </a:r>
             <a:r>
-              <a:rPr sz="1600" b="0">
-                <a:solidFill>
-                  <a:srgbClr val="222222"/>
-                </a:solidFill>
-                <a:latin typeface="맑은 고딕"/>
-              </a:rPr>
-              <a:t>6개 모델 모두 가장 낮은 그룹은 1호기·352x332(F1 0.953~0.966)다. 그룹별 표본이 작다(공식 라벨 이미지 호기별 20~36장). 합성 점에서 보인 3호기 약점은 </a:t>
-            </a:r>
-            <a:r>
-              <a:rPr sz="1600" b="1">
-                <a:solidFill>
-                  <a:srgbClr val="222222"/>
-                </a:solidFill>
-                <a:latin typeface="맑은 고딕"/>
-              </a:rPr>
-              <a:t>모델에 따라</a:t>
-            </a:r>
-            <a:r>
-              <a:rPr sz="1600" b="0">
-                <a:solidFill>
-                  <a:srgbClr val="222222"/>
-                </a:solidFill>
-                <a:latin typeface="맑은 고딕"/>
-              </a:rPr>
-              <a:t> 다르다(앞 슬라이드)</a:t>
+              <a:rPr sz="1400" b="0">
+                <a:solidFill>
+                  <a:srgbClr val="222222"/>
+                </a:solidFill>
+                <a:latin typeface="맑은 고딕"/>
+              </a:rPr>
+              <a:t>원래 → 무작위 하락: MobileNetV3 -67%p, YOLO26n -17%p, RT-DETR-l -7%p, R50·YOLOv3-tiny·D-FINE-N은 거의 없음. 무작위 자리의 옅은 점(대비 10~14)은 </a:t>
+            </a:r>
+            <a:r>
+              <a:rPr sz="1400" b="1">
+                <a:solidFill>
+                  <a:srgbClr val="222222"/>
+                </a:solidFill>
+                <a:latin typeface="맑은 고딕"/>
+              </a:rPr>
+              <a:t>D-FINE-N 58%</a:t>
+            </a:r>
+            <a:r>
+              <a:rPr sz="1400" b="0">
+                <a:solidFill>
+                  <a:srgbClr val="222222"/>
+                </a:solidFill>
+                <a:latin typeface="맑은 고딕"/>
+              </a:rPr>
+              <a:t>로 가장 많이 찾는다</a:t>
             </a:r>
           </a:p>
         </p:txBody>
@@ -11843,7 +11888,7 @@
                 </a:solidFill>
                 <a:latin typeface="맑은 고딕"/>
               </a:rPr>
-              <a:t>③ 종합: 모델별 성적표</a:t>
+              <a:t>호기·해상도: 뚜렷한 효과는 확인되지 않았다</a:t>
             </a:r>
           </a:p>
         </p:txBody>
@@ -11878,7 +11923,7 @@
                 </a:solidFill>
                 <a:latin typeface="맑은 고딕"/>
               </a:rPr>
-              <a:t>한 모델이 모든 항목에서 1등은 아니다</a:t>
+              <a:t>가장 낮은 그룹(test)은 공식 라벨 박스가 76%여서 IoU 점수가 낮을 뿐이다</a:t>
             </a:r>
           </a:p>
         </p:txBody>
@@ -11918,16 +11963,40 @@
           </a:p>
         </p:txBody>
       </p:sp>
-      <p:sp>
-        <p:nvSpPr>
-          <p:cNvPr id="6" name="TextBox 5"/>
+      <p:pic>
+        <p:nvPicPr>
+          <p:cNvPr id="6" name="Picture 5" descr="fig7c_groups_6models.png"/>
+          <p:cNvPicPr>
+            <a:picLocks noChangeAspect="1"/>
+          </p:cNvPicPr>
+          <p:nvPr/>
+        </p:nvPicPr>
+        <p:blipFill>
+          <a:blip r:embed="rId2"/>
+          <a:stretch>
+            <a:fillRect/>
+          </a:stretch>
+        </p:blipFill>
+        <p:spPr>
+          <a:xfrm>
+            <a:off x="365760" y="1644716"/>
+            <a:ext cx="11430000" cy="3248526"/>
+          </a:xfrm>
+          <a:prstGeom prst="rect">
+            <a:avLst/>
+          </a:prstGeom>
+        </p:spPr>
+      </p:pic>
+      <p:sp>
+        <p:nvSpPr>
+          <p:cNvPr id="7" name="TextBox 6"/>
           <p:cNvSpPr txBox="1"/>
           <p:nvPr/>
         </p:nvSpPr>
         <p:spPr>
           <a:xfrm>
-            <a:off x="502920" y="6355080"/>
-            <a:ext cx="10180015" cy="365760"/>
+            <a:off x="731520" y="5029200"/>
+            <a:ext cx="10789920" cy="1645920"/>
           </a:xfrm>
           <a:prstGeom prst="rect">
             <a:avLst/>
@@ -11935,1217 +12004,6 @@
           <a:noFill/>
         </p:spPr>
         <p:txBody>
-          <a:bodyPr wrap="square" anchor="t" lIns="45720" rIns="45720">
-            <a:spAutoFit/>
-          </a:bodyPr>
-          <a:lstStyle/>
-          <a:p>
-            <a:pPr algn="l"/>
-            <a:r>
-              <a:rPr sz="1100" b="0">
-                <a:solidFill>
-                  <a:srgbClr val="555B66"/>
-                </a:solidFill>
-                <a:latin typeface="맑은 고딕"/>
-              </a:rPr>
-              <a:t>val mAP50-95는 val, 나머지는 test 이미지 기준(가짜 정상·합성 점은 인위 이미지). 상세 수치는 docs/experiments.md.</a:t>
-            </a:r>
-          </a:p>
-        </p:txBody>
-      </p:sp>
-      <p:graphicFrame>
-        <p:nvGraphicFramePr>
-          <p:cNvPr id="7" name="Table 6"/>
-          <p:cNvGraphicFramePr>
-            <a:graphicFrameLocks noGrp="1"/>
-          </p:cNvGraphicFramePr>
-          <p:nvPr/>
-        </p:nvGraphicFramePr>
-        <p:xfrm>
-          <a:off x="457200" y="1783080"/>
-          <a:ext cx="11247119" cy="3968496"/>
-        </p:xfrm>
-        <a:graphic>
-          <a:graphicData uri="http://schemas.openxmlformats.org/drawingml/2006/table">
-            <a:tbl>
-              <a:tblPr firstRow="1" bandRow="1">
-                <a:tableStyleId>{5C22544A-7EE6-4342-B048-85BDC9FD1C3A}</a:tableStyleId>
-              </a:tblPr>
-              <a:tblGrid>
-                <a:gridCol w="2377440"/>
-                <a:gridCol w="1188720"/>
-                <a:gridCol w="1828800"/>
-                <a:gridCol w="1828800"/>
-                <a:gridCol w="1280159"/>
-                <a:gridCol w="1645920"/>
-                <a:gridCol w="1097280"/>
-              </a:tblGrid>
-              <a:tr h="566928">
-                <a:tc>
-                  <a:txBody>
-                    <a:bodyPr/>
-                    <a:lstStyle/>
-                    <a:p>
-                      <a:pPr algn="l"/>
-                      <a:r>
-                        <a:rPr sz="1400" b="1">
-                          <a:solidFill>
-                            <a:srgbClr val="FFFFFF"/>
-                          </a:solidFill>
-                          <a:latin typeface="맑은 고딕"/>
-                        </a:rPr>
-                        <a:t>모델</a:t>
-                      </a:r>
-                    </a:p>
-                  </a:txBody>
-                  <a:tcPr anchor="ctr" marL="54864" marR="54864">
-                    <a:solidFill>
-                      <a:srgbClr val="1F3A5F"/>
-                    </a:solidFill>
-                  </a:tcPr>
-                </a:tc>
-                <a:tc>
-                  <a:txBody>
-                    <a:bodyPr/>
-                    <a:lstStyle/>
-                    <a:p>
-                      <a:pPr algn="ctr"/>
-                      <a:r>
-                        <a:rPr sz="1400" b="1">
-                          <a:solidFill>
-                            <a:srgbClr val="FFFFFF"/>
-                          </a:solidFill>
-                          <a:latin typeface="맑은 고딕"/>
-                        </a:rPr>
-                        <a:t>test F1
-(IoU 0.5)</a:t>
-                      </a:r>
-                    </a:p>
-                  </a:txBody>
-                  <a:tcPr anchor="ctr" marL="54864" marR="54864">
-                    <a:solidFill>
-                      <a:srgbClr val="1F3A5F"/>
-                    </a:solidFill>
-                  </a:tcPr>
-                </a:tc>
-                <a:tc>
-                  <a:txBody>
-                    <a:bodyPr/>
-                    <a:lstStyle/>
-                    <a:p>
-                      <a:pPr algn="ctr"/>
-                      <a:r>
-                        <a:rPr sz="1400" b="1">
-                          <a:solidFill>
-                            <a:srgbClr val="FFFFFF"/>
-                          </a:solidFill>
-                          <a:latin typeface="맑은 고딕"/>
-                        </a:rPr>
-                        <a:t>val mAP50-95
-(전체 / 공식만)</a:t>
-                      </a:r>
-                    </a:p>
-                  </a:txBody>
-                  <a:tcPr anchor="ctr" marL="54864" marR="54864">
-                    <a:solidFill>
-                      <a:srgbClr val="1F3A5F"/>
-                    </a:solidFill>
-                  </a:tcPr>
-                </a:tc>
-                <a:tc>
-                  <a:txBody>
-                    <a:bodyPr/>
-                    <a:lstStyle/>
-                    <a:p>
-                      <a:pPr algn="ctr"/>
-                      <a:r>
-                        <a:rPr sz="1400" b="1">
-                          <a:solidFill>
-                            <a:srgbClr val="FFFFFF"/>
-                          </a:solidFill>
-                          <a:latin typeface="맑은 고딕"/>
-                        </a:rPr>
-                        <a:t>가짜 정상 오경보
-(NS+노이즈 6)</a:t>
-                      </a:r>
-                    </a:p>
-                  </a:txBody>
-                  <a:tcPr anchor="ctr" marL="54864" marR="54864">
-                    <a:solidFill>
-                      <a:srgbClr val="1F3A5F"/>
-                    </a:solidFill>
-                  </a:tcPr>
-                </a:tc>
-                <a:tc>
-                  <a:txBody>
-                    <a:bodyPr/>
-                    <a:lstStyle/>
-                    <a:p>
-                      <a:pPr algn="ctr"/>
-                      <a:r>
-                        <a:rPr sz="1400" b="1">
-                          <a:solidFill>
-                            <a:srgbClr val="FFFFFF"/>
-                          </a:solidFill>
-                          <a:latin typeface="맑은 고딕"/>
-                        </a:rPr>
-                        <a:t>합성 점 AP</a:t>
-                      </a:r>
-                    </a:p>
-                  </a:txBody>
-                  <a:tcPr anchor="ctr" marL="54864" marR="54864">
-                    <a:solidFill>
-                      <a:srgbClr val="1F3A5F"/>
-                    </a:solidFill>
-                  </a:tcPr>
-                </a:tc>
-                <a:tc>
-                  <a:txBody>
-                    <a:bodyPr/>
-                    <a:lstStyle/>
-                    <a:p>
-                      <a:pPr algn="ctr"/>
-                      <a:r>
-                        <a:rPr sz="1400" b="1">
-                          <a:solidFill>
-                            <a:srgbClr val="FFFFFF"/>
-                          </a:solidFill>
-                          <a:latin typeface="맑은 고딕"/>
-                        </a:rPr>
-                        <a:t>3호기 합성 점
-(대비 14 이상)</a:t>
-                      </a:r>
-                    </a:p>
-                  </a:txBody>
-                  <a:tcPr anchor="ctr" marL="54864" marR="54864">
-                    <a:solidFill>
-                      <a:srgbClr val="1F3A5F"/>
-                    </a:solidFill>
-                  </a:tcPr>
-                </a:tc>
-                <a:tc>
-                  <a:txBody>
-                    <a:bodyPr/>
-                    <a:lstStyle/>
-                    <a:p>
-                      <a:pPr algn="ctr"/>
-                      <a:r>
-                        <a:rPr sz="1400" b="1">
-                          <a:solidFill>
-                            <a:srgbClr val="FFFFFF"/>
-                          </a:solidFill>
-                          <a:latin typeface="맑은 고딕"/>
-                        </a:rPr>
-                        <a:t>파라미터</a:t>
-                      </a:r>
-                    </a:p>
-                  </a:txBody>
-                  <a:tcPr anchor="ctr" marL="54864" marR="54864">
-                    <a:solidFill>
-                      <a:srgbClr val="1F3A5F"/>
-                    </a:solidFill>
-                  </a:tcPr>
-                </a:tc>
-              </a:tr>
-              <a:tr h="566928">
-                <a:tc>
-                  <a:txBody>
-                    <a:bodyPr/>
-                    <a:lstStyle/>
-                    <a:p>
-                      <a:pPr algn="l"/>
-                      <a:r>
-                        <a:rPr sz="1400" b="1">
-                          <a:solidFill>
-                            <a:srgbClr val="222222"/>
-                          </a:solidFill>
-                          <a:latin typeface="맑은 고딕"/>
-                        </a:rPr>
-                        <a:t>D-FINE-N</a:t>
-                      </a:r>
-                    </a:p>
-                  </a:txBody>
-                  <a:tcPr anchor="ctr" marL="54864" marR="54864">
-                    <a:solidFill>
-                      <a:srgbClr val="DDF1F4"/>
-                    </a:solidFill>
-                  </a:tcPr>
-                </a:tc>
-                <a:tc>
-                  <a:txBody>
-                    <a:bodyPr/>
-                    <a:lstStyle/>
-                    <a:p>
-                      <a:pPr algn="ctr"/>
-                      <a:r>
-                        <a:rPr sz="1400" b="1">
-                          <a:solidFill>
-                            <a:srgbClr val="222222"/>
-                          </a:solidFill>
-                          <a:latin typeface="맑은 고딕"/>
-                        </a:rPr>
-                        <a:t>0.989</a:t>
-                      </a:r>
-                    </a:p>
-                  </a:txBody>
-                  <a:tcPr anchor="ctr" marL="54864" marR="54864">
-                    <a:solidFill>
-                      <a:srgbClr val="DDF1F4"/>
-                    </a:solidFill>
-                  </a:tcPr>
-                </a:tc>
-                <a:tc>
-                  <a:txBody>
-                    <a:bodyPr/>
-                    <a:lstStyle/>
-                    <a:p>
-                      <a:pPr algn="ctr"/>
-                      <a:r>
-                        <a:rPr sz="1400" b="1">
-                          <a:solidFill>
-                            <a:srgbClr val="222222"/>
-                          </a:solidFill>
-                          <a:latin typeface="맑은 고딕"/>
-                        </a:rPr>
-                        <a:t>0.655 / 0.343</a:t>
-                      </a:r>
-                    </a:p>
-                  </a:txBody>
-                  <a:tcPr anchor="ctr" marL="54864" marR="54864">
-                    <a:solidFill>
-                      <a:srgbClr val="DDF1F4"/>
-                    </a:solidFill>
-                  </a:tcPr>
-                </a:tc>
-                <a:tc>
-                  <a:txBody>
-                    <a:bodyPr/>
-                    <a:lstStyle/>
-                    <a:p>
-                      <a:pPr algn="ctr"/>
-                      <a:r>
-                        <a:rPr sz="1400" b="1">
-                          <a:solidFill>
-                            <a:srgbClr val="222222"/>
-                          </a:solidFill>
-                          <a:latin typeface="맑은 고딕"/>
-                        </a:rPr>
-                        <a:t>49.3%</a:t>
-                      </a:r>
-                    </a:p>
-                  </a:txBody>
-                  <a:tcPr anchor="ctr" marL="54864" marR="54864">
-                    <a:solidFill>
-                      <a:srgbClr val="DDF1F4"/>
-                    </a:solidFill>
-                  </a:tcPr>
-                </a:tc>
-                <a:tc>
-                  <a:txBody>
-                    <a:bodyPr/>
-                    <a:lstStyle/>
-                    <a:p>
-                      <a:pPr algn="ctr"/>
-                      <a:r>
-                        <a:rPr sz="1400" b="1">
-                          <a:solidFill>
-                            <a:srgbClr val="222222"/>
-                          </a:solidFill>
-                          <a:latin typeface="맑은 고딕"/>
-                        </a:rPr>
-                        <a:t>0.574</a:t>
-                      </a:r>
-                    </a:p>
-                  </a:txBody>
-                  <a:tcPr anchor="ctr" marL="54864" marR="54864">
-                    <a:solidFill>
-                      <a:srgbClr val="DDF1F4"/>
-                    </a:solidFill>
-                  </a:tcPr>
-                </a:tc>
-                <a:tc>
-                  <a:txBody>
-                    <a:bodyPr/>
-                    <a:lstStyle/>
-                    <a:p>
-                      <a:pPr algn="ctr"/>
-                      <a:r>
-                        <a:rPr sz="1400" b="1">
-                          <a:solidFill>
-                            <a:srgbClr val="222222"/>
-                          </a:solidFill>
-                          <a:latin typeface="맑은 고딕"/>
-                        </a:rPr>
-                        <a:t>89%</a:t>
-                      </a:r>
-                    </a:p>
-                  </a:txBody>
-                  <a:tcPr anchor="ctr" marL="54864" marR="54864">
-                    <a:solidFill>
-                      <a:srgbClr val="DDF1F4"/>
-                    </a:solidFill>
-                  </a:tcPr>
-                </a:tc>
-                <a:tc>
-                  <a:txBody>
-                    <a:bodyPr/>
-                    <a:lstStyle/>
-                    <a:p>
-                      <a:pPr algn="ctr"/>
-                      <a:r>
-                        <a:rPr sz="1400" b="1">
-                          <a:solidFill>
-                            <a:srgbClr val="222222"/>
-                          </a:solidFill>
-                          <a:latin typeface="맑은 고딕"/>
-                        </a:rPr>
-                        <a:t>3.7M</a:t>
-                      </a:r>
-                    </a:p>
-                  </a:txBody>
-                  <a:tcPr anchor="ctr" marL="54864" marR="54864">
-                    <a:solidFill>
-                      <a:srgbClr val="DDF1F4"/>
-                    </a:solidFill>
-                  </a:tcPr>
-                </a:tc>
-              </a:tr>
-              <a:tr h="566928">
-                <a:tc>
-                  <a:txBody>
-                    <a:bodyPr/>
-                    <a:lstStyle/>
-                    <a:p>
-                      <a:pPr algn="l"/>
-                      <a:r>
-                        <a:rPr sz="1400" b="0">
-                          <a:solidFill>
-                            <a:srgbClr val="222222"/>
-                          </a:solidFill>
-                          <a:latin typeface="맑은 고딕"/>
-                        </a:rPr>
-                        <a:t>RT-DETR-l</a:t>
-                      </a:r>
-                    </a:p>
-                  </a:txBody>
-                  <a:tcPr anchor="ctr" marL="54864" marR="54864">
-                    <a:solidFill>
-                      <a:srgbClr val="F2F5FA"/>
-                    </a:solidFill>
-                  </a:tcPr>
-                </a:tc>
-                <a:tc>
-                  <a:txBody>
-                    <a:bodyPr/>
-                    <a:lstStyle/>
-                    <a:p>
-                      <a:pPr algn="ctr"/>
-                      <a:r>
-                        <a:rPr sz="1400" b="0">
-                          <a:solidFill>
-                            <a:srgbClr val="222222"/>
-                          </a:solidFill>
-                          <a:latin typeface="맑은 고딕"/>
-                        </a:rPr>
-                        <a:t>0.988</a:t>
-                      </a:r>
-                    </a:p>
-                  </a:txBody>
-                  <a:tcPr anchor="ctr" marL="54864" marR="54864">
-                    <a:solidFill>
-                      <a:srgbClr val="F2F5FA"/>
-                    </a:solidFill>
-                  </a:tcPr>
-                </a:tc>
-                <a:tc>
-                  <a:txBody>
-                    <a:bodyPr/>
-                    <a:lstStyle/>
-                    <a:p>
-                      <a:pPr algn="ctr"/>
-                      <a:r>
-                        <a:rPr sz="1400" b="0">
-                          <a:solidFill>
-                            <a:srgbClr val="222222"/>
-                          </a:solidFill>
-                          <a:latin typeface="맑은 고딕"/>
-                        </a:rPr>
-                        <a:t>0.662 / 0.357</a:t>
-                      </a:r>
-                    </a:p>
-                  </a:txBody>
-                  <a:tcPr anchor="ctr" marL="54864" marR="54864">
-                    <a:solidFill>
-                      <a:srgbClr val="F2F5FA"/>
-                    </a:solidFill>
-                  </a:tcPr>
-                </a:tc>
-                <a:tc>
-                  <a:txBody>
-                    <a:bodyPr/>
-                    <a:lstStyle/>
-                    <a:p>
-                      <a:pPr algn="ctr"/>
-                      <a:r>
-                        <a:rPr sz="1400" b="0">
-                          <a:solidFill>
-                            <a:srgbClr val="222222"/>
-                          </a:solidFill>
-                          <a:latin typeface="맑은 고딕"/>
-                        </a:rPr>
-                        <a:t>36.6%</a:t>
-                      </a:r>
-                    </a:p>
-                  </a:txBody>
-                  <a:tcPr anchor="ctr" marL="54864" marR="54864">
-                    <a:solidFill>
-                      <a:srgbClr val="F2F5FA"/>
-                    </a:solidFill>
-                  </a:tcPr>
-                </a:tc>
-                <a:tc>
-                  <a:txBody>
-                    <a:bodyPr/>
-                    <a:lstStyle/>
-                    <a:p>
-                      <a:pPr algn="ctr"/>
-                      <a:r>
-                        <a:rPr sz="1400" b="0">
-                          <a:solidFill>
-                            <a:srgbClr val="222222"/>
-                          </a:solidFill>
-                          <a:latin typeface="맑은 고딕"/>
-                        </a:rPr>
-                        <a:t>0.451</a:t>
-                      </a:r>
-                    </a:p>
-                  </a:txBody>
-                  <a:tcPr anchor="ctr" marL="54864" marR="54864">
-                    <a:solidFill>
-                      <a:srgbClr val="F2F5FA"/>
-                    </a:solidFill>
-                  </a:tcPr>
-                </a:tc>
-                <a:tc>
-                  <a:txBody>
-                    <a:bodyPr/>
-                    <a:lstStyle/>
-                    <a:p>
-                      <a:pPr algn="ctr"/>
-                      <a:r>
-                        <a:rPr sz="1400" b="0">
-                          <a:solidFill>
-                            <a:srgbClr val="222222"/>
-                          </a:solidFill>
-                          <a:latin typeface="맑은 고딕"/>
-                        </a:rPr>
-                        <a:t>61%</a:t>
-                      </a:r>
-                    </a:p>
-                  </a:txBody>
-                  <a:tcPr anchor="ctr" marL="54864" marR="54864">
-                    <a:solidFill>
-                      <a:srgbClr val="F2F5FA"/>
-                    </a:solidFill>
-                  </a:tcPr>
-                </a:tc>
-                <a:tc>
-                  <a:txBody>
-                    <a:bodyPr/>
-                    <a:lstStyle/>
-                    <a:p>
-                      <a:pPr algn="ctr"/>
-                      <a:r>
-                        <a:rPr sz="1400" b="0">
-                          <a:solidFill>
-                            <a:srgbClr val="222222"/>
-                          </a:solidFill>
-                          <a:latin typeface="맑은 고딕"/>
-                        </a:rPr>
-                        <a:t>32.8M</a:t>
-                      </a:r>
-                    </a:p>
-                  </a:txBody>
-                  <a:tcPr anchor="ctr" marL="54864" marR="54864">
-                    <a:solidFill>
-                      <a:srgbClr val="F2F5FA"/>
-                    </a:solidFill>
-                  </a:tcPr>
-                </a:tc>
-              </a:tr>
-              <a:tr h="566928">
-                <a:tc>
-                  <a:txBody>
-                    <a:bodyPr/>
-                    <a:lstStyle/>
-                    <a:p>
-                      <a:pPr algn="l"/>
-                      <a:r>
-                        <a:rPr sz="1400" b="0">
-                          <a:solidFill>
-                            <a:srgbClr val="222222"/>
-                          </a:solidFill>
-                          <a:latin typeface="맑은 고딕"/>
-                        </a:rPr>
-                        <a:t>Faster R-CNN R50</a:t>
-                      </a:r>
-                    </a:p>
-                  </a:txBody>
-                  <a:tcPr anchor="ctr" marL="54864" marR="54864">
-                    <a:solidFill>
-                      <a:srgbClr val="FFFFFF"/>
-                    </a:solidFill>
-                  </a:tcPr>
-                </a:tc>
-                <a:tc>
-                  <a:txBody>
-                    <a:bodyPr/>
-                    <a:lstStyle/>
-                    <a:p>
-                      <a:pPr algn="ctr"/>
-                      <a:r>
-                        <a:rPr sz="1400" b="0">
-                          <a:solidFill>
-                            <a:srgbClr val="222222"/>
-                          </a:solidFill>
-                          <a:latin typeface="맑은 고딕"/>
-                        </a:rPr>
-                        <a:t>0.989</a:t>
-                      </a:r>
-                    </a:p>
-                  </a:txBody>
-                  <a:tcPr anchor="ctr" marL="54864" marR="54864">
-                    <a:solidFill>
-                      <a:srgbClr val="FFFFFF"/>
-                    </a:solidFill>
-                  </a:tcPr>
-                </a:tc>
-                <a:tc>
-                  <a:txBody>
-                    <a:bodyPr/>
-                    <a:lstStyle/>
-                    <a:p>
-                      <a:pPr algn="ctr"/>
-                      <a:r>
-                        <a:rPr sz="1400" b="0">
-                          <a:solidFill>
-                            <a:srgbClr val="222222"/>
-                          </a:solidFill>
-                          <a:latin typeface="맑은 고딕"/>
-                        </a:rPr>
-                        <a:t>0.615 / 0.337</a:t>
-                      </a:r>
-                    </a:p>
-                  </a:txBody>
-                  <a:tcPr anchor="ctr" marL="54864" marR="54864">
-                    <a:solidFill>
-                      <a:srgbClr val="FFFFFF"/>
-                    </a:solidFill>
-                  </a:tcPr>
-                </a:tc>
-                <a:tc>
-                  <a:txBody>
-                    <a:bodyPr/>
-                    <a:lstStyle/>
-                    <a:p>
-                      <a:pPr algn="ctr"/>
-                      <a:r>
-                        <a:rPr sz="1400" b="0">
-                          <a:solidFill>
-                            <a:srgbClr val="222222"/>
-                          </a:solidFill>
-                          <a:latin typeface="맑은 고딕"/>
-                        </a:rPr>
-                        <a:t>0.5%</a:t>
-                      </a:r>
-                    </a:p>
-                  </a:txBody>
-                  <a:tcPr anchor="ctr" marL="54864" marR="54864">
-                    <a:solidFill>
-                      <a:srgbClr val="FFFFFF"/>
-                    </a:solidFill>
-                  </a:tcPr>
-                </a:tc>
-                <a:tc>
-                  <a:txBody>
-                    <a:bodyPr/>
-                    <a:lstStyle/>
-                    <a:p>
-                      <a:pPr algn="ctr"/>
-                      <a:r>
-                        <a:rPr sz="1400" b="0">
-                          <a:solidFill>
-                            <a:srgbClr val="222222"/>
-                          </a:solidFill>
-                          <a:latin typeface="맑은 고딕"/>
-                        </a:rPr>
-                        <a:t>0.567</a:t>
-                      </a:r>
-                    </a:p>
-                  </a:txBody>
-                  <a:tcPr anchor="ctr" marL="54864" marR="54864">
-                    <a:solidFill>
-                      <a:srgbClr val="FFFFFF"/>
-                    </a:solidFill>
-                  </a:tcPr>
-                </a:tc>
-                <a:tc>
-                  <a:txBody>
-                    <a:bodyPr/>
-                    <a:lstStyle/>
-                    <a:p>
-                      <a:pPr algn="ctr"/>
-                      <a:r>
-                        <a:rPr sz="1400" b="0">
-                          <a:solidFill>
-                            <a:srgbClr val="222222"/>
-                          </a:solidFill>
-                          <a:latin typeface="맑은 고딕"/>
-                        </a:rPr>
-                        <a:t>75%</a:t>
-                      </a:r>
-                    </a:p>
-                  </a:txBody>
-                  <a:tcPr anchor="ctr" marL="54864" marR="54864">
-                    <a:solidFill>
-                      <a:srgbClr val="FFFFFF"/>
-                    </a:solidFill>
-                  </a:tcPr>
-                </a:tc>
-                <a:tc>
-                  <a:txBody>
-                    <a:bodyPr/>
-                    <a:lstStyle/>
-                    <a:p>
-                      <a:pPr algn="ctr"/>
-                      <a:r>
-                        <a:rPr sz="1400" b="0">
-                          <a:solidFill>
-                            <a:srgbClr val="222222"/>
-                          </a:solidFill>
-                          <a:latin typeface="맑은 고딕"/>
-                        </a:rPr>
-                        <a:t>41.4M</a:t>
-                      </a:r>
-                    </a:p>
-                  </a:txBody>
-                  <a:tcPr anchor="ctr" marL="54864" marR="54864">
-                    <a:solidFill>
-                      <a:srgbClr val="FFFFFF"/>
-                    </a:solidFill>
-                  </a:tcPr>
-                </a:tc>
-              </a:tr>
-              <a:tr h="566928">
-                <a:tc>
-                  <a:txBody>
-                    <a:bodyPr/>
-                    <a:lstStyle/>
-                    <a:p>
-                      <a:pPr algn="l"/>
-                      <a:r>
-                        <a:rPr sz="1400" b="0">
-                          <a:solidFill>
-                            <a:srgbClr val="222222"/>
-                          </a:solidFill>
-                          <a:latin typeface="맑은 고딕"/>
-                        </a:rPr>
-                        <a:t>YOLO26n</a:t>
-                      </a:r>
-                    </a:p>
-                  </a:txBody>
-                  <a:tcPr anchor="ctr" marL="54864" marR="54864">
-                    <a:solidFill>
-                      <a:srgbClr val="F2F5FA"/>
-                    </a:solidFill>
-                  </a:tcPr>
-                </a:tc>
-                <a:tc>
-                  <a:txBody>
-                    <a:bodyPr/>
-                    <a:lstStyle/>
-                    <a:p>
-                      <a:pPr algn="ctr"/>
-                      <a:r>
-                        <a:rPr sz="1400" b="0">
-                          <a:solidFill>
-                            <a:srgbClr val="222222"/>
-                          </a:solidFill>
-                          <a:latin typeface="맑은 고딕"/>
-                        </a:rPr>
-                        <a:t>0.991</a:t>
-                      </a:r>
-                    </a:p>
-                  </a:txBody>
-                  <a:tcPr anchor="ctr" marL="54864" marR="54864">
-                    <a:solidFill>
-                      <a:srgbClr val="F2F5FA"/>
-                    </a:solidFill>
-                  </a:tcPr>
-                </a:tc>
-                <a:tc>
-                  <a:txBody>
-                    <a:bodyPr/>
-                    <a:lstStyle/>
-                    <a:p>
-                      <a:pPr algn="ctr"/>
-                      <a:r>
-                        <a:rPr sz="1400" b="0">
-                          <a:solidFill>
-                            <a:srgbClr val="222222"/>
-                          </a:solidFill>
-                          <a:latin typeface="맑은 고딕"/>
-                        </a:rPr>
-                        <a:t>0.642 / 0.314</a:t>
-                      </a:r>
-                    </a:p>
-                  </a:txBody>
-                  <a:tcPr anchor="ctr" marL="54864" marR="54864">
-                    <a:solidFill>
-                      <a:srgbClr val="F2F5FA"/>
-                    </a:solidFill>
-                  </a:tcPr>
-                </a:tc>
-                <a:tc>
-                  <a:txBody>
-                    <a:bodyPr/>
-                    <a:lstStyle/>
-                    <a:p>
-                      <a:pPr algn="ctr"/>
-                      <a:r>
-                        <a:rPr sz="1400" b="0">
-                          <a:solidFill>
-                            <a:srgbClr val="222222"/>
-                          </a:solidFill>
-                          <a:latin typeface="맑은 고딕"/>
-                        </a:rPr>
-                        <a:t>4.1%</a:t>
-                      </a:r>
-                    </a:p>
-                  </a:txBody>
-                  <a:tcPr anchor="ctr" marL="54864" marR="54864">
-                    <a:solidFill>
-                      <a:srgbClr val="F2F5FA"/>
-                    </a:solidFill>
-                  </a:tcPr>
-                </a:tc>
-                <a:tc>
-                  <a:txBody>
-                    <a:bodyPr/>
-                    <a:lstStyle/>
-                    <a:p>
-                      <a:pPr algn="ctr"/>
-                      <a:r>
-                        <a:rPr sz="1400" b="0">
-                          <a:solidFill>
-                            <a:srgbClr val="222222"/>
-                          </a:solidFill>
-                          <a:latin typeface="맑은 고딕"/>
-                        </a:rPr>
-                        <a:t>0.501</a:t>
-                      </a:r>
-                    </a:p>
-                  </a:txBody>
-                  <a:tcPr anchor="ctr" marL="54864" marR="54864">
-                    <a:solidFill>
-                      <a:srgbClr val="F2F5FA"/>
-                    </a:solidFill>
-                  </a:tcPr>
-                </a:tc>
-                <a:tc>
-                  <a:txBody>
-                    <a:bodyPr/>
-                    <a:lstStyle/>
-                    <a:p>
-                      <a:pPr algn="ctr"/>
-                      <a:r>
-                        <a:rPr sz="1400" b="0">
-                          <a:solidFill>
-                            <a:srgbClr val="222222"/>
-                          </a:solidFill>
-                          <a:latin typeface="맑은 고딕"/>
-                        </a:rPr>
-                        <a:t>62%</a:t>
-                      </a:r>
-                    </a:p>
-                  </a:txBody>
-                  <a:tcPr anchor="ctr" marL="54864" marR="54864">
-                    <a:solidFill>
-                      <a:srgbClr val="F2F5FA"/>
-                    </a:solidFill>
-                  </a:tcPr>
-                </a:tc>
-                <a:tc>
-                  <a:txBody>
-                    <a:bodyPr/>
-                    <a:lstStyle/>
-                    <a:p>
-                      <a:pPr algn="ctr"/>
-                      <a:r>
-                        <a:rPr sz="1400" b="0">
-                          <a:solidFill>
-                            <a:srgbClr val="222222"/>
-                          </a:solidFill>
-                          <a:latin typeface="맑은 고딕"/>
-                        </a:rPr>
-                        <a:t>2.5M</a:t>
-                      </a:r>
-                    </a:p>
-                  </a:txBody>
-                  <a:tcPr anchor="ctr" marL="54864" marR="54864">
-                    <a:solidFill>
-                      <a:srgbClr val="F2F5FA"/>
-                    </a:solidFill>
-                  </a:tcPr>
-                </a:tc>
-              </a:tr>
-              <a:tr h="566928">
-                <a:tc>
-                  <a:txBody>
-                    <a:bodyPr/>
-                    <a:lstStyle/>
-                    <a:p>
-                      <a:pPr algn="l"/>
-                      <a:r>
-                        <a:rPr sz="1400" b="0">
-                          <a:solidFill>
-                            <a:srgbClr val="222222"/>
-                          </a:solidFill>
-                          <a:latin typeface="맑은 고딕"/>
-                        </a:rPr>
-                        <a:t>YOLOv3-tiny</a:t>
-                      </a:r>
-                    </a:p>
-                  </a:txBody>
-                  <a:tcPr anchor="ctr" marL="54864" marR="54864">
-                    <a:solidFill>
-                      <a:srgbClr val="FFFFFF"/>
-                    </a:solidFill>
-                  </a:tcPr>
-                </a:tc>
-                <a:tc>
-                  <a:txBody>
-                    <a:bodyPr/>
-                    <a:lstStyle/>
-                    <a:p>
-                      <a:pPr algn="ctr"/>
-                      <a:r>
-                        <a:rPr sz="1400" b="0">
-                          <a:solidFill>
-                            <a:srgbClr val="222222"/>
-                          </a:solidFill>
-                          <a:latin typeface="맑은 고딕"/>
-                        </a:rPr>
-                        <a:t>0.989</a:t>
-                      </a:r>
-                    </a:p>
-                  </a:txBody>
-                  <a:tcPr anchor="ctr" marL="54864" marR="54864">
-                    <a:solidFill>
-                      <a:srgbClr val="FFFFFF"/>
-                    </a:solidFill>
-                  </a:tcPr>
-                </a:tc>
-                <a:tc>
-                  <a:txBody>
-                    <a:bodyPr/>
-                    <a:lstStyle/>
-                    <a:p>
-                      <a:pPr algn="ctr"/>
-                      <a:r>
-                        <a:rPr sz="1400" b="0">
-                          <a:solidFill>
-                            <a:srgbClr val="222222"/>
-                          </a:solidFill>
-                          <a:latin typeface="맑은 고딕"/>
-                        </a:rPr>
-                        <a:t>0.579 / 0.311</a:t>
-                      </a:r>
-                    </a:p>
-                  </a:txBody>
-                  <a:tcPr anchor="ctr" marL="54864" marR="54864">
-                    <a:solidFill>
-                      <a:srgbClr val="FFFFFF"/>
-                    </a:solidFill>
-                  </a:tcPr>
-                </a:tc>
-                <a:tc>
-                  <a:txBody>
-                    <a:bodyPr/>
-                    <a:lstStyle/>
-                    <a:p>
-                      <a:pPr algn="ctr"/>
-                      <a:r>
-                        <a:rPr sz="1400" b="0">
-                          <a:solidFill>
-                            <a:srgbClr val="222222"/>
-                          </a:solidFill>
-                          <a:latin typeface="맑은 고딕"/>
-                        </a:rPr>
-                        <a:t>38.5%</a:t>
-                      </a:r>
-                    </a:p>
-                  </a:txBody>
-                  <a:tcPr anchor="ctr" marL="54864" marR="54864">
-                    <a:solidFill>
-                      <a:srgbClr val="FFFFFF"/>
-                    </a:solidFill>
-                  </a:tcPr>
-                </a:tc>
-                <a:tc>
-                  <a:txBody>
-                    <a:bodyPr/>
-                    <a:lstStyle/>
-                    <a:p>
-                      <a:pPr algn="ctr"/>
-                      <a:r>
-                        <a:rPr sz="1400" b="0">
-                          <a:solidFill>
-                            <a:srgbClr val="222222"/>
-                          </a:solidFill>
-                          <a:latin typeface="맑은 고딕"/>
-                        </a:rPr>
-                        <a:t>0.515</a:t>
-                      </a:r>
-                    </a:p>
-                  </a:txBody>
-                  <a:tcPr anchor="ctr" marL="54864" marR="54864">
-                    <a:solidFill>
-                      <a:srgbClr val="FFFFFF"/>
-                    </a:solidFill>
-                  </a:tcPr>
-                </a:tc>
-                <a:tc>
-                  <a:txBody>
-                    <a:bodyPr/>
-                    <a:lstStyle/>
-                    <a:p>
-                      <a:pPr algn="ctr"/>
-                      <a:r>
-                        <a:rPr sz="1400" b="0">
-                          <a:solidFill>
-                            <a:srgbClr val="222222"/>
-                          </a:solidFill>
-                          <a:latin typeface="맑은 고딕"/>
-                        </a:rPr>
-                        <a:t>70%</a:t>
-                      </a:r>
-                    </a:p>
-                  </a:txBody>
-                  <a:tcPr anchor="ctr" marL="54864" marR="54864">
-                    <a:solidFill>
-                      <a:srgbClr val="FFFFFF"/>
-                    </a:solidFill>
-                  </a:tcPr>
-                </a:tc>
-                <a:tc>
-                  <a:txBody>
-                    <a:bodyPr/>
-                    <a:lstStyle/>
-                    <a:p>
-                      <a:pPr algn="ctr"/>
-                      <a:r>
-                        <a:rPr sz="1400" b="0">
-                          <a:solidFill>
-                            <a:srgbClr val="222222"/>
-                          </a:solidFill>
-                          <a:latin typeface="맑은 고딕"/>
-                        </a:rPr>
-                        <a:t>8.7M</a:t>
-                      </a:r>
-                    </a:p>
-                  </a:txBody>
-                  <a:tcPr anchor="ctr" marL="54864" marR="54864">
-                    <a:solidFill>
-                      <a:srgbClr val="FFFFFF"/>
-                    </a:solidFill>
-                  </a:tcPr>
-                </a:tc>
-              </a:tr>
-              <a:tr h="566928">
-                <a:tc>
-                  <a:txBody>
-                    <a:bodyPr/>
-                    <a:lstStyle/>
-                    <a:p>
-                      <a:pPr algn="l"/>
-                      <a:r>
-                        <a:rPr sz="1400" b="0">
-                          <a:solidFill>
-                            <a:srgbClr val="222222"/>
-                          </a:solidFill>
-                          <a:latin typeface="맑은 고딕"/>
-                        </a:rPr>
-                        <a:t>Faster R-CNN MobileNetV3</a:t>
-                      </a:r>
-                    </a:p>
-                  </a:txBody>
-                  <a:tcPr anchor="ctr" marL="54864" marR="54864">
-                    <a:solidFill>
-                      <a:srgbClr val="F2F5FA"/>
-                    </a:solidFill>
-                  </a:tcPr>
-                </a:tc>
-                <a:tc>
-                  <a:txBody>
-                    <a:bodyPr/>
-                    <a:lstStyle/>
-                    <a:p>
-                      <a:pPr algn="ctr"/>
-                      <a:r>
-                        <a:rPr sz="1400" b="0">
-                          <a:solidFill>
-                            <a:srgbClr val="222222"/>
-                          </a:solidFill>
-                          <a:latin typeface="맑은 고딕"/>
-                        </a:rPr>
-                        <a:t>0.986</a:t>
-                      </a:r>
-                    </a:p>
-                  </a:txBody>
-                  <a:tcPr anchor="ctr" marL="54864" marR="54864">
-                    <a:solidFill>
-                      <a:srgbClr val="F2F5FA"/>
-                    </a:solidFill>
-                  </a:tcPr>
-                </a:tc>
-                <a:tc>
-                  <a:txBody>
-                    <a:bodyPr/>
-                    <a:lstStyle/>
-                    <a:p>
-                      <a:pPr algn="ctr"/>
-                      <a:r>
-                        <a:rPr sz="1400" b="0">
-                          <a:solidFill>
-                            <a:srgbClr val="222222"/>
-                          </a:solidFill>
-                          <a:latin typeface="맑은 고딕"/>
-                        </a:rPr>
-                        <a:t>0.583 / 0.322</a:t>
-                      </a:r>
-                    </a:p>
-                  </a:txBody>
-                  <a:tcPr anchor="ctr" marL="54864" marR="54864">
-                    <a:solidFill>
-                      <a:srgbClr val="F2F5FA"/>
-                    </a:solidFill>
-                  </a:tcPr>
-                </a:tc>
-                <a:tc>
-                  <a:txBody>
-                    <a:bodyPr/>
-                    <a:lstStyle/>
-                    <a:p>
-                      <a:pPr algn="ctr"/>
-                      <a:r>
-                        <a:rPr sz="1400" b="0">
-                          <a:solidFill>
-                            <a:srgbClr val="222222"/>
-                          </a:solidFill>
-                          <a:latin typeface="맑은 고딕"/>
-                        </a:rPr>
-                        <a:t>64.0%</a:t>
-                      </a:r>
-                    </a:p>
-                  </a:txBody>
-                  <a:tcPr anchor="ctr" marL="54864" marR="54864">
-                    <a:solidFill>
-                      <a:srgbClr val="F2F5FA"/>
-                    </a:solidFill>
-                  </a:tcPr>
-                </a:tc>
-                <a:tc>
-                  <a:txBody>
-                    <a:bodyPr/>
-                    <a:lstStyle/>
-                    <a:p>
-                      <a:pPr algn="ctr"/>
-                      <a:r>
-                        <a:rPr sz="1400" b="0">
-                          <a:solidFill>
-                            <a:srgbClr val="222222"/>
-                          </a:solidFill>
-                          <a:latin typeface="맑은 고딕"/>
-                        </a:rPr>
-                        <a:t>0.262</a:t>
-                      </a:r>
-                    </a:p>
-                  </a:txBody>
-                  <a:tcPr anchor="ctr" marL="54864" marR="54864">
-                    <a:solidFill>
-                      <a:srgbClr val="F2F5FA"/>
-                    </a:solidFill>
-                  </a:tcPr>
-                </a:tc>
-                <a:tc>
-                  <a:txBody>
-                    <a:bodyPr/>
-                    <a:lstStyle/>
-                    <a:p>
-                      <a:pPr algn="ctr"/>
-                      <a:r>
-                        <a:rPr sz="1400" b="0">
-                          <a:solidFill>
-                            <a:srgbClr val="222222"/>
-                          </a:solidFill>
-                          <a:latin typeface="맑은 고딕"/>
-                        </a:rPr>
-                        <a:t>4%</a:t>
-                      </a:r>
-                    </a:p>
-                  </a:txBody>
-                  <a:tcPr anchor="ctr" marL="54864" marR="54864">
-                    <a:solidFill>
-                      <a:srgbClr val="F2F5FA"/>
-                    </a:solidFill>
-                  </a:tcPr>
-                </a:tc>
-                <a:tc>
-                  <a:txBody>
-                    <a:bodyPr/>
-                    <a:lstStyle/>
-                    <a:p>
-                      <a:pPr algn="ctr"/>
-                      <a:r>
-                        <a:rPr sz="1400" b="0">
-                          <a:solidFill>
-                            <a:srgbClr val="222222"/>
-                          </a:solidFill>
-                          <a:latin typeface="맑은 고딕"/>
-                        </a:rPr>
-                        <a:t>19.0M</a:t>
-                      </a:r>
-                    </a:p>
-                  </a:txBody>
-                  <a:tcPr anchor="ctr" marL="54864" marR="54864">
-                    <a:solidFill>
-                      <a:srgbClr val="F2F5FA"/>
-                    </a:solidFill>
-                  </a:tcPr>
-                </a:tc>
-              </a:tr>
-            </a:tbl>
-          </a:graphicData>
-        </a:graphic>
-      </p:graphicFrame>
-      <p:sp>
-        <p:nvSpPr>
-          <p:cNvPr id="8" name="TextBox 7"/>
-          <p:cNvSpPr txBox="1"/>
-          <p:nvPr/>
-        </p:nvSpPr>
-        <p:spPr>
-          <a:xfrm>
-            <a:off x="548640" y="5806440"/>
-            <a:ext cx="10972800" cy="822960"/>
-          </a:xfrm>
-          <a:prstGeom prst="rect">
-            <a:avLst/>
-          </a:prstGeom>
-          <a:noFill/>
-        </p:spPr>
-        <p:txBody>
           <a:bodyPr wrap="square" lIns="45720" rIns="45720">
             <a:spAutoFit/>
           </a:bodyPr>
@@ -13153,11 +12011,11 @@
           <a:p>
             <a:pPr>
               <a:spcAft>
-                <a:spcPts val="600"/>
+                <a:spcPts val="800"/>
               </a:spcAft>
             </a:pPr>
             <a:r>
-              <a:rPr sz="1400" b="1">
+              <a:rPr sz="1600" b="1">
                 <a:solidFill>
                   <a:srgbClr val="2AA7B8"/>
                 </a:solidFill>
@@ -13166,13 +12024,56 @@
               <a:t>• </a:t>
             </a:r>
             <a:r>
-              <a:rPr sz="1400" b="0">
-                <a:solidFill>
-                  <a:srgbClr val="222222"/>
-                </a:solidFill>
-                <a:latin typeface="맑은 고딕"/>
-              </a:rPr>
-              <a:t>점 제거는 6개 모델 모두 0~3개만 남아 차이가 없다. test F1은 모두 포화다.</a:t>
+              <a:rPr sz="1600" b="0">
+                <a:solidFill>
+                  <a:srgbClr val="222222"/>
+                </a:solidFill>
+                <a:latin typeface="맑은 고딕"/>
+              </a:rPr>
+              <a:t>해상도별 공식 라벨 박스 비율(test 기준)이 10~76%로 달라 라벨 구성이 섞인다. 공식 라벨 이미지끼리만 비교하면 6개 모델의 해상도별 F1이 0.944~0.983으로 좁아지고 구간이 겹친다</a:t>
+            </a:r>
+          </a:p>
+          <a:p>
+            <a:pPr>
+              <a:spcAft>
+                <a:spcPts val="800"/>
+              </a:spcAft>
+            </a:pPr>
+            <a:r>
+              <a:rPr sz="1600" b="1">
+                <a:solidFill>
+                  <a:srgbClr val="2AA7B8"/>
+                </a:solidFill>
+                <a:latin typeface="맑은 고딕"/>
+              </a:rPr>
+              <a:t>• </a:t>
+            </a:r>
+            <a:r>
+              <a:rPr sz="1600" b="0">
+                <a:solidFill>
+                  <a:srgbClr val="222222"/>
+                </a:solidFill>
+                <a:latin typeface="맑은 고딕"/>
+              </a:rPr>
+              <a:t>6개 모델 모두 가장 낮은 그룹은 1호기·352x332(F1 0.953~0.966)다. 그룹별 표본이 작다(공식 라벨 이미지 호기별 20~36장). 합성 점에서 보인 3호기 약점은 </a:t>
+            </a:r>
+            <a:r>
+              <a:rPr sz="1600" b="1">
+                <a:solidFill>
+                  <a:srgbClr val="222222"/>
+                </a:solidFill>
+                <a:latin typeface="맑은 고딕"/>
+              </a:rPr>
+              <a:t>모델에 따라</a:t>
+            </a:r>
+            <a:r>
+              <a:rPr sz="1600" b="0">
+                <a:solidFill>
+                  <a:srgbClr val="222222"/>
+                </a:solidFill>
+                <a:latin typeface="맑은 고딕"/>
+              </a:rPr>
+              <a:t> 다르다(앞 슬라이드)</a:t>
             </a:r>
           </a:p>
         </p:txBody>
@@ -13268,7 +12169,7 @@
                 </a:solidFill>
                 <a:latin typeface="맑은 고딕"/>
               </a:rPr>
-              <a:t>베스트 모델: D-FINE-N</a:t>
+              <a:t>③ 종합: 모델별 성적표</a:t>
             </a:r>
           </a:p>
         </p:txBody>
@@ -13303,7 +12204,7 @@
                 </a:solidFill>
                 <a:latin typeface="맑은 고딕"/>
               </a:rPr>
-              <a:t>val 동률 선두 + 미탐지 강건성 최상 + 작다(3.7M)</a:t>
+              <a:t>한 모델이 모든 항목에서 1등은 아니다</a:t>
             </a:r>
           </a:p>
         </p:txBody>
@@ -13373,35 +12274,1187 @@
                 </a:solidFill>
                 <a:latin typeface="맑은 고딕"/>
               </a:rPr>
-              <a:t>선정 기준 ①②③은 팀원 모델 추가 전에 정했다. '미탐지 우선'은 결과를 본 뒤 정한 우선순위다. 상세는 docs/analysis.md 5절.</a:t>
-            </a:r>
-          </a:p>
-        </p:txBody>
-      </p:sp>
-      <p:pic>
-        <p:nvPicPr>
-          <p:cNvPr id="7" name="Picture 6" descr="fig5e_select_ci.png"/>
-          <p:cNvPicPr>
-            <a:picLocks noChangeAspect="1"/>
-          </p:cNvPicPr>
+              <a:t>val mAP50-95는 val, 나머지는 test 이미지 기준(가짜 정상·합성 점은 인위 이미지). 상세 수치는 docs/experiments.md.</a:t>
+            </a:r>
+          </a:p>
+        </p:txBody>
+      </p:sp>
+      <p:graphicFrame>
+        <p:nvGraphicFramePr>
+          <p:cNvPr id="7" name="Table 6"/>
+          <p:cNvGraphicFramePr>
+            <a:graphicFrameLocks noGrp="1"/>
+          </p:cNvGraphicFramePr>
           <p:nvPr/>
-        </p:nvPicPr>
-        <p:blipFill>
-          <a:blip r:embed="rId2"/>
-          <a:stretch>
-            <a:fillRect/>
-          </a:stretch>
-        </p:blipFill>
-        <p:spPr>
-          <a:xfrm>
-            <a:off x="274320" y="1590775"/>
-            <a:ext cx="7863840" cy="2899209"/>
-          </a:xfrm>
-          <a:prstGeom prst="rect">
-            <a:avLst/>
-          </a:prstGeom>
-        </p:spPr>
-      </p:pic>
+        </p:nvGraphicFramePr>
+        <p:xfrm>
+          <a:off x="457200" y="1783080"/>
+          <a:ext cx="11247119" cy="3968496"/>
+        </p:xfrm>
+        <a:graphic>
+          <a:graphicData uri="http://schemas.openxmlformats.org/drawingml/2006/table">
+            <a:tbl>
+              <a:tblPr firstRow="1" bandRow="1">
+                <a:tableStyleId>{5C22544A-7EE6-4342-B048-85BDC9FD1C3A}</a:tableStyleId>
+              </a:tblPr>
+              <a:tblGrid>
+                <a:gridCol w="2377440"/>
+                <a:gridCol w="1188720"/>
+                <a:gridCol w="1828800"/>
+                <a:gridCol w="1828800"/>
+                <a:gridCol w="1280159"/>
+                <a:gridCol w="1645920"/>
+                <a:gridCol w="1097280"/>
+              </a:tblGrid>
+              <a:tr h="566928">
+                <a:tc>
+                  <a:txBody>
+                    <a:bodyPr/>
+                    <a:lstStyle/>
+                    <a:p>
+                      <a:pPr algn="l"/>
+                      <a:r>
+                        <a:rPr sz="1400" b="1">
+                          <a:solidFill>
+                            <a:srgbClr val="FFFFFF"/>
+                          </a:solidFill>
+                          <a:latin typeface="맑은 고딕"/>
+                        </a:rPr>
+                        <a:t>모델</a:t>
+                      </a:r>
+                    </a:p>
+                  </a:txBody>
+                  <a:tcPr anchor="ctr" marL="54864" marR="54864">
+                    <a:solidFill>
+                      <a:srgbClr val="1F3A5F"/>
+                    </a:solidFill>
+                  </a:tcPr>
+                </a:tc>
+                <a:tc>
+                  <a:txBody>
+                    <a:bodyPr/>
+                    <a:lstStyle/>
+                    <a:p>
+                      <a:pPr algn="ctr"/>
+                      <a:r>
+                        <a:rPr sz="1400" b="1">
+                          <a:solidFill>
+                            <a:srgbClr val="FFFFFF"/>
+                          </a:solidFill>
+                          <a:latin typeface="맑은 고딕"/>
+                        </a:rPr>
+                        <a:t>test F1
+(IoU 0.5)</a:t>
+                      </a:r>
+                    </a:p>
+                  </a:txBody>
+                  <a:tcPr anchor="ctr" marL="54864" marR="54864">
+                    <a:solidFill>
+                      <a:srgbClr val="1F3A5F"/>
+                    </a:solidFill>
+                  </a:tcPr>
+                </a:tc>
+                <a:tc>
+                  <a:txBody>
+                    <a:bodyPr/>
+                    <a:lstStyle/>
+                    <a:p>
+                      <a:pPr algn="ctr"/>
+                      <a:r>
+                        <a:rPr sz="1400" b="1">
+                          <a:solidFill>
+                            <a:srgbClr val="FFFFFF"/>
+                          </a:solidFill>
+                          <a:latin typeface="맑은 고딕"/>
+                        </a:rPr>
+                        <a:t>val mAP50-95
+(전체 / 공식만)</a:t>
+                      </a:r>
+                    </a:p>
+                  </a:txBody>
+                  <a:tcPr anchor="ctr" marL="54864" marR="54864">
+                    <a:solidFill>
+                      <a:srgbClr val="1F3A5F"/>
+                    </a:solidFill>
+                  </a:tcPr>
+                </a:tc>
+                <a:tc>
+                  <a:txBody>
+                    <a:bodyPr/>
+                    <a:lstStyle/>
+                    <a:p>
+                      <a:pPr algn="ctr"/>
+                      <a:r>
+                        <a:rPr sz="1400" b="1">
+                          <a:solidFill>
+                            <a:srgbClr val="FFFFFF"/>
+                          </a:solidFill>
+                          <a:latin typeface="맑은 고딕"/>
+                        </a:rPr>
+                        <a:t>가짜 정상 오경보
+(NS+노이즈 6)</a:t>
+                      </a:r>
+                    </a:p>
+                  </a:txBody>
+                  <a:tcPr anchor="ctr" marL="54864" marR="54864">
+                    <a:solidFill>
+                      <a:srgbClr val="1F3A5F"/>
+                    </a:solidFill>
+                  </a:tcPr>
+                </a:tc>
+                <a:tc>
+                  <a:txBody>
+                    <a:bodyPr/>
+                    <a:lstStyle/>
+                    <a:p>
+                      <a:pPr algn="ctr"/>
+                      <a:r>
+                        <a:rPr sz="1400" b="1">
+                          <a:solidFill>
+                            <a:srgbClr val="FFFFFF"/>
+                          </a:solidFill>
+                          <a:latin typeface="맑은 고딕"/>
+                        </a:rPr>
+                        <a:t>합성 점 AP</a:t>
+                      </a:r>
+                    </a:p>
+                  </a:txBody>
+                  <a:tcPr anchor="ctr" marL="54864" marR="54864">
+                    <a:solidFill>
+                      <a:srgbClr val="1F3A5F"/>
+                    </a:solidFill>
+                  </a:tcPr>
+                </a:tc>
+                <a:tc>
+                  <a:txBody>
+                    <a:bodyPr/>
+                    <a:lstStyle/>
+                    <a:p>
+                      <a:pPr algn="ctr"/>
+                      <a:r>
+                        <a:rPr sz="1400" b="1">
+                          <a:solidFill>
+                            <a:srgbClr val="FFFFFF"/>
+                          </a:solidFill>
+                          <a:latin typeface="맑은 고딕"/>
+                        </a:rPr>
+                        <a:t>3호기 합성 점
+(대비 14 이상)</a:t>
+                      </a:r>
+                    </a:p>
+                  </a:txBody>
+                  <a:tcPr anchor="ctr" marL="54864" marR="54864">
+                    <a:solidFill>
+                      <a:srgbClr val="1F3A5F"/>
+                    </a:solidFill>
+                  </a:tcPr>
+                </a:tc>
+                <a:tc>
+                  <a:txBody>
+                    <a:bodyPr/>
+                    <a:lstStyle/>
+                    <a:p>
+                      <a:pPr algn="ctr"/>
+                      <a:r>
+                        <a:rPr sz="1400" b="1">
+                          <a:solidFill>
+                            <a:srgbClr val="FFFFFF"/>
+                          </a:solidFill>
+                          <a:latin typeface="맑은 고딕"/>
+                        </a:rPr>
+                        <a:t>파라미터</a:t>
+                      </a:r>
+                    </a:p>
+                  </a:txBody>
+                  <a:tcPr anchor="ctr" marL="54864" marR="54864">
+                    <a:solidFill>
+                      <a:srgbClr val="1F3A5F"/>
+                    </a:solidFill>
+                  </a:tcPr>
+                </a:tc>
+              </a:tr>
+              <a:tr h="566928">
+                <a:tc>
+                  <a:txBody>
+                    <a:bodyPr/>
+                    <a:lstStyle/>
+                    <a:p>
+                      <a:pPr algn="l"/>
+                      <a:r>
+                        <a:rPr sz="1400" b="1">
+                          <a:solidFill>
+                            <a:srgbClr val="222222"/>
+                          </a:solidFill>
+                          <a:latin typeface="맑은 고딕"/>
+                        </a:rPr>
+                        <a:t>D-FINE-N</a:t>
+                      </a:r>
+                    </a:p>
+                  </a:txBody>
+                  <a:tcPr anchor="ctr" marL="54864" marR="54864">
+                    <a:solidFill>
+                      <a:srgbClr val="DDF1F4"/>
+                    </a:solidFill>
+                  </a:tcPr>
+                </a:tc>
+                <a:tc>
+                  <a:txBody>
+                    <a:bodyPr/>
+                    <a:lstStyle/>
+                    <a:p>
+                      <a:pPr algn="ctr"/>
+                      <a:r>
+                        <a:rPr sz="1400" b="1">
+                          <a:solidFill>
+                            <a:srgbClr val="222222"/>
+                          </a:solidFill>
+                          <a:latin typeface="맑은 고딕"/>
+                        </a:rPr>
+                        <a:t>0.989</a:t>
+                      </a:r>
+                    </a:p>
+                  </a:txBody>
+                  <a:tcPr anchor="ctr" marL="54864" marR="54864">
+                    <a:solidFill>
+                      <a:srgbClr val="DDF1F4"/>
+                    </a:solidFill>
+                  </a:tcPr>
+                </a:tc>
+                <a:tc>
+                  <a:txBody>
+                    <a:bodyPr/>
+                    <a:lstStyle/>
+                    <a:p>
+                      <a:pPr algn="ctr"/>
+                      <a:r>
+                        <a:rPr sz="1400" b="1">
+                          <a:solidFill>
+                            <a:srgbClr val="222222"/>
+                          </a:solidFill>
+                          <a:latin typeface="맑은 고딕"/>
+                        </a:rPr>
+                        <a:t>0.655 / 0.343</a:t>
+                      </a:r>
+                    </a:p>
+                  </a:txBody>
+                  <a:tcPr anchor="ctr" marL="54864" marR="54864">
+                    <a:solidFill>
+                      <a:srgbClr val="DDF1F4"/>
+                    </a:solidFill>
+                  </a:tcPr>
+                </a:tc>
+                <a:tc>
+                  <a:txBody>
+                    <a:bodyPr/>
+                    <a:lstStyle/>
+                    <a:p>
+                      <a:pPr algn="ctr"/>
+                      <a:r>
+                        <a:rPr sz="1400" b="1">
+                          <a:solidFill>
+                            <a:srgbClr val="222222"/>
+                          </a:solidFill>
+                          <a:latin typeface="맑은 고딕"/>
+                        </a:rPr>
+                        <a:t>49.3%</a:t>
+                      </a:r>
+                    </a:p>
+                  </a:txBody>
+                  <a:tcPr anchor="ctr" marL="54864" marR="54864">
+                    <a:solidFill>
+                      <a:srgbClr val="DDF1F4"/>
+                    </a:solidFill>
+                  </a:tcPr>
+                </a:tc>
+                <a:tc>
+                  <a:txBody>
+                    <a:bodyPr/>
+                    <a:lstStyle/>
+                    <a:p>
+                      <a:pPr algn="ctr"/>
+                      <a:r>
+                        <a:rPr sz="1400" b="1">
+                          <a:solidFill>
+                            <a:srgbClr val="222222"/>
+                          </a:solidFill>
+                          <a:latin typeface="맑은 고딕"/>
+                        </a:rPr>
+                        <a:t>0.574</a:t>
+                      </a:r>
+                    </a:p>
+                  </a:txBody>
+                  <a:tcPr anchor="ctr" marL="54864" marR="54864">
+                    <a:solidFill>
+                      <a:srgbClr val="DDF1F4"/>
+                    </a:solidFill>
+                  </a:tcPr>
+                </a:tc>
+                <a:tc>
+                  <a:txBody>
+                    <a:bodyPr/>
+                    <a:lstStyle/>
+                    <a:p>
+                      <a:pPr algn="ctr"/>
+                      <a:r>
+                        <a:rPr sz="1400" b="1">
+                          <a:solidFill>
+                            <a:srgbClr val="222222"/>
+                          </a:solidFill>
+                          <a:latin typeface="맑은 고딕"/>
+                        </a:rPr>
+                        <a:t>89%</a:t>
+                      </a:r>
+                    </a:p>
+                  </a:txBody>
+                  <a:tcPr anchor="ctr" marL="54864" marR="54864">
+                    <a:solidFill>
+                      <a:srgbClr val="DDF1F4"/>
+                    </a:solidFill>
+                  </a:tcPr>
+                </a:tc>
+                <a:tc>
+                  <a:txBody>
+                    <a:bodyPr/>
+                    <a:lstStyle/>
+                    <a:p>
+                      <a:pPr algn="ctr"/>
+                      <a:r>
+                        <a:rPr sz="1400" b="1">
+                          <a:solidFill>
+                            <a:srgbClr val="222222"/>
+                          </a:solidFill>
+                          <a:latin typeface="맑은 고딕"/>
+                        </a:rPr>
+                        <a:t>3.7M</a:t>
+                      </a:r>
+                    </a:p>
+                  </a:txBody>
+                  <a:tcPr anchor="ctr" marL="54864" marR="54864">
+                    <a:solidFill>
+                      <a:srgbClr val="DDF1F4"/>
+                    </a:solidFill>
+                  </a:tcPr>
+                </a:tc>
+              </a:tr>
+              <a:tr h="566928">
+                <a:tc>
+                  <a:txBody>
+                    <a:bodyPr/>
+                    <a:lstStyle/>
+                    <a:p>
+                      <a:pPr algn="l"/>
+                      <a:r>
+                        <a:rPr sz="1400" b="0">
+                          <a:solidFill>
+                            <a:srgbClr val="222222"/>
+                          </a:solidFill>
+                          <a:latin typeface="맑은 고딕"/>
+                        </a:rPr>
+                        <a:t>RT-DETR-l</a:t>
+                      </a:r>
+                    </a:p>
+                  </a:txBody>
+                  <a:tcPr anchor="ctr" marL="54864" marR="54864">
+                    <a:solidFill>
+                      <a:srgbClr val="F2F5FA"/>
+                    </a:solidFill>
+                  </a:tcPr>
+                </a:tc>
+                <a:tc>
+                  <a:txBody>
+                    <a:bodyPr/>
+                    <a:lstStyle/>
+                    <a:p>
+                      <a:pPr algn="ctr"/>
+                      <a:r>
+                        <a:rPr sz="1400" b="0">
+                          <a:solidFill>
+                            <a:srgbClr val="222222"/>
+                          </a:solidFill>
+                          <a:latin typeface="맑은 고딕"/>
+                        </a:rPr>
+                        <a:t>0.988</a:t>
+                      </a:r>
+                    </a:p>
+                  </a:txBody>
+                  <a:tcPr anchor="ctr" marL="54864" marR="54864">
+                    <a:solidFill>
+                      <a:srgbClr val="F2F5FA"/>
+                    </a:solidFill>
+                  </a:tcPr>
+                </a:tc>
+                <a:tc>
+                  <a:txBody>
+                    <a:bodyPr/>
+                    <a:lstStyle/>
+                    <a:p>
+                      <a:pPr algn="ctr"/>
+                      <a:r>
+                        <a:rPr sz="1400" b="0">
+                          <a:solidFill>
+                            <a:srgbClr val="222222"/>
+                          </a:solidFill>
+                          <a:latin typeface="맑은 고딕"/>
+                        </a:rPr>
+                        <a:t>0.662 / 0.357</a:t>
+                      </a:r>
+                    </a:p>
+                  </a:txBody>
+                  <a:tcPr anchor="ctr" marL="54864" marR="54864">
+                    <a:solidFill>
+                      <a:srgbClr val="F2F5FA"/>
+                    </a:solidFill>
+                  </a:tcPr>
+                </a:tc>
+                <a:tc>
+                  <a:txBody>
+                    <a:bodyPr/>
+                    <a:lstStyle/>
+                    <a:p>
+                      <a:pPr algn="ctr"/>
+                      <a:r>
+                        <a:rPr sz="1400" b="0">
+                          <a:solidFill>
+                            <a:srgbClr val="222222"/>
+                          </a:solidFill>
+                          <a:latin typeface="맑은 고딕"/>
+                        </a:rPr>
+                        <a:t>36.6%</a:t>
+                      </a:r>
+                    </a:p>
+                  </a:txBody>
+                  <a:tcPr anchor="ctr" marL="54864" marR="54864">
+                    <a:solidFill>
+                      <a:srgbClr val="F2F5FA"/>
+                    </a:solidFill>
+                  </a:tcPr>
+                </a:tc>
+                <a:tc>
+                  <a:txBody>
+                    <a:bodyPr/>
+                    <a:lstStyle/>
+                    <a:p>
+                      <a:pPr algn="ctr"/>
+                      <a:r>
+                        <a:rPr sz="1400" b="0">
+                          <a:solidFill>
+                            <a:srgbClr val="222222"/>
+                          </a:solidFill>
+                          <a:latin typeface="맑은 고딕"/>
+                        </a:rPr>
+                        <a:t>0.451</a:t>
+                      </a:r>
+                    </a:p>
+                  </a:txBody>
+                  <a:tcPr anchor="ctr" marL="54864" marR="54864">
+                    <a:solidFill>
+                      <a:srgbClr val="F2F5FA"/>
+                    </a:solidFill>
+                  </a:tcPr>
+                </a:tc>
+                <a:tc>
+                  <a:txBody>
+                    <a:bodyPr/>
+                    <a:lstStyle/>
+                    <a:p>
+                      <a:pPr algn="ctr"/>
+                      <a:r>
+                        <a:rPr sz="1400" b="0">
+                          <a:solidFill>
+                            <a:srgbClr val="222222"/>
+                          </a:solidFill>
+                          <a:latin typeface="맑은 고딕"/>
+                        </a:rPr>
+                        <a:t>61%</a:t>
+                      </a:r>
+                    </a:p>
+                  </a:txBody>
+                  <a:tcPr anchor="ctr" marL="54864" marR="54864">
+                    <a:solidFill>
+                      <a:srgbClr val="F2F5FA"/>
+                    </a:solidFill>
+                  </a:tcPr>
+                </a:tc>
+                <a:tc>
+                  <a:txBody>
+                    <a:bodyPr/>
+                    <a:lstStyle/>
+                    <a:p>
+                      <a:pPr algn="ctr"/>
+                      <a:r>
+                        <a:rPr sz="1400" b="0">
+                          <a:solidFill>
+                            <a:srgbClr val="222222"/>
+                          </a:solidFill>
+                          <a:latin typeface="맑은 고딕"/>
+                        </a:rPr>
+                        <a:t>32.8M</a:t>
+                      </a:r>
+                    </a:p>
+                  </a:txBody>
+                  <a:tcPr anchor="ctr" marL="54864" marR="54864">
+                    <a:solidFill>
+                      <a:srgbClr val="F2F5FA"/>
+                    </a:solidFill>
+                  </a:tcPr>
+                </a:tc>
+              </a:tr>
+              <a:tr h="566928">
+                <a:tc>
+                  <a:txBody>
+                    <a:bodyPr/>
+                    <a:lstStyle/>
+                    <a:p>
+                      <a:pPr algn="l"/>
+                      <a:r>
+                        <a:rPr sz="1400" b="0">
+                          <a:solidFill>
+                            <a:srgbClr val="222222"/>
+                          </a:solidFill>
+                          <a:latin typeface="맑은 고딕"/>
+                        </a:rPr>
+                        <a:t>Faster R-CNN R50</a:t>
+                      </a:r>
+                    </a:p>
+                  </a:txBody>
+                  <a:tcPr anchor="ctr" marL="54864" marR="54864">
+                    <a:solidFill>
+                      <a:srgbClr val="FFFFFF"/>
+                    </a:solidFill>
+                  </a:tcPr>
+                </a:tc>
+                <a:tc>
+                  <a:txBody>
+                    <a:bodyPr/>
+                    <a:lstStyle/>
+                    <a:p>
+                      <a:pPr algn="ctr"/>
+                      <a:r>
+                        <a:rPr sz="1400" b="0">
+                          <a:solidFill>
+                            <a:srgbClr val="222222"/>
+                          </a:solidFill>
+                          <a:latin typeface="맑은 고딕"/>
+                        </a:rPr>
+                        <a:t>0.989</a:t>
+                      </a:r>
+                    </a:p>
+                  </a:txBody>
+                  <a:tcPr anchor="ctr" marL="54864" marR="54864">
+                    <a:solidFill>
+                      <a:srgbClr val="FFFFFF"/>
+                    </a:solidFill>
+                  </a:tcPr>
+                </a:tc>
+                <a:tc>
+                  <a:txBody>
+                    <a:bodyPr/>
+                    <a:lstStyle/>
+                    <a:p>
+                      <a:pPr algn="ctr"/>
+                      <a:r>
+                        <a:rPr sz="1400" b="0">
+                          <a:solidFill>
+                            <a:srgbClr val="222222"/>
+                          </a:solidFill>
+                          <a:latin typeface="맑은 고딕"/>
+                        </a:rPr>
+                        <a:t>0.615 / 0.337</a:t>
+                      </a:r>
+                    </a:p>
+                  </a:txBody>
+                  <a:tcPr anchor="ctr" marL="54864" marR="54864">
+                    <a:solidFill>
+                      <a:srgbClr val="FFFFFF"/>
+                    </a:solidFill>
+                  </a:tcPr>
+                </a:tc>
+                <a:tc>
+                  <a:txBody>
+                    <a:bodyPr/>
+                    <a:lstStyle/>
+                    <a:p>
+                      <a:pPr algn="ctr"/>
+                      <a:r>
+                        <a:rPr sz="1400" b="0">
+                          <a:solidFill>
+                            <a:srgbClr val="222222"/>
+                          </a:solidFill>
+                          <a:latin typeface="맑은 고딕"/>
+                        </a:rPr>
+                        <a:t>0.5%</a:t>
+                      </a:r>
+                    </a:p>
+                  </a:txBody>
+                  <a:tcPr anchor="ctr" marL="54864" marR="54864">
+                    <a:solidFill>
+                      <a:srgbClr val="FFFFFF"/>
+                    </a:solidFill>
+                  </a:tcPr>
+                </a:tc>
+                <a:tc>
+                  <a:txBody>
+                    <a:bodyPr/>
+                    <a:lstStyle/>
+                    <a:p>
+                      <a:pPr algn="ctr"/>
+                      <a:r>
+                        <a:rPr sz="1400" b="0">
+                          <a:solidFill>
+                            <a:srgbClr val="222222"/>
+                          </a:solidFill>
+                          <a:latin typeface="맑은 고딕"/>
+                        </a:rPr>
+                        <a:t>0.567</a:t>
+                      </a:r>
+                    </a:p>
+                  </a:txBody>
+                  <a:tcPr anchor="ctr" marL="54864" marR="54864">
+                    <a:solidFill>
+                      <a:srgbClr val="FFFFFF"/>
+                    </a:solidFill>
+                  </a:tcPr>
+                </a:tc>
+                <a:tc>
+                  <a:txBody>
+                    <a:bodyPr/>
+                    <a:lstStyle/>
+                    <a:p>
+                      <a:pPr algn="ctr"/>
+                      <a:r>
+                        <a:rPr sz="1400" b="0">
+                          <a:solidFill>
+                            <a:srgbClr val="222222"/>
+                          </a:solidFill>
+                          <a:latin typeface="맑은 고딕"/>
+                        </a:rPr>
+                        <a:t>75%</a:t>
+                      </a:r>
+                    </a:p>
+                  </a:txBody>
+                  <a:tcPr anchor="ctr" marL="54864" marR="54864">
+                    <a:solidFill>
+                      <a:srgbClr val="FFFFFF"/>
+                    </a:solidFill>
+                  </a:tcPr>
+                </a:tc>
+                <a:tc>
+                  <a:txBody>
+                    <a:bodyPr/>
+                    <a:lstStyle/>
+                    <a:p>
+                      <a:pPr algn="ctr"/>
+                      <a:r>
+                        <a:rPr sz="1400" b="0">
+                          <a:solidFill>
+                            <a:srgbClr val="222222"/>
+                          </a:solidFill>
+                          <a:latin typeface="맑은 고딕"/>
+                        </a:rPr>
+                        <a:t>41.4M</a:t>
+                      </a:r>
+                    </a:p>
+                  </a:txBody>
+                  <a:tcPr anchor="ctr" marL="54864" marR="54864">
+                    <a:solidFill>
+                      <a:srgbClr val="FFFFFF"/>
+                    </a:solidFill>
+                  </a:tcPr>
+                </a:tc>
+              </a:tr>
+              <a:tr h="566928">
+                <a:tc>
+                  <a:txBody>
+                    <a:bodyPr/>
+                    <a:lstStyle/>
+                    <a:p>
+                      <a:pPr algn="l"/>
+                      <a:r>
+                        <a:rPr sz="1400" b="0">
+                          <a:solidFill>
+                            <a:srgbClr val="222222"/>
+                          </a:solidFill>
+                          <a:latin typeface="맑은 고딕"/>
+                        </a:rPr>
+                        <a:t>YOLO26n</a:t>
+                      </a:r>
+                    </a:p>
+                  </a:txBody>
+                  <a:tcPr anchor="ctr" marL="54864" marR="54864">
+                    <a:solidFill>
+                      <a:srgbClr val="F2F5FA"/>
+                    </a:solidFill>
+                  </a:tcPr>
+                </a:tc>
+                <a:tc>
+                  <a:txBody>
+                    <a:bodyPr/>
+                    <a:lstStyle/>
+                    <a:p>
+                      <a:pPr algn="ctr"/>
+                      <a:r>
+                        <a:rPr sz="1400" b="0">
+                          <a:solidFill>
+                            <a:srgbClr val="222222"/>
+                          </a:solidFill>
+                          <a:latin typeface="맑은 고딕"/>
+                        </a:rPr>
+                        <a:t>0.991</a:t>
+                      </a:r>
+                    </a:p>
+                  </a:txBody>
+                  <a:tcPr anchor="ctr" marL="54864" marR="54864">
+                    <a:solidFill>
+                      <a:srgbClr val="F2F5FA"/>
+                    </a:solidFill>
+                  </a:tcPr>
+                </a:tc>
+                <a:tc>
+                  <a:txBody>
+                    <a:bodyPr/>
+                    <a:lstStyle/>
+                    <a:p>
+                      <a:pPr algn="ctr"/>
+                      <a:r>
+                        <a:rPr sz="1400" b="0">
+                          <a:solidFill>
+                            <a:srgbClr val="222222"/>
+                          </a:solidFill>
+                          <a:latin typeface="맑은 고딕"/>
+                        </a:rPr>
+                        <a:t>0.642 / 0.314</a:t>
+                      </a:r>
+                    </a:p>
+                  </a:txBody>
+                  <a:tcPr anchor="ctr" marL="54864" marR="54864">
+                    <a:solidFill>
+                      <a:srgbClr val="F2F5FA"/>
+                    </a:solidFill>
+                  </a:tcPr>
+                </a:tc>
+                <a:tc>
+                  <a:txBody>
+                    <a:bodyPr/>
+                    <a:lstStyle/>
+                    <a:p>
+                      <a:pPr algn="ctr"/>
+                      <a:r>
+                        <a:rPr sz="1400" b="0">
+                          <a:solidFill>
+                            <a:srgbClr val="222222"/>
+                          </a:solidFill>
+                          <a:latin typeface="맑은 고딕"/>
+                        </a:rPr>
+                        <a:t>4.1%</a:t>
+                      </a:r>
+                    </a:p>
+                  </a:txBody>
+                  <a:tcPr anchor="ctr" marL="54864" marR="54864">
+                    <a:solidFill>
+                      <a:srgbClr val="F2F5FA"/>
+                    </a:solidFill>
+                  </a:tcPr>
+                </a:tc>
+                <a:tc>
+                  <a:txBody>
+                    <a:bodyPr/>
+                    <a:lstStyle/>
+                    <a:p>
+                      <a:pPr algn="ctr"/>
+                      <a:r>
+                        <a:rPr sz="1400" b="0">
+                          <a:solidFill>
+                            <a:srgbClr val="222222"/>
+                          </a:solidFill>
+                          <a:latin typeface="맑은 고딕"/>
+                        </a:rPr>
+                        <a:t>0.501</a:t>
+                      </a:r>
+                    </a:p>
+                  </a:txBody>
+                  <a:tcPr anchor="ctr" marL="54864" marR="54864">
+                    <a:solidFill>
+                      <a:srgbClr val="F2F5FA"/>
+                    </a:solidFill>
+                  </a:tcPr>
+                </a:tc>
+                <a:tc>
+                  <a:txBody>
+                    <a:bodyPr/>
+                    <a:lstStyle/>
+                    <a:p>
+                      <a:pPr algn="ctr"/>
+                      <a:r>
+                        <a:rPr sz="1400" b="0">
+                          <a:solidFill>
+                            <a:srgbClr val="222222"/>
+                          </a:solidFill>
+                          <a:latin typeface="맑은 고딕"/>
+                        </a:rPr>
+                        <a:t>62%</a:t>
+                      </a:r>
+                    </a:p>
+                  </a:txBody>
+                  <a:tcPr anchor="ctr" marL="54864" marR="54864">
+                    <a:solidFill>
+                      <a:srgbClr val="F2F5FA"/>
+                    </a:solidFill>
+                  </a:tcPr>
+                </a:tc>
+                <a:tc>
+                  <a:txBody>
+                    <a:bodyPr/>
+                    <a:lstStyle/>
+                    <a:p>
+                      <a:pPr algn="ctr"/>
+                      <a:r>
+                        <a:rPr sz="1400" b="0">
+                          <a:solidFill>
+                            <a:srgbClr val="222222"/>
+                          </a:solidFill>
+                          <a:latin typeface="맑은 고딕"/>
+                        </a:rPr>
+                        <a:t>2.5M</a:t>
+                      </a:r>
+                    </a:p>
+                  </a:txBody>
+                  <a:tcPr anchor="ctr" marL="54864" marR="54864">
+                    <a:solidFill>
+                      <a:srgbClr val="F2F5FA"/>
+                    </a:solidFill>
+                  </a:tcPr>
+                </a:tc>
+              </a:tr>
+              <a:tr h="566928">
+                <a:tc>
+                  <a:txBody>
+                    <a:bodyPr/>
+                    <a:lstStyle/>
+                    <a:p>
+                      <a:pPr algn="l"/>
+                      <a:r>
+                        <a:rPr sz="1400" b="0">
+                          <a:solidFill>
+                            <a:srgbClr val="222222"/>
+                          </a:solidFill>
+                          <a:latin typeface="맑은 고딕"/>
+                        </a:rPr>
+                        <a:t>YOLOv3-tiny</a:t>
+                      </a:r>
+                    </a:p>
+                  </a:txBody>
+                  <a:tcPr anchor="ctr" marL="54864" marR="54864">
+                    <a:solidFill>
+                      <a:srgbClr val="FFFFFF"/>
+                    </a:solidFill>
+                  </a:tcPr>
+                </a:tc>
+                <a:tc>
+                  <a:txBody>
+                    <a:bodyPr/>
+                    <a:lstStyle/>
+                    <a:p>
+                      <a:pPr algn="ctr"/>
+                      <a:r>
+                        <a:rPr sz="1400" b="0">
+                          <a:solidFill>
+                            <a:srgbClr val="222222"/>
+                          </a:solidFill>
+                          <a:latin typeface="맑은 고딕"/>
+                        </a:rPr>
+                        <a:t>0.989</a:t>
+                      </a:r>
+                    </a:p>
+                  </a:txBody>
+                  <a:tcPr anchor="ctr" marL="54864" marR="54864">
+                    <a:solidFill>
+                      <a:srgbClr val="FFFFFF"/>
+                    </a:solidFill>
+                  </a:tcPr>
+                </a:tc>
+                <a:tc>
+                  <a:txBody>
+                    <a:bodyPr/>
+                    <a:lstStyle/>
+                    <a:p>
+                      <a:pPr algn="ctr"/>
+                      <a:r>
+                        <a:rPr sz="1400" b="0">
+                          <a:solidFill>
+                            <a:srgbClr val="222222"/>
+                          </a:solidFill>
+                          <a:latin typeface="맑은 고딕"/>
+                        </a:rPr>
+                        <a:t>0.579 / 0.311</a:t>
+                      </a:r>
+                    </a:p>
+                  </a:txBody>
+                  <a:tcPr anchor="ctr" marL="54864" marR="54864">
+                    <a:solidFill>
+                      <a:srgbClr val="FFFFFF"/>
+                    </a:solidFill>
+                  </a:tcPr>
+                </a:tc>
+                <a:tc>
+                  <a:txBody>
+                    <a:bodyPr/>
+                    <a:lstStyle/>
+                    <a:p>
+                      <a:pPr algn="ctr"/>
+                      <a:r>
+                        <a:rPr sz="1400" b="0">
+                          <a:solidFill>
+                            <a:srgbClr val="222222"/>
+                          </a:solidFill>
+                          <a:latin typeface="맑은 고딕"/>
+                        </a:rPr>
+                        <a:t>38.5%</a:t>
+                      </a:r>
+                    </a:p>
+                  </a:txBody>
+                  <a:tcPr anchor="ctr" marL="54864" marR="54864">
+                    <a:solidFill>
+                      <a:srgbClr val="FFFFFF"/>
+                    </a:solidFill>
+                  </a:tcPr>
+                </a:tc>
+                <a:tc>
+                  <a:txBody>
+                    <a:bodyPr/>
+                    <a:lstStyle/>
+                    <a:p>
+                      <a:pPr algn="ctr"/>
+                      <a:r>
+                        <a:rPr sz="1400" b="0">
+                          <a:solidFill>
+                            <a:srgbClr val="222222"/>
+                          </a:solidFill>
+                          <a:latin typeface="맑은 고딕"/>
+                        </a:rPr>
+                        <a:t>0.515</a:t>
+                      </a:r>
+                    </a:p>
+                  </a:txBody>
+                  <a:tcPr anchor="ctr" marL="54864" marR="54864">
+                    <a:solidFill>
+                      <a:srgbClr val="FFFFFF"/>
+                    </a:solidFill>
+                  </a:tcPr>
+                </a:tc>
+                <a:tc>
+                  <a:txBody>
+                    <a:bodyPr/>
+                    <a:lstStyle/>
+                    <a:p>
+                      <a:pPr algn="ctr"/>
+                      <a:r>
+                        <a:rPr sz="1400" b="0">
+                          <a:solidFill>
+                            <a:srgbClr val="222222"/>
+                          </a:solidFill>
+                          <a:latin typeface="맑은 고딕"/>
+                        </a:rPr>
+                        <a:t>70%</a:t>
+                      </a:r>
+                    </a:p>
+                  </a:txBody>
+                  <a:tcPr anchor="ctr" marL="54864" marR="54864">
+                    <a:solidFill>
+                      <a:srgbClr val="FFFFFF"/>
+                    </a:solidFill>
+                  </a:tcPr>
+                </a:tc>
+                <a:tc>
+                  <a:txBody>
+                    <a:bodyPr/>
+                    <a:lstStyle/>
+                    <a:p>
+                      <a:pPr algn="ctr"/>
+                      <a:r>
+                        <a:rPr sz="1400" b="0">
+                          <a:solidFill>
+                            <a:srgbClr val="222222"/>
+                          </a:solidFill>
+                          <a:latin typeface="맑은 고딕"/>
+                        </a:rPr>
+                        <a:t>8.7M</a:t>
+                      </a:r>
+                    </a:p>
+                  </a:txBody>
+                  <a:tcPr anchor="ctr" marL="54864" marR="54864">
+                    <a:solidFill>
+                      <a:srgbClr val="FFFFFF"/>
+                    </a:solidFill>
+                  </a:tcPr>
+                </a:tc>
+              </a:tr>
+              <a:tr h="566928">
+                <a:tc>
+                  <a:txBody>
+                    <a:bodyPr/>
+                    <a:lstStyle/>
+                    <a:p>
+                      <a:pPr algn="l"/>
+                      <a:r>
+                        <a:rPr sz="1400" b="0">
+                          <a:solidFill>
+                            <a:srgbClr val="222222"/>
+                          </a:solidFill>
+                          <a:latin typeface="맑은 고딕"/>
+                        </a:rPr>
+                        <a:t>Faster R-CNN MobileNetV3</a:t>
+                      </a:r>
+                    </a:p>
+                  </a:txBody>
+                  <a:tcPr anchor="ctr" marL="54864" marR="54864">
+                    <a:solidFill>
+                      <a:srgbClr val="F2F5FA"/>
+                    </a:solidFill>
+                  </a:tcPr>
+                </a:tc>
+                <a:tc>
+                  <a:txBody>
+                    <a:bodyPr/>
+                    <a:lstStyle/>
+                    <a:p>
+                      <a:pPr algn="ctr"/>
+                      <a:r>
+                        <a:rPr sz="1400" b="0">
+                          <a:solidFill>
+                            <a:srgbClr val="222222"/>
+                          </a:solidFill>
+                          <a:latin typeface="맑은 고딕"/>
+                        </a:rPr>
+                        <a:t>0.986</a:t>
+                      </a:r>
+                    </a:p>
+                  </a:txBody>
+                  <a:tcPr anchor="ctr" marL="54864" marR="54864">
+                    <a:solidFill>
+                      <a:srgbClr val="F2F5FA"/>
+                    </a:solidFill>
+                  </a:tcPr>
+                </a:tc>
+                <a:tc>
+                  <a:txBody>
+                    <a:bodyPr/>
+                    <a:lstStyle/>
+                    <a:p>
+                      <a:pPr algn="ctr"/>
+                      <a:r>
+                        <a:rPr sz="1400" b="0">
+                          <a:solidFill>
+                            <a:srgbClr val="222222"/>
+                          </a:solidFill>
+                          <a:latin typeface="맑은 고딕"/>
+                        </a:rPr>
+                        <a:t>0.583 / 0.322</a:t>
+                      </a:r>
+                    </a:p>
+                  </a:txBody>
+                  <a:tcPr anchor="ctr" marL="54864" marR="54864">
+                    <a:solidFill>
+                      <a:srgbClr val="F2F5FA"/>
+                    </a:solidFill>
+                  </a:tcPr>
+                </a:tc>
+                <a:tc>
+                  <a:txBody>
+                    <a:bodyPr/>
+                    <a:lstStyle/>
+                    <a:p>
+                      <a:pPr algn="ctr"/>
+                      <a:r>
+                        <a:rPr sz="1400" b="0">
+                          <a:solidFill>
+                            <a:srgbClr val="222222"/>
+                          </a:solidFill>
+                          <a:latin typeface="맑은 고딕"/>
+                        </a:rPr>
+                        <a:t>64.0%</a:t>
+                      </a:r>
+                    </a:p>
+                  </a:txBody>
+                  <a:tcPr anchor="ctr" marL="54864" marR="54864">
+                    <a:solidFill>
+                      <a:srgbClr val="F2F5FA"/>
+                    </a:solidFill>
+                  </a:tcPr>
+                </a:tc>
+                <a:tc>
+                  <a:txBody>
+                    <a:bodyPr/>
+                    <a:lstStyle/>
+                    <a:p>
+                      <a:pPr algn="ctr"/>
+                      <a:r>
+                        <a:rPr sz="1400" b="0">
+                          <a:solidFill>
+                            <a:srgbClr val="222222"/>
+                          </a:solidFill>
+                          <a:latin typeface="맑은 고딕"/>
+                        </a:rPr>
+                        <a:t>0.262</a:t>
+                      </a:r>
+                    </a:p>
+                  </a:txBody>
+                  <a:tcPr anchor="ctr" marL="54864" marR="54864">
+                    <a:solidFill>
+                      <a:srgbClr val="F2F5FA"/>
+                    </a:solidFill>
+                  </a:tcPr>
+                </a:tc>
+                <a:tc>
+                  <a:txBody>
+                    <a:bodyPr/>
+                    <a:lstStyle/>
+                    <a:p>
+                      <a:pPr algn="ctr"/>
+                      <a:r>
+                        <a:rPr sz="1400" b="0">
+                          <a:solidFill>
+                            <a:srgbClr val="222222"/>
+                          </a:solidFill>
+                          <a:latin typeface="맑은 고딕"/>
+                        </a:rPr>
+                        <a:t>4%</a:t>
+                      </a:r>
+                    </a:p>
+                  </a:txBody>
+                  <a:tcPr anchor="ctr" marL="54864" marR="54864">
+                    <a:solidFill>
+                      <a:srgbClr val="F2F5FA"/>
+                    </a:solidFill>
+                  </a:tcPr>
+                </a:tc>
+                <a:tc>
+                  <a:txBody>
+                    <a:bodyPr/>
+                    <a:lstStyle/>
+                    <a:p>
+                      <a:pPr algn="ctr"/>
+                      <a:r>
+                        <a:rPr sz="1400" b="0">
+                          <a:solidFill>
+                            <a:srgbClr val="222222"/>
+                          </a:solidFill>
+                          <a:latin typeface="맑은 고딕"/>
+                        </a:rPr>
+                        <a:t>19.0M</a:t>
+                      </a:r>
+                    </a:p>
+                  </a:txBody>
+                  <a:tcPr anchor="ctr" marL="54864" marR="54864">
+                    <a:solidFill>
+                      <a:srgbClr val="F2F5FA"/>
+                    </a:solidFill>
+                  </a:tcPr>
+                </a:tc>
+              </a:tr>
+            </a:tbl>
+          </a:graphicData>
+        </a:graphic>
+      </p:graphicFrame>
       <p:sp>
         <p:nvSpPr>
           <p:cNvPr id="8" name="TextBox 7"/>
@@ -13410,8 +13463,8 @@
         </p:nvSpPr>
         <p:spPr>
           <a:xfrm>
-            <a:off x="8229600" y="1691640"/>
-            <a:ext cx="3657600" cy="3017520"/>
+            <a:off x="548640" y="5806440"/>
+            <a:ext cx="10972800" cy="822960"/>
           </a:xfrm>
           <a:prstGeom prst="rect">
             <a:avLst/>
@@ -13426,7 +13479,7 @@
           <a:p>
             <a:pPr>
               <a:spcAft>
-                <a:spcPts val="800"/>
+                <a:spcPts val="600"/>
               </a:spcAft>
             </a:pPr>
             <a:r>
@@ -13439,251 +13492,13 @@
               <a:t>• </a:t>
             </a:r>
             <a:r>
-              <a:rPr sz="1400" b="1">
-                <a:solidFill>
-                  <a:srgbClr val="222222"/>
-                </a:solidFill>
-                <a:latin typeface="맑은 고딕"/>
-              </a:rPr>
-              <a:t>약점</a:t>
-            </a:r>
-            <a:r>
               <a:rPr sz="1400" b="0">
                 <a:solidFill>
                   <a:srgbClr val="222222"/>
                 </a:solidFill>
                 <a:latin typeface="맑은 고딕"/>
               </a:rPr>
-              <a:t>: 노이즈 보간 오경보 49%, 신뢰도가 0.9 근처에서 포화</a:t>
-            </a:r>
-          </a:p>
-          <a:p>
-            <a:pPr>
-              <a:spcAft>
-                <a:spcPts val="800"/>
-              </a:spcAft>
-            </a:pPr>
-            <a:r>
-              <a:rPr sz="1400" b="1">
-                <a:solidFill>
-                  <a:srgbClr val="2AA7B8"/>
-                </a:solidFill>
-                <a:latin typeface="맑은 고딕"/>
-              </a:rPr>
-              <a:t>• </a:t>
-            </a:r>
-            <a:r>
-              <a:rPr sz="1400" b="1">
-                <a:solidFill>
-                  <a:srgbClr val="222222"/>
-                </a:solidFill>
-                <a:latin typeface="맑은 고딕"/>
-              </a:rPr>
-              <a:t>대안</a:t>
-            </a:r>
-            <a:r>
-              <a:rPr sz="1400" b="0">
-                <a:solidFill>
-                  <a:srgbClr val="222222"/>
-                </a:solidFill>
-                <a:latin typeface="맑은 고딕"/>
-              </a:rPr>
-              <a:t>: 오경보 우선이면 R50 / YOLO26n, CPU 전용이면 YOLOv3-tiny</a:t>
-            </a:r>
-          </a:p>
-          <a:p>
-            <a:pPr>
-              <a:spcAft>
-                <a:spcPts val="800"/>
-              </a:spcAft>
-            </a:pPr>
-            <a:r>
-              <a:rPr sz="1400" b="1">
-                <a:solidFill>
-                  <a:srgbClr val="2AA7B8"/>
-                </a:solidFill>
-                <a:latin typeface="맑은 고딕"/>
-              </a:rPr>
-              <a:t>• </a:t>
-            </a:r>
-            <a:r>
-              <a:rPr sz="1400" b="0">
-                <a:solidFill>
-                  <a:srgbClr val="222222"/>
-                </a:solidFill>
-                <a:latin typeface="맑은 고딕"/>
-              </a:rPr>
-              <a:t>'미탐지 우선'은 </a:t>
-            </a:r>
-            <a:r>
-              <a:rPr sz="1400" b="1">
-                <a:solidFill>
-                  <a:srgbClr val="222222"/>
-                </a:solidFill>
-                <a:latin typeface="맑은 고딕"/>
-              </a:rPr>
-              <a:t>결과를 본 뒤 정한 우선순위</a:t>
-            </a:r>
-            <a:r>
-              <a:rPr sz="1400" b="0">
-                <a:solidFill>
-                  <a:srgbClr val="222222"/>
-                </a:solidFill>
-                <a:latin typeface="맑은 고딕"/>
-              </a:rPr>
-              <a:t>라 보고서에 그대로 밝힌다</a:t>
-            </a:r>
-          </a:p>
-        </p:txBody>
-      </p:sp>
-      <p:sp>
-        <p:nvSpPr>
-          <p:cNvPr id="9" name="TextBox 8"/>
-          <p:cNvSpPr txBox="1"/>
-          <p:nvPr/>
-        </p:nvSpPr>
-        <p:spPr>
-          <a:xfrm>
-            <a:off x="548640" y="4663440"/>
-            <a:ext cx="11155680" cy="2011680"/>
-          </a:xfrm>
-          <a:prstGeom prst="rect">
-            <a:avLst/>
-          </a:prstGeom>
-          <a:noFill/>
-        </p:spPr>
-        <p:txBody>
-          <a:bodyPr wrap="square" lIns="45720" rIns="45720">
-            <a:spAutoFit/>
-          </a:bodyPr>
-          <a:lstStyle/>
-          <a:p>
-            <a:pPr>
-              <a:spcAft>
-                <a:spcPts val="500"/>
-              </a:spcAft>
-            </a:pPr>
-            <a:r>
-              <a:rPr sz="1400" b="1">
-                <a:solidFill>
-                  <a:srgbClr val="2AA7B8"/>
-                </a:solidFill>
-                <a:latin typeface="맑은 고딕"/>
-              </a:rPr>
-              <a:t>• </a:t>
-            </a:r>
-            <a:r>
-              <a:rPr sz="1400" b="1">
-                <a:solidFill>
-                  <a:srgbClr val="222222"/>
-                </a:solidFill>
-                <a:latin typeface="맑은 고딕"/>
-              </a:rPr>
-              <a:t>① val mAP50-95</a:t>
-            </a:r>
-            <a:r>
-              <a:rPr sz="1400" b="0">
-                <a:solidFill>
-                  <a:srgbClr val="222222"/>
-                </a:solidFill>
-                <a:latin typeface="맑은 고딕"/>
-              </a:rPr>
-              <a:t>: val 이미지 복원추출 1,000회로 비교하니 </a:t>
-            </a:r>
-            <a:r>
-              <a:rPr sz="1400" b="1">
-                <a:solidFill>
-                  <a:srgbClr val="222222"/>
-                </a:solidFill>
-                <a:latin typeface="맑은 고딕"/>
-              </a:rPr>
-              <a:t>RT-DETR-l 0.662와 D-FINE-N 0.655가 동률 선두</a:t>
-            </a:r>
-            <a:r>
-              <a:rPr sz="1400" b="0">
-                <a:solidFill>
-                  <a:srgbClr val="222222"/>
-                </a:solidFill>
-                <a:latin typeface="맑은 고딕"/>
-              </a:rPr>
-              <a:t>(차이 −0.008, 95% 구간 −0.016~0.000). R50·YOLO26n은 유의하게 낮고, 공식 라벨만 보면 R50도 동률</a:t>
-            </a:r>
-          </a:p>
-          <a:p>
-            <a:pPr>
-              <a:spcAft>
-                <a:spcPts val="500"/>
-              </a:spcAft>
-            </a:pPr>
-            <a:r>
-              <a:rPr sz="1400" b="1">
-                <a:solidFill>
-                  <a:srgbClr val="2AA7B8"/>
-                </a:solidFill>
-                <a:latin typeface="맑은 고딕"/>
-              </a:rPr>
-              <a:t>• </a:t>
-            </a:r>
-            <a:r>
-              <a:rPr sz="1400" b="1">
-                <a:solidFill>
-                  <a:srgbClr val="222222"/>
-                </a:solidFill>
-                <a:latin typeface="맑은 고딕"/>
-              </a:rPr>
-              <a:t>② 동률이면 강건성</a:t>
-            </a:r>
-            <a:r>
-              <a:rPr sz="1400" b="0">
-                <a:solidFill>
-                  <a:srgbClr val="222222"/>
-                </a:solidFill>
-                <a:latin typeface="맑은 고딕"/>
-              </a:rPr>
-              <a:t>: 합성 점 AP와 3호기 검출은 D-FINE-N 우세(0.574 대 0.451, 89% 대 61%), 가짜 정상 오경보는 RT-DETR-l 우세(37% 대 49%) → 놓침이 더 비싸다고 보아 </a:t>
-            </a:r>
-            <a:r>
-              <a:rPr sz="1400" b="1">
-                <a:solidFill>
-                  <a:srgbClr val="222222"/>
-                </a:solidFill>
-                <a:latin typeface="맑은 고딕"/>
-              </a:rPr>
-              <a:t>미탐지를 우선</a:t>
-            </a:r>
-          </a:p>
-          <a:p>
-            <a:pPr>
-              <a:spcAft>
-                <a:spcPts val="500"/>
-              </a:spcAft>
-            </a:pPr>
-            <a:r>
-              <a:rPr sz="1400" b="1">
-                <a:solidFill>
-                  <a:srgbClr val="2AA7B8"/>
-                </a:solidFill>
-                <a:latin typeface="맑은 고딕"/>
-              </a:rPr>
-              <a:t>• </a:t>
-            </a:r>
-            <a:r>
-              <a:rPr sz="1400" b="1">
-                <a:solidFill>
-                  <a:srgbClr val="222222"/>
-                </a:solidFill>
-                <a:latin typeface="맑은 고딕"/>
-              </a:rPr>
-              <a:t>③ 크기</a:t>
-            </a:r>
-            <a:r>
-              <a:rPr sz="1400" b="0">
-                <a:solidFill>
-                  <a:srgbClr val="222222"/>
-                </a:solidFill>
-                <a:latin typeface="맑은 고딕"/>
-              </a:rPr>
-              <a:t>: 3.7M(15MB)로 RT-DETR-l(32.8M)의 약 1/9</a:t>
+              <a:t>점 제거는 6개 모델 모두 0~3개만 남아 차이가 없다. test F1은 모두 포화다.</a:t>
             </a:r>
           </a:p>
         </p:txBody>
@@ -13779,7 +13594,7 @@
                 </a:solidFill>
                 <a:latin typeface="맑은 고딕"/>
               </a:rPr>
-              <a:t>현장 활용: 3단 판정과 재검사 구간</a:t>
+              <a:t>베스트 모델: D-FINE-N</a:t>
             </a:r>
           </a:p>
         </p:txBody>
@@ -13814,7 +13629,7 @@
                 </a:solidFill>
                 <a:latin typeface="맑은 고딕"/>
               </a:rPr>
-              <a:t>실제 test에서는 결함 369장(≥0.748)과 빈 라벨 27장(≤0.04)이 완전히 갈린다</a:t>
+              <a:t>val 동률 선두 + 미탐지 강건성 최상 + 작다(3.7M)</a:t>
             </a:r>
           </a:p>
         </p:txBody>
@@ -13884,14 +13699,14 @@
                 </a:solidFill>
                 <a:latin typeface="맑은 고딕"/>
               </a:rPr>
-              <a:t>재검사 구간의 효과는 합성·가짜 정상에 기반한 참고 수치다. 재검사·놓침 비용은 현장 값을 몰라 가정하지 않았다.</a:t>
+              <a:t>선정 기준 ①②③은 팀원 모델 추가 전에 정했다. '미탐지 우선'은 결과를 본 뒤 정한 우선순위다. 상세는 docs/analysis.md 5절.</a:t>
             </a:r>
           </a:p>
         </p:txBody>
       </p:sp>
       <p:pic>
         <p:nvPicPr>
-          <p:cNvPr id="7" name="Picture 6" descr="fig4b_final_dfine.png"/>
+          <p:cNvPr id="7" name="Picture 6" descr="fig5e_select_ci.png"/>
           <p:cNvPicPr>
             <a:picLocks noChangeAspect="1"/>
           </p:cNvPicPr>
@@ -13905,8 +13720,8 @@
         </p:blipFill>
         <p:spPr>
           <a:xfrm>
-            <a:off x="1687794" y="1508760"/>
-            <a:ext cx="8785931" cy="3246120"/>
+            <a:off x="274320" y="1590775"/>
+            <a:ext cx="7863840" cy="2899209"/>
           </a:xfrm>
           <a:prstGeom prst="rect">
             <a:avLst/>
@@ -13921,8 +13736,8 @@
         </p:nvSpPr>
         <p:spPr>
           <a:xfrm>
-            <a:off x="731520" y="4846320"/>
-            <a:ext cx="10789920" cy="1463040"/>
+            <a:off x="8229600" y="1691640"/>
+            <a:ext cx="3657600" cy="3017520"/>
           </a:xfrm>
           <a:prstGeom prst="rect">
             <a:avLst/>
@@ -13937,11 +13752,11 @@
           <a:p>
             <a:pPr>
               <a:spcAft>
-                <a:spcPts val="600"/>
+                <a:spcPts val="800"/>
               </a:spcAft>
             </a:pPr>
             <a:r>
-              <a:rPr sz="1600" b="1">
+              <a:rPr sz="1400" b="1">
                 <a:solidFill>
                   <a:srgbClr val="2AA7B8"/>
                 </a:solidFill>
@@ -13950,68 +13765,32 @@
               <a:t>• </a:t>
             </a:r>
             <a:r>
-              <a:rPr sz="1600" b="1">
-                <a:solidFill>
-                  <a:srgbClr val="222222"/>
-                </a:solidFill>
-                <a:latin typeface="맑은 고딕"/>
-              </a:rPr>
-              <a:t>불합격</a:t>
-            </a:r>
-            <a:r>
-              <a:rPr sz="1600" b="0">
-                <a:solidFill>
-                  <a:srgbClr val="222222"/>
-                </a:solidFill>
-                <a:latin typeface="맑은 고딕"/>
-              </a:rPr>
-              <a:t> 최고 신뢰도 ≥ 0.66(val 임계값)  |  </a:t>
-            </a:r>
-            <a:r>
-              <a:rPr sz="1600" b="1">
-                <a:solidFill>
-                  <a:srgbClr val="222222"/>
-                </a:solidFill>
-                <a:latin typeface="맑은 고딕"/>
-              </a:rPr>
-              <a:t>재검사</a:t>
-            </a:r>
-            <a:r>
-              <a:rPr sz="1600" b="0">
-                <a:solidFill>
-                  <a:srgbClr val="222222"/>
-                </a:solidFill>
-                <a:latin typeface="맑은 고딕"/>
-              </a:rPr>
-              <a:t> 0.3 ~ 0.66  |  </a:t>
-            </a:r>
-            <a:r>
-              <a:rPr sz="1600" b="1">
-                <a:solidFill>
-                  <a:srgbClr val="222222"/>
-                </a:solidFill>
-                <a:latin typeface="맑은 고딕"/>
-              </a:rPr>
-              <a:t>합격</a:t>
-            </a:r>
-            <a:r>
-              <a:rPr sz="1600" b="0">
-                <a:solidFill>
-                  <a:srgbClr val="222222"/>
-                </a:solidFill>
-                <a:latin typeface="맑은 고딕"/>
-              </a:rPr>
-              <a:t> &lt; 0.3</a:t>
+              <a:rPr sz="1400" b="1">
+                <a:solidFill>
+                  <a:srgbClr val="222222"/>
+                </a:solidFill>
+                <a:latin typeface="맑은 고딕"/>
+              </a:rPr>
+              <a:t>약점</a:t>
+            </a:r>
+            <a:r>
+              <a:rPr sz="1400" b="0">
+                <a:solidFill>
+                  <a:srgbClr val="222222"/>
+                </a:solidFill>
+                <a:latin typeface="맑은 고딕"/>
+              </a:rPr>
+              <a:t>: 노이즈 보간 오경보 49%, 신뢰도가 0.9 근처에서 포화</a:t>
             </a:r>
           </a:p>
           <a:p>
             <a:pPr>
               <a:spcAft>
-                <a:spcPts val="600"/>
+                <a:spcPts val="800"/>
               </a:spcAft>
             </a:pPr>
             <a:r>
-              <a:rPr sz="1600" b="1">
+              <a:rPr sz="1400" b="1">
                 <a:solidFill>
                   <a:srgbClr val="2AA7B8"/>
                 </a:solidFill>
@@ -14020,23 +13799,32 @@
               <a:t>• </a:t>
             </a:r>
             <a:r>
-              <a:rPr sz="1600" b="0">
-                <a:solidFill>
-                  <a:srgbClr val="222222"/>
-                </a:solidFill>
-                <a:latin typeface="맑은 고딕"/>
-              </a:rPr>
-              <a:t>하한을 0.3으로 낮추면 옅은 점 검출 61.9% → 67.1%, 대신 가짜 정상 오경보 4.1% → 5.7%(평균 보간), 49% → 59%(노이즈 보간)</a:t>
+              <a:rPr sz="1400" b="1">
+                <a:solidFill>
+                  <a:srgbClr val="222222"/>
+                </a:solidFill>
+                <a:latin typeface="맑은 고딕"/>
+              </a:rPr>
+              <a:t>대안</a:t>
+            </a:r>
+            <a:r>
+              <a:rPr sz="1400" b="0">
+                <a:solidFill>
+                  <a:srgbClr val="222222"/>
+                </a:solidFill>
+                <a:latin typeface="맑은 고딕"/>
+              </a:rPr>
+              <a:t>: 오경보 우선이면 R50 / YOLO26n, CPU 전용이면 YOLOv3-tiny</a:t>
             </a:r>
           </a:p>
           <a:p>
             <a:pPr>
               <a:spcAft>
-                <a:spcPts val="600"/>
+                <a:spcPts val="800"/>
               </a:spcAft>
             </a:pPr>
             <a:r>
-              <a:rPr sz="1600" b="1">
+              <a:rPr sz="1400" b="1">
                 <a:solidFill>
                   <a:srgbClr val="2AA7B8"/>
                 </a:solidFill>
@@ -14045,13 +13833,183 @@
               <a:t>• </a:t>
             </a:r>
             <a:r>
-              <a:rPr sz="1600" b="0">
-                <a:solidFill>
-                  <a:srgbClr val="222222"/>
-                </a:solidFill>
-                <a:latin typeface="맑은 고딕"/>
-              </a:rPr>
-              <a:t>오경보가 비싼 현장은 재검사 구간의 이득이 작다</a:t>
+              <a:rPr sz="1400" b="0">
+                <a:solidFill>
+                  <a:srgbClr val="222222"/>
+                </a:solidFill>
+                <a:latin typeface="맑은 고딕"/>
+              </a:rPr>
+              <a:t>'미탐지 우선'은 </a:t>
+            </a:r>
+            <a:r>
+              <a:rPr sz="1400" b="1">
+                <a:solidFill>
+                  <a:srgbClr val="222222"/>
+                </a:solidFill>
+                <a:latin typeface="맑은 고딕"/>
+              </a:rPr>
+              <a:t>결과를 본 뒤 정한 우선순위</a:t>
+            </a:r>
+            <a:r>
+              <a:rPr sz="1400" b="0">
+                <a:solidFill>
+                  <a:srgbClr val="222222"/>
+                </a:solidFill>
+                <a:latin typeface="맑은 고딕"/>
+              </a:rPr>
+              <a:t>라 보고서에 그대로 밝힌다</a:t>
+            </a:r>
+          </a:p>
+        </p:txBody>
+      </p:sp>
+      <p:sp>
+        <p:nvSpPr>
+          <p:cNvPr id="9" name="TextBox 8"/>
+          <p:cNvSpPr txBox="1"/>
+          <p:nvPr/>
+        </p:nvSpPr>
+        <p:spPr>
+          <a:xfrm>
+            <a:off x="548640" y="4663440"/>
+            <a:ext cx="11155680" cy="2011680"/>
+          </a:xfrm>
+          <a:prstGeom prst="rect">
+            <a:avLst/>
+          </a:prstGeom>
+          <a:noFill/>
+        </p:spPr>
+        <p:txBody>
+          <a:bodyPr wrap="square" lIns="45720" rIns="45720">
+            <a:spAutoFit/>
+          </a:bodyPr>
+          <a:lstStyle/>
+          <a:p>
+            <a:pPr>
+              <a:spcAft>
+                <a:spcPts val="500"/>
+              </a:spcAft>
+            </a:pPr>
+            <a:r>
+              <a:rPr sz="1400" b="1">
+                <a:solidFill>
+                  <a:srgbClr val="2AA7B8"/>
+                </a:solidFill>
+                <a:latin typeface="맑은 고딕"/>
+              </a:rPr>
+              <a:t>• </a:t>
+            </a:r>
+            <a:r>
+              <a:rPr sz="1400" b="1">
+                <a:solidFill>
+                  <a:srgbClr val="222222"/>
+                </a:solidFill>
+                <a:latin typeface="맑은 고딕"/>
+              </a:rPr>
+              <a:t>① val mAP50-95</a:t>
+            </a:r>
+            <a:r>
+              <a:rPr sz="1400" b="0">
+                <a:solidFill>
+                  <a:srgbClr val="222222"/>
+                </a:solidFill>
+                <a:latin typeface="맑은 고딕"/>
+              </a:rPr>
+              <a:t>: val 이미지 복원추출 1,000회로 비교하니 </a:t>
+            </a:r>
+            <a:r>
+              <a:rPr sz="1400" b="1">
+                <a:solidFill>
+                  <a:srgbClr val="222222"/>
+                </a:solidFill>
+                <a:latin typeface="맑은 고딕"/>
+              </a:rPr>
+              <a:t>RT-DETR-l 0.662와 D-FINE-N 0.655가 동률 선두</a:t>
+            </a:r>
+            <a:r>
+              <a:rPr sz="1400" b="0">
+                <a:solidFill>
+                  <a:srgbClr val="222222"/>
+                </a:solidFill>
+                <a:latin typeface="맑은 고딕"/>
+              </a:rPr>
+              <a:t>(차이 −0.008, 95% 구간 −0.016~0.000). R50·YOLO26n은 유의하게 낮고, 공식 라벨만 보면 R50도 동률</a:t>
+            </a:r>
+          </a:p>
+          <a:p>
+            <a:pPr>
+              <a:spcAft>
+                <a:spcPts val="500"/>
+              </a:spcAft>
+            </a:pPr>
+            <a:r>
+              <a:rPr sz="1400" b="1">
+                <a:solidFill>
+                  <a:srgbClr val="2AA7B8"/>
+                </a:solidFill>
+                <a:latin typeface="맑은 고딕"/>
+              </a:rPr>
+              <a:t>• </a:t>
+            </a:r>
+            <a:r>
+              <a:rPr sz="1400" b="1">
+                <a:solidFill>
+                  <a:srgbClr val="222222"/>
+                </a:solidFill>
+                <a:latin typeface="맑은 고딕"/>
+              </a:rPr>
+              <a:t>② 동률이면 강건성</a:t>
+            </a:r>
+            <a:r>
+              <a:rPr sz="1400" b="0">
+                <a:solidFill>
+                  <a:srgbClr val="222222"/>
+                </a:solidFill>
+                <a:latin typeface="맑은 고딕"/>
+              </a:rPr>
+              <a:t>: 합성 점 AP와 3호기 검출은 D-FINE-N 우세(0.574 대 0.451, 89% 대 61%), 가짜 정상 오경보는 RT-DETR-l 우세(37% 대 49%) → 놓침이 더 비싸다고 보아 </a:t>
+            </a:r>
+            <a:r>
+              <a:rPr sz="1400" b="1">
+                <a:solidFill>
+                  <a:srgbClr val="222222"/>
+                </a:solidFill>
+                <a:latin typeface="맑은 고딕"/>
+              </a:rPr>
+              <a:t>미탐지를 우선</a:t>
+            </a:r>
+          </a:p>
+          <a:p>
+            <a:pPr>
+              <a:spcAft>
+                <a:spcPts val="500"/>
+              </a:spcAft>
+            </a:pPr>
+            <a:r>
+              <a:rPr sz="1400" b="1">
+                <a:solidFill>
+                  <a:srgbClr val="2AA7B8"/>
+                </a:solidFill>
+                <a:latin typeface="맑은 고딕"/>
+              </a:rPr>
+              <a:t>• </a:t>
+            </a:r>
+            <a:r>
+              <a:rPr sz="1400" b="1">
+                <a:solidFill>
+                  <a:srgbClr val="222222"/>
+                </a:solidFill>
+                <a:latin typeface="맑은 고딕"/>
+              </a:rPr>
+              <a:t>③ 크기</a:t>
+            </a:r>
+            <a:r>
+              <a:rPr sz="1400" b="0">
+                <a:solidFill>
+                  <a:srgbClr val="222222"/>
+                </a:solidFill>
+                <a:latin typeface="맑은 고딕"/>
+              </a:rPr>
+              <a:t>: 3.7M(15MB)로 RT-DETR-l(32.8M)의 약 1/9</a:t>
             </a:r>
           </a:p>
         </p:txBody>
@@ -14147,7 +14105,7 @@
                 </a:solidFill>
                 <a:latin typeface="맑은 고딕"/>
               </a:rPr>
-              <a:t>모델 선택 가이드와 처리 속도</a:t>
+              <a:t>현장 활용: 3단 판정과 재검사 구간</a:t>
             </a:r>
           </a:p>
         </p:txBody>
@@ -14182,7 +14140,7 @@
                 </a:solidFill>
                 <a:latin typeface="맑은 고딕"/>
               </a:rPr>
-              <a:t>촬영 간격(중앙값 4초)보다 모든 모델이 빠르다</a:t>
+              <a:t>실제 test에서는 결함 369장(≥0.748)과 빈 라벨 27장(≤0.04)이 완전히 갈린다</a:t>
             </a:r>
           </a:p>
         </p:txBody>
@@ -14222,918 +14180,16 @@
           </a:p>
         </p:txBody>
       </p:sp>
-      <p:graphicFrame>
-        <p:nvGraphicFramePr>
-          <p:cNvPr id="6" name="Table 5"/>
-          <p:cNvGraphicFramePr>
-            <a:graphicFrameLocks noGrp="1"/>
-          </p:cNvGraphicFramePr>
-          <p:nvPr/>
-        </p:nvGraphicFramePr>
-        <p:xfrm>
-          <a:off x="548640" y="1737360"/>
-          <a:ext cx="11064240" cy="2926080"/>
-        </p:xfrm>
-        <a:graphic>
-          <a:graphicData uri="http://schemas.openxmlformats.org/drawingml/2006/table">
-            <a:tbl>
-              <a:tblPr firstRow="1" bandRow="1">
-                <a:tableStyleId>{5C22544A-7EE6-4342-B048-85BDC9FD1C3A}</a:tableStyleId>
-              </a:tblPr>
-              <a:tblGrid>
-                <a:gridCol w="2011680"/>
-                <a:gridCol w="3108960"/>
-                <a:gridCol w="5943600"/>
-              </a:tblGrid>
-              <a:tr h="585216">
-                <a:tc>
-                  <a:txBody>
-                    <a:bodyPr/>
-                    <a:lstStyle/>
-                    <a:p>
-                      <a:pPr algn="l"/>
-                      <a:r>
-                        <a:rPr sz="1500" b="1">
-                          <a:solidFill>
-                            <a:srgbClr val="FFFFFF"/>
-                          </a:solidFill>
-                          <a:latin typeface="맑은 고딕"/>
-                        </a:rPr>
-                        <a:t>상황</a:t>
-                      </a:r>
-                    </a:p>
-                  </a:txBody>
-                  <a:tcPr anchor="ctr" marL="54864" marR="54864">
-                    <a:solidFill>
-                      <a:srgbClr val="1F3A5F"/>
-                    </a:solidFill>
-                  </a:tcPr>
-                </a:tc>
-                <a:tc>
-                  <a:txBody>
-                    <a:bodyPr/>
-                    <a:lstStyle/>
-                    <a:p>
-                      <a:pPr algn="ctr"/>
-                      <a:r>
-                        <a:rPr sz="1500" b="1">
-                          <a:solidFill>
-                            <a:srgbClr val="FFFFFF"/>
-                          </a:solidFill>
-                          <a:latin typeface="맑은 고딕"/>
-                        </a:rPr>
-                        <a:t>권장</a:t>
-                      </a:r>
-                    </a:p>
-                  </a:txBody>
-                  <a:tcPr anchor="ctr" marL="54864" marR="54864">
-                    <a:solidFill>
-                      <a:srgbClr val="1F3A5F"/>
-                    </a:solidFill>
-                  </a:tcPr>
-                </a:tc>
-                <a:tc>
-                  <a:txBody>
-                    <a:bodyPr/>
-                    <a:lstStyle/>
-                    <a:p>
-                      <a:pPr algn="ctr"/>
-                      <a:r>
-                        <a:rPr sz="1500" b="1">
-                          <a:solidFill>
-                            <a:srgbClr val="FFFFFF"/>
-                          </a:solidFill>
-                          <a:latin typeface="맑은 고딕"/>
-                        </a:rPr>
-                        <a:t>이유</a:t>
-                      </a:r>
-                    </a:p>
-                  </a:txBody>
-                  <a:tcPr anchor="ctr" marL="54864" marR="54864">
-                    <a:solidFill>
-                      <a:srgbClr val="1F3A5F"/>
-                    </a:solidFill>
-                  </a:tcPr>
-                </a:tc>
-              </a:tr>
-              <a:tr h="585216">
-                <a:tc>
-                  <a:txBody>
-                    <a:bodyPr/>
-                    <a:lstStyle/>
-                    <a:p>
-                      <a:pPr algn="l"/>
-                      <a:r>
-                        <a:rPr sz="1500" b="0">
-                          <a:solidFill>
-                            <a:srgbClr val="222222"/>
-                          </a:solidFill>
-                          <a:latin typeface="맑은 고딕"/>
-                        </a:rPr>
-                        <a:t>기본(최종 모델)</a:t>
-                      </a:r>
-                    </a:p>
-                  </a:txBody>
-                  <a:tcPr anchor="ctr" marL="54864" marR="54864">
-                    <a:solidFill>
-                      <a:srgbClr val="FFFFFF"/>
-                    </a:solidFill>
-                  </a:tcPr>
-                </a:tc>
-                <a:tc>
-                  <a:txBody>
-                    <a:bodyPr/>
-                    <a:lstStyle/>
-                    <a:p>
-                      <a:pPr algn="ctr"/>
-                      <a:r>
-                        <a:rPr sz="1500" b="0">
-                          <a:solidFill>
-                            <a:srgbClr val="222222"/>
-                          </a:solidFill>
-                          <a:latin typeface="맑은 고딕"/>
-                        </a:rPr>
-                        <a:t>D-FINE-N</a:t>
-                      </a:r>
-                    </a:p>
-                  </a:txBody>
-                  <a:tcPr anchor="ctr" marL="54864" marR="54864">
-                    <a:solidFill>
-                      <a:srgbClr val="FFFFFF"/>
-                    </a:solidFill>
-                  </a:tcPr>
-                </a:tc>
-                <a:tc>
-                  <a:txBody>
-                    <a:bodyPr/>
-                    <a:lstStyle/>
-                    <a:p>
-                      <a:pPr algn="ctr"/>
-                      <a:r>
-                        <a:rPr sz="1500" b="0">
-                          <a:solidFill>
-                            <a:srgbClr val="222222"/>
-                          </a:solidFill>
-                          <a:latin typeface="맑은 고딕"/>
-                        </a:rPr>
-                        <a:t>val 동률 선두, 미탐지 강건성 최상, 3.7M. 노이즈 오경보 49%</a:t>
-                      </a:r>
-                    </a:p>
-                  </a:txBody>
-                  <a:tcPr anchor="ctr" marL="54864" marR="54864">
-                    <a:solidFill>
-                      <a:srgbClr val="FFFFFF"/>
-                    </a:solidFill>
-                  </a:tcPr>
-                </a:tc>
-              </a:tr>
-              <a:tr h="585216">
-                <a:tc>
-                  <a:txBody>
-                    <a:bodyPr/>
-                    <a:lstStyle/>
-                    <a:p>
-                      <a:pPr algn="l"/>
-                      <a:r>
-                        <a:rPr sz="1500" b="0">
-                          <a:solidFill>
-                            <a:srgbClr val="222222"/>
-                          </a:solidFill>
-                          <a:latin typeface="맑은 고딕"/>
-                        </a:rPr>
-                        <a:t>오경보가 중요한 현장</a:t>
-                      </a:r>
-                    </a:p>
-                  </a:txBody>
-                  <a:tcPr anchor="ctr" marL="54864" marR="54864">
-                    <a:solidFill>
-                      <a:srgbClr val="F2F5FA"/>
-                    </a:solidFill>
-                  </a:tcPr>
-                </a:tc>
-                <a:tc>
-                  <a:txBody>
-                    <a:bodyPr/>
-                    <a:lstStyle/>
-                    <a:p>
-                      <a:pPr algn="ctr"/>
-                      <a:r>
-                        <a:rPr sz="1500" b="0">
-                          <a:solidFill>
-                            <a:srgbClr val="222222"/>
-                          </a:solidFill>
-                          <a:latin typeface="맑은 고딕"/>
-                        </a:rPr>
-                        <a:t>Faster R-CNN R50 또는 YOLO26n</a:t>
-                      </a:r>
-                    </a:p>
-                  </a:txBody>
-                  <a:tcPr anchor="ctr" marL="54864" marR="54864">
-                    <a:solidFill>
-                      <a:srgbClr val="F2F5FA"/>
-                    </a:solidFill>
-                  </a:tcPr>
-                </a:tc>
-                <a:tc>
-                  <a:txBody>
-                    <a:bodyPr/>
-                    <a:lstStyle/>
-                    <a:p>
-                      <a:pPr algn="ctr"/>
-                      <a:r>
-                        <a:rPr sz="1500" b="0">
-                          <a:solidFill>
-                            <a:srgbClr val="222222"/>
-                          </a:solidFill>
-                          <a:latin typeface="맑은 고딕"/>
-                        </a:rPr>
-                        <a:t>노이즈 오경보 0.5%·4.1%. R50은 느리고 YOLO26n은 3호기 합성 점에 약함</a:t>
-                      </a:r>
-                    </a:p>
-                  </a:txBody>
-                  <a:tcPr anchor="ctr" marL="54864" marR="54864">
-                    <a:solidFill>
-                      <a:srgbClr val="F2F5FA"/>
-                    </a:solidFill>
-                  </a:tcPr>
-                </a:tc>
-              </a:tr>
-              <a:tr h="585216">
-                <a:tc>
-                  <a:txBody>
-                    <a:bodyPr/>
-                    <a:lstStyle/>
-                    <a:p>
-                      <a:pPr algn="l"/>
-                      <a:r>
-                        <a:rPr sz="1500" b="0">
-                          <a:solidFill>
-                            <a:srgbClr val="222222"/>
-                          </a:solidFill>
-                          <a:latin typeface="맑은 고딕"/>
-                        </a:rPr>
-                        <a:t>CPU 전용 / 최경량</a:t>
-                      </a:r>
-                    </a:p>
-                  </a:txBody>
-                  <a:tcPr anchor="ctr" marL="54864" marR="54864">
-                    <a:solidFill>
-                      <a:srgbClr val="FFFFFF"/>
-                    </a:solidFill>
-                  </a:tcPr>
-                </a:tc>
-                <a:tc>
-                  <a:txBody>
-                    <a:bodyPr/>
-                    <a:lstStyle/>
-                    <a:p>
-                      <a:pPr algn="ctr"/>
-                      <a:r>
-                        <a:rPr sz="1500" b="0">
-                          <a:solidFill>
-                            <a:srgbClr val="222222"/>
-                          </a:solidFill>
-                          <a:latin typeface="맑은 고딕"/>
-                        </a:rPr>
-                        <a:t>YOLOv3-tiny</a:t>
-                      </a:r>
-                    </a:p>
-                  </a:txBody>
-                  <a:tcPr anchor="ctr" marL="54864" marR="54864">
-                    <a:solidFill>
-                      <a:srgbClr val="FFFFFF"/>
-                    </a:solidFill>
-                  </a:tcPr>
-                </a:tc>
-                <a:tc>
-                  <a:txBody>
-                    <a:bodyPr/>
-                    <a:lstStyle/>
-                    <a:p>
-                      <a:pPr algn="ctr"/>
-                      <a:r>
-                        <a:rPr sz="1500" b="0">
-                          <a:solidFill>
-                            <a:srgbClr val="222222"/>
-                          </a:solidFill>
-                          <a:latin typeface="맑은 고딕"/>
-                        </a:rPr>
-                        <a:t>CPU 4스레드 43ms, 정확도 손실이 작음</a:t>
-                      </a:r>
-                    </a:p>
-                  </a:txBody>
-                  <a:tcPr anchor="ctr" marL="54864" marR="54864">
-                    <a:solidFill>
-                      <a:srgbClr val="FFFFFF"/>
-                    </a:solidFill>
-                  </a:tcPr>
-                </a:tc>
-              </a:tr>
-              <a:tr h="585216">
-                <a:tc>
-                  <a:txBody>
-                    <a:bodyPr/>
-                    <a:lstStyle/>
-                    <a:p>
-                      <a:pPr algn="l"/>
-                      <a:r>
-                        <a:rPr sz="1500" b="0">
-                          <a:solidFill>
-                            <a:srgbClr val="222222"/>
-                          </a:solidFill>
-                          <a:latin typeface="맑은 고딕"/>
-                        </a:rPr>
-                        <a:t>비권장</a:t>
-                      </a:r>
-                    </a:p>
-                  </a:txBody>
-                  <a:tcPr anchor="ctr" marL="54864" marR="54864">
-                    <a:solidFill>
-                      <a:srgbClr val="F2F5FA"/>
-                    </a:solidFill>
-                  </a:tcPr>
-                </a:tc>
-                <a:tc>
-                  <a:txBody>
-                    <a:bodyPr/>
-                    <a:lstStyle/>
-                    <a:p>
-                      <a:pPr algn="ctr"/>
-                      <a:r>
-                        <a:rPr sz="1500" b="0">
-                          <a:solidFill>
-                            <a:srgbClr val="222222"/>
-                          </a:solidFill>
-                          <a:latin typeface="맑은 고딕"/>
-                        </a:rPr>
-                        <a:t>MobileNetV3</a:t>
-                      </a:r>
-                    </a:p>
-                  </a:txBody>
-                  <a:tcPr anchor="ctr" marL="54864" marR="54864">
-                    <a:solidFill>
-                      <a:srgbClr val="F2F5FA"/>
-                    </a:solidFill>
-                  </a:tcPr>
-                </a:tc>
-                <a:tc>
-                  <a:txBody>
-                    <a:bodyPr/>
-                    <a:lstStyle/>
-                    <a:p>
-                      <a:pPr algn="ctr"/>
-                      <a:r>
-                        <a:rPr sz="1500" b="0">
-                          <a:solidFill>
-                            <a:srgbClr val="222222"/>
-                          </a:solidFill>
-                          <a:latin typeface="맑은 고딕"/>
-                        </a:rPr>
-                        <a:t>위치 의존, 합성 점 AP 0.262, 노이즈 오경보 34~64%</a:t>
-                      </a:r>
-                    </a:p>
-                  </a:txBody>
-                  <a:tcPr anchor="ctr" marL="54864" marR="54864">
-                    <a:solidFill>
-                      <a:srgbClr val="F2F5FA"/>
-                    </a:solidFill>
-                  </a:tcPr>
-                </a:tc>
-              </a:tr>
-            </a:tbl>
-          </a:graphicData>
-        </a:graphic>
-      </p:graphicFrame>
-      <p:graphicFrame>
-        <p:nvGraphicFramePr>
-          <p:cNvPr id="7" name="Table 6"/>
-          <p:cNvGraphicFramePr>
-            <a:graphicFrameLocks noGrp="1"/>
-          </p:cNvGraphicFramePr>
-          <p:nvPr/>
-        </p:nvGraphicFramePr>
-        <p:xfrm>
-          <a:off x="548640" y="4800600"/>
-          <a:ext cx="11064237" cy="1234440"/>
-        </p:xfrm>
-        <a:graphic>
-          <a:graphicData uri="http://schemas.openxmlformats.org/drawingml/2006/table">
-            <a:tbl>
-              <a:tblPr firstRow="1" bandRow="1">
-                <a:tableStyleId>{5C22544A-7EE6-4342-B048-85BDC9FD1C3A}</a:tableStyleId>
-              </a:tblPr>
-              <a:tblGrid>
-                <a:gridCol w="2545754"/>
-                <a:gridCol w="1468704"/>
-                <a:gridCol w="1468704"/>
-                <a:gridCol w="1174963"/>
-                <a:gridCol w="1468704"/>
-                <a:gridCol w="1468704"/>
-                <a:gridCol w="1468704"/>
-              </a:tblGrid>
-              <a:tr h="411480">
-                <a:tc>
-                  <a:txBody>
-                    <a:bodyPr/>
-                    <a:lstStyle/>
-                    <a:p>
-                      <a:pPr algn="l"/>
-                      <a:r>
-                        <a:rPr sz="1300" b="1">
-                          <a:solidFill>
-                            <a:srgbClr val="FFFFFF"/>
-                          </a:solidFill>
-                          <a:latin typeface="맑은 고딕"/>
-                        </a:rPr>
-                        <a:t>처리 속도 (이미지 1장)</a:t>
-                      </a:r>
-                    </a:p>
-                  </a:txBody>
-                  <a:tcPr anchor="ctr" marL="54864" marR="54864">
-                    <a:solidFill>
-                      <a:srgbClr val="1F3A5F"/>
-                    </a:solidFill>
-                  </a:tcPr>
-                </a:tc>
-                <a:tc>
-                  <a:txBody>
-                    <a:bodyPr/>
-                    <a:lstStyle/>
-                    <a:p>
-                      <a:pPr algn="ctr"/>
-                      <a:r>
-                        <a:rPr sz="1300" b="1">
-                          <a:solidFill>
-                            <a:srgbClr val="FFFFFF"/>
-                          </a:solidFill>
-                          <a:latin typeface="맑은 고딕"/>
-                        </a:rPr>
-                        <a:t>YOLOv3-tiny</a:t>
-                      </a:r>
-                    </a:p>
-                  </a:txBody>
-                  <a:tcPr anchor="ctr" marL="54864" marR="54864">
-                    <a:solidFill>
-                      <a:srgbClr val="1F3A5F"/>
-                    </a:solidFill>
-                  </a:tcPr>
-                </a:tc>
-                <a:tc>
-                  <a:txBody>
-                    <a:bodyPr/>
-                    <a:lstStyle/>
-                    <a:p>
-                      <a:pPr algn="ctr"/>
-                      <a:r>
-                        <a:rPr sz="1300" b="1">
-                          <a:solidFill>
-                            <a:srgbClr val="FFFFFF"/>
-                          </a:solidFill>
-                          <a:latin typeface="맑은 고딕"/>
-                        </a:rPr>
-                        <a:t>MobileNetV3</a:t>
-                      </a:r>
-                    </a:p>
-                  </a:txBody>
-                  <a:tcPr anchor="ctr" marL="54864" marR="54864">
-                    <a:solidFill>
-                      <a:srgbClr val="1F3A5F"/>
-                    </a:solidFill>
-                  </a:tcPr>
-                </a:tc>
-                <a:tc>
-                  <a:txBody>
-                    <a:bodyPr/>
-                    <a:lstStyle/>
-                    <a:p>
-                      <a:pPr algn="ctr"/>
-                      <a:r>
-                        <a:rPr sz="1300" b="1">
-                          <a:solidFill>
-                            <a:srgbClr val="FFFFFF"/>
-                          </a:solidFill>
-                          <a:latin typeface="맑은 고딕"/>
-                        </a:rPr>
-                        <a:t>R50</a:t>
-                      </a:r>
-                    </a:p>
-                  </a:txBody>
-                  <a:tcPr anchor="ctr" marL="54864" marR="54864">
-                    <a:solidFill>
-                      <a:srgbClr val="1F3A5F"/>
-                    </a:solidFill>
-                  </a:tcPr>
-                </a:tc>
-                <a:tc>
-                  <a:txBody>
-                    <a:bodyPr/>
-                    <a:lstStyle/>
-                    <a:p>
-                      <a:pPr algn="ctr"/>
-                      <a:r>
-                        <a:rPr sz="1300" b="1">
-                          <a:solidFill>
-                            <a:srgbClr val="FFFFFF"/>
-                          </a:solidFill>
-                          <a:latin typeface="맑은 고딕"/>
-                        </a:rPr>
-                        <a:t>D-FINE-N</a:t>
-                      </a:r>
-                    </a:p>
-                  </a:txBody>
-                  <a:tcPr anchor="ctr" marL="54864" marR="54864">
-                    <a:solidFill>
-                      <a:srgbClr val="1F3A5F"/>
-                    </a:solidFill>
-                  </a:tcPr>
-                </a:tc>
-                <a:tc>
-                  <a:txBody>
-                    <a:bodyPr/>
-                    <a:lstStyle/>
-                    <a:p>
-                      <a:pPr algn="ctr"/>
-                      <a:r>
-                        <a:rPr sz="1300" b="1">
-                          <a:solidFill>
-                            <a:srgbClr val="FFFFFF"/>
-                          </a:solidFill>
-                          <a:latin typeface="맑은 고딕"/>
-                        </a:rPr>
-                        <a:t>YOLO26n</a:t>
-                      </a:r>
-                    </a:p>
-                  </a:txBody>
-                  <a:tcPr anchor="ctr" marL="54864" marR="54864">
-                    <a:solidFill>
-                      <a:srgbClr val="1F3A5F"/>
-                    </a:solidFill>
-                  </a:tcPr>
-                </a:tc>
-                <a:tc>
-                  <a:txBody>
-                    <a:bodyPr/>
-                    <a:lstStyle/>
-                    <a:p>
-                      <a:pPr algn="ctr"/>
-                      <a:r>
-                        <a:rPr sz="1300" b="1">
-                          <a:solidFill>
-                            <a:srgbClr val="FFFFFF"/>
-                          </a:solidFill>
-                          <a:latin typeface="맑은 고딕"/>
-                        </a:rPr>
-                        <a:t>RT-DETR-l</a:t>
-                      </a:r>
-                    </a:p>
-                  </a:txBody>
-                  <a:tcPr anchor="ctr" marL="54864" marR="54864">
-                    <a:solidFill>
-                      <a:srgbClr val="1F3A5F"/>
-                    </a:solidFill>
-                  </a:tcPr>
-                </a:tc>
-              </a:tr>
-              <a:tr h="411480">
-                <a:tc>
-                  <a:txBody>
-                    <a:bodyPr/>
-                    <a:lstStyle/>
-                    <a:p>
-                      <a:pPr algn="l"/>
-                      <a:r>
-                        <a:rPr sz="1300" b="0">
-                          <a:solidFill>
-                            <a:srgbClr val="222222"/>
-                          </a:solidFill>
-                          <a:latin typeface="맑은 고딕"/>
-                        </a:rPr>
-                        <a:t>GPU (ms)</a:t>
-                      </a:r>
-                    </a:p>
-                  </a:txBody>
-                  <a:tcPr anchor="ctr" marL="54864" marR="54864">
-                    <a:solidFill>
-                      <a:srgbClr val="FFFFFF"/>
-                    </a:solidFill>
-                  </a:tcPr>
-                </a:tc>
-                <a:tc>
-                  <a:txBody>
-                    <a:bodyPr/>
-                    <a:lstStyle/>
-                    <a:p>
-                      <a:pPr algn="ctr"/>
-                      <a:r>
-                        <a:rPr sz="1300" b="0">
-                          <a:solidFill>
-                            <a:srgbClr val="222222"/>
-                          </a:solidFill>
-                          <a:latin typeface="맑은 고딕"/>
-                        </a:rPr>
-                        <a:t>4.8</a:t>
-                      </a:r>
-                    </a:p>
-                  </a:txBody>
-                  <a:tcPr anchor="ctr" marL="54864" marR="54864">
-                    <a:solidFill>
-                      <a:srgbClr val="FFFFFF"/>
-                    </a:solidFill>
-                  </a:tcPr>
-                </a:tc>
-                <a:tc>
-                  <a:txBody>
-                    <a:bodyPr/>
-                    <a:lstStyle/>
-                    <a:p>
-                      <a:pPr algn="ctr"/>
-                      <a:r>
-                        <a:rPr sz="1300" b="0">
-                          <a:solidFill>
-                            <a:srgbClr val="222222"/>
-                          </a:solidFill>
-                          <a:latin typeface="맑은 고딕"/>
-                        </a:rPr>
-                        <a:t>11.3</a:t>
-                      </a:r>
-                    </a:p>
-                  </a:txBody>
-                  <a:tcPr anchor="ctr" marL="54864" marR="54864">
-                    <a:solidFill>
-                      <a:srgbClr val="FFFFFF"/>
-                    </a:solidFill>
-                  </a:tcPr>
-                </a:tc>
-                <a:tc>
-                  <a:txBody>
-                    <a:bodyPr/>
-                    <a:lstStyle/>
-                    <a:p>
-                      <a:pPr algn="ctr"/>
-                      <a:r>
-                        <a:rPr sz="1300" b="0">
-                          <a:solidFill>
-                            <a:srgbClr val="222222"/>
-                          </a:solidFill>
-                          <a:latin typeface="맑은 고딕"/>
-                        </a:rPr>
-                        <a:t>48.4</a:t>
-                      </a:r>
-                    </a:p>
-                  </a:txBody>
-                  <a:tcPr anchor="ctr" marL="54864" marR="54864">
-                    <a:solidFill>
-                      <a:srgbClr val="FFFFFF"/>
-                    </a:solidFill>
-                  </a:tcPr>
-                </a:tc>
-                <a:tc>
-                  <a:txBody>
-                    <a:bodyPr/>
-                    <a:lstStyle/>
-                    <a:p>
-                      <a:pPr algn="ctr"/>
-                      <a:r>
-                        <a:rPr sz="1300" b="0">
-                          <a:solidFill>
-                            <a:srgbClr val="222222"/>
-                          </a:solidFill>
-                          <a:latin typeface="맑은 고딕"/>
-                        </a:rPr>
-                        <a:t>26~92</a:t>
-                      </a:r>
-                    </a:p>
-                  </a:txBody>
-                  <a:tcPr anchor="ctr" marL="54864" marR="54864">
-                    <a:solidFill>
-                      <a:srgbClr val="FFFFFF"/>
-                    </a:solidFill>
-                  </a:tcPr>
-                </a:tc>
-                <a:tc>
-                  <a:txBody>
-                    <a:bodyPr/>
-                    <a:lstStyle/>
-                    <a:p>
-                      <a:pPr algn="ctr"/>
-                      <a:r>
-                        <a:rPr sz="1300" b="0">
-                          <a:solidFill>
-                            <a:srgbClr val="222222"/>
-                          </a:solidFill>
-                          <a:latin typeface="맑은 고딕"/>
-                        </a:rPr>
-                        <a:t>14~46</a:t>
-                      </a:r>
-                    </a:p>
-                  </a:txBody>
-                  <a:tcPr anchor="ctr" marL="54864" marR="54864">
-                    <a:solidFill>
-                      <a:srgbClr val="FFFFFF"/>
-                    </a:solidFill>
-                  </a:tcPr>
-                </a:tc>
-                <a:tc>
-                  <a:txBody>
-                    <a:bodyPr/>
-                    <a:lstStyle/>
-                    <a:p>
-                      <a:pPr algn="ctr"/>
-                      <a:r>
-                        <a:rPr sz="1300" b="0">
-                          <a:solidFill>
-                            <a:srgbClr val="222222"/>
-                          </a:solidFill>
-                          <a:latin typeface="맑은 고딕"/>
-                        </a:rPr>
-                        <a:t>33~92</a:t>
-                      </a:r>
-                    </a:p>
-                  </a:txBody>
-                  <a:tcPr anchor="ctr" marL="54864" marR="54864">
-                    <a:solidFill>
-                      <a:srgbClr val="FFFFFF"/>
-                    </a:solidFill>
-                  </a:tcPr>
-                </a:tc>
-              </a:tr>
-              <a:tr h="411480">
-                <a:tc>
-                  <a:txBody>
-                    <a:bodyPr/>
-                    <a:lstStyle/>
-                    <a:p>
-                      <a:pPr algn="l"/>
-                      <a:r>
-                        <a:rPr sz="1300" b="0">
-                          <a:solidFill>
-                            <a:srgbClr val="222222"/>
-                          </a:solidFill>
-                          <a:latin typeface="맑은 고딕"/>
-                        </a:rPr>
-                        <a:t>CPU 4스레드 (ms)</a:t>
-                      </a:r>
-                    </a:p>
-                  </a:txBody>
-                  <a:tcPr anchor="ctr" marL="54864" marR="54864">
-                    <a:solidFill>
-                      <a:srgbClr val="F2F5FA"/>
-                    </a:solidFill>
-                  </a:tcPr>
-                </a:tc>
-                <a:tc>
-                  <a:txBody>
-                    <a:bodyPr/>
-                    <a:lstStyle/>
-                    <a:p>
-                      <a:pPr algn="ctr"/>
-                      <a:r>
-                        <a:rPr sz="1300" b="0">
-                          <a:solidFill>
-                            <a:srgbClr val="222222"/>
-                          </a:solidFill>
-                          <a:latin typeface="맑은 고딕"/>
-                        </a:rPr>
-                        <a:t>43</a:t>
-                      </a:r>
-                    </a:p>
-                  </a:txBody>
-                  <a:tcPr anchor="ctr" marL="54864" marR="54864">
-                    <a:solidFill>
-                      <a:srgbClr val="F2F5FA"/>
-                    </a:solidFill>
-                  </a:tcPr>
-                </a:tc>
-                <a:tc>
-                  <a:txBody>
-                    <a:bodyPr/>
-                    <a:lstStyle/>
-                    <a:p>
-                      <a:pPr algn="ctr"/>
-                      <a:r>
-                        <a:rPr sz="1300" b="0">
-                          <a:solidFill>
-                            <a:srgbClr val="222222"/>
-                          </a:solidFill>
-                          <a:latin typeface="맑은 고딕"/>
-                        </a:rPr>
-                        <a:t>73</a:t>
-                      </a:r>
-                    </a:p>
-                  </a:txBody>
-                  <a:tcPr anchor="ctr" marL="54864" marR="54864">
-                    <a:solidFill>
-                      <a:srgbClr val="F2F5FA"/>
-                    </a:solidFill>
-                  </a:tcPr>
-                </a:tc>
-                <a:tc>
-                  <a:txBody>
-                    <a:bodyPr/>
-                    <a:lstStyle/>
-                    <a:p>
-                      <a:pPr algn="ctr"/>
-                      <a:r>
-                        <a:rPr sz="1300" b="0">
-                          <a:solidFill>
-                            <a:srgbClr val="222222"/>
-                          </a:solidFill>
-                          <a:latin typeface="맑은 고딕"/>
-                        </a:rPr>
-                        <a:t>756</a:t>
-                      </a:r>
-                    </a:p>
-                  </a:txBody>
-                  <a:tcPr anchor="ctr" marL="54864" marR="54864">
-                    <a:solidFill>
-                      <a:srgbClr val="F2F5FA"/>
-                    </a:solidFill>
-                  </a:tcPr>
-                </a:tc>
-                <a:tc>
-                  <a:txBody>
-                    <a:bodyPr/>
-                    <a:lstStyle/>
-                    <a:p>
-                      <a:pPr algn="ctr"/>
-                      <a:r>
-                        <a:rPr sz="1300" b="0">
-                          <a:solidFill>
-                            <a:srgbClr val="222222"/>
-                          </a:solidFill>
-                          <a:latin typeface="맑은 고딕"/>
-                        </a:rPr>
-                        <a:t>114~473</a:t>
-                      </a:r>
-                    </a:p>
-                  </a:txBody>
-                  <a:tcPr anchor="ctr" marL="54864" marR="54864">
-                    <a:solidFill>
-                      <a:srgbClr val="F2F5FA"/>
-                    </a:solidFill>
-                  </a:tcPr>
-                </a:tc>
-                <a:tc>
-                  <a:txBody>
-                    <a:bodyPr/>
-                    <a:lstStyle/>
-                    <a:p>
-                      <a:pPr algn="ctr"/>
-                      <a:r>
-                        <a:rPr sz="1300" b="0">
-                          <a:solidFill>
-                            <a:srgbClr val="222222"/>
-                          </a:solidFill>
-                          <a:latin typeface="맑은 고딕"/>
-                        </a:rPr>
-                        <a:t>139~400</a:t>
-                      </a:r>
-                    </a:p>
-                  </a:txBody>
-                  <a:tcPr anchor="ctr" marL="54864" marR="54864">
-                    <a:solidFill>
-                      <a:srgbClr val="F2F5FA"/>
-                    </a:solidFill>
-                  </a:tcPr>
-                </a:tc>
-                <a:tc>
-                  <a:txBody>
-                    <a:bodyPr/>
-                    <a:lstStyle/>
-                    <a:p>
-                      <a:pPr algn="ctr"/>
-                      <a:r>
-                        <a:rPr sz="1300" b="0">
-                          <a:solidFill>
-                            <a:srgbClr val="222222"/>
-                          </a:solidFill>
-                          <a:latin typeface="맑은 고딕"/>
-                        </a:rPr>
-                        <a:t>496~505</a:t>
-                      </a:r>
-                    </a:p>
-                  </a:txBody>
-                  <a:tcPr anchor="ctr" marL="54864" marR="54864">
-                    <a:solidFill>
-                      <a:srgbClr val="F2F5FA"/>
-                    </a:solidFill>
-                  </a:tcPr>
-                </a:tc>
-              </a:tr>
-            </a:tbl>
-          </a:graphicData>
-        </a:graphic>
-      </p:graphicFrame>
-      <p:sp>
-        <p:nvSpPr>
-          <p:cNvPr id="8" name="TextBox 7"/>
+      <p:sp>
+        <p:nvSpPr>
+          <p:cNvPr id="6" name="TextBox 5"/>
           <p:cNvSpPr txBox="1"/>
           <p:nvPr/>
         </p:nvSpPr>
         <p:spPr>
           <a:xfrm>
-            <a:off x="548640" y="6126480"/>
-            <a:ext cx="11064240" cy="548640"/>
+            <a:off x="502920" y="6355080"/>
+            <a:ext cx="10180015" cy="365760"/>
           </a:xfrm>
           <a:prstGeom prst="rect">
             <a:avLst/>
@@ -15154,7 +14210,174 @@
                 </a:solidFill>
                 <a:latin typeface="맑은 고딕"/>
               </a:rPr>
-              <a:t>앞 3개 모델과 뒤 3개 모델은 측정 방식이 달라(전처리 포함, 두 번 측정한 범위, 실행마다 변동) 직접 비교하지 않는다. 현장 장비 사양은 알지 못한다.</a:t>
+              <a:t>재검사 구간의 효과는 합성·가짜 정상에 기반한 참고 수치다. 재검사·놓침 비용은 현장 값을 몰라 가정하지 않았다.</a:t>
+            </a:r>
+          </a:p>
+        </p:txBody>
+      </p:sp>
+      <p:pic>
+        <p:nvPicPr>
+          <p:cNvPr id="7" name="Picture 6" descr="fig4b_final_dfine.png"/>
+          <p:cNvPicPr>
+            <a:picLocks noChangeAspect="1"/>
+          </p:cNvPicPr>
+          <p:nvPr/>
+        </p:nvPicPr>
+        <p:blipFill>
+          <a:blip r:embed="rId2"/>
+          <a:stretch>
+            <a:fillRect/>
+          </a:stretch>
+        </p:blipFill>
+        <p:spPr>
+          <a:xfrm>
+            <a:off x="1687794" y="1508760"/>
+            <a:ext cx="8785931" cy="3246120"/>
+          </a:xfrm>
+          <a:prstGeom prst="rect">
+            <a:avLst/>
+          </a:prstGeom>
+        </p:spPr>
+      </p:pic>
+      <p:sp>
+        <p:nvSpPr>
+          <p:cNvPr id="8" name="TextBox 7"/>
+          <p:cNvSpPr txBox="1"/>
+          <p:nvPr/>
+        </p:nvSpPr>
+        <p:spPr>
+          <a:xfrm>
+            <a:off x="731520" y="4846320"/>
+            <a:ext cx="10789920" cy="1463040"/>
+          </a:xfrm>
+          <a:prstGeom prst="rect">
+            <a:avLst/>
+          </a:prstGeom>
+          <a:noFill/>
+        </p:spPr>
+        <p:txBody>
+          <a:bodyPr wrap="square" lIns="45720" rIns="45720">
+            <a:spAutoFit/>
+          </a:bodyPr>
+          <a:lstStyle/>
+          <a:p>
+            <a:pPr>
+              <a:spcAft>
+                <a:spcPts val="600"/>
+              </a:spcAft>
+            </a:pPr>
+            <a:r>
+              <a:rPr sz="1600" b="1">
+                <a:solidFill>
+                  <a:srgbClr val="2AA7B8"/>
+                </a:solidFill>
+                <a:latin typeface="맑은 고딕"/>
+              </a:rPr>
+              <a:t>• </a:t>
+            </a:r>
+            <a:r>
+              <a:rPr sz="1600" b="1">
+                <a:solidFill>
+                  <a:srgbClr val="222222"/>
+                </a:solidFill>
+                <a:latin typeface="맑은 고딕"/>
+              </a:rPr>
+              <a:t>불합격</a:t>
+            </a:r>
+            <a:r>
+              <a:rPr sz="1600" b="0">
+                <a:solidFill>
+                  <a:srgbClr val="222222"/>
+                </a:solidFill>
+                <a:latin typeface="맑은 고딕"/>
+              </a:rPr>
+              <a:t> 최고 신뢰도 ≥ 0.66(val 임계값)  |  </a:t>
+            </a:r>
+            <a:r>
+              <a:rPr sz="1600" b="1">
+                <a:solidFill>
+                  <a:srgbClr val="222222"/>
+                </a:solidFill>
+                <a:latin typeface="맑은 고딕"/>
+              </a:rPr>
+              <a:t>재검사</a:t>
+            </a:r>
+            <a:r>
+              <a:rPr sz="1600" b="0">
+                <a:solidFill>
+                  <a:srgbClr val="222222"/>
+                </a:solidFill>
+                <a:latin typeface="맑은 고딕"/>
+              </a:rPr>
+              <a:t> 0.3 ~ 0.66  |  </a:t>
+            </a:r>
+            <a:r>
+              <a:rPr sz="1600" b="1">
+                <a:solidFill>
+                  <a:srgbClr val="222222"/>
+                </a:solidFill>
+                <a:latin typeface="맑은 고딕"/>
+              </a:rPr>
+              <a:t>합격</a:t>
+            </a:r>
+            <a:r>
+              <a:rPr sz="1600" b="0">
+                <a:solidFill>
+                  <a:srgbClr val="222222"/>
+                </a:solidFill>
+                <a:latin typeface="맑은 고딕"/>
+              </a:rPr>
+              <a:t> &lt; 0.3</a:t>
+            </a:r>
+          </a:p>
+          <a:p>
+            <a:pPr>
+              <a:spcAft>
+                <a:spcPts val="600"/>
+              </a:spcAft>
+            </a:pPr>
+            <a:r>
+              <a:rPr sz="1600" b="1">
+                <a:solidFill>
+                  <a:srgbClr val="2AA7B8"/>
+                </a:solidFill>
+                <a:latin typeface="맑은 고딕"/>
+              </a:rPr>
+              <a:t>• </a:t>
+            </a:r>
+            <a:r>
+              <a:rPr sz="1600" b="0">
+                <a:solidFill>
+                  <a:srgbClr val="222222"/>
+                </a:solidFill>
+                <a:latin typeface="맑은 고딕"/>
+              </a:rPr>
+              <a:t>하한을 0.3으로 낮추면 옅은 점 검출 61.9% → 67.1%, 대신 가짜 정상 오경보 4.1% → 5.7%(평균 보간), 49% → 59%(노이즈 보간)</a:t>
+            </a:r>
+          </a:p>
+          <a:p>
+            <a:pPr>
+              <a:spcAft>
+                <a:spcPts val="600"/>
+              </a:spcAft>
+            </a:pPr>
+            <a:r>
+              <a:rPr sz="1600" b="1">
+                <a:solidFill>
+                  <a:srgbClr val="2AA7B8"/>
+                </a:solidFill>
+                <a:latin typeface="맑은 고딕"/>
+              </a:rPr>
+              <a:t>• </a:t>
+            </a:r>
+            <a:r>
+              <a:rPr sz="1600" b="0">
+                <a:solidFill>
+                  <a:srgbClr val="222222"/>
+                </a:solidFill>
+                <a:latin typeface="맑은 고딕"/>
+              </a:rPr>
+              <a:t>오경보가 비싼 현장은 재검사 구간의 이득이 작다</a:t>
             </a:r>
           </a:p>
         </p:txBody>
@@ -15250,7 +14473,7 @@
                 </a:solidFill>
                 <a:latin typeface="맑은 고딕"/>
               </a:rPr>
-              <a:t>차별점: 점수를 믿게 만드는 검증</a:t>
+              <a:t>모델 선택 가이드와 처리 속도</a:t>
             </a:r>
           </a:p>
         </p:txBody>
@@ -15285,7 +14508,7 @@
                 </a:solidFill>
                 <a:latin typeface="맑은 고딕"/>
               </a:rPr>
-              <a:t>못 찾은 것의 원인을 확인하고, 일반화까지 시험해 모델을 골랐다</a:t>
+              <a:t>촬영 간격(중앙값 4초)보다 모든 모델이 빠르다</a:t>
             </a:r>
           </a:p>
         </p:txBody>
@@ -15325,16 +14548,1244 @@
           </a:p>
         </p:txBody>
       </p:sp>
-      <p:sp>
-        <p:nvSpPr>
-          <p:cNvPr id="6" name="TextBox 5"/>
+      <p:graphicFrame>
+        <p:nvGraphicFramePr>
+          <p:cNvPr id="6" name="Table 5"/>
+          <p:cNvGraphicFramePr>
+            <a:graphicFrameLocks noGrp="1"/>
+          </p:cNvGraphicFramePr>
+          <p:nvPr/>
+        </p:nvGraphicFramePr>
+        <p:xfrm>
+          <a:off x="548640" y="1737360"/>
+          <a:ext cx="11064240" cy="2651760"/>
+        </p:xfrm>
+        <a:graphic>
+          <a:graphicData uri="http://schemas.openxmlformats.org/drawingml/2006/table">
+            <a:tbl>
+              <a:tblPr firstRow="1" bandRow="1">
+                <a:tableStyleId>{5C22544A-7EE6-4342-B048-85BDC9FD1C3A}</a:tableStyleId>
+              </a:tblPr>
+              <a:tblGrid>
+                <a:gridCol w="2011680"/>
+                <a:gridCol w="3108960"/>
+                <a:gridCol w="5943600"/>
+              </a:tblGrid>
+              <a:tr h="530352">
+                <a:tc>
+                  <a:txBody>
+                    <a:bodyPr/>
+                    <a:lstStyle/>
+                    <a:p>
+                      <a:pPr algn="l"/>
+                      <a:r>
+                        <a:rPr sz="1400" b="1">
+                          <a:solidFill>
+                            <a:srgbClr val="FFFFFF"/>
+                          </a:solidFill>
+                          <a:latin typeface="맑은 고딕"/>
+                        </a:rPr>
+                        <a:t>상황</a:t>
+                      </a:r>
+                    </a:p>
+                  </a:txBody>
+                  <a:tcPr anchor="ctr" marL="54864" marR="54864">
+                    <a:solidFill>
+                      <a:srgbClr val="1F3A5F"/>
+                    </a:solidFill>
+                  </a:tcPr>
+                </a:tc>
+                <a:tc>
+                  <a:txBody>
+                    <a:bodyPr/>
+                    <a:lstStyle/>
+                    <a:p>
+                      <a:pPr algn="ctr"/>
+                      <a:r>
+                        <a:rPr sz="1400" b="1">
+                          <a:solidFill>
+                            <a:srgbClr val="FFFFFF"/>
+                          </a:solidFill>
+                          <a:latin typeface="맑은 고딕"/>
+                        </a:rPr>
+                        <a:t>권장</a:t>
+                      </a:r>
+                    </a:p>
+                  </a:txBody>
+                  <a:tcPr anchor="ctr" marL="54864" marR="54864">
+                    <a:solidFill>
+                      <a:srgbClr val="1F3A5F"/>
+                    </a:solidFill>
+                  </a:tcPr>
+                </a:tc>
+                <a:tc>
+                  <a:txBody>
+                    <a:bodyPr/>
+                    <a:lstStyle/>
+                    <a:p>
+                      <a:pPr algn="ctr"/>
+                      <a:r>
+                        <a:rPr sz="1400" b="1">
+                          <a:solidFill>
+                            <a:srgbClr val="FFFFFF"/>
+                          </a:solidFill>
+                          <a:latin typeface="맑은 고딕"/>
+                        </a:rPr>
+                        <a:t>이유</a:t>
+                      </a:r>
+                    </a:p>
+                  </a:txBody>
+                  <a:tcPr anchor="ctr" marL="54864" marR="54864">
+                    <a:solidFill>
+                      <a:srgbClr val="1F3A5F"/>
+                    </a:solidFill>
+                  </a:tcPr>
+                </a:tc>
+              </a:tr>
+              <a:tr h="530352">
+                <a:tc>
+                  <a:txBody>
+                    <a:bodyPr/>
+                    <a:lstStyle/>
+                    <a:p>
+                      <a:pPr algn="l"/>
+                      <a:r>
+                        <a:rPr sz="1400" b="0">
+                          <a:solidFill>
+                            <a:srgbClr val="222222"/>
+                          </a:solidFill>
+                          <a:latin typeface="맑은 고딕"/>
+                        </a:rPr>
+                        <a:t>기본(최종 모델)</a:t>
+                      </a:r>
+                    </a:p>
+                  </a:txBody>
+                  <a:tcPr anchor="ctr" marL="54864" marR="54864">
+                    <a:solidFill>
+                      <a:srgbClr val="FFFFFF"/>
+                    </a:solidFill>
+                  </a:tcPr>
+                </a:tc>
+                <a:tc>
+                  <a:txBody>
+                    <a:bodyPr/>
+                    <a:lstStyle/>
+                    <a:p>
+                      <a:pPr algn="ctr"/>
+                      <a:r>
+                        <a:rPr sz="1400" b="0">
+                          <a:solidFill>
+                            <a:srgbClr val="222222"/>
+                          </a:solidFill>
+                          <a:latin typeface="맑은 고딕"/>
+                        </a:rPr>
+                        <a:t>D-FINE-N</a:t>
+                      </a:r>
+                    </a:p>
+                  </a:txBody>
+                  <a:tcPr anchor="ctr" marL="54864" marR="54864">
+                    <a:solidFill>
+                      <a:srgbClr val="FFFFFF"/>
+                    </a:solidFill>
+                  </a:tcPr>
+                </a:tc>
+                <a:tc>
+                  <a:txBody>
+                    <a:bodyPr/>
+                    <a:lstStyle/>
+                    <a:p>
+                      <a:pPr algn="ctr"/>
+                      <a:r>
+                        <a:rPr sz="1400" b="0">
+                          <a:solidFill>
+                            <a:srgbClr val="222222"/>
+                          </a:solidFill>
+                          <a:latin typeface="맑은 고딕"/>
+                        </a:rPr>
+                        <a:t>val 동률 선두, 미탐지 강건성 최상, 3.7M. 노이즈 오경보 49%</a:t>
+                      </a:r>
+                    </a:p>
+                  </a:txBody>
+                  <a:tcPr anchor="ctr" marL="54864" marR="54864">
+                    <a:solidFill>
+                      <a:srgbClr val="FFFFFF"/>
+                    </a:solidFill>
+                  </a:tcPr>
+                </a:tc>
+              </a:tr>
+              <a:tr h="530352">
+                <a:tc>
+                  <a:txBody>
+                    <a:bodyPr/>
+                    <a:lstStyle/>
+                    <a:p>
+                      <a:pPr algn="l"/>
+                      <a:r>
+                        <a:rPr sz="1400" b="0">
+                          <a:solidFill>
+                            <a:srgbClr val="222222"/>
+                          </a:solidFill>
+                          <a:latin typeface="맑은 고딕"/>
+                        </a:rPr>
+                        <a:t>오경보가 중요한 현장</a:t>
+                      </a:r>
+                    </a:p>
+                  </a:txBody>
+                  <a:tcPr anchor="ctr" marL="54864" marR="54864">
+                    <a:solidFill>
+                      <a:srgbClr val="F2F5FA"/>
+                    </a:solidFill>
+                  </a:tcPr>
+                </a:tc>
+                <a:tc>
+                  <a:txBody>
+                    <a:bodyPr/>
+                    <a:lstStyle/>
+                    <a:p>
+                      <a:pPr algn="ctr"/>
+                      <a:r>
+                        <a:rPr sz="1400" b="0">
+                          <a:solidFill>
+                            <a:srgbClr val="222222"/>
+                          </a:solidFill>
+                          <a:latin typeface="맑은 고딕"/>
+                        </a:rPr>
+                        <a:t>Faster R-CNN R50 또는 YOLO26n</a:t>
+                      </a:r>
+                    </a:p>
+                  </a:txBody>
+                  <a:tcPr anchor="ctr" marL="54864" marR="54864">
+                    <a:solidFill>
+                      <a:srgbClr val="F2F5FA"/>
+                    </a:solidFill>
+                  </a:tcPr>
+                </a:tc>
+                <a:tc>
+                  <a:txBody>
+                    <a:bodyPr/>
+                    <a:lstStyle/>
+                    <a:p>
+                      <a:pPr algn="ctr"/>
+                      <a:r>
+                        <a:rPr sz="1400" b="0">
+                          <a:solidFill>
+                            <a:srgbClr val="222222"/>
+                          </a:solidFill>
+                          <a:latin typeface="맑은 고딕"/>
+                        </a:rPr>
+                        <a:t>노이즈 오경보 0.5%·4.1%. R50은 느리고 YOLO26n은 3호기 합성 점에 약함</a:t>
+                      </a:r>
+                    </a:p>
+                  </a:txBody>
+                  <a:tcPr anchor="ctr" marL="54864" marR="54864">
+                    <a:solidFill>
+                      <a:srgbClr val="F2F5FA"/>
+                    </a:solidFill>
+                  </a:tcPr>
+                </a:tc>
+              </a:tr>
+              <a:tr h="530352">
+                <a:tc>
+                  <a:txBody>
+                    <a:bodyPr/>
+                    <a:lstStyle/>
+                    <a:p>
+                      <a:pPr algn="l"/>
+                      <a:r>
+                        <a:rPr sz="1400" b="0">
+                          <a:solidFill>
+                            <a:srgbClr val="222222"/>
+                          </a:solidFill>
+                          <a:latin typeface="맑은 고딕"/>
+                        </a:rPr>
+                        <a:t>CPU 전용 / 최경량</a:t>
+                      </a:r>
+                    </a:p>
+                  </a:txBody>
+                  <a:tcPr anchor="ctr" marL="54864" marR="54864">
+                    <a:solidFill>
+                      <a:srgbClr val="FFFFFF"/>
+                    </a:solidFill>
+                  </a:tcPr>
+                </a:tc>
+                <a:tc>
+                  <a:txBody>
+                    <a:bodyPr/>
+                    <a:lstStyle/>
+                    <a:p>
+                      <a:pPr algn="ctr"/>
+                      <a:r>
+                        <a:rPr sz="1400" b="0">
+                          <a:solidFill>
+                            <a:srgbClr val="222222"/>
+                          </a:solidFill>
+                          <a:latin typeface="맑은 고딕"/>
+                        </a:rPr>
+                        <a:t>YOLOv3-tiny</a:t>
+                      </a:r>
+                    </a:p>
+                  </a:txBody>
+                  <a:tcPr anchor="ctr" marL="54864" marR="54864">
+                    <a:solidFill>
+                      <a:srgbClr val="FFFFFF"/>
+                    </a:solidFill>
+                  </a:tcPr>
+                </a:tc>
+                <a:tc>
+                  <a:txBody>
+                    <a:bodyPr/>
+                    <a:lstStyle/>
+                    <a:p>
+                      <a:pPr algn="ctr"/>
+                      <a:r>
+                        <a:rPr sz="1400" b="0">
+                          <a:solidFill>
+                            <a:srgbClr val="222222"/>
+                          </a:solidFill>
+                          <a:latin typeface="맑은 고딕"/>
+                        </a:rPr>
+                        <a:t>CPU 4스레드 약 70ms(6개 중 가장 빠름), 정확도 손실이 작음</a:t>
+                      </a:r>
+                    </a:p>
+                  </a:txBody>
+                  <a:tcPr anchor="ctr" marL="54864" marR="54864">
+                    <a:solidFill>
+                      <a:srgbClr val="FFFFFF"/>
+                    </a:solidFill>
+                  </a:tcPr>
+                </a:tc>
+              </a:tr>
+              <a:tr h="530352">
+                <a:tc>
+                  <a:txBody>
+                    <a:bodyPr/>
+                    <a:lstStyle/>
+                    <a:p>
+                      <a:pPr algn="l"/>
+                      <a:r>
+                        <a:rPr sz="1400" b="0">
+                          <a:solidFill>
+                            <a:srgbClr val="222222"/>
+                          </a:solidFill>
+                          <a:latin typeface="맑은 고딕"/>
+                        </a:rPr>
+                        <a:t>비권장</a:t>
+                      </a:r>
+                    </a:p>
+                  </a:txBody>
+                  <a:tcPr anchor="ctr" marL="54864" marR="54864">
+                    <a:solidFill>
+                      <a:srgbClr val="F2F5FA"/>
+                    </a:solidFill>
+                  </a:tcPr>
+                </a:tc>
+                <a:tc>
+                  <a:txBody>
+                    <a:bodyPr/>
+                    <a:lstStyle/>
+                    <a:p>
+                      <a:pPr algn="ctr"/>
+                      <a:r>
+                        <a:rPr sz="1400" b="0">
+                          <a:solidFill>
+                            <a:srgbClr val="222222"/>
+                          </a:solidFill>
+                          <a:latin typeface="맑은 고딕"/>
+                        </a:rPr>
+                        <a:t>MobileNetV3</a:t>
+                      </a:r>
+                    </a:p>
+                  </a:txBody>
+                  <a:tcPr anchor="ctr" marL="54864" marR="54864">
+                    <a:solidFill>
+                      <a:srgbClr val="F2F5FA"/>
+                    </a:solidFill>
+                  </a:tcPr>
+                </a:tc>
+                <a:tc>
+                  <a:txBody>
+                    <a:bodyPr/>
+                    <a:lstStyle/>
+                    <a:p>
+                      <a:pPr algn="ctr"/>
+                      <a:r>
+                        <a:rPr sz="1400" b="0">
+                          <a:solidFill>
+                            <a:srgbClr val="222222"/>
+                          </a:solidFill>
+                          <a:latin typeface="맑은 고딕"/>
+                        </a:rPr>
+                        <a:t>위치 의존, 합성 점 AP 0.262, 노이즈 오경보 34~64%</a:t>
+                      </a:r>
+                    </a:p>
+                  </a:txBody>
+                  <a:tcPr anchor="ctr" marL="54864" marR="54864">
+                    <a:solidFill>
+                      <a:srgbClr val="F2F5FA"/>
+                    </a:solidFill>
+                  </a:tcPr>
+                </a:tc>
+              </a:tr>
+            </a:tbl>
+          </a:graphicData>
+        </a:graphic>
+      </p:graphicFrame>
+      <p:graphicFrame>
+        <p:nvGraphicFramePr>
+          <p:cNvPr id="7" name="Table 6"/>
+          <p:cNvGraphicFramePr>
+            <a:graphicFrameLocks noGrp="1"/>
+          </p:cNvGraphicFramePr>
+          <p:nvPr/>
+        </p:nvGraphicFramePr>
+        <p:xfrm>
+          <a:off x="548640" y="4572000"/>
+          <a:ext cx="11064237" cy="1645920"/>
+        </p:xfrm>
+        <a:graphic>
+          <a:graphicData uri="http://schemas.openxmlformats.org/drawingml/2006/table">
+            <a:tbl>
+              <a:tblPr firstRow="1" bandRow="1">
+                <a:tableStyleId>{5C22544A-7EE6-4342-B048-85BDC9FD1C3A}</a:tableStyleId>
+              </a:tblPr>
+              <a:tblGrid>
+                <a:gridCol w="2545754"/>
+                <a:gridCol w="1468704"/>
+                <a:gridCol w="1468704"/>
+                <a:gridCol w="1174963"/>
+                <a:gridCol w="1468704"/>
+                <a:gridCol w="1468704"/>
+                <a:gridCol w="1468704"/>
+              </a:tblGrid>
+              <a:tr h="329184">
+                <a:tc>
+                  <a:txBody>
+                    <a:bodyPr/>
+                    <a:lstStyle/>
+                    <a:p>
+                      <a:pPr algn="l"/>
+                      <a:r>
+                        <a:rPr sz="1300" b="1">
+                          <a:solidFill>
+                            <a:srgbClr val="FFFFFF"/>
+                          </a:solidFill>
+                          <a:latin typeface="맑은 고딕"/>
+                        </a:rPr>
+                        <a:t>처리 속도 (이미지 1장, ms)</a:t>
+                      </a:r>
+                    </a:p>
+                  </a:txBody>
+                  <a:tcPr anchor="ctr" marL="54864" marR="54864">
+                    <a:solidFill>
+                      <a:srgbClr val="1F3A5F"/>
+                    </a:solidFill>
+                  </a:tcPr>
+                </a:tc>
+                <a:tc>
+                  <a:txBody>
+                    <a:bodyPr/>
+                    <a:lstStyle/>
+                    <a:p>
+                      <a:pPr algn="ctr"/>
+                      <a:r>
+                        <a:rPr sz="1300" b="1">
+                          <a:solidFill>
+                            <a:srgbClr val="FFFFFF"/>
+                          </a:solidFill>
+                          <a:latin typeface="맑은 고딕"/>
+                        </a:rPr>
+                        <a:t>YOLOv3-tiny</a:t>
+                      </a:r>
+                    </a:p>
+                  </a:txBody>
+                  <a:tcPr anchor="ctr" marL="54864" marR="54864">
+                    <a:solidFill>
+                      <a:srgbClr val="1F3A5F"/>
+                    </a:solidFill>
+                  </a:tcPr>
+                </a:tc>
+                <a:tc>
+                  <a:txBody>
+                    <a:bodyPr/>
+                    <a:lstStyle/>
+                    <a:p>
+                      <a:pPr algn="ctr"/>
+                      <a:r>
+                        <a:rPr sz="1300" b="1">
+                          <a:solidFill>
+                            <a:srgbClr val="FFFFFF"/>
+                          </a:solidFill>
+                          <a:latin typeface="맑은 고딕"/>
+                        </a:rPr>
+                        <a:t>MobileNetV3</a:t>
+                      </a:r>
+                    </a:p>
+                  </a:txBody>
+                  <a:tcPr anchor="ctr" marL="54864" marR="54864">
+                    <a:solidFill>
+                      <a:srgbClr val="1F3A5F"/>
+                    </a:solidFill>
+                  </a:tcPr>
+                </a:tc>
+                <a:tc>
+                  <a:txBody>
+                    <a:bodyPr/>
+                    <a:lstStyle/>
+                    <a:p>
+                      <a:pPr algn="ctr"/>
+                      <a:r>
+                        <a:rPr sz="1300" b="1">
+                          <a:solidFill>
+                            <a:srgbClr val="FFFFFF"/>
+                          </a:solidFill>
+                          <a:latin typeface="맑은 고딕"/>
+                        </a:rPr>
+                        <a:t>R50</a:t>
+                      </a:r>
+                    </a:p>
+                  </a:txBody>
+                  <a:tcPr anchor="ctr" marL="54864" marR="54864">
+                    <a:solidFill>
+                      <a:srgbClr val="1F3A5F"/>
+                    </a:solidFill>
+                  </a:tcPr>
+                </a:tc>
+                <a:tc>
+                  <a:txBody>
+                    <a:bodyPr/>
+                    <a:lstStyle/>
+                    <a:p>
+                      <a:pPr algn="ctr"/>
+                      <a:r>
+                        <a:rPr sz="1300" b="1">
+                          <a:solidFill>
+                            <a:srgbClr val="FFFFFF"/>
+                          </a:solidFill>
+                          <a:latin typeface="맑은 고딕"/>
+                        </a:rPr>
+                        <a:t>D-FINE-N</a:t>
+                      </a:r>
+                    </a:p>
+                  </a:txBody>
+                  <a:tcPr anchor="ctr" marL="54864" marR="54864">
+                    <a:solidFill>
+                      <a:srgbClr val="1F3A5F"/>
+                    </a:solidFill>
+                  </a:tcPr>
+                </a:tc>
+                <a:tc>
+                  <a:txBody>
+                    <a:bodyPr/>
+                    <a:lstStyle/>
+                    <a:p>
+                      <a:pPr algn="ctr"/>
+                      <a:r>
+                        <a:rPr sz="1300" b="1">
+                          <a:solidFill>
+                            <a:srgbClr val="FFFFFF"/>
+                          </a:solidFill>
+                          <a:latin typeface="맑은 고딕"/>
+                        </a:rPr>
+                        <a:t>YOLO26n</a:t>
+                      </a:r>
+                    </a:p>
+                  </a:txBody>
+                  <a:tcPr anchor="ctr" marL="54864" marR="54864">
+                    <a:solidFill>
+                      <a:srgbClr val="1F3A5F"/>
+                    </a:solidFill>
+                  </a:tcPr>
+                </a:tc>
+                <a:tc>
+                  <a:txBody>
+                    <a:bodyPr/>
+                    <a:lstStyle/>
+                    <a:p>
+                      <a:pPr algn="ctr"/>
+                      <a:r>
+                        <a:rPr sz="1300" b="1">
+                          <a:solidFill>
+                            <a:srgbClr val="FFFFFF"/>
+                          </a:solidFill>
+                          <a:latin typeface="맑은 고딕"/>
+                        </a:rPr>
+                        <a:t>RT-DETR-l</a:t>
+                      </a:r>
+                    </a:p>
+                  </a:txBody>
+                  <a:tcPr anchor="ctr" marL="54864" marR="54864">
+                    <a:solidFill>
+                      <a:srgbClr val="1F3A5F"/>
+                    </a:solidFill>
+                  </a:tcPr>
+                </a:tc>
+              </a:tr>
+              <a:tr h="329184">
+                <a:tc>
+                  <a:txBody>
+                    <a:bodyPr/>
+                    <a:lstStyle/>
+                    <a:p>
+                      <a:pPr algn="l"/>
+                      <a:r>
+                        <a:rPr sz="1300" b="0">
+                          <a:solidFill>
+                            <a:srgbClr val="222222"/>
+                          </a:solidFill>
+                          <a:latin typeface="맑은 고딕"/>
+                        </a:rPr>
+                        <a:t>GPU</a:t>
+                      </a:r>
+                    </a:p>
+                  </a:txBody>
+                  <a:tcPr anchor="ctr" marL="54864" marR="54864">
+                    <a:solidFill>
+                      <a:srgbClr val="FFFFFF"/>
+                    </a:solidFill>
+                  </a:tcPr>
+                </a:tc>
+                <a:tc>
+                  <a:txBody>
+                    <a:bodyPr/>
+                    <a:lstStyle/>
+                    <a:p>
+                      <a:pPr algn="ctr"/>
+                      <a:r>
+                        <a:rPr sz="1300" b="0">
+                          <a:solidFill>
+                            <a:srgbClr val="222222"/>
+                          </a:solidFill>
+                          <a:latin typeface="맑은 고딕"/>
+                        </a:rPr>
+                        <a:t>4.7</a:t>
+                      </a:r>
+                    </a:p>
+                  </a:txBody>
+                  <a:tcPr anchor="ctr" marL="54864" marR="54864">
+                    <a:solidFill>
+                      <a:srgbClr val="FFFFFF"/>
+                    </a:solidFill>
+                  </a:tcPr>
+                </a:tc>
+                <a:tc>
+                  <a:txBody>
+                    <a:bodyPr/>
+                    <a:lstStyle/>
+                    <a:p>
+                      <a:pPr algn="ctr"/>
+                      <a:r>
+                        <a:rPr sz="1300" b="0">
+                          <a:solidFill>
+                            <a:srgbClr val="222222"/>
+                          </a:solidFill>
+                          <a:latin typeface="맑은 고딕"/>
+                        </a:rPr>
+                        <a:t>10.0~11.5</a:t>
+                      </a:r>
+                    </a:p>
+                  </a:txBody>
+                  <a:tcPr anchor="ctr" marL="54864" marR="54864">
+                    <a:solidFill>
+                      <a:srgbClr val="FFFFFF"/>
+                    </a:solidFill>
+                  </a:tcPr>
+                </a:tc>
+                <a:tc>
+                  <a:txBody>
+                    <a:bodyPr/>
+                    <a:lstStyle/>
+                    <a:p>
+                      <a:pPr algn="ctr"/>
+                      <a:r>
+                        <a:rPr sz="1300" b="0">
+                          <a:solidFill>
+                            <a:srgbClr val="222222"/>
+                          </a:solidFill>
+                          <a:latin typeface="맑은 고딕"/>
+                        </a:rPr>
+                        <a:t>46~47</a:t>
+                      </a:r>
+                    </a:p>
+                  </a:txBody>
+                  <a:tcPr anchor="ctr" marL="54864" marR="54864">
+                    <a:solidFill>
+                      <a:srgbClr val="FFFFFF"/>
+                    </a:solidFill>
+                  </a:tcPr>
+                </a:tc>
+                <a:tc>
+                  <a:txBody>
+                    <a:bodyPr/>
+                    <a:lstStyle/>
+                    <a:p>
+                      <a:pPr algn="ctr"/>
+                      <a:r>
+                        <a:rPr sz="1300" b="0">
+                          <a:solidFill>
+                            <a:srgbClr val="222222"/>
+                          </a:solidFill>
+                          <a:latin typeface="맑은 고딕"/>
+                        </a:rPr>
+                        <a:t>21</a:t>
+                      </a:r>
+                    </a:p>
+                  </a:txBody>
+                  <a:tcPr anchor="ctr" marL="54864" marR="54864">
+                    <a:solidFill>
+                      <a:srgbClr val="FFFFFF"/>
+                    </a:solidFill>
+                  </a:tcPr>
+                </a:tc>
+                <a:tc>
+                  <a:txBody>
+                    <a:bodyPr/>
+                    <a:lstStyle/>
+                    <a:p>
+                      <a:pPr algn="ctr"/>
+                      <a:r>
+                        <a:rPr sz="1300" b="0">
+                          <a:solidFill>
+                            <a:srgbClr val="222222"/>
+                          </a:solidFill>
+                          <a:latin typeface="맑은 고딕"/>
+                        </a:rPr>
+                        <a:t>8.9~9.6</a:t>
+                      </a:r>
+                    </a:p>
+                  </a:txBody>
+                  <a:tcPr anchor="ctr" marL="54864" marR="54864">
+                    <a:solidFill>
+                      <a:srgbClr val="FFFFFF"/>
+                    </a:solidFill>
+                  </a:tcPr>
+                </a:tc>
+                <a:tc>
+                  <a:txBody>
+                    <a:bodyPr/>
+                    <a:lstStyle/>
+                    <a:p>
+                      <a:pPr algn="ctr"/>
+                      <a:r>
+                        <a:rPr sz="1300" b="0">
+                          <a:solidFill>
+                            <a:srgbClr val="222222"/>
+                          </a:solidFill>
+                          <a:latin typeface="맑은 고딕"/>
+                        </a:rPr>
+                        <a:t>29~30</a:t>
+                      </a:r>
+                    </a:p>
+                  </a:txBody>
+                  <a:tcPr anchor="ctr" marL="54864" marR="54864">
+                    <a:solidFill>
+                      <a:srgbClr val="FFFFFF"/>
+                    </a:solidFill>
+                  </a:tcPr>
+                </a:tc>
+              </a:tr>
+              <a:tr h="329184">
+                <a:tc>
+                  <a:txBody>
+                    <a:bodyPr/>
+                    <a:lstStyle/>
+                    <a:p>
+                      <a:pPr algn="l"/>
+                      <a:r>
+                        <a:rPr sz="1300" b="0">
+                          <a:solidFill>
+                            <a:srgbClr val="222222"/>
+                          </a:solidFill>
+                          <a:latin typeface="맑은 고딕"/>
+                        </a:rPr>
+                        <a:t>CPU 1스레드</a:t>
+                      </a:r>
+                    </a:p>
+                  </a:txBody>
+                  <a:tcPr anchor="ctr" marL="54864" marR="54864">
+                    <a:solidFill>
+                      <a:srgbClr val="F2F5FA"/>
+                    </a:solidFill>
+                  </a:tcPr>
+                </a:tc>
+                <a:tc>
+                  <a:txBody>
+                    <a:bodyPr/>
+                    <a:lstStyle/>
+                    <a:p>
+                      <a:pPr algn="ctr"/>
+                      <a:r>
+                        <a:rPr sz="1300" b="0">
+                          <a:solidFill>
+                            <a:srgbClr val="222222"/>
+                          </a:solidFill>
+                          <a:latin typeface="맑은 고딕"/>
+                        </a:rPr>
+                        <a:t>79~159</a:t>
+                      </a:r>
+                    </a:p>
+                  </a:txBody>
+                  <a:tcPr anchor="ctr" marL="54864" marR="54864">
+                    <a:solidFill>
+                      <a:srgbClr val="F2F5FA"/>
+                    </a:solidFill>
+                  </a:tcPr>
+                </a:tc>
+                <a:tc>
+                  <a:txBody>
+                    <a:bodyPr/>
+                    <a:lstStyle/>
+                    <a:p>
+                      <a:pPr algn="ctr"/>
+                      <a:r>
+                        <a:rPr sz="1300" b="0">
+                          <a:solidFill>
+                            <a:srgbClr val="222222"/>
+                          </a:solidFill>
+                          <a:latin typeface="맑은 고딕"/>
+                        </a:rPr>
+                        <a:t>119~122</a:t>
+                      </a:r>
+                    </a:p>
+                  </a:txBody>
+                  <a:tcPr anchor="ctr" marL="54864" marR="54864">
+                    <a:solidFill>
+                      <a:srgbClr val="F2F5FA"/>
+                    </a:solidFill>
+                  </a:tcPr>
+                </a:tc>
+                <a:tc>
+                  <a:txBody>
+                    <a:bodyPr/>
+                    <a:lstStyle/>
+                    <a:p>
+                      <a:pPr algn="ctr"/>
+                      <a:r>
+                        <a:rPr sz="1300" b="0">
+                          <a:solidFill>
+                            <a:srgbClr val="222222"/>
+                          </a:solidFill>
+                          <a:latin typeface="맑은 고딕"/>
+                        </a:rPr>
+                        <a:t>1,020~1,858</a:t>
+                      </a:r>
+                    </a:p>
+                  </a:txBody>
+                  <a:tcPr anchor="ctr" marL="54864" marR="54864">
+                    <a:solidFill>
+                      <a:srgbClr val="F2F5FA"/>
+                    </a:solidFill>
+                  </a:tcPr>
+                </a:tc>
+                <a:tc>
+                  <a:txBody>
+                    <a:bodyPr/>
+                    <a:lstStyle/>
+                    <a:p>
+                      <a:pPr algn="ctr"/>
+                      <a:r>
+                        <a:rPr sz="1300" b="0">
+                          <a:solidFill>
+                            <a:srgbClr val="222222"/>
+                          </a:solidFill>
+                          <a:latin typeface="맑은 고딕"/>
+                        </a:rPr>
+                        <a:t>130~155</a:t>
+                      </a:r>
+                    </a:p>
+                  </a:txBody>
+                  <a:tcPr anchor="ctr" marL="54864" marR="54864">
+                    <a:solidFill>
+                      <a:srgbClr val="F2F5FA"/>
+                    </a:solidFill>
+                  </a:tcPr>
+                </a:tc>
+                <a:tc>
+                  <a:txBody>
+                    <a:bodyPr/>
+                    <a:lstStyle/>
+                    <a:p>
+                      <a:pPr algn="ctr"/>
+                      <a:r>
+                        <a:rPr sz="1300" b="0">
+                          <a:solidFill>
+                            <a:srgbClr val="222222"/>
+                          </a:solidFill>
+                          <a:latin typeface="맑은 고딕"/>
+                        </a:rPr>
+                        <a:t>99~126</a:t>
+                      </a:r>
+                    </a:p>
+                  </a:txBody>
+                  <a:tcPr anchor="ctr" marL="54864" marR="54864">
+                    <a:solidFill>
+                      <a:srgbClr val="F2F5FA"/>
+                    </a:solidFill>
+                  </a:tcPr>
+                </a:tc>
+                <a:tc>
+                  <a:txBody>
+                    <a:bodyPr/>
+                    <a:lstStyle/>
+                    <a:p>
+                      <a:pPr algn="ctr"/>
+                      <a:r>
+                        <a:rPr sz="1300" b="0">
+                          <a:solidFill>
+                            <a:srgbClr val="222222"/>
+                          </a:solidFill>
+                          <a:latin typeface="맑은 고딕"/>
+                        </a:rPr>
+                        <a:t>530~597</a:t>
+                      </a:r>
+                    </a:p>
+                  </a:txBody>
+                  <a:tcPr anchor="ctr" marL="54864" marR="54864">
+                    <a:solidFill>
+                      <a:srgbClr val="F2F5FA"/>
+                    </a:solidFill>
+                  </a:tcPr>
+                </a:tc>
+              </a:tr>
+              <a:tr h="329184">
+                <a:tc>
+                  <a:txBody>
+                    <a:bodyPr/>
+                    <a:lstStyle/>
+                    <a:p>
+                      <a:pPr algn="l"/>
+                      <a:r>
+                        <a:rPr sz="1300" b="0">
+                          <a:solidFill>
+                            <a:srgbClr val="222222"/>
+                          </a:solidFill>
+                          <a:latin typeface="맑은 고딕"/>
+                        </a:rPr>
+                        <a:t>CPU 4스레드</a:t>
+                      </a:r>
+                    </a:p>
+                  </a:txBody>
+                  <a:tcPr anchor="ctr" marL="54864" marR="54864">
+                    <a:solidFill>
+                      <a:srgbClr val="FFFFFF"/>
+                    </a:solidFill>
+                  </a:tcPr>
+                </a:tc>
+                <a:tc>
+                  <a:txBody>
+                    <a:bodyPr/>
+                    <a:lstStyle/>
+                    <a:p>
+                      <a:pPr algn="ctr"/>
+                      <a:r>
+                        <a:rPr sz="1300" b="0">
+                          <a:solidFill>
+                            <a:srgbClr val="222222"/>
+                          </a:solidFill>
+                          <a:latin typeface="맑은 고딕"/>
+                        </a:rPr>
+                        <a:t>68~75</a:t>
+                      </a:r>
+                    </a:p>
+                  </a:txBody>
+                  <a:tcPr anchor="ctr" marL="54864" marR="54864">
+                    <a:solidFill>
+                      <a:srgbClr val="FFFFFF"/>
+                    </a:solidFill>
+                  </a:tcPr>
+                </a:tc>
+                <a:tc>
+                  <a:txBody>
+                    <a:bodyPr/>
+                    <a:lstStyle/>
+                    <a:p>
+                      <a:pPr algn="ctr"/>
+                      <a:r>
+                        <a:rPr sz="1300" b="0">
+                          <a:solidFill>
+                            <a:srgbClr val="222222"/>
+                          </a:solidFill>
+                          <a:latin typeface="맑은 고딕"/>
+                        </a:rPr>
+                        <a:t>75~88</a:t>
+                      </a:r>
+                    </a:p>
+                  </a:txBody>
+                  <a:tcPr anchor="ctr" marL="54864" marR="54864">
+                    <a:solidFill>
+                      <a:srgbClr val="FFFFFF"/>
+                    </a:solidFill>
+                  </a:tcPr>
+                </a:tc>
+                <a:tc>
+                  <a:txBody>
+                    <a:bodyPr/>
+                    <a:lstStyle/>
+                    <a:p>
+                      <a:pPr algn="ctr"/>
+                      <a:r>
+                        <a:rPr sz="1300" b="0">
+                          <a:solidFill>
+                            <a:srgbClr val="222222"/>
+                          </a:solidFill>
+                          <a:latin typeface="맑은 고딕"/>
+                        </a:rPr>
+                        <a:t>981</a:t>
+                      </a:r>
+                    </a:p>
+                  </a:txBody>
+                  <a:tcPr anchor="ctr" marL="54864" marR="54864">
+                    <a:solidFill>
+                      <a:srgbClr val="FFFFFF"/>
+                    </a:solidFill>
+                  </a:tcPr>
+                </a:tc>
+                <a:tc>
+                  <a:txBody>
+                    <a:bodyPr/>
+                    <a:lstStyle/>
+                    <a:p>
+                      <a:pPr algn="ctr"/>
+                      <a:r>
+                        <a:rPr sz="1300" b="0">
+                          <a:solidFill>
+                            <a:srgbClr val="222222"/>
+                          </a:solidFill>
+                          <a:latin typeface="맑은 고딕"/>
+                        </a:rPr>
+                        <a:t>100~113</a:t>
+                      </a:r>
+                    </a:p>
+                  </a:txBody>
+                  <a:tcPr anchor="ctr" marL="54864" marR="54864">
+                    <a:solidFill>
+                      <a:srgbClr val="FFFFFF"/>
+                    </a:solidFill>
+                  </a:tcPr>
+                </a:tc>
+                <a:tc>
+                  <a:txBody>
+                    <a:bodyPr/>
+                    <a:lstStyle/>
+                    <a:p>
+                      <a:pPr algn="ctr"/>
+                      <a:r>
+                        <a:rPr sz="1300" b="0">
+                          <a:solidFill>
+                            <a:srgbClr val="222222"/>
+                          </a:solidFill>
+                          <a:latin typeface="맑은 고딕"/>
+                        </a:rPr>
+                        <a:t>86~110</a:t>
+                      </a:r>
+                    </a:p>
+                  </a:txBody>
+                  <a:tcPr anchor="ctr" marL="54864" marR="54864">
+                    <a:solidFill>
+                      <a:srgbClr val="FFFFFF"/>
+                    </a:solidFill>
+                  </a:tcPr>
+                </a:tc>
+                <a:tc>
+                  <a:txBody>
+                    <a:bodyPr/>
+                    <a:lstStyle/>
+                    <a:p>
+                      <a:pPr algn="ctr"/>
+                      <a:r>
+                        <a:rPr sz="1300" b="0">
+                          <a:solidFill>
+                            <a:srgbClr val="222222"/>
+                          </a:solidFill>
+                          <a:latin typeface="맑은 고딕"/>
+                        </a:rPr>
+                        <a:t>465~549</a:t>
+                      </a:r>
+                    </a:p>
+                  </a:txBody>
+                  <a:tcPr anchor="ctr" marL="54864" marR="54864">
+                    <a:solidFill>
+                      <a:srgbClr val="FFFFFF"/>
+                    </a:solidFill>
+                  </a:tcPr>
+                </a:tc>
+              </a:tr>
+              <a:tr h="329184">
+                <a:tc>
+                  <a:txBody>
+                    <a:bodyPr/>
+                    <a:lstStyle/>
+                    <a:p>
+                      <a:pPr algn="l"/>
+                      <a:r>
+                        <a:rPr sz="1300" b="0">
+                          <a:solidFill>
+                            <a:srgbClr val="222222"/>
+                          </a:solidFill>
+                          <a:latin typeface="맑은 고딕"/>
+                        </a:rPr>
+                        <a:t>CPU 16스레드</a:t>
+                      </a:r>
+                    </a:p>
+                  </a:txBody>
+                  <a:tcPr anchor="ctr" marL="54864" marR="54864">
+                    <a:solidFill>
+                      <a:srgbClr val="F2F5FA"/>
+                    </a:solidFill>
+                  </a:tcPr>
+                </a:tc>
+                <a:tc>
+                  <a:txBody>
+                    <a:bodyPr/>
+                    <a:lstStyle/>
+                    <a:p>
+                      <a:pPr algn="ctr"/>
+                      <a:r>
+                        <a:rPr sz="1300" b="0">
+                          <a:solidFill>
+                            <a:srgbClr val="222222"/>
+                          </a:solidFill>
+                          <a:latin typeface="맑은 고딕"/>
+                        </a:rPr>
+                        <a:t>64~66</a:t>
+                      </a:r>
+                    </a:p>
+                  </a:txBody>
+                  <a:tcPr anchor="ctr" marL="54864" marR="54864">
+                    <a:solidFill>
+                      <a:srgbClr val="F2F5FA"/>
+                    </a:solidFill>
+                  </a:tcPr>
+                </a:tc>
+                <a:tc>
+                  <a:txBody>
+                    <a:bodyPr/>
+                    <a:lstStyle/>
+                    <a:p>
+                      <a:pPr algn="ctr"/>
+                      <a:r>
+                        <a:rPr sz="1300" b="0">
+                          <a:solidFill>
+                            <a:srgbClr val="222222"/>
+                          </a:solidFill>
+                          <a:latin typeface="맑은 고딕"/>
+                        </a:rPr>
+                        <a:t>95~98</a:t>
+                      </a:r>
+                    </a:p>
+                  </a:txBody>
+                  <a:tcPr anchor="ctr" marL="54864" marR="54864">
+                    <a:solidFill>
+                      <a:srgbClr val="F2F5FA"/>
+                    </a:solidFill>
+                  </a:tcPr>
+                </a:tc>
+                <a:tc>
+                  <a:txBody>
+                    <a:bodyPr/>
+                    <a:lstStyle/>
+                    <a:p>
+                      <a:pPr algn="ctr"/>
+                      <a:r>
+                        <a:rPr sz="1300" b="0">
+                          <a:solidFill>
+                            <a:srgbClr val="222222"/>
+                          </a:solidFill>
+                          <a:latin typeface="맑은 고딕"/>
+                        </a:rPr>
+                        <a:t>838~853</a:t>
+                      </a:r>
+                    </a:p>
+                  </a:txBody>
+                  <a:tcPr anchor="ctr" marL="54864" marR="54864">
+                    <a:solidFill>
+                      <a:srgbClr val="F2F5FA"/>
+                    </a:solidFill>
+                  </a:tcPr>
+                </a:tc>
+                <a:tc>
+                  <a:txBody>
+                    <a:bodyPr/>
+                    <a:lstStyle/>
+                    <a:p>
+                      <a:pPr algn="ctr"/>
+                      <a:r>
+                        <a:rPr sz="1300" b="0">
+                          <a:solidFill>
+                            <a:srgbClr val="222222"/>
+                          </a:solidFill>
+                          <a:latin typeface="맑은 고딕"/>
+                        </a:rPr>
+                        <a:t>133~134</a:t>
+                      </a:r>
+                    </a:p>
+                  </a:txBody>
+                  <a:tcPr anchor="ctr" marL="54864" marR="54864">
+                    <a:solidFill>
+                      <a:srgbClr val="F2F5FA"/>
+                    </a:solidFill>
+                  </a:tcPr>
+                </a:tc>
+                <a:tc>
+                  <a:txBody>
+                    <a:bodyPr/>
+                    <a:lstStyle/>
+                    <a:p>
+                      <a:pPr algn="ctr"/>
+                      <a:r>
+                        <a:rPr sz="1300" b="0">
+                          <a:solidFill>
+                            <a:srgbClr val="222222"/>
+                          </a:solidFill>
+                          <a:latin typeface="맑은 고딕"/>
+                        </a:rPr>
+                        <a:t>102~103</a:t>
+                      </a:r>
+                    </a:p>
+                  </a:txBody>
+                  <a:tcPr anchor="ctr" marL="54864" marR="54864">
+                    <a:solidFill>
+                      <a:srgbClr val="F2F5FA"/>
+                    </a:solidFill>
+                  </a:tcPr>
+                </a:tc>
+                <a:tc>
+                  <a:txBody>
+                    <a:bodyPr/>
+                    <a:lstStyle/>
+                    <a:p>
+                      <a:pPr algn="ctr"/>
+                      <a:r>
+                        <a:rPr sz="1300" b="0">
+                          <a:solidFill>
+                            <a:srgbClr val="222222"/>
+                          </a:solidFill>
+                          <a:latin typeface="맑은 고딕"/>
+                        </a:rPr>
+                        <a:t>464~471</a:t>
+                      </a:r>
+                    </a:p>
+                  </a:txBody>
+                  <a:tcPr anchor="ctr" marL="54864" marR="54864">
+                    <a:solidFill>
+                      <a:srgbClr val="F2F5FA"/>
+                    </a:solidFill>
+                  </a:tcPr>
+                </a:tc>
+              </a:tr>
+            </a:tbl>
+          </a:graphicData>
+        </a:graphic>
+      </p:graphicFrame>
+      <p:sp>
+        <p:nvSpPr>
+          <p:cNvPr id="8" name="TextBox 7"/>
           <p:cNvSpPr txBox="1"/>
           <p:nvPr/>
         </p:nvSpPr>
         <p:spPr>
           <a:xfrm>
-            <a:off x="640080" y="1783080"/>
-            <a:ext cx="10972800" cy="4572000"/>
+            <a:off x="548640" y="6236208"/>
+            <a:ext cx="11064240" cy="457200"/>
           </a:xfrm>
           <a:prstGeom prst="rect">
             <a:avLst/>
@@ -15342,230 +15793,20 @@
           <a:noFill/>
         </p:spPr>
         <p:txBody>
-          <a:bodyPr wrap="square" lIns="45720" rIns="45720">
+          <a:bodyPr wrap="square" anchor="t" lIns="45720" rIns="45720">
             <a:spAutoFit/>
           </a:bodyPr>
           <a:lstStyle/>
           <a:p>
-            <a:pPr>
-              <a:spcAft>
-                <a:spcPts val="1400"/>
-              </a:spcAft>
-            </a:pPr>
-            <a:r>
-              <a:rPr sz="2000" b="1">
-                <a:solidFill>
-                  <a:srgbClr val="2AA7B8"/>
-                </a:solidFill>
-                <a:latin typeface="맑은 고딕"/>
-              </a:rPr>
-              <a:t>• </a:t>
-            </a:r>
-            <a:r>
-              <a:rPr sz="2000" b="1">
-                <a:solidFill>
-                  <a:srgbClr val="222222"/>
-                </a:solidFill>
-                <a:latin typeface="맑은 고딕"/>
-              </a:rPr>
-              <a:t>오류의 원인 규명</a:t>
-            </a:r>
-            <a:r>
-              <a:rPr sz="2000" b="0">
-                <a:solidFill>
-                  <a:srgbClr val="222222"/>
-                </a:solidFill>
-                <a:latin typeface="맑은 고딕"/>
-              </a:rPr>
-              <a:t>: 놓친 것이 아니라 라벨 박스 크기 차이임을 확대 확인하고, </a:t>
-            </a:r>
-            <a:r>
-              <a:rPr sz="2000" b="1">
-                <a:solidFill>
-                  <a:srgbClr val="222222"/>
-                </a:solidFill>
-                <a:latin typeface="맑은 고딕"/>
-              </a:rPr>
-              <a:t>중심 거리 평가</a:t>
-            </a:r>
-            <a:r>
-              <a:rPr sz="2000" b="0">
-                <a:solidFill>
-                  <a:srgbClr val="222222"/>
-                </a:solidFill>
-                <a:latin typeface="맑은 고딕"/>
-              </a:rPr>
-              <a:t>로 재채점</a:t>
-            </a:r>
-          </a:p>
-          <a:p>
-            <a:pPr>
-              <a:spcAft>
-                <a:spcPts val="1400"/>
-              </a:spcAft>
-            </a:pPr>
-            <a:r>
-              <a:rPr sz="2000" b="1">
-                <a:solidFill>
-                  <a:srgbClr val="2AA7B8"/>
-                </a:solidFill>
-                <a:latin typeface="맑은 고딕"/>
-              </a:rPr>
-              <a:t>• </a:t>
-            </a:r>
-            <a:r>
-              <a:rPr sz="2000" b="1">
-                <a:solidFill>
-                  <a:srgbClr val="222222"/>
-                </a:solidFill>
-                <a:latin typeface="맑은 고딕"/>
-              </a:rPr>
-              <a:t>점 제거 시험</a:t>
-            </a:r>
-            <a:r>
-              <a:rPr sz="2000" b="0">
-                <a:solidFill>
-                  <a:srgbClr val="222222"/>
-                </a:solidFill>
-                <a:latin typeface="맑은 고딕"/>
-              </a:rPr>
-              <a:t>: 결함을 지워 모델이 점 자체를 보는지 확인 → 지름길 우려 해소</a:t>
-            </a:r>
-          </a:p>
-          <a:p>
-            <a:pPr>
-              <a:spcAft>
-                <a:spcPts val="1400"/>
-              </a:spcAft>
-            </a:pPr>
-            <a:r>
-              <a:rPr sz="2000" b="1">
-                <a:solidFill>
-                  <a:srgbClr val="2AA7B8"/>
-                </a:solidFill>
-                <a:latin typeface="맑은 고딕"/>
-              </a:rPr>
-              <a:t>• </a:t>
-            </a:r>
-            <a:r>
-              <a:rPr sz="2000" b="1">
-                <a:solidFill>
-                  <a:srgbClr val="222222"/>
-                </a:solidFill>
-                <a:latin typeface="맑은 고딕"/>
-              </a:rPr>
-              <a:t>가짜 정상과 합성 점</a:t>
-            </a:r>
-            <a:r>
-              <a:rPr sz="2000" b="0">
-                <a:solidFill>
-                  <a:srgbClr val="222222"/>
-                </a:solidFill>
-                <a:latin typeface="맑은 고딕"/>
-              </a:rPr>
-              <a:t>: 정상 이미지가 없는 데이터에서 오경보·미탐지 조건(옅은 점, 위치, 호기)을 정량화</a:t>
-            </a:r>
-          </a:p>
-          <a:p>
-            <a:pPr>
-              <a:spcAft>
-                <a:spcPts val="1400"/>
-              </a:spcAft>
-            </a:pPr>
-            <a:r>
-              <a:rPr sz="2000" b="1">
-                <a:solidFill>
-                  <a:srgbClr val="2AA7B8"/>
-                </a:solidFill>
-                <a:latin typeface="맑은 고딕"/>
-              </a:rPr>
-              <a:t>• </a:t>
-            </a:r>
-            <a:r>
-              <a:rPr sz="2000" b="1">
-                <a:solidFill>
-                  <a:srgbClr val="222222"/>
-                </a:solidFill>
-                <a:latin typeface="맑은 고딕"/>
-              </a:rPr>
-              <a:t>임계값과 무관한 비교</a:t>
-            </a:r>
-            <a:r>
-              <a:rPr sz="2000" b="0">
-                <a:solidFill>
-                  <a:srgbClr val="222222"/>
-                </a:solidFill>
-                <a:latin typeface="맑은 고딕"/>
-              </a:rPr>
-              <a:t>: AP·오경보 예산으로 임계값 효과를 걷어냄(D-FINE-N의 우위가 임계값 효과임을 확인)</a:t>
-            </a:r>
-          </a:p>
-          <a:p>
-            <a:pPr>
-              <a:spcAft>
-                <a:spcPts val="1400"/>
-              </a:spcAft>
-            </a:pPr>
-            <a:r>
-              <a:rPr sz="2000" b="1">
-                <a:solidFill>
-                  <a:srgbClr val="2AA7B8"/>
-                </a:solidFill>
-                <a:latin typeface="맑은 고딕"/>
-              </a:rPr>
-              <a:t>• </a:t>
-            </a:r>
-            <a:r>
-              <a:rPr sz="2000" b="1">
-                <a:solidFill>
-                  <a:srgbClr val="222222"/>
-                </a:solidFill>
-                <a:latin typeface="맑은 고딕"/>
-              </a:rPr>
-              <a:t>공유 가능한 평가 데이터</a:t>
-            </a:r>
-            <a:r>
-              <a:rPr sz="2000" b="0">
-                <a:solidFill>
-                  <a:srgbClr val="222222"/>
-                </a:solidFill>
-                <a:latin typeface="맑은 고딕"/>
-              </a:rPr>
-              <a:t>: 시드 42 합성 데이터 + 기준본 검증으로 팀 모두가 같은 시험을 재현</a:t>
-            </a:r>
-          </a:p>
-          <a:p>
-            <a:pPr>
-              <a:spcAft>
-                <a:spcPts val="1400"/>
-              </a:spcAft>
-            </a:pPr>
-            <a:r>
-              <a:rPr sz="2000" b="1">
-                <a:solidFill>
-                  <a:srgbClr val="2AA7B8"/>
-                </a:solidFill>
-                <a:latin typeface="맑은 고딕"/>
-              </a:rPr>
-              <a:t>• </a:t>
-            </a:r>
-            <a:r>
-              <a:rPr sz="2000" b="1">
-                <a:solidFill>
-                  <a:srgbClr val="222222"/>
-                </a:solidFill>
-                <a:latin typeface="맑은 고딕"/>
-              </a:rPr>
-              <a:t>분석을 조치로</a:t>
-            </a:r>
-            <a:r>
-              <a:rPr sz="2000" b="0">
-                <a:solidFill>
-                  <a:srgbClr val="222222"/>
-                </a:solidFill>
-                <a:latin typeface="맑은 고딕"/>
-              </a:rPr>
-              <a:t>: 취약점이 모델 선택 가이드와 재검사 구간으로 이어짐</a:t>
+            <a:pPr algn="l"/>
+            <a:r>
+              <a:rPr sz="1100" b="0">
+                <a:solidFill>
+                  <a:srgbClr val="555B66"/>
+                </a:solidFill>
+                <a:latin typeface="맑은 고딕"/>
+              </a:rPr>
+              <a:t>6개 모델을 같은 스크립트·같은 조건(전처리 제외, 모델 연산+후처리, 배치 1, fp32)으로 2회 반복해 잰 중앙값의 범위. GPU는 안정적(±1ms), CPU는 패스마다 크게 변동. 현장 장비 사양은 알지 못한다.</a:t>
             </a:r>
           </a:p>
         </p:txBody>
@@ -15661,7 +15902,7 @@
                 </a:solidFill>
                 <a:latin typeface="맑은 고딕"/>
               </a:rPr>
-              <a:t>코드 구성과 재현성</a:t>
+              <a:t>차별점: 점수를 믿게 만드는 검증</a:t>
             </a:r>
           </a:p>
         </p:txBody>
@@ -15696,7 +15937,7 @@
                 </a:solidFill>
                 <a:latin typeface="맑은 고딕"/>
               </a:rPr>
-              <a:t>전처리 · 학습 · 추론 · 평가 · 분석을 폴더별로 분리하고 실행 명령을 문서화했다</a:t>
+              <a:t>못 찾은 것의 원인을 확인하고, 일반화까지 시험해 모델을 골랐다</a:t>
             </a:r>
           </a:p>
         </p:txBody>
@@ -15744,8 +15985,8 @@
         </p:nvSpPr>
         <p:spPr>
           <a:xfrm>
-            <a:off x="502920" y="6355080"/>
-            <a:ext cx="10180015" cy="365760"/>
+            <a:off x="640080" y="1783080"/>
+            <a:ext cx="10972800" cy="4572000"/>
           </a:xfrm>
           <a:prstGeom prst="rect">
             <a:avLst/>
@@ -15753,41 +15994,6 @@
           <a:noFill/>
         </p:spPr>
         <p:txBody>
-          <a:bodyPr wrap="square" anchor="t" lIns="45720" rIns="45720">
-            <a:spAutoFit/>
-          </a:bodyPr>
-          <a:lstStyle/>
-          <a:p>
-            <a:pPr algn="l"/>
-            <a:r>
-              <a:rPr sz="1100" b="0">
-                <a:solidFill>
-                  <a:srgbClr val="555B66"/>
-                </a:solidFill>
-                <a:latin typeface="맑은 고딕"/>
-              </a:rPr>
-              <a:t>전처리 코드는 이총의 브랜치에 있어 main 병합이 필요하다. 한 번에 실행하는 스크립트와 테스트 예측 결과 CSV는 제출 전에 정리할 항목이다 [작성 필요].</a:t>
-            </a:r>
-          </a:p>
-        </p:txBody>
-      </p:sp>
-      <p:sp>
-        <p:nvSpPr>
-          <p:cNvPr id="7" name="TextBox 6"/>
-          <p:cNvSpPr txBox="1"/>
-          <p:nvPr/>
-        </p:nvSpPr>
-        <p:spPr>
-          <a:xfrm>
-            <a:off x="640080" y="1783080"/>
-            <a:ext cx="5577840" cy="4572000"/>
-          </a:xfrm>
-          <a:prstGeom prst="rect">
-            <a:avLst/>
-          </a:prstGeom>
-          <a:noFill/>
-        </p:spPr>
-        <p:txBody>
           <a:bodyPr wrap="square" lIns="45720" rIns="45720">
             <a:spAutoFit/>
           </a:bodyPr>
@@ -15795,11 +16001,11 @@
           <a:p>
             <a:pPr>
               <a:spcAft>
-                <a:spcPts val="900"/>
+                <a:spcPts val="1400"/>
               </a:spcAft>
             </a:pPr>
             <a:r>
-              <a:rPr sz="1700" b="1">
+              <a:rPr sz="2000" b="1">
                 <a:solidFill>
                   <a:srgbClr val="2AA7B8"/>
                 </a:solidFill>
@@ -15808,23 +16014,50 @@
               <a:t>• </a:t>
             </a:r>
             <a:r>
-              <a:rPr sz="1700" b="0">
-                <a:solidFill>
-                  <a:srgbClr val="222222"/>
-                </a:solidFill>
-                <a:latin typeface="맑은 고딕"/>
-              </a:rPr>
-              <a:t>환경: conda KAMP(Python 3.10), torch 2.6, 한글 경로용 PYTHONUTF8=1, requirements.txt</a:t>
+              <a:rPr sz="2000" b="1">
+                <a:solidFill>
+                  <a:srgbClr val="222222"/>
+                </a:solidFill>
+                <a:latin typeface="맑은 고딕"/>
+              </a:rPr>
+              <a:t>오류의 원인 규명</a:t>
+            </a:r>
+            <a:r>
+              <a:rPr sz="2000" b="0">
+                <a:solidFill>
+                  <a:srgbClr val="222222"/>
+                </a:solidFill>
+                <a:latin typeface="맑은 고딕"/>
+              </a:rPr>
+              <a:t>: 놓친 것이 아니라 라벨 박스 크기 차이임을 확대 확인하고, </a:t>
+            </a:r>
+            <a:r>
+              <a:rPr sz="2000" b="1">
+                <a:solidFill>
+                  <a:srgbClr val="222222"/>
+                </a:solidFill>
+                <a:latin typeface="맑은 고딕"/>
+              </a:rPr>
+              <a:t>중심 거리 평가</a:t>
+            </a:r>
+            <a:r>
+              <a:rPr sz="2000" b="0">
+                <a:solidFill>
+                  <a:srgbClr val="222222"/>
+                </a:solidFill>
+                <a:latin typeface="맑은 고딕"/>
+              </a:rPr>
+              <a:t>로 재채점</a:t>
             </a:r>
           </a:p>
           <a:p>
             <a:pPr>
               <a:spcAft>
-                <a:spcPts val="900"/>
+                <a:spcPts val="1400"/>
               </a:spcAft>
             </a:pPr>
             <a:r>
-              <a:rPr sz="1700" b="1">
+              <a:rPr sz="2000" b="1">
                 <a:solidFill>
                   <a:srgbClr val="2AA7B8"/>
                 </a:solidFill>
@@ -15833,23 +16066,32 @@
               <a:t>• </a:t>
             </a:r>
             <a:r>
-              <a:rPr sz="1700" b="0">
-                <a:solidFill>
-                  <a:srgbClr val="222222"/>
-                </a:solidFill>
-                <a:latin typeface="맑은 고딕"/>
-              </a:rPr>
-              <a:t>src/yolov3/: 베이스라인(호환 수정본)</a:t>
+              <a:rPr sz="2000" b="1">
+                <a:solidFill>
+                  <a:srgbClr val="222222"/>
+                </a:solidFill>
+                <a:latin typeface="맑은 고딕"/>
+              </a:rPr>
+              <a:t>점 제거 시험</a:t>
+            </a:r>
+            <a:r>
+              <a:rPr sz="2000" b="0">
+                <a:solidFill>
+                  <a:srgbClr val="222222"/>
+                </a:solidFill>
+                <a:latin typeface="맑은 고딕"/>
+              </a:rPr>
+              <a:t>: 결함을 지워 모델이 점 자체를 보는지 확인 → 지름길 우려 해소</a:t>
             </a:r>
           </a:p>
           <a:p>
             <a:pPr>
               <a:spcAft>
-                <a:spcPts val="900"/>
+                <a:spcPts val="1400"/>
               </a:spcAft>
             </a:pPr>
             <a:r>
-              <a:rPr sz="1700" b="1">
+              <a:rPr sz="2000" b="1">
                 <a:solidFill>
                   <a:srgbClr val="2AA7B8"/>
                 </a:solidFill>
@@ -15858,23 +16100,32 @@
               <a:t>• </a:t>
             </a:r>
             <a:r>
-              <a:rPr sz="1700" b="0">
-                <a:solidFill>
-                  <a:srgbClr val="222222"/>
-                </a:solidFill>
-                <a:latin typeface="맑은 고딕"/>
-              </a:rPr>
-              <a:t>src/minyeop/: Faster R-CNN, MobileNet, YOLOv3-tiny, 팀원 모델 평가, 분석(점 제거, 가짜 정상, 합성 점, 호기 통계)</a:t>
+              <a:rPr sz="2000" b="1">
+                <a:solidFill>
+                  <a:srgbClr val="222222"/>
+                </a:solidFill>
+                <a:latin typeface="맑은 고딕"/>
+              </a:rPr>
+              <a:t>가짜 정상과 합성 점</a:t>
+            </a:r>
+            <a:r>
+              <a:rPr sz="2000" b="0">
+                <a:solidFill>
+                  <a:srgbClr val="222222"/>
+                </a:solidFill>
+                <a:latin typeface="맑은 고딕"/>
+              </a:rPr>
+              <a:t>: 정상 이미지가 없는 데이터에서 오경보·미탐지 조건(옅은 점, 위치, 호기)을 정량화</a:t>
             </a:r>
           </a:p>
           <a:p>
             <a:pPr>
               <a:spcAft>
-                <a:spcPts val="900"/>
+                <a:spcPts val="1400"/>
               </a:spcAft>
             </a:pPr>
             <a:r>
-              <a:rPr sz="1700" b="1">
+              <a:rPr sz="2000" b="1">
                 <a:solidFill>
                   <a:srgbClr val="2AA7B8"/>
                 </a:solidFill>
@@ -15883,23 +16134,32 @@
               <a:t>• </a:t>
             </a:r>
             <a:r>
-              <a:rPr sz="1700" b="0">
-                <a:solidFill>
-                  <a:srgbClr val="222222"/>
-                </a:solidFill>
-                <a:latin typeface="맑은 고딕"/>
-              </a:rPr>
-              <a:t>scripts/synth_eval.py: 시드 42 합성 평가 데이터 생성기</a:t>
+              <a:rPr sz="2000" b="1">
+                <a:solidFill>
+                  <a:srgbClr val="222222"/>
+                </a:solidFill>
+                <a:latin typeface="맑은 고딕"/>
+              </a:rPr>
+              <a:t>임계값과 무관한 비교</a:t>
+            </a:r>
+            <a:r>
+              <a:rPr sz="2000" b="0">
+                <a:solidFill>
+                  <a:srgbClr val="222222"/>
+                </a:solidFill>
+                <a:latin typeface="맑은 고딕"/>
+              </a:rPr>
+              <a:t>: AP·오경보 예산으로 임계값 효과를 걷어냄(D-FINE-N의 우위가 임계값 효과임을 확인)</a:t>
             </a:r>
           </a:p>
           <a:p>
             <a:pPr>
               <a:spcAft>
-                <a:spcPts val="900"/>
+                <a:spcPts val="1400"/>
               </a:spcAft>
             </a:pPr>
             <a:r>
-              <a:rPr sz="1700" b="1">
+              <a:rPr sz="2000" b="1">
                 <a:solidFill>
                   <a:srgbClr val="2AA7B8"/>
                 </a:solidFill>
@@ -15908,46 +16168,32 @@
               <a:t>• </a:t>
             </a:r>
             <a:r>
-              <a:rPr sz="1700" b="0">
-                <a:solidFill>
-                  <a:srgbClr val="222222"/>
-                </a:solidFill>
-                <a:latin typeface="맑은 고딕"/>
-              </a:rPr>
-              <a:t>docs/: 지표, 실험 결과 표, 분석 해석</a:t>
-            </a:r>
-          </a:p>
-        </p:txBody>
-      </p:sp>
-      <p:sp>
-        <p:nvSpPr>
-          <p:cNvPr id="8" name="TextBox 7"/>
-          <p:cNvSpPr txBox="1"/>
-          <p:nvPr/>
-        </p:nvSpPr>
-        <p:spPr>
-          <a:xfrm>
-            <a:off x="6400800" y="1783080"/>
-            <a:ext cx="5394960" cy="4572000"/>
-          </a:xfrm>
-          <a:prstGeom prst="rect">
-            <a:avLst/>
-          </a:prstGeom>
-          <a:noFill/>
-        </p:spPr>
-        <p:txBody>
-          <a:bodyPr wrap="square" lIns="45720" rIns="45720">
-            <a:spAutoFit/>
-          </a:bodyPr>
-          <a:lstStyle/>
+              <a:rPr sz="2000" b="1">
+                <a:solidFill>
+                  <a:srgbClr val="222222"/>
+                </a:solidFill>
+                <a:latin typeface="맑은 고딕"/>
+              </a:rPr>
+              <a:t>공유 가능한 평가 데이터</a:t>
+            </a:r>
+            <a:r>
+              <a:rPr sz="2000" b="0">
+                <a:solidFill>
+                  <a:srgbClr val="222222"/>
+                </a:solidFill>
+                <a:latin typeface="맑은 고딕"/>
+              </a:rPr>
+              <a:t>: 시드 42 합성 데이터 + 기준본 검증으로 팀 모두가 같은 시험을 재현</a:t>
+            </a:r>
+          </a:p>
           <a:p>
             <a:pPr>
               <a:spcAft>
-                <a:spcPts val="900"/>
+                <a:spcPts val="1400"/>
               </a:spcAft>
             </a:pPr>
             <a:r>
-              <a:rPr sz="1700" b="1">
+              <a:rPr sz="2000" b="1">
                 <a:solidFill>
                   <a:srgbClr val="2AA7B8"/>
                 </a:solidFill>
@@ -15956,131 +16202,22 @@
               <a:t>• </a:t>
             </a:r>
             <a:r>
-              <a:rPr sz="1700" b="0">
-                <a:solidFill>
-                  <a:srgbClr val="222222"/>
-                </a:solidFill>
-                <a:latin typeface="맑은 고딕"/>
-              </a:rPr>
-              <a:t>평가 규칙: 임계값은 </a:t>
-            </a:r>
-            <a:r>
-              <a:rPr sz="1700" b="1">
-                <a:solidFill>
-                  <a:srgbClr val="222222"/>
-                </a:solidFill>
-                <a:latin typeface="맑은 고딕"/>
-              </a:rPr>
-              <a:t>val에서 고정</a:t>
-            </a:r>
-            <a:r>
-              <a:rPr sz="1700" b="0">
-                <a:solidFill>
-                  <a:srgbClr val="222222"/>
-                </a:solidFill>
-                <a:latin typeface="맑은 고딕"/>
-              </a:rPr>
-              <a:t>, test는 한 번만</a:t>
-            </a:r>
-          </a:p>
-          <a:p>
-            <a:pPr>
-              <a:spcAft>
-                <a:spcPts val="900"/>
-              </a:spcAft>
-            </a:pPr>
-            <a:r>
-              <a:rPr sz="1700" b="1">
-                <a:solidFill>
-                  <a:srgbClr val="2AA7B8"/>
-                </a:solidFill>
-                <a:latin typeface="맑은 고딕"/>
-              </a:rPr>
-              <a:t>• </a:t>
-            </a:r>
-            <a:r>
-              <a:rPr sz="1700" b="0">
-                <a:solidFill>
-                  <a:srgbClr val="222222"/>
-                </a:solidFill>
-                <a:latin typeface="맑은 고딕"/>
-              </a:rPr>
-              <a:t>데이터 버전: manifest.csv의 sha256으로 확인</a:t>
-            </a:r>
-          </a:p>
-          <a:p>
-            <a:pPr>
-              <a:spcAft>
-                <a:spcPts val="900"/>
-              </a:spcAft>
-            </a:pPr>
-            <a:r>
-              <a:rPr sz="1700" b="1">
-                <a:solidFill>
-                  <a:srgbClr val="2AA7B8"/>
-                </a:solidFill>
-                <a:latin typeface="맑은 고딕"/>
-              </a:rPr>
-              <a:t>• </a:t>
-            </a:r>
-            <a:r>
-              <a:rPr sz="1700" b="0">
-                <a:solidFill>
-                  <a:srgbClr val="222222"/>
-                </a:solidFill>
-                <a:latin typeface="맑은 고딕"/>
-              </a:rPr>
-              <a:t>합성 평가 데이터: 기준본과 --verify로 비교(위치·조건·픽셀 해시)</a:t>
-            </a:r>
-          </a:p>
-          <a:p>
-            <a:pPr>
-              <a:spcAft>
-                <a:spcPts val="900"/>
-              </a:spcAft>
-            </a:pPr>
-            <a:r>
-              <a:rPr sz="1700" b="1">
-                <a:solidFill>
-                  <a:srgbClr val="2AA7B8"/>
-                </a:solidFill>
-                <a:latin typeface="맑은 고딕"/>
-              </a:rPr>
-              <a:t>• </a:t>
-            </a:r>
-            <a:r>
-              <a:rPr sz="1700" b="0">
-                <a:solidFill>
-                  <a:srgbClr val="222222"/>
-                </a:solidFill>
-                <a:latin typeface="맑은 고딕"/>
-              </a:rPr>
-              <a:t>모델 선정: val 부트스트랩 구간으로 "동률"을 객관적으로 판정</a:t>
-            </a:r>
-          </a:p>
-          <a:p>
-            <a:pPr>
-              <a:spcAft>
-                <a:spcPts val="900"/>
-              </a:spcAft>
-            </a:pPr>
-            <a:r>
-              <a:rPr sz="1700" b="1">
-                <a:solidFill>
-                  <a:srgbClr val="2AA7B8"/>
-                </a:solidFill>
-                <a:latin typeface="맑은 고딕"/>
-              </a:rPr>
-              <a:t>• </a:t>
-            </a:r>
-            <a:r>
-              <a:rPr sz="1700" b="0">
-                <a:solidFill>
-                  <a:srgbClr val="222222"/>
-                </a:solidFill>
-                <a:latin typeface="맑은 고딕"/>
-              </a:rPr>
-              <a:t>모든 수치의 출처 파일을 docs/와 runs/에 보존(예측 JSON은 제외)</a:t>
+              <a:rPr sz="2000" b="1">
+                <a:solidFill>
+                  <a:srgbClr val="222222"/>
+                </a:solidFill>
+                <a:latin typeface="맑은 고딕"/>
+              </a:rPr>
+              <a:t>분석을 조치로</a:t>
+            </a:r>
+            <a:r>
+              <a:rPr sz="2000" b="0">
+                <a:solidFill>
+                  <a:srgbClr val="222222"/>
+                </a:solidFill>
+                <a:latin typeface="맑은 고딕"/>
+              </a:rPr>
+              <a:t>: 취약점이 모델 선택 가이드와 재검사 구간으로 이어짐</a:t>
             </a:r>
           </a:p>
         </p:txBody>
@@ -16525,7 +16662,7 @@
                 </a:solidFill>
                 <a:latin typeface="맑은 고딕"/>
               </a:rPr>
-              <a:t>한계와 향후 과제</a:t>
+              <a:t>코드 구성과 재현성</a:t>
             </a:r>
           </a:p>
         </p:txBody>
@@ -16560,7 +16697,7 @@
                 </a:solidFill>
                 <a:latin typeface="맑은 고딕"/>
               </a:rPr>
-              <a:t>숨기지 않고 적는다</a:t>
+              <a:t>전처리 · 학습 · 추론 · 평가 · 분석을 폴더별로 분리하고 실행 명령을 문서화했다</a:t>
             </a:r>
           </a:p>
         </p:txBody>
@@ -16608,8 +16745,8 @@
         </p:nvSpPr>
         <p:spPr>
           <a:xfrm>
-            <a:off x="640080" y="1783080"/>
-            <a:ext cx="10972800" cy="4572000"/>
+            <a:off x="502920" y="6355080"/>
+            <a:ext cx="10180015" cy="365760"/>
           </a:xfrm>
           <a:prstGeom prst="rect">
             <a:avLst/>
@@ -16617,6 +16754,41 @@
           <a:noFill/>
         </p:spPr>
         <p:txBody>
+          <a:bodyPr wrap="square" anchor="t" lIns="45720" rIns="45720">
+            <a:spAutoFit/>
+          </a:bodyPr>
+          <a:lstStyle/>
+          <a:p>
+            <a:pPr algn="l"/>
+            <a:r>
+              <a:rPr sz="1100" b="0">
+                <a:solidFill>
+                  <a:srgbClr val="555B66"/>
+                </a:solidFill>
+                <a:latin typeface="맑은 고딕"/>
+              </a:rPr>
+              <a:t>전처리 코드는 이총의 브랜치에 있어 main 병합이 필요하다. 한 번에 실행하는 스크립트와 테스트 예측 결과 CSV는 제출 전에 정리할 항목이다 [작성 필요].</a:t>
+            </a:r>
+          </a:p>
+        </p:txBody>
+      </p:sp>
+      <p:sp>
+        <p:nvSpPr>
+          <p:cNvPr id="7" name="TextBox 6"/>
+          <p:cNvSpPr txBox="1"/>
+          <p:nvPr/>
+        </p:nvSpPr>
+        <p:spPr>
+          <a:xfrm>
+            <a:off x="640080" y="1783080"/>
+            <a:ext cx="5577840" cy="4572000"/>
+          </a:xfrm>
+          <a:prstGeom prst="rect">
+            <a:avLst/>
+          </a:prstGeom>
+          <a:noFill/>
+        </p:spPr>
+        <p:txBody>
           <a:bodyPr wrap="square" lIns="45720" rIns="45720">
             <a:spAutoFit/>
           </a:bodyPr>
@@ -16624,11 +16796,11 @@
           <a:p>
             <a:pPr>
               <a:spcAft>
-                <a:spcPts val="1100"/>
+                <a:spcPts val="900"/>
               </a:spcAft>
             </a:pPr>
             <a:r>
-              <a:rPr sz="1800" b="1">
+              <a:rPr sz="1700" b="1">
                 <a:solidFill>
                   <a:srgbClr val="2AA7B8"/>
                 </a:solidFill>
@@ -16637,41 +16809,23 @@
               <a:t>• </a:t>
             </a:r>
             <a:r>
-              <a:rPr sz="1800" b="0">
-                <a:solidFill>
-                  <a:srgbClr val="222222"/>
-                </a:solidFill>
-                <a:latin typeface="맑은 고딕"/>
-              </a:rPr>
-              <a:t>합성 점과 가짜 정상은 </a:t>
-            </a:r>
-            <a:r>
-              <a:rPr sz="1800" b="1">
-                <a:solidFill>
-                  <a:srgbClr val="222222"/>
-                </a:solidFill>
-                <a:latin typeface="맑은 고딕"/>
-              </a:rPr>
-              <a:t>인위적인 이미지</a:t>
-            </a:r>
-            <a:r>
-              <a:rPr sz="1800" b="0">
-                <a:solidFill>
-                  <a:srgbClr val="222222"/>
-                </a:solidFill>
-                <a:latin typeface="맑은 고딕"/>
-              </a:rPr>
-              <a:t>다. 실제 현장 성능이 아니라 상대 비교와 취약점 탐색으로만 해석한다</a:t>
+              <a:rPr sz="1700" b="0">
+                <a:solidFill>
+                  <a:srgbClr val="222222"/>
+                </a:solidFill>
+                <a:latin typeface="맑은 고딕"/>
+              </a:rPr>
+              <a:t>환경: conda KAMP(Python 3.10), torch 2.6, 한글 경로용 PYTHONUTF8=1, requirements.txt</a:t>
             </a:r>
           </a:p>
           <a:p>
             <a:pPr>
               <a:spcAft>
-                <a:spcPts val="1100"/>
+                <a:spcPts val="900"/>
               </a:spcAft>
             </a:pPr>
             <a:r>
-              <a:rPr sz="1800" b="1">
+              <a:rPr sz="1700" b="1">
                 <a:solidFill>
                   <a:srgbClr val="2AA7B8"/>
                 </a:solidFill>
@@ -16680,41 +16834,23 @@
               <a:t>• </a:t>
             </a:r>
             <a:r>
-              <a:rPr sz="1800" b="0">
-                <a:solidFill>
-                  <a:srgbClr val="222222"/>
-                </a:solidFill>
-                <a:latin typeface="맑은 고딕"/>
-              </a:rPr>
-              <a:t>강건성 시험은 </a:t>
-            </a:r>
-            <a:r>
-              <a:rPr sz="1800" b="1">
-                <a:solidFill>
-                  <a:srgbClr val="222222"/>
-                </a:solidFill>
-                <a:latin typeface="맑은 고딕"/>
-              </a:rPr>
-              <a:t>test 이미지</a:t>
-            </a:r>
-            <a:r>
-              <a:rPr sz="1800" b="0">
-                <a:solidFill>
-                  <a:srgbClr val="222222"/>
-                </a:solidFill>
-                <a:latin typeface="맑은 고딕"/>
-              </a:rPr>
-              <a:t>로 먼저 수행했다. 모델 선정에는 val 지표만 썼지만, 선정 근거로 쓰려면 val로 반복해야 한다</a:t>
+              <a:rPr sz="1700" b="0">
+                <a:solidFill>
+                  <a:srgbClr val="222222"/>
+                </a:solidFill>
+                <a:latin typeface="맑은 고딕"/>
+              </a:rPr>
+              <a:t>src/yolov3/: 베이스라인(호환 수정본)</a:t>
             </a:r>
           </a:p>
           <a:p>
             <a:pPr>
               <a:spcAft>
-                <a:spcPts val="1100"/>
+                <a:spcPts val="900"/>
               </a:spcAft>
             </a:pPr>
             <a:r>
-              <a:rPr sz="1800" b="1">
+              <a:rPr sz="1700" b="1">
                 <a:solidFill>
                   <a:srgbClr val="2AA7B8"/>
                 </a:solidFill>
@@ -16723,23 +16859,23 @@
               <a:t>• </a:t>
             </a:r>
             <a:r>
-              <a:rPr sz="1800" b="0">
-                <a:solidFill>
-                  <a:srgbClr val="222222"/>
-                </a:solidFill>
-                <a:latin typeface="맑은 고딕"/>
-              </a:rPr>
-              <a:t>'미탐지 우선'이라는 우선순위는 결과를 본 뒤 정했다. 오경보 우선이면 선정이 바뀐다</a:t>
+              <a:rPr sz="1700" b="0">
+                <a:solidFill>
+                  <a:srgbClr val="222222"/>
+                </a:solidFill>
+                <a:latin typeface="맑은 고딕"/>
+              </a:rPr>
+              <a:t>src/minyeop/: Faster R-CNN, MobileNet, YOLOv3-tiny, 팀원 모델 평가, 분석(점 제거, 가짜 정상, 합성 점, 호기 통계)</a:t>
             </a:r>
           </a:p>
           <a:p>
             <a:pPr>
               <a:spcAft>
-                <a:spcPts val="1100"/>
+                <a:spcPts val="900"/>
               </a:spcAft>
             </a:pPr>
             <a:r>
-              <a:rPr sz="1800" b="1">
+              <a:rPr sz="1700" b="1">
                 <a:solidFill>
                   <a:srgbClr val="2AA7B8"/>
                 </a:solidFill>
@@ -16748,41 +16884,23 @@
               <a:t>• </a:t>
             </a:r>
             <a:r>
-              <a:rPr sz="1800" b="0">
-                <a:solidFill>
-                  <a:srgbClr val="222222"/>
-                </a:solidFill>
-                <a:latin typeface="맑은 고딕"/>
-              </a:rPr>
-              <a:t>표시(색 사각형) 제거의 </a:t>
-            </a:r>
-            <a:r>
-              <a:rPr sz="1800" b="1">
-                <a:solidFill>
-                  <a:srgbClr val="222222"/>
-                </a:solidFill>
-                <a:latin typeface="맑은 고딕"/>
-              </a:rPr>
-              <a:t>흔적</a:t>
-            </a:r>
-            <a:r>
-              <a:rPr sz="1800" b="0">
-                <a:solidFill>
-                  <a:srgbClr val="222222"/>
-                </a:solidFill>
-                <a:latin typeface="맑은 고딕"/>
-              </a:rPr>
-              <a:t>이 단서가 되는지는 검증하지 못했다</a:t>
+              <a:rPr sz="1700" b="0">
+                <a:solidFill>
+                  <a:srgbClr val="222222"/>
+                </a:solidFill>
+                <a:latin typeface="맑은 고딕"/>
+              </a:rPr>
+              <a:t>scripts/synth_eval.py: 시드 42 합성 평가 데이터 생성기</a:t>
             </a:r>
           </a:p>
           <a:p>
             <a:pPr>
               <a:spcAft>
-                <a:spcPts val="1100"/>
+                <a:spcPts val="900"/>
               </a:spcAft>
             </a:pPr>
             <a:r>
-              <a:rPr sz="1800" b="1">
+              <a:rPr sz="1700" b="1">
                 <a:solidFill>
                   <a:srgbClr val="2AA7B8"/>
                 </a:solidFill>
@@ -16791,23 +16909,46 @@
               <a:t>• </a:t>
             </a:r>
             <a:r>
-              <a:rPr sz="1800" b="0">
-                <a:solidFill>
-                  <a:srgbClr val="222222"/>
-                </a:solidFill>
-                <a:latin typeface="맑은 고딕"/>
-              </a:rPr>
-              <a:t>학습 시드가 하나이고, 팀원 모델은 학습 조건이 우리와 다르다(임계값은 우리 규칙으로 재선정)</a:t>
-            </a:r>
-          </a:p>
+              <a:rPr sz="1700" b="0">
+                <a:solidFill>
+                  <a:srgbClr val="222222"/>
+                </a:solidFill>
+                <a:latin typeface="맑은 고딕"/>
+              </a:rPr>
+              <a:t>docs/: 지표, 실험 결과 표, 분석 해석</a:t>
+            </a:r>
+          </a:p>
+        </p:txBody>
+      </p:sp>
+      <p:sp>
+        <p:nvSpPr>
+          <p:cNvPr id="8" name="TextBox 7"/>
+          <p:cNvSpPr txBox="1"/>
+          <p:nvPr/>
+        </p:nvSpPr>
+        <p:spPr>
+          <a:xfrm>
+            <a:off x="6400800" y="1783080"/>
+            <a:ext cx="5394960" cy="4572000"/>
+          </a:xfrm>
+          <a:prstGeom prst="rect">
+            <a:avLst/>
+          </a:prstGeom>
+          <a:noFill/>
+        </p:spPr>
+        <p:txBody>
+          <a:bodyPr wrap="square" lIns="45720" rIns="45720">
+            <a:spAutoFit/>
+          </a:bodyPr>
+          <a:lstStyle/>
           <a:p>
             <a:pPr>
               <a:spcAft>
-                <a:spcPts val="1100"/>
+                <a:spcPts val="900"/>
               </a:spcAft>
             </a:pPr>
             <a:r>
-              <a:rPr sz="1800" b="1">
+              <a:rPr sz="1700" b="1">
                 <a:solidFill>
                   <a:srgbClr val="2AA7B8"/>
                 </a:solidFill>
@@ -16816,23 +16957,41 @@
               <a:t>• </a:t>
             </a:r>
             <a:r>
-              <a:rPr sz="1800" b="0">
-                <a:solidFill>
-                  <a:srgbClr val="222222"/>
-                </a:solidFill>
-                <a:latin typeface="맑은 고딕"/>
-              </a:rPr>
-              <a:t>속도는 노트북에서 측정했고 실행마다 변동이 크다. 현장 장비 사양과 재검사 비용은 알지 못한다</a:t>
+              <a:rPr sz="1700" b="0">
+                <a:solidFill>
+                  <a:srgbClr val="222222"/>
+                </a:solidFill>
+                <a:latin typeface="맑은 고딕"/>
+              </a:rPr>
+              <a:t>평가 규칙: 임계값은 </a:t>
+            </a:r>
+            <a:r>
+              <a:rPr sz="1700" b="1">
+                <a:solidFill>
+                  <a:srgbClr val="222222"/>
+                </a:solidFill>
+                <a:latin typeface="맑은 고딕"/>
+              </a:rPr>
+              <a:t>val에서 고정</a:t>
+            </a:r>
+            <a:r>
+              <a:rPr sz="1700" b="0">
+                <a:solidFill>
+                  <a:srgbClr val="222222"/>
+                </a:solidFill>
+                <a:latin typeface="맑은 고딕"/>
+              </a:rPr>
+              <a:t>, test는 한 번만</a:t>
             </a:r>
           </a:p>
           <a:p>
             <a:pPr>
               <a:spcAft>
-                <a:spcPts val="1100"/>
+                <a:spcPts val="900"/>
               </a:spcAft>
             </a:pPr>
             <a:r>
-              <a:rPr sz="1800" b="1">
+              <a:rPr sz="1700" b="1">
                 <a:solidFill>
                   <a:srgbClr val="2AA7B8"/>
                 </a:solidFill>
@@ -16841,13 +17000,88 @@
               <a:t>• </a:t>
             </a:r>
             <a:r>
-              <a:rPr sz="1800" b="0">
-                <a:solidFill>
-                  <a:srgbClr val="222222"/>
-                </a:solidFill>
-                <a:latin typeface="맑은 고딕"/>
-              </a:rPr>
-              <a:t>향후: 흔적 검증(원본 BMP 2x2 실험), 실제 정상 제품 이미지 확보, val 반복, 합성 점 대조군(s=0)</a:t>
+              <a:rPr sz="1700" b="0">
+                <a:solidFill>
+                  <a:srgbClr val="222222"/>
+                </a:solidFill>
+                <a:latin typeface="맑은 고딕"/>
+              </a:rPr>
+              <a:t>데이터 버전: manifest.csv의 sha256으로 확인</a:t>
+            </a:r>
+          </a:p>
+          <a:p>
+            <a:pPr>
+              <a:spcAft>
+                <a:spcPts val="900"/>
+              </a:spcAft>
+            </a:pPr>
+            <a:r>
+              <a:rPr sz="1700" b="1">
+                <a:solidFill>
+                  <a:srgbClr val="2AA7B8"/>
+                </a:solidFill>
+                <a:latin typeface="맑은 고딕"/>
+              </a:rPr>
+              <a:t>• </a:t>
+            </a:r>
+            <a:r>
+              <a:rPr sz="1700" b="0">
+                <a:solidFill>
+                  <a:srgbClr val="222222"/>
+                </a:solidFill>
+                <a:latin typeface="맑은 고딕"/>
+              </a:rPr>
+              <a:t>합성 평가 데이터: 기준본과 --verify로 비교(위치·조건·픽셀 해시)</a:t>
+            </a:r>
+          </a:p>
+          <a:p>
+            <a:pPr>
+              <a:spcAft>
+                <a:spcPts val="900"/>
+              </a:spcAft>
+            </a:pPr>
+            <a:r>
+              <a:rPr sz="1700" b="1">
+                <a:solidFill>
+                  <a:srgbClr val="2AA7B8"/>
+                </a:solidFill>
+                <a:latin typeface="맑은 고딕"/>
+              </a:rPr>
+              <a:t>• </a:t>
+            </a:r>
+            <a:r>
+              <a:rPr sz="1700" b="0">
+                <a:solidFill>
+                  <a:srgbClr val="222222"/>
+                </a:solidFill>
+                <a:latin typeface="맑은 고딕"/>
+              </a:rPr>
+              <a:t>모델 선정: val 부트스트랩 구간으로 "동률"을 객관적으로 판정</a:t>
+            </a:r>
+          </a:p>
+          <a:p>
+            <a:pPr>
+              <a:spcAft>
+                <a:spcPts val="900"/>
+              </a:spcAft>
+            </a:pPr>
+            <a:r>
+              <a:rPr sz="1700" b="1">
+                <a:solidFill>
+                  <a:srgbClr val="2AA7B8"/>
+                </a:solidFill>
+                <a:latin typeface="맑은 고딕"/>
+              </a:rPr>
+              <a:t>• </a:t>
+            </a:r>
+            <a:r>
+              <a:rPr sz="1700" b="0">
+                <a:solidFill>
+                  <a:srgbClr val="222222"/>
+                </a:solidFill>
+                <a:latin typeface="맑은 고딕"/>
+              </a:rPr>
+              <a:t>모든 수치의 출처 파일을 docs/와 runs/에 보존(예측 JSON은 제외)</a:t>
             </a:r>
           </a:p>
         </p:txBody>
@@ -16943,7 +17177,7 @@
                 </a:solidFill>
                 <a:latin typeface="맑은 고딕"/>
               </a:rPr>
-              <a:t>결론</a:t>
+              <a:t>한계와 향후 과제</a:t>
             </a:r>
           </a:p>
         </p:txBody>
@@ -16951,6 +17185,41 @@
       <p:sp>
         <p:nvSpPr>
           <p:cNvPr id="4" name="TextBox 3"/>
+          <p:cNvSpPr txBox="1"/>
+          <p:nvPr/>
+        </p:nvSpPr>
+        <p:spPr>
+          <a:xfrm>
+            <a:off x="502920" y="1005840"/>
+            <a:ext cx="11185855" cy="640080"/>
+          </a:xfrm>
+          <a:prstGeom prst="rect">
+            <a:avLst/>
+          </a:prstGeom>
+          <a:noFill/>
+        </p:spPr>
+        <p:txBody>
+          <a:bodyPr wrap="square" anchor="t" lIns="45720" rIns="45720">
+            <a:spAutoFit/>
+          </a:bodyPr>
+          <a:lstStyle/>
+          <a:p>
+            <a:pPr algn="l"/>
+            <a:r>
+              <a:rPr sz="1800" b="1">
+                <a:solidFill>
+                  <a:srgbClr val="2AA7B8"/>
+                </a:solidFill>
+                <a:latin typeface="맑은 고딕"/>
+              </a:rPr>
+              <a:t>숨기지 않고 적는다</a:t>
+            </a:r>
+          </a:p>
+        </p:txBody>
+      </p:sp>
+      <p:sp>
+        <p:nvSpPr>
+          <p:cNvPr id="5" name="TextBox 4"/>
           <p:cNvSpPr txBox="1"/>
           <p:nvPr/>
         </p:nvSpPr>
@@ -16985,6 +17254,389 @@
       </p:sp>
       <p:sp>
         <p:nvSpPr>
+          <p:cNvPr id="6" name="TextBox 5"/>
+          <p:cNvSpPr txBox="1"/>
+          <p:nvPr/>
+        </p:nvSpPr>
+        <p:spPr>
+          <a:xfrm>
+            <a:off x="640080" y="1783080"/>
+            <a:ext cx="10972800" cy="4572000"/>
+          </a:xfrm>
+          <a:prstGeom prst="rect">
+            <a:avLst/>
+          </a:prstGeom>
+          <a:noFill/>
+        </p:spPr>
+        <p:txBody>
+          <a:bodyPr wrap="square" lIns="45720" rIns="45720">
+            <a:spAutoFit/>
+          </a:bodyPr>
+          <a:lstStyle/>
+          <a:p>
+            <a:pPr>
+              <a:spcAft>
+                <a:spcPts val="1100"/>
+              </a:spcAft>
+            </a:pPr>
+            <a:r>
+              <a:rPr sz="1800" b="1">
+                <a:solidFill>
+                  <a:srgbClr val="2AA7B8"/>
+                </a:solidFill>
+                <a:latin typeface="맑은 고딕"/>
+              </a:rPr>
+              <a:t>• </a:t>
+            </a:r>
+            <a:r>
+              <a:rPr sz="1800" b="0">
+                <a:solidFill>
+                  <a:srgbClr val="222222"/>
+                </a:solidFill>
+                <a:latin typeface="맑은 고딕"/>
+              </a:rPr>
+              <a:t>합성 점과 가짜 정상은 </a:t>
+            </a:r>
+            <a:r>
+              <a:rPr sz="1800" b="1">
+                <a:solidFill>
+                  <a:srgbClr val="222222"/>
+                </a:solidFill>
+                <a:latin typeface="맑은 고딕"/>
+              </a:rPr>
+              <a:t>인위적인 이미지</a:t>
+            </a:r>
+            <a:r>
+              <a:rPr sz="1800" b="0">
+                <a:solidFill>
+                  <a:srgbClr val="222222"/>
+                </a:solidFill>
+                <a:latin typeface="맑은 고딕"/>
+              </a:rPr>
+              <a:t>다. 실제 현장 성능이 아니라 상대 비교와 취약점 탐색으로만 해석한다</a:t>
+            </a:r>
+          </a:p>
+          <a:p>
+            <a:pPr>
+              <a:spcAft>
+                <a:spcPts val="1100"/>
+              </a:spcAft>
+            </a:pPr>
+            <a:r>
+              <a:rPr sz="1800" b="1">
+                <a:solidFill>
+                  <a:srgbClr val="2AA7B8"/>
+                </a:solidFill>
+                <a:latin typeface="맑은 고딕"/>
+              </a:rPr>
+              <a:t>• </a:t>
+            </a:r>
+            <a:r>
+              <a:rPr sz="1800" b="0">
+                <a:solidFill>
+                  <a:srgbClr val="222222"/>
+                </a:solidFill>
+                <a:latin typeface="맑은 고딕"/>
+              </a:rPr>
+              <a:t>강건성 시험은 </a:t>
+            </a:r>
+            <a:r>
+              <a:rPr sz="1800" b="1">
+                <a:solidFill>
+                  <a:srgbClr val="222222"/>
+                </a:solidFill>
+                <a:latin typeface="맑은 고딕"/>
+              </a:rPr>
+              <a:t>test 이미지</a:t>
+            </a:r>
+            <a:r>
+              <a:rPr sz="1800" b="0">
+                <a:solidFill>
+                  <a:srgbClr val="222222"/>
+                </a:solidFill>
+                <a:latin typeface="맑은 고딕"/>
+              </a:rPr>
+              <a:t>로 먼저 수행했다. 모델 선정에는 val 지표만 썼지만, 선정 근거로 쓰려면 val로 반복해야 한다</a:t>
+            </a:r>
+          </a:p>
+          <a:p>
+            <a:pPr>
+              <a:spcAft>
+                <a:spcPts val="1100"/>
+              </a:spcAft>
+            </a:pPr>
+            <a:r>
+              <a:rPr sz="1800" b="1">
+                <a:solidFill>
+                  <a:srgbClr val="2AA7B8"/>
+                </a:solidFill>
+                <a:latin typeface="맑은 고딕"/>
+              </a:rPr>
+              <a:t>• </a:t>
+            </a:r>
+            <a:r>
+              <a:rPr sz="1800" b="0">
+                <a:solidFill>
+                  <a:srgbClr val="222222"/>
+                </a:solidFill>
+                <a:latin typeface="맑은 고딕"/>
+              </a:rPr>
+              <a:t>'미탐지 우선'이라는 우선순위는 결과를 본 뒤 정했다. 오경보 우선이면 선정이 바뀐다</a:t>
+            </a:r>
+          </a:p>
+          <a:p>
+            <a:pPr>
+              <a:spcAft>
+                <a:spcPts val="1100"/>
+              </a:spcAft>
+            </a:pPr>
+            <a:r>
+              <a:rPr sz="1800" b="1">
+                <a:solidFill>
+                  <a:srgbClr val="2AA7B8"/>
+                </a:solidFill>
+                <a:latin typeface="맑은 고딕"/>
+              </a:rPr>
+              <a:t>• </a:t>
+            </a:r>
+            <a:r>
+              <a:rPr sz="1800" b="0">
+                <a:solidFill>
+                  <a:srgbClr val="222222"/>
+                </a:solidFill>
+                <a:latin typeface="맑은 고딕"/>
+              </a:rPr>
+              <a:t>표시(색 사각형) 제거의 </a:t>
+            </a:r>
+            <a:r>
+              <a:rPr sz="1800" b="1">
+                <a:solidFill>
+                  <a:srgbClr val="222222"/>
+                </a:solidFill>
+                <a:latin typeface="맑은 고딕"/>
+              </a:rPr>
+              <a:t>흔적</a:t>
+            </a:r>
+            <a:r>
+              <a:rPr sz="1800" b="0">
+                <a:solidFill>
+                  <a:srgbClr val="222222"/>
+                </a:solidFill>
+                <a:latin typeface="맑은 고딕"/>
+              </a:rPr>
+              <a:t>이 단서가 되는지는 검증하지 못했다</a:t>
+            </a:r>
+          </a:p>
+          <a:p>
+            <a:pPr>
+              <a:spcAft>
+                <a:spcPts val="1100"/>
+              </a:spcAft>
+            </a:pPr>
+            <a:r>
+              <a:rPr sz="1800" b="1">
+                <a:solidFill>
+                  <a:srgbClr val="2AA7B8"/>
+                </a:solidFill>
+                <a:latin typeface="맑은 고딕"/>
+              </a:rPr>
+              <a:t>• </a:t>
+            </a:r>
+            <a:r>
+              <a:rPr sz="1800" b="0">
+                <a:solidFill>
+                  <a:srgbClr val="222222"/>
+                </a:solidFill>
+                <a:latin typeface="맑은 고딕"/>
+              </a:rPr>
+              <a:t>학습 시드가 하나이고, 팀원 모델은 학습 조건이 우리와 다르다(임계값은 우리 규칙으로 재선정)</a:t>
+            </a:r>
+          </a:p>
+          <a:p>
+            <a:pPr>
+              <a:spcAft>
+                <a:spcPts val="1100"/>
+              </a:spcAft>
+            </a:pPr>
+            <a:r>
+              <a:rPr sz="1800" b="1">
+                <a:solidFill>
+                  <a:srgbClr val="2AA7B8"/>
+                </a:solidFill>
+                <a:latin typeface="맑은 고딕"/>
+              </a:rPr>
+              <a:t>• </a:t>
+            </a:r>
+            <a:r>
+              <a:rPr sz="1800" b="0">
+                <a:solidFill>
+                  <a:srgbClr val="222222"/>
+                </a:solidFill>
+                <a:latin typeface="맑은 고딕"/>
+              </a:rPr>
+              <a:t>속도는 노트북에서 측정했고 실행마다 변동이 크다. 현장 장비 사양과 재검사 비용은 알지 못한다</a:t>
+            </a:r>
+          </a:p>
+          <a:p>
+            <a:pPr>
+              <a:spcAft>
+                <a:spcPts val="1100"/>
+              </a:spcAft>
+            </a:pPr>
+            <a:r>
+              <a:rPr sz="1800" b="1">
+                <a:solidFill>
+                  <a:srgbClr val="2AA7B8"/>
+                </a:solidFill>
+                <a:latin typeface="맑은 고딕"/>
+              </a:rPr>
+              <a:t>• </a:t>
+            </a:r>
+            <a:r>
+              <a:rPr sz="1800" b="0">
+                <a:solidFill>
+                  <a:srgbClr val="222222"/>
+                </a:solidFill>
+                <a:latin typeface="맑은 고딕"/>
+              </a:rPr>
+              <a:t>향후: 흔적 검증(원본 BMP 2x2 실험), 실제 정상 제품 이미지 확보, val 반복, 합성 점 대조군(s=0)</a:t>
+            </a:r>
+          </a:p>
+        </p:txBody>
+      </p:sp>
+    </p:spTree>
+  </p:cSld>
+  <p:clrMapOvr>
+    <a:masterClrMapping/>
+  </p:clrMapOvr>
+</p:sld>
+</file>
+
+<file path=ppt/slides/slide32.xml><?xml version="1.0" encoding="utf-8"?>
+<p:sld xmlns:a="http://schemas.openxmlformats.org/drawingml/2006/main" xmlns:p="http://schemas.openxmlformats.org/presentationml/2006/main" xmlns:r="http://schemas.openxmlformats.org/officeDocument/2006/relationships">
+  <p:cSld>
+    <p:spTree>
+      <p:nvGrpSpPr>
+        <p:cNvPr id="1" name=""/>
+        <p:cNvGrpSpPr/>
+        <p:nvPr/>
+      </p:nvGrpSpPr>
+      <p:grpSpPr/>
+      <p:sp>
+        <p:nvSpPr>
+          <p:cNvPr id="2" name="Rectangle 1"/>
+          <p:cNvSpPr/>
+          <p:nvPr/>
+        </p:nvSpPr>
+        <p:spPr>
+          <a:xfrm>
+            <a:off x="0" y="0"/>
+            <a:ext cx="164592" cy="6858000"/>
+          </a:xfrm>
+          <a:prstGeom prst="rect">
+            <a:avLst/>
+          </a:prstGeom>
+          <a:solidFill>
+            <a:srgbClr val="1F3A5F"/>
+          </a:solidFill>
+          <a:ln>
+            <a:noFill/>
+          </a:ln>
+        </p:spPr>
+        <p:style>
+          <a:lnRef idx="1">
+            <a:schemeClr val="accent1"/>
+          </a:lnRef>
+          <a:fillRef idx="3">
+            <a:schemeClr val="accent1"/>
+          </a:fillRef>
+          <a:effectRef idx="2">
+            <a:schemeClr val="accent1"/>
+          </a:effectRef>
+          <a:fontRef idx="minor">
+            <a:schemeClr val="lt1"/>
+          </a:fontRef>
+        </p:style>
+        <p:txBody>
+          <a:bodyPr rtlCol="0" anchor="ctr"/>
+          <a:lstStyle/>
+          <a:p>
+            <a:pPr algn="ctr"/>
+          </a:p>
+        </p:txBody>
+      </p:sp>
+      <p:sp>
+        <p:nvSpPr>
+          <p:cNvPr id="3" name="TextBox 2"/>
+          <p:cNvSpPr txBox="1"/>
+          <p:nvPr/>
+        </p:nvSpPr>
+        <p:spPr>
+          <a:xfrm>
+            <a:off x="502920" y="274320"/>
+            <a:ext cx="11185855" cy="731520"/>
+          </a:xfrm>
+          <a:prstGeom prst="rect">
+            <a:avLst/>
+          </a:prstGeom>
+          <a:noFill/>
+        </p:spPr>
+        <p:txBody>
+          <a:bodyPr wrap="square" anchor="ctr" lIns="45720" rIns="45720">
+            <a:spAutoFit/>
+          </a:bodyPr>
+          <a:lstStyle/>
+          <a:p>
+            <a:pPr algn="l"/>
+            <a:r>
+              <a:rPr sz="2800" b="1">
+                <a:solidFill>
+                  <a:srgbClr val="1F3A5F"/>
+                </a:solidFill>
+                <a:latin typeface="맑은 고딕"/>
+              </a:rPr>
+              <a:t>결론</a:t>
+            </a:r>
+          </a:p>
+        </p:txBody>
+      </p:sp>
+      <p:sp>
+        <p:nvSpPr>
+          <p:cNvPr id="4" name="TextBox 3"/>
+          <p:cNvSpPr txBox="1"/>
+          <p:nvPr/>
+        </p:nvSpPr>
+        <p:spPr>
+          <a:xfrm>
+            <a:off x="11094415" y="6400800"/>
+            <a:ext cx="822960" cy="320040"/>
+          </a:xfrm>
+          <a:prstGeom prst="rect">
+            <a:avLst/>
+          </a:prstGeom>
+          <a:noFill/>
+        </p:spPr>
+        <p:txBody>
+          <a:bodyPr wrap="square" anchor="t" lIns="45720" rIns="45720">
+            <a:spAutoFit/>
+          </a:bodyPr>
+          <a:lstStyle/>
+          <a:p>
+            <a:pPr algn="r"/>
+            <a:r>
+              <a:rPr sz="1200" b="0">
+                <a:solidFill>
+                  <a:srgbClr val="555B66"/>
+                </a:solidFill>
+                <a:latin typeface="맑은 고딕"/>
+              </a:rPr>
+              <a:t>32</a:t>
+            </a:r>
+          </a:p>
+        </p:txBody>
+      </p:sp>
+      <p:sp>
+        <p:nvSpPr>
           <p:cNvPr id="5" name="TextBox 4"/>
           <p:cNvSpPr txBox="1"/>
           <p:nvPr/>
@@ -17096,7 +17748,7 @@
                 </a:solidFill>
                 <a:latin typeface="맑은 고딕"/>
               </a:rPr>
-              <a:t>옅은 결함, 노이즈 무늬 오경보, MobileNetV3의 위치 의존</a:t>
+              <a:t>옅은 결함, 노이즈 무늬 오경보, 위치 의존(MobileNetV3가 가장 크고 YOLO26n·RT-DETR-l도 일부)</a:t>
             </a:r>
           </a:p>
           <a:p>

--- a/ppt/presentation.pptx
+++ b/ppt/presentation.pptx
@@ -14844,7 +14844,7 @@
                           </a:solidFill>
                           <a:latin typeface="맑은 고딕"/>
                         </a:rPr>
-                        <a:t>CPU 4스레드 약 70ms(6개 중 가장 빠름), 정확도 손실이 작음</a:t>
+                        <a:t>CPU 4스레드 약 15 FPS(6개 중 가장 빠름), GPU FP16에서 258 FPS, 정확도 손실이 작음</a:t>
                       </a:r>
                     </a:p>
                   </a:txBody>
@@ -14940,7 +14940,7 @@
         </p:nvGraphicFramePr>
         <p:xfrm>
           <a:off x="548640" y="4572000"/>
-          <a:ext cx="11064237" cy="1645920"/>
+          <a:ext cx="11064235" cy="1645920"/>
         </p:xfrm>
         <a:graphic>
           <a:graphicData uri="http://schemas.openxmlformats.org/drawingml/2006/table">
@@ -14949,13 +14949,13 @@
                 <a:tableStyleId>{5C22544A-7EE6-4342-B048-85BDC9FD1C3A}</a:tableStyleId>
               </a:tblPr>
               <a:tblGrid>
-                <a:gridCol w="2545754"/>
-                <a:gridCol w="1468704"/>
-                <a:gridCol w="1468704"/>
-                <a:gridCol w="1174963"/>
-                <a:gridCol w="1468704"/>
-                <a:gridCol w="1468704"/>
-                <a:gridCol w="1468704"/>
+                <a:gridCol w="2479915"/>
+                <a:gridCol w="1430720"/>
+                <a:gridCol w="1430720"/>
+                <a:gridCol w="1430720"/>
+                <a:gridCol w="1430720"/>
+                <a:gridCol w="1430720"/>
+                <a:gridCol w="1430720"/>
               </a:tblGrid>
               <a:tr h="329184">
                 <a:tc>
@@ -14971,7 +14971,7 @@
                           </a:solidFill>
                           <a:latin typeface="맑은 고딕"/>
                         </a:rPr>
-                        <a:t>처리 속도 (이미지 1장, ms)</a:t>
+                        <a:t>처리 속도 FPS (3회 중 최고)</a:t>
                       </a:r>
                     </a:p>
                   </a:txBody>
@@ -15017,6 +15017,29 @@
                           </a:solidFill>
                           <a:latin typeface="맑은 고딕"/>
                         </a:rPr>
+                        <a:t>YOLO26n</a:t>
+                      </a:r>
+                    </a:p>
+                  </a:txBody>
+                  <a:tcPr anchor="ctr" marL="54864" marR="54864">
+                    <a:solidFill>
+                      <a:srgbClr val="1F3A5F"/>
+                    </a:solidFill>
+                  </a:tcPr>
+                </a:tc>
+                <a:tc>
+                  <a:txBody>
+                    <a:bodyPr/>
+                    <a:lstStyle/>
+                    <a:p>
+                      <a:pPr algn="ctr"/>
+                      <a:r>
+                        <a:rPr sz="1300" b="1">
+                          <a:solidFill>
+                            <a:srgbClr val="FFFFFF"/>
+                          </a:solidFill>
+                          <a:latin typeface="맑은 고딕"/>
+                        </a:rPr>
                         <a:t>MobileNetV3</a:t>
                       </a:r>
                     </a:p>
@@ -15040,76 +15063,53 @@
                           </a:solidFill>
                           <a:latin typeface="맑은 고딕"/>
                         </a:rPr>
+                        <a:t>D-FINE-N</a:t>
+                      </a:r>
+                    </a:p>
+                  </a:txBody>
+                  <a:tcPr anchor="ctr" marL="54864" marR="54864">
+                    <a:solidFill>
+                      <a:srgbClr val="1F3A5F"/>
+                    </a:solidFill>
+                  </a:tcPr>
+                </a:tc>
+                <a:tc>
+                  <a:txBody>
+                    <a:bodyPr/>
+                    <a:lstStyle/>
+                    <a:p>
+                      <a:pPr algn="ctr"/>
+                      <a:r>
+                        <a:rPr sz="1300" b="1">
+                          <a:solidFill>
+                            <a:srgbClr val="FFFFFF"/>
+                          </a:solidFill>
+                          <a:latin typeface="맑은 고딕"/>
+                        </a:rPr>
+                        <a:t>RT-DETR-l</a:t>
+                      </a:r>
+                    </a:p>
+                  </a:txBody>
+                  <a:tcPr anchor="ctr" marL="54864" marR="54864">
+                    <a:solidFill>
+                      <a:srgbClr val="1F3A5F"/>
+                    </a:solidFill>
+                  </a:tcPr>
+                </a:tc>
+                <a:tc>
+                  <a:txBody>
+                    <a:bodyPr/>
+                    <a:lstStyle/>
+                    <a:p>
+                      <a:pPr algn="ctr"/>
+                      <a:r>
+                        <a:rPr sz="1300" b="1">
+                          <a:solidFill>
+                            <a:srgbClr val="FFFFFF"/>
+                          </a:solidFill>
+                          <a:latin typeface="맑은 고딕"/>
+                        </a:rPr>
                         <a:t>R50</a:t>
-                      </a:r>
-                    </a:p>
-                  </a:txBody>
-                  <a:tcPr anchor="ctr" marL="54864" marR="54864">
-                    <a:solidFill>
-                      <a:srgbClr val="1F3A5F"/>
-                    </a:solidFill>
-                  </a:tcPr>
-                </a:tc>
-                <a:tc>
-                  <a:txBody>
-                    <a:bodyPr/>
-                    <a:lstStyle/>
-                    <a:p>
-                      <a:pPr algn="ctr"/>
-                      <a:r>
-                        <a:rPr sz="1300" b="1">
-                          <a:solidFill>
-                            <a:srgbClr val="FFFFFF"/>
-                          </a:solidFill>
-                          <a:latin typeface="맑은 고딕"/>
-                        </a:rPr>
-                        <a:t>D-FINE-N</a:t>
-                      </a:r>
-                    </a:p>
-                  </a:txBody>
-                  <a:tcPr anchor="ctr" marL="54864" marR="54864">
-                    <a:solidFill>
-                      <a:srgbClr val="1F3A5F"/>
-                    </a:solidFill>
-                  </a:tcPr>
-                </a:tc>
-                <a:tc>
-                  <a:txBody>
-                    <a:bodyPr/>
-                    <a:lstStyle/>
-                    <a:p>
-                      <a:pPr algn="ctr"/>
-                      <a:r>
-                        <a:rPr sz="1300" b="1">
-                          <a:solidFill>
-                            <a:srgbClr val="FFFFFF"/>
-                          </a:solidFill>
-                          <a:latin typeface="맑은 고딕"/>
-                        </a:rPr>
-                        <a:t>YOLO26n</a:t>
-                      </a:r>
-                    </a:p>
-                  </a:txBody>
-                  <a:tcPr anchor="ctr" marL="54864" marR="54864">
-                    <a:solidFill>
-                      <a:srgbClr val="1F3A5F"/>
-                    </a:solidFill>
-                  </a:tcPr>
-                </a:tc>
-                <a:tc>
-                  <a:txBody>
-                    <a:bodyPr/>
-                    <a:lstStyle/>
-                    <a:p>
-                      <a:pPr algn="ctr"/>
-                      <a:r>
-                        <a:rPr sz="1300" b="1">
-                          <a:solidFill>
-                            <a:srgbClr val="FFFFFF"/>
-                          </a:solidFill>
-                          <a:latin typeface="맑은 고딕"/>
-                        </a:rPr>
-                        <a:t>RT-DETR-l</a:t>
                       </a:r>
                     </a:p>
                   </a:txBody>
@@ -15134,7 +15134,7 @@
                           </a:solidFill>
                           <a:latin typeface="맑은 고딕"/>
                         </a:rPr>
-                        <a:t>GPU</a:t>
+                        <a:t>GPU FP32</a:t>
                       </a:r>
                     </a:p>
                   </a:txBody>
@@ -15157,7 +15157,7 @@
                           </a:solidFill>
                           <a:latin typeface="맑은 고딕"/>
                         </a:rPr>
-                        <a:t>4.7</a:t>
+                        <a:t>207</a:t>
                       </a:r>
                     </a:p>
                   </a:txBody>
@@ -15180,7 +15180,7 @@
                           </a:solidFill>
                           <a:latin typeface="맑은 고딕"/>
                         </a:rPr>
-                        <a:t>10.0~11.5</a:t>
+                        <a:t>104</a:t>
                       </a:r>
                     </a:p>
                   </a:txBody>
@@ -15203,7 +15203,7 @@
                           </a:solidFill>
                           <a:latin typeface="맑은 고딕"/>
                         </a:rPr>
-                        <a:t>46~47</a:t>
+                        <a:t>102</a:t>
                       </a:r>
                     </a:p>
                   </a:txBody>
@@ -15226,7 +15226,7 @@
                           </a:solidFill>
                           <a:latin typeface="맑은 고딕"/>
                         </a:rPr>
-                        <a:t>21</a:t>
+                        <a:t>48</a:t>
                       </a:r>
                     </a:p>
                   </a:txBody>
@@ -15249,7 +15249,7 @@
                           </a:solidFill>
                           <a:latin typeface="맑은 고딕"/>
                         </a:rPr>
-                        <a:t>8.9~9.6</a:t>
+                        <a:t>32</a:t>
                       </a:r>
                     </a:p>
                   </a:txBody>
@@ -15272,7 +15272,7 @@
                           </a:solidFill>
                           <a:latin typeface="맑은 고딕"/>
                         </a:rPr>
-                        <a:t>29~30</a:t>
+                        <a:t>20</a:t>
                       </a:r>
                     </a:p>
                   </a:txBody>
@@ -15297,7 +15297,7 @@
                           </a:solidFill>
                           <a:latin typeface="맑은 고딕"/>
                         </a:rPr>
-                        <a:t>CPU 1스레드</a:t>
+                        <a:t>GPU FP16</a:t>
                       </a:r>
                     </a:p>
                   </a:txBody>
@@ -15320,7 +15320,7 @@
                           </a:solidFill>
                           <a:latin typeface="맑은 고딕"/>
                         </a:rPr>
-                        <a:t>79~159</a:t>
+                        <a:t>258</a:t>
                       </a:r>
                     </a:p>
                   </a:txBody>
@@ -15343,7 +15343,7 @@
                           </a:solidFill>
                           <a:latin typeface="맑은 고딕"/>
                         </a:rPr>
-                        <a:t>119~122</a:t>
+                        <a:t>92</a:t>
                       </a:r>
                     </a:p>
                   </a:txBody>
@@ -15366,7 +15366,7 @@
                           </a:solidFill>
                           <a:latin typeface="맑은 고딕"/>
                         </a:rPr>
-                        <a:t>1,020~1,858</a:t>
+                        <a:t>88</a:t>
                       </a:r>
                     </a:p>
                   </a:txBody>
@@ -15389,7 +15389,7 @@
                           </a:solidFill>
                           <a:latin typeface="맑은 고딕"/>
                         </a:rPr>
-                        <a:t>130~155</a:t>
+                        <a:t>42</a:t>
                       </a:r>
                     </a:p>
                   </a:txBody>
@@ -15412,7 +15412,7 @@
                           </a:solidFill>
                           <a:latin typeface="맑은 고딕"/>
                         </a:rPr>
-                        <a:t>99~126</a:t>
+                        <a:t>43</a:t>
                       </a:r>
                     </a:p>
                   </a:txBody>
@@ -15435,7 +15435,7 @@
                           </a:solidFill>
                           <a:latin typeface="맑은 고딕"/>
                         </a:rPr>
-                        <a:t>530~597</a:t>
+                        <a:t>35</a:t>
                       </a:r>
                     </a:p>
                   </a:txBody>
@@ -15483,7 +15483,7 @@
                           </a:solidFill>
                           <a:latin typeface="맑은 고딕"/>
                         </a:rPr>
-                        <a:t>68~75</a:t>
+                        <a:t>15</a:t>
                       </a:r>
                     </a:p>
                   </a:txBody>
@@ -15506,7 +15506,7 @@
                           </a:solidFill>
                           <a:latin typeface="맑은 고딕"/>
                         </a:rPr>
-                        <a:t>75~88</a:t>
+                        <a:t>9.2</a:t>
                       </a:r>
                     </a:p>
                   </a:txBody>
@@ -15529,7 +15529,7 @@
                           </a:solidFill>
                           <a:latin typeface="맑은 고딕"/>
                         </a:rPr>
-                        <a:t>981</a:t>
+                        <a:t>10</a:t>
                       </a:r>
                     </a:p>
                   </a:txBody>
@@ -15552,7 +15552,7 @@
                           </a:solidFill>
                           <a:latin typeface="맑은 고딕"/>
                         </a:rPr>
-                        <a:t>100~113</a:t>
+                        <a:t>9.7</a:t>
                       </a:r>
                     </a:p>
                   </a:txBody>
@@ -15575,7 +15575,7 @@
                           </a:solidFill>
                           <a:latin typeface="맑은 고딕"/>
                         </a:rPr>
-                        <a:t>86~110</a:t>
+                        <a:t>2.0</a:t>
                       </a:r>
                     </a:p>
                   </a:txBody>
@@ -15598,7 +15598,7 @@
                           </a:solidFill>
                           <a:latin typeface="맑은 고딕"/>
                         </a:rPr>
-                        <a:t>465~549</a:t>
+                        <a:t>0.9</a:t>
                       </a:r>
                     </a:p>
                   </a:txBody>
@@ -15623,7 +15623,7 @@
                           </a:solidFill>
                           <a:latin typeface="맑은 고딕"/>
                         </a:rPr>
-                        <a:t>CPU 16스레드</a:t>
+                        <a:t>CPU 1스레드</a:t>
                       </a:r>
                     </a:p>
                   </a:txBody>
@@ -15646,7 +15646,7 @@
                           </a:solidFill>
                           <a:latin typeface="맑은 고딕"/>
                         </a:rPr>
-                        <a:t>64~66</a:t>
+                        <a:t>6.5</a:t>
                       </a:r>
                     </a:p>
                   </a:txBody>
@@ -15669,7 +15669,7 @@
                           </a:solidFill>
                           <a:latin typeface="맑은 고딕"/>
                         </a:rPr>
-                        <a:t>95~98</a:t>
+                        <a:t>11</a:t>
                       </a:r>
                     </a:p>
                   </a:txBody>
@@ -15692,7 +15692,7 @@
                           </a:solidFill>
                           <a:latin typeface="맑은 고딕"/>
                         </a:rPr>
-                        <a:t>838~853</a:t>
+                        <a:t>8.4</a:t>
                       </a:r>
                     </a:p>
                   </a:txBody>
@@ -15715,7 +15715,7 @@
                           </a:solidFill>
                           <a:latin typeface="맑은 고딕"/>
                         </a:rPr>
-                        <a:t>133~134</a:t>
+                        <a:t>7.4</a:t>
                       </a:r>
                     </a:p>
                   </a:txBody>
@@ -15738,7 +15738,7 @@
                           </a:solidFill>
                           <a:latin typeface="맑은 고딕"/>
                         </a:rPr>
-                        <a:t>102~103</a:t>
+                        <a:t>2.0</a:t>
                       </a:r>
                     </a:p>
                   </a:txBody>
@@ -15761,7 +15761,7 @@
                           </a:solidFill>
                           <a:latin typeface="맑은 고딕"/>
                         </a:rPr>
-                        <a:t>464~471</a:t>
+                        <a:t>1.1</a:t>
                       </a:r>
                     </a:p>
                   </a:txBody>
@@ -15806,7 +15806,7 @@
                 </a:solidFill>
                 <a:latin typeface="맑은 고딕"/>
               </a:rPr>
-              <a:t>6개 모델을 같은 스크립트·같은 조건(전처리 제외, 모델 연산+후처리, 배치 1, fp32)으로 2회 반복해 잰 중앙값의 범위. GPU는 안정적(±1ms), CPU는 패스마다 크게 변동. 현장 장비 사양은 알지 못한다.</a:t>
+              <a:t>같은 조건(전처리 제외, 모델 연산+후처리, 배치 1)으로 3회 재어 최고값 사용. GPU FP32는 3회 ±15% 이내로 안정적, GPU FP16·CPU는 뒤쪽 패스에서 열·전력 제한으로 최대 11배 느려졌다. FP16은 가중치·입력을 half로 바꿨고 정확도(F1)는 재지 않았다.</a:t>
             </a:r>
           </a:p>
         </p:txBody>
